--- a/03-build/pptx/C5_U0_docente.pptx
+++ b/03-build/pptx/C5_U0_docente.pptx
@@ -10982,6 +10982,70 @@
         </p:nvSpPr>
         <p:spPr>
           <a:xfrm>
+            <a:off x="1325880" y="1965960"/>
+            <a:ext cx="2606040" cy="310896"/>
+          </a:xfrm>
+          <a:prstGeom prst="roundRect">
+            <a:avLst>
+              <a:gd name="adj" fmla="val 50000"/>
+            </a:avLst>
+          </a:prstGeom>
+          <a:solidFill>
+            <a:srgbClr val="1E9E74"/>
+          </a:solidFill>
+          <a:ln w="12700">
+            <a:solidFill>
+              <a:srgbClr val="157355"/>
+            </a:solidFill>
+          </a:ln>
+          <a:effectLst/>
+          <a:effectLst>
+            <a:outerShdw blurRad="90000" dist="38000" dir="5400000" rotWithShape="0">
+              <a:srgbClr val="20242E">
+                <a:alpha val="22000"/>
+              </a:srgbClr>
+            </a:outerShdw>
+          </a:effectLst>
+        </p:spPr>
+        <p:style>
+          <a:lnRef idx="1">
+            <a:schemeClr val="accent1"/>
+          </a:lnRef>
+          <a:fillRef idx="3">
+            <a:schemeClr val="accent1"/>
+          </a:fillRef>
+          <a:effectRef idx="2">
+            <a:schemeClr val="accent1"/>
+          </a:effectRef>
+          <a:fontRef idx="minor">
+            <a:schemeClr val="lt1"/>
+          </a:fontRef>
+        </p:style>
+        <p:txBody>
+          <a:bodyPr rtlCol="0" anchor="ctr" wrap="none" lIns="88900" rIns="88900" tIns="12700" bIns="12700"/>
+          <a:lstStyle/>
+          <a:p>
+            <a:pPr algn="ctr"/>
+            <a:r>
+              <a:rPr sz="1100" b="1">
+                <a:solidFill>
+                  <a:srgbClr val="FFFFFF"/>
+                </a:solidFill>
+                <a:latin typeface="Inter"/>
+              </a:rPr>
+              <a:t>✓ dieciocho</a:t>
+            </a:r>
+          </a:p>
+        </p:txBody>
+      </p:sp>
+      <p:sp>
+        <p:nvSpPr>
+          <p:cNvPr id="13" name="Rounded Rectangle 12"/>
+          <p:cNvSpPr/>
+          <p:nvPr/>
+        </p:nvSpPr>
+        <p:spPr>
+          <a:xfrm>
             <a:off x="4251960" y="1463040"/>
             <a:ext cx="3611880" cy="914400"/>
           </a:xfrm>
@@ -11031,7 +11095,7 @@
       </p:sp>
       <p:sp>
         <p:nvSpPr>
-          <p:cNvPr id="13" name="Rounded Rectangle 12"/>
+          <p:cNvPr id="14" name="Rounded Rectangle 13"/>
           <p:cNvSpPr/>
           <p:nvPr/>
         </p:nvSpPr>
@@ -11077,7 +11141,7 @@
       </p:sp>
       <p:sp>
         <p:nvSpPr>
-          <p:cNvPr id="14" name="TextBox 13"/>
+          <p:cNvPr id="15" name="TextBox 14"/>
           <p:cNvSpPr txBox="1"/>
           <p:nvPr/>
         </p:nvSpPr>
@@ -11122,7 +11186,7 @@
       </p:sp>
       <p:sp>
         <p:nvSpPr>
-          <p:cNvPr id="15" name="TextBox 14"/>
+          <p:cNvPr id="16" name="TextBox 15"/>
           <p:cNvSpPr txBox="1"/>
           <p:nvPr/>
         </p:nvSpPr>
@@ -11167,7 +11231,71 @@
       </p:sp>
       <p:sp>
         <p:nvSpPr>
-          <p:cNvPr id="16" name="Rounded Rectangle 15"/>
+          <p:cNvPr id="17" name="Rounded Rectangle 16"/>
+          <p:cNvSpPr/>
+          <p:nvPr/>
+        </p:nvSpPr>
+        <p:spPr>
+          <a:xfrm>
+            <a:off x="5120640" y="1965960"/>
+            <a:ext cx="2606040" cy="310896"/>
+          </a:xfrm>
+          <a:prstGeom prst="roundRect">
+            <a:avLst>
+              <a:gd name="adj" fmla="val 50000"/>
+            </a:avLst>
+          </a:prstGeom>
+          <a:solidFill>
+            <a:srgbClr val="1E9E74"/>
+          </a:solidFill>
+          <a:ln w="12700">
+            <a:solidFill>
+              <a:srgbClr val="157355"/>
+            </a:solidFill>
+          </a:ln>
+          <a:effectLst/>
+          <a:effectLst>
+            <a:outerShdw blurRad="90000" dist="38000" dir="5400000" rotWithShape="0">
+              <a:srgbClr val="20242E">
+                <a:alpha val="22000"/>
+              </a:srgbClr>
+            </a:outerShdw>
+          </a:effectLst>
+        </p:spPr>
+        <p:style>
+          <a:lnRef idx="1">
+            <a:schemeClr val="accent1"/>
+          </a:lnRef>
+          <a:fillRef idx="3">
+            <a:schemeClr val="accent1"/>
+          </a:fillRef>
+          <a:effectRef idx="2">
+            <a:schemeClr val="accent1"/>
+          </a:effectRef>
+          <a:fontRef idx="minor">
+            <a:schemeClr val="lt1"/>
+          </a:fontRef>
+        </p:style>
+        <p:txBody>
+          <a:bodyPr rtlCol="0" anchor="ctr" wrap="none" lIns="88900" rIns="88900" tIns="12700" bIns="12700"/>
+          <a:lstStyle/>
+          <a:p>
+            <a:pPr algn="ctr"/>
+            <a:r>
+              <a:rPr sz="1100" b="1">
+                <a:solidFill>
+                  <a:srgbClr val="FFFFFF"/>
+                </a:solidFill>
+                <a:latin typeface="Inter"/>
+              </a:rPr>
+              <a:t>✓ veinticuatro</a:t>
+            </a:r>
+          </a:p>
+        </p:txBody>
+      </p:sp>
+      <p:sp>
+        <p:nvSpPr>
+          <p:cNvPr id="18" name="Rounded Rectangle 17"/>
           <p:cNvSpPr/>
           <p:nvPr/>
         </p:nvSpPr>
@@ -11222,7 +11350,7 @@
       </p:sp>
       <p:sp>
         <p:nvSpPr>
-          <p:cNvPr id="17" name="Rounded Rectangle 16"/>
+          <p:cNvPr id="19" name="Rounded Rectangle 18"/>
           <p:cNvSpPr/>
           <p:nvPr/>
         </p:nvSpPr>
@@ -11268,7 +11396,7 @@
       </p:sp>
       <p:sp>
         <p:nvSpPr>
-          <p:cNvPr id="18" name="TextBox 17"/>
+          <p:cNvPr id="20" name="TextBox 19"/>
           <p:cNvSpPr txBox="1"/>
           <p:nvPr/>
         </p:nvSpPr>
@@ -11313,7 +11441,7 @@
       </p:sp>
       <p:sp>
         <p:nvSpPr>
-          <p:cNvPr id="19" name="TextBox 18"/>
+          <p:cNvPr id="21" name="TextBox 20"/>
           <p:cNvSpPr txBox="1"/>
           <p:nvPr/>
         </p:nvSpPr>
@@ -11358,7 +11486,71 @@
       </p:sp>
       <p:sp>
         <p:nvSpPr>
-          <p:cNvPr id="20" name="Rounded Rectangle 19"/>
+          <p:cNvPr id="22" name="Rounded Rectangle 21"/>
+          <p:cNvSpPr/>
+          <p:nvPr/>
+        </p:nvSpPr>
+        <p:spPr>
+          <a:xfrm>
+            <a:off x="8915400" y="1965960"/>
+            <a:ext cx="2606040" cy="310896"/>
+          </a:xfrm>
+          <a:prstGeom prst="roundRect">
+            <a:avLst>
+              <a:gd name="adj" fmla="val 50000"/>
+            </a:avLst>
+          </a:prstGeom>
+          <a:solidFill>
+            <a:srgbClr val="1E9E74"/>
+          </a:solidFill>
+          <a:ln w="12700">
+            <a:solidFill>
+              <a:srgbClr val="157355"/>
+            </a:solidFill>
+          </a:ln>
+          <a:effectLst/>
+          <a:effectLst>
+            <a:outerShdw blurRad="90000" dist="38000" dir="5400000" rotWithShape="0">
+              <a:srgbClr val="20242E">
+                <a:alpha val="22000"/>
+              </a:srgbClr>
+            </a:outerShdw>
+          </a:effectLst>
+        </p:spPr>
+        <p:style>
+          <a:lnRef idx="1">
+            <a:schemeClr val="accent1"/>
+          </a:lnRef>
+          <a:fillRef idx="3">
+            <a:schemeClr val="accent1"/>
+          </a:fillRef>
+          <a:effectRef idx="2">
+            <a:schemeClr val="accent1"/>
+          </a:effectRef>
+          <a:fontRef idx="minor">
+            <a:schemeClr val="lt1"/>
+          </a:fontRef>
+        </p:style>
+        <p:txBody>
+          <a:bodyPr rtlCol="0" anchor="ctr" wrap="none" lIns="88900" rIns="88900" tIns="12700" bIns="12700"/>
+          <a:lstStyle/>
+          <a:p>
+            <a:pPr algn="ctr"/>
+            <a:r>
+              <a:rPr sz="1100" b="1">
+                <a:solidFill>
+                  <a:srgbClr val="FFFFFF"/>
+                </a:solidFill>
+                <a:latin typeface="Inter"/>
+              </a:rPr>
+              <a:t>✓ cincuenta y tres</a:t>
+            </a:r>
+          </a:p>
+        </p:txBody>
+      </p:sp>
+      <p:sp>
+        <p:nvSpPr>
+          <p:cNvPr id="23" name="Rounded Rectangle 22"/>
           <p:cNvSpPr/>
           <p:nvPr/>
         </p:nvSpPr>
@@ -11413,7 +11605,7 @@
       </p:sp>
       <p:sp>
         <p:nvSpPr>
-          <p:cNvPr id="21" name="Rounded Rectangle 20"/>
+          <p:cNvPr id="24" name="Rounded Rectangle 23"/>
           <p:cNvSpPr/>
           <p:nvPr/>
         </p:nvSpPr>
@@ -11459,7 +11651,7 @@
       </p:sp>
       <p:sp>
         <p:nvSpPr>
-          <p:cNvPr id="22" name="TextBox 21"/>
+          <p:cNvPr id="25" name="TextBox 24"/>
           <p:cNvSpPr txBox="1"/>
           <p:nvPr/>
         </p:nvSpPr>
@@ -11504,7 +11696,7 @@
       </p:sp>
       <p:sp>
         <p:nvSpPr>
-          <p:cNvPr id="23" name="TextBox 22"/>
+          <p:cNvPr id="26" name="TextBox 25"/>
           <p:cNvSpPr txBox="1"/>
           <p:nvPr/>
         </p:nvSpPr>
@@ -11549,7 +11741,71 @@
       </p:sp>
       <p:sp>
         <p:nvSpPr>
-          <p:cNvPr id="24" name="Rounded Rectangle 23"/>
+          <p:cNvPr id="27" name="Rounded Rectangle 26"/>
+          <p:cNvSpPr/>
+          <p:nvPr/>
+        </p:nvSpPr>
+        <p:spPr>
+          <a:xfrm>
+            <a:off x="1325880" y="3081528"/>
+            <a:ext cx="2606040" cy="310896"/>
+          </a:xfrm>
+          <a:prstGeom prst="roundRect">
+            <a:avLst>
+              <a:gd name="adj" fmla="val 50000"/>
+            </a:avLst>
+          </a:prstGeom>
+          <a:solidFill>
+            <a:srgbClr val="1E9E74"/>
+          </a:solidFill>
+          <a:ln w="12700">
+            <a:solidFill>
+              <a:srgbClr val="157355"/>
+            </a:solidFill>
+          </a:ln>
+          <a:effectLst/>
+          <a:effectLst>
+            <a:outerShdw blurRad="90000" dist="38000" dir="5400000" rotWithShape="0">
+              <a:srgbClr val="20242E">
+                <a:alpha val="22000"/>
+              </a:srgbClr>
+            </a:outerShdw>
+          </a:effectLst>
+        </p:spPr>
+        <p:style>
+          <a:lnRef idx="1">
+            <a:schemeClr val="accent1"/>
+          </a:lnRef>
+          <a:fillRef idx="3">
+            <a:schemeClr val="accent1"/>
+          </a:fillRef>
+          <a:effectRef idx="2">
+            <a:schemeClr val="accent1"/>
+          </a:effectRef>
+          <a:fontRef idx="minor">
+            <a:schemeClr val="lt1"/>
+          </a:fontRef>
+        </p:style>
+        <p:txBody>
+          <a:bodyPr rtlCol="0" anchor="ctr" wrap="none" lIns="88900" rIns="88900" tIns="12700" bIns="12700"/>
+          <a:lstStyle/>
+          <a:p>
+            <a:pPr algn="ctr"/>
+            <a:r>
+              <a:rPr sz="1100" b="1">
+                <a:solidFill>
+                  <a:srgbClr val="FFFFFF"/>
+                </a:solidFill>
+                <a:latin typeface="Inter"/>
+              </a:rPr>
+              <a:t>✓ setenta y uno</a:t>
+            </a:r>
+          </a:p>
+        </p:txBody>
+      </p:sp>
+      <p:sp>
+        <p:nvSpPr>
+          <p:cNvPr id="28" name="Rounded Rectangle 27"/>
           <p:cNvSpPr/>
           <p:nvPr/>
         </p:nvSpPr>
@@ -11604,7 +11860,7 @@
       </p:sp>
       <p:sp>
         <p:nvSpPr>
-          <p:cNvPr id="25" name="Rounded Rectangle 24"/>
+          <p:cNvPr id="29" name="Rounded Rectangle 28"/>
           <p:cNvSpPr/>
           <p:nvPr/>
         </p:nvSpPr>
@@ -11650,7 +11906,7 @@
       </p:sp>
       <p:sp>
         <p:nvSpPr>
-          <p:cNvPr id="26" name="TextBox 25"/>
+          <p:cNvPr id="30" name="TextBox 29"/>
           <p:cNvSpPr txBox="1"/>
           <p:nvPr/>
         </p:nvSpPr>
@@ -11695,7 +11951,7 @@
       </p:sp>
       <p:sp>
         <p:nvSpPr>
-          <p:cNvPr id="27" name="TextBox 26"/>
+          <p:cNvPr id="31" name="TextBox 30"/>
           <p:cNvSpPr txBox="1"/>
           <p:nvPr/>
         </p:nvSpPr>
@@ -11740,7 +11996,71 @@
       </p:sp>
       <p:sp>
         <p:nvSpPr>
-          <p:cNvPr id="28" name="Rounded Rectangle 27"/>
+          <p:cNvPr id="32" name="Rounded Rectangle 31"/>
+          <p:cNvSpPr/>
+          <p:nvPr/>
+        </p:nvSpPr>
+        <p:spPr>
+          <a:xfrm>
+            <a:off x="5120640" y="3081528"/>
+            <a:ext cx="2606040" cy="310896"/>
+          </a:xfrm>
+          <a:prstGeom prst="roundRect">
+            <a:avLst>
+              <a:gd name="adj" fmla="val 50000"/>
+            </a:avLst>
+          </a:prstGeom>
+          <a:solidFill>
+            <a:srgbClr val="1E9E74"/>
+          </a:solidFill>
+          <a:ln w="12700">
+            <a:solidFill>
+              <a:srgbClr val="157355"/>
+            </a:solidFill>
+          </a:ln>
+          <a:effectLst/>
+          <a:effectLst>
+            <a:outerShdw blurRad="90000" dist="38000" dir="5400000" rotWithShape="0">
+              <a:srgbClr val="20242E">
+                <a:alpha val="22000"/>
+              </a:srgbClr>
+            </a:outerShdw>
+          </a:effectLst>
+        </p:spPr>
+        <p:style>
+          <a:lnRef idx="1">
+            <a:schemeClr val="accent1"/>
+          </a:lnRef>
+          <a:fillRef idx="3">
+            <a:schemeClr val="accent1"/>
+          </a:fillRef>
+          <a:effectRef idx="2">
+            <a:schemeClr val="accent1"/>
+          </a:effectRef>
+          <a:fontRef idx="minor">
+            <a:schemeClr val="lt1"/>
+          </a:fontRef>
+        </p:style>
+        <p:txBody>
+          <a:bodyPr rtlCol="0" anchor="ctr" wrap="none" lIns="88900" rIns="88900" tIns="12700" bIns="12700"/>
+          <a:lstStyle/>
+          <a:p>
+            <a:pPr algn="ctr"/>
+            <a:r>
+              <a:rPr sz="1100" b="1">
+                <a:solidFill>
+                  <a:srgbClr val="FFFFFF"/>
+                </a:solidFill>
+                <a:latin typeface="Inter"/>
+              </a:rPr>
+              <a:t>✓ noventa y seis</a:t>
+            </a:r>
+          </a:p>
+        </p:txBody>
+      </p:sp>
+      <p:sp>
+        <p:nvSpPr>
+          <p:cNvPr id="33" name="Rounded Rectangle 32"/>
           <p:cNvSpPr/>
           <p:nvPr/>
         </p:nvSpPr>
@@ -11795,7 +12115,7 @@
       </p:sp>
       <p:sp>
         <p:nvSpPr>
-          <p:cNvPr id="29" name="Rounded Rectangle 28"/>
+          <p:cNvPr id="34" name="Rounded Rectangle 33"/>
           <p:cNvSpPr/>
           <p:nvPr/>
         </p:nvSpPr>
@@ -11841,7 +12161,7 @@
       </p:sp>
       <p:sp>
         <p:nvSpPr>
-          <p:cNvPr id="30" name="TextBox 29"/>
+          <p:cNvPr id="35" name="TextBox 34"/>
           <p:cNvSpPr txBox="1"/>
           <p:nvPr/>
         </p:nvSpPr>
@@ -11886,7 +12206,7 @@
       </p:sp>
       <p:sp>
         <p:nvSpPr>
-          <p:cNvPr id="31" name="TextBox 30"/>
+          <p:cNvPr id="36" name="TextBox 35"/>
           <p:cNvSpPr txBox="1"/>
           <p:nvPr/>
         </p:nvSpPr>
@@ -11931,7 +12251,289 @@
       </p:sp>
       <p:sp>
         <p:nvSpPr>
-          <p:cNvPr id="32" name="Rounded Rectangle 31"/>
+          <p:cNvPr id="37" name="Rounded Rectangle 36"/>
+          <p:cNvSpPr/>
+          <p:nvPr/>
+        </p:nvSpPr>
+        <p:spPr>
+          <a:xfrm>
+            <a:off x="8915400" y="3081528"/>
+            <a:ext cx="2606040" cy="310896"/>
+          </a:xfrm>
+          <a:prstGeom prst="roundRect">
+            <a:avLst>
+              <a:gd name="adj" fmla="val 50000"/>
+            </a:avLst>
+          </a:prstGeom>
+          <a:solidFill>
+            <a:srgbClr val="1E9E74"/>
+          </a:solidFill>
+          <a:ln w="12700">
+            <a:solidFill>
+              <a:srgbClr val="157355"/>
+            </a:solidFill>
+          </a:ln>
+          <a:effectLst/>
+          <a:effectLst>
+            <a:outerShdw blurRad="90000" dist="38000" dir="5400000" rotWithShape="0">
+              <a:srgbClr val="20242E">
+                <a:alpha val="22000"/>
+              </a:srgbClr>
+            </a:outerShdw>
+          </a:effectLst>
+        </p:spPr>
+        <p:style>
+          <a:lnRef idx="1">
+            <a:schemeClr val="accent1"/>
+          </a:lnRef>
+          <a:fillRef idx="3">
+            <a:schemeClr val="accent1"/>
+          </a:fillRef>
+          <a:effectRef idx="2">
+            <a:schemeClr val="accent1"/>
+          </a:effectRef>
+          <a:fontRef idx="minor">
+            <a:schemeClr val="lt1"/>
+          </a:fontRef>
+        </p:style>
+        <p:txBody>
+          <a:bodyPr rtlCol="0" anchor="ctr" wrap="none" lIns="88900" rIns="88900" tIns="12700" bIns="12700"/>
+          <a:lstStyle/>
+          <a:p>
+            <a:pPr algn="ctr"/>
+            <a:r>
+              <a:rPr sz="1100" b="1">
+                <a:solidFill>
+                  <a:srgbClr val="FFFFFF"/>
+                </a:solidFill>
+                <a:latin typeface="Inter"/>
+              </a:rPr>
+              <a:t>✓ cuarenta y siete</a:t>
+            </a:r>
+          </a:p>
+        </p:txBody>
+      </p:sp>
+      <p:sp>
+        <p:nvSpPr>
+          <p:cNvPr id="38" name="Rounded Rectangle 37"/>
+          <p:cNvSpPr/>
+          <p:nvPr/>
+        </p:nvSpPr>
+        <p:spPr>
+          <a:xfrm>
+            <a:off x="457200" y="6053328"/>
+            <a:ext cx="2093976" cy="365760"/>
+          </a:xfrm>
+          <a:prstGeom prst="roundRect">
+            <a:avLst>
+              <a:gd name="adj" fmla="val 50000"/>
+            </a:avLst>
+          </a:prstGeom>
+          <a:solidFill>
+            <a:srgbClr val="1E9E74"/>
+          </a:solidFill>
+          <a:ln w="12700">
+            <a:solidFill>
+              <a:srgbClr val="E4E3DE"/>
+            </a:solidFill>
+          </a:ln>
+          <a:effectLst/>
+        </p:spPr>
+        <p:style>
+          <a:lnRef idx="1">
+            <a:schemeClr val="accent1"/>
+          </a:lnRef>
+          <a:fillRef idx="3">
+            <a:schemeClr val="accent1"/>
+          </a:fillRef>
+          <a:effectRef idx="2">
+            <a:schemeClr val="accent1"/>
+          </a:effectRef>
+          <a:fontRef idx="minor">
+            <a:schemeClr val="lt1"/>
+          </a:fontRef>
+        </p:style>
+        <p:txBody>
+          <a:bodyPr rtlCol="0" anchor="ctr" tIns="12700" bIns="12700"/>
+          <a:lstStyle/>
+          <a:p>
+            <a:pPr algn="ctr"/>
+            <a:r>
+              <a:rPr sz="1050" b="1">
+                <a:solidFill>
+                  <a:srgbClr val="FFFFFF"/>
+                </a:solidFill>
+                <a:latin typeface="Inter"/>
+              </a:rPr>
+              <a:t>▶  Mostrar solución</a:t>
+            </a:r>
+          </a:p>
+        </p:txBody>
+      </p:sp>
+      <p:sp>
+        <p:nvSpPr>
+          <p:cNvPr id="39" name="Rounded Rectangle 38"/>
+          <p:cNvSpPr/>
+          <p:nvPr/>
+        </p:nvSpPr>
+        <p:spPr>
+          <a:xfrm>
+            <a:off x="2697480" y="6053328"/>
+            <a:ext cx="1088136" cy="365760"/>
+          </a:xfrm>
+          <a:prstGeom prst="roundRect">
+            <a:avLst>
+              <a:gd name="adj" fmla="val 50000"/>
+            </a:avLst>
+          </a:prstGeom>
+          <a:solidFill>
+            <a:srgbClr val="FFFFFF"/>
+          </a:solidFill>
+          <a:ln w="12700">
+            <a:solidFill>
+              <a:srgbClr val="E4E3DE"/>
+            </a:solidFill>
+          </a:ln>
+          <a:effectLst/>
+        </p:spPr>
+        <p:style>
+          <a:lnRef idx="1">
+            <a:schemeClr val="accent1"/>
+          </a:lnRef>
+          <a:fillRef idx="3">
+            <a:schemeClr val="accent1"/>
+          </a:fillRef>
+          <a:effectRef idx="2">
+            <a:schemeClr val="accent1"/>
+          </a:effectRef>
+          <a:fontRef idx="minor">
+            <a:schemeClr val="lt1"/>
+          </a:fontRef>
+        </p:style>
+        <p:txBody>
+          <a:bodyPr rtlCol="0" anchor="ctr" tIns="12700" bIns="12700"/>
+          <a:lstStyle/>
+          <a:p>
+            <a:pPr algn="ctr"/>
+            <a:r>
+              <a:rPr sz="1050" b="1">
+                <a:solidFill>
+                  <a:srgbClr val="157355"/>
+                </a:solidFill>
+                <a:latin typeface="Inter"/>
+              </a:rPr>
+              <a:t>⏭  Saltar</a:t>
+            </a:r>
+          </a:p>
+        </p:txBody>
+      </p:sp>
+      <p:sp>
+        <p:nvSpPr>
+          <p:cNvPr id="40" name="Rounded Rectangle 39">
+            <a:hlinkClick action="ppaction://hlinksldjump" r:id="rId3"/>
+          </p:cNvPr>
+          <p:cNvSpPr/>
+          <p:nvPr/>
+        </p:nvSpPr>
+        <p:spPr>
+          <a:xfrm>
+            <a:off x="3931920" y="6053328"/>
+            <a:ext cx="1691639" cy="365760"/>
+          </a:xfrm>
+          <a:prstGeom prst="roundRect">
+            <a:avLst>
+              <a:gd name="adj" fmla="val 50000"/>
+            </a:avLst>
+          </a:prstGeom>
+          <a:solidFill>
+            <a:srgbClr val="FFFFFF"/>
+          </a:solidFill>
+          <a:ln w="12700">
+            <a:solidFill>
+              <a:srgbClr val="E4E3DE"/>
+            </a:solidFill>
+          </a:ln>
+          <a:effectLst/>
+        </p:spPr>
+        <p:style>
+          <a:lnRef idx="1">
+            <a:schemeClr val="accent1"/>
+          </a:lnRef>
+          <a:fillRef idx="3">
+            <a:schemeClr val="accent1"/>
+          </a:fillRef>
+          <a:effectRef idx="2">
+            <a:schemeClr val="accent1"/>
+          </a:effectRef>
+          <a:fontRef idx="minor">
+            <a:schemeClr val="lt1"/>
+          </a:fontRef>
+        </p:style>
+        <p:txBody>
+          <a:bodyPr rtlCol="0" anchor="ctr" tIns="12700" bIns="12700"/>
+          <a:lstStyle/>
+          <a:p>
+            <a:pPr algn="ctr"/>
+            <a:r>
+              <a:rPr sz="1050" b="1">
+                <a:solidFill>
+                  <a:srgbClr val="157355"/>
+                </a:solidFill>
+                <a:latin typeface="Inter"/>
+              </a:rPr>
+              <a:t>⌂  Menú (dia 2)</a:t>
+            </a:r>
+          </a:p>
+        </p:txBody>
+      </p:sp>
+      <p:sp>
+        <p:nvSpPr>
+          <p:cNvPr id="41" name="TextBox 40"/>
+          <p:cNvSpPr txBox="1"/>
+          <p:nvPr/>
+        </p:nvSpPr>
+        <p:spPr>
+          <a:xfrm>
+            <a:off x="8321040" y="6053328"/>
+            <a:ext cx="3383280" cy="365760"/>
+          </a:xfrm>
+          <a:prstGeom prst="rect">
+            <a:avLst/>
+          </a:prstGeom>
+          <a:noFill/>
+        </p:spPr>
+        <p:txBody>
+          <a:bodyPr wrap="square" anchor="ctr" lIns="38100" rIns="38100" tIns="25400" bIns="25400">
+            <a:spAutoFit/>
+          </a:bodyPr>
+          <a:lstStyle/>
+          <a:p>
+            <a:pPr algn="r">
+              <a:lnSpc>
+                <a:spcPct val="106000"/>
+              </a:lnSpc>
+              <a:spcBef>
+                <a:spcPts val="0"/>
+              </a:spcBef>
+              <a:spcAft>
+                <a:spcPts val="200"/>
+              </a:spcAft>
+            </a:pPr>
+            <a:r>
+              <a:rPr sz="850" b="0" i="1">
+                <a:solidFill>
+                  <a:srgbClr val="6A6E78"/>
+                </a:solidFill>
+                <a:latin typeface="Inter"/>
+              </a:rPr>
+              <a:t>Noodroute (§5): werkt zonder audio/internet</a:t>
+            </a:r>
+          </a:p>
+        </p:txBody>
+      </p:sp>
+      <p:sp>
+        <p:nvSpPr>
+          <p:cNvPr id="42" name="Rounded Rectangle 41"/>
           <p:cNvSpPr/>
           <p:nvPr/>
         </p:nvSpPr>
@@ -12141,7 +12743,7 @@
       </p:sp>
       <p:sp>
         <p:nvSpPr>
-          <p:cNvPr id="33" name="Rounded Rectangle 32"/>
+          <p:cNvPr id="43" name="Rounded Rectangle 42"/>
           <p:cNvSpPr/>
           <p:nvPr/>
         </p:nvSpPr>
@@ -12196,223 +12798,7 @@
       </p:sp>
       <p:sp>
         <p:nvSpPr>
-          <p:cNvPr id="34" name="Rounded Rectangle 33"/>
-          <p:cNvSpPr/>
-          <p:nvPr/>
-        </p:nvSpPr>
-        <p:spPr>
-          <a:xfrm>
-            <a:off x="457200" y="6053328"/>
-            <a:ext cx="2093976" cy="365760"/>
-          </a:xfrm>
-          <a:prstGeom prst="roundRect">
-            <a:avLst>
-              <a:gd name="adj" fmla="val 50000"/>
-            </a:avLst>
-          </a:prstGeom>
-          <a:solidFill>
-            <a:srgbClr val="1E9E74"/>
-          </a:solidFill>
-          <a:ln w="12700">
-            <a:solidFill>
-              <a:srgbClr val="E4E3DE"/>
-            </a:solidFill>
-          </a:ln>
-          <a:effectLst/>
-        </p:spPr>
-        <p:style>
-          <a:lnRef idx="1">
-            <a:schemeClr val="accent1"/>
-          </a:lnRef>
-          <a:fillRef idx="3">
-            <a:schemeClr val="accent1"/>
-          </a:fillRef>
-          <a:effectRef idx="2">
-            <a:schemeClr val="accent1"/>
-          </a:effectRef>
-          <a:fontRef idx="minor">
-            <a:schemeClr val="lt1"/>
-          </a:fontRef>
-        </p:style>
-        <p:txBody>
-          <a:bodyPr rtlCol="0" anchor="ctr" tIns="12700" bIns="12700"/>
-          <a:lstStyle/>
-          <a:p>
-            <a:pPr algn="ctr"/>
-            <a:r>
-              <a:rPr sz="1050" b="1">
-                <a:solidFill>
-                  <a:srgbClr val="FFFFFF"/>
-                </a:solidFill>
-                <a:latin typeface="Inter"/>
-              </a:rPr>
-              <a:t>▶  Mostrar solución</a:t>
-            </a:r>
-          </a:p>
-        </p:txBody>
-      </p:sp>
-      <p:sp>
-        <p:nvSpPr>
-          <p:cNvPr id="35" name="Rounded Rectangle 34"/>
-          <p:cNvSpPr/>
-          <p:nvPr/>
-        </p:nvSpPr>
-        <p:spPr>
-          <a:xfrm>
-            <a:off x="2697480" y="6053328"/>
-            <a:ext cx="1088136" cy="365760"/>
-          </a:xfrm>
-          <a:prstGeom prst="roundRect">
-            <a:avLst>
-              <a:gd name="adj" fmla="val 50000"/>
-            </a:avLst>
-          </a:prstGeom>
-          <a:solidFill>
-            <a:srgbClr val="FFFFFF"/>
-          </a:solidFill>
-          <a:ln w="12700">
-            <a:solidFill>
-              <a:srgbClr val="E4E3DE"/>
-            </a:solidFill>
-          </a:ln>
-          <a:effectLst/>
-        </p:spPr>
-        <p:style>
-          <a:lnRef idx="1">
-            <a:schemeClr val="accent1"/>
-          </a:lnRef>
-          <a:fillRef idx="3">
-            <a:schemeClr val="accent1"/>
-          </a:fillRef>
-          <a:effectRef idx="2">
-            <a:schemeClr val="accent1"/>
-          </a:effectRef>
-          <a:fontRef idx="minor">
-            <a:schemeClr val="lt1"/>
-          </a:fontRef>
-        </p:style>
-        <p:txBody>
-          <a:bodyPr rtlCol="0" anchor="ctr" tIns="12700" bIns="12700"/>
-          <a:lstStyle/>
-          <a:p>
-            <a:pPr algn="ctr"/>
-            <a:r>
-              <a:rPr sz="1050" b="1">
-                <a:solidFill>
-                  <a:srgbClr val="157355"/>
-                </a:solidFill>
-                <a:latin typeface="Inter"/>
-              </a:rPr>
-              <a:t>⏭  Saltar</a:t>
-            </a:r>
-          </a:p>
-        </p:txBody>
-      </p:sp>
-      <p:sp>
-        <p:nvSpPr>
-          <p:cNvPr id="36" name="Rounded Rectangle 35"/>
-          <p:cNvSpPr/>
-          <p:nvPr/>
-        </p:nvSpPr>
-        <p:spPr>
-          <a:xfrm>
-            <a:off x="3931920" y="6053328"/>
-            <a:ext cx="1691639" cy="365760"/>
-          </a:xfrm>
-          <a:prstGeom prst="roundRect">
-            <a:avLst>
-              <a:gd name="adj" fmla="val 50000"/>
-            </a:avLst>
-          </a:prstGeom>
-          <a:solidFill>
-            <a:srgbClr val="FFFFFF"/>
-          </a:solidFill>
-          <a:ln w="12700">
-            <a:solidFill>
-              <a:srgbClr val="E4E3DE"/>
-            </a:solidFill>
-          </a:ln>
-          <a:effectLst/>
-        </p:spPr>
-        <p:style>
-          <a:lnRef idx="1">
-            <a:schemeClr val="accent1"/>
-          </a:lnRef>
-          <a:fillRef idx="3">
-            <a:schemeClr val="accent1"/>
-          </a:fillRef>
-          <a:effectRef idx="2">
-            <a:schemeClr val="accent1"/>
-          </a:effectRef>
-          <a:fontRef idx="minor">
-            <a:schemeClr val="lt1"/>
-          </a:fontRef>
-        </p:style>
-        <p:txBody>
-          <a:bodyPr rtlCol="0" anchor="ctr" tIns="12700" bIns="12700"/>
-          <a:lstStyle/>
-          <a:p>
-            <a:pPr algn="ctr"/>
-            <a:r>
-              <a:rPr sz="1050" b="1">
-                <a:solidFill>
-                  <a:srgbClr val="157355"/>
-                </a:solidFill>
-                <a:latin typeface="Inter"/>
-              </a:rPr>
-              <a:t>⌂  Menú (dia 2)</a:t>
-            </a:r>
-          </a:p>
-        </p:txBody>
-      </p:sp>
-      <p:sp>
-        <p:nvSpPr>
-          <p:cNvPr id="37" name="TextBox 36"/>
-          <p:cNvSpPr txBox="1"/>
-          <p:nvPr/>
-        </p:nvSpPr>
-        <p:spPr>
-          <a:xfrm>
-            <a:off x="8321040" y="6053328"/>
-            <a:ext cx="3383280" cy="365760"/>
-          </a:xfrm>
-          <a:prstGeom prst="rect">
-            <a:avLst/>
-          </a:prstGeom>
-          <a:noFill/>
-        </p:spPr>
-        <p:txBody>
-          <a:bodyPr wrap="square" anchor="ctr" lIns="38100" rIns="38100" tIns="25400" bIns="25400">
-            <a:spAutoFit/>
-          </a:bodyPr>
-          <a:lstStyle/>
-          <a:p>
-            <a:pPr algn="r">
-              <a:lnSpc>
-                <a:spcPct val="106000"/>
-              </a:lnSpc>
-              <a:spcBef>
-                <a:spcPts val="0"/>
-              </a:spcBef>
-              <a:spcAft>
-                <a:spcPts val="200"/>
-              </a:spcAft>
-            </a:pPr>
-            <a:r>
-              <a:rPr sz="850" b="0" i="1">
-                <a:solidFill>
-                  <a:srgbClr val="6A6E78"/>
-                </a:solidFill>
-                <a:latin typeface="Inter"/>
-              </a:rPr>
-              <a:t>Noodroute (§5): werkt zonder audio/internet</a:t>
-            </a:r>
-          </a:p>
-        </p:txBody>
-      </p:sp>
-      <p:sp>
-        <p:nvSpPr>
-          <p:cNvPr id="38" name="Rectangle 37"/>
+          <p:cNvPr id="44" name="Rectangle 43"/>
           <p:cNvSpPr/>
           <p:nvPr/>
         </p:nvSpPr>
@@ -12456,7 +12842,7 @@
       </p:sp>
       <p:sp>
         <p:nvSpPr>
-          <p:cNvPr id="39" name="TextBox 38"/>
+          <p:cNvPr id="45" name="TextBox 44"/>
           <p:cNvSpPr txBox="1"/>
           <p:nvPr/>
         </p:nvSpPr>
@@ -12510,7 +12896,7 @@
       </p:sp>
       <p:sp>
         <p:nvSpPr>
-          <p:cNvPr id="40" name="TextBox 39"/>
+          <p:cNvPr id="46" name="TextBox 45"/>
           <p:cNvSpPr txBox="1"/>
           <p:nvPr/>
         </p:nvSpPr>
@@ -12555,7 +12941,7 @@
       </p:sp>
       <p:sp>
         <p:nvSpPr>
-          <p:cNvPr id="41" name="TextBox 40"/>
+          <p:cNvPr id="47" name="TextBox 46"/>
           <p:cNvSpPr txBox="1"/>
           <p:nvPr/>
         </p:nvSpPr>
@@ -12603,6 +12989,437 @@
   <p:clrMapOvr>
     <a:masterClrMapping/>
   </p:clrMapOvr>
+  <p:timing>
+    <p:tnLst>
+      <p:par>
+        <p:cTn id="1" dur="indefinite" restart="never" nodeType="tmRoot">
+          <p:childTnLst>
+            <p:seq concurrent="1" nextAc="seek">
+              <p:cTn id="2" dur="indefinite" nodeType="mainSeq">
+                <p:childTnLst/>
+              </p:cTn>
+              <p:prevCondLst>
+                <p:cond evt="onPrev" delay="0">
+                  <p:tgtEl>
+                    <p:sldTgt/>
+                  </p:tgtEl>
+                </p:cond>
+              </p:prevCondLst>
+              <p:nextCondLst>
+                <p:cond evt="onNext" delay="0">
+                  <p:tgtEl>
+                    <p:sldTgt/>
+                  </p:tgtEl>
+                </p:cond>
+              </p:nextCondLst>
+            </p:seq>
+            <p:seq concurrent="1" nextAc="seek">
+              <p:cTn id="5" restart="whenNotActive" fill="hold" nodeType="interactiveSeq">
+                <p:stCondLst>
+                  <p:cond evt="onClick" delay="0">
+                    <p:tgtEl>
+                      <p:spTgt spid="8"/>
+                    </p:tgtEl>
+                  </p:cond>
+                </p:stCondLst>
+                <p:endSync evt="end" delay="0">
+                  <p:rtn val="all"/>
+                </p:endSync>
+                <p:childTnLst>
+                  <p:par>
+                    <p:cTn id="6" fill="hold">
+                      <p:stCondLst>
+                        <p:cond delay="0"/>
+                      </p:stCondLst>
+                      <p:childTnLst>
+                        <p:par>
+                          <p:cTn id="7" presetID="10" presetClass="entr" presetSubtype="0" fill="hold" grpId="0" nodeType="clickEffect">
+                            <p:stCondLst>
+                              <p:cond delay="0"/>
+                            </p:stCondLst>
+                            <p:childTnLst>
+                              <p:set>
+                                <p:cBhvr>
+                                  <p:cTn id="8" dur="1" fill="hold">
+                                    <p:stCondLst>
+                                      <p:cond delay="0"/>
+                                    </p:stCondLst>
+                                  </p:cTn>
+                                  <p:tgtEl>
+                                    <p:spTgt spid="12"/>
+                                  </p:tgtEl>
+                                  <p:attrNameLst>
+                                    <p:attrName>style.visibility</p:attrName>
+                                  </p:attrNameLst>
+                                </p:cBhvr>
+                                <p:to>
+                                  <p:strVal val="visible"/>
+                                </p:to>
+                              </p:set>
+                              <p:animEffect transition="in" filter="fade">
+                                <p:cBhvr>
+                                  <p:cTn id="9" dur="400"/>
+                                  <p:tgtEl>
+                                    <p:spTgt spid="12"/>
+                                  </p:tgtEl>
+                                </p:cBhvr>
+                              </p:animEffect>
+                            </p:childTnLst>
+                          </p:cTn>
+                        </p:par>
+                      </p:childTnLst>
+                    </p:cTn>
+                  </p:par>
+                </p:childTnLst>
+              </p:cTn>
+              <p:nextCondLst>
+                <p:cond evt="onClick" delay="0">
+                  <p:tgtEl>
+                    <p:spTgt spid="8"/>
+                  </p:tgtEl>
+                </p:cond>
+              </p:nextCondLst>
+            </p:seq>
+            <p:seq concurrent="1" nextAc="seek">
+              <p:cTn id="15" restart="whenNotActive" fill="hold" nodeType="interactiveSeq">
+                <p:stCondLst>
+                  <p:cond evt="onClick" delay="0">
+                    <p:tgtEl>
+                      <p:spTgt spid="13"/>
+                    </p:tgtEl>
+                  </p:cond>
+                </p:stCondLst>
+                <p:endSync evt="end" delay="0">
+                  <p:rtn val="all"/>
+                </p:endSync>
+                <p:childTnLst>
+                  <p:par>
+                    <p:cTn id="16" fill="hold">
+                      <p:stCondLst>
+                        <p:cond delay="0"/>
+                      </p:stCondLst>
+                      <p:childTnLst>
+                        <p:par>
+                          <p:cTn id="17" presetID="10" presetClass="entr" presetSubtype="0" fill="hold" grpId="0" nodeType="clickEffect">
+                            <p:stCondLst>
+                              <p:cond delay="0"/>
+                            </p:stCondLst>
+                            <p:childTnLst>
+                              <p:set>
+                                <p:cBhvr>
+                                  <p:cTn id="18" dur="1" fill="hold">
+                                    <p:stCondLst>
+                                      <p:cond delay="0"/>
+                                    </p:stCondLst>
+                                  </p:cTn>
+                                  <p:tgtEl>
+                                    <p:spTgt spid="17"/>
+                                  </p:tgtEl>
+                                  <p:attrNameLst>
+                                    <p:attrName>style.visibility</p:attrName>
+                                  </p:attrNameLst>
+                                </p:cBhvr>
+                                <p:to>
+                                  <p:strVal val="visible"/>
+                                </p:to>
+                              </p:set>
+                              <p:animEffect transition="in" filter="fade">
+                                <p:cBhvr>
+                                  <p:cTn id="19" dur="400"/>
+                                  <p:tgtEl>
+                                    <p:spTgt spid="17"/>
+                                  </p:tgtEl>
+                                </p:cBhvr>
+                              </p:animEffect>
+                            </p:childTnLst>
+                          </p:cTn>
+                        </p:par>
+                      </p:childTnLst>
+                    </p:cTn>
+                  </p:par>
+                </p:childTnLst>
+              </p:cTn>
+              <p:nextCondLst>
+                <p:cond evt="onClick" delay="0">
+                  <p:tgtEl>
+                    <p:spTgt spid="13"/>
+                  </p:tgtEl>
+                </p:cond>
+              </p:nextCondLst>
+            </p:seq>
+            <p:seq concurrent="1" nextAc="seek">
+              <p:cTn id="25" restart="whenNotActive" fill="hold" nodeType="interactiveSeq">
+                <p:stCondLst>
+                  <p:cond evt="onClick" delay="0">
+                    <p:tgtEl>
+                      <p:spTgt spid="18"/>
+                    </p:tgtEl>
+                  </p:cond>
+                </p:stCondLst>
+                <p:endSync evt="end" delay="0">
+                  <p:rtn val="all"/>
+                </p:endSync>
+                <p:childTnLst>
+                  <p:par>
+                    <p:cTn id="26" fill="hold">
+                      <p:stCondLst>
+                        <p:cond delay="0"/>
+                      </p:stCondLst>
+                      <p:childTnLst>
+                        <p:par>
+                          <p:cTn id="27" presetID="10" presetClass="entr" presetSubtype="0" fill="hold" grpId="0" nodeType="clickEffect">
+                            <p:stCondLst>
+                              <p:cond delay="0"/>
+                            </p:stCondLst>
+                            <p:childTnLst>
+                              <p:set>
+                                <p:cBhvr>
+                                  <p:cTn id="28" dur="1" fill="hold">
+                                    <p:stCondLst>
+                                      <p:cond delay="0"/>
+                                    </p:stCondLst>
+                                  </p:cTn>
+                                  <p:tgtEl>
+                                    <p:spTgt spid="22"/>
+                                  </p:tgtEl>
+                                  <p:attrNameLst>
+                                    <p:attrName>style.visibility</p:attrName>
+                                  </p:attrNameLst>
+                                </p:cBhvr>
+                                <p:to>
+                                  <p:strVal val="visible"/>
+                                </p:to>
+                              </p:set>
+                              <p:animEffect transition="in" filter="fade">
+                                <p:cBhvr>
+                                  <p:cTn id="29" dur="400"/>
+                                  <p:tgtEl>
+                                    <p:spTgt spid="22"/>
+                                  </p:tgtEl>
+                                </p:cBhvr>
+                              </p:animEffect>
+                            </p:childTnLst>
+                          </p:cTn>
+                        </p:par>
+                      </p:childTnLst>
+                    </p:cTn>
+                  </p:par>
+                </p:childTnLst>
+              </p:cTn>
+              <p:nextCondLst>
+                <p:cond evt="onClick" delay="0">
+                  <p:tgtEl>
+                    <p:spTgt spid="18"/>
+                  </p:tgtEl>
+                </p:cond>
+              </p:nextCondLst>
+            </p:seq>
+            <p:seq concurrent="1" nextAc="seek">
+              <p:cTn id="35" restart="whenNotActive" fill="hold" nodeType="interactiveSeq">
+                <p:stCondLst>
+                  <p:cond evt="onClick" delay="0">
+                    <p:tgtEl>
+                      <p:spTgt spid="23"/>
+                    </p:tgtEl>
+                  </p:cond>
+                </p:stCondLst>
+                <p:endSync evt="end" delay="0">
+                  <p:rtn val="all"/>
+                </p:endSync>
+                <p:childTnLst>
+                  <p:par>
+                    <p:cTn id="36" fill="hold">
+                      <p:stCondLst>
+                        <p:cond delay="0"/>
+                      </p:stCondLst>
+                      <p:childTnLst>
+                        <p:par>
+                          <p:cTn id="37" presetID="10" presetClass="entr" presetSubtype="0" fill="hold" grpId="0" nodeType="clickEffect">
+                            <p:stCondLst>
+                              <p:cond delay="0"/>
+                            </p:stCondLst>
+                            <p:childTnLst>
+                              <p:set>
+                                <p:cBhvr>
+                                  <p:cTn id="38" dur="1" fill="hold">
+                                    <p:stCondLst>
+                                      <p:cond delay="0"/>
+                                    </p:stCondLst>
+                                  </p:cTn>
+                                  <p:tgtEl>
+                                    <p:spTgt spid="27"/>
+                                  </p:tgtEl>
+                                  <p:attrNameLst>
+                                    <p:attrName>style.visibility</p:attrName>
+                                  </p:attrNameLst>
+                                </p:cBhvr>
+                                <p:to>
+                                  <p:strVal val="visible"/>
+                                </p:to>
+                              </p:set>
+                              <p:animEffect transition="in" filter="fade">
+                                <p:cBhvr>
+                                  <p:cTn id="39" dur="400"/>
+                                  <p:tgtEl>
+                                    <p:spTgt spid="27"/>
+                                  </p:tgtEl>
+                                </p:cBhvr>
+                              </p:animEffect>
+                            </p:childTnLst>
+                          </p:cTn>
+                        </p:par>
+                      </p:childTnLst>
+                    </p:cTn>
+                  </p:par>
+                </p:childTnLst>
+              </p:cTn>
+              <p:nextCondLst>
+                <p:cond evt="onClick" delay="0">
+                  <p:tgtEl>
+                    <p:spTgt spid="23"/>
+                  </p:tgtEl>
+                </p:cond>
+              </p:nextCondLst>
+            </p:seq>
+            <p:seq concurrent="1" nextAc="seek">
+              <p:cTn id="45" restart="whenNotActive" fill="hold" nodeType="interactiveSeq">
+                <p:stCondLst>
+                  <p:cond evt="onClick" delay="0">
+                    <p:tgtEl>
+                      <p:spTgt spid="28"/>
+                    </p:tgtEl>
+                  </p:cond>
+                </p:stCondLst>
+                <p:endSync evt="end" delay="0">
+                  <p:rtn val="all"/>
+                </p:endSync>
+                <p:childTnLst>
+                  <p:par>
+                    <p:cTn id="46" fill="hold">
+                      <p:stCondLst>
+                        <p:cond delay="0"/>
+                      </p:stCondLst>
+                      <p:childTnLst>
+                        <p:par>
+                          <p:cTn id="47" presetID="10" presetClass="entr" presetSubtype="0" fill="hold" grpId="0" nodeType="clickEffect">
+                            <p:stCondLst>
+                              <p:cond delay="0"/>
+                            </p:stCondLst>
+                            <p:childTnLst>
+                              <p:set>
+                                <p:cBhvr>
+                                  <p:cTn id="48" dur="1" fill="hold">
+                                    <p:stCondLst>
+                                      <p:cond delay="0"/>
+                                    </p:stCondLst>
+                                  </p:cTn>
+                                  <p:tgtEl>
+                                    <p:spTgt spid="32"/>
+                                  </p:tgtEl>
+                                  <p:attrNameLst>
+                                    <p:attrName>style.visibility</p:attrName>
+                                  </p:attrNameLst>
+                                </p:cBhvr>
+                                <p:to>
+                                  <p:strVal val="visible"/>
+                                </p:to>
+                              </p:set>
+                              <p:animEffect transition="in" filter="fade">
+                                <p:cBhvr>
+                                  <p:cTn id="49" dur="400"/>
+                                  <p:tgtEl>
+                                    <p:spTgt spid="32"/>
+                                  </p:tgtEl>
+                                </p:cBhvr>
+                              </p:animEffect>
+                            </p:childTnLst>
+                          </p:cTn>
+                        </p:par>
+                      </p:childTnLst>
+                    </p:cTn>
+                  </p:par>
+                </p:childTnLst>
+              </p:cTn>
+              <p:nextCondLst>
+                <p:cond evt="onClick" delay="0">
+                  <p:tgtEl>
+                    <p:spTgt spid="28"/>
+                  </p:tgtEl>
+                </p:cond>
+              </p:nextCondLst>
+            </p:seq>
+            <p:seq concurrent="1" nextAc="seek">
+              <p:cTn id="55" restart="whenNotActive" fill="hold" nodeType="interactiveSeq">
+                <p:stCondLst>
+                  <p:cond evt="onClick" delay="0">
+                    <p:tgtEl>
+                      <p:spTgt spid="33"/>
+                    </p:tgtEl>
+                  </p:cond>
+                </p:stCondLst>
+                <p:endSync evt="end" delay="0">
+                  <p:rtn val="all"/>
+                </p:endSync>
+                <p:childTnLst>
+                  <p:par>
+                    <p:cTn id="56" fill="hold">
+                      <p:stCondLst>
+                        <p:cond delay="0"/>
+                      </p:stCondLst>
+                      <p:childTnLst>
+                        <p:par>
+                          <p:cTn id="57" presetID="10" presetClass="entr" presetSubtype="0" fill="hold" grpId="0" nodeType="clickEffect">
+                            <p:stCondLst>
+                              <p:cond delay="0"/>
+                            </p:stCondLst>
+                            <p:childTnLst>
+                              <p:set>
+                                <p:cBhvr>
+                                  <p:cTn id="58" dur="1" fill="hold">
+                                    <p:stCondLst>
+                                      <p:cond delay="0"/>
+                                    </p:stCondLst>
+                                  </p:cTn>
+                                  <p:tgtEl>
+                                    <p:spTgt spid="37"/>
+                                  </p:tgtEl>
+                                  <p:attrNameLst>
+                                    <p:attrName>style.visibility</p:attrName>
+                                  </p:attrNameLst>
+                                </p:cBhvr>
+                                <p:to>
+                                  <p:strVal val="visible"/>
+                                </p:to>
+                              </p:set>
+                              <p:animEffect transition="in" filter="fade">
+                                <p:cBhvr>
+                                  <p:cTn id="59" dur="400"/>
+                                  <p:tgtEl>
+                                    <p:spTgt spid="37"/>
+                                  </p:tgtEl>
+                                </p:cBhvr>
+                              </p:animEffect>
+                            </p:childTnLst>
+                          </p:cTn>
+                        </p:par>
+                      </p:childTnLst>
+                    </p:cTn>
+                  </p:par>
+                </p:childTnLst>
+              </p:cTn>
+              <p:nextCondLst>
+                <p:cond evt="onClick" delay="0">
+                  <p:tgtEl>
+                    <p:spTgt spid="33"/>
+                  </p:tgtEl>
+                </p:cond>
+              </p:nextCondLst>
+            </p:seq>
+          </p:childTnLst>
+        </p:cTn>
+      </p:par>
+    </p:tnLst>
+  </p:timing>
 </p:sld>
 </file>
 
@@ -16592,6 +17409,70 @@
         </p:nvSpPr>
         <p:spPr>
           <a:xfrm>
+            <a:off x="11292840" y="1801368"/>
+            <a:ext cx="329184" cy="310896"/>
+          </a:xfrm>
+          <a:prstGeom prst="roundRect">
+            <a:avLst>
+              <a:gd name="adj" fmla="val 50000"/>
+            </a:avLst>
+          </a:prstGeom>
+          <a:solidFill>
+            <a:srgbClr val="1E9E74"/>
+          </a:solidFill>
+          <a:ln w="12700">
+            <a:solidFill>
+              <a:srgbClr val="157355"/>
+            </a:solidFill>
+          </a:ln>
+          <a:effectLst/>
+          <a:effectLst>
+            <a:outerShdw blurRad="90000" dist="38000" dir="5400000" rotWithShape="0">
+              <a:srgbClr val="20242E">
+                <a:alpha val="22000"/>
+              </a:srgbClr>
+            </a:outerShdw>
+          </a:effectLst>
+        </p:spPr>
+        <p:style>
+          <a:lnRef idx="1">
+            <a:schemeClr val="accent1"/>
+          </a:lnRef>
+          <a:fillRef idx="3">
+            <a:schemeClr val="accent1"/>
+          </a:fillRef>
+          <a:effectRef idx="2">
+            <a:schemeClr val="accent1"/>
+          </a:effectRef>
+          <a:fontRef idx="minor">
+            <a:schemeClr val="lt1"/>
+          </a:fontRef>
+        </p:style>
+        <p:txBody>
+          <a:bodyPr rtlCol="0" anchor="ctr" wrap="none" lIns="88900" rIns="88900" tIns="12700" bIns="12700"/>
+          <a:lstStyle/>
+          <a:p>
+            <a:pPr algn="ctr"/>
+            <a:r>
+              <a:rPr sz="1100" b="1">
+                <a:solidFill>
+                  <a:srgbClr val="FFFFFF"/>
+                </a:solidFill>
+                <a:latin typeface="Inter"/>
+              </a:rPr>
+              <a:t>✓</a:t>
+            </a:r>
+          </a:p>
+        </p:txBody>
+      </p:sp>
+      <p:sp>
+        <p:nvSpPr>
+          <p:cNvPr id="16" name="Rounded Rectangle 15"/>
+          <p:cNvSpPr/>
+          <p:nvPr/>
+        </p:nvSpPr>
+        <p:spPr>
+          <a:xfrm>
             <a:off x="457200" y="2651760"/>
             <a:ext cx="5577840" cy="777240"/>
           </a:xfrm>
@@ -16641,7 +17522,7 @@
       </p:sp>
       <p:sp>
         <p:nvSpPr>
-          <p:cNvPr id="16" name="Rounded Rectangle 15"/>
+          <p:cNvPr id="17" name="Rounded Rectangle 16"/>
           <p:cNvSpPr/>
           <p:nvPr/>
         </p:nvSpPr>
@@ -16687,7 +17568,7 @@
       </p:sp>
       <p:sp>
         <p:nvSpPr>
-          <p:cNvPr id="17" name="TextBox 16"/>
+          <p:cNvPr id="18" name="TextBox 17"/>
           <p:cNvSpPr txBox="1"/>
           <p:nvPr/>
         </p:nvSpPr>
@@ -16732,7 +17613,7 @@
       </p:sp>
       <p:sp>
         <p:nvSpPr>
-          <p:cNvPr id="18" name="TextBox 17"/>
+          <p:cNvPr id="19" name="TextBox 18"/>
           <p:cNvSpPr txBox="1"/>
           <p:nvPr/>
         </p:nvSpPr>
@@ -16777,7 +17658,7 @@
       </p:sp>
       <p:sp>
         <p:nvSpPr>
-          <p:cNvPr id="19" name="Rectangle 18"/>
+          <p:cNvPr id="20" name="Rectangle 19"/>
           <p:cNvSpPr/>
           <p:nvPr/>
         </p:nvSpPr>
@@ -16821,7 +17702,7 @@
       </p:sp>
       <p:sp>
         <p:nvSpPr>
-          <p:cNvPr id="20" name="TextBox 19"/>
+          <p:cNvPr id="21" name="TextBox 20"/>
           <p:cNvSpPr txBox="1"/>
           <p:nvPr/>
         </p:nvSpPr>
@@ -16866,7 +17747,71 @@
       </p:sp>
       <p:sp>
         <p:nvSpPr>
-          <p:cNvPr id="21" name="Rounded Rectangle 20"/>
+          <p:cNvPr id="22" name="Rounded Rectangle 21"/>
+          <p:cNvSpPr/>
+          <p:nvPr/>
+        </p:nvSpPr>
+        <p:spPr>
+          <a:xfrm>
+            <a:off x="11292840" y="2670048"/>
+            <a:ext cx="329184" cy="310896"/>
+          </a:xfrm>
+          <a:prstGeom prst="roundRect">
+            <a:avLst>
+              <a:gd name="adj" fmla="val 50000"/>
+            </a:avLst>
+          </a:prstGeom>
+          <a:solidFill>
+            <a:srgbClr val="1E9E74"/>
+          </a:solidFill>
+          <a:ln w="12700">
+            <a:solidFill>
+              <a:srgbClr val="157355"/>
+            </a:solidFill>
+          </a:ln>
+          <a:effectLst/>
+          <a:effectLst>
+            <a:outerShdw blurRad="90000" dist="38000" dir="5400000" rotWithShape="0">
+              <a:srgbClr val="20242E">
+                <a:alpha val="22000"/>
+              </a:srgbClr>
+            </a:outerShdw>
+          </a:effectLst>
+        </p:spPr>
+        <p:style>
+          <a:lnRef idx="1">
+            <a:schemeClr val="accent1"/>
+          </a:lnRef>
+          <a:fillRef idx="3">
+            <a:schemeClr val="accent1"/>
+          </a:fillRef>
+          <a:effectRef idx="2">
+            <a:schemeClr val="accent1"/>
+          </a:effectRef>
+          <a:fontRef idx="minor">
+            <a:schemeClr val="lt1"/>
+          </a:fontRef>
+        </p:style>
+        <p:txBody>
+          <a:bodyPr rtlCol="0" anchor="ctr" wrap="none" lIns="88900" rIns="88900" tIns="12700" bIns="12700"/>
+          <a:lstStyle/>
+          <a:p>
+            <a:pPr algn="ctr"/>
+            <a:r>
+              <a:rPr sz="1100" b="1">
+                <a:solidFill>
+                  <a:srgbClr val="FFFFFF"/>
+                </a:solidFill>
+                <a:latin typeface="Inter"/>
+              </a:rPr>
+              <a:t>✓</a:t>
+            </a:r>
+          </a:p>
+        </p:txBody>
+      </p:sp>
+      <p:sp>
+        <p:nvSpPr>
+          <p:cNvPr id="23" name="Rounded Rectangle 22"/>
           <p:cNvSpPr/>
           <p:nvPr/>
         </p:nvSpPr>
@@ -16921,7 +17866,7 @@
       </p:sp>
       <p:sp>
         <p:nvSpPr>
-          <p:cNvPr id="22" name="Rounded Rectangle 21"/>
+          <p:cNvPr id="24" name="Rounded Rectangle 23"/>
           <p:cNvSpPr/>
           <p:nvPr/>
         </p:nvSpPr>
@@ -16967,7 +17912,7 @@
       </p:sp>
       <p:sp>
         <p:nvSpPr>
-          <p:cNvPr id="23" name="TextBox 22"/>
+          <p:cNvPr id="25" name="TextBox 24"/>
           <p:cNvSpPr txBox="1"/>
           <p:nvPr/>
         </p:nvSpPr>
@@ -17012,7 +17957,7 @@
       </p:sp>
       <p:sp>
         <p:nvSpPr>
-          <p:cNvPr id="24" name="TextBox 23"/>
+          <p:cNvPr id="26" name="TextBox 25"/>
           <p:cNvSpPr txBox="1"/>
           <p:nvPr/>
         </p:nvSpPr>
@@ -17057,7 +18002,7 @@
       </p:sp>
       <p:sp>
         <p:nvSpPr>
-          <p:cNvPr id="25" name="Rectangle 24"/>
+          <p:cNvPr id="27" name="Rectangle 26"/>
           <p:cNvSpPr/>
           <p:nvPr/>
         </p:nvSpPr>
@@ -17101,7 +18046,7 @@
       </p:sp>
       <p:sp>
         <p:nvSpPr>
-          <p:cNvPr id="26" name="TextBox 25"/>
+          <p:cNvPr id="28" name="TextBox 27"/>
           <p:cNvSpPr txBox="1"/>
           <p:nvPr/>
         </p:nvSpPr>
@@ -17146,7 +18091,71 @@
       </p:sp>
       <p:sp>
         <p:nvSpPr>
-          <p:cNvPr id="27" name="Rounded Rectangle 26"/>
+          <p:cNvPr id="29" name="Rounded Rectangle 28"/>
+          <p:cNvSpPr/>
+          <p:nvPr/>
+        </p:nvSpPr>
+        <p:spPr>
+          <a:xfrm>
+            <a:off x="11292840" y="3538728"/>
+            <a:ext cx="329184" cy="310896"/>
+          </a:xfrm>
+          <a:prstGeom prst="roundRect">
+            <a:avLst>
+              <a:gd name="adj" fmla="val 50000"/>
+            </a:avLst>
+          </a:prstGeom>
+          <a:solidFill>
+            <a:srgbClr val="1E9E74"/>
+          </a:solidFill>
+          <a:ln w="12700">
+            <a:solidFill>
+              <a:srgbClr val="157355"/>
+            </a:solidFill>
+          </a:ln>
+          <a:effectLst/>
+          <a:effectLst>
+            <a:outerShdw blurRad="90000" dist="38000" dir="5400000" rotWithShape="0">
+              <a:srgbClr val="20242E">
+                <a:alpha val="22000"/>
+              </a:srgbClr>
+            </a:outerShdw>
+          </a:effectLst>
+        </p:spPr>
+        <p:style>
+          <a:lnRef idx="1">
+            <a:schemeClr val="accent1"/>
+          </a:lnRef>
+          <a:fillRef idx="3">
+            <a:schemeClr val="accent1"/>
+          </a:fillRef>
+          <a:effectRef idx="2">
+            <a:schemeClr val="accent1"/>
+          </a:effectRef>
+          <a:fontRef idx="minor">
+            <a:schemeClr val="lt1"/>
+          </a:fontRef>
+        </p:style>
+        <p:txBody>
+          <a:bodyPr rtlCol="0" anchor="ctr" wrap="none" lIns="88900" rIns="88900" tIns="12700" bIns="12700"/>
+          <a:lstStyle/>
+          <a:p>
+            <a:pPr algn="ctr"/>
+            <a:r>
+              <a:rPr sz="1100" b="1">
+                <a:solidFill>
+                  <a:srgbClr val="FFFFFF"/>
+                </a:solidFill>
+                <a:latin typeface="Inter"/>
+              </a:rPr>
+              <a:t>✓</a:t>
+            </a:r>
+          </a:p>
+        </p:txBody>
+      </p:sp>
+      <p:sp>
+        <p:nvSpPr>
+          <p:cNvPr id="30" name="Rounded Rectangle 29"/>
           <p:cNvSpPr/>
           <p:nvPr/>
         </p:nvSpPr>
@@ -17201,7 +18210,7 @@
       </p:sp>
       <p:sp>
         <p:nvSpPr>
-          <p:cNvPr id="28" name="Rounded Rectangle 27"/>
+          <p:cNvPr id="31" name="Rounded Rectangle 30"/>
           <p:cNvSpPr/>
           <p:nvPr/>
         </p:nvSpPr>
@@ -17247,7 +18256,7 @@
       </p:sp>
       <p:sp>
         <p:nvSpPr>
-          <p:cNvPr id="29" name="TextBox 28"/>
+          <p:cNvPr id="32" name="TextBox 31"/>
           <p:cNvSpPr txBox="1"/>
           <p:nvPr/>
         </p:nvSpPr>
@@ -17292,7 +18301,7 @@
       </p:sp>
       <p:sp>
         <p:nvSpPr>
-          <p:cNvPr id="30" name="TextBox 29"/>
+          <p:cNvPr id="33" name="TextBox 32"/>
           <p:cNvSpPr txBox="1"/>
           <p:nvPr/>
         </p:nvSpPr>
@@ -17337,7 +18346,7 @@
       </p:sp>
       <p:sp>
         <p:nvSpPr>
-          <p:cNvPr id="31" name="Rectangle 30"/>
+          <p:cNvPr id="34" name="Rectangle 33"/>
           <p:cNvSpPr/>
           <p:nvPr/>
         </p:nvSpPr>
@@ -17381,7 +18390,7 @@
       </p:sp>
       <p:sp>
         <p:nvSpPr>
-          <p:cNvPr id="32" name="TextBox 31"/>
+          <p:cNvPr id="35" name="TextBox 34"/>
           <p:cNvSpPr txBox="1"/>
           <p:nvPr/>
         </p:nvSpPr>
@@ -17426,7 +18435,289 @@
       </p:sp>
       <p:sp>
         <p:nvSpPr>
-          <p:cNvPr id="33" name="Rounded Rectangle 32"/>
+          <p:cNvPr id="36" name="Rounded Rectangle 35"/>
+          <p:cNvSpPr/>
+          <p:nvPr/>
+        </p:nvSpPr>
+        <p:spPr>
+          <a:xfrm>
+            <a:off x="11292840" y="4407408"/>
+            <a:ext cx="329184" cy="310896"/>
+          </a:xfrm>
+          <a:prstGeom prst="roundRect">
+            <a:avLst>
+              <a:gd name="adj" fmla="val 50000"/>
+            </a:avLst>
+          </a:prstGeom>
+          <a:solidFill>
+            <a:srgbClr val="1E9E74"/>
+          </a:solidFill>
+          <a:ln w="12700">
+            <a:solidFill>
+              <a:srgbClr val="157355"/>
+            </a:solidFill>
+          </a:ln>
+          <a:effectLst/>
+          <a:effectLst>
+            <a:outerShdw blurRad="90000" dist="38000" dir="5400000" rotWithShape="0">
+              <a:srgbClr val="20242E">
+                <a:alpha val="22000"/>
+              </a:srgbClr>
+            </a:outerShdw>
+          </a:effectLst>
+        </p:spPr>
+        <p:style>
+          <a:lnRef idx="1">
+            <a:schemeClr val="accent1"/>
+          </a:lnRef>
+          <a:fillRef idx="3">
+            <a:schemeClr val="accent1"/>
+          </a:fillRef>
+          <a:effectRef idx="2">
+            <a:schemeClr val="accent1"/>
+          </a:effectRef>
+          <a:fontRef idx="minor">
+            <a:schemeClr val="lt1"/>
+          </a:fontRef>
+        </p:style>
+        <p:txBody>
+          <a:bodyPr rtlCol="0" anchor="ctr" wrap="none" lIns="88900" rIns="88900" tIns="12700" bIns="12700"/>
+          <a:lstStyle/>
+          <a:p>
+            <a:pPr algn="ctr"/>
+            <a:r>
+              <a:rPr sz="1100" b="1">
+                <a:solidFill>
+                  <a:srgbClr val="FFFFFF"/>
+                </a:solidFill>
+                <a:latin typeface="Inter"/>
+              </a:rPr>
+              <a:t>✓</a:t>
+            </a:r>
+          </a:p>
+        </p:txBody>
+      </p:sp>
+      <p:sp>
+        <p:nvSpPr>
+          <p:cNvPr id="37" name="Rounded Rectangle 36"/>
+          <p:cNvSpPr/>
+          <p:nvPr/>
+        </p:nvSpPr>
+        <p:spPr>
+          <a:xfrm>
+            <a:off x="457200" y="6053328"/>
+            <a:ext cx="2093976" cy="365760"/>
+          </a:xfrm>
+          <a:prstGeom prst="roundRect">
+            <a:avLst>
+              <a:gd name="adj" fmla="val 50000"/>
+            </a:avLst>
+          </a:prstGeom>
+          <a:solidFill>
+            <a:srgbClr val="1E9E74"/>
+          </a:solidFill>
+          <a:ln w="12700">
+            <a:solidFill>
+              <a:srgbClr val="E4E3DE"/>
+            </a:solidFill>
+          </a:ln>
+          <a:effectLst/>
+        </p:spPr>
+        <p:style>
+          <a:lnRef idx="1">
+            <a:schemeClr val="accent1"/>
+          </a:lnRef>
+          <a:fillRef idx="3">
+            <a:schemeClr val="accent1"/>
+          </a:fillRef>
+          <a:effectRef idx="2">
+            <a:schemeClr val="accent1"/>
+          </a:effectRef>
+          <a:fontRef idx="minor">
+            <a:schemeClr val="lt1"/>
+          </a:fontRef>
+        </p:style>
+        <p:txBody>
+          <a:bodyPr rtlCol="0" anchor="ctr" tIns="12700" bIns="12700"/>
+          <a:lstStyle/>
+          <a:p>
+            <a:pPr algn="ctr"/>
+            <a:r>
+              <a:rPr sz="1050" b="1">
+                <a:solidFill>
+                  <a:srgbClr val="FFFFFF"/>
+                </a:solidFill>
+                <a:latin typeface="Inter"/>
+              </a:rPr>
+              <a:t>▶  Mostrar solución</a:t>
+            </a:r>
+          </a:p>
+        </p:txBody>
+      </p:sp>
+      <p:sp>
+        <p:nvSpPr>
+          <p:cNvPr id="38" name="Rounded Rectangle 37"/>
+          <p:cNvSpPr/>
+          <p:nvPr/>
+        </p:nvSpPr>
+        <p:spPr>
+          <a:xfrm>
+            <a:off x="2697480" y="6053328"/>
+            <a:ext cx="1088136" cy="365760"/>
+          </a:xfrm>
+          <a:prstGeom prst="roundRect">
+            <a:avLst>
+              <a:gd name="adj" fmla="val 50000"/>
+            </a:avLst>
+          </a:prstGeom>
+          <a:solidFill>
+            <a:srgbClr val="FFFFFF"/>
+          </a:solidFill>
+          <a:ln w="12700">
+            <a:solidFill>
+              <a:srgbClr val="E4E3DE"/>
+            </a:solidFill>
+          </a:ln>
+          <a:effectLst/>
+        </p:spPr>
+        <p:style>
+          <a:lnRef idx="1">
+            <a:schemeClr val="accent1"/>
+          </a:lnRef>
+          <a:fillRef idx="3">
+            <a:schemeClr val="accent1"/>
+          </a:fillRef>
+          <a:effectRef idx="2">
+            <a:schemeClr val="accent1"/>
+          </a:effectRef>
+          <a:fontRef idx="minor">
+            <a:schemeClr val="lt1"/>
+          </a:fontRef>
+        </p:style>
+        <p:txBody>
+          <a:bodyPr rtlCol="0" anchor="ctr" tIns="12700" bIns="12700"/>
+          <a:lstStyle/>
+          <a:p>
+            <a:pPr algn="ctr"/>
+            <a:r>
+              <a:rPr sz="1050" b="1">
+                <a:solidFill>
+                  <a:srgbClr val="157355"/>
+                </a:solidFill>
+                <a:latin typeface="Inter"/>
+              </a:rPr>
+              <a:t>⏭  Saltar</a:t>
+            </a:r>
+          </a:p>
+        </p:txBody>
+      </p:sp>
+      <p:sp>
+        <p:nvSpPr>
+          <p:cNvPr id="39" name="Rounded Rectangle 38">
+            <a:hlinkClick action="ppaction://hlinksldjump" r:id="rId3"/>
+          </p:cNvPr>
+          <p:cNvSpPr/>
+          <p:nvPr/>
+        </p:nvSpPr>
+        <p:spPr>
+          <a:xfrm>
+            <a:off x="3931920" y="6053328"/>
+            <a:ext cx="1691639" cy="365760"/>
+          </a:xfrm>
+          <a:prstGeom prst="roundRect">
+            <a:avLst>
+              <a:gd name="adj" fmla="val 50000"/>
+            </a:avLst>
+          </a:prstGeom>
+          <a:solidFill>
+            <a:srgbClr val="FFFFFF"/>
+          </a:solidFill>
+          <a:ln w="12700">
+            <a:solidFill>
+              <a:srgbClr val="E4E3DE"/>
+            </a:solidFill>
+          </a:ln>
+          <a:effectLst/>
+        </p:spPr>
+        <p:style>
+          <a:lnRef idx="1">
+            <a:schemeClr val="accent1"/>
+          </a:lnRef>
+          <a:fillRef idx="3">
+            <a:schemeClr val="accent1"/>
+          </a:fillRef>
+          <a:effectRef idx="2">
+            <a:schemeClr val="accent1"/>
+          </a:effectRef>
+          <a:fontRef idx="minor">
+            <a:schemeClr val="lt1"/>
+          </a:fontRef>
+        </p:style>
+        <p:txBody>
+          <a:bodyPr rtlCol="0" anchor="ctr" tIns="12700" bIns="12700"/>
+          <a:lstStyle/>
+          <a:p>
+            <a:pPr algn="ctr"/>
+            <a:r>
+              <a:rPr sz="1050" b="1">
+                <a:solidFill>
+                  <a:srgbClr val="157355"/>
+                </a:solidFill>
+                <a:latin typeface="Inter"/>
+              </a:rPr>
+              <a:t>⌂  Menú (dia 2)</a:t>
+            </a:r>
+          </a:p>
+        </p:txBody>
+      </p:sp>
+      <p:sp>
+        <p:nvSpPr>
+          <p:cNvPr id="40" name="TextBox 39"/>
+          <p:cNvSpPr txBox="1"/>
+          <p:nvPr/>
+        </p:nvSpPr>
+        <p:spPr>
+          <a:xfrm>
+            <a:off x="8321040" y="6053328"/>
+            <a:ext cx="3383280" cy="365760"/>
+          </a:xfrm>
+          <a:prstGeom prst="rect">
+            <a:avLst/>
+          </a:prstGeom>
+          <a:noFill/>
+        </p:spPr>
+        <p:txBody>
+          <a:bodyPr wrap="square" anchor="ctr" lIns="38100" rIns="38100" tIns="25400" bIns="25400">
+            <a:spAutoFit/>
+          </a:bodyPr>
+          <a:lstStyle/>
+          <a:p>
+            <a:pPr algn="r">
+              <a:lnSpc>
+                <a:spcPct val="106000"/>
+              </a:lnSpc>
+              <a:spcBef>
+                <a:spcPts val="0"/>
+              </a:spcBef>
+              <a:spcAft>
+                <a:spcPts val="200"/>
+              </a:spcAft>
+            </a:pPr>
+            <a:r>
+              <a:rPr sz="850" b="0" i="1">
+                <a:solidFill>
+                  <a:srgbClr val="6A6E78"/>
+                </a:solidFill>
+                <a:latin typeface="Inter"/>
+              </a:rPr>
+              <a:t>Noodroute (§5): werkt zonder audio/internet</a:t>
+            </a:r>
+          </a:p>
+        </p:txBody>
+      </p:sp>
+      <p:sp>
+        <p:nvSpPr>
+          <p:cNvPr id="41" name="Rounded Rectangle 40"/>
           <p:cNvSpPr/>
           <p:nvPr/>
         </p:nvSpPr>
@@ -17502,7 +18793,7 @@
       </p:sp>
       <p:sp>
         <p:nvSpPr>
-          <p:cNvPr id="34" name="Rounded Rectangle 33"/>
+          <p:cNvPr id="42" name="Rounded Rectangle 41"/>
           <p:cNvSpPr/>
           <p:nvPr/>
         </p:nvSpPr>
@@ -17557,223 +18848,7 @@
       </p:sp>
       <p:sp>
         <p:nvSpPr>
-          <p:cNvPr id="35" name="Rounded Rectangle 34"/>
-          <p:cNvSpPr/>
-          <p:nvPr/>
-        </p:nvSpPr>
-        <p:spPr>
-          <a:xfrm>
-            <a:off x="457200" y="6053328"/>
-            <a:ext cx="2093976" cy="365760"/>
-          </a:xfrm>
-          <a:prstGeom prst="roundRect">
-            <a:avLst>
-              <a:gd name="adj" fmla="val 50000"/>
-            </a:avLst>
-          </a:prstGeom>
-          <a:solidFill>
-            <a:srgbClr val="1E9E74"/>
-          </a:solidFill>
-          <a:ln w="12700">
-            <a:solidFill>
-              <a:srgbClr val="E4E3DE"/>
-            </a:solidFill>
-          </a:ln>
-          <a:effectLst/>
-        </p:spPr>
-        <p:style>
-          <a:lnRef idx="1">
-            <a:schemeClr val="accent1"/>
-          </a:lnRef>
-          <a:fillRef idx="3">
-            <a:schemeClr val="accent1"/>
-          </a:fillRef>
-          <a:effectRef idx="2">
-            <a:schemeClr val="accent1"/>
-          </a:effectRef>
-          <a:fontRef idx="minor">
-            <a:schemeClr val="lt1"/>
-          </a:fontRef>
-        </p:style>
-        <p:txBody>
-          <a:bodyPr rtlCol="0" anchor="ctr" tIns="12700" bIns="12700"/>
-          <a:lstStyle/>
-          <a:p>
-            <a:pPr algn="ctr"/>
-            <a:r>
-              <a:rPr sz="1050" b="1">
-                <a:solidFill>
-                  <a:srgbClr val="FFFFFF"/>
-                </a:solidFill>
-                <a:latin typeface="Inter"/>
-              </a:rPr>
-              <a:t>▶  Mostrar solución</a:t>
-            </a:r>
-          </a:p>
-        </p:txBody>
-      </p:sp>
-      <p:sp>
-        <p:nvSpPr>
-          <p:cNvPr id="36" name="Rounded Rectangle 35"/>
-          <p:cNvSpPr/>
-          <p:nvPr/>
-        </p:nvSpPr>
-        <p:spPr>
-          <a:xfrm>
-            <a:off x="2697480" y="6053328"/>
-            <a:ext cx="1088136" cy="365760"/>
-          </a:xfrm>
-          <a:prstGeom prst="roundRect">
-            <a:avLst>
-              <a:gd name="adj" fmla="val 50000"/>
-            </a:avLst>
-          </a:prstGeom>
-          <a:solidFill>
-            <a:srgbClr val="FFFFFF"/>
-          </a:solidFill>
-          <a:ln w="12700">
-            <a:solidFill>
-              <a:srgbClr val="E4E3DE"/>
-            </a:solidFill>
-          </a:ln>
-          <a:effectLst/>
-        </p:spPr>
-        <p:style>
-          <a:lnRef idx="1">
-            <a:schemeClr val="accent1"/>
-          </a:lnRef>
-          <a:fillRef idx="3">
-            <a:schemeClr val="accent1"/>
-          </a:fillRef>
-          <a:effectRef idx="2">
-            <a:schemeClr val="accent1"/>
-          </a:effectRef>
-          <a:fontRef idx="minor">
-            <a:schemeClr val="lt1"/>
-          </a:fontRef>
-        </p:style>
-        <p:txBody>
-          <a:bodyPr rtlCol="0" anchor="ctr" tIns="12700" bIns="12700"/>
-          <a:lstStyle/>
-          <a:p>
-            <a:pPr algn="ctr"/>
-            <a:r>
-              <a:rPr sz="1050" b="1">
-                <a:solidFill>
-                  <a:srgbClr val="157355"/>
-                </a:solidFill>
-                <a:latin typeface="Inter"/>
-              </a:rPr>
-              <a:t>⏭  Saltar</a:t>
-            </a:r>
-          </a:p>
-        </p:txBody>
-      </p:sp>
-      <p:sp>
-        <p:nvSpPr>
-          <p:cNvPr id="37" name="Rounded Rectangle 36"/>
-          <p:cNvSpPr/>
-          <p:nvPr/>
-        </p:nvSpPr>
-        <p:spPr>
-          <a:xfrm>
-            <a:off x="3931920" y="6053328"/>
-            <a:ext cx="1691639" cy="365760"/>
-          </a:xfrm>
-          <a:prstGeom prst="roundRect">
-            <a:avLst>
-              <a:gd name="adj" fmla="val 50000"/>
-            </a:avLst>
-          </a:prstGeom>
-          <a:solidFill>
-            <a:srgbClr val="FFFFFF"/>
-          </a:solidFill>
-          <a:ln w="12700">
-            <a:solidFill>
-              <a:srgbClr val="E4E3DE"/>
-            </a:solidFill>
-          </a:ln>
-          <a:effectLst/>
-        </p:spPr>
-        <p:style>
-          <a:lnRef idx="1">
-            <a:schemeClr val="accent1"/>
-          </a:lnRef>
-          <a:fillRef idx="3">
-            <a:schemeClr val="accent1"/>
-          </a:fillRef>
-          <a:effectRef idx="2">
-            <a:schemeClr val="accent1"/>
-          </a:effectRef>
-          <a:fontRef idx="minor">
-            <a:schemeClr val="lt1"/>
-          </a:fontRef>
-        </p:style>
-        <p:txBody>
-          <a:bodyPr rtlCol="0" anchor="ctr" tIns="12700" bIns="12700"/>
-          <a:lstStyle/>
-          <a:p>
-            <a:pPr algn="ctr"/>
-            <a:r>
-              <a:rPr sz="1050" b="1">
-                <a:solidFill>
-                  <a:srgbClr val="157355"/>
-                </a:solidFill>
-                <a:latin typeface="Inter"/>
-              </a:rPr>
-              <a:t>⌂  Menú (dia 2)</a:t>
-            </a:r>
-          </a:p>
-        </p:txBody>
-      </p:sp>
-      <p:sp>
-        <p:nvSpPr>
-          <p:cNvPr id="38" name="TextBox 37"/>
-          <p:cNvSpPr txBox="1"/>
-          <p:nvPr/>
-        </p:nvSpPr>
-        <p:spPr>
-          <a:xfrm>
-            <a:off x="8321040" y="6053328"/>
-            <a:ext cx="3383280" cy="365760"/>
-          </a:xfrm>
-          <a:prstGeom prst="rect">
-            <a:avLst/>
-          </a:prstGeom>
-          <a:noFill/>
-        </p:spPr>
-        <p:txBody>
-          <a:bodyPr wrap="square" anchor="ctr" lIns="38100" rIns="38100" tIns="25400" bIns="25400">
-            <a:spAutoFit/>
-          </a:bodyPr>
-          <a:lstStyle/>
-          <a:p>
-            <a:pPr algn="r">
-              <a:lnSpc>
-                <a:spcPct val="106000"/>
-              </a:lnSpc>
-              <a:spcBef>
-                <a:spcPts val="0"/>
-              </a:spcBef>
-              <a:spcAft>
-                <a:spcPts val="200"/>
-              </a:spcAft>
-            </a:pPr>
-            <a:r>
-              <a:rPr sz="850" b="0" i="1">
-                <a:solidFill>
-                  <a:srgbClr val="6A6E78"/>
-                </a:solidFill>
-                <a:latin typeface="Inter"/>
-              </a:rPr>
-              <a:t>Noodroute (§5): werkt zonder audio/internet</a:t>
-            </a:r>
-          </a:p>
-        </p:txBody>
-      </p:sp>
-      <p:sp>
-        <p:nvSpPr>
-          <p:cNvPr id="39" name="Rectangle 38"/>
+          <p:cNvPr id="43" name="Rectangle 42"/>
           <p:cNvSpPr/>
           <p:nvPr/>
         </p:nvSpPr>
@@ -17817,7 +18892,7 @@
       </p:sp>
       <p:sp>
         <p:nvSpPr>
-          <p:cNvPr id="40" name="TextBox 39"/>
+          <p:cNvPr id="44" name="TextBox 43"/>
           <p:cNvSpPr txBox="1"/>
           <p:nvPr/>
         </p:nvSpPr>
@@ -17871,7 +18946,7 @@
       </p:sp>
       <p:sp>
         <p:nvSpPr>
-          <p:cNvPr id="41" name="TextBox 40"/>
+          <p:cNvPr id="45" name="TextBox 44"/>
           <p:cNvSpPr txBox="1"/>
           <p:nvPr/>
         </p:nvSpPr>
@@ -17916,7 +18991,7 @@
       </p:sp>
       <p:sp>
         <p:nvSpPr>
-          <p:cNvPr id="42" name="TextBox 41"/>
+          <p:cNvPr id="46" name="TextBox 45"/>
           <p:cNvSpPr txBox="1"/>
           <p:nvPr/>
         </p:nvSpPr>
@@ -17964,6 +19039,303 @@
   <p:clrMapOvr>
     <a:masterClrMapping/>
   </p:clrMapOvr>
+  <p:timing>
+    <p:tnLst>
+      <p:par>
+        <p:cTn id="1" dur="indefinite" restart="never" nodeType="tmRoot">
+          <p:childTnLst>
+            <p:seq concurrent="1" nextAc="seek">
+              <p:cTn id="2" dur="indefinite" nodeType="mainSeq">
+                <p:childTnLst/>
+              </p:cTn>
+              <p:prevCondLst>
+                <p:cond evt="onPrev" delay="0">
+                  <p:tgtEl>
+                    <p:sldTgt/>
+                  </p:tgtEl>
+                </p:cond>
+              </p:prevCondLst>
+              <p:nextCondLst>
+                <p:cond evt="onNext" delay="0">
+                  <p:tgtEl>
+                    <p:sldTgt/>
+                  </p:tgtEl>
+                </p:cond>
+              </p:nextCondLst>
+            </p:seq>
+            <p:seq concurrent="1" nextAc="seek">
+              <p:cTn id="5" restart="whenNotActive" fill="hold" nodeType="interactiveSeq">
+                <p:stCondLst>
+                  <p:cond evt="onClick" delay="0">
+                    <p:tgtEl>
+                      <p:spTgt spid="9"/>
+                    </p:tgtEl>
+                  </p:cond>
+                </p:stCondLst>
+                <p:endSync evt="end" delay="0">
+                  <p:rtn val="all"/>
+                </p:endSync>
+                <p:childTnLst>
+                  <p:par>
+                    <p:cTn id="6" fill="hold">
+                      <p:stCondLst>
+                        <p:cond delay="0"/>
+                      </p:stCondLst>
+                      <p:childTnLst>
+                        <p:par>
+                          <p:cTn id="7" presetID="10" presetClass="entr" presetSubtype="0" fill="hold" grpId="0" nodeType="clickEffect">
+                            <p:stCondLst>
+                              <p:cond delay="0"/>
+                            </p:stCondLst>
+                            <p:childTnLst>
+                              <p:set>
+                                <p:cBhvr>
+                                  <p:cTn id="8" dur="1" fill="hold">
+                                    <p:stCondLst>
+                                      <p:cond delay="0"/>
+                                    </p:stCondLst>
+                                  </p:cTn>
+                                  <p:tgtEl>
+                                    <p:spTgt spid="15"/>
+                                  </p:tgtEl>
+                                  <p:attrNameLst>
+                                    <p:attrName>style.visibility</p:attrName>
+                                  </p:attrNameLst>
+                                </p:cBhvr>
+                                <p:to>
+                                  <p:strVal val="visible"/>
+                                </p:to>
+                              </p:set>
+                              <p:animEffect transition="in" filter="fade">
+                                <p:cBhvr>
+                                  <p:cTn id="9" dur="400"/>
+                                  <p:tgtEl>
+                                    <p:spTgt spid="15"/>
+                                  </p:tgtEl>
+                                </p:cBhvr>
+                              </p:animEffect>
+                            </p:childTnLst>
+                          </p:cTn>
+                        </p:par>
+                      </p:childTnLst>
+                    </p:cTn>
+                  </p:par>
+                </p:childTnLst>
+              </p:cTn>
+              <p:nextCondLst>
+                <p:cond evt="onClick" delay="0">
+                  <p:tgtEl>
+                    <p:spTgt spid="9"/>
+                  </p:tgtEl>
+                </p:cond>
+              </p:nextCondLst>
+            </p:seq>
+            <p:seq concurrent="1" nextAc="seek">
+              <p:cTn id="15" restart="whenNotActive" fill="hold" nodeType="interactiveSeq">
+                <p:stCondLst>
+                  <p:cond evt="onClick" delay="0">
+                    <p:tgtEl>
+                      <p:spTgt spid="16"/>
+                    </p:tgtEl>
+                  </p:cond>
+                </p:stCondLst>
+                <p:endSync evt="end" delay="0">
+                  <p:rtn val="all"/>
+                </p:endSync>
+                <p:childTnLst>
+                  <p:par>
+                    <p:cTn id="16" fill="hold">
+                      <p:stCondLst>
+                        <p:cond delay="0"/>
+                      </p:stCondLst>
+                      <p:childTnLst>
+                        <p:par>
+                          <p:cTn id="17" presetID="10" presetClass="entr" presetSubtype="0" fill="hold" grpId="0" nodeType="clickEffect">
+                            <p:stCondLst>
+                              <p:cond delay="0"/>
+                            </p:stCondLst>
+                            <p:childTnLst>
+                              <p:set>
+                                <p:cBhvr>
+                                  <p:cTn id="18" dur="1" fill="hold">
+                                    <p:stCondLst>
+                                      <p:cond delay="0"/>
+                                    </p:stCondLst>
+                                  </p:cTn>
+                                  <p:tgtEl>
+                                    <p:spTgt spid="22"/>
+                                  </p:tgtEl>
+                                  <p:attrNameLst>
+                                    <p:attrName>style.visibility</p:attrName>
+                                  </p:attrNameLst>
+                                </p:cBhvr>
+                                <p:to>
+                                  <p:strVal val="visible"/>
+                                </p:to>
+                              </p:set>
+                              <p:animEffect transition="in" filter="fade">
+                                <p:cBhvr>
+                                  <p:cTn id="19" dur="400"/>
+                                  <p:tgtEl>
+                                    <p:spTgt spid="22"/>
+                                  </p:tgtEl>
+                                </p:cBhvr>
+                              </p:animEffect>
+                            </p:childTnLst>
+                          </p:cTn>
+                        </p:par>
+                      </p:childTnLst>
+                    </p:cTn>
+                  </p:par>
+                </p:childTnLst>
+              </p:cTn>
+              <p:nextCondLst>
+                <p:cond evt="onClick" delay="0">
+                  <p:tgtEl>
+                    <p:spTgt spid="16"/>
+                  </p:tgtEl>
+                </p:cond>
+              </p:nextCondLst>
+            </p:seq>
+            <p:seq concurrent="1" nextAc="seek">
+              <p:cTn id="25" restart="whenNotActive" fill="hold" nodeType="interactiveSeq">
+                <p:stCondLst>
+                  <p:cond evt="onClick" delay="0">
+                    <p:tgtEl>
+                      <p:spTgt spid="23"/>
+                    </p:tgtEl>
+                  </p:cond>
+                </p:stCondLst>
+                <p:endSync evt="end" delay="0">
+                  <p:rtn val="all"/>
+                </p:endSync>
+                <p:childTnLst>
+                  <p:par>
+                    <p:cTn id="26" fill="hold">
+                      <p:stCondLst>
+                        <p:cond delay="0"/>
+                      </p:stCondLst>
+                      <p:childTnLst>
+                        <p:par>
+                          <p:cTn id="27" presetID="10" presetClass="entr" presetSubtype="0" fill="hold" grpId="0" nodeType="clickEffect">
+                            <p:stCondLst>
+                              <p:cond delay="0"/>
+                            </p:stCondLst>
+                            <p:childTnLst>
+                              <p:set>
+                                <p:cBhvr>
+                                  <p:cTn id="28" dur="1" fill="hold">
+                                    <p:stCondLst>
+                                      <p:cond delay="0"/>
+                                    </p:stCondLst>
+                                  </p:cTn>
+                                  <p:tgtEl>
+                                    <p:spTgt spid="29"/>
+                                  </p:tgtEl>
+                                  <p:attrNameLst>
+                                    <p:attrName>style.visibility</p:attrName>
+                                  </p:attrNameLst>
+                                </p:cBhvr>
+                                <p:to>
+                                  <p:strVal val="visible"/>
+                                </p:to>
+                              </p:set>
+                              <p:animEffect transition="in" filter="fade">
+                                <p:cBhvr>
+                                  <p:cTn id="29" dur="400"/>
+                                  <p:tgtEl>
+                                    <p:spTgt spid="29"/>
+                                  </p:tgtEl>
+                                </p:cBhvr>
+                              </p:animEffect>
+                            </p:childTnLst>
+                          </p:cTn>
+                        </p:par>
+                      </p:childTnLst>
+                    </p:cTn>
+                  </p:par>
+                </p:childTnLst>
+              </p:cTn>
+              <p:nextCondLst>
+                <p:cond evt="onClick" delay="0">
+                  <p:tgtEl>
+                    <p:spTgt spid="23"/>
+                  </p:tgtEl>
+                </p:cond>
+              </p:nextCondLst>
+            </p:seq>
+            <p:seq concurrent="1" nextAc="seek">
+              <p:cTn id="35" restart="whenNotActive" fill="hold" nodeType="interactiveSeq">
+                <p:stCondLst>
+                  <p:cond evt="onClick" delay="0">
+                    <p:tgtEl>
+                      <p:spTgt spid="30"/>
+                    </p:tgtEl>
+                  </p:cond>
+                </p:stCondLst>
+                <p:endSync evt="end" delay="0">
+                  <p:rtn val="all"/>
+                </p:endSync>
+                <p:childTnLst>
+                  <p:par>
+                    <p:cTn id="36" fill="hold">
+                      <p:stCondLst>
+                        <p:cond delay="0"/>
+                      </p:stCondLst>
+                      <p:childTnLst>
+                        <p:par>
+                          <p:cTn id="37" presetID="10" presetClass="entr" presetSubtype="0" fill="hold" grpId="0" nodeType="clickEffect">
+                            <p:stCondLst>
+                              <p:cond delay="0"/>
+                            </p:stCondLst>
+                            <p:childTnLst>
+                              <p:set>
+                                <p:cBhvr>
+                                  <p:cTn id="38" dur="1" fill="hold">
+                                    <p:stCondLst>
+                                      <p:cond delay="0"/>
+                                    </p:stCondLst>
+                                  </p:cTn>
+                                  <p:tgtEl>
+                                    <p:spTgt spid="36"/>
+                                  </p:tgtEl>
+                                  <p:attrNameLst>
+                                    <p:attrName>style.visibility</p:attrName>
+                                  </p:attrNameLst>
+                                </p:cBhvr>
+                                <p:to>
+                                  <p:strVal val="visible"/>
+                                </p:to>
+                              </p:set>
+                              <p:animEffect transition="in" filter="fade">
+                                <p:cBhvr>
+                                  <p:cTn id="39" dur="400"/>
+                                  <p:tgtEl>
+                                    <p:spTgt spid="36"/>
+                                  </p:tgtEl>
+                                </p:cBhvr>
+                              </p:animEffect>
+                            </p:childTnLst>
+                          </p:cTn>
+                        </p:par>
+                      </p:childTnLst>
+                    </p:cTn>
+                  </p:par>
+                </p:childTnLst>
+              </p:cTn>
+              <p:nextCondLst>
+                <p:cond evt="onClick" delay="0">
+                  <p:tgtEl>
+                    <p:spTgt spid="30"/>
+                  </p:tgtEl>
+                </p:cond>
+              </p:nextCondLst>
+            </p:seq>
+          </p:childTnLst>
+        </p:cTn>
+      </p:par>
+    </p:tnLst>
+  </p:timing>
 </p:sld>
 </file>
 
@@ -26887,7 +28259,7 @@
         <p:spPr>
           <a:xfrm>
             <a:off x="1783080" y="1371600"/>
-            <a:ext cx="9692640" cy="566928"/>
+            <a:ext cx="6766560" cy="566928"/>
           </a:xfrm>
           <a:prstGeom prst="rect">
             <a:avLst/>
@@ -26926,6 +28298,70 @@
       <p:sp>
         <p:nvSpPr>
           <p:cNvPr id="11" name="Rounded Rectangle 10"/>
+          <p:cNvSpPr/>
+          <p:nvPr/>
+        </p:nvSpPr>
+        <p:spPr>
+          <a:xfrm>
+            <a:off x="8686800" y="1499616"/>
+            <a:ext cx="2926080" cy="310896"/>
+          </a:xfrm>
+          <a:prstGeom prst="roundRect">
+            <a:avLst>
+              <a:gd name="adj" fmla="val 50000"/>
+            </a:avLst>
+          </a:prstGeom>
+          <a:solidFill>
+            <a:srgbClr val="1E9E74"/>
+          </a:solidFill>
+          <a:ln w="12700">
+            <a:solidFill>
+              <a:srgbClr val="157355"/>
+            </a:solidFill>
+          </a:ln>
+          <a:effectLst/>
+          <a:effectLst>
+            <a:outerShdw blurRad="90000" dist="38000" dir="5400000" rotWithShape="0">
+              <a:srgbClr val="20242E">
+                <a:alpha val="22000"/>
+              </a:srgbClr>
+            </a:outerShdw>
+          </a:effectLst>
+        </p:spPr>
+        <p:style>
+          <a:lnRef idx="1">
+            <a:schemeClr val="accent1"/>
+          </a:lnRef>
+          <a:fillRef idx="3">
+            <a:schemeClr val="accent1"/>
+          </a:fillRef>
+          <a:effectRef idx="2">
+            <a:schemeClr val="accent1"/>
+          </a:effectRef>
+          <a:fontRef idx="minor">
+            <a:schemeClr val="lt1"/>
+          </a:fontRef>
+        </p:style>
+        <p:txBody>
+          <a:bodyPr rtlCol="0" anchor="ctr" wrap="none" lIns="88900" rIns="88900" tIns="12700" bIns="12700"/>
+          <a:lstStyle/>
+          <a:p>
+            <a:pPr algn="ctr"/>
+            <a:r>
+              <a:rPr sz="1100" b="1">
+                <a:solidFill>
+                  <a:srgbClr val="FFFFFF"/>
+                </a:solidFill>
+                <a:latin typeface="Inter"/>
+              </a:rPr>
+              <a:t>✓ Perú</a:t>
+            </a:r>
+          </a:p>
+        </p:txBody>
+      </p:sp>
+      <p:sp>
+        <p:nvSpPr>
+          <p:cNvPr id="12" name="Rounded Rectangle 11"/>
           <p:cNvSpPr/>
           <p:nvPr/>
         </p:nvSpPr>
@@ -26980,7 +28416,7 @@
       </p:sp>
       <p:sp>
         <p:nvSpPr>
-          <p:cNvPr id="12" name="Rounded Rectangle 11"/>
+          <p:cNvPr id="13" name="Rounded Rectangle 12"/>
           <p:cNvSpPr/>
           <p:nvPr/>
         </p:nvSpPr>
@@ -27035,14 +28471,14 @@
       </p:sp>
       <p:sp>
         <p:nvSpPr>
-          <p:cNvPr id="13" name="TextBox 12"/>
+          <p:cNvPr id="14" name="TextBox 13"/>
           <p:cNvSpPr txBox="1"/>
           <p:nvPr/>
         </p:nvSpPr>
         <p:spPr>
           <a:xfrm>
             <a:off x="1783080" y="2011680"/>
-            <a:ext cx="9692640" cy="566928"/>
+            <a:ext cx="6766560" cy="566928"/>
           </a:xfrm>
           <a:prstGeom prst="rect">
             <a:avLst/>
@@ -27080,7 +28516,71 @@
       </p:sp>
       <p:sp>
         <p:nvSpPr>
-          <p:cNvPr id="14" name="Rounded Rectangle 13"/>
+          <p:cNvPr id="15" name="Rounded Rectangle 14"/>
+          <p:cNvSpPr/>
+          <p:nvPr/>
+        </p:nvSpPr>
+        <p:spPr>
+          <a:xfrm>
+            <a:off x="8686800" y="2139696"/>
+            <a:ext cx="2926080" cy="310896"/>
+          </a:xfrm>
+          <a:prstGeom prst="roundRect">
+            <a:avLst>
+              <a:gd name="adj" fmla="val 50000"/>
+            </a:avLst>
+          </a:prstGeom>
+          <a:solidFill>
+            <a:srgbClr val="1E9E74"/>
+          </a:solidFill>
+          <a:ln w="12700">
+            <a:solidFill>
+              <a:srgbClr val="157355"/>
+            </a:solidFill>
+          </a:ln>
+          <a:effectLst/>
+          <a:effectLst>
+            <a:outerShdw blurRad="90000" dist="38000" dir="5400000" rotWithShape="0">
+              <a:srgbClr val="20242E">
+                <a:alpha val="22000"/>
+              </a:srgbClr>
+            </a:outerShdw>
+          </a:effectLst>
+        </p:spPr>
+        <p:style>
+          <a:lnRef idx="1">
+            <a:schemeClr val="accent1"/>
+          </a:lnRef>
+          <a:fillRef idx="3">
+            <a:schemeClr val="accent1"/>
+          </a:fillRef>
+          <a:effectRef idx="2">
+            <a:schemeClr val="accent1"/>
+          </a:effectRef>
+          <a:fontRef idx="minor">
+            <a:schemeClr val="lt1"/>
+          </a:fontRef>
+        </p:style>
+        <p:txBody>
+          <a:bodyPr rtlCol="0" anchor="ctr" wrap="none" lIns="88900" rIns="88900" tIns="12700" bIns="12700"/>
+          <a:lstStyle/>
+          <a:p>
+            <a:pPr algn="ctr"/>
+            <a:r>
+              <a:rPr sz="1100" b="1">
+                <a:solidFill>
+                  <a:srgbClr val="FFFFFF"/>
+                </a:solidFill>
+                <a:latin typeface="Inter"/>
+              </a:rPr>
+              <a:t>✓ de h zwijgt</a:t>
+            </a:r>
+          </a:p>
+        </p:txBody>
+      </p:sp>
+      <p:sp>
+        <p:nvSpPr>
+          <p:cNvPr id="16" name="Rounded Rectangle 15"/>
           <p:cNvSpPr/>
           <p:nvPr/>
         </p:nvSpPr>
@@ -27135,7 +28635,7 @@
       </p:sp>
       <p:sp>
         <p:nvSpPr>
-          <p:cNvPr id="15" name="Rounded Rectangle 14"/>
+          <p:cNvPr id="17" name="Rounded Rectangle 16"/>
           <p:cNvSpPr/>
           <p:nvPr/>
         </p:nvSpPr>
@@ -27190,14 +28690,14 @@
       </p:sp>
       <p:sp>
         <p:nvSpPr>
-          <p:cNvPr id="16" name="TextBox 15"/>
+          <p:cNvPr id="18" name="TextBox 17"/>
           <p:cNvSpPr txBox="1"/>
           <p:nvPr/>
         </p:nvSpPr>
         <p:spPr>
           <a:xfrm>
             <a:off x="1783080" y="2651760"/>
-            <a:ext cx="9692640" cy="566928"/>
+            <a:ext cx="6766560" cy="566928"/>
           </a:xfrm>
           <a:prstGeom prst="rect">
             <a:avLst/>
@@ -27235,7 +28735,71 @@
       </p:sp>
       <p:sp>
         <p:nvSpPr>
-          <p:cNvPr id="17" name="Rounded Rectangle 16"/>
+          <p:cNvPr id="19" name="Rounded Rectangle 18"/>
+          <p:cNvSpPr/>
+          <p:nvPr/>
+        </p:nvSpPr>
+        <p:spPr>
+          <a:xfrm>
+            <a:off x="8686800" y="2779776"/>
+            <a:ext cx="2926080" cy="310896"/>
+          </a:xfrm>
+          <a:prstGeom prst="roundRect">
+            <a:avLst>
+              <a:gd name="adj" fmla="val 50000"/>
+            </a:avLst>
+          </a:prstGeom>
+          <a:solidFill>
+            <a:srgbClr val="1E9E74"/>
+          </a:solidFill>
+          <a:ln w="12700">
+            <a:solidFill>
+              <a:srgbClr val="157355"/>
+            </a:solidFill>
+          </a:ln>
+          <a:effectLst/>
+          <a:effectLst>
+            <a:outerShdw blurRad="90000" dist="38000" dir="5400000" rotWithShape="0">
+              <a:srgbClr val="20242E">
+                <a:alpha val="22000"/>
+              </a:srgbClr>
+            </a:outerShdw>
+          </a:effectLst>
+        </p:spPr>
+        <p:style>
+          <a:lnRef idx="1">
+            <a:schemeClr val="accent1"/>
+          </a:lnRef>
+          <a:fillRef idx="3">
+            <a:schemeClr val="accent1"/>
+          </a:fillRef>
+          <a:effectRef idx="2">
+            <a:schemeClr val="accent1"/>
+          </a:effectRef>
+          <a:fontRef idx="minor">
+            <a:schemeClr val="lt1"/>
+          </a:fontRef>
+        </p:style>
+        <p:txBody>
+          <a:bodyPr rtlCol="0" anchor="ctr" wrap="none" lIns="88900" rIns="88900" tIns="12700" bIns="12700"/>
+          <a:lstStyle/>
+          <a:p>
+            <a:pPr algn="ctr"/>
+            <a:r>
+              <a:rPr sz="1100" b="1">
+                <a:solidFill>
+                  <a:srgbClr val="FFFFFF"/>
+                </a:solidFill>
+                <a:latin typeface="Inter"/>
+              </a:rPr>
+              <a:t>✓ cuarenta y siete</a:t>
+            </a:r>
+          </a:p>
+        </p:txBody>
+      </p:sp>
+      <p:sp>
+        <p:nvSpPr>
+          <p:cNvPr id="20" name="Rounded Rectangle 19"/>
           <p:cNvSpPr/>
           <p:nvPr/>
         </p:nvSpPr>
@@ -27290,7 +28854,7 @@
       </p:sp>
       <p:sp>
         <p:nvSpPr>
-          <p:cNvPr id="18" name="Rounded Rectangle 17"/>
+          <p:cNvPr id="21" name="Rounded Rectangle 20"/>
           <p:cNvSpPr/>
           <p:nvPr/>
         </p:nvSpPr>
@@ -27345,14 +28909,14 @@
       </p:sp>
       <p:sp>
         <p:nvSpPr>
-          <p:cNvPr id="19" name="TextBox 18"/>
+          <p:cNvPr id="22" name="TextBox 21"/>
           <p:cNvSpPr txBox="1"/>
           <p:nvPr/>
         </p:nvSpPr>
         <p:spPr>
           <a:xfrm>
             <a:off x="1783080" y="3291840"/>
-            <a:ext cx="9692640" cy="566928"/>
+            <a:ext cx="6766560" cy="566928"/>
           </a:xfrm>
           <a:prstGeom prst="rect">
             <a:avLst/>
@@ -27390,7 +28954,71 @@
       </p:sp>
       <p:sp>
         <p:nvSpPr>
-          <p:cNvPr id="20" name="Rounded Rectangle 19"/>
+          <p:cNvPr id="23" name="Rounded Rectangle 22"/>
+          <p:cNvSpPr/>
+          <p:nvPr/>
+        </p:nvSpPr>
+        <p:spPr>
+          <a:xfrm>
+            <a:off x="8686800" y="3419856"/>
+            <a:ext cx="2926080" cy="310896"/>
+          </a:xfrm>
+          <a:prstGeom prst="roundRect">
+            <a:avLst>
+              <a:gd name="adj" fmla="val 50000"/>
+            </a:avLst>
+          </a:prstGeom>
+          <a:solidFill>
+            <a:srgbClr val="1E9E74"/>
+          </a:solidFill>
+          <a:ln w="12700">
+            <a:solidFill>
+              <a:srgbClr val="157355"/>
+            </a:solidFill>
+          </a:ln>
+          <a:effectLst/>
+          <a:effectLst>
+            <a:outerShdw blurRad="90000" dist="38000" dir="5400000" rotWithShape="0">
+              <a:srgbClr val="20242E">
+                <a:alpha val="22000"/>
+              </a:srgbClr>
+            </a:outerShdw>
+          </a:effectLst>
+        </p:spPr>
+        <p:style>
+          <a:lnRef idx="1">
+            <a:schemeClr val="accent1"/>
+          </a:lnRef>
+          <a:fillRef idx="3">
+            <a:schemeClr val="accent1"/>
+          </a:fillRef>
+          <a:effectRef idx="2">
+            <a:schemeClr val="accent1"/>
+          </a:effectRef>
+          <a:fontRef idx="minor">
+            <a:schemeClr val="lt1"/>
+          </a:fontRef>
+        </p:style>
+        <p:txBody>
+          <a:bodyPr rtlCol="0" anchor="ctr" wrap="none" lIns="88900" rIns="88900" tIns="12700" bIns="12700"/>
+          <a:lstStyle/>
+          <a:p>
+            <a:pPr algn="ctr"/>
+            <a:r>
+              <a:rPr sz="1100" b="1">
+                <a:solidFill>
+                  <a:srgbClr val="FFFFFF"/>
+                </a:solidFill>
+                <a:latin typeface="Inter"/>
+              </a:rPr>
+              <a:t>✓ Encantada</a:t>
+            </a:r>
+          </a:p>
+        </p:txBody>
+      </p:sp>
+      <p:sp>
+        <p:nvSpPr>
+          <p:cNvPr id="24" name="Rounded Rectangle 23"/>
           <p:cNvSpPr/>
           <p:nvPr/>
         </p:nvSpPr>
@@ -27445,7 +29073,7 @@
       </p:sp>
       <p:sp>
         <p:nvSpPr>
-          <p:cNvPr id="21" name="Rounded Rectangle 20"/>
+          <p:cNvPr id="25" name="Rounded Rectangle 24"/>
           <p:cNvSpPr/>
           <p:nvPr/>
         </p:nvSpPr>
@@ -27500,14 +29128,14 @@
       </p:sp>
       <p:sp>
         <p:nvSpPr>
-          <p:cNvPr id="22" name="TextBox 21"/>
+          <p:cNvPr id="26" name="TextBox 25"/>
           <p:cNvSpPr txBox="1"/>
           <p:nvPr/>
         </p:nvSpPr>
         <p:spPr>
           <a:xfrm>
             <a:off x="1783080" y="3931920"/>
-            <a:ext cx="9692640" cy="566928"/>
+            <a:ext cx="6766560" cy="566928"/>
           </a:xfrm>
           <a:prstGeom prst="rect">
             <a:avLst/>
@@ -27545,7 +29173,289 @@
       </p:sp>
       <p:sp>
         <p:nvSpPr>
-          <p:cNvPr id="23" name="Rounded Rectangle 22"/>
+          <p:cNvPr id="27" name="Rounded Rectangle 26"/>
+          <p:cNvSpPr/>
+          <p:nvPr/>
+        </p:nvSpPr>
+        <p:spPr>
+          <a:xfrm>
+            <a:off x="8686800" y="4059936"/>
+            <a:ext cx="2926080" cy="310896"/>
+          </a:xfrm>
+          <a:prstGeom prst="roundRect">
+            <a:avLst>
+              <a:gd name="adj" fmla="val 50000"/>
+            </a:avLst>
+          </a:prstGeom>
+          <a:solidFill>
+            <a:srgbClr val="1E9E74"/>
+          </a:solidFill>
+          <a:ln w="12700">
+            <a:solidFill>
+              <a:srgbClr val="157355"/>
+            </a:solidFill>
+          </a:ln>
+          <a:effectLst/>
+          <a:effectLst>
+            <a:outerShdw blurRad="90000" dist="38000" dir="5400000" rotWithShape="0">
+              <a:srgbClr val="20242E">
+                <a:alpha val="22000"/>
+              </a:srgbClr>
+            </a:outerShdw>
+          </a:effectLst>
+        </p:spPr>
+        <p:style>
+          <a:lnRef idx="1">
+            <a:schemeClr val="accent1"/>
+          </a:lnRef>
+          <a:fillRef idx="3">
+            <a:schemeClr val="accent1"/>
+          </a:fillRef>
+          <a:effectRef idx="2">
+            <a:schemeClr val="accent1"/>
+          </a:effectRef>
+          <a:fontRef idx="minor">
+            <a:schemeClr val="lt1"/>
+          </a:fontRef>
+        </p:style>
+        <p:txBody>
+          <a:bodyPr rtlCol="0" anchor="ctr" wrap="none" lIns="88900" rIns="88900" tIns="12700" bIns="12700"/>
+          <a:lstStyle/>
+          <a:p>
+            <a:pPr algn="ctr"/>
+            <a:r>
+              <a:rPr sz="1100" b="1">
+                <a:solidFill>
+                  <a:srgbClr val="FFFFFF"/>
+                </a:solidFill>
+                <a:latin typeface="Inter"/>
+              </a:rPr>
+              <a:t>✓ casa=llana · México=esdrújula</a:t>
+            </a:r>
+          </a:p>
+        </p:txBody>
+      </p:sp>
+      <p:sp>
+        <p:nvSpPr>
+          <p:cNvPr id="28" name="Rounded Rectangle 27"/>
+          <p:cNvSpPr/>
+          <p:nvPr/>
+        </p:nvSpPr>
+        <p:spPr>
+          <a:xfrm>
+            <a:off x="457200" y="6053328"/>
+            <a:ext cx="2093976" cy="365760"/>
+          </a:xfrm>
+          <a:prstGeom prst="roundRect">
+            <a:avLst>
+              <a:gd name="adj" fmla="val 50000"/>
+            </a:avLst>
+          </a:prstGeom>
+          <a:solidFill>
+            <a:srgbClr val="1E9E74"/>
+          </a:solidFill>
+          <a:ln w="12700">
+            <a:solidFill>
+              <a:srgbClr val="E4E3DE"/>
+            </a:solidFill>
+          </a:ln>
+          <a:effectLst/>
+        </p:spPr>
+        <p:style>
+          <a:lnRef idx="1">
+            <a:schemeClr val="accent1"/>
+          </a:lnRef>
+          <a:fillRef idx="3">
+            <a:schemeClr val="accent1"/>
+          </a:fillRef>
+          <a:effectRef idx="2">
+            <a:schemeClr val="accent1"/>
+          </a:effectRef>
+          <a:fontRef idx="minor">
+            <a:schemeClr val="lt1"/>
+          </a:fontRef>
+        </p:style>
+        <p:txBody>
+          <a:bodyPr rtlCol="0" anchor="ctr" tIns="12700" bIns="12700"/>
+          <a:lstStyle/>
+          <a:p>
+            <a:pPr algn="ctr"/>
+            <a:r>
+              <a:rPr sz="1050" b="1">
+                <a:solidFill>
+                  <a:srgbClr val="FFFFFF"/>
+                </a:solidFill>
+                <a:latin typeface="Inter"/>
+              </a:rPr>
+              <a:t>▶  Mostrar solución</a:t>
+            </a:r>
+          </a:p>
+        </p:txBody>
+      </p:sp>
+      <p:sp>
+        <p:nvSpPr>
+          <p:cNvPr id="29" name="Rounded Rectangle 28"/>
+          <p:cNvSpPr/>
+          <p:nvPr/>
+        </p:nvSpPr>
+        <p:spPr>
+          <a:xfrm>
+            <a:off x="2697480" y="6053328"/>
+            <a:ext cx="1088136" cy="365760"/>
+          </a:xfrm>
+          <a:prstGeom prst="roundRect">
+            <a:avLst>
+              <a:gd name="adj" fmla="val 50000"/>
+            </a:avLst>
+          </a:prstGeom>
+          <a:solidFill>
+            <a:srgbClr val="FFFFFF"/>
+          </a:solidFill>
+          <a:ln w="12700">
+            <a:solidFill>
+              <a:srgbClr val="E4E3DE"/>
+            </a:solidFill>
+          </a:ln>
+          <a:effectLst/>
+        </p:spPr>
+        <p:style>
+          <a:lnRef idx="1">
+            <a:schemeClr val="accent1"/>
+          </a:lnRef>
+          <a:fillRef idx="3">
+            <a:schemeClr val="accent1"/>
+          </a:fillRef>
+          <a:effectRef idx="2">
+            <a:schemeClr val="accent1"/>
+          </a:effectRef>
+          <a:fontRef idx="minor">
+            <a:schemeClr val="lt1"/>
+          </a:fontRef>
+        </p:style>
+        <p:txBody>
+          <a:bodyPr rtlCol="0" anchor="ctr" tIns="12700" bIns="12700"/>
+          <a:lstStyle/>
+          <a:p>
+            <a:pPr algn="ctr"/>
+            <a:r>
+              <a:rPr sz="1050" b="1">
+                <a:solidFill>
+                  <a:srgbClr val="157355"/>
+                </a:solidFill>
+                <a:latin typeface="Inter"/>
+              </a:rPr>
+              <a:t>⏭  Saltar</a:t>
+            </a:r>
+          </a:p>
+        </p:txBody>
+      </p:sp>
+      <p:sp>
+        <p:nvSpPr>
+          <p:cNvPr id="30" name="Rounded Rectangle 29">
+            <a:hlinkClick action="ppaction://hlinksldjump" r:id="rId3"/>
+          </p:cNvPr>
+          <p:cNvSpPr/>
+          <p:nvPr/>
+        </p:nvSpPr>
+        <p:spPr>
+          <a:xfrm>
+            <a:off x="3931920" y="6053328"/>
+            <a:ext cx="1691639" cy="365760"/>
+          </a:xfrm>
+          <a:prstGeom prst="roundRect">
+            <a:avLst>
+              <a:gd name="adj" fmla="val 50000"/>
+            </a:avLst>
+          </a:prstGeom>
+          <a:solidFill>
+            <a:srgbClr val="FFFFFF"/>
+          </a:solidFill>
+          <a:ln w="12700">
+            <a:solidFill>
+              <a:srgbClr val="E4E3DE"/>
+            </a:solidFill>
+          </a:ln>
+          <a:effectLst/>
+        </p:spPr>
+        <p:style>
+          <a:lnRef idx="1">
+            <a:schemeClr val="accent1"/>
+          </a:lnRef>
+          <a:fillRef idx="3">
+            <a:schemeClr val="accent1"/>
+          </a:fillRef>
+          <a:effectRef idx="2">
+            <a:schemeClr val="accent1"/>
+          </a:effectRef>
+          <a:fontRef idx="minor">
+            <a:schemeClr val="lt1"/>
+          </a:fontRef>
+        </p:style>
+        <p:txBody>
+          <a:bodyPr rtlCol="0" anchor="ctr" tIns="12700" bIns="12700"/>
+          <a:lstStyle/>
+          <a:p>
+            <a:pPr algn="ctr"/>
+            <a:r>
+              <a:rPr sz="1050" b="1">
+                <a:solidFill>
+                  <a:srgbClr val="157355"/>
+                </a:solidFill>
+                <a:latin typeface="Inter"/>
+              </a:rPr>
+              <a:t>⌂  Menú (dia 2)</a:t>
+            </a:r>
+          </a:p>
+        </p:txBody>
+      </p:sp>
+      <p:sp>
+        <p:nvSpPr>
+          <p:cNvPr id="31" name="TextBox 30"/>
+          <p:cNvSpPr txBox="1"/>
+          <p:nvPr/>
+        </p:nvSpPr>
+        <p:spPr>
+          <a:xfrm>
+            <a:off x="8321040" y="6053328"/>
+            <a:ext cx="3383280" cy="365760"/>
+          </a:xfrm>
+          <a:prstGeom prst="rect">
+            <a:avLst/>
+          </a:prstGeom>
+          <a:noFill/>
+        </p:spPr>
+        <p:txBody>
+          <a:bodyPr wrap="square" anchor="ctr" lIns="38100" rIns="38100" tIns="25400" bIns="25400">
+            <a:spAutoFit/>
+          </a:bodyPr>
+          <a:lstStyle/>
+          <a:p>
+            <a:pPr algn="r">
+              <a:lnSpc>
+                <a:spcPct val="106000"/>
+              </a:lnSpc>
+              <a:spcBef>
+                <a:spcPts val="0"/>
+              </a:spcBef>
+              <a:spcAft>
+                <a:spcPts val="200"/>
+              </a:spcAft>
+            </a:pPr>
+            <a:r>
+              <a:rPr sz="850" b="0" i="1">
+                <a:solidFill>
+                  <a:srgbClr val="6A6E78"/>
+                </a:solidFill>
+                <a:latin typeface="Inter"/>
+              </a:rPr>
+              <a:t>Noodroute (§5): werkt zonder audio/internet</a:t>
+            </a:r>
+          </a:p>
+        </p:txBody>
+      </p:sp>
+      <p:sp>
+        <p:nvSpPr>
+          <p:cNvPr id="32" name="Rounded Rectangle 31"/>
           <p:cNvSpPr/>
           <p:nvPr/>
         </p:nvSpPr>
@@ -27733,7 +29643,7 @@
       </p:sp>
       <p:sp>
         <p:nvSpPr>
-          <p:cNvPr id="24" name="Rounded Rectangle 23"/>
+          <p:cNvPr id="33" name="Rounded Rectangle 32"/>
           <p:cNvSpPr/>
           <p:nvPr/>
         </p:nvSpPr>
@@ -27788,223 +29698,7 @@
       </p:sp>
       <p:sp>
         <p:nvSpPr>
-          <p:cNvPr id="25" name="Rounded Rectangle 24"/>
-          <p:cNvSpPr/>
-          <p:nvPr/>
-        </p:nvSpPr>
-        <p:spPr>
-          <a:xfrm>
-            <a:off x="457200" y="6053328"/>
-            <a:ext cx="2093976" cy="365760"/>
-          </a:xfrm>
-          <a:prstGeom prst="roundRect">
-            <a:avLst>
-              <a:gd name="adj" fmla="val 50000"/>
-            </a:avLst>
-          </a:prstGeom>
-          <a:solidFill>
-            <a:srgbClr val="1E9E74"/>
-          </a:solidFill>
-          <a:ln w="12700">
-            <a:solidFill>
-              <a:srgbClr val="E4E3DE"/>
-            </a:solidFill>
-          </a:ln>
-          <a:effectLst/>
-        </p:spPr>
-        <p:style>
-          <a:lnRef idx="1">
-            <a:schemeClr val="accent1"/>
-          </a:lnRef>
-          <a:fillRef idx="3">
-            <a:schemeClr val="accent1"/>
-          </a:fillRef>
-          <a:effectRef idx="2">
-            <a:schemeClr val="accent1"/>
-          </a:effectRef>
-          <a:fontRef idx="minor">
-            <a:schemeClr val="lt1"/>
-          </a:fontRef>
-        </p:style>
-        <p:txBody>
-          <a:bodyPr rtlCol="0" anchor="ctr" tIns="12700" bIns="12700"/>
-          <a:lstStyle/>
-          <a:p>
-            <a:pPr algn="ctr"/>
-            <a:r>
-              <a:rPr sz="1050" b="1">
-                <a:solidFill>
-                  <a:srgbClr val="FFFFFF"/>
-                </a:solidFill>
-                <a:latin typeface="Inter"/>
-              </a:rPr>
-              <a:t>▶  Mostrar solución</a:t>
-            </a:r>
-          </a:p>
-        </p:txBody>
-      </p:sp>
-      <p:sp>
-        <p:nvSpPr>
-          <p:cNvPr id="26" name="Rounded Rectangle 25"/>
-          <p:cNvSpPr/>
-          <p:nvPr/>
-        </p:nvSpPr>
-        <p:spPr>
-          <a:xfrm>
-            <a:off x="2697480" y="6053328"/>
-            <a:ext cx="1088136" cy="365760"/>
-          </a:xfrm>
-          <a:prstGeom prst="roundRect">
-            <a:avLst>
-              <a:gd name="adj" fmla="val 50000"/>
-            </a:avLst>
-          </a:prstGeom>
-          <a:solidFill>
-            <a:srgbClr val="FFFFFF"/>
-          </a:solidFill>
-          <a:ln w="12700">
-            <a:solidFill>
-              <a:srgbClr val="E4E3DE"/>
-            </a:solidFill>
-          </a:ln>
-          <a:effectLst/>
-        </p:spPr>
-        <p:style>
-          <a:lnRef idx="1">
-            <a:schemeClr val="accent1"/>
-          </a:lnRef>
-          <a:fillRef idx="3">
-            <a:schemeClr val="accent1"/>
-          </a:fillRef>
-          <a:effectRef idx="2">
-            <a:schemeClr val="accent1"/>
-          </a:effectRef>
-          <a:fontRef idx="minor">
-            <a:schemeClr val="lt1"/>
-          </a:fontRef>
-        </p:style>
-        <p:txBody>
-          <a:bodyPr rtlCol="0" anchor="ctr" tIns="12700" bIns="12700"/>
-          <a:lstStyle/>
-          <a:p>
-            <a:pPr algn="ctr"/>
-            <a:r>
-              <a:rPr sz="1050" b="1">
-                <a:solidFill>
-                  <a:srgbClr val="157355"/>
-                </a:solidFill>
-                <a:latin typeface="Inter"/>
-              </a:rPr>
-              <a:t>⏭  Saltar</a:t>
-            </a:r>
-          </a:p>
-        </p:txBody>
-      </p:sp>
-      <p:sp>
-        <p:nvSpPr>
-          <p:cNvPr id="27" name="Rounded Rectangle 26"/>
-          <p:cNvSpPr/>
-          <p:nvPr/>
-        </p:nvSpPr>
-        <p:spPr>
-          <a:xfrm>
-            <a:off x="3931920" y="6053328"/>
-            <a:ext cx="1691639" cy="365760"/>
-          </a:xfrm>
-          <a:prstGeom prst="roundRect">
-            <a:avLst>
-              <a:gd name="adj" fmla="val 50000"/>
-            </a:avLst>
-          </a:prstGeom>
-          <a:solidFill>
-            <a:srgbClr val="FFFFFF"/>
-          </a:solidFill>
-          <a:ln w="12700">
-            <a:solidFill>
-              <a:srgbClr val="E4E3DE"/>
-            </a:solidFill>
-          </a:ln>
-          <a:effectLst/>
-        </p:spPr>
-        <p:style>
-          <a:lnRef idx="1">
-            <a:schemeClr val="accent1"/>
-          </a:lnRef>
-          <a:fillRef idx="3">
-            <a:schemeClr val="accent1"/>
-          </a:fillRef>
-          <a:effectRef idx="2">
-            <a:schemeClr val="accent1"/>
-          </a:effectRef>
-          <a:fontRef idx="minor">
-            <a:schemeClr val="lt1"/>
-          </a:fontRef>
-        </p:style>
-        <p:txBody>
-          <a:bodyPr rtlCol="0" anchor="ctr" tIns="12700" bIns="12700"/>
-          <a:lstStyle/>
-          <a:p>
-            <a:pPr algn="ctr"/>
-            <a:r>
-              <a:rPr sz="1050" b="1">
-                <a:solidFill>
-                  <a:srgbClr val="157355"/>
-                </a:solidFill>
-                <a:latin typeface="Inter"/>
-              </a:rPr>
-              <a:t>⌂  Menú (dia 2)</a:t>
-            </a:r>
-          </a:p>
-        </p:txBody>
-      </p:sp>
-      <p:sp>
-        <p:nvSpPr>
-          <p:cNvPr id="28" name="TextBox 27"/>
-          <p:cNvSpPr txBox="1"/>
-          <p:nvPr/>
-        </p:nvSpPr>
-        <p:spPr>
-          <a:xfrm>
-            <a:off x="8321040" y="6053328"/>
-            <a:ext cx="3383280" cy="365760"/>
-          </a:xfrm>
-          <a:prstGeom prst="rect">
-            <a:avLst/>
-          </a:prstGeom>
-          <a:noFill/>
-        </p:spPr>
-        <p:txBody>
-          <a:bodyPr wrap="square" anchor="ctr" lIns="38100" rIns="38100" tIns="25400" bIns="25400">
-            <a:spAutoFit/>
-          </a:bodyPr>
-          <a:lstStyle/>
-          <a:p>
-            <a:pPr algn="r">
-              <a:lnSpc>
-                <a:spcPct val="106000"/>
-              </a:lnSpc>
-              <a:spcBef>
-                <a:spcPts val="0"/>
-              </a:spcBef>
-              <a:spcAft>
-                <a:spcPts val="200"/>
-              </a:spcAft>
-            </a:pPr>
-            <a:r>
-              <a:rPr sz="850" b="0" i="1">
-                <a:solidFill>
-                  <a:srgbClr val="6A6E78"/>
-                </a:solidFill>
-                <a:latin typeface="Inter"/>
-              </a:rPr>
-              <a:t>Noodroute (§5): werkt zonder audio/internet</a:t>
-            </a:r>
-          </a:p>
-        </p:txBody>
-      </p:sp>
-      <p:sp>
-        <p:nvSpPr>
-          <p:cNvPr id="29" name="Rectangle 28"/>
+          <p:cNvPr id="34" name="Rectangle 33"/>
           <p:cNvSpPr/>
           <p:nvPr/>
         </p:nvSpPr>
@@ -28048,7 +29742,7 @@
       </p:sp>
       <p:sp>
         <p:nvSpPr>
-          <p:cNvPr id="30" name="TextBox 29"/>
+          <p:cNvPr id="35" name="TextBox 34"/>
           <p:cNvSpPr txBox="1"/>
           <p:nvPr/>
         </p:nvSpPr>
@@ -28102,7 +29796,7 @@
       </p:sp>
       <p:sp>
         <p:nvSpPr>
-          <p:cNvPr id="31" name="TextBox 30"/>
+          <p:cNvPr id="36" name="TextBox 35"/>
           <p:cNvSpPr txBox="1"/>
           <p:nvPr/>
         </p:nvSpPr>
@@ -28147,7 +29841,7 @@
       </p:sp>
       <p:sp>
         <p:nvSpPr>
-          <p:cNvPr id="32" name="TextBox 31"/>
+          <p:cNvPr id="37" name="TextBox 36"/>
           <p:cNvSpPr txBox="1"/>
           <p:nvPr/>
         </p:nvSpPr>
@@ -28195,6 +29889,370 @@
   <p:clrMapOvr>
     <a:masterClrMapping/>
   </p:clrMapOvr>
+  <p:timing>
+    <p:tnLst>
+      <p:par>
+        <p:cTn id="1" dur="indefinite" restart="never" nodeType="tmRoot">
+          <p:childTnLst>
+            <p:seq concurrent="1" nextAc="seek">
+              <p:cTn id="2" dur="indefinite" nodeType="mainSeq">
+                <p:childTnLst/>
+              </p:cTn>
+              <p:prevCondLst>
+                <p:cond evt="onPrev" delay="0">
+                  <p:tgtEl>
+                    <p:sldTgt/>
+                  </p:tgtEl>
+                </p:cond>
+              </p:prevCondLst>
+              <p:nextCondLst>
+                <p:cond evt="onNext" delay="0">
+                  <p:tgtEl>
+                    <p:sldTgt/>
+                  </p:tgtEl>
+                </p:cond>
+              </p:nextCondLst>
+            </p:seq>
+            <p:seq concurrent="1" nextAc="seek">
+              <p:cTn id="5" restart="whenNotActive" fill="hold" nodeType="interactiveSeq">
+                <p:stCondLst>
+                  <p:cond evt="onClick" delay="0">
+                    <p:tgtEl>
+                      <p:spTgt spid="8"/>
+                    </p:tgtEl>
+                  </p:cond>
+                </p:stCondLst>
+                <p:endSync evt="end" delay="0">
+                  <p:rtn val="all"/>
+                </p:endSync>
+                <p:childTnLst>
+                  <p:par>
+                    <p:cTn id="6" fill="hold">
+                      <p:stCondLst>
+                        <p:cond delay="0"/>
+                      </p:stCondLst>
+                      <p:childTnLst>
+                        <p:par>
+                          <p:cTn id="7" presetID="10" presetClass="entr" presetSubtype="0" fill="hold" grpId="0" nodeType="clickEffect">
+                            <p:stCondLst>
+                              <p:cond delay="0"/>
+                            </p:stCondLst>
+                            <p:childTnLst>
+                              <p:set>
+                                <p:cBhvr>
+                                  <p:cTn id="8" dur="1" fill="hold">
+                                    <p:stCondLst>
+                                      <p:cond delay="0"/>
+                                    </p:stCondLst>
+                                  </p:cTn>
+                                  <p:tgtEl>
+                                    <p:spTgt spid="11"/>
+                                  </p:tgtEl>
+                                  <p:attrNameLst>
+                                    <p:attrName>style.visibility</p:attrName>
+                                  </p:attrNameLst>
+                                </p:cBhvr>
+                                <p:to>
+                                  <p:strVal val="visible"/>
+                                </p:to>
+                              </p:set>
+                              <p:animEffect transition="in" filter="fade">
+                                <p:cBhvr>
+                                  <p:cTn id="9" dur="400"/>
+                                  <p:tgtEl>
+                                    <p:spTgt spid="11"/>
+                                  </p:tgtEl>
+                                </p:cBhvr>
+                              </p:animEffect>
+                            </p:childTnLst>
+                          </p:cTn>
+                        </p:par>
+                      </p:childTnLst>
+                    </p:cTn>
+                  </p:par>
+                </p:childTnLst>
+              </p:cTn>
+              <p:nextCondLst>
+                <p:cond evt="onClick" delay="0">
+                  <p:tgtEl>
+                    <p:spTgt spid="8"/>
+                  </p:tgtEl>
+                </p:cond>
+              </p:nextCondLst>
+            </p:seq>
+            <p:seq concurrent="1" nextAc="seek">
+              <p:cTn id="15" restart="whenNotActive" fill="hold" nodeType="interactiveSeq">
+                <p:stCondLst>
+                  <p:cond evt="onClick" delay="0">
+                    <p:tgtEl>
+                      <p:spTgt spid="12"/>
+                    </p:tgtEl>
+                  </p:cond>
+                </p:stCondLst>
+                <p:endSync evt="end" delay="0">
+                  <p:rtn val="all"/>
+                </p:endSync>
+                <p:childTnLst>
+                  <p:par>
+                    <p:cTn id="16" fill="hold">
+                      <p:stCondLst>
+                        <p:cond delay="0"/>
+                      </p:stCondLst>
+                      <p:childTnLst>
+                        <p:par>
+                          <p:cTn id="17" presetID="10" presetClass="entr" presetSubtype="0" fill="hold" grpId="0" nodeType="clickEffect">
+                            <p:stCondLst>
+                              <p:cond delay="0"/>
+                            </p:stCondLst>
+                            <p:childTnLst>
+                              <p:set>
+                                <p:cBhvr>
+                                  <p:cTn id="18" dur="1" fill="hold">
+                                    <p:stCondLst>
+                                      <p:cond delay="0"/>
+                                    </p:stCondLst>
+                                  </p:cTn>
+                                  <p:tgtEl>
+                                    <p:spTgt spid="15"/>
+                                  </p:tgtEl>
+                                  <p:attrNameLst>
+                                    <p:attrName>style.visibility</p:attrName>
+                                  </p:attrNameLst>
+                                </p:cBhvr>
+                                <p:to>
+                                  <p:strVal val="visible"/>
+                                </p:to>
+                              </p:set>
+                              <p:animEffect transition="in" filter="fade">
+                                <p:cBhvr>
+                                  <p:cTn id="19" dur="400"/>
+                                  <p:tgtEl>
+                                    <p:spTgt spid="15"/>
+                                  </p:tgtEl>
+                                </p:cBhvr>
+                              </p:animEffect>
+                            </p:childTnLst>
+                          </p:cTn>
+                        </p:par>
+                      </p:childTnLst>
+                    </p:cTn>
+                  </p:par>
+                </p:childTnLst>
+              </p:cTn>
+              <p:nextCondLst>
+                <p:cond evt="onClick" delay="0">
+                  <p:tgtEl>
+                    <p:spTgt spid="12"/>
+                  </p:tgtEl>
+                </p:cond>
+              </p:nextCondLst>
+            </p:seq>
+            <p:seq concurrent="1" nextAc="seek">
+              <p:cTn id="25" restart="whenNotActive" fill="hold" nodeType="interactiveSeq">
+                <p:stCondLst>
+                  <p:cond evt="onClick" delay="0">
+                    <p:tgtEl>
+                      <p:spTgt spid="16"/>
+                    </p:tgtEl>
+                  </p:cond>
+                </p:stCondLst>
+                <p:endSync evt="end" delay="0">
+                  <p:rtn val="all"/>
+                </p:endSync>
+                <p:childTnLst>
+                  <p:par>
+                    <p:cTn id="26" fill="hold">
+                      <p:stCondLst>
+                        <p:cond delay="0"/>
+                      </p:stCondLst>
+                      <p:childTnLst>
+                        <p:par>
+                          <p:cTn id="27" presetID="10" presetClass="entr" presetSubtype="0" fill="hold" grpId="0" nodeType="clickEffect">
+                            <p:stCondLst>
+                              <p:cond delay="0"/>
+                            </p:stCondLst>
+                            <p:childTnLst>
+                              <p:set>
+                                <p:cBhvr>
+                                  <p:cTn id="28" dur="1" fill="hold">
+                                    <p:stCondLst>
+                                      <p:cond delay="0"/>
+                                    </p:stCondLst>
+                                  </p:cTn>
+                                  <p:tgtEl>
+                                    <p:spTgt spid="19"/>
+                                  </p:tgtEl>
+                                  <p:attrNameLst>
+                                    <p:attrName>style.visibility</p:attrName>
+                                  </p:attrNameLst>
+                                </p:cBhvr>
+                                <p:to>
+                                  <p:strVal val="visible"/>
+                                </p:to>
+                              </p:set>
+                              <p:animEffect transition="in" filter="fade">
+                                <p:cBhvr>
+                                  <p:cTn id="29" dur="400"/>
+                                  <p:tgtEl>
+                                    <p:spTgt spid="19"/>
+                                  </p:tgtEl>
+                                </p:cBhvr>
+                              </p:animEffect>
+                            </p:childTnLst>
+                          </p:cTn>
+                        </p:par>
+                      </p:childTnLst>
+                    </p:cTn>
+                  </p:par>
+                </p:childTnLst>
+              </p:cTn>
+              <p:nextCondLst>
+                <p:cond evt="onClick" delay="0">
+                  <p:tgtEl>
+                    <p:spTgt spid="16"/>
+                  </p:tgtEl>
+                </p:cond>
+              </p:nextCondLst>
+            </p:seq>
+            <p:seq concurrent="1" nextAc="seek">
+              <p:cTn id="35" restart="whenNotActive" fill="hold" nodeType="interactiveSeq">
+                <p:stCondLst>
+                  <p:cond evt="onClick" delay="0">
+                    <p:tgtEl>
+                      <p:spTgt spid="20"/>
+                    </p:tgtEl>
+                  </p:cond>
+                </p:stCondLst>
+                <p:endSync evt="end" delay="0">
+                  <p:rtn val="all"/>
+                </p:endSync>
+                <p:childTnLst>
+                  <p:par>
+                    <p:cTn id="36" fill="hold">
+                      <p:stCondLst>
+                        <p:cond delay="0"/>
+                      </p:stCondLst>
+                      <p:childTnLst>
+                        <p:par>
+                          <p:cTn id="37" presetID="10" presetClass="entr" presetSubtype="0" fill="hold" grpId="0" nodeType="clickEffect">
+                            <p:stCondLst>
+                              <p:cond delay="0"/>
+                            </p:stCondLst>
+                            <p:childTnLst>
+                              <p:set>
+                                <p:cBhvr>
+                                  <p:cTn id="38" dur="1" fill="hold">
+                                    <p:stCondLst>
+                                      <p:cond delay="0"/>
+                                    </p:stCondLst>
+                                  </p:cTn>
+                                  <p:tgtEl>
+                                    <p:spTgt spid="23"/>
+                                  </p:tgtEl>
+                                  <p:attrNameLst>
+                                    <p:attrName>style.visibility</p:attrName>
+                                  </p:attrNameLst>
+                                </p:cBhvr>
+                                <p:to>
+                                  <p:strVal val="visible"/>
+                                </p:to>
+                              </p:set>
+                              <p:animEffect transition="in" filter="fade">
+                                <p:cBhvr>
+                                  <p:cTn id="39" dur="400"/>
+                                  <p:tgtEl>
+                                    <p:spTgt spid="23"/>
+                                  </p:tgtEl>
+                                </p:cBhvr>
+                              </p:animEffect>
+                            </p:childTnLst>
+                          </p:cTn>
+                        </p:par>
+                      </p:childTnLst>
+                    </p:cTn>
+                  </p:par>
+                </p:childTnLst>
+              </p:cTn>
+              <p:nextCondLst>
+                <p:cond evt="onClick" delay="0">
+                  <p:tgtEl>
+                    <p:spTgt spid="20"/>
+                  </p:tgtEl>
+                </p:cond>
+              </p:nextCondLst>
+            </p:seq>
+            <p:seq concurrent="1" nextAc="seek">
+              <p:cTn id="45" restart="whenNotActive" fill="hold" nodeType="interactiveSeq">
+                <p:stCondLst>
+                  <p:cond evt="onClick" delay="0">
+                    <p:tgtEl>
+                      <p:spTgt spid="24"/>
+                    </p:tgtEl>
+                  </p:cond>
+                </p:stCondLst>
+                <p:endSync evt="end" delay="0">
+                  <p:rtn val="all"/>
+                </p:endSync>
+                <p:childTnLst>
+                  <p:par>
+                    <p:cTn id="46" fill="hold">
+                      <p:stCondLst>
+                        <p:cond delay="0"/>
+                      </p:stCondLst>
+                      <p:childTnLst>
+                        <p:par>
+                          <p:cTn id="47" presetID="10" presetClass="entr" presetSubtype="0" fill="hold" grpId="0" nodeType="clickEffect">
+                            <p:stCondLst>
+                              <p:cond delay="0"/>
+                            </p:stCondLst>
+                            <p:childTnLst>
+                              <p:set>
+                                <p:cBhvr>
+                                  <p:cTn id="48" dur="1" fill="hold">
+                                    <p:stCondLst>
+                                      <p:cond delay="0"/>
+                                    </p:stCondLst>
+                                  </p:cTn>
+                                  <p:tgtEl>
+                                    <p:spTgt spid="27"/>
+                                  </p:tgtEl>
+                                  <p:attrNameLst>
+                                    <p:attrName>style.visibility</p:attrName>
+                                  </p:attrNameLst>
+                                </p:cBhvr>
+                                <p:to>
+                                  <p:strVal val="visible"/>
+                                </p:to>
+                              </p:set>
+                              <p:animEffect transition="in" filter="fade">
+                                <p:cBhvr>
+                                  <p:cTn id="49" dur="400"/>
+                                  <p:tgtEl>
+                                    <p:spTgt spid="27"/>
+                                  </p:tgtEl>
+                                </p:cBhvr>
+                              </p:animEffect>
+                            </p:childTnLst>
+                          </p:cTn>
+                        </p:par>
+                      </p:childTnLst>
+                    </p:cTn>
+                  </p:par>
+                </p:childTnLst>
+              </p:cTn>
+              <p:nextCondLst>
+                <p:cond evt="onClick" delay="0">
+                  <p:tgtEl>
+                    <p:spTgt spid="24"/>
+                  </p:tgtEl>
+                </p:cond>
+              </p:nextCondLst>
+            </p:seq>
+          </p:childTnLst>
+        </p:cTn>
+      </p:par>
+    </p:tnLst>
+  </p:timing>
 </p:sld>
 </file>
 
@@ -28532,7 +30590,9 @@
       </p:sp>
       <p:sp>
         <p:nvSpPr>
-          <p:cNvPr id="9" name="Rounded Rectangle 8"/>
+          <p:cNvPr id="9" name="Rounded Rectangle 8">
+            <a:hlinkClick action="ppaction://hlinksldjump" r:id="rId3"/>
+          </p:cNvPr>
           <p:cNvSpPr/>
           <p:nvPr/>
         </p:nvSpPr>
@@ -28587,7 +30647,9 @@
       </p:sp>
       <p:sp>
         <p:nvSpPr>
-          <p:cNvPr id="10" name="Rectangle 9"/>
+          <p:cNvPr id="10" name="Rectangle 9">
+            <a:hlinkClick action="ppaction://hlinksldjump" r:id="rId3"/>
+          </p:cNvPr>
           <p:cNvSpPr/>
           <p:nvPr/>
         </p:nvSpPr>
@@ -28831,7 +30893,9 @@
       </p:sp>
       <p:sp>
         <p:nvSpPr>
-          <p:cNvPr id="15" name="Rounded Rectangle 14"/>
+          <p:cNvPr id="15" name="Rounded Rectangle 14">
+            <a:hlinkClick action="ppaction://hlinksldjump" r:id="rId4"/>
+          </p:cNvPr>
           <p:cNvSpPr/>
           <p:nvPr/>
         </p:nvSpPr>
@@ -28886,7 +30950,9 @@
       </p:sp>
       <p:sp>
         <p:nvSpPr>
-          <p:cNvPr id="16" name="Rectangle 15"/>
+          <p:cNvPr id="16" name="Rectangle 15">
+            <a:hlinkClick action="ppaction://hlinksldjump" r:id="rId4"/>
+          </p:cNvPr>
           <p:cNvSpPr/>
           <p:nvPr/>
         </p:nvSpPr>
@@ -29123,14 +31189,16 @@
                 </a:solidFill>
                 <a:latin typeface="Inter"/>
               </a:rPr>
-              <a:t>→ dia 8</a:t>
-            </a:r>
-          </a:p>
-        </p:txBody>
-      </p:sp>
-      <p:sp>
-        <p:nvSpPr>
-          <p:cNvPr id="21" name="Rounded Rectangle 20"/>
+              <a:t>→ dia 7</a:t>
+            </a:r>
+          </a:p>
+        </p:txBody>
+      </p:sp>
+      <p:sp>
+        <p:nvSpPr>
+          <p:cNvPr id="21" name="Rounded Rectangle 20">
+            <a:hlinkClick action="ppaction://hlinksldjump" r:id="rId5"/>
+          </p:cNvPr>
           <p:cNvSpPr/>
           <p:nvPr/>
         </p:nvSpPr>
@@ -29185,7 +31253,9 @@
       </p:sp>
       <p:sp>
         <p:nvSpPr>
-          <p:cNvPr id="22" name="Rectangle 21"/>
+          <p:cNvPr id="22" name="Rectangle 21">
+            <a:hlinkClick action="ppaction://hlinksldjump" r:id="rId5"/>
+          </p:cNvPr>
           <p:cNvSpPr/>
           <p:nvPr/>
         </p:nvSpPr>
@@ -29422,14 +31492,16 @@
                 </a:solidFill>
                 <a:latin typeface="Inter"/>
               </a:rPr>
-              <a:t>→ dia 13</a:t>
-            </a:r>
-          </a:p>
-        </p:txBody>
-      </p:sp>
-      <p:sp>
-        <p:nvSpPr>
-          <p:cNvPr id="27" name="Rounded Rectangle 26"/>
+              <a:t>→ dia 10</a:t>
+            </a:r>
+          </a:p>
+        </p:txBody>
+      </p:sp>
+      <p:sp>
+        <p:nvSpPr>
+          <p:cNvPr id="27" name="Rounded Rectangle 26">
+            <a:hlinkClick action="ppaction://hlinksldjump" r:id="rId6"/>
+          </p:cNvPr>
           <p:cNvSpPr/>
           <p:nvPr/>
         </p:nvSpPr>
@@ -29484,7 +31556,9 @@
       </p:sp>
       <p:sp>
         <p:nvSpPr>
-          <p:cNvPr id="28" name="Rectangle 27"/>
+          <p:cNvPr id="28" name="Rectangle 27">
+            <a:hlinkClick action="ppaction://hlinksldjump" r:id="rId6"/>
+          </p:cNvPr>
           <p:cNvSpPr/>
           <p:nvPr/>
         </p:nvSpPr>
@@ -29721,14 +31795,16 @@
                 </a:solidFill>
                 <a:latin typeface="Inter"/>
               </a:rPr>
-              <a:t>→ dia 17</a:t>
-            </a:r>
-          </a:p>
-        </p:txBody>
-      </p:sp>
-      <p:sp>
-        <p:nvSpPr>
-          <p:cNvPr id="33" name="Rounded Rectangle 32"/>
+              <a:t>→ dia 13</a:t>
+            </a:r>
+          </a:p>
+        </p:txBody>
+      </p:sp>
+      <p:sp>
+        <p:nvSpPr>
+          <p:cNvPr id="33" name="Rounded Rectangle 32">
+            <a:hlinkClick action="ppaction://hlinksldjump" r:id="rId7"/>
+          </p:cNvPr>
           <p:cNvSpPr/>
           <p:nvPr/>
         </p:nvSpPr>
@@ -29783,7 +31859,9 @@
       </p:sp>
       <p:sp>
         <p:nvSpPr>
-          <p:cNvPr id="34" name="Rectangle 33"/>
+          <p:cNvPr id="34" name="Rectangle 33">
+            <a:hlinkClick action="ppaction://hlinksldjump" r:id="rId7"/>
+          </p:cNvPr>
           <p:cNvSpPr/>
           <p:nvPr/>
         </p:nvSpPr>
@@ -30020,14 +32098,16 @@
                 </a:solidFill>
                 <a:latin typeface="Inter"/>
               </a:rPr>
-              <a:t>→ dia 21</a:t>
-            </a:r>
-          </a:p>
-        </p:txBody>
-      </p:sp>
-      <p:sp>
-        <p:nvSpPr>
-          <p:cNvPr id="39" name="Rounded Rectangle 38"/>
+              <a:t>→ dia 16</a:t>
+            </a:r>
+          </a:p>
+        </p:txBody>
+      </p:sp>
+      <p:sp>
+        <p:nvSpPr>
+          <p:cNvPr id="39" name="Rounded Rectangle 38">
+            <a:hlinkClick action="ppaction://hlinksldjump" r:id="rId8"/>
+          </p:cNvPr>
           <p:cNvSpPr/>
           <p:nvPr/>
         </p:nvSpPr>
@@ -30082,7 +32162,9 @@
       </p:sp>
       <p:sp>
         <p:nvSpPr>
-          <p:cNvPr id="40" name="Rectangle 39"/>
+          <p:cNvPr id="40" name="Rectangle 39">
+            <a:hlinkClick action="ppaction://hlinksldjump" r:id="rId8"/>
+          </p:cNvPr>
           <p:cNvSpPr/>
           <p:nvPr/>
         </p:nvSpPr>
@@ -30319,14 +32401,16 @@
                 </a:solidFill>
                 <a:latin typeface="Inter"/>
               </a:rPr>
-              <a:t>→ dia 23</a:t>
-            </a:r>
-          </a:p>
-        </p:txBody>
-      </p:sp>
-      <p:sp>
-        <p:nvSpPr>
-          <p:cNvPr id="45" name="Rounded Rectangle 44"/>
+              <a:t>→ dia 18</a:t>
+            </a:r>
+          </a:p>
+        </p:txBody>
+      </p:sp>
+      <p:sp>
+        <p:nvSpPr>
+          <p:cNvPr id="45" name="Rounded Rectangle 44">
+            <a:hlinkClick action="ppaction://hlinksldjump" r:id="rId9"/>
+          </p:cNvPr>
           <p:cNvSpPr/>
           <p:nvPr/>
         </p:nvSpPr>
@@ -30381,7 +32465,9 @@
       </p:sp>
       <p:sp>
         <p:nvSpPr>
-          <p:cNvPr id="46" name="Rectangle 45"/>
+          <p:cNvPr id="46" name="Rectangle 45">
+            <a:hlinkClick action="ppaction://hlinksldjump" r:id="rId9"/>
+          </p:cNvPr>
           <p:cNvSpPr/>
           <p:nvPr/>
         </p:nvSpPr>
@@ -30618,14 +32704,16 @@
                 </a:solidFill>
                 <a:latin typeface="Inter"/>
               </a:rPr>
-              <a:t>→ dia 24</a:t>
-            </a:r>
-          </a:p>
-        </p:txBody>
-      </p:sp>
-      <p:sp>
-        <p:nvSpPr>
-          <p:cNvPr id="51" name="Rounded Rectangle 50"/>
+              <a:t>→ dia 19</a:t>
+            </a:r>
+          </a:p>
+        </p:txBody>
+      </p:sp>
+      <p:sp>
+        <p:nvSpPr>
+          <p:cNvPr id="51" name="Rounded Rectangle 50">
+            <a:hlinkClick action="ppaction://hlinksldjump" r:id="rId10"/>
+          </p:cNvPr>
           <p:cNvSpPr/>
           <p:nvPr/>
         </p:nvSpPr>
@@ -30680,7 +32768,9 @@
       </p:sp>
       <p:sp>
         <p:nvSpPr>
-          <p:cNvPr id="52" name="Rectangle 51"/>
+          <p:cNvPr id="52" name="Rectangle 51">
+            <a:hlinkClick action="ppaction://hlinksldjump" r:id="rId10"/>
+          </p:cNvPr>
           <p:cNvSpPr/>
           <p:nvPr/>
         </p:nvSpPr>
@@ -30917,7 +33007,7 @@
                 </a:solidFill>
                 <a:latin typeface="Inter"/>
               </a:rPr>
-              <a:t>→ dia 25</a:t>
+              <a:t>→ dia 20</a:t>
             </a:r>
           </a:p>
         </p:txBody>
@@ -44860,6 +46950,70 @@
         </p:nvSpPr>
         <p:spPr>
           <a:xfrm>
+            <a:off x="2331720" y="1810512"/>
+            <a:ext cx="329184" cy="310896"/>
+          </a:xfrm>
+          <a:prstGeom prst="roundRect">
+            <a:avLst>
+              <a:gd name="adj" fmla="val 50000"/>
+            </a:avLst>
+          </a:prstGeom>
+          <a:solidFill>
+            <a:srgbClr val="1E9E74"/>
+          </a:solidFill>
+          <a:ln w="12700">
+            <a:solidFill>
+              <a:srgbClr val="157355"/>
+            </a:solidFill>
+          </a:ln>
+          <a:effectLst/>
+          <a:effectLst>
+            <a:outerShdw blurRad="90000" dist="38000" dir="5400000" rotWithShape="0">
+              <a:srgbClr val="20242E">
+                <a:alpha val="22000"/>
+              </a:srgbClr>
+            </a:outerShdw>
+          </a:effectLst>
+        </p:spPr>
+        <p:style>
+          <a:lnRef idx="1">
+            <a:schemeClr val="accent1"/>
+          </a:lnRef>
+          <a:fillRef idx="3">
+            <a:schemeClr val="accent1"/>
+          </a:fillRef>
+          <a:effectRef idx="2">
+            <a:schemeClr val="accent1"/>
+          </a:effectRef>
+          <a:fontRef idx="minor">
+            <a:schemeClr val="lt1"/>
+          </a:fontRef>
+        </p:style>
+        <p:txBody>
+          <a:bodyPr rtlCol="0" anchor="ctr" wrap="none" lIns="88900" rIns="88900" tIns="12700" bIns="12700"/>
+          <a:lstStyle/>
+          <a:p>
+            <a:pPr algn="ctr"/>
+            <a:r>
+              <a:rPr sz="1100" b="1">
+                <a:solidFill>
+                  <a:srgbClr val="FFFFFF"/>
+                </a:solidFill>
+                <a:latin typeface="Inter"/>
+              </a:rPr>
+              <a:t>✓</a:t>
+            </a:r>
+          </a:p>
+        </p:txBody>
+      </p:sp>
+      <p:sp>
+        <p:nvSpPr>
+          <p:cNvPr id="14" name="Rounded Rectangle 13"/>
+          <p:cNvSpPr/>
+          <p:nvPr/>
+        </p:nvSpPr>
+        <p:spPr>
+          <a:xfrm>
             <a:off x="457200" y="2350008"/>
             <a:ext cx="5486400" cy="566928"/>
           </a:xfrm>
@@ -44902,7 +47056,7 @@
       </p:sp>
       <p:sp>
         <p:nvSpPr>
-          <p:cNvPr id="14" name="TextBox 13"/>
+          <p:cNvPr id="15" name="TextBox 14"/>
           <p:cNvSpPr txBox="1"/>
           <p:nvPr/>
         </p:nvSpPr>
@@ -44947,7 +47101,7 @@
       </p:sp>
       <p:sp>
         <p:nvSpPr>
-          <p:cNvPr id="15" name="TextBox 14"/>
+          <p:cNvPr id="16" name="TextBox 15"/>
           <p:cNvSpPr txBox="1"/>
           <p:nvPr/>
         </p:nvSpPr>
@@ -44992,7 +47146,7 @@
       </p:sp>
       <p:sp>
         <p:nvSpPr>
-          <p:cNvPr id="16" name="TextBox 15"/>
+          <p:cNvPr id="17" name="TextBox 16"/>
           <p:cNvSpPr txBox="1"/>
           <p:nvPr/>
         </p:nvSpPr>
@@ -45037,7 +47191,71 @@
       </p:sp>
       <p:sp>
         <p:nvSpPr>
-          <p:cNvPr id="17" name="Rounded Rectangle 16"/>
+          <p:cNvPr id="18" name="Rounded Rectangle 17"/>
+          <p:cNvSpPr/>
+          <p:nvPr/>
+        </p:nvSpPr>
+        <p:spPr>
+          <a:xfrm>
+            <a:off x="2331720" y="2468880"/>
+            <a:ext cx="329184" cy="310896"/>
+          </a:xfrm>
+          <a:prstGeom prst="roundRect">
+            <a:avLst>
+              <a:gd name="adj" fmla="val 50000"/>
+            </a:avLst>
+          </a:prstGeom>
+          <a:solidFill>
+            <a:srgbClr val="1E9E74"/>
+          </a:solidFill>
+          <a:ln w="12700">
+            <a:solidFill>
+              <a:srgbClr val="157355"/>
+            </a:solidFill>
+          </a:ln>
+          <a:effectLst/>
+          <a:effectLst>
+            <a:outerShdw blurRad="90000" dist="38000" dir="5400000" rotWithShape="0">
+              <a:srgbClr val="20242E">
+                <a:alpha val="22000"/>
+              </a:srgbClr>
+            </a:outerShdw>
+          </a:effectLst>
+        </p:spPr>
+        <p:style>
+          <a:lnRef idx="1">
+            <a:schemeClr val="accent1"/>
+          </a:lnRef>
+          <a:fillRef idx="3">
+            <a:schemeClr val="accent1"/>
+          </a:fillRef>
+          <a:effectRef idx="2">
+            <a:schemeClr val="accent1"/>
+          </a:effectRef>
+          <a:fontRef idx="minor">
+            <a:schemeClr val="lt1"/>
+          </a:fontRef>
+        </p:style>
+        <p:txBody>
+          <a:bodyPr rtlCol="0" anchor="ctr" wrap="none" lIns="88900" rIns="88900" tIns="12700" bIns="12700"/>
+          <a:lstStyle/>
+          <a:p>
+            <a:pPr algn="ctr"/>
+            <a:r>
+              <a:rPr sz="1100" b="1">
+                <a:solidFill>
+                  <a:srgbClr val="FFFFFF"/>
+                </a:solidFill>
+                <a:latin typeface="Inter"/>
+              </a:rPr>
+              <a:t>✓</a:t>
+            </a:r>
+          </a:p>
+        </p:txBody>
+      </p:sp>
+      <p:sp>
+        <p:nvSpPr>
+          <p:cNvPr id="19" name="Rounded Rectangle 18"/>
           <p:cNvSpPr/>
           <p:nvPr/>
         </p:nvSpPr>
@@ -45085,7 +47303,7 @@
       </p:sp>
       <p:sp>
         <p:nvSpPr>
-          <p:cNvPr id="18" name="TextBox 17"/>
+          <p:cNvPr id="20" name="TextBox 19"/>
           <p:cNvSpPr txBox="1"/>
           <p:nvPr/>
         </p:nvSpPr>
@@ -45130,7 +47348,7 @@
       </p:sp>
       <p:sp>
         <p:nvSpPr>
-          <p:cNvPr id="19" name="TextBox 18"/>
+          <p:cNvPr id="21" name="TextBox 20"/>
           <p:cNvSpPr txBox="1"/>
           <p:nvPr/>
         </p:nvSpPr>
@@ -45175,7 +47393,7 @@
       </p:sp>
       <p:sp>
         <p:nvSpPr>
-          <p:cNvPr id="20" name="TextBox 19"/>
+          <p:cNvPr id="22" name="TextBox 21"/>
           <p:cNvSpPr txBox="1"/>
           <p:nvPr/>
         </p:nvSpPr>
@@ -45220,7 +47438,71 @@
       </p:sp>
       <p:sp>
         <p:nvSpPr>
-          <p:cNvPr id="21" name="Rounded Rectangle 20"/>
+          <p:cNvPr id="23" name="Rounded Rectangle 22"/>
+          <p:cNvSpPr/>
+          <p:nvPr/>
+        </p:nvSpPr>
+        <p:spPr>
+          <a:xfrm>
+            <a:off x="2331720" y="3127248"/>
+            <a:ext cx="329184" cy="310896"/>
+          </a:xfrm>
+          <a:prstGeom prst="roundRect">
+            <a:avLst>
+              <a:gd name="adj" fmla="val 50000"/>
+            </a:avLst>
+          </a:prstGeom>
+          <a:solidFill>
+            <a:srgbClr val="1E9E74"/>
+          </a:solidFill>
+          <a:ln w="12700">
+            <a:solidFill>
+              <a:srgbClr val="157355"/>
+            </a:solidFill>
+          </a:ln>
+          <a:effectLst/>
+          <a:effectLst>
+            <a:outerShdw blurRad="90000" dist="38000" dir="5400000" rotWithShape="0">
+              <a:srgbClr val="20242E">
+                <a:alpha val="22000"/>
+              </a:srgbClr>
+            </a:outerShdw>
+          </a:effectLst>
+        </p:spPr>
+        <p:style>
+          <a:lnRef idx="1">
+            <a:schemeClr val="accent1"/>
+          </a:lnRef>
+          <a:fillRef idx="3">
+            <a:schemeClr val="accent1"/>
+          </a:fillRef>
+          <a:effectRef idx="2">
+            <a:schemeClr val="accent1"/>
+          </a:effectRef>
+          <a:fontRef idx="minor">
+            <a:schemeClr val="lt1"/>
+          </a:fontRef>
+        </p:style>
+        <p:txBody>
+          <a:bodyPr rtlCol="0" anchor="ctr" wrap="none" lIns="88900" rIns="88900" tIns="12700" bIns="12700"/>
+          <a:lstStyle/>
+          <a:p>
+            <a:pPr algn="ctr"/>
+            <a:r>
+              <a:rPr sz="1100" b="1">
+                <a:solidFill>
+                  <a:srgbClr val="FFFFFF"/>
+                </a:solidFill>
+                <a:latin typeface="Inter"/>
+              </a:rPr>
+              <a:t>✓</a:t>
+            </a:r>
+          </a:p>
+        </p:txBody>
+      </p:sp>
+      <p:sp>
+        <p:nvSpPr>
+          <p:cNvPr id="24" name="Rounded Rectangle 23"/>
           <p:cNvSpPr/>
           <p:nvPr/>
         </p:nvSpPr>
@@ -45268,7 +47550,7 @@
       </p:sp>
       <p:sp>
         <p:nvSpPr>
-          <p:cNvPr id="22" name="TextBox 21"/>
+          <p:cNvPr id="25" name="TextBox 24"/>
           <p:cNvSpPr txBox="1"/>
           <p:nvPr/>
         </p:nvSpPr>
@@ -45313,7 +47595,7 @@
       </p:sp>
       <p:sp>
         <p:nvSpPr>
-          <p:cNvPr id="23" name="TextBox 22"/>
+          <p:cNvPr id="26" name="TextBox 25"/>
           <p:cNvSpPr txBox="1"/>
           <p:nvPr/>
         </p:nvSpPr>
@@ -45358,7 +47640,7 @@
       </p:sp>
       <p:sp>
         <p:nvSpPr>
-          <p:cNvPr id="24" name="TextBox 23"/>
+          <p:cNvPr id="27" name="TextBox 26"/>
           <p:cNvSpPr txBox="1"/>
           <p:nvPr/>
         </p:nvSpPr>
@@ -45403,7 +47685,71 @@
       </p:sp>
       <p:sp>
         <p:nvSpPr>
-          <p:cNvPr id="25" name="TextBox 24"/>
+          <p:cNvPr id="28" name="Rounded Rectangle 27"/>
+          <p:cNvSpPr/>
+          <p:nvPr/>
+        </p:nvSpPr>
+        <p:spPr>
+          <a:xfrm>
+            <a:off x="2331720" y="3785616"/>
+            <a:ext cx="329184" cy="310896"/>
+          </a:xfrm>
+          <a:prstGeom prst="roundRect">
+            <a:avLst>
+              <a:gd name="adj" fmla="val 50000"/>
+            </a:avLst>
+          </a:prstGeom>
+          <a:solidFill>
+            <a:srgbClr val="1E9E74"/>
+          </a:solidFill>
+          <a:ln w="12700">
+            <a:solidFill>
+              <a:srgbClr val="157355"/>
+            </a:solidFill>
+          </a:ln>
+          <a:effectLst/>
+          <a:effectLst>
+            <a:outerShdw blurRad="90000" dist="38000" dir="5400000" rotWithShape="0">
+              <a:srgbClr val="20242E">
+                <a:alpha val="22000"/>
+              </a:srgbClr>
+            </a:outerShdw>
+          </a:effectLst>
+        </p:spPr>
+        <p:style>
+          <a:lnRef idx="1">
+            <a:schemeClr val="accent1"/>
+          </a:lnRef>
+          <a:fillRef idx="3">
+            <a:schemeClr val="accent1"/>
+          </a:fillRef>
+          <a:effectRef idx="2">
+            <a:schemeClr val="accent1"/>
+          </a:effectRef>
+          <a:fontRef idx="minor">
+            <a:schemeClr val="lt1"/>
+          </a:fontRef>
+        </p:style>
+        <p:txBody>
+          <a:bodyPr rtlCol="0" anchor="ctr" wrap="none" lIns="88900" rIns="88900" tIns="12700" bIns="12700"/>
+          <a:lstStyle/>
+          <a:p>
+            <a:pPr algn="ctr"/>
+            <a:r>
+              <a:rPr sz="1100" b="1">
+                <a:solidFill>
+                  <a:srgbClr val="FFFFFF"/>
+                </a:solidFill>
+                <a:latin typeface="Inter"/>
+              </a:rPr>
+              <a:t>✓</a:t>
+            </a:r>
+          </a:p>
+        </p:txBody>
+      </p:sp>
+      <p:sp>
+        <p:nvSpPr>
+          <p:cNvPr id="29" name="TextBox 28"/>
           <p:cNvSpPr txBox="1"/>
           <p:nvPr/>
         </p:nvSpPr>
@@ -45484,7 +47830,7 @@
       </p:sp>
       <p:sp>
         <p:nvSpPr>
-          <p:cNvPr id="26" name="Rounded Rectangle 25"/>
+          <p:cNvPr id="30" name="Rounded Rectangle 29"/>
           <p:cNvSpPr/>
           <p:nvPr/>
         </p:nvSpPr>
@@ -45532,7 +47878,7 @@
       </p:sp>
       <p:sp>
         <p:nvSpPr>
-          <p:cNvPr id="27" name="TextBox 26"/>
+          <p:cNvPr id="31" name="TextBox 30"/>
           <p:cNvSpPr txBox="1"/>
           <p:nvPr/>
         </p:nvSpPr>
@@ -45577,7 +47923,7 @@
       </p:sp>
       <p:sp>
         <p:nvSpPr>
-          <p:cNvPr id="28" name="TextBox 27"/>
+          <p:cNvPr id="32" name="TextBox 31"/>
           <p:cNvSpPr txBox="1"/>
           <p:nvPr/>
         </p:nvSpPr>
@@ -45622,7 +47968,7 @@
       </p:sp>
       <p:sp>
         <p:nvSpPr>
-          <p:cNvPr id="29" name="TextBox 28"/>
+          <p:cNvPr id="33" name="TextBox 32"/>
           <p:cNvSpPr txBox="1"/>
           <p:nvPr/>
         </p:nvSpPr>
@@ -45667,7 +48013,7 @@
       </p:sp>
       <p:sp>
         <p:nvSpPr>
-          <p:cNvPr id="30" name="Rounded Rectangle 29"/>
+          <p:cNvPr id="34" name="Rounded Rectangle 33"/>
           <p:cNvSpPr/>
           <p:nvPr/>
         </p:nvSpPr>
@@ -45715,7 +48061,7 @@
       </p:sp>
       <p:sp>
         <p:nvSpPr>
-          <p:cNvPr id="31" name="TextBox 30"/>
+          <p:cNvPr id="35" name="TextBox 34"/>
           <p:cNvSpPr txBox="1"/>
           <p:nvPr/>
         </p:nvSpPr>
@@ -45760,7 +48106,7 @@
       </p:sp>
       <p:sp>
         <p:nvSpPr>
-          <p:cNvPr id="32" name="TextBox 31"/>
+          <p:cNvPr id="36" name="TextBox 35"/>
           <p:cNvSpPr txBox="1"/>
           <p:nvPr/>
         </p:nvSpPr>
@@ -45805,7 +48151,7 @@
       </p:sp>
       <p:sp>
         <p:nvSpPr>
-          <p:cNvPr id="33" name="TextBox 32"/>
+          <p:cNvPr id="37" name="TextBox 36"/>
           <p:cNvSpPr txBox="1"/>
           <p:nvPr/>
         </p:nvSpPr>
@@ -45850,7 +48196,7 @@
       </p:sp>
       <p:sp>
         <p:nvSpPr>
-          <p:cNvPr id="34" name="Rounded Rectangle 33"/>
+          <p:cNvPr id="38" name="Rounded Rectangle 37"/>
           <p:cNvSpPr/>
           <p:nvPr/>
         </p:nvSpPr>
@@ -45898,7 +48244,7 @@
       </p:sp>
       <p:sp>
         <p:nvSpPr>
-          <p:cNvPr id="35" name="TextBox 34"/>
+          <p:cNvPr id="39" name="TextBox 38"/>
           <p:cNvSpPr txBox="1"/>
           <p:nvPr/>
         </p:nvSpPr>
@@ -45943,7 +48289,7 @@
       </p:sp>
       <p:sp>
         <p:nvSpPr>
-          <p:cNvPr id="36" name="TextBox 35"/>
+          <p:cNvPr id="40" name="TextBox 39"/>
           <p:cNvSpPr txBox="1"/>
           <p:nvPr/>
         </p:nvSpPr>
@@ -45988,7 +48334,7 @@
       </p:sp>
       <p:sp>
         <p:nvSpPr>
-          <p:cNvPr id="37" name="TextBox 36"/>
+          <p:cNvPr id="41" name="TextBox 40"/>
           <p:cNvSpPr txBox="1"/>
           <p:nvPr/>
         </p:nvSpPr>
@@ -46033,7 +48379,7 @@
       </p:sp>
       <p:sp>
         <p:nvSpPr>
-          <p:cNvPr id="38" name="Rounded Rectangle 37"/>
+          <p:cNvPr id="42" name="Rounded Rectangle 41"/>
           <p:cNvSpPr/>
           <p:nvPr/>
         </p:nvSpPr>
@@ -46081,7 +48427,7 @@
       </p:sp>
       <p:sp>
         <p:nvSpPr>
-          <p:cNvPr id="39" name="TextBox 38"/>
+          <p:cNvPr id="43" name="TextBox 42"/>
           <p:cNvSpPr txBox="1"/>
           <p:nvPr/>
         </p:nvSpPr>
@@ -46126,7 +48472,7 @@
       </p:sp>
       <p:sp>
         <p:nvSpPr>
-          <p:cNvPr id="40" name="TextBox 39"/>
+          <p:cNvPr id="44" name="TextBox 43"/>
           <p:cNvSpPr txBox="1"/>
           <p:nvPr/>
         </p:nvSpPr>
@@ -46171,7 +48517,7 @@
       </p:sp>
       <p:sp>
         <p:nvSpPr>
-          <p:cNvPr id="41" name="TextBox 40"/>
+          <p:cNvPr id="45" name="TextBox 44"/>
           <p:cNvSpPr txBox="1"/>
           <p:nvPr/>
         </p:nvSpPr>
@@ -46216,7 +48562,225 @@
       </p:sp>
       <p:sp>
         <p:nvSpPr>
-          <p:cNvPr id="42" name="Rounded Rectangle 41"/>
+          <p:cNvPr id="46" name="Rounded Rectangle 45"/>
+          <p:cNvSpPr/>
+          <p:nvPr/>
+        </p:nvSpPr>
+        <p:spPr>
+          <a:xfrm>
+            <a:off x="457200" y="6053328"/>
+            <a:ext cx="2093976" cy="365760"/>
+          </a:xfrm>
+          <a:prstGeom prst="roundRect">
+            <a:avLst>
+              <a:gd name="adj" fmla="val 50000"/>
+            </a:avLst>
+          </a:prstGeom>
+          <a:solidFill>
+            <a:srgbClr val="1E9E74"/>
+          </a:solidFill>
+          <a:ln w="12700">
+            <a:solidFill>
+              <a:srgbClr val="E4E3DE"/>
+            </a:solidFill>
+          </a:ln>
+          <a:effectLst/>
+        </p:spPr>
+        <p:style>
+          <a:lnRef idx="1">
+            <a:schemeClr val="accent1"/>
+          </a:lnRef>
+          <a:fillRef idx="3">
+            <a:schemeClr val="accent1"/>
+          </a:fillRef>
+          <a:effectRef idx="2">
+            <a:schemeClr val="accent1"/>
+          </a:effectRef>
+          <a:fontRef idx="minor">
+            <a:schemeClr val="lt1"/>
+          </a:fontRef>
+        </p:style>
+        <p:txBody>
+          <a:bodyPr rtlCol="0" anchor="ctr" tIns="12700" bIns="12700"/>
+          <a:lstStyle/>
+          <a:p>
+            <a:pPr algn="ctr"/>
+            <a:r>
+              <a:rPr sz="1050" b="1">
+                <a:solidFill>
+                  <a:srgbClr val="FFFFFF"/>
+                </a:solidFill>
+                <a:latin typeface="Inter"/>
+              </a:rPr>
+              <a:t>▶  Mostrar solución</a:t>
+            </a:r>
+          </a:p>
+        </p:txBody>
+      </p:sp>
+      <p:sp>
+        <p:nvSpPr>
+          <p:cNvPr id="47" name="Rounded Rectangle 46"/>
+          <p:cNvSpPr/>
+          <p:nvPr/>
+        </p:nvSpPr>
+        <p:spPr>
+          <a:xfrm>
+            <a:off x="2697480" y="6053328"/>
+            <a:ext cx="1088136" cy="365760"/>
+          </a:xfrm>
+          <a:prstGeom prst="roundRect">
+            <a:avLst>
+              <a:gd name="adj" fmla="val 50000"/>
+            </a:avLst>
+          </a:prstGeom>
+          <a:solidFill>
+            <a:srgbClr val="FFFFFF"/>
+          </a:solidFill>
+          <a:ln w="12700">
+            <a:solidFill>
+              <a:srgbClr val="E4E3DE"/>
+            </a:solidFill>
+          </a:ln>
+          <a:effectLst/>
+        </p:spPr>
+        <p:style>
+          <a:lnRef idx="1">
+            <a:schemeClr val="accent1"/>
+          </a:lnRef>
+          <a:fillRef idx="3">
+            <a:schemeClr val="accent1"/>
+          </a:fillRef>
+          <a:effectRef idx="2">
+            <a:schemeClr val="accent1"/>
+          </a:effectRef>
+          <a:fontRef idx="minor">
+            <a:schemeClr val="lt1"/>
+          </a:fontRef>
+        </p:style>
+        <p:txBody>
+          <a:bodyPr rtlCol="0" anchor="ctr" tIns="12700" bIns="12700"/>
+          <a:lstStyle/>
+          <a:p>
+            <a:pPr algn="ctr"/>
+            <a:r>
+              <a:rPr sz="1050" b="1">
+                <a:solidFill>
+                  <a:srgbClr val="157355"/>
+                </a:solidFill>
+                <a:latin typeface="Inter"/>
+              </a:rPr>
+              <a:t>⏭  Saltar</a:t>
+            </a:r>
+          </a:p>
+        </p:txBody>
+      </p:sp>
+      <p:sp>
+        <p:nvSpPr>
+          <p:cNvPr id="48" name="Rounded Rectangle 47">
+            <a:hlinkClick action="ppaction://hlinksldjump" r:id="rId3"/>
+          </p:cNvPr>
+          <p:cNvSpPr/>
+          <p:nvPr/>
+        </p:nvSpPr>
+        <p:spPr>
+          <a:xfrm>
+            <a:off x="3931920" y="6053328"/>
+            <a:ext cx="1691639" cy="365760"/>
+          </a:xfrm>
+          <a:prstGeom prst="roundRect">
+            <a:avLst>
+              <a:gd name="adj" fmla="val 50000"/>
+            </a:avLst>
+          </a:prstGeom>
+          <a:solidFill>
+            <a:srgbClr val="FFFFFF"/>
+          </a:solidFill>
+          <a:ln w="12700">
+            <a:solidFill>
+              <a:srgbClr val="E4E3DE"/>
+            </a:solidFill>
+          </a:ln>
+          <a:effectLst/>
+        </p:spPr>
+        <p:style>
+          <a:lnRef idx="1">
+            <a:schemeClr val="accent1"/>
+          </a:lnRef>
+          <a:fillRef idx="3">
+            <a:schemeClr val="accent1"/>
+          </a:fillRef>
+          <a:effectRef idx="2">
+            <a:schemeClr val="accent1"/>
+          </a:effectRef>
+          <a:fontRef idx="minor">
+            <a:schemeClr val="lt1"/>
+          </a:fontRef>
+        </p:style>
+        <p:txBody>
+          <a:bodyPr rtlCol="0" anchor="ctr" tIns="12700" bIns="12700"/>
+          <a:lstStyle/>
+          <a:p>
+            <a:pPr algn="ctr"/>
+            <a:r>
+              <a:rPr sz="1050" b="1">
+                <a:solidFill>
+                  <a:srgbClr val="157355"/>
+                </a:solidFill>
+                <a:latin typeface="Inter"/>
+              </a:rPr>
+              <a:t>⌂  Menú (dia 2)</a:t>
+            </a:r>
+          </a:p>
+        </p:txBody>
+      </p:sp>
+      <p:sp>
+        <p:nvSpPr>
+          <p:cNvPr id="49" name="TextBox 48"/>
+          <p:cNvSpPr txBox="1"/>
+          <p:nvPr/>
+        </p:nvSpPr>
+        <p:spPr>
+          <a:xfrm>
+            <a:off x="8321040" y="6053328"/>
+            <a:ext cx="3383280" cy="365760"/>
+          </a:xfrm>
+          <a:prstGeom prst="rect">
+            <a:avLst/>
+          </a:prstGeom>
+          <a:noFill/>
+        </p:spPr>
+        <p:txBody>
+          <a:bodyPr wrap="square" anchor="ctr" lIns="38100" rIns="38100" tIns="25400" bIns="25400">
+            <a:spAutoFit/>
+          </a:bodyPr>
+          <a:lstStyle/>
+          <a:p>
+            <a:pPr algn="r">
+              <a:lnSpc>
+                <a:spcPct val="106000"/>
+              </a:lnSpc>
+              <a:spcBef>
+                <a:spcPts val="0"/>
+              </a:spcBef>
+              <a:spcAft>
+                <a:spcPts val="200"/>
+              </a:spcAft>
+            </a:pPr>
+            <a:r>
+              <a:rPr sz="850" b="0" i="1">
+                <a:solidFill>
+                  <a:srgbClr val="6A6E78"/>
+                </a:solidFill>
+                <a:latin typeface="Inter"/>
+              </a:rPr>
+              <a:t>Noodroute (§5): werkt zonder audio/internet</a:t>
+            </a:r>
+          </a:p>
+        </p:txBody>
+      </p:sp>
+      <p:sp>
+        <p:nvSpPr>
+          <p:cNvPr id="50" name="Rounded Rectangle 49"/>
           <p:cNvSpPr/>
           <p:nvPr/>
         </p:nvSpPr>
@@ -46368,7 +48932,7 @@
       </p:sp>
       <p:sp>
         <p:nvSpPr>
-          <p:cNvPr id="43" name="Rounded Rectangle 42"/>
+          <p:cNvPr id="51" name="Rounded Rectangle 50"/>
           <p:cNvSpPr/>
           <p:nvPr/>
         </p:nvSpPr>
@@ -46423,223 +48987,7 @@
       </p:sp>
       <p:sp>
         <p:nvSpPr>
-          <p:cNvPr id="44" name="Rounded Rectangle 43"/>
-          <p:cNvSpPr/>
-          <p:nvPr/>
-        </p:nvSpPr>
-        <p:spPr>
-          <a:xfrm>
-            <a:off x="457200" y="6053328"/>
-            <a:ext cx="2093976" cy="365760"/>
-          </a:xfrm>
-          <a:prstGeom prst="roundRect">
-            <a:avLst>
-              <a:gd name="adj" fmla="val 50000"/>
-            </a:avLst>
-          </a:prstGeom>
-          <a:solidFill>
-            <a:srgbClr val="1E9E74"/>
-          </a:solidFill>
-          <a:ln w="12700">
-            <a:solidFill>
-              <a:srgbClr val="E4E3DE"/>
-            </a:solidFill>
-          </a:ln>
-          <a:effectLst/>
-        </p:spPr>
-        <p:style>
-          <a:lnRef idx="1">
-            <a:schemeClr val="accent1"/>
-          </a:lnRef>
-          <a:fillRef idx="3">
-            <a:schemeClr val="accent1"/>
-          </a:fillRef>
-          <a:effectRef idx="2">
-            <a:schemeClr val="accent1"/>
-          </a:effectRef>
-          <a:fontRef idx="minor">
-            <a:schemeClr val="lt1"/>
-          </a:fontRef>
-        </p:style>
-        <p:txBody>
-          <a:bodyPr rtlCol="0" anchor="ctr" tIns="12700" bIns="12700"/>
-          <a:lstStyle/>
-          <a:p>
-            <a:pPr algn="ctr"/>
-            <a:r>
-              <a:rPr sz="1050" b="1">
-                <a:solidFill>
-                  <a:srgbClr val="FFFFFF"/>
-                </a:solidFill>
-                <a:latin typeface="Inter"/>
-              </a:rPr>
-              <a:t>▶  Mostrar solución</a:t>
-            </a:r>
-          </a:p>
-        </p:txBody>
-      </p:sp>
-      <p:sp>
-        <p:nvSpPr>
-          <p:cNvPr id="45" name="Rounded Rectangle 44"/>
-          <p:cNvSpPr/>
-          <p:nvPr/>
-        </p:nvSpPr>
-        <p:spPr>
-          <a:xfrm>
-            <a:off x="2697480" y="6053328"/>
-            <a:ext cx="1088136" cy="365760"/>
-          </a:xfrm>
-          <a:prstGeom prst="roundRect">
-            <a:avLst>
-              <a:gd name="adj" fmla="val 50000"/>
-            </a:avLst>
-          </a:prstGeom>
-          <a:solidFill>
-            <a:srgbClr val="FFFFFF"/>
-          </a:solidFill>
-          <a:ln w="12700">
-            <a:solidFill>
-              <a:srgbClr val="E4E3DE"/>
-            </a:solidFill>
-          </a:ln>
-          <a:effectLst/>
-        </p:spPr>
-        <p:style>
-          <a:lnRef idx="1">
-            <a:schemeClr val="accent1"/>
-          </a:lnRef>
-          <a:fillRef idx="3">
-            <a:schemeClr val="accent1"/>
-          </a:fillRef>
-          <a:effectRef idx="2">
-            <a:schemeClr val="accent1"/>
-          </a:effectRef>
-          <a:fontRef idx="minor">
-            <a:schemeClr val="lt1"/>
-          </a:fontRef>
-        </p:style>
-        <p:txBody>
-          <a:bodyPr rtlCol="0" anchor="ctr" tIns="12700" bIns="12700"/>
-          <a:lstStyle/>
-          <a:p>
-            <a:pPr algn="ctr"/>
-            <a:r>
-              <a:rPr sz="1050" b="1">
-                <a:solidFill>
-                  <a:srgbClr val="157355"/>
-                </a:solidFill>
-                <a:latin typeface="Inter"/>
-              </a:rPr>
-              <a:t>⏭  Saltar</a:t>
-            </a:r>
-          </a:p>
-        </p:txBody>
-      </p:sp>
-      <p:sp>
-        <p:nvSpPr>
-          <p:cNvPr id="46" name="Rounded Rectangle 45"/>
-          <p:cNvSpPr/>
-          <p:nvPr/>
-        </p:nvSpPr>
-        <p:spPr>
-          <a:xfrm>
-            <a:off x="3931920" y="6053328"/>
-            <a:ext cx="1691639" cy="365760"/>
-          </a:xfrm>
-          <a:prstGeom prst="roundRect">
-            <a:avLst>
-              <a:gd name="adj" fmla="val 50000"/>
-            </a:avLst>
-          </a:prstGeom>
-          <a:solidFill>
-            <a:srgbClr val="FFFFFF"/>
-          </a:solidFill>
-          <a:ln w="12700">
-            <a:solidFill>
-              <a:srgbClr val="E4E3DE"/>
-            </a:solidFill>
-          </a:ln>
-          <a:effectLst/>
-        </p:spPr>
-        <p:style>
-          <a:lnRef idx="1">
-            <a:schemeClr val="accent1"/>
-          </a:lnRef>
-          <a:fillRef idx="3">
-            <a:schemeClr val="accent1"/>
-          </a:fillRef>
-          <a:effectRef idx="2">
-            <a:schemeClr val="accent1"/>
-          </a:effectRef>
-          <a:fontRef idx="minor">
-            <a:schemeClr val="lt1"/>
-          </a:fontRef>
-        </p:style>
-        <p:txBody>
-          <a:bodyPr rtlCol="0" anchor="ctr" tIns="12700" bIns="12700"/>
-          <a:lstStyle/>
-          <a:p>
-            <a:pPr algn="ctr"/>
-            <a:r>
-              <a:rPr sz="1050" b="1">
-                <a:solidFill>
-                  <a:srgbClr val="157355"/>
-                </a:solidFill>
-                <a:latin typeface="Inter"/>
-              </a:rPr>
-              <a:t>⌂  Menú (dia 2)</a:t>
-            </a:r>
-          </a:p>
-        </p:txBody>
-      </p:sp>
-      <p:sp>
-        <p:nvSpPr>
-          <p:cNvPr id="47" name="TextBox 46"/>
-          <p:cNvSpPr txBox="1"/>
-          <p:nvPr/>
-        </p:nvSpPr>
-        <p:spPr>
-          <a:xfrm>
-            <a:off x="8321040" y="6053328"/>
-            <a:ext cx="3383280" cy="365760"/>
-          </a:xfrm>
-          <a:prstGeom prst="rect">
-            <a:avLst/>
-          </a:prstGeom>
-          <a:noFill/>
-        </p:spPr>
-        <p:txBody>
-          <a:bodyPr wrap="square" anchor="ctr" lIns="38100" rIns="38100" tIns="25400" bIns="25400">
-            <a:spAutoFit/>
-          </a:bodyPr>
-          <a:lstStyle/>
-          <a:p>
-            <a:pPr algn="r">
-              <a:lnSpc>
-                <a:spcPct val="106000"/>
-              </a:lnSpc>
-              <a:spcBef>
-                <a:spcPts val="0"/>
-              </a:spcBef>
-              <a:spcAft>
-                <a:spcPts val="200"/>
-              </a:spcAft>
-            </a:pPr>
-            <a:r>
-              <a:rPr sz="850" b="0" i="1">
-                <a:solidFill>
-                  <a:srgbClr val="6A6E78"/>
-                </a:solidFill>
-                <a:latin typeface="Inter"/>
-              </a:rPr>
-              <a:t>Noodroute (§5): werkt zonder audio/internet</a:t>
-            </a:r>
-          </a:p>
-        </p:txBody>
-      </p:sp>
-      <p:sp>
-        <p:nvSpPr>
-          <p:cNvPr id="48" name="Rectangle 47"/>
+          <p:cNvPr id="52" name="Rectangle 51"/>
           <p:cNvSpPr/>
           <p:nvPr/>
         </p:nvSpPr>
@@ -46683,7 +49031,7 @@
       </p:sp>
       <p:sp>
         <p:nvSpPr>
-          <p:cNvPr id="49" name="TextBox 48"/>
+          <p:cNvPr id="53" name="TextBox 52"/>
           <p:cNvSpPr txBox="1"/>
           <p:nvPr/>
         </p:nvSpPr>
@@ -46737,7 +49085,7 @@
       </p:sp>
       <p:sp>
         <p:nvSpPr>
-          <p:cNvPr id="50" name="TextBox 49"/>
+          <p:cNvPr id="54" name="TextBox 53"/>
           <p:cNvSpPr txBox="1"/>
           <p:nvPr/>
         </p:nvSpPr>
@@ -46782,7 +49130,7 @@
       </p:sp>
       <p:sp>
         <p:nvSpPr>
-          <p:cNvPr id="51" name="TextBox 50"/>
+          <p:cNvPr id="55" name="TextBox 54"/>
           <p:cNvSpPr txBox="1"/>
           <p:nvPr/>
         </p:nvSpPr>
@@ -46830,6 +49178,303 @@
   <p:clrMapOvr>
     <a:masterClrMapping/>
   </p:clrMapOvr>
+  <p:timing>
+    <p:tnLst>
+      <p:par>
+        <p:cTn id="1" dur="indefinite" restart="never" nodeType="tmRoot">
+          <p:childTnLst>
+            <p:seq concurrent="1" nextAc="seek">
+              <p:cTn id="2" dur="indefinite" nodeType="mainSeq">
+                <p:childTnLst/>
+              </p:cTn>
+              <p:prevCondLst>
+                <p:cond evt="onPrev" delay="0">
+                  <p:tgtEl>
+                    <p:sldTgt/>
+                  </p:tgtEl>
+                </p:cond>
+              </p:prevCondLst>
+              <p:nextCondLst>
+                <p:cond evt="onNext" delay="0">
+                  <p:tgtEl>
+                    <p:sldTgt/>
+                  </p:tgtEl>
+                </p:cond>
+              </p:nextCondLst>
+            </p:seq>
+            <p:seq concurrent="1" nextAc="seek">
+              <p:cTn id="5" restart="whenNotActive" fill="hold" nodeType="interactiveSeq">
+                <p:stCondLst>
+                  <p:cond evt="onClick" delay="0">
+                    <p:tgtEl>
+                      <p:spTgt spid="11"/>
+                    </p:tgtEl>
+                  </p:cond>
+                </p:stCondLst>
+                <p:endSync evt="end" delay="0">
+                  <p:rtn val="all"/>
+                </p:endSync>
+                <p:childTnLst>
+                  <p:par>
+                    <p:cTn id="6" fill="hold">
+                      <p:stCondLst>
+                        <p:cond delay="0"/>
+                      </p:stCondLst>
+                      <p:childTnLst>
+                        <p:par>
+                          <p:cTn id="7" presetID="10" presetClass="entr" presetSubtype="0" fill="hold" grpId="0" nodeType="clickEffect">
+                            <p:stCondLst>
+                              <p:cond delay="0"/>
+                            </p:stCondLst>
+                            <p:childTnLst>
+                              <p:set>
+                                <p:cBhvr>
+                                  <p:cTn id="8" dur="1" fill="hold">
+                                    <p:stCondLst>
+                                      <p:cond delay="0"/>
+                                    </p:stCondLst>
+                                  </p:cTn>
+                                  <p:tgtEl>
+                                    <p:spTgt spid="13"/>
+                                  </p:tgtEl>
+                                  <p:attrNameLst>
+                                    <p:attrName>style.visibility</p:attrName>
+                                  </p:attrNameLst>
+                                </p:cBhvr>
+                                <p:to>
+                                  <p:strVal val="visible"/>
+                                </p:to>
+                              </p:set>
+                              <p:animEffect transition="in" filter="fade">
+                                <p:cBhvr>
+                                  <p:cTn id="9" dur="400"/>
+                                  <p:tgtEl>
+                                    <p:spTgt spid="13"/>
+                                  </p:tgtEl>
+                                </p:cBhvr>
+                              </p:animEffect>
+                            </p:childTnLst>
+                          </p:cTn>
+                        </p:par>
+                      </p:childTnLst>
+                    </p:cTn>
+                  </p:par>
+                </p:childTnLst>
+              </p:cTn>
+              <p:nextCondLst>
+                <p:cond evt="onClick" delay="0">
+                  <p:tgtEl>
+                    <p:spTgt spid="11"/>
+                  </p:tgtEl>
+                </p:cond>
+              </p:nextCondLst>
+            </p:seq>
+            <p:seq concurrent="1" nextAc="seek">
+              <p:cTn id="15" restart="whenNotActive" fill="hold" nodeType="interactiveSeq">
+                <p:stCondLst>
+                  <p:cond evt="onClick" delay="0">
+                    <p:tgtEl>
+                      <p:spTgt spid="16"/>
+                    </p:tgtEl>
+                  </p:cond>
+                </p:stCondLst>
+                <p:endSync evt="end" delay="0">
+                  <p:rtn val="all"/>
+                </p:endSync>
+                <p:childTnLst>
+                  <p:par>
+                    <p:cTn id="16" fill="hold">
+                      <p:stCondLst>
+                        <p:cond delay="0"/>
+                      </p:stCondLst>
+                      <p:childTnLst>
+                        <p:par>
+                          <p:cTn id="17" presetID="10" presetClass="entr" presetSubtype="0" fill="hold" grpId="0" nodeType="clickEffect">
+                            <p:stCondLst>
+                              <p:cond delay="0"/>
+                            </p:stCondLst>
+                            <p:childTnLst>
+                              <p:set>
+                                <p:cBhvr>
+                                  <p:cTn id="18" dur="1" fill="hold">
+                                    <p:stCondLst>
+                                      <p:cond delay="0"/>
+                                    </p:stCondLst>
+                                  </p:cTn>
+                                  <p:tgtEl>
+                                    <p:spTgt spid="18"/>
+                                  </p:tgtEl>
+                                  <p:attrNameLst>
+                                    <p:attrName>style.visibility</p:attrName>
+                                  </p:attrNameLst>
+                                </p:cBhvr>
+                                <p:to>
+                                  <p:strVal val="visible"/>
+                                </p:to>
+                              </p:set>
+                              <p:animEffect transition="in" filter="fade">
+                                <p:cBhvr>
+                                  <p:cTn id="19" dur="400"/>
+                                  <p:tgtEl>
+                                    <p:spTgt spid="18"/>
+                                  </p:tgtEl>
+                                </p:cBhvr>
+                              </p:animEffect>
+                            </p:childTnLst>
+                          </p:cTn>
+                        </p:par>
+                      </p:childTnLst>
+                    </p:cTn>
+                  </p:par>
+                </p:childTnLst>
+              </p:cTn>
+              <p:nextCondLst>
+                <p:cond evt="onClick" delay="0">
+                  <p:tgtEl>
+                    <p:spTgt spid="16"/>
+                  </p:tgtEl>
+                </p:cond>
+              </p:nextCondLst>
+            </p:seq>
+            <p:seq concurrent="1" nextAc="seek">
+              <p:cTn id="25" restart="whenNotActive" fill="hold" nodeType="interactiveSeq">
+                <p:stCondLst>
+                  <p:cond evt="onClick" delay="0">
+                    <p:tgtEl>
+                      <p:spTgt spid="21"/>
+                    </p:tgtEl>
+                  </p:cond>
+                </p:stCondLst>
+                <p:endSync evt="end" delay="0">
+                  <p:rtn val="all"/>
+                </p:endSync>
+                <p:childTnLst>
+                  <p:par>
+                    <p:cTn id="26" fill="hold">
+                      <p:stCondLst>
+                        <p:cond delay="0"/>
+                      </p:stCondLst>
+                      <p:childTnLst>
+                        <p:par>
+                          <p:cTn id="27" presetID="10" presetClass="entr" presetSubtype="0" fill="hold" grpId="0" nodeType="clickEffect">
+                            <p:stCondLst>
+                              <p:cond delay="0"/>
+                            </p:stCondLst>
+                            <p:childTnLst>
+                              <p:set>
+                                <p:cBhvr>
+                                  <p:cTn id="28" dur="1" fill="hold">
+                                    <p:stCondLst>
+                                      <p:cond delay="0"/>
+                                    </p:stCondLst>
+                                  </p:cTn>
+                                  <p:tgtEl>
+                                    <p:spTgt spid="23"/>
+                                  </p:tgtEl>
+                                  <p:attrNameLst>
+                                    <p:attrName>style.visibility</p:attrName>
+                                  </p:attrNameLst>
+                                </p:cBhvr>
+                                <p:to>
+                                  <p:strVal val="visible"/>
+                                </p:to>
+                              </p:set>
+                              <p:animEffect transition="in" filter="fade">
+                                <p:cBhvr>
+                                  <p:cTn id="29" dur="400"/>
+                                  <p:tgtEl>
+                                    <p:spTgt spid="23"/>
+                                  </p:tgtEl>
+                                </p:cBhvr>
+                              </p:animEffect>
+                            </p:childTnLst>
+                          </p:cTn>
+                        </p:par>
+                      </p:childTnLst>
+                    </p:cTn>
+                  </p:par>
+                </p:childTnLst>
+              </p:cTn>
+              <p:nextCondLst>
+                <p:cond evt="onClick" delay="0">
+                  <p:tgtEl>
+                    <p:spTgt spid="21"/>
+                  </p:tgtEl>
+                </p:cond>
+              </p:nextCondLst>
+            </p:seq>
+            <p:seq concurrent="1" nextAc="seek">
+              <p:cTn id="35" restart="whenNotActive" fill="hold" nodeType="interactiveSeq">
+                <p:stCondLst>
+                  <p:cond evt="onClick" delay="0">
+                    <p:tgtEl>
+                      <p:spTgt spid="26"/>
+                    </p:tgtEl>
+                  </p:cond>
+                </p:stCondLst>
+                <p:endSync evt="end" delay="0">
+                  <p:rtn val="all"/>
+                </p:endSync>
+                <p:childTnLst>
+                  <p:par>
+                    <p:cTn id="36" fill="hold">
+                      <p:stCondLst>
+                        <p:cond delay="0"/>
+                      </p:stCondLst>
+                      <p:childTnLst>
+                        <p:par>
+                          <p:cTn id="37" presetID="10" presetClass="entr" presetSubtype="0" fill="hold" grpId="0" nodeType="clickEffect">
+                            <p:stCondLst>
+                              <p:cond delay="0"/>
+                            </p:stCondLst>
+                            <p:childTnLst>
+                              <p:set>
+                                <p:cBhvr>
+                                  <p:cTn id="38" dur="1" fill="hold">
+                                    <p:stCondLst>
+                                      <p:cond delay="0"/>
+                                    </p:stCondLst>
+                                  </p:cTn>
+                                  <p:tgtEl>
+                                    <p:spTgt spid="28"/>
+                                  </p:tgtEl>
+                                  <p:attrNameLst>
+                                    <p:attrName>style.visibility</p:attrName>
+                                  </p:attrNameLst>
+                                </p:cBhvr>
+                                <p:to>
+                                  <p:strVal val="visible"/>
+                                </p:to>
+                              </p:set>
+                              <p:animEffect transition="in" filter="fade">
+                                <p:cBhvr>
+                                  <p:cTn id="39" dur="400"/>
+                                  <p:tgtEl>
+                                    <p:spTgt spid="28"/>
+                                  </p:tgtEl>
+                                </p:cBhvr>
+                              </p:animEffect>
+                            </p:childTnLst>
+                          </p:cTn>
+                        </p:par>
+                      </p:childTnLst>
+                    </p:cTn>
+                  </p:par>
+                </p:childTnLst>
+              </p:cTn>
+              <p:nextCondLst>
+                <p:cond evt="onClick" delay="0">
+                  <p:tgtEl>
+                    <p:spTgt spid="26"/>
+                  </p:tgtEl>
+                </p:cond>
+              </p:nextCondLst>
+            </p:seq>
+          </p:childTnLst>
+        </p:cTn>
+      </p:par>
+    </p:tnLst>
+  </p:timing>
 </p:sld>
 </file>
 
@@ -51594,6 +54239,70 @@
         </p:nvSpPr>
         <p:spPr>
           <a:xfrm>
+            <a:off x="960120" y="1993392"/>
+            <a:ext cx="1645920" cy="310896"/>
+          </a:xfrm>
+          <a:prstGeom prst="roundRect">
+            <a:avLst>
+              <a:gd name="adj" fmla="val 50000"/>
+            </a:avLst>
+          </a:prstGeom>
+          <a:solidFill>
+            <a:srgbClr val="1E9E74"/>
+          </a:solidFill>
+          <a:ln w="12700">
+            <a:solidFill>
+              <a:srgbClr val="157355"/>
+            </a:solidFill>
+          </a:ln>
+          <a:effectLst/>
+          <a:effectLst>
+            <a:outerShdw blurRad="90000" dist="38000" dir="5400000" rotWithShape="0">
+              <a:srgbClr val="20242E">
+                <a:alpha val="22000"/>
+              </a:srgbClr>
+            </a:outerShdw>
+          </a:effectLst>
+        </p:spPr>
+        <p:style>
+          <a:lnRef idx="1">
+            <a:schemeClr val="accent1"/>
+          </a:lnRef>
+          <a:fillRef idx="3">
+            <a:schemeClr val="accent1"/>
+          </a:fillRef>
+          <a:effectRef idx="2">
+            <a:schemeClr val="accent1"/>
+          </a:effectRef>
+          <a:fontRef idx="minor">
+            <a:schemeClr val="lt1"/>
+          </a:fontRef>
+        </p:style>
+        <p:txBody>
+          <a:bodyPr rtlCol="0" anchor="ctr" wrap="none" lIns="88900" rIns="88900" tIns="12700" bIns="12700"/>
+          <a:lstStyle/>
+          <a:p>
+            <a:pPr algn="ctr"/>
+            <a:r>
+              <a:rPr sz="1100" b="1">
+                <a:solidFill>
+                  <a:srgbClr val="FFFFFF"/>
+                </a:solidFill>
+                <a:latin typeface="Inter"/>
+              </a:rPr>
+              <a:t>Perú</a:t>
+            </a:r>
+          </a:p>
+        </p:txBody>
+      </p:sp>
+      <p:sp>
+        <p:nvSpPr>
+          <p:cNvPr id="12" name="Rounded Rectangle 11"/>
+          <p:cNvSpPr/>
+          <p:nvPr/>
+        </p:nvSpPr>
+        <p:spPr>
+          <a:xfrm>
             <a:off x="3273552" y="1417320"/>
             <a:ext cx="2651760" cy="868680"/>
           </a:xfrm>
@@ -51643,7 +54352,7 @@
       </p:sp>
       <p:sp>
         <p:nvSpPr>
-          <p:cNvPr id="12" name="TextBox 11"/>
+          <p:cNvPr id="13" name="TextBox 12"/>
           <p:cNvSpPr txBox="1"/>
           <p:nvPr/>
         </p:nvSpPr>
@@ -51688,7 +54397,7 @@
       </p:sp>
       <p:sp>
         <p:nvSpPr>
-          <p:cNvPr id="13" name="TextBox 12"/>
+          <p:cNvPr id="14" name="TextBox 13"/>
           <p:cNvSpPr txBox="1"/>
           <p:nvPr/>
         </p:nvSpPr>
@@ -51733,7 +54442,71 @@
       </p:sp>
       <p:sp>
         <p:nvSpPr>
-          <p:cNvPr id="14" name="Rounded Rectangle 13"/>
+          <p:cNvPr id="15" name="Rounded Rectangle 14"/>
+          <p:cNvSpPr/>
+          <p:nvPr/>
+        </p:nvSpPr>
+        <p:spPr>
+          <a:xfrm>
+            <a:off x="3776472" y="1993392"/>
+            <a:ext cx="1645920" cy="310896"/>
+          </a:xfrm>
+          <a:prstGeom prst="roundRect">
+            <a:avLst>
+              <a:gd name="adj" fmla="val 50000"/>
+            </a:avLst>
+          </a:prstGeom>
+          <a:solidFill>
+            <a:srgbClr val="1E9E74"/>
+          </a:solidFill>
+          <a:ln w="12700">
+            <a:solidFill>
+              <a:srgbClr val="157355"/>
+            </a:solidFill>
+          </a:ln>
+          <a:effectLst/>
+          <a:effectLst>
+            <a:outerShdw blurRad="90000" dist="38000" dir="5400000" rotWithShape="0">
+              <a:srgbClr val="20242E">
+                <a:alpha val="22000"/>
+              </a:srgbClr>
+            </a:outerShdw>
+          </a:effectLst>
+        </p:spPr>
+        <p:style>
+          <a:lnRef idx="1">
+            <a:schemeClr val="accent1"/>
+          </a:lnRef>
+          <a:fillRef idx="3">
+            <a:schemeClr val="accent1"/>
+          </a:fillRef>
+          <a:effectRef idx="2">
+            <a:schemeClr val="accent1"/>
+          </a:effectRef>
+          <a:fontRef idx="minor">
+            <a:schemeClr val="lt1"/>
+          </a:fontRef>
+        </p:style>
+        <p:txBody>
+          <a:bodyPr rtlCol="0" anchor="ctr" wrap="none" lIns="88900" rIns="88900" tIns="12700" bIns="12700"/>
+          <a:lstStyle/>
+          <a:p>
+            <a:pPr algn="ctr"/>
+            <a:r>
+              <a:rPr sz="1100" b="1">
+                <a:solidFill>
+                  <a:srgbClr val="FFFFFF"/>
+                </a:solidFill>
+                <a:latin typeface="Inter"/>
+              </a:rPr>
+              <a:t>café</a:t>
+            </a:r>
+          </a:p>
+        </p:txBody>
+      </p:sp>
+      <p:sp>
+        <p:nvSpPr>
+          <p:cNvPr id="16" name="Rounded Rectangle 15"/>
           <p:cNvSpPr/>
           <p:nvPr/>
         </p:nvSpPr>
@@ -51788,7 +54561,7 @@
       </p:sp>
       <p:sp>
         <p:nvSpPr>
-          <p:cNvPr id="15" name="TextBox 14"/>
+          <p:cNvPr id="17" name="TextBox 16"/>
           <p:cNvSpPr txBox="1"/>
           <p:nvPr/>
         </p:nvSpPr>
@@ -51833,7 +54606,7 @@
       </p:sp>
       <p:sp>
         <p:nvSpPr>
-          <p:cNvPr id="16" name="TextBox 15"/>
+          <p:cNvPr id="18" name="TextBox 17"/>
           <p:cNvSpPr txBox="1"/>
           <p:nvPr/>
         </p:nvSpPr>
@@ -51878,7 +54651,71 @@
       </p:sp>
       <p:sp>
         <p:nvSpPr>
-          <p:cNvPr id="17" name="Rounded Rectangle 16"/>
+          <p:cNvPr id="19" name="Rounded Rectangle 18"/>
+          <p:cNvSpPr/>
+          <p:nvPr/>
+        </p:nvSpPr>
+        <p:spPr>
+          <a:xfrm>
+            <a:off x="6592824" y="1993392"/>
+            <a:ext cx="1645920" cy="310896"/>
+          </a:xfrm>
+          <a:prstGeom prst="roundRect">
+            <a:avLst>
+              <a:gd name="adj" fmla="val 50000"/>
+            </a:avLst>
+          </a:prstGeom>
+          <a:solidFill>
+            <a:srgbClr val="1E9E74"/>
+          </a:solidFill>
+          <a:ln w="12700">
+            <a:solidFill>
+              <a:srgbClr val="157355"/>
+            </a:solidFill>
+          </a:ln>
+          <a:effectLst/>
+          <a:effectLst>
+            <a:outerShdw blurRad="90000" dist="38000" dir="5400000" rotWithShape="0">
+              <a:srgbClr val="20242E">
+                <a:alpha val="22000"/>
+              </a:srgbClr>
+            </a:outerShdw>
+          </a:effectLst>
+        </p:spPr>
+        <p:style>
+          <a:lnRef idx="1">
+            <a:schemeClr val="accent1"/>
+          </a:lnRef>
+          <a:fillRef idx="3">
+            <a:schemeClr val="accent1"/>
+          </a:fillRef>
+          <a:effectRef idx="2">
+            <a:schemeClr val="accent1"/>
+          </a:effectRef>
+          <a:fontRef idx="minor">
+            <a:schemeClr val="lt1"/>
+          </a:fontRef>
+        </p:style>
+        <p:txBody>
+          <a:bodyPr rtlCol="0" anchor="ctr" wrap="none" lIns="88900" rIns="88900" tIns="12700" bIns="12700"/>
+          <a:lstStyle/>
+          <a:p>
+            <a:pPr algn="ctr"/>
+            <a:r>
+              <a:rPr sz="1100" b="1">
+                <a:solidFill>
+                  <a:srgbClr val="FFFFFF"/>
+                </a:solidFill>
+                <a:latin typeface="Inter"/>
+              </a:rPr>
+              <a:t>casa · sin ´</a:t>
+            </a:r>
+          </a:p>
+        </p:txBody>
+      </p:sp>
+      <p:sp>
+        <p:nvSpPr>
+          <p:cNvPr id="20" name="Rounded Rectangle 19"/>
           <p:cNvSpPr/>
           <p:nvPr/>
         </p:nvSpPr>
@@ -51933,7 +54770,7 @@
       </p:sp>
       <p:sp>
         <p:nvSpPr>
-          <p:cNvPr id="18" name="TextBox 17"/>
+          <p:cNvPr id="21" name="TextBox 20"/>
           <p:cNvSpPr txBox="1"/>
           <p:nvPr/>
         </p:nvSpPr>
@@ -51978,7 +54815,7 @@
       </p:sp>
       <p:sp>
         <p:nvSpPr>
-          <p:cNvPr id="19" name="TextBox 18"/>
+          <p:cNvPr id="22" name="TextBox 21"/>
           <p:cNvSpPr txBox="1"/>
           <p:nvPr/>
         </p:nvSpPr>
@@ -52023,7 +54860,71 @@
       </p:sp>
       <p:sp>
         <p:nvSpPr>
-          <p:cNvPr id="20" name="Rounded Rectangle 19"/>
+          <p:cNvPr id="23" name="Rounded Rectangle 22"/>
+          <p:cNvSpPr/>
+          <p:nvPr/>
+        </p:nvSpPr>
+        <p:spPr>
+          <a:xfrm>
+            <a:off x="9409176" y="1993392"/>
+            <a:ext cx="1645920" cy="310896"/>
+          </a:xfrm>
+          <a:prstGeom prst="roundRect">
+            <a:avLst>
+              <a:gd name="adj" fmla="val 50000"/>
+            </a:avLst>
+          </a:prstGeom>
+          <a:solidFill>
+            <a:srgbClr val="1E9E74"/>
+          </a:solidFill>
+          <a:ln w="12700">
+            <a:solidFill>
+              <a:srgbClr val="157355"/>
+            </a:solidFill>
+          </a:ln>
+          <a:effectLst/>
+          <a:effectLst>
+            <a:outerShdw blurRad="90000" dist="38000" dir="5400000" rotWithShape="0">
+              <a:srgbClr val="20242E">
+                <a:alpha val="22000"/>
+              </a:srgbClr>
+            </a:outerShdw>
+          </a:effectLst>
+        </p:spPr>
+        <p:style>
+          <a:lnRef idx="1">
+            <a:schemeClr val="accent1"/>
+          </a:lnRef>
+          <a:fillRef idx="3">
+            <a:schemeClr val="accent1"/>
+          </a:fillRef>
+          <a:effectRef idx="2">
+            <a:schemeClr val="accent1"/>
+          </a:effectRef>
+          <a:fontRef idx="minor">
+            <a:schemeClr val="lt1"/>
+          </a:fontRef>
+        </p:style>
+        <p:txBody>
+          <a:bodyPr rtlCol="0" anchor="ctr" wrap="none" lIns="88900" rIns="88900" tIns="12700" bIns="12700"/>
+          <a:lstStyle/>
+          <a:p>
+            <a:pPr algn="ctr"/>
+            <a:r>
+              <a:rPr sz="1100" b="1">
+                <a:solidFill>
+                  <a:srgbClr val="FFFFFF"/>
+                </a:solidFill>
+                <a:latin typeface="Inter"/>
+              </a:rPr>
+              <a:t>árbol</a:t>
+            </a:r>
+          </a:p>
+        </p:txBody>
+      </p:sp>
+      <p:sp>
+        <p:nvSpPr>
+          <p:cNvPr id="24" name="Rounded Rectangle 23"/>
           <p:cNvSpPr/>
           <p:nvPr/>
         </p:nvSpPr>
@@ -52078,7 +54979,7 @@
       </p:sp>
       <p:sp>
         <p:nvSpPr>
-          <p:cNvPr id="21" name="TextBox 20"/>
+          <p:cNvPr id="25" name="TextBox 24"/>
           <p:cNvSpPr txBox="1"/>
           <p:nvPr/>
         </p:nvSpPr>
@@ -52123,7 +55024,7 @@
       </p:sp>
       <p:sp>
         <p:nvSpPr>
-          <p:cNvPr id="22" name="TextBox 21"/>
+          <p:cNvPr id="26" name="TextBox 25"/>
           <p:cNvSpPr txBox="1"/>
           <p:nvPr/>
         </p:nvSpPr>
@@ -52168,7 +55069,71 @@
       </p:sp>
       <p:sp>
         <p:nvSpPr>
-          <p:cNvPr id="23" name="Rounded Rectangle 22"/>
+          <p:cNvPr id="27" name="Rounded Rectangle 26"/>
+          <p:cNvSpPr/>
+          <p:nvPr/>
+        </p:nvSpPr>
+        <p:spPr>
+          <a:xfrm>
+            <a:off x="960120" y="3044952"/>
+            <a:ext cx="1645920" cy="310896"/>
+          </a:xfrm>
+          <a:prstGeom prst="roundRect">
+            <a:avLst>
+              <a:gd name="adj" fmla="val 50000"/>
+            </a:avLst>
+          </a:prstGeom>
+          <a:solidFill>
+            <a:srgbClr val="1E9E74"/>
+          </a:solidFill>
+          <a:ln w="12700">
+            <a:solidFill>
+              <a:srgbClr val="157355"/>
+            </a:solidFill>
+          </a:ln>
+          <a:effectLst/>
+          <a:effectLst>
+            <a:outerShdw blurRad="90000" dist="38000" dir="5400000" rotWithShape="0">
+              <a:srgbClr val="20242E">
+                <a:alpha val="22000"/>
+              </a:srgbClr>
+            </a:outerShdw>
+          </a:effectLst>
+        </p:spPr>
+        <p:style>
+          <a:lnRef idx="1">
+            <a:schemeClr val="accent1"/>
+          </a:lnRef>
+          <a:fillRef idx="3">
+            <a:schemeClr val="accent1"/>
+          </a:fillRef>
+          <a:effectRef idx="2">
+            <a:schemeClr val="accent1"/>
+          </a:effectRef>
+          <a:fontRef idx="minor">
+            <a:schemeClr val="lt1"/>
+          </a:fontRef>
+        </p:style>
+        <p:txBody>
+          <a:bodyPr rtlCol="0" anchor="ctr" wrap="none" lIns="88900" rIns="88900" tIns="12700" bIns="12700"/>
+          <a:lstStyle/>
+          <a:p>
+            <a:pPr algn="ctr"/>
+            <a:r>
+              <a:rPr sz="1100" b="1">
+                <a:solidFill>
+                  <a:srgbClr val="FFFFFF"/>
+                </a:solidFill>
+                <a:latin typeface="Inter"/>
+              </a:rPr>
+              <a:t>México</a:t>
+            </a:r>
+          </a:p>
+        </p:txBody>
+      </p:sp>
+      <p:sp>
+        <p:nvSpPr>
+          <p:cNvPr id="28" name="Rounded Rectangle 27"/>
           <p:cNvSpPr/>
           <p:nvPr/>
         </p:nvSpPr>
@@ -52223,7 +55188,7 @@
       </p:sp>
       <p:sp>
         <p:nvSpPr>
-          <p:cNvPr id="24" name="TextBox 23"/>
+          <p:cNvPr id="29" name="TextBox 28"/>
           <p:cNvSpPr txBox="1"/>
           <p:nvPr/>
         </p:nvSpPr>
@@ -52268,7 +55233,7 @@
       </p:sp>
       <p:sp>
         <p:nvSpPr>
-          <p:cNvPr id="25" name="TextBox 24"/>
+          <p:cNvPr id="30" name="TextBox 29"/>
           <p:cNvSpPr txBox="1"/>
           <p:nvPr/>
         </p:nvSpPr>
@@ -52313,7 +55278,71 @@
       </p:sp>
       <p:sp>
         <p:nvSpPr>
-          <p:cNvPr id="26" name="Rounded Rectangle 25"/>
+          <p:cNvPr id="31" name="Rounded Rectangle 30"/>
+          <p:cNvSpPr/>
+          <p:nvPr/>
+        </p:nvSpPr>
+        <p:spPr>
+          <a:xfrm>
+            <a:off x="3776472" y="3044952"/>
+            <a:ext cx="1645920" cy="310896"/>
+          </a:xfrm>
+          <a:prstGeom prst="roundRect">
+            <a:avLst>
+              <a:gd name="adj" fmla="val 50000"/>
+            </a:avLst>
+          </a:prstGeom>
+          <a:solidFill>
+            <a:srgbClr val="1E9E74"/>
+          </a:solidFill>
+          <a:ln w="12700">
+            <a:solidFill>
+              <a:srgbClr val="157355"/>
+            </a:solidFill>
+          </a:ln>
+          <a:effectLst/>
+          <a:effectLst>
+            <a:outerShdw blurRad="90000" dist="38000" dir="5400000" rotWithShape="0">
+              <a:srgbClr val="20242E">
+                <a:alpha val="22000"/>
+              </a:srgbClr>
+            </a:outerShdw>
+          </a:effectLst>
+        </p:spPr>
+        <p:style>
+          <a:lnRef idx="1">
+            <a:schemeClr val="accent1"/>
+          </a:lnRef>
+          <a:fillRef idx="3">
+            <a:schemeClr val="accent1"/>
+          </a:fillRef>
+          <a:effectRef idx="2">
+            <a:schemeClr val="accent1"/>
+          </a:effectRef>
+          <a:fontRef idx="minor">
+            <a:schemeClr val="lt1"/>
+          </a:fontRef>
+        </p:style>
+        <p:txBody>
+          <a:bodyPr rtlCol="0" anchor="ctr" wrap="none" lIns="88900" rIns="88900" tIns="12700" bIns="12700"/>
+          <a:lstStyle/>
+          <a:p>
+            <a:pPr algn="ctr"/>
+            <a:r>
+              <a:rPr sz="1100" b="1">
+                <a:solidFill>
+                  <a:srgbClr val="FFFFFF"/>
+                </a:solidFill>
+                <a:latin typeface="Inter"/>
+              </a:rPr>
+              <a:t>número</a:t>
+            </a:r>
+          </a:p>
+        </p:txBody>
+      </p:sp>
+      <p:sp>
+        <p:nvSpPr>
+          <p:cNvPr id="32" name="Rounded Rectangle 31"/>
           <p:cNvSpPr/>
           <p:nvPr/>
         </p:nvSpPr>
@@ -52368,7 +55397,7 @@
       </p:sp>
       <p:sp>
         <p:nvSpPr>
-          <p:cNvPr id="27" name="TextBox 26"/>
+          <p:cNvPr id="33" name="TextBox 32"/>
           <p:cNvSpPr txBox="1"/>
           <p:nvPr/>
         </p:nvSpPr>
@@ -52413,7 +55442,7 @@
       </p:sp>
       <p:sp>
         <p:nvSpPr>
-          <p:cNvPr id="28" name="TextBox 27"/>
+          <p:cNvPr id="34" name="TextBox 33"/>
           <p:cNvSpPr txBox="1"/>
           <p:nvPr/>
         </p:nvSpPr>
@@ -52458,7 +55487,71 @@
       </p:sp>
       <p:sp>
         <p:nvSpPr>
-          <p:cNvPr id="29" name="Rounded Rectangle 28"/>
+          <p:cNvPr id="35" name="Rounded Rectangle 34"/>
+          <p:cNvSpPr/>
+          <p:nvPr/>
+        </p:nvSpPr>
+        <p:spPr>
+          <a:xfrm>
+            <a:off x="6592824" y="3044952"/>
+            <a:ext cx="1645920" cy="310896"/>
+          </a:xfrm>
+          <a:prstGeom prst="roundRect">
+            <a:avLst>
+              <a:gd name="adj" fmla="val 50000"/>
+            </a:avLst>
+          </a:prstGeom>
+          <a:solidFill>
+            <a:srgbClr val="1E9E74"/>
+          </a:solidFill>
+          <a:ln w="12700">
+            <a:solidFill>
+              <a:srgbClr val="157355"/>
+            </a:solidFill>
+          </a:ln>
+          <a:effectLst/>
+          <a:effectLst>
+            <a:outerShdw blurRad="90000" dist="38000" dir="5400000" rotWithShape="0">
+              <a:srgbClr val="20242E">
+                <a:alpha val="22000"/>
+              </a:srgbClr>
+            </a:outerShdw>
+          </a:effectLst>
+        </p:spPr>
+        <p:style>
+          <a:lnRef idx="1">
+            <a:schemeClr val="accent1"/>
+          </a:lnRef>
+          <a:fillRef idx="3">
+            <a:schemeClr val="accent1"/>
+          </a:fillRef>
+          <a:effectRef idx="2">
+            <a:schemeClr val="accent1"/>
+          </a:effectRef>
+          <a:fontRef idx="minor">
+            <a:schemeClr val="lt1"/>
+          </a:fontRef>
+        </p:style>
+        <p:txBody>
+          <a:bodyPr rtlCol="0" anchor="ctr" wrap="none" lIns="88900" rIns="88900" tIns="12700" bIns="12700"/>
+          <a:lstStyle/>
+          <a:p>
+            <a:pPr algn="ctr"/>
+            <a:r>
+              <a:rPr sz="1100" b="1">
+                <a:solidFill>
+                  <a:srgbClr val="FFFFFF"/>
+                </a:solidFill>
+                <a:latin typeface="Inter"/>
+              </a:rPr>
+              <a:t>lunes · sin ´</a:t>
+            </a:r>
+          </a:p>
+        </p:txBody>
+      </p:sp>
+      <p:sp>
+        <p:nvSpPr>
+          <p:cNvPr id="36" name="Rounded Rectangle 35"/>
           <p:cNvSpPr/>
           <p:nvPr/>
         </p:nvSpPr>
@@ -52513,7 +55606,7 @@
       </p:sp>
       <p:sp>
         <p:nvSpPr>
-          <p:cNvPr id="30" name="TextBox 29"/>
+          <p:cNvPr id="37" name="TextBox 36"/>
           <p:cNvSpPr txBox="1"/>
           <p:nvPr/>
         </p:nvSpPr>
@@ -52558,7 +55651,7 @@
       </p:sp>
       <p:sp>
         <p:nvSpPr>
-          <p:cNvPr id="31" name="TextBox 30"/>
+          <p:cNvPr id="38" name="TextBox 37"/>
           <p:cNvSpPr txBox="1"/>
           <p:nvPr/>
         </p:nvSpPr>
@@ -52603,7 +55696,289 @@
       </p:sp>
       <p:sp>
         <p:nvSpPr>
-          <p:cNvPr id="32" name="Rounded Rectangle 31"/>
+          <p:cNvPr id="39" name="Rounded Rectangle 38"/>
+          <p:cNvSpPr/>
+          <p:nvPr/>
+        </p:nvSpPr>
+        <p:spPr>
+          <a:xfrm>
+            <a:off x="9409176" y="3044952"/>
+            <a:ext cx="1645920" cy="310896"/>
+          </a:xfrm>
+          <a:prstGeom prst="roundRect">
+            <a:avLst>
+              <a:gd name="adj" fmla="val 50000"/>
+            </a:avLst>
+          </a:prstGeom>
+          <a:solidFill>
+            <a:srgbClr val="1E9E74"/>
+          </a:solidFill>
+          <a:ln w="12700">
+            <a:solidFill>
+              <a:srgbClr val="157355"/>
+            </a:solidFill>
+          </a:ln>
+          <a:effectLst/>
+          <a:effectLst>
+            <a:outerShdw blurRad="90000" dist="38000" dir="5400000" rotWithShape="0">
+              <a:srgbClr val="20242E">
+                <a:alpha val="22000"/>
+              </a:srgbClr>
+            </a:outerShdw>
+          </a:effectLst>
+        </p:spPr>
+        <p:style>
+          <a:lnRef idx="1">
+            <a:schemeClr val="accent1"/>
+          </a:lnRef>
+          <a:fillRef idx="3">
+            <a:schemeClr val="accent1"/>
+          </a:fillRef>
+          <a:effectRef idx="2">
+            <a:schemeClr val="accent1"/>
+          </a:effectRef>
+          <a:fontRef idx="minor">
+            <a:schemeClr val="lt1"/>
+          </a:fontRef>
+        </p:style>
+        <p:txBody>
+          <a:bodyPr rtlCol="0" anchor="ctr" wrap="none" lIns="88900" rIns="88900" tIns="12700" bIns="12700"/>
+          <a:lstStyle/>
+          <a:p>
+            <a:pPr algn="ctr"/>
+            <a:r>
+              <a:rPr sz="1100" b="1">
+                <a:solidFill>
+                  <a:srgbClr val="FFFFFF"/>
+                </a:solidFill>
+                <a:latin typeface="Inter"/>
+              </a:rPr>
+              <a:t>adiós</a:t>
+            </a:r>
+          </a:p>
+        </p:txBody>
+      </p:sp>
+      <p:sp>
+        <p:nvSpPr>
+          <p:cNvPr id="40" name="Rounded Rectangle 39"/>
+          <p:cNvSpPr/>
+          <p:nvPr/>
+        </p:nvSpPr>
+        <p:spPr>
+          <a:xfrm>
+            <a:off x="457200" y="6053328"/>
+            <a:ext cx="2093976" cy="365760"/>
+          </a:xfrm>
+          <a:prstGeom prst="roundRect">
+            <a:avLst>
+              <a:gd name="adj" fmla="val 50000"/>
+            </a:avLst>
+          </a:prstGeom>
+          <a:solidFill>
+            <a:srgbClr val="1E9E74"/>
+          </a:solidFill>
+          <a:ln w="12700">
+            <a:solidFill>
+              <a:srgbClr val="E4E3DE"/>
+            </a:solidFill>
+          </a:ln>
+          <a:effectLst/>
+        </p:spPr>
+        <p:style>
+          <a:lnRef idx="1">
+            <a:schemeClr val="accent1"/>
+          </a:lnRef>
+          <a:fillRef idx="3">
+            <a:schemeClr val="accent1"/>
+          </a:fillRef>
+          <a:effectRef idx="2">
+            <a:schemeClr val="accent1"/>
+          </a:effectRef>
+          <a:fontRef idx="minor">
+            <a:schemeClr val="lt1"/>
+          </a:fontRef>
+        </p:style>
+        <p:txBody>
+          <a:bodyPr rtlCol="0" anchor="ctr" tIns="12700" bIns="12700"/>
+          <a:lstStyle/>
+          <a:p>
+            <a:pPr algn="ctr"/>
+            <a:r>
+              <a:rPr sz="1050" b="1">
+                <a:solidFill>
+                  <a:srgbClr val="FFFFFF"/>
+                </a:solidFill>
+                <a:latin typeface="Inter"/>
+              </a:rPr>
+              <a:t>▶  Mostrar solución</a:t>
+            </a:r>
+          </a:p>
+        </p:txBody>
+      </p:sp>
+      <p:sp>
+        <p:nvSpPr>
+          <p:cNvPr id="41" name="Rounded Rectangle 40"/>
+          <p:cNvSpPr/>
+          <p:nvPr/>
+        </p:nvSpPr>
+        <p:spPr>
+          <a:xfrm>
+            <a:off x="2697480" y="6053328"/>
+            <a:ext cx="1088136" cy="365760"/>
+          </a:xfrm>
+          <a:prstGeom prst="roundRect">
+            <a:avLst>
+              <a:gd name="adj" fmla="val 50000"/>
+            </a:avLst>
+          </a:prstGeom>
+          <a:solidFill>
+            <a:srgbClr val="FFFFFF"/>
+          </a:solidFill>
+          <a:ln w="12700">
+            <a:solidFill>
+              <a:srgbClr val="E4E3DE"/>
+            </a:solidFill>
+          </a:ln>
+          <a:effectLst/>
+        </p:spPr>
+        <p:style>
+          <a:lnRef idx="1">
+            <a:schemeClr val="accent1"/>
+          </a:lnRef>
+          <a:fillRef idx="3">
+            <a:schemeClr val="accent1"/>
+          </a:fillRef>
+          <a:effectRef idx="2">
+            <a:schemeClr val="accent1"/>
+          </a:effectRef>
+          <a:fontRef idx="minor">
+            <a:schemeClr val="lt1"/>
+          </a:fontRef>
+        </p:style>
+        <p:txBody>
+          <a:bodyPr rtlCol="0" anchor="ctr" tIns="12700" bIns="12700"/>
+          <a:lstStyle/>
+          <a:p>
+            <a:pPr algn="ctr"/>
+            <a:r>
+              <a:rPr sz="1050" b="1">
+                <a:solidFill>
+                  <a:srgbClr val="157355"/>
+                </a:solidFill>
+                <a:latin typeface="Inter"/>
+              </a:rPr>
+              <a:t>⏭  Saltar</a:t>
+            </a:r>
+          </a:p>
+        </p:txBody>
+      </p:sp>
+      <p:sp>
+        <p:nvSpPr>
+          <p:cNvPr id="42" name="Rounded Rectangle 41">
+            <a:hlinkClick action="ppaction://hlinksldjump" r:id="rId3"/>
+          </p:cNvPr>
+          <p:cNvSpPr/>
+          <p:nvPr/>
+        </p:nvSpPr>
+        <p:spPr>
+          <a:xfrm>
+            <a:off x="3931920" y="6053328"/>
+            <a:ext cx="1691639" cy="365760"/>
+          </a:xfrm>
+          <a:prstGeom prst="roundRect">
+            <a:avLst>
+              <a:gd name="adj" fmla="val 50000"/>
+            </a:avLst>
+          </a:prstGeom>
+          <a:solidFill>
+            <a:srgbClr val="FFFFFF"/>
+          </a:solidFill>
+          <a:ln w="12700">
+            <a:solidFill>
+              <a:srgbClr val="E4E3DE"/>
+            </a:solidFill>
+          </a:ln>
+          <a:effectLst/>
+        </p:spPr>
+        <p:style>
+          <a:lnRef idx="1">
+            <a:schemeClr val="accent1"/>
+          </a:lnRef>
+          <a:fillRef idx="3">
+            <a:schemeClr val="accent1"/>
+          </a:fillRef>
+          <a:effectRef idx="2">
+            <a:schemeClr val="accent1"/>
+          </a:effectRef>
+          <a:fontRef idx="minor">
+            <a:schemeClr val="lt1"/>
+          </a:fontRef>
+        </p:style>
+        <p:txBody>
+          <a:bodyPr rtlCol="0" anchor="ctr" tIns="12700" bIns="12700"/>
+          <a:lstStyle/>
+          <a:p>
+            <a:pPr algn="ctr"/>
+            <a:r>
+              <a:rPr sz="1050" b="1">
+                <a:solidFill>
+                  <a:srgbClr val="157355"/>
+                </a:solidFill>
+                <a:latin typeface="Inter"/>
+              </a:rPr>
+              <a:t>⌂  Menú (dia 2)</a:t>
+            </a:r>
+          </a:p>
+        </p:txBody>
+      </p:sp>
+      <p:sp>
+        <p:nvSpPr>
+          <p:cNvPr id="43" name="TextBox 42"/>
+          <p:cNvSpPr txBox="1"/>
+          <p:nvPr/>
+        </p:nvSpPr>
+        <p:spPr>
+          <a:xfrm>
+            <a:off x="8321040" y="6053328"/>
+            <a:ext cx="3383280" cy="365760"/>
+          </a:xfrm>
+          <a:prstGeom prst="rect">
+            <a:avLst/>
+          </a:prstGeom>
+          <a:noFill/>
+        </p:spPr>
+        <p:txBody>
+          <a:bodyPr wrap="square" anchor="ctr" lIns="38100" rIns="38100" tIns="25400" bIns="25400">
+            <a:spAutoFit/>
+          </a:bodyPr>
+          <a:lstStyle/>
+          <a:p>
+            <a:pPr algn="r">
+              <a:lnSpc>
+                <a:spcPct val="106000"/>
+              </a:lnSpc>
+              <a:spcBef>
+                <a:spcPts val="0"/>
+              </a:spcBef>
+              <a:spcAft>
+                <a:spcPts val="200"/>
+              </a:spcAft>
+            </a:pPr>
+            <a:r>
+              <a:rPr sz="850" b="0" i="1">
+                <a:solidFill>
+                  <a:srgbClr val="6A6E78"/>
+                </a:solidFill>
+                <a:latin typeface="Inter"/>
+              </a:rPr>
+              <a:t>Noodroute (§5): werkt zonder audio/internet</a:t>
+            </a:r>
+          </a:p>
+        </p:txBody>
+      </p:sp>
+      <p:sp>
+        <p:nvSpPr>
+          <p:cNvPr id="44" name="Rounded Rectangle 43"/>
           <p:cNvSpPr/>
           <p:nvPr/>
         </p:nvSpPr>
@@ -52849,7 +56224,7 @@
       </p:sp>
       <p:sp>
         <p:nvSpPr>
-          <p:cNvPr id="33" name="Rounded Rectangle 32"/>
+          <p:cNvPr id="45" name="Rounded Rectangle 44"/>
           <p:cNvSpPr/>
           <p:nvPr/>
         </p:nvSpPr>
@@ -52904,223 +56279,7 @@
       </p:sp>
       <p:sp>
         <p:nvSpPr>
-          <p:cNvPr id="34" name="Rounded Rectangle 33"/>
-          <p:cNvSpPr/>
-          <p:nvPr/>
-        </p:nvSpPr>
-        <p:spPr>
-          <a:xfrm>
-            <a:off x="457200" y="6053328"/>
-            <a:ext cx="2093976" cy="365760"/>
-          </a:xfrm>
-          <a:prstGeom prst="roundRect">
-            <a:avLst>
-              <a:gd name="adj" fmla="val 50000"/>
-            </a:avLst>
-          </a:prstGeom>
-          <a:solidFill>
-            <a:srgbClr val="1E9E74"/>
-          </a:solidFill>
-          <a:ln w="12700">
-            <a:solidFill>
-              <a:srgbClr val="E4E3DE"/>
-            </a:solidFill>
-          </a:ln>
-          <a:effectLst/>
-        </p:spPr>
-        <p:style>
-          <a:lnRef idx="1">
-            <a:schemeClr val="accent1"/>
-          </a:lnRef>
-          <a:fillRef idx="3">
-            <a:schemeClr val="accent1"/>
-          </a:fillRef>
-          <a:effectRef idx="2">
-            <a:schemeClr val="accent1"/>
-          </a:effectRef>
-          <a:fontRef idx="minor">
-            <a:schemeClr val="lt1"/>
-          </a:fontRef>
-        </p:style>
-        <p:txBody>
-          <a:bodyPr rtlCol="0" anchor="ctr" tIns="12700" bIns="12700"/>
-          <a:lstStyle/>
-          <a:p>
-            <a:pPr algn="ctr"/>
-            <a:r>
-              <a:rPr sz="1050" b="1">
-                <a:solidFill>
-                  <a:srgbClr val="FFFFFF"/>
-                </a:solidFill>
-                <a:latin typeface="Inter"/>
-              </a:rPr>
-              <a:t>▶  Mostrar solución</a:t>
-            </a:r>
-          </a:p>
-        </p:txBody>
-      </p:sp>
-      <p:sp>
-        <p:nvSpPr>
-          <p:cNvPr id="35" name="Rounded Rectangle 34"/>
-          <p:cNvSpPr/>
-          <p:nvPr/>
-        </p:nvSpPr>
-        <p:spPr>
-          <a:xfrm>
-            <a:off x="2697480" y="6053328"/>
-            <a:ext cx="1088136" cy="365760"/>
-          </a:xfrm>
-          <a:prstGeom prst="roundRect">
-            <a:avLst>
-              <a:gd name="adj" fmla="val 50000"/>
-            </a:avLst>
-          </a:prstGeom>
-          <a:solidFill>
-            <a:srgbClr val="FFFFFF"/>
-          </a:solidFill>
-          <a:ln w="12700">
-            <a:solidFill>
-              <a:srgbClr val="E4E3DE"/>
-            </a:solidFill>
-          </a:ln>
-          <a:effectLst/>
-        </p:spPr>
-        <p:style>
-          <a:lnRef idx="1">
-            <a:schemeClr val="accent1"/>
-          </a:lnRef>
-          <a:fillRef idx="3">
-            <a:schemeClr val="accent1"/>
-          </a:fillRef>
-          <a:effectRef idx="2">
-            <a:schemeClr val="accent1"/>
-          </a:effectRef>
-          <a:fontRef idx="minor">
-            <a:schemeClr val="lt1"/>
-          </a:fontRef>
-        </p:style>
-        <p:txBody>
-          <a:bodyPr rtlCol="0" anchor="ctr" tIns="12700" bIns="12700"/>
-          <a:lstStyle/>
-          <a:p>
-            <a:pPr algn="ctr"/>
-            <a:r>
-              <a:rPr sz="1050" b="1">
-                <a:solidFill>
-                  <a:srgbClr val="157355"/>
-                </a:solidFill>
-                <a:latin typeface="Inter"/>
-              </a:rPr>
-              <a:t>⏭  Saltar</a:t>
-            </a:r>
-          </a:p>
-        </p:txBody>
-      </p:sp>
-      <p:sp>
-        <p:nvSpPr>
-          <p:cNvPr id="36" name="Rounded Rectangle 35"/>
-          <p:cNvSpPr/>
-          <p:nvPr/>
-        </p:nvSpPr>
-        <p:spPr>
-          <a:xfrm>
-            <a:off x="3931920" y="6053328"/>
-            <a:ext cx="1691639" cy="365760"/>
-          </a:xfrm>
-          <a:prstGeom prst="roundRect">
-            <a:avLst>
-              <a:gd name="adj" fmla="val 50000"/>
-            </a:avLst>
-          </a:prstGeom>
-          <a:solidFill>
-            <a:srgbClr val="FFFFFF"/>
-          </a:solidFill>
-          <a:ln w="12700">
-            <a:solidFill>
-              <a:srgbClr val="E4E3DE"/>
-            </a:solidFill>
-          </a:ln>
-          <a:effectLst/>
-        </p:spPr>
-        <p:style>
-          <a:lnRef idx="1">
-            <a:schemeClr val="accent1"/>
-          </a:lnRef>
-          <a:fillRef idx="3">
-            <a:schemeClr val="accent1"/>
-          </a:fillRef>
-          <a:effectRef idx="2">
-            <a:schemeClr val="accent1"/>
-          </a:effectRef>
-          <a:fontRef idx="minor">
-            <a:schemeClr val="lt1"/>
-          </a:fontRef>
-        </p:style>
-        <p:txBody>
-          <a:bodyPr rtlCol="0" anchor="ctr" tIns="12700" bIns="12700"/>
-          <a:lstStyle/>
-          <a:p>
-            <a:pPr algn="ctr"/>
-            <a:r>
-              <a:rPr sz="1050" b="1">
-                <a:solidFill>
-                  <a:srgbClr val="157355"/>
-                </a:solidFill>
-                <a:latin typeface="Inter"/>
-              </a:rPr>
-              <a:t>⌂  Menú (dia 2)</a:t>
-            </a:r>
-          </a:p>
-        </p:txBody>
-      </p:sp>
-      <p:sp>
-        <p:nvSpPr>
-          <p:cNvPr id="37" name="TextBox 36"/>
-          <p:cNvSpPr txBox="1"/>
-          <p:nvPr/>
-        </p:nvSpPr>
-        <p:spPr>
-          <a:xfrm>
-            <a:off x="8321040" y="6053328"/>
-            <a:ext cx="3383280" cy="365760"/>
-          </a:xfrm>
-          <a:prstGeom prst="rect">
-            <a:avLst/>
-          </a:prstGeom>
-          <a:noFill/>
-        </p:spPr>
-        <p:txBody>
-          <a:bodyPr wrap="square" anchor="ctr" lIns="38100" rIns="38100" tIns="25400" bIns="25400">
-            <a:spAutoFit/>
-          </a:bodyPr>
-          <a:lstStyle/>
-          <a:p>
-            <a:pPr algn="r">
-              <a:lnSpc>
-                <a:spcPct val="106000"/>
-              </a:lnSpc>
-              <a:spcBef>
-                <a:spcPts val="0"/>
-              </a:spcBef>
-              <a:spcAft>
-                <a:spcPts val="200"/>
-              </a:spcAft>
-            </a:pPr>
-            <a:r>
-              <a:rPr sz="850" b="0" i="1">
-                <a:solidFill>
-                  <a:srgbClr val="6A6E78"/>
-                </a:solidFill>
-                <a:latin typeface="Inter"/>
-              </a:rPr>
-              <a:t>Noodroute (§5): werkt zonder audio/internet</a:t>
-            </a:r>
-          </a:p>
-        </p:txBody>
-      </p:sp>
-      <p:sp>
-        <p:nvSpPr>
-          <p:cNvPr id="38" name="Rectangle 37"/>
+          <p:cNvPr id="46" name="Rectangle 45"/>
           <p:cNvSpPr/>
           <p:nvPr/>
         </p:nvSpPr>
@@ -53164,7 +56323,7 @@
       </p:sp>
       <p:sp>
         <p:nvSpPr>
-          <p:cNvPr id="39" name="TextBox 38"/>
+          <p:cNvPr id="47" name="TextBox 46"/>
           <p:cNvSpPr txBox="1"/>
           <p:nvPr/>
         </p:nvSpPr>
@@ -53218,7 +56377,7 @@
       </p:sp>
       <p:sp>
         <p:nvSpPr>
-          <p:cNvPr id="40" name="TextBox 39"/>
+          <p:cNvPr id="48" name="TextBox 47"/>
           <p:cNvSpPr txBox="1"/>
           <p:nvPr/>
         </p:nvSpPr>
@@ -53263,7 +56422,7 @@
       </p:sp>
       <p:sp>
         <p:nvSpPr>
-          <p:cNvPr id="41" name="TextBox 40"/>
+          <p:cNvPr id="49" name="TextBox 48"/>
           <p:cNvSpPr txBox="1"/>
           <p:nvPr/>
         </p:nvSpPr>
@@ -53311,6 +56470,571 @@
   <p:clrMapOvr>
     <a:masterClrMapping/>
   </p:clrMapOvr>
+  <p:timing>
+    <p:tnLst>
+      <p:par>
+        <p:cTn id="1" dur="indefinite" restart="never" nodeType="tmRoot">
+          <p:childTnLst>
+            <p:seq concurrent="1" nextAc="seek">
+              <p:cTn id="2" dur="indefinite" nodeType="mainSeq">
+                <p:childTnLst/>
+              </p:cTn>
+              <p:prevCondLst>
+                <p:cond evt="onPrev" delay="0">
+                  <p:tgtEl>
+                    <p:sldTgt/>
+                  </p:tgtEl>
+                </p:cond>
+              </p:prevCondLst>
+              <p:nextCondLst>
+                <p:cond evt="onNext" delay="0">
+                  <p:tgtEl>
+                    <p:sldTgt/>
+                  </p:tgtEl>
+                </p:cond>
+              </p:nextCondLst>
+            </p:seq>
+            <p:seq concurrent="1" nextAc="seek">
+              <p:cTn id="5" restart="whenNotActive" fill="hold" nodeType="interactiveSeq">
+                <p:stCondLst>
+                  <p:cond evt="onClick" delay="0">
+                    <p:tgtEl>
+                      <p:spTgt spid="8"/>
+                    </p:tgtEl>
+                  </p:cond>
+                </p:stCondLst>
+                <p:endSync evt="end" delay="0">
+                  <p:rtn val="all"/>
+                </p:endSync>
+                <p:childTnLst>
+                  <p:par>
+                    <p:cTn id="6" fill="hold">
+                      <p:stCondLst>
+                        <p:cond delay="0"/>
+                      </p:stCondLst>
+                      <p:childTnLst>
+                        <p:par>
+                          <p:cTn id="7" presetID="10" presetClass="entr" presetSubtype="0" fill="hold" grpId="0" nodeType="clickEffect">
+                            <p:stCondLst>
+                              <p:cond delay="0"/>
+                            </p:stCondLst>
+                            <p:childTnLst>
+                              <p:set>
+                                <p:cBhvr>
+                                  <p:cTn id="8" dur="1" fill="hold">
+                                    <p:stCondLst>
+                                      <p:cond delay="0"/>
+                                    </p:stCondLst>
+                                  </p:cTn>
+                                  <p:tgtEl>
+                                    <p:spTgt spid="11"/>
+                                  </p:tgtEl>
+                                  <p:attrNameLst>
+                                    <p:attrName>style.visibility</p:attrName>
+                                  </p:attrNameLst>
+                                </p:cBhvr>
+                                <p:to>
+                                  <p:strVal val="visible"/>
+                                </p:to>
+                              </p:set>
+                              <p:animEffect transition="in" filter="fade">
+                                <p:cBhvr>
+                                  <p:cTn id="9" dur="400"/>
+                                  <p:tgtEl>
+                                    <p:spTgt spid="11"/>
+                                  </p:tgtEl>
+                                </p:cBhvr>
+                              </p:animEffect>
+                            </p:childTnLst>
+                          </p:cTn>
+                        </p:par>
+                      </p:childTnLst>
+                    </p:cTn>
+                  </p:par>
+                </p:childTnLst>
+              </p:cTn>
+              <p:nextCondLst>
+                <p:cond evt="onClick" delay="0">
+                  <p:tgtEl>
+                    <p:spTgt spid="8"/>
+                  </p:tgtEl>
+                </p:cond>
+              </p:nextCondLst>
+            </p:seq>
+            <p:seq concurrent="1" nextAc="seek">
+              <p:cTn id="15" restart="whenNotActive" fill="hold" nodeType="interactiveSeq">
+                <p:stCondLst>
+                  <p:cond evt="onClick" delay="0">
+                    <p:tgtEl>
+                      <p:spTgt spid="12"/>
+                    </p:tgtEl>
+                  </p:cond>
+                </p:stCondLst>
+                <p:endSync evt="end" delay="0">
+                  <p:rtn val="all"/>
+                </p:endSync>
+                <p:childTnLst>
+                  <p:par>
+                    <p:cTn id="16" fill="hold">
+                      <p:stCondLst>
+                        <p:cond delay="0"/>
+                      </p:stCondLst>
+                      <p:childTnLst>
+                        <p:par>
+                          <p:cTn id="17" presetID="10" presetClass="entr" presetSubtype="0" fill="hold" grpId="0" nodeType="clickEffect">
+                            <p:stCondLst>
+                              <p:cond delay="0"/>
+                            </p:stCondLst>
+                            <p:childTnLst>
+                              <p:set>
+                                <p:cBhvr>
+                                  <p:cTn id="18" dur="1" fill="hold">
+                                    <p:stCondLst>
+                                      <p:cond delay="0"/>
+                                    </p:stCondLst>
+                                  </p:cTn>
+                                  <p:tgtEl>
+                                    <p:spTgt spid="15"/>
+                                  </p:tgtEl>
+                                  <p:attrNameLst>
+                                    <p:attrName>style.visibility</p:attrName>
+                                  </p:attrNameLst>
+                                </p:cBhvr>
+                                <p:to>
+                                  <p:strVal val="visible"/>
+                                </p:to>
+                              </p:set>
+                              <p:animEffect transition="in" filter="fade">
+                                <p:cBhvr>
+                                  <p:cTn id="19" dur="400"/>
+                                  <p:tgtEl>
+                                    <p:spTgt spid="15"/>
+                                  </p:tgtEl>
+                                </p:cBhvr>
+                              </p:animEffect>
+                            </p:childTnLst>
+                          </p:cTn>
+                        </p:par>
+                      </p:childTnLst>
+                    </p:cTn>
+                  </p:par>
+                </p:childTnLst>
+              </p:cTn>
+              <p:nextCondLst>
+                <p:cond evt="onClick" delay="0">
+                  <p:tgtEl>
+                    <p:spTgt spid="12"/>
+                  </p:tgtEl>
+                </p:cond>
+              </p:nextCondLst>
+            </p:seq>
+            <p:seq concurrent="1" nextAc="seek">
+              <p:cTn id="25" restart="whenNotActive" fill="hold" nodeType="interactiveSeq">
+                <p:stCondLst>
+                  <p:cond evt="onClick" delay="0">
+                    <p:tgtEl>
+                      <p:spTgt spid="16"/>
+                    </p:tgtEl>
+                  </p:cond>
+                </p:stCondLst>
+                <p:endSync evt="end" delay="0">
+                  <p:rtn val="all"/>
+                </p:endSync>
+                <p:childTnLst>
+                  <p:par>
+                    <p:cTn id="26" fill="hold">
+                      <p:stCondLst>
+                        <p:cond delay="0"/>
+                      </p:stCondLst>
+                      <p:childTnLst>
+                        <p:par>
+                          <p:cTn id="27" presetID="10" presetClass="entr" presetSubtype="0" fill="hold" grpId="0" nodeType="clickEffect">
+                            <p:stCondLst>
+                              <p:cond delay="0"/>
+                            </p:stCondLst>
+                            <p:childTnLst>
+                              <p:set>
+                                <p:cBhvr>
+                                  <p:cTn id="28" dur="1" fill="hold">
+                                    <p:stCondLst>
+                                      <p:cond delay="0"/>
+                                    </p:stCondLst>
+                                  </p:cTn>
+                                  <p:tgtEl>
+                                    <p:spTgt spid="19"/>
+                                  </p:tgtEl>
+                                  <p:attrNameLst>
+                                    <p:attrName>style.visibility</p:attrName>
+                                  </p:attrNameLst>
+                                </p:cBhvr>
+                                <p:to>
+                                  <p:strVal val="visible"/>
+                                </p:to>
+                              </p:set>
+                              <p:animEffect transition="in" filter="fade">
+                                <p:cBhvr>
+                                  <p:cTn id="29" dur="400"/>
+                                  <p:tgtEl>
+                                    <p:spTgt spid="19"/>
+                                  </p:tgtEl>
+                                </p:cBhvr>
+                              </p:animEffect>
+                            </p:childTnLst>
+                          </p:cTn>
+                        </p:par>
+                      </p:childTnLst>
+                    </p:cTn>
+                  </p:par>
+                </p:childTnLst>
+              </p:cTn>
+              <p:nextCondLst>
+                <p:cond evt="onClick" delay="0">
+                  <p:tgtEl>
+                    <p:spTgt spid="16"/>
+                  </p:tgtEl>
+                </p:cond>
+              </p:nextCondLst>
+            </p:seq>
+            <p:seq concurrent="1" nextAc="seek">
+              <p:cTn id="35" restart="whenNotActive" fill="hold" nodeType="interactiveSeq">
+                <p:stCondLst>
+                  <p:cond evt="onClick" delay="0">
+                    <p:tgtEl>
+                      <p:spTgt spid="20"/>
+                    </p:tgtEl>
+                  </p:cond>
+                </p:stCondLst>
+                <p:endSync evt="end" delay="0">
+                  <p:rtn val="all"/>
+                </p:endSync>
+                <p:childTnLst>
+                  <p:par>
+                    <p:cTn id="36" fill="hold">
+                      <p:stCondLst>
+                        <p:cond delay="0"/>
+                      </p:stCondLst>
+                      <p:childTnLst>
+                        <p:par>
+                          <p:cTn id="37" presetID="10" presetClass="entr" presetSubtype="0" fill="hold" grpId="0" nodeType="clickEffect">
+                            <p:stCondLst>
+                              <p:cond delay="0"/>
+                            </p:stCondLst>
+                            <p:childTnLst>
+                              <p:set>
+                                <p:cBhvr>
+                                  <p:cTn id="38" dur="1" fill="hold">
+                                    <p:stCondLst>
+                                      <p:cond delay="0"/>
+                                    </p:stCondLst>
+                                  </p:cTn>
+                                  <p:tgtEl>
+                                    <p:spTgt spid="23"/>
+                                  </p:tgtEl>
+                                  <p:attrNameLst>
+                                    <p:attrName>style.visibility</p:attrName>
+                                  </p:attrNameLst>
+                                </p:cBhvr>
+                                <p:to>
+                                  <p:strVal val="visible"/>
+                                </p:to>
+                              </p:set>
+                              <p:animEffect transition="in" filter="fade">
+                                <p:cBhvr>
+                                  <p:cTn id="39" dur="400"/>
+                                  <p:tgtEl>
+                                    <p:spTgt spid="23"/>
+                                  </p:tgtEl>
+                                </p:cBhvr>
+                              </p:animEffect>
+                            </p:childTnLst>
+                          </p:cTn>
+                        </p:par>
+                      </p:childTnLst>
+                    </p:cTn>
+                  </p:par>
+                </p:childTnLst>
+              </p:cTn>
+              <p:nextCondLst>
+                <p:cond evt="onClick" delay="0">
+                  <p:tgtEl>
+                    <p:spTgt spid="20"/>
+                  </p:tgtEl>
+                </p:cond>
+              </p:nextCondLst>
+            </p:seq>
+            <p:seq concurrent="1" nextAc="seek">
+              <p:cTn id="45" restart="whenNotActive" fill="hold" nodeType="interactiveSeq">
+                <p:stCondLst>
+                  <p:cond evt="onClick" delay="0">
+                    <p:tgtEl>
+                      <p:spTgt spid="24"/>
+                    </p:tgtEl>
+                  </p:cond>
+                </p:stCondLst>
+                <p:endSync evt="end" delay="0">
+                  <p:rtn val="all"/>
+                </p:endSync>
+                <p:childTnLst>
+                  <p:par>
+                    <p:cTn id="46" fill="hold">
+                      <p:stCondLst>
+                        <p:cond delay="0"/>
+                      </p:stCondLst>
+                      <p:childTnLst>
+                        <p:par>
+                          <p:cTn id="47" presetID="10" presetClass="entr" presetSubtype="0" fill="hold" grpId="0" nodeType="clickEffect">
+                            <p:stCondLst>
+                              <p:cond delay="0"/>
+                            </p:stCondLst>
+                            <p:childTnLst>
+                              <p:set>
+                                <p:cBhvr>
+                                  <p:cTn id="48" dur="1" fill="hold">
+                                    <p:stCondLst>
+                                      <p:cond delay="0"/>
+                                    </p:stCondLst>
+                                  </p:cTn>
+                                  <p:tgtEl>
+                                    <p:spTgt spid="27"/>
+                                  </p:tgtEl>
+                                  <p:attrNameLst>
+                                    <p:attrName>style.visibility</p:attrName>
+                                  </p:attrNameLst>
+                                </p:cBhvr>
+                                <p:to>
+                                  <p:strVal val="visible"/>
+                                </p:to>
+                              </p:set>
+                              <p:animEffect transition="in" filter="fade">
+                                <p:cBhvr>
+                                  <p:cTn id="49" dur="400"/>
+                                  <p:tgtEl>
+                                    <p:spTgt spid="27"/>
+                                  </p:tgtEl>
+                                </p:cBhvr>
+                              </p:animEffect>
+                            </p:childTnLst>
+                          </p:cTn>
+                        </p:par>
+                      </p:childTnLst>
+                    </p:cTn>
+                  </p:par>
+                </p:childTnLst>
+              </p:cTn>
+              <p:nextCondLst>
+                <p:cond evt="onClick" delay="0">
+                  <p:tgtEl>
+                    <p:spTgt spid="24"/>
+                  </p:tgtEl>
+                </p:cond>
+              </p:nextCondLst>
+            </p:seq>
+            <p:seq concurrent="1" nextAc="seek">
+              <p:cTn id="55" restart="whenNotActive" fill="hold" nodeType="interactiveSeq">
+                <p:stCondLst>
+                  <p:cond evt="onClick" delay="0">
+                    <p:tgtEl>
+                      <p:spTgt spid="28"/>
+                    </p:tgtEl>
+                  </p:cond>
+                </p:stCondLst>
+                <p:endSync evt="end" delay="0">
+                  <p:rtn val="all"/>
+                </p:endSync>
+                <p:childTnLst>
+                  <p:par>
+                    <p:cTn id="56" fill="hold">
+                      <p:stCondLst>
+                        <p:cond delay="0"/>
+                      </p:stCondLst>
+                      <p:childTnLst>
+                        <p:par>
+                          <p:cTn id="57" presetID="10" presetClass="entr" presetSubtype="0" fill="hold" grpId="0" nodeType="clickEffect">
+                            <p:stCondLst>
+                              <p:cond delay="0"/>
+                            </p:stCondLst>
+                            <p:childTnLst>
+                              <p:set>
+                                <p:cBhvr>
+                                  <p:cTn id="58" dur="1" fill="hold">
+                                    <p:stCondLst>
+                                      <p:cond delay="0"/>
+                                    </p:stCondLst>
+                                  </p:cTn>
+                                  <p:tgtEl>
+                                    <p:spTgt spid="31"/>
+                                  </p:tgtEl>
+                                  <p:attrNameLst>
+                                    <p:attrName>style.visibility</p:attrName>
+                                  </p:attrNameLst>
+                                </p:cBhvr>
+                                <p:to>
+                                  <p:strVal val="visible"/>
+                                </p:to>
+                              </p:set>
+                              <p:animEffect transition="in" filter="fade">
+                                <p:cBhvr>
+                                  <p:cTn id="59" dur="400"/>
+                                  <p:tgtEl>
+                                    <p:spTgt spid="31"/>
+                                  </p:tgtEl>
+                                </p:cBhvr>
+                              </p:animEffect>
+                            </p:childTnLst>
+                          </p:cTn>
+                        </p:par>
+                      </p:childTnLst>
+                    </p:cTn>
+                  </p:par>
+                </p:childTnLst>
+              </p:cTn>
+              <p:nextCondLst>
+                <p:cond evt="onClick" delay="0">
+                  <p:tgtEl>
+                    <p:spTgt spid="28"/>
+                  </p:tgtEl>
+                </p:cond>
+              </p:nextCondLst>
+            </p:seq>
+            <p:seq concurrent="1" nextAc="seek">
+              <p:cTn id="65" restart="whenNotActive" fill="hold" nodeType="interactiveSeq">
+                <p:stCondLst>
+                  <p:cond evt="onClick" delay="0">
+                    <p:tgtEl>
+                      <p:spTgt spid="32"/>
+                    </p:tgtEl>
+                  </p:cond>
+                </p:stCondLst>
+                <p:endSync evt="end" delay="0">
+                  <p:rtn val="all"/>
+                </p:endSync>
+                <p:childTnLst>
+                  <p:par>
+                    <p:cTn id="66" fill="hold">
+                      <p:stCondLst>
+                        <p:cond delay="0"/>
+                      </p:stCondLst>
+                      <p:childTnLst>
+                        <p:par>
+                          <p:cTn id="67" presetID="10" presetClass="entr" presetSubtype="0" fill="hold" grpId="0" nodeType="clickEffect">
+                            <p:stCondLst>
+                              <p:cond delay="0"/>
+                            </p:stCondLst>
+                            <p:childTnLst>
+                              <p:set>
+                                <p:cBhvr>
+                                  <p:cTn id="68" dur="1" fill="hold">
+                                    <p:stCondLst>
+                                      <p:cond delay="0"/>
+                                    </p:stCondLst>
+                                  </p:cTn>
+                                  <p:tgtEl>
+                                    <p:spTgt spid="35"/>
+                                  </p:tgtEl>
+                                  <p:attrNameLst>
+                                    <p:attrName>style.visibility</p:attrName>
+                                  </p:attrNameLst>
+                                </p:cBhvr>
+                                <p:to>
+                                  <p:strVal val="visible"/>
+                                </p:to>
+                              </p:set>
+                              <p:animEffect transition="in" filter="fade">
+                                <p:cBhvr>
+                                  <p:cTn id="69" dur="400"/>
+                                  <p:tgtEl>
+                                    <p:spTgt spid="35"/>
+                                  </p:tgtEl>
+                                </p:cBhvr>
+                              </p:animEffect>
+                            </p:childTnLst>
+                          </p:cTn>
+                        </p:par>
+                      </p:childTnLst>
+                    </p:cTn>
+                  </p:par>
+                </p:childTnLst>
+              </p:cTn>
+              <p:nextCondLst>
+                <p:cond evt="onClick" delay="0">
+                  <p:tgtEl>
+                    <p:spTgt spid="32"/>
+                  </p:tgtEl>
+                </p:cond>
+              </p:nextCondLst>
+            </p:seq>
+            <p:seq concurrent="1" nextAc="seek">
+              <p:cTn id="75" restart="whenNotActive" fill="hold" nodeType="interactiveSeq">
+                <p:stCondLst>
+                  <p:cond evt="onClick" delay="0">
+                    <p:tgtEl>
+                      <p:spTgt spid="36"/>
+                    </p:tgtEl>
+                  </p:cond>
+                </p:stCondLst>
+                <p:endSync evt="end" delay="0">
+                  <p:rtn val="all"/>
+                </p:endSync>
+                <p:childTnLst>
+                  <p:par>
+                    <p:cTn id="76" fill="hold">
+                      <p:stCondLst>
+                        <p:cond delay="0"/>
+                      </p:stCondLst>
+                      <p:childTnLst>
+                        <p:par>
+                          <p:cTn id="77" presetID="10" presetClass="entr" presetSubtype="0" fill="hold" grpId="0" nodeType="clickEffect">
+                            <p:stCondLst>
+                              <p:cond delay="0"/>
+                            </p:stCondLst>
+                            <p:childTnLst>
+                              <p:set>
+                                <p:cBhvr>
+                                  <p:cTn id="78" dur="1" fill="hold">
+                                    <p:stCondLst>
+                                      <p:cond delay="0"/>
+                                    </p:stCondLst>
+                                  </p:cTn>
+                                  <p:tgtEl>
+                                    <p:spTgt spid="39"/>
+                                  </p:tgtEl>
+                                  <p:attrNameLst>
+                                    <p:attrName>style.visibility</p:attrName>
+                                  </p:attrNameLst>
+                                </p:cBhvr>
+                                <p:to>
+                                  <p:strVal val="visible"/>
+                                </p:to>
+                              </p:set>
+                              <p:animEffect transition="in" filter="fade">
+                                <p:cBhvr>
+                                  <p:cTn id="79" dur="400"/>
+                                  <p:tgtEl>
+                                    <p:spTgt spid="39"/>
+                                  </p:tgtEl>
+                                </p:cBhvr>
+                              </p:animEffect>
+                            </p:childTnLst>
+                          </p:cTn>
+                        </p:par>
+                      </p:childTnLst>
+                    </p:cTn>
+                  </p:par>
+                </p:childTnLst>
+              </p:cTn>
+              <p:nextCondLst>
+                <p:cond evt="onClick" delay="0">
+                  <p:tgtEl>
+                    <p:spTgt spid="36"/>
+                  </p:tgtEl>
+                </p:cond>
+              </p:nextCondLst>
+            </p:seq>
+          </p:childTnLst>
+        </p:cTn>
+      </p:par>
+    </p:tnLst>
+  </p:timing>
 </p:sld>
 </file>
 

--- a/03-build/pptx/C5_U0_docente.pptx
+++ b/03-build/pptx/C5_U0_docente.pptx
@@ -522,7 +522,7 @@
           <a:lstStyle/>
           <a:p>
             <a:r>
-              <a:t>TEACHER · TITLE. Open de reis (La Ruta). Stel cast + mochila voor (30-40 s). Klasritueel: laat de klas straks (§4/opener) de NAAM van de mochila kiezen. Instructietaal: Spaans-eerst met NL-steun. Timing hele les: 50 min — zie dia TEACHER_NOTES. Docentversie = vrije navigatie; leerlingversie (.ppsx) later in kioskmodus.</a:t>
+              <a:t>TEACHER · TITLE. Open de reis (La Ruta). Stel cast + mochila voor (30-40 s). Klasritueel: laat de klas straks (§4/opener) de NAAM van de mochila kiezen. Instructietaal: Spaans-eerst met NL-steun. Timing hele les: 50 min — zie dia TEACHER_NOTES. Docentversie = vrije navigatie + oplossing in notities; leerlingversie (.ppsx) = gewone diavoorstelling waarin elke klik het volgende antwoord onthult (geen kiosk).</a:t>
             </a:r>
           </a:p>
         </p:txBody>
@@ -735,6 +735,27 @@
               <a:t>TEACHER · WRITING (idee 42 schrijfopdracht · idee 36 microdictee). Leerling schrijft ECHT (antwoordruimte). 16-29 aan elkaar (één woord), 30-100 met 'y' (drie woorden). Zelfcorrectie met de solución-laag. Uitbreiding dictee: 'Tengo dieciséis años', 'Vivo en el número veintidós', 'Somos treinta y tres en clase'. Getal in cijfers ÉN letters, mét juiste tilde (koppelt §3 + §2).</a:t>
             </a:r>
           </a:p>
+          <a:p/>
+          <a:p>
+            <a:r>
+              <a:t>— SOLUCIÓN (docent · presenter view) —</a:t>
+            </a:r>
+          </a:p>
+          <a:p>
+            <a:r>
+              <a:t>18 dieciocho  ·  24 veinticuatro  ·  53 cincuenta y tres</a:t>
+            </a:r>
+          </a:p>
+          <a:p>
+            <a:r>
+              <a:t>71 setenta y uno  ·  96 noventa y seis  ·  47 cuarenta y siete</a:t>
+            </a:r>
+          </a:p>
+          <a:p>
+            <a:r>
+              <a:t>Mini-transfer: schrijf jouw huisnummer en jouw schoenmaat voluit in letters.</a:t>
+            </a:r>
+          </a:p>
         </p:txBody>
       </p:sp>
       <p:sp>
@@ -945,6 +966,17 @@
               <a:t>TEACHER · SPEAKING/interactie (idee 39 rollenkaart · idee 43 peerfeedback). De rechterkolom (→ chunk) is de oplossing: toon ze pas na de klaspoging. Klasposter 'Cartel de la clase' ophangen. Dit is compensatie-/strategie-taal (LPD lengua de clase) — laat leerlingen ze het hele jaar echt gebruiken i.p.v. NL. Encantad_ clínica del error kan hier ook: Diego zegt Encantado, Nina zegt Encantada (uitgang volgt wie spreekt).</a:t>
             </a:r>
           </a:p>
+          <a:p/>
+          <a:p>
+            <a:r>
+              <a:t>— SOLUCIÓN (docent · presenter view) —</a:t>
+            </a:r>
+          </a:p>
+          <a:p>
+            <a:r>
+              <a:t>Mini-rollenspel (geen steun): A speelt docent (praat te snel / zegt een nieuw woord); B reageert met de passende chunk. Wissel.</a:t>
+            </a:r>
+          </a:p>
         </p:txBody>
       </p:sp>
       <p:sp>
@@ -1225,6 +1257,22 @@
               <a:t>TEACHER · QUIZ (idee 17 Jeopardy-achtig · idee 18 oplopende reeks). Gemengde ophaal over de hele unit — geen aangeduide regel, leerling kiest zelf. Extra items: 'Pasaporte fonético' (Zaragoza·Málaga·Bogotá·Cáceres·Ecuador·Panamá hardop + familie benoemen) en 'Dictado mixto' (getal in cijfers+letters mét tilde). Sluit af met 'Check-in en la puerta' = generale repetitie van de Tarjeta de embarque.</a:t>
             </a:r>
           </a:p>
+          <a:p/>
+          <a:p>
+            <a:r>
+              <a:t>— SOLUCIÓN (docent · presenter view) —</a:t>
+            </a:r>
+          </a:p>
+          <a:p>
+            <a:r>
+              <a:t>1 Perú (aguda -ú)   ·   2 de h zwijgt (hola = «ola»)   ·   3 cuarenta y siete</a:t>
+            </a:r>
+          </a:p>
+          <a:p>
+            <a:r>
+              <a:t>4 Encantada (Nina is een meisje — de uitgang volgt wie spreekt)   ·   5 casa = llana · México = esdrújula</a:t>
+            </a:r>
+          </a:p>
         </p:txBody>
       </p:sp>
       <p:sp>
@@ -1715,6 +1763,22 @@
               <a:t>TEACHER · QUIZ (idee 12 meerkeuze met feedback · idee 38 uitspraakcontrast). Onthul-flow: laat de klas eerst kiezen (klik audio), DAN de solución tonen. Belangrijk: b=v en h muda maken sommige paren identiek — dat is geen valstrik-fout maar Spaans. Na kiezen: elke leerling spreekt BEIDE vormen zelf in (van receptie → productie). Trabalenguas als extra: 'Rápido corre el carro del ferrocarril'.</a:t>
             </a:r>
           </a:p>
+          <a:p/>
+          <a:p>
+            <a:r>
+              <a:t>— SOLUCIÓN (docent · presenter view) —</a:t>
+            </a:r>
+          </a:p>
+          <a:p>
+            <a:r>
+              <a:t>A · «geen fout, dat is Spaans!»  vaca=baca en hola=ola klinken IDENTIEK (b=v, h muda). gente≠tente (jota-klank), casa≠caza (s ↔ th).</a:t>
+            </a:r>
+          </a:p>
+          <a:p>
+            <a:r>
+              <a:t>B · r/rr:  één tik tussen klinkers (pero) ↔ rol bij rr, woordbegin en na n/l/s (perro, Roma, Enrique). Betekenis verandert!</a:t>
+            </a:r>
+          </a:p>
         </p:txBody>
       </p:sp>
       <p:sp>
@@ -1923,6 +1987,27 @@
           <a:p>
             <a:r>
               <a:t>TEACHER · QUIZ (idee 11 klik-om-te-onthullen · idee 14 zoek de fout). Laat elke leerling eerst zelf beslissen + de regel benoemen ('waarom?'), dan solución. Vervolg: 'Clínica de tildes' (foutenkliniek): ✗cásada→casa, ✗Mexico→México, ✗telefóno→teléfono, ✗árból→árbol. Het CORRECTE model komt altijd als laatste, nooit de fout alleen (§14). Communicatief slot: 'Sube el sombrero al mapa' met paradas (Perú, México, Bogotá, Panamá dragen ´).</a:t>
+            </a:r>
+          </a:p>
+          <a:p/>
+          <a:p>
+            <a:r>
+              <a:t>— SOLUCIÓN (docent · presenter view) —</a:t>
+            </a:r>
+          </a:p>
+          <a:p>
+            <a:r>
+              <a:t>Perú (aguda -ú) · café (aguda -é) · casa → GEEN (llana -a) · árbol (llana -l → wél) · México (esdrújula → altijd)</a:t>
+            </a:r>
+          </a:p>
+          <a:p>
+            <a:r>
+              <a:t>número (esdrújula) · lunes → GEEN (llana -s) · adiós (aguda -s → wél)</a:t>
+            </a:r>
+          </a:p>
+          <a:p>
+            <a:r>
+              <a:t>🔴 Ojo — geen hoedjes strooien! lunes en profesor krijgen er GÉÉN. De grootste A1-fout is te veel tildes zetten.</a:t>
             </a:r>
           </a:p>
         </p:txBody>
@@ -12996,7 +13081,432 @@
           <p:childTnLst>
             <p:seq concurrent="1" nextAc="seek">
               <p:cTn id="2" dur="indefinite" nodeType="mainSeq">
-                <p:childTnLst/>
+                <p:childTnLst>
+                  <p:par>
+                    <p:cTn id="3" fill="hold">
+                      <p:stCondLst>
+                        <p:cond delay="indefinite"/>
+                      </p:stCondLst>
+                      <p:childTnLst>
+                        <p:par>
+                          <p:cTn id="4" fill="hold">
+                            <p:stCondLst>
+                              <p:cond delay="0"/>
+                            </p:stCondLst>
+                            <p:childTnLst>
+                              <p:par>
+                                <p:cTn id="5" presetID="10" presetClass="entr" presetSubtype="0" fill="hold" grpId="0" nodeType="clickEffect">
+                                  <p:stCondLst>
+                                    <p:cond delay="0"/>
+                                  </p:stCondLst>
+                                  <p:childTnLst>
+                                    <p:set>
+                                      <p:cBhvr>
+                                        <p:cTn id="6" dur="1" fill="hold">
+                                          <p:stCondLst>
+                                            <p:cond delay="0"/>
+                                          </p:stCondLst>
+                                        </p:cTn>
+                                        <p:tgtEl>
+                                          <p:spTgt spid="12"/>
+                                        </p:tgtEl>
+                                        <p:attrNameLst>
+                                          <p:attrName>style.visibility</p:attrName>
+                                        </p:attrNameLst>
+                                      </p:cBhvr>
+                                      <p:to>
+                                        <p:strVal val="visible"/>
+                                      </p:to>
+                                    </p:set>
+                                    <p:animEffect transition="in" filter="fade">
+                                      <p:cBhvr>
+                                        <p:cTn id="7" dur="500"/>
+                                        <p:tgtEl>
+                                          <p:spTgt spid="12"/>
+                                        </p:tgtEl>
+                                      </p:cBhvr>
+                                    </p:animEffect>
+                                  </p:childTnLst>
+                                </p:cTn>
+                              </p:par>
+                            </p:childTnLst>
+                          </p:cTn>
+                        </p:par>
+                      </p:childTnLst>
+                    </p:cTn>
+                  </p:par>
+                  <p:par>
+                    <p:cTn id="8" fill="hold">
+                      <p:stCondLst>
+                        <p:cond delay="indefinite"/>
+                      </p:stCondLst>
+                      <p:childTnLst>
+                        <p:par>
+                          <p:cTn id="9" fill="hold">
+                            <p:stCondLst>
+                              <p:cond delay="0"/>
+                            </p:stCondLst>
+                            <p:childTnLst>
+                              <p:par>
+                                <p:cTn id="10" presetID="10" presetClass="entr" presetSubtype="0" fill="hold" grpId="0" nodeType="clickEffect">
+                                  <p:stCondLst>
+                                    <p:cond delay="0"/>
+                                  </p:stCondLst>
+                                  <p:childTnLst>
+                                    <p:set>
+                                      <p:cBhvr>
+                                        <p:cTn id="11" dur="1" fill="hold">
+                                          <p:stCondLst>
+                                            <p:cond delay="0"/>
+                                          </p:stCondLst>
+                                        </p:cTn>
+                                        <p:tgtEl>
+                                          <p:spTgt spid="17"/>
+                                        </p:tgtEl>
+                                        <p:attrNameLst>
+                                          <p:attrName>style.visibility</p:attrName>
+                                        </p:attrNameLst>
+                                      </p:cBhvr>
+                                      <p:to>
+                                        <p:strVal val="visible"/>
+                                      </p:to>
+                                    </p:set>
+                                    <p:animEffect transition="in" filter="fade">
+                                      <p:cBhvr>
+                                        <p:cTn id="12" dur="500"/>
+                                        <p:tgtEl>
+                                          <p:spTgt spid="17"/>
+                                        </p:tgtEl>
+                                      </p:cBhvr>
+                                    </p:animEffect>
+                                  </p:childTnLst>
+                                </p:cTn>
+                              </p:par>
+                            </p:childTnLst>
+                          </p:cTn>
+                        </p:par>
+                      </p:childTnLst>
+                    </p:cTn>
+                  </p:par>
+                  <p:par>
+                    <p:cTn id="13" fill="hold">
+                      <p:stCondLst>
+                        <p:cond delay="indefinite"/>
+                      </p:stCondLst>
+                      <p:childTnLst>
+                        <p:par>
+                          <p:cTn id="14" fill="hold">
+                            <p:stCondLst>
+                              <p:cond delay="0"/>
+                            </p:stCondLst>
+                            <p:childTnLst>
+                              <p:par>
+                                <p:cTn id="15" presetID="10" presetClass="entr" presetSubtype="0" fill="hold" grpId="0" nodeType="clickEffect">
+                                  <p:stCondLst>
+                                    <p:cond delay="0"/>
+                                  </p:stCondLst>
+                                  <p:childTnLst>
+                                    <p:set>
+                                      <p:cBhvr>
+                                        <p:cTn id="16" dur="1" fill="hold">
+                                          <p:stCondLst>
+                                            <p:cond delay="0"/>
+                                          </p:stCondLst>
+                                        </p:cTn>
+                                        <p:tgtEl>
+                                          <p:spTgt spid="22"/>
+                                        </p:tgtEl>
+                                        <p:attrNameLst>
+                                          <p:attrName>style.visibility</p:attrName>
+                                        </p:attrNameLst>
+                                      </p:cBhvr>
+                                      <p:to>
+                                        <p:strVal val="visible"/>
+                                      </p:to>
+                                    </p:set>
+                                    <p:animEffect transition="in" filter="fade">
+                                      <p:cBhvr>
+                                        <p:cTn id="17" dur="500"/>
+                                        <p:tgtEl>
+                                          <p:spTgt spid="22"/>
+                                        </p:tgtEl>
+                                      </p:cBhvr>
+                                    </p:animEffect>
+                                  </p:childTnLst>
+                                </p:cTn>
+                              </p:par>
+                            </p:childTnLst>
+                          </p:cTn>
+                        </p:par>
+                      </p:childTnLst>
+                    </p:cTn>
+                  </p:par>
+                  <p:par>
+                    <p:cTn id="18" fill="hold">
+                      <p:stCondLst>
+                        <p:cond delay="indefinite"/>
+                      </p:stCondLst>
+                      <p:childTnLst>
+                        <p:par>
+                          <p:cTn id="19" fill="hold">
+                            <p:stCondLst>
+                              <p:cond delay="0"/>
+                            </p:stCondLst>
+                            <p:childTnLst>
+                              <p:par>
+                                <p:cTn id="20" presetID="10" presetClass="entr" presetSubtype="0" fill="hold" grpId="0" nodeType="clickEffect">
+                                  <p:stCondLst>
+                                    <p:cond delay="0"/>
+                                  </p:stCondLst>
+                                  <p:childTnLst>
+                                    <p:set>
+                                      <p:cBhvr>
+                                        <p:cTn id="21" dur="1" fill="hold">
+                                          <p:stCondLst>
+                                            <p:cond delay="0"/>
+                                          </p:stCondLst>
+                                        </p:cTn>
+                                        <p:tgtEl>
+                                          <p:spTgt spid="27"/>
+                                        </p:tgtEl>
+                                        <p:attrNameLst>
+                                          <p:attrName>style.visibility</p:attrName>
+                                        </p:attrNameLst>
+                                      </p:cBhvr>
+                                      <p:to>
+                                        <p:strVal val="visible"/>
+                                      </p:to>
+                                    </p:set>
+                                    <p:animEffect transition="in" filter="fade">
+                                      <p:cBhvr>
+                                        <p:cTn id="22" dur="500"/>
+                                        <p:tgtEl>
+                                          <p:spTgt spid="27"/>
+                                        </p:tgtEl>
+                                      </p:cBhvr>
+                                    </p:animEffect>
+                                  </p:childTnLst>
+                                </p:cTn>
+                              </p:par>
+                            </p:childTnLst>
+                          </p:cTn>
+                        </p:par>
+                      </p:childTnLst>
+                    </p:cTn>
+                  </p:par>
+                  <p:par>
+                    <p:cTn id="23" fill="hold">
+                      <p:stCondLst>
+                        <p:cond delay="indefinite"/>
+                      </p:stCondLst>
+                      <p:childTnLst>
+                        <p:par>
+                          <p:cTn id="24" fill="hold">
+                            <p:stCondLst>
+                              <p:cond delay="0"/>
+                            </p:stCondLst>
+                            <p:childTnLst>
+                              <p:par>
+                                <p:cTn id="25" presetID="10" presetClass="entr" presetSubtype="0" fill="hold" grpId="0" nodeType="clickEffect">
+                                  <p:stCondLst>
+                                    <p:cond delay="0"/>
+                                  </p:stCondLst>
+                                  <p:childTnLst>
+                                    <p:set>
+                                      <p:cBhvr>
+                                        <p:cTn id="26" dur="1" fill="hold">
+                                          <p:stCondLst>
+                                            <p:cond delay="0"/>
+                                          </p:stCondLst>
+                                        </p:cTn>
+                                        <p:tgtEl>
+                                          <p:spTgt spid="32"/>
+                                        </p:tgtEl>
+                                        <p:attrNameLst>
+                                          <p:attrName>style.visibility</p:attrName>
+                                        </p:attrNameLst>
+                                      </p:cBhvr>
+                                      <p:to>
+                                        <p:strVal val="visible"/>
+                                      </p:to>
+                                    </p:set>
+                                    <p:animEffect transition="in" filter="fade">
+                                      <p:cBhvr>
+                                        <p:cTn id="27" dur="500"/>
+                                        <p:tgtEl>
+                                          <p:spTgt spid="32"/>
+                                        </p:tgtEl>
+                                      </p:cBhvr>
+                                    </p:animEffect>
+                                  </p:childTnLst>
+                                </p:cTn>
+                              </p:par>
+                            </p:childTnLst>
+                          </p:cTn>
+                        </p:par>
+                      </p:childTnLst>
+                    </p:cTn>
+                  </p:par>
+                  <p:par>
+                    <p:cTn id="28" fill="hold">
+                      <p:stCondLst>
+                        <p:cond delay="indefinite"/>
+                      </p:stCondLst>
+                      <p:childTnLst>
+                        <p:par>
+                          <p:cTn id="29" fill="hold">
+                            <p:stCondLst>
+                              <p:cond delay="0"/>
+                            </p:stCondLst>
+                            <p:childTnLst>
+                              <p:par>
+                                <p:cTn id="30" presetID="10" presetClass="entr" presetSubtype="0" fill="hold" grpId="0" nodeType="clickEffect">
+                                  <p:stCondLst>
+                                    <p:cond delay="0"/>
+                                  </p:stCondLst>
+                                  <p:childTnLst>
+                                    <p:set>
+                                      <p:cBhvr>
+                                        <p:cTn id="31" dur="1" fill="hold">
+                                          <p:stCondLst>
+                                            <p:cond delay="0"/>
+                                          </p:stCondLst>
+                                        </p:cTn>
+                                        <p:tgtEl>
+                                          <p:spTgt spid="37"/>
+                                        </p:tgtEl>
+                                        <p:attrNameLst>
+                                          <p:attrName>style.visibility</p:attrName>
+                                        </p:attrNameLst>
+                                      </p:cBhvr>
+                                      <p:to>
+                                        <p:strVal val="visible"/>
+                                      </p:to>
+                                    </p:set>
+                                    <p:animEffect transition="in" filter="fade">
+                                      <p:cBhvr>
+                                        <p:cTn id="32" dur="500"/>
+                                        <p:tgtEl>
+                                          <p:spTgt spid="37"/>
+                                        </p:tgtEl>
+                                      </p:cBhvr>
+                                    </p:animEffect>
+                                  </p:childTnLst>
+                                </p:cTn>
+                              </p:par>
+                            </p:childTnLst>
+                          </p:cTn>
+                        </p:par>
+                      </p:childTnLst>
+                    </p:cTn>
+                  </p:par>
+                  <p:par>
+                    <p:cTn id="33" fill="hold">
+                      <p:stCondLst>
+                        <p:cond delay="indefinite"/>
+                      </p:stCondLst>
+                      <p:childTnLst>
+                        <p:par>
+                          <p:cTn id="34" fill="hold">
+                            <p:stCondLst>
+                              <p:cond delay="0"/>
+                            </p:stCondLst>
+                            <p:childTnLst>
+                              <p:par>
+                                <p:cTn id="35" presetID="10" presetClass="entr" presetSubtype="0" fill="hold" grpId="0" nodeType="clickEffect">
+                                  <p:stCondLst>
+                                    <p:cond delay="0"/>
+                                  </p:stCondLst>
+                                  <p:childTnLst>
+                                    <p:set>
+                                      <p:cBhvr>
+                                        <p:cTn id="36" dur="1" fill="hold">
+                                          <p:stCondLst>
+                                            <p:cond delay="0"/>
+                                          </p:stCondLst>
+                                        </p:cTn>
+                                        <p:tgtEl>
+                                          <p:spTgt spid="42"/>
+                                        </p:tgtEl>
+                                        <p:attrNameLst>
+                                          <p:attrName>style.visibility</p:attrName>
+                                        </p:attrNameLst>
+                                      </p:cBhvr>
+                                      <p:to>
+                                        <p:strVal val="visible"/>
+                                      </p:to>
+                                    </p:set>
+                                    <p:animEffect transition="in" filter="fade">
+                                      <p:cBhvr>
+                                        <p:cTn id="37" dur="500"/>
+                                        <p:tgtEl>
+                                          <p:spTgt spid="42"/>
+                                        </p:tgtEl>
+                                      </p:cBhvr>
+                                    </p:animEffect>
+                                  </p:childTnLst>
+                                </p:cTn>
+                              </p:par>
+                            </p:childTnLst>
+                          </p:cTn>
+                        </p:par>
+                      </p:childTnLst>
+                    </p:cTn>
+                  </p:par>
+                  <p:par>
+                    <p:cTn id="38" fill="hold">
+                      <p:stCondLst>
+                        <p:cond delay="indefinite"/>
+                      </p:stCondLst>
+                      <p:childTnLst>
+                        <p:par>
+                          <p:cTn id="39" fill="hold">
+                            <p:stCondLst>
+                              <p:cond delay="0"/>
+                            </p:stCondLst>
+                            <p:childTnLst>
+                              <p:par>
+                                <p:cTn id="40" presetID="10" presetClass="entr" presetSubtype="0" fill="hold" grpId="0" nodeType="clickEffect">
+                                  <p:stCondLst>
+                                    <p:cond delay="0"/>
+                                  </p:stCondLst>
+                                  <p:childTnLst>
+                                    <p:set>
+                                      <p:cBhvr>
+                                        <p:cTn id="41" dur="1" fill="hold">
+                                          <p:stCondLst>
+                                            <p:cond delay="0"/>
+                                          </p:stCondLst>
+                                        </p:cTn>
+                                        <p:tgtEl>
+                                          <p:spTgt spid="43"/>
+                                        </p:tgtEl>
+                                        <p:attrNameLst>
+                                          <p:attrName>style.visibility</p:attrName>
+                                        </p:attrNameLst>
+                                      </p:cBhvr>
+                                      <p:to>
+                                        <p:strVal val="visible"/>
+                                      </p:to>
+                                    </p:set>
+                                    <p:animEffect transition="in" filter="fade">
+                                      <p:cBhvr>
+                                        <p:cTn id="42" dur="500"/>
+                                        <p:tgtEl>
+                                          <p:spTgt spid="43"/>
+                                        </p:tgtEl>
+                                      </p:cBhvr>
+                                    </p:animEffect>
+                                  </p:childTnLst>
+                                </p:cTn>
+                              </p:par>
+                            </p:childTnLst>
+                          </p:cTn>
+                        </p:par>
+                      </p:childTnLst>
+                    </p:cTn>
+                  </p:par>
+                </p:childTnLst>
               </p:cTn>
               <p:prevCondLst>
                 <p:cond evt="onPrev" delay="0">
@@ -13009,408 +13519,6 @@
                 <p:cond evt="onNext" delay="0">
                   <p:tgtEl>
                     <p:sldTgt/>
-                  </p:tgtEl>
-                </p:cond>
-              </p:nextCondLst>
-            </p:seq>
-            <p:seq concurrent="1" nextAc="seek">
-              <p:cTn id="5" restart="whenNotActive" fill="hold" nodeType="interactiveSeq">
-                <p:stCondLst>
-                  <p:cond evt="onClick" delay="0">
-                    <p:tgtEl>
-                      <p:spTgt spid="8"/>
-                    </p:tgtEl>
-                  </p:cond>
-                </p:stCondLst>
-                <p:endSync evt="end" delay="0">
-                  <p:rtn val="all"/>
-                </p:endSync>
-                <p:childTnLst>
-                  <p:par>
-                    <p:cTn id="6" fill="hold">
-                      <p:stCondLst>
-                        <p:cond delay="0"/>
-                      </p:stCondLst>
-                      <p:childTnLst>
-                        <p:par>
-                          <p:cTn id="7" presetID="10" presetClass="entr" presetSubtype="0" fill="hold" grpId="0" nodeType="clickEffect">
-                            <p:stCondLst>
-                              <p:cond delay="0"/>
-                            </p:stCondLst>
-                            <p:childTnLst>
-                              <p:set>
-                                <p:cBhvr>
-                                  <p:cTn id="8" dur="1" fill="hold">
-                                    <p:stCondLst>
-                                      <p:cond delay="0"/>
-                                    </p:stCondLst>
-                                  </p:cTn>
-                                  <p:tgtEl>
-                                    <p:spTgt spid="12"/>
-                                  </p:tgtEl>
-                                  <p:attrNameLst>
-                                    <p:attrName>style.visibility</p:attrName>
-                                  </p:attrNameLst>
-                                </p:cBhvr>
-                                <p:to>
-                                  <p:strVal val="visible"/>
-                                </p:to>
-                              </p:set>
-                              <p:animEffect transition="in" filter="fade">
-                                <p:cBhvr>
-                                  <p:cTn id="9" dur="400"/>
-                                  <p:tgtEl>
-                                    <p:spTgt spid="12"/>
-                                  </p:tgtEl>
-                                </p:cBhvr>
-                              </p:animEffect>
-                            </p:childTnLst>
-                          </p:cTn>
-                        </p:par>
-                      </p:childTnLst>
-                    </p:cTn>
-                  </p:par>
-                </p:childTnLst>
-              </p:cTn>
-              <p:nextCondLst>
-                <p:cond evt="onClick" delay="0">
-                  <p:tgtEl>
-                    <p:spTgt spid="8"/>
-                  </p:tgtEl>
-                </p:cond>
-              </p:nextCondLst>
-            </p:seq>
-            <p:seq concurrent="1" nextAc="seek">
-              <p:cTn id="15" restart="whenNotActive" fill="hold" nodeType="interactiveSeq">
-                <p:stCondLst>
-                  <p:cond evt="onClick" delay="0">
-                    <p:tgtEl>
-                      <p:spTgt spid="13"/>
-                    </p:tgtEl>
-                  </p:cond>
-                </p:stCondLst>
-                <p:endSync evt="end" delay="0">
-                  <p:rtn val="all"/>
-                </p:endSync>
-                <p:childTnLst>
-                  <p:par>
-                    <p:cTn id="16" fill="hold">
-                      <p:stCondLst>
-                        <p:cond delay="0"/>
-                      </p:stCondLst>
-                      <p:childTnLst>
-                        <p:par>
-                          <p:cTn id="17" presetID="10" presetClass="entr" presetSubtype="0" fill="hold" grpId="0" nodeType="clickEffect">
-                            <p:stCondLst>
-                              <p:cond delay="0"/>
-                            </p:stCondLst>
-                            <p:childTnLst>
-                              <p:set>
-                                <p:cBhvr>
-                                  <p:cTn id="18" dur="1" fill="hold">
-                                    <p:stCondLst>
-                                      <p:cond delay="0"/>
-                                    </p:stCondLst>
-                                  </p:cTn>
-                                  <p:tgtEl>
-                                    <p:spTgt spid="17"/>
-                                  </p:tgtEl>
-                                  <p:attrNameLst>
-                                    <p:attrName>style.visibility</p:attrName>
-                                  </p:attrNameLst>
-                                </p:cBhvr>
-                                <p:to>
-                                  <p:strVal val="visible"/>
-                                </p:to>
-                              </p:set>
-                              <p:animEffect transition="in" filter="fade">
-                                <p:cBhvr>
-                                  <p:cTn id="19" dur="400"/>
-                                  <p:tgtEl>
-                                    <p:spTgt spid="17"/>
-                                  </p:tgtEl>
-                                </p:cBhvr>
-                              </p:animEffect>
-                            </p:childTnLst>
-                          </p:cTn>
-                        </p:par>
-                      </p:childTnLst>
-                    </p:cTn>
-                  </p:par>
-                </p:childTnLst>
-              </p:cTn>
-              <p:nextCondLst>
-                <p:cond evt="onClick" delay="0">
-                  <p:tgtEl>
-                    <p:spTgt spid="13"/>
-                  </p:tgtEl>
-                </p:cond>
-              </p:nextCondLst>
-            </p:seq>
-            <p:seq concurrent="1" nextAc="seek">
-              <p:cTn id="25" restart="whenNotActive" fill="hold" nodeType="interactiveSeq">
-                <p:stCondLst>
-                  <p:cond evt="onClick" delay="0">
-                    <p:tgtEl>
-                      <p:spTgt spid="18"/>
-                    </p:tgtEl>
-                  </p:cond>
-                </p:stCondLst>
-                <p:endSync evt="end" delay="0">
-                  <p:rtn val="all"/>
-                </p:endSync>
-                <p:childTnLst>
-                  <p:par>
-                    <p:cTn id="26" fill="hold">
-                      <p:stCondLst>
-                        <p:cond delay="0"/>
-                      </p:stCondLst>
-                      <p:childTnLst>
-                        <p:par>
-                          <p:cTn id="27" presetID="10" presetClass="entr" presetSubtype="0" fill="hold" grpId="0" nodeType="clickEffect">
-                            <p:stCondLst>
-                              <p:cond delay="0"/>
-                            </p:stCondLst>
-                            <p:childTnLst>
-                              <p:set>
-                                <p:cBhvr>
-                                  <p:cTn id="28" dur="1" fill="hold">
-                                    <p:stCondLst>
-                                      <p:cond delay="0"/>
-                                    </p:stCondLst>
-                                  </p:cTn>
-                                  <p:tgtEl>
-                                    <p:spTgt spid="22"/>
-                                  </p:tgtEl>
-                                  <p:attrNameLst>
-                                    <p:attrName>style.visibility</p:attrName>
-                                  </p:attrNameLst>
-                                </p:cBhvr>
-                                <p:to>
-                                  <p:strVal val="visible"/>
-                                </p:to>
-                              </p:set>
-                              <p:animEffect transition="in" filter="fade">
-                                <p:cBhvr>
-                                  <p:cTn id="29" dur="400"/>
-                                  <p:tgtEl>
-                                    <p:spTgt spid="22"/>
-                                  </p:tgtEl>
-                                </p:cBhvr>
-                              </p:animEffect>
-                            </p:childTnLst>
-                          </p:cTn>
-                        </p:par>
-                      </p:childTnLst>
-                    </p:cTn>
-                  </p:par>
-                </p:childTnLst>
-              </p:cTn>
-              <p:nextCondLst>
-                <p:cond evt="onClick" delay="0">
-                  <p:tgtEl>
-                    <p:spTgt spid="18"/>
-                  </p:tgtEl>
-                </p:cond>
-              </p:nextCondLst>
-            </p:seq>
-            <p:seq concurrent="1" nextAc="seek">
-              <p:cTn id="35" restart="whenNotActive" fill="hold" nodeType="interactiveSeq">
-                <p:stCondLst>
-                  <p:cond evt="onClick" delay="0">
-                    <p:tgtEl>
-                      <p:spTgt spid="23"/>
-                    </p:tgtEl>
-                  </p:cond>
-                </p:stCondLst>
-                <p:endSync evt="end" delay="0">
-                  <p:rtn val="all"/>
-                </p:endSync>
-                <p:childTnLst>
-                  <p:par>
-                    <p:cTn id="36" fill="hold">
-                      <p:stCondLst>
-                        <p:cond delay="0"/>
-                      </p:stCondLst>
-                      <p:childTnLst>
-                        <p:par>
-                          <p:cTn id="37" presetID="10" presetClass="entr" presetSubtype="0" fill="hold" grpId="0" nodeType="clickEffect">
-                            <p:stCondLst>
-                              <p:cond delay="0"/>
-                            </p:stCondLst>
-                            <p:childTnLst>
-                              <p:set>
-                                <p:cBhvr>
-                                  <p:cTn id="38" dur="1" fill="hold">
-                                    <p:stCondLst>
-                                      <p:cond delay="0"/>
-                                    </p:stCondLst>
-                                  </p:cTn>
-                                  <p:tgtEl>
-                                    <p:spTgt spid="27"/>
-                                  </p:tgtEl>
-                                  <p:attrNameLst>
-                                    <p:attrName>style.visibility</p:attrName>
-                                  </p:attrNameLst>
-                                </p:cBhvr>
-                                <p:to>
-                                  <p:strVal val="visible"/>
-                                </p:to>
-                              </p:set>
-                              <p:animEffect transition="in" filter="fade">
-                                <p:cBhvr>
-                                  <p:cTn id="39" dur="400"/>
-                                  <p:tgtEl>
-                                    <p:spTgt spid="27"/>
-                                  </p:tgtEl>
-                                </p:cBhvr>
-                              </p:animEffect>
-                            </p:childTnLst>
-                          </p:cTn>
-                        </p:par>
-                      </p:childTnLst>
-                    </p:cTn>
-                  </p:par>
-                </p:childTnLst>
-              </p:cTn>
-              <p:nextCondLst>
-                <p:cond evt="onClick" delay="0">
-                  <p:tgtEl>
-                    <p:spTgt spid="23"/>
-                  </p:tgtEl>
-                </p:cond>
-              </p:nextCondLst>
-            </p:seq>
-            <p:seq concurrent="1" nextAc="seek">
-              <p:cTn id="45" restart="whenNotActive" fill="hold" nodeType="interactiveSeq">
-                <p:stCondLst>
-                  <p:cond evt="onClick" delay="0">
-                    <p:tgtEl>
-                      <p:spTgt spid="28"/>
-                    </p:tgtEl>
-                  </p:cond>
-                </p:stCondLst>
-                <p:endSync evt="end" delay="0">
-                  <p:rtn val="all"/>
-                </p:endSync>
-                <p:childTnLst>
-                  <p:par>
-                    <p:cTn id="46" fill="hold">
-                      <p:stCondLst>
-                        <p:cond delay="0"/>
-                      </p:stCondLst>
-                      <p:childTnLst>
-                        <p:par>
-                          <p:cTn id="47" presetID="10" presetClass="entr" presetSubtype="0" fill="hold" grpId="0" nodeType="clickEffect">
-                            <p:stCondLst>
-                              <p:cond delay="0"/>
-                            </p:stCondLst>
-                            <p:childTnLst>
-                              <p:set>
-                                <p:cBhvr>
-                                  <p:cTn id="48" dur="1" fill="hold">
-                                    <p:stCondLst>
-                                      <p:cond delay="0"/>
-                                    </p:stCondLst>
-                                  </p:cTn>
-                                  <p:tgtEl>
-                                    <p:spTgt spid="32"/>
-                                  </p:tgtEl>
-                                  <p:attrNameLst>
-                                    <p:attrName>style.visibility</p:attrName>
-                                  </p:attrNameLst>
-                                </p:cBhvr>
-                                <p:to>
-                                  <p:strVal val="visible"/>
-                                </p:to>
-                              </p:set>
-                              <p:animEffect transition="in" filter="fade">
-                                <p:cBhvr>
-                                  <p:cTn id="49" dur="400"/>
-                                  <p:tgtEl>
-                                    <p:spTgt spid="32"/>
-                                  </p:tgtEl>
-                                </p:cBhvr>
-                              </p:animEffect>
-                            </p:childTnLst>
-                          </p:cTn>
-                        </p:par>
-                      </p:childTnLst>
-                    </p:cTn>
-                  </p:par>
-                </p:childTnLst>
-              </p:cTn>
-              <p:nextCondLst>
-                <p:cond evt="onClick" delay="0">
-                  <p:tgtEl>
-                    <p:spTgt spid="28"/>
-                  </p:tgtEl>
-                </p:cond>
-              </p:nextCondLst>
-            </p:seq>
-            <p:seq concurrent="1" nextAc="seek">
-              <p:cTn id="55" restart="whenNotActive" fill="hold" nodeType="interactiveSeq">
-                <p:stCondLst>
-                  <p:cond evt="onClick" delay="0">
-                    <p:tgtEl>
-                      <p:spTgt spid="33"/>
-                    </p:tgtEl>
-                  </p:cond>
-                </p:stCondLst>
-                <p:endSync evt="end" delay="0">
-                  <p:rtn val="all"/>
-                </p:endSync>
-                <p:childTnLst>
-                  <p:par>
-                    <p:cTn id="56" fill="hold">
-                      <p:stCondLst>
-                        <p:cond delay="0"/>
-                      </p:stCondLst>
-                      <p:childTnLst>
-                        <p:par>
-                          <p:cTn id="57" presetID="10" presetClass="entr" presetSubtype="0" fill="hold" grpId="0" nodeType="clickEffect">
-                            <p:stCondLst>
-                              <p:cond delay="0"/>
-                            </p:stCondLst>
-                            <p:childTnLst>
-                              <p:set>
-                                <p:cBhvr>
-                                  <p:cTn id="58" dur="1" fill="hold">
-                                    <p:stCondLst>
-                                      <p:cond delay="0"/>
-                                    </p:stCondLst>
-                                  </p:cTn>
-                                  <p:tgtEl>
-                                    <p:spTgt spid="37"/>
-                                  </p:tgtEl>
-                                  <p:attrNameLst>
-                                    <p:attrName>style.visibility</p:attrName>
-                                  </p:attrNameLst>
-                                </p:cBhvr>
-                                <p:to>
-                                  <p:strVal val="visible"/>
-                                </p:to>
-                              </p:set>
-                              <p:animEffect transition="in" filter="fade">
-                                <p:cBhvr>
-                                  <p:cTn id="59" dur="400"/>
-                                  <p:tgtEl>
-                                    <p:spTgt spid="37"/>
-                                  </p:tgtEl>
-                                </p:cBhvr>
-                              </p:animEffect>
-                            </p:childTnLst>
-                          </p:cTn>
-                        </p:par>
-                      </p:childTnLst>
-                    </p:cTn>
-                  </p:par>
-                </p:childTnLst>
-              </p:cTn>
-              <p:nextCondLst>
-                <p:cond evt="onClick" delay="0">
-                  <p:tgtEl>
-                    <p:spTgt spid="33"/>
                   </p:tgtEl>
                 </p:cond>
               </p:nextCondLst>
@@ -17409,70 +17517,6 @@
         </p:nvSpPr>
         <p:spPr>
           <a:xfrm>
-            <a:off x="11292840" y="1801368"/>
-            <a:ext cx="329184" cy="310896"/>
-          </a:xfrm>
-          <a:prstGeom prst="roundRect">
-            <a:avLst>
-              <a:gd name="adj" fmla="val 50000"/>
-            </a:avLst>
-          </a:prstGeom>
-          <a:solidFill>
-            <a:srgbClr val="1E9E74"/>
-          </a:solidFill>
-          <a:ln w="12700">
-            <a:solidFill>
-              <a:srgbClr val="157355"/>
-            </a:solidFill>
-          </a:ln>
-          <a:effectLst/>
-          <a:effectLst>
-            <a:outerShdw blurRad="90000" dist="38000" dir="5400000" rotWithShape="0">
-              <a:srgbClr val="20242E">
-                <a:alpha val="22000"/>
-              </a:srgbClr>
-            </a:outerShdw>
-          </a:effectLst>
-        </p:spPr>
-        <p:style>
-          <a:lnRef idx="1">
-            <a:schemeClr val="accent1"/>
-          </a:lnRef>
-          <a:fillRef idx="3">
-            <a:schemeClr val="accent1"/>
-          </a:fillRef>
-          <a:effectRef idx="2">
-            <a:schemeClr val="accent1"/>
-          </a:effectRef>
-          <a:fontRef idx="minor">
-            <a:schemeClr val="lt1"/>
-          </a:fontRef>
-        </p:style>
-        <p:txBody>
-          <a:bodyPr rtlCol="0" anchor="ctr" wrap="none" lIns="88900" rIns="88900" tIns="12700" bIns="12700"/>
-          <a:lstStyle/>
-          <a:p>
-            <a:pPr algn="ctr"/>
-            <a:r>
-              <a:rPr sz="1100" b="1">
-                <a:solidFill>
-                  <a:srgbClr val="FFFFFF"/>
-                </a:solidFill>
-                <a:latin typeface="Inter"/>
-              </a:rPr>
-              <a:t>✓</a:t>
-            </a:r>
-          </a:p>
-        </p:txBody>
-      </p:sp>
-      <p:sp>
-        <p:nvSpPr>
-          <p:cNvPr id="16" name="Rounded Rectangle 15"/>
-          <p:cNvSpPr/>
-          <p:nvPr/>
-        </p:nvSpPr>
-        <p:spPr>
-          <a:xfrm>
             <a:off x="457200" y="2651760"/>
             <a:ext cx="5577840" cy="777240"/>
           </a:xfrm>
@@ -17522,7 +17566,7 @@
       </p:sp>
       <p:sp>
         <p:nvSpPr>
-          <p:cNvPr id="17" name="Rounded Rectangle 16"/>
+          <p:cNvPr id="16" name="Rounded Rectangle 15"/>
           <p:cNvSpPr/>
           <p:nvPr/>
         </p:nvSpPr>
@@ -17568,7 +17612,7 @@
       </p:sp>
       <p:sp>
         <p:nvSpPr>
-          <p:cNvPr id="18" name="TextBox 17"/>
+          <p:cNvPr id="17" name="TextBox 16"/>
           <p:cNvSpPr txBox="1"/>
           <p:nvPr/>
         </p:nvSpPr>
@@ -17613,7 +17657,7 @@
       </p:sp>
       <p:sp>
         <p:nvSpPr>
-          <p:cNvPr id="19" name="TextBox 18"/>
+          <p:cNvPr id="18" name="TextBox 17"/>
           <p:cNvSpPr txBox="1"/>
           <p:nvPr/>
         </p:nvSpPr>
@@ -17658,7 +17702,7 @@
       </p:sp>
       <p:sp>
         <p:nvSpPr>
-          <p:cNvPr id="20" name="Rectangle 19"/>
+          <p:cNvPr id="19" name="Rectangle 18"/>
           <p:cNvSpPr/>
           <p:nvPr/>
         </p:nvSpPr>
@@ -17702,7 +17746,7 @@
       </p:sp>
       <p:sp>
         <p:nvSpPr>
-          <p:cNvPr id="21" name="TextBox 20"/>
+          <p:cNvPr id="20" name="TextBox 19"/>
           <p:cNvSpPr txBox="1"/>
           <p:nvPr/>
         </p:nvSpPr>
@@ -17747,71 +17791,7 @@
       </p:sp>
       <p:sp>
         <p:nvSpPr>
-          <p:cNvPr id="22" name="Rounded Rectangle 21"/>
-          <p:cNvSpPr/>
-          <p:nvPr/>
-        </p:nvSpPr>
-        <p:spPr>
-          <a:xfrm>
-            <a:off x="11292840" y="2670048"/>
-            <a:ext cx="329184" cy="310896"/>
-          </a:xfrm>
-          <a:prstGeom prst="roundRect">
-            <a:avLst>
-              <a:gd name="adj" fmla="val 50000"/>
-            </a:avLst>
-          </a:prstGeom>
-          <a:solidFill>
-            <a:srgbClr val="1E9E74"/>
-          </a:solidFill>
-          <a:ln w="12700">
-            <a:solidFill>
-              <a:srgbClr val="157355"/>
-            </a:solidFill>
-          </a:ln>
-          <a:effectLst/>
-          <a:effectLst>
-            <a:outerShdw blurRad="90000" dist="38000" dir="5400000" rotWithShape="0">
-              <a:srgbClr val="20242E">
-                <a:alpha val="22000"/>
-              </a:srgbClr>
-            </a:outerShdw>
-          </a:effectLst>
-        </p:spPr>
-        <p:style>
-          <a:lnRef idx="1">
-            <a:schemeClr val="accent1"/>
-          </a:lnRef>
-          <a:fillRef idx="3">
-            <a:schemeClr val="accent1"/>
-          </a:fillRef>
-          <a:effectRef idx="2">
-            <a:schemeClr val="accent1"/>
-          </a:effectRef>
-          <a:fontRef idx="minor">
-            <a:schemeClr val="lt1"/>
-          </a:fontRef>
-        </p:style>
-        <p:txBody>
-          <a:bodyPr rtlCol="0" anchor="ctr" wrap="none" lIns="88900" rIns="88900" tIns="12700" bIns="12700"/>
-          <a:lstStyle/>
-          <a:p>
-            <a:pPr algn="ctr"/>
-            <a:r>
-              <a:rPr sz="1100" b="1">
-                <a:solidFill>
-                  <a:srgbClr val="FFFFFF"/>
-                </a:solidFill>
-                <a:latin typeface="Inter"/>
-              </a:rPr>
-              <a:t>✓</a:t>
-            </a:r>
-          </a:p>
-        </p:txBody>
-      </p:sp>
-      <p:sp>
-        <p:nvSpPr>
-          <p:cNvPr id="23" name="Rounded Rectangle 22"/>
+          <p:cNvPr id="21" name="Rounded Rectangle 20"/>
           <p:cNvSpPr/>
           <p:nvPr/>
         </p:nvSpPr>
@@ -17866,7 +17846,7 @@
       </p:sp>
       <p:sp>
         <p:nvSpPr>
-          <p:cNvPr id="24" name="Rounded Rectangle 23"/>
+          <p:cNvPr id="22" name="Rounded Rectangle 21"/>
           <p:cNvSpPr/>
           <p:nvPr/>
         </p:nvSpPr>
@@ -17912,7 +17892,7 @@
       </p:sp>
       <p:sp>
         <p:nvSpPr>
-          <p:cNvPr id="25" name="TextBox 24"/>
+          <p:cNvPr id="23" name="TextBox 22"/>
           <p:cNvSpPr txBox="1"/>
           <p:nvPr/>
         </p:nvSpPr>
@@ -17957,7 +17937,7 @@
       </p:sp>
       <p:sp>
         <p:nvSpPr>
-          <p:cNvPr id="26" name="TextBox 25"/>
+          <p:cNvPr id="24" name="TextBox 23"/>
           <p:cNvSpPr txBox="1"/>
           <p:nvPr/>
         </p:nvSpPr>
@@ -18002,7 +17982,7 @@
       </p:sp>
       <p:sp>
         <p:nvSpPr>
-          <p:cNvPr id="27" name="Rectangle 26"/>
+          <p:cNvPr id="25" name="Rectangle 24"/>
           <p:cNvSpPr/>
           <p:nvPr/>
         </p:nvSpPr>
@@ -18046,7 +18026,7 @@
       </p:sp>
       <p:sp>
         <p:nvSpPr>
-          <p:cNvPr id="28" name="TextBox 27"/>
+          <p:cNvPr id="26" name="TextBox 25"/>
           <p:cNvSpPr txBox="1"/>
           <p:nvPr/>
         </p:nvSpPr>
@@ -18091,71 +18071,7 @@
       </p:sp>
       <p:sp>
         <p:nvSpPr>
-          <p:cNvPr id="29" name="Rounded Rectangle 28"/>
-          <p:cNvSpPr/>
-          <p:nvPr/>
-        </p:nvSpPr>
-        <p:spPr>
-          <a:xfrm>
-            <a:off x="11292840" y="3538728"/>
-            <a:ext cx="329184" cy="310896"/>
-          </a:xfrm>
-          <a:prstGeom prst="roundRect">
-            <a:avLst>
-              <a:gd name="adj" fmla="val 50000"/>
-            </a:avLst>
-          </a:prstGeom>
-          <a:solidFill>
-            <a:srgbClr val="1E9E74"/>
-          </a:solidFill>
-          <a:ln w="12700">
-            <a:solidFill>
-              <a:srgbClr val="157355"/>
-            </a:solidFill>
-          </a:ln>
-          <a:effectLst/>
-          <a:effectLst>
-            <a:outerShdw blurRad="90000" dist="38000" dir="5400000" rotWithShape="0">
-              <a:srgbClr val="20242E">
-                <a:alpha val="22000"/>
-              </a:srgbClr>
-            </a:outerShdw>
-          </a:effectLst>
-        </p:spPr>
-        <p:style>
-          <a:lnRef idx="1">
-            <a:schemeClr val="accent1"/>
-          </a:lnRef>
-          <a:fillRef idx="3">
-            <a:schemeClr val="accent1"/>
-          </a:fillRef>
-          <a:effectRef idx="2">
-            <a:schemeClr val="accent1"/>
-          </a:effectRef>
-          <a:fontRef idx="minor">
-            <a:schemeClr val="lt1"/>
-          </a:fontRef>
-        </p:style>
-        <p:txBody>
-          <a:bodyPr rtlCol="0" anchor="ctr" wrap="none" lIns="88900" rIns="88900" tIns="12700" bIns="12700"/>
-          <a:lstStyle/>
-          <a:p>
-            <a:pPr algn="ctr"/>
-            <a:r>
-              <a:rPr sz="1100" b="1">
-                <a:solidFill>
-                  <a:srgbClr val="FFFFFF"/>
-                </a:solidFill>
-                <a:latin typeface="Inter"/>
-              </a:rPr>
-              <a:t>✓</a:t>
-            </a:r>
-          </a:p>
-        </p:txBody>
-      </p:sp>
-      <p:sp>
-        <p:nvSpPr>
-          <p:cNvPr id="30" name="Rounded Rectangle 29"/>
+          <p:cNvPr id="27" name="Rounded Rectangle 26"/>
           <p:cNvSpPr/>
           <p:nvPr/>
         </p:nvSpPr>
@@ -18210,7 +18126,7 @@
       </p:sp>
       <p:sp>
         <p:nvSpPr>
-          <p:cNvPr id="31" name="Rounded Rectangle 30"/>
+          <p:cNvPr id="28" name="Rounded Rectangle 27"/>
           <p:cNvSpPr/>
           <p:nvPr/>
         </p:nvSpPr>
@@ -18256,7 +18172,7 @@
       </p:sp>
       <p:sp>
         <p:nvSpPr>
-          <p:cNvPr id="32" name="TextBox 31"/>
+          <p:cNvPr id="29" name="TextBox 28"/>
           <p:cNvSpPr txBox="1"/>
           <p:nvPr/>
         </p:nvSpPr>
@@ -18301,7 +18217,7 @@
       </p:sp>
       <p:sp>
         <p:nvSpPr>
-          <p:cNvPr id="33" name="TextBox 32"/>
+          <p:cNvPr id="30" name="TextBox 29"/>
           <p:cNvSpPr txBox="1"/>
           <p:nvPr/>
         </p:nvSpPr>
@@ -18346,7 +18262,7 @@
       </p:sp>
       <p:sp>
         <p:nvSpPr>
-          <p:cNvPr id="34" name="Rectangle 33"/>
+          <p:cNvPr id="31" name="Rectangle 30"/>
           <p:cNvSpPr/>
           <p:nvPr/>
         </p:nvSpPr>
@@ -18390,7 +18306,7 @@
       </p:sp>
       <p:sp>
         <p:nvSpPr>
-          <p:cNvPr id="35" name="TextBox 34"/>
+          <p:cNvPr id="32" name="TextBox 31"/>
           <p:cNvSpPr txBox="1"/>
           <p:nvPr/>
         </p:nvSpPr>
@@ -18435,71 +18351,7 @@
       </p:sp>
       <p:sp>
         <p:nvSpPr>
-          <p:cNvPr id="36" name="Rounded Rectangle 35"/>
-          <p:cNvSpPr/>
-          <p:nvPr/>
-        </p:nvSpPr>
-        <p:spPr>
-          <a:xfrm>
-            <a:off x="11292840" y="4407408"/>
-            <a:ext cx="329184" cy="310896"/>
-          </a:xfrm>
-          <a:prstGeom prst="roundRect">
-            <a:avLst>
-              <a:gd name="adj" fmla="val 50000"/>
-            </a:avLst>
-          </a:prstGeom>
-          <a:solidFill>
-            <a:srgbClr val="1E9E74"/>
-          </a:solidFill>
-          <a:ln w="12700">
-            <a:solidFill>
-              <a:srgbClr val="157355"/>
-            </a:solidFill>
-          </a:ln>
-          <a:effectLst/>
-          <a:effectLst>
-            <a:outerShdw blurRad="90000" dist="38000" dir="5400000" rotWithShape="0">
-              <a:srgbClr val="20242E">
-                <a:alpha val="22000"/>
-              </a:srgbClr>
-            </a:outerShdw>
-          </a:effectLst>
-        </p:spPr>
-        <p:style>
-          <a:lnRef idx="1">
-            <a:schemeClr val="accent1"/>
-          </a:lnRef>
-          <a:fillRef idx="3">
-            <a:schemeClr val="accent1"/>
-          </a:fillRef>
-          <a:effectRef idx="2">
-            <a:schemeClr val="accent1"/>
-          </a:effectRef>
-          <a:fontRef idx="minor">
-            <a:schemeClr val="lt1"/>
-          </a:fontRef>
-        </p:style>
-        <p:txBody>
-          <a:bodyPr rtlCol="0" anchor="ctr" wrap="none" lIns="88900" rIns="88900" tIns="12700" bIns="12700"/>
-          <a:lstStyle/>
-          <a:p>
-            <a:pPr algn="ctr"/>
-            <a:r>
-              <a:rPr sz="1100" b="1">
-                <a:solidFill>
-                  <a:srgbClr val="FFFFFF"/>
-                </a:solidFill>
-                <a:latin typeface="Inter"/>
-              </a:rPr>
-              <a:t>✓</a:t>
-            </a:r>
-          </a:p>
-        </p:txBody>
-      </p:sp>
-      <p:sp>
-        <p:nvSpPr>
-          <p:cNvPr id="37" name="Rounded Rectangle 36"/>
+          <p:cNvPr id="33" name="Rounded Rectangle 32"/>
           <p:cNvSpPr/>
           <p:nvPr/>
         </p:nvSpPr>
@@ -18556,7 +18408,7 @@
       </p:sp>
       <p:sp>
         <p:nvSpPr>
-          <p:cNvPr id="38" name="Rounded Rectangle 37"/>
+          <p:cNvPr id="34" name="Rounded Rectangle 33"/>
           <p:cNvSpPr/>
           <p:nvPr/>
         </p:nvSpPr>
@@ -18613,7 +18465,7 @@
       </p:sp>
       <p:sp>
         <p:nvSpPr>
-          <p:cNvPr id="39" name="Rounded Rectangle 38">
+          <p:cNvPr id="35" name="Rounded Rectangle 34">
             <a:hlinkClick action="ppaction://hlinksldjump" r:id="rId3"/>
           </p:cNvPr>
           <p:cNvSpPr/>
@@ -18672,7 +18524,7 @@
       </p:sp>
       <p:sp>
         <p:nvSpPr>
-          <p:cNvPr id="40" name="TextBox 39"/>
+          <p:cNvPr id="36" name="TextBox 35"/>
           <p:cNvSpPr txBox="1"/>
           <p:nvPr/>
         </p:nvSpPr>
@@ -18717,7 +18569,7 @@
       </p:sp>
       <p:sp>
         <p:nvSpPr>
-          <p:cNvPr id="41" name="Rounded Rectangle 40"/>
+          <p:cNvPr id="37" name="Rounded Rectangle 36"/>
           <p:cNvSpPr/>
           <p:nvPr/>
         </p:nvSpPr>
@@ -18793,7 +18645,7 @@
       </p:sp>
       <p:sp>
         <p:nvSpPr>
-          <p:cNvPr id="42" name="Rounded Rectangle 41"/>
+          <p:cNvPr id="38" name="Rounded Rectangle 37"/>
           <p:cNvSpPr/>
           <p:nvPr/>
         </p:nvSpPr>
@@ -18848,7 +18700,7 @@
       </p:sp>
       <p:sp>
         <p:nvSpPr>
-          <p:cNvPr id="43" name="Rectangle 42"/>
+          <p:cNvPr id="39" name="Rectangle 38"/>
           <p:cNvSpPr/>
           <p:nvPr/>
         </p:nvSpPr>
@@ -18892,7 +18744,7 @@
       </p:sp>
       <p:sp>
         <p:nvSpPr>
-          <p:cNvPr id="44" name="TextBox 43"/>
+          <p:cNvPr id="40" name="TextBox 39"/>
           <p:cNvSpPr txBox="1"/>
           <p:nvPr/>
         </p:nvSpPr>
@@ -18946,7 +18798,7 @@
       </p:sp>
       <p:sp>
         <p:nvSpPr>
-          <p:cNvPr id="45" name="TextBox 44"/>
+          <p:cNvPr id="41" name="TextBox 40"/>
           <p:cNvSpPr txBox="1"/>
           <p:nvPr/>
         </p:nvSpPr>
@@ -18991,7 +18843,7 @@
       </p:sp>
       <p:sp>
         <p:nvSpPr>
-          <p:cNvPr id="46" name="TextBox 45"/>
+          <p:cNvPr id="42" name="TextBox 41"/>
           <p:cNvSpPr txBox="1"/>
           <p:nvPr/>
         </p:nvSpPr>
@@ -19046,7 +18898,326 @@
           <p:childTnLst>
             <p:seq concurrent="1" nextAc="seek">
               <p:cTn id="2" dur="indefinite" nodeType="mainSeq">
-                <p:childTnLst/>
+                <p:childTnLst>
+                  <p:par>
+                    <p:cTn id="3" fill="hold">
+                      <p:stCondLst>
+                        <p:cond delay="indefinite"/>
+                      </p:stCondLst>
+                      <p:childTnLst>
+                        <p:par>
+                          <p:cTn id="4" fill="hold">
+                            <p:stCondLst>
+                              <p:cond delay="0"/>
+                            </p:stCondLst>
+                            <p:childTnLst>
+                              <p:par>
+                                <p:cTn id="5" presetID="10" presetClass="entr" presetSubtype="0" fill="hold" grpId="0" nodeType="clickEffect">
+                                  <p:stCondLst>
+                                    <p:cond delay="0"/>
+                                  </p:stCondLst>
+                                  <p:childTnLst>
+                                    <p:set>
+                                      <p:cBhvr>
+                                        <p:cTn id="6" dur="1" fill="hold">
+                                          <p:stCondLst>
+                                            <p:cond delay="0"/>
+                                          </p:stCondLst>
+                                        </p:cTn>
+                                        <p:tgtEl>
+                                          <p:spTgt spid="14"/>
+                                        </p:tgtEl>
+                                        <p:attrNameLst>
+                                          <p:attrName>style.visibility</p:attrName>
+                                        </p:attrNameLst>
+                                      </p:cBhvr>
+                                      <p:to>
+                                        <p:strVal val="visible"/>
+                                      </p:to>
+                                    </p:set>
+                                    <p:animEffect transition="in" filter="fade">
+                                      <p:cBhvr>
+                                        <p:cTn id="7" dur="500"/>
+                                        <p:tgtEl>
+                                          <p:spTgt spid="14"/>
+                                        </p:tgtEl>
+                                      </p:cBhvr>
+                                    </p:animEffect>
+                                  </p:childTnLst>
+                                </p:cTn>
+                              </p:par>
+                            </p:childTnLst>
+                          </p:cTn>
+                        </p:par>
+                      </p:childTnLst>
+                    </p:cTn>
+                  </p:par>
+                  <p:par>
+                    <p:cTn id="8" fill="hold">
+                      <p:stCondLst>
+                        <p:cond delay="indefinite"/>
+                      </p:stCondLst>
+                      <p:childTnLst>
+                        <p:par>
+                          <p:cTn id="9" fill="hold">
+                            <p:stCondLst>
+                              <p:cond delay="0"/>
+                            </p:stCondLst>
+                            <p:childTnLst>
+                              <p:par>
+                                <p:cTn id="10" presetID="10" presetClass="entr" presetSubtype="0" fill="hold" grpId="0" nodeType="clickEffect">
+                                  <p:stCondLst>
+                                    <p:cond delay="0"/>
+                                  </p:stCondLst>
+                                  <p:childTnLst>
+                                    <p:set>
+                                      <p:cBhvr>
+                                        <p:cTn id="11" dur="1" fill="hold">
+                                          <p:stCondLst>
+                                            <p:cond delay="0"/>
+                                          </p:stCondLst>
+                                        </p:cTn>
+                                        <p:tgtEl>
+                                          <p:spTgt spid="20"/>
+                                        </p:tgtEl>
+                                        <p:attrNameLst>
+                                          <p:attrName>style.visibility</p:attrName>
+                                        </p:attrNameLst>
+                                      </p:cBhvr>
+                                      <p:to>
+                                        <p:strVal val="visible"/>
+                                      </p:to>
+                                    </p:set>
+                                    <p:animEffect transition="in" filter="fade">
+                                      <p:cBhvr>
+                                        <p:cTn id="12" dur="500"/>
+                                        <p:tgtEl>
+                                          <p:spTgt spid="20"/>
+                                        </p:tgtEl>
+                                      </p:cBhvr>
+                                    </p:animEffect>
+                                  </p:childTnLst>
+                                </p:cTn>
+                              </p:par>
+                            </p:childTnLst>
+                          </p:cTn>
+                        </p:par>
+                      </p:childTnLst>
+                    </p:cTn>
+                  </p:par>
+                  <p:par>
+                    <p:cTn id="13" fill="hold">
+                      <p:stCondLst>
+                        <p:cond delay="indefinite"/>
+                      </p:stCondLst>
+                      <p:childTnLst>
+                        <p:par>
+                          <p:cTn id="14" fill="hold">
+                            <p:stCondLst>
+                              <p:cond delay="0"/>
+                            </p:stCondLst>
+                            <p:childTnLst>
+                              <p:par>
+                                <p:cTn id="15" presetID="10" presetClass="entr" presetSubtype="0" fill="hold" grpId="0" nodeType="clickEffect">
+                                  <p:stCondLst>
+                                    <p:cond delay="0"/>
+                                  </p:stCondLst>
+                                  <p:childTnLst>
+                                    <p:set>
+                                      <p:cBhvr>
+                                        <p:cTn id="16" dur="1" fill="hold">
+                                          <p:stCondLst>
+                                            <p:cond delay="0"/>
+                                          </p:stCondLst>
+                                        </p:cTn>
+                                        <p:tgtEl>
+                                          <p:spTgt spid="26"/>
+                                        </p:tgtEl>
+                                        <p:attrNameLst>
+                                          <p:attrName>style.visibility</p:attrName>
+                                        </p:attrNameLst>
+                                      </p:cBhvr>
+                                      <p:to>
+                                        <p:strVal val="visible"/>
+                                      </p:to>
+                                    </p:set>
+                                    <p:animEffect transition="in" filter="fade">
+                                      <p:cBhvr>
+                                        <p:cTn id="17" dur="500"/>
+                                        <p:tgtEl>
+                                          <p:spTgt spid="26"/>
+                                        </p:tgtEl>
+                                      </p:cBhvr>
+                                    </p:animEffect>
+                                  </p:childTnLst>
+                                </p:cTn>
+                              </p:par>
+                            </p:childTnLst>
+                          </p:cTn>
+                        </p:par>
+                      </p:childTnLst>
+                    </p:cTn>
+                  </p:par>
+                  <p:par>
+                    <p:cTn id="18" fill="hold">
+                      <p:stCondLst>
+                        <p:cond delay="indefinite"/>
+                      </p:stCondLst>
+                      <p:childTnLst>
+                        <p:par>
+                          <p:cTn id="19" fill="hold">
+                            <p:stCondLst>
+                              <p:cond delay="0"/>
+                            </p:stCondLst>
+                            <p:childTnLst>
+                              <p:par>
+                                <p:cTn id="20" presetID="10" presetClass="entr" presetSubtype="0" fill="hold" grpId="0" nodeType="clickEffect">
+                                  <p:stCondLst>
+                                    <p:cond delay="0"/>
+                                  </p:stCondLst>
+                                  <p:childTnLst>
+                                    <p:set>
+                                      <p:cBhvr>
+                                        <p:cTn id="21" dur="1" fill="hold">
+                                          <p:stCondLst>
+                                            <p:cond delay="0"/>
+                                          </p:stCondLst>
+                                        </p:cTn>
+                                        <p:tgtEl>
+                                          <p:spTgt spid="32"/>
+                                        </p:tgtEl>
+                                        <p:attrNameLst>
+                                          <p:attrName>style.visibility</p:attrName>
+                                        </p:attrNameLst>
+                                      </p:cBhvr>
+                                      <p:to>
+                                        <p:strVal val="visible"/>
+                                      </p:to>
+                                    </p:set>
+                                    <p:animEffect transition="in" filter="fade">
+                                      <p:cBhvr>
+                                        <p:cTn id="22" dur="500"/>
+                                        <p:tgtEl>
+                                          <p:spTgt spid="32"/>
+                                        </p:tgtEl>
+                                      </p:cBhvr>
+                                    </p:animEffect>
+                                  </p:childTnLst>
+                                </p:cTn>
+                              </p:par>
+                            </p:childTnLst>
+                          </p:cTn>
+                        </p:par>
+                      </p:childTnLst>
+                    </p:cTn>
+                  </p:par>
+                  <p:par>
+                    <p:cTn id="23" fill="hold">
+                      <p:stCondLst>
+                        <p:cond delay="indefinite"/>
+                      </p:stCondLst>
+                      <p:childTnLst>
+                        <p:par>
+                          <p:cTn id="24" fill="hold">
+                            <p:stCondLst>
+                              <p:cond delay="0"/>
+                            </p:stCondLst>
+                            <p:childTnLst>
+                              <p:par>
+                                <p:cTn id="25" presetID="10" presetClass="entr" presetSubtype="0" fill="hold" grpId="0" nodeType="clickEffect">
+                                  <p:stCondLst>
+                                    <p:cond delay="0"/>
+                                  </p:stCondLst>
+                                  <p:childTnLst>
+                                    <p:set>
+                                      <p:cBhvr>
+                                        <p:cTn id="26" dur="1" fill="hold">
+                                          <p:stCondLst>
+                                            <p:cond delay="0"/>
+                                          </p:stCondLst>
+                                        </p:cTn>
+                                        <p:tgtEl>
+                                          <p:spTgt spid="37"/>
+                                        </p:tgtEl>
+                                        <p:attrNameLst>
+                                          <p:attrName>style.visibility</p:attrName>
+                                        </p:attrNameLst>
+                                      </p:cBhvr>
+                                      <p:to>
+                                        <p:strVal val="visible"/>
+                                      </p:to>
+                                    </p:set>
+                                    <p:animEffect transition="in" filter="fade">
+                                      <p:cBhvr>
+                                        <p:cTn id="27" dur="500"/>
+                                        <p:tgtEl>
+                                          <p:spTgt spid="37"/>
+                                        </p:tgtEl>
+                                      </p:cBhvr>
+                                    </p:animEffect>
+                                  </p:childTnLst>
+                                </p:cTn>
+                              </p:par>
+                            </p:childTnLst>
+                          </p:cTn>
+                        </p:par>
+                      </p:childTnLst>
+                    </p:cTn>
+                  </p:par>
+                  <p:par>
+                    <p:cTn id="28" fill="hold">
+                      <p:stCondLst>
+                        <p:cond delay="indefinite"/>
+                      </p:stCondLst>
+                      <p:childTnLst>
+                        <p:par>
+                          <p:cTn id="29" fill="hold">
+                            <p:stCondLst>
+                              <p:cond delay="0"/>
+                            </p:stCondLst>
+                            <p:childTnLst>
+                              <p:par>
+                                <p:cTn id="30" presetID="10" presetClass="entr" presetSubtype="0" fill="hold" grpId="0" nodeType="clickEffect">
+                                  <p:stCondLst>
+                                    <p:cond delay="0"/>
+                                  </p:stCondLst>
+                                  <p:childTnLst>
+                                    <p:set>
+                                      <p:cBhvr>
+                                        <p:cTn id="31" dur="1" fill="hold">
+                                          <p:stCondLst>
+                                            <p:cond delay="0"/>
+                                          </p:stCondLst>
+                                        </p:cTn>
+                                        <p:tgtEl>
+                                          <p:spTgt spid="38"/>
+                                        </p:tgtEl>
+                                        <p:attrNameLst>
+                                          <p:attrName>style.visibility</p:attrName>
+                                        </p:attrNameLst>
+                                      </p:cBhvr>
+                                      <p:to>
+                                        <p:strVal val="visible"/>
+                                      </p:to>
+                                    </p:set>
+                                    <p:animEffect transition="in" filter="fade">
+                                      <p:cBhvr>
+                                        <p:cTn id="32" dur="500"/>
+                                        <p:tgtEl>
+                                          <p:spTgt spid="38"/>
+                                        </p:tgtEl>
+                                      </p:cBhvr>
+                                    </p:animEffect>
+                                  </p:childTnLst>
+                                </p:cTn>
+                              </p:par>
+                            </p:childTnLst>
+                          </p:cTn>
+                        </p:par>
+                      </p:childTnLst>
+                    </p:cTn>
+                  </p:par>
+                </p:childTnLst>
               </p:cTn>
               <p:prevCondLst>
                 <p:cond evt="onPrev" delay="0">
@@ -19059,274 +19230,6 @@
                 <p:cond evt="onNext" delay="0">
                   <p:tgtEl>
                     <p:sldTgt/>
-                  </p:tgtEl>
-                </p:cond>
-              </p:nextCondLst>
-            </p:seq>
-            <p:seq concurrent="1" nextAc="seek">
-              <p:cTn id="5" restart="whenNotActive" fill="hold" nodeType="interactiveSeq">
-                <p:stCondLst>
-                  <p:cond evt="onClick" delay="0">
-                    <p:tgtEl>
-                      <p:spTgt spid="9"/>
-                    </p:tgtEl>
-                  </p:cond>
-                </p:stCondLst>
-                <p:endSync evt="end" delay="0">
-                  <p:rtn val="all"/>
-                </p:endSync>
-                <p:childTnLst>
-                  <p:par>
-                    <p:cTn id="6" fill="hold">
-                      <p:stCondLst>
-                        <p:cond delay="0"/>
-                      </p:stCondLst>
-                      <p:childTnLst>
-                        <p:par>
-                          <p:cTn id="7" presetID="10" presetClass="entr" presetSubtype="0" fill="hold" grpId="0" nodeType="clickEffect">
-                            <p:stCondLst>
-                              <p:cond delay="0"/>
-                            </p:stCondLst>
-                            <p:childTnLst>
-                              <p:set>
-                                <p:cBhvr>
-                                  <p:cTn id="8" dur="1" fill="hold">
-                                    <p:stCondLst>
-                                      <p:cond delay="0"/>
-                                    </p:stCondLst>
-                                  </p:cTn>
-                                  <p:tgtEl>
-                                    <p:spTgt spid="15"/>
-                                  </p:tgtEl>
-                                  <p:attrNameLst>
-                                    <p:attrName>style.visibility</p:attrName>
-                                  </p:attrNameLst>
-                                </p:cBhvr>
-                                <p:to>
-                                  <p:strVal val="visible"/>
-                                </p:to>
-                              </p:set>
-                              <p:animEffect transition="in" filter="fade">
-                                <p:cBhvr>
-                                  <p:cTn id="9" dur="400"/>
-                                  <p:tgtEl>
-                                    <p:spTgt spid="15"/>
-                                  </p:tgtEl>
-                                </p:cBhvr>
-                              </p:animEffect>
-                            </p:childTnLst>
-                          </p:cTn>
-                        </p:par>
-                      </p:childTnLst>
-                    </p:cTn>
-                  </p:par>
-                </p:childTnLst>
-              </p:cTn>
-              <p:nextCondLst>
-                <p:cond evt="onClick" delay="0">
-                  <p:tgtEl>
-                    <p:spTgt spid="9"/>
-                  </p:tgtEl>
-                </p:cond>
-              </p:nextCondLst>
-            </p:seq>
-            <p:seq concurrent="1" nextAc="seek">
-              <p:cTn id="15" restart="whenNotActive" fill="hold" nodeType="interactiveSeq">
-                <p:stCondLst>
-                  <p:cond evt="onClick" delay="0">
-                    <p:tgtEl>
-                      <p:spTgt spid="16"/>
-                    </p:tgtEl>
-                  </p:cond>
-                </p:stCondLst>
-                <p:endSync evt="end" delay="0">
-                  <p:rtn val="all"/>
-                </p:endSync>
-                <p:childTnLst>
-                  <p:par>
-                    <p:cTn id="16" fill="hold">
-                      <p:stCondLst>
-                        <p:cond delay="0"/>
-                      </p:stCondLst>
-                      <p:childTnLst>
-                        <p:par>
-                          <p:cTn id="17" presetID="10" presetClass="entr" presetSubtype="0" fill="hold" grpId="0" nodeType="clickEffect">
-                            <p:stCondLst>
-                              <p:cond delay="0"/>
-                            </p:stCondLst>
-                            <p:childTnLst>
-                              <p:set>
-                                <p:cBhvr>
-                                  <p:cTn id="18" dur="1" fill="hold">
-                                    <p:stCondLst>
-                                      <p:cond delay="0"/>
-                                    </p:stCondLst>
-                                  </p:cTn>
-                                  <p:tgtEl>
-                                    <p:spTgt spid="22"/>
-                                  </p:tgtEl>
-                                  <p:attrNameLst>
-                                    <p:attrName>style.visibility</p:attrName>
-                                  </p:attrNameLst>
-                                </p:cBhvr>
-                                <p:to>
-                                  <p:strVal val="visible"/>
-                                </p:to>
-                              </p:set>
-                              <p:animEffect transition="in" filter="fade">
-                                <p:cBhvr>
-                                  <p:cTn id="19" dur="400"/>
-                                  <p:tgtEl>
-                                    <p:spTgt spid="22"/>
-                                  </p:tgtEl>
-                                </p:cBhvr>
-                              </p:animEffect>
-                            </p:childTnLst>
-                          </p:cTn>
-                        </p:par>
-                      </p:childTnLst>
-                    </p:cTn>
-                  </p:par>
-                </p:childTnLst>
-              </p:cTn>
-              <p:nextCondLst>
-                <p:cond evt="onClick" delay="0">
-                  <p:tgtEl>
-                    <p:spTgt spid="16"/>
-                  </p:tgtEl>
-                </p:cond>
-              </p:nextCondLst>
-            </p:seq>
-            <p:seq concurrent="1" nextAc="seek">
-              <p:cTn id="25" restart="whenNotActive" fill="hold" nodeType="interactiveSeq">
-                <p:stCondLst>
-                  <p:cond evt="onClick" delay="0">
-                    <p:tgtEl>
-                      <p:spTgt spid="23"/>
-                    </p:tgtEl>
-                  </p:cond>
-                </p:stCondLst>
-                <p:endSync evt="end" delay="0">
-                  <p:rtn val="all"/>
-                </p:endSync>
-                <p:childTnLst>
-                  <p:par>
-                    <p:cTn id="26" fill="hold">
-                      <p:stCondLst>
-                        <p:cond delay="0"/>
-                      </p:stCondLst>
-                      <p:childTnLst>
-                        <p:par>
-                          <p:cTn id="27" presetID="10" presetClass="entr" presetSubtype="0" fill="hold" grpId="0" nodeType="clickEffect">
-                            <p:stCondLst>
-                              <p:cond delay="0"/>
-                            </p:stCondLst>
-                            <p:childTnLst>
-                              <p:set>
-                                <p:cBhvr>
-                                  <p:cTn id="28" dur="1" fill="hold">
-                                    <p:stCondLst>
-                                      <p:cond delay="0"/>
-                                    </p:stCondLst>
-                                  </p:cTn>
-                                  <p:tgtEl>
-                                    <p:spTgt spid="29"/>
-                                  </p:tgtEl>
-                                  <p:attrNameLst>
-                                    <p:attrName>style.visibility</p:attrName>
-                                  </p:attrNameLst>
-                                </p:cBhvr>
-                                <p:to>
-                                  <p:strVal val="visible"/>
-                                </p:to>
-                              </p:set>
-                              <p:animEffect transition="in" filter="fade">
-                                <p:cBhvr>
-                                  <p:cTn id="29" dur="400"/>
-                                  <p:tgtEl>
-                                    <p:spTgt spid="29"/>
-                                  </p:tgtEl>
-                                </p:cBhvr>
-                              </p:animEffect>
-                            </p:childTnLst>
-                          </p:cTn>
-                        </p:par>
-                      </p:childTnLst>
-                    </p:cTn>
-                  </p:par>
-                </p:childTnLst>
-              </p:cTn>
-              <p:nextCondLst>
-                <p:cond evt="onClick" delay="0">
-                  <p:tgtEl>
-                    <p:spTgt spid="23"/>
-                  </p:tgtEl>
-                </p:cond>
-              </p:nextCondLst>
-            </p:seq>
-            <p:seq concurrent="1" nextAc="seek">
-              <p:cTn id="35" restart="whenNotActive" fill="hold" nodeType="interactiveSeq">
-                <p:stCondLst>
-                  <p:cond evt="onClick" delay="0">
-                    <p:tgtEl>
-                      <p:spTgt spid="30"/>
-                    </p:tgtEl>
-                  </p:cond>
-                </p:stCondLst>
-                <p:endSync evt="end" delay="0">
-                  <p:rtn val="all"/>
-                </p:endSync>
-                <p:childTnLst>
-                  <p:par>
-                    <p:cTn id="36" fill="hold">
-                      <p:stCondLst>
-                        <p:cond delay="0"/>
-                      </p:stCondLst>
-                      <p:childTnLst>
-                        <p:par>
-                          <p:cTn id="37" presetID="10" presetClass="entr" presetSubtype="0" fill="hold" grpId="0" nodeType="clickEffect">
-                            <p:stCondLst>
-                              <p:cond delay="0"/>
-                            </p:stCondLst>
-                            <p:childTnLst>
-                              <p:set>
-                                <p:cBhvr>
-                                  <p:cTn id="38" dur="1" fill="hold">
-                                    <p:stCondLst>
-                                      <p:cond delay="0"/>
-                                    </p:stCondLst>
-                                  </p:cTn>
-                                  <p:tgtEl>
-                                    <p:spTgt spid="36"/>
-                                  </p:tgtEl>
-                                  <p:attrNameLst>
-                                    <p:attrName>style.visibility</p:attrName>
-                                  </p:attrNameLst>
-                                </p:cBhvr>
-                                <p:to>
-                                  <p:strVal val="visible"/>
-                                </p:to>
-                              </p:set>
-                              <p:animEffect transition="in" filter="fade">
-                                <p:cBhvr>
-                                  <p:cTn id="39" dur="400"/>
-                                  <p:tgtEl>
-                                    <p:spTgt spid="36"/>
-                                  </p:tgtEl>
-                                </p:cBhvr>
-                              </p:animEffect>
-                            </p:childTnLst>
-                          </p:cTn>
-                        </p:par>
-                      </p:childTnLst>
-                    </p:cTn>
-                  </p:par>
-                </p:childTnLst>
-              </p:cTn>
-              <p:nextCondLst>
-                <p:cond evt="onClick" delay="0">
-                  <p:tgtEl>
-                    <p:spTgt spid="30"/>
                   </p:tgtEl>
                 </p:cond>
               </p:nextCondLst>
@@ -29896,7 +29799,379 @@
           <p:childTnLst>
             <p:seq concurrent="1" nextAc="seek">
               <p:cTn id="2" dur="indefinite" nodeType="mainSeq">
-                <p:childTnLst/>
+                <p:childTnLst>
+                  <p:par>
+                    <p:cTn id="3" fill="hold">
+                      <p:stCondLst>
+                        <p:cond delay="indefinite"/>
+                      </p:stCondLst>
+                      <p:childTnLst>
+                        <p:par>
+                          <p:cTn id="4" fill="hold">
+                            <p:stCondLst>
+                              <p:cond delay="0"/>
+                            </p:stCondLst>
+                            <p:childTnLst>
+                              <p:par>
+                                <p:cTn id="5" presetID="10" presetClass="entr" presetSubtype="0" fill="hold" grpId="0" nodeType="clickEffect">
+                                  <p:stCondLst>
+                                    <p:cond delay="0"/>
+                                  </p:stCondLst>
+                                  <p:childTnLst>
+                                    <p:set>
+                                      <p:cBhvr>
+                                        <p:cTn id="6" dur="1" fill="hold">
+                                          <p:stCondLst>
+                                            <p:cond delay="0"/>
+                                          </p:stCondLst>
+                                        </p:cTn>
+                                        <p:tgtEl>
+                                          <p:spTgt spid="11"/>
+                                        </p:tgtEl>
+                                        <p:attrNameLst>
+                                          <p:attrName>style.visibility</p:attrName>
+                                        </p:attrNameLst>
+                                      </p:cBhvr>
+                                      <p:to>
+                                        <p:strVal val="visible"/>
+                                      </p:to>
+                                    </p:set>
+                                    <p:animEffect transition="in" filter="fade">
+                                      <p:cBhvr>
+                                        <p:cTn id="7" dur="500"/>
+                                        <p:tgtEl>
+                                          <p:spTgt spid="11"/>
+                                        </p:tgtEl>
+                                      </p:cBhvr>
+                                    </p:animEffect>
+                                  </p:childTnLst>
+                                </p:cTn>
+                              </p:par>
+                            </p:childTnLst>
+                          </p:cTn>
+                        </p:par>
+                      </p:childTnLst>
+                    </p:cTn>
+                  </p:par>
+                  <p:par>
+                    <p:cTn id="8" fill="hold">
+                      <p:stCondLst>
+                        <p:cond delay="indefinite"/>
+                      </p:stCondLst>
+                      <p:childTnLst>
+                        <p:par>
+                          <p:cTn id="9" fill="hold">
+                            <p:stCondLst>
+                              <p:cond delay="0"/>
+                            </p:stCondLst>
+                            <p:childTnLst>
+                              <p:par>
+                                <p:cTn id="10" presetID="10" presetClass="entr" presetSubtype="0" fill="hold" grpId="0" nodeType="clickEffect">
+                                  <p:stCondLst>
+                                    <p:cond delay="0"/>
+                                  </p:stCondLst>
+                                  <p:childTnLst>
+                                    <p:set>
+                                      <p:cBhvr>
+                                        <p:cTn id="11" dur="1" fill="hold">
+                                          <p:stCondLst>
+                                            <p:cond delay="0"/>
+                                          </p:stCondLst>
+                                        </p:cTn>
+                                        <p:tgtEl>
+                                          <p:spTgt spid="15"/>
+                                        </p:tgtEl>
+                                        <p:attrNameLst>
+                                          <p:attrName>style.visibility</p:attrName>
+                                        </p:attrNameLst>
+                                      </p:cBhvr>
+                                      <p:to>
+                                        <p:strVal val="visible"/>
+                                      </p:to>
+                                    </p:set>
+                                    <p:animEffect transition="in" filter="fade">
+                                      <p:cBhvr>
+                                        <p:cTn id="12" dur="500"/>
+                                        <p:tgtEl>
+                                          <p:spTgt spid="15"/>
+                                        </p:tgtEl>
+                                      </p:cBhvr>
+                                    </p:animEffect>
+                                  </p:childTnLst>
+                                </p:cTn>
+                              </p:par>
+                            </p:childTnLst>
+                          </p:cTn>
+                        </p:par>
+                      </p:childTnLst>
+                    </p:cTn>
+                  </p:par>
+                  <p:par>
+                    <p:cTn id="13" fill="hold">
+                      <p:stCondLst>
+                        <p:cond delay="indefinite"/>
+                      </p:stCondLst>
+                      <p:childTnLst>
+                        <p:par>
+                          <p:cTn id="14" fill="hold">
+                            <p:stCondLst>
+                              <p:cond delay="0"/>
+                            </p:stCondLst>
+                            <p:childTnLst>
+                              <p:par>
+                                <p:cTn id="15" presetID="10" presetClass="entr" presetSubtype="0" fill="hold" grpId="0" nodeType="clickEffect">
+                                  <p:stCondLst>
+                                    <p:cond delay="0"/>
+                                  </p:stCondLst>
+                                  <p:childTnLst>
+                                    <p:set>
+                                      <p:cBhvr>
+                                        <p:cTn id="16" dur="1" fill="hold">
+                                          <p:stCondLst>
+                                            <p:cond delay="0"/>
+                                          </p:stCondLst>
+                                        </p:cTn>
+                                        <p:tgtEl>
+                                          <p:spTgt spid="19"/>
+                                        </p:tgtEl>
+                                        <p:attrNameLst>
+                                          <p:attrName>style.visibility</p:attrName>
+                                        </p:attrNameLst>
+                                      </p:cBhvr>
+                                      <p:to>
+                                        <p:strVal val="visible"/>
+                                      </p:to>
+                                    </p:set>
+                                    <p:animEffect transition="in" filter="fade">
+                                      <p:cBhvr>
+                                        <p:cTn id="17" dur="500"/>
+                                        <p:tgtEl>
+                                          <p:spTgt spid="19"/>
+                                        </p:tgtEl>
+                                      </p:cBhvr>
+                                    </p:animEffect>
+                                  </p:childTnLst>
+                                </p:cTn>
+                              </p:par>
+                            </p:childTnLst>
+                          </p:cTn>
+                        </p:par>
+                      </p:childTnLst>
+                    </p:cTn>
+                  </p:par>
+                  <p:par>
+                    <p:cTn id="18" fill="hold">
+                      <p:stCondLst>
+                        <p:cond delay="indefinite"/>
+                      </p:stCondLst>
+                      <p:childTnLst>
+                        <p:par>
+                          <p:cTn id="19" fill="hold">
+                            <p:stCondLst>
+                              <p:cond delay="0"/>
+                            </p:stCondLst>
+                            <p:childTnLst>
+                              <p:par>
+                                <p:cTn id="20" presetID="10" presetClass="entr" presetSubtype="0" fill="hold" grpId="0" nodeType="clickEffect">
+                                  <p:stCondLst>
+                                    <p:cond delay="0"/>
+                                  </p:stCondLst>
+                                  <p:childTnLst>
+                                    <p:set>
+                                      <p:cBhvr>
+                                        <p:cTn id="21" dur="1" fill="hold">
+                                          <p:stCondLst>
+                                            <p:cond delay="0"/>
+                                          </p:stCondLst>
+                                        </p:cTn>
+                                        <p:tgtEl>
+                                          <p:spTgt spid="23"/>
+                                        </p:tgtEl>
+                                        <p:attrNameLst>
+                                          <p:attrName>style.visibility</p:attrName>
+                                        </p:attrNameLst>
+                                      </p:cBhvr>
+                                      <p:to>
+                                        <p:strVal val="visible"/>
+                                      </p:to>
+                                    </p:set>
+                                    <p:animEffect transition="in" filter="fade">
+                                      <p:cBhvr>
+                                        <p:cTn id="22" dur="500"/>
+                                        <p:tgtEl>
+                                          <p:spTgt spid="23"/>
+                                        </p:tgtEl>
+                                      </p:cBhvr>
+                                    </p:animEffect>
+                                  </p:childTnLst>
+                                </p:cTn>
+                              </p:par>
+                            </p:childTnLst>
+                          </p:cTn>
+                        </p:par>
+                      </p:childTnLst>
+                    </p:cTn>
+                  </p:par>
+                  <p:par>
+                    <p:cTn id="23" fill="hold">
+                      <p:stCondLst>
+                        <p:cond delay="indefinite"/>
+                      </p:stCondLst>
+                      <p:childTnLst>
+                        <p:par>
+                          <p:cTn id="24" fill="hold">
+                            <p:stCondLst>
+                              <p:cond delay="0"/>
+                            </p:stCondLst>
+                            <p:childTnLst>
+                              <p:par>
+                                <p:cTn id="25" presetID="10" presetClass="entr" presetSubtype="0" fill="hold" grpId="0" nodeType="clickEffect">
+                                  <p:stCondLst>
+                                    <p:cond delay="0"/>
+                                  </p:stCondLst>
+                                  <p:childTnLst>
+                                    <p:set>
+                                      <p:cBhvr>
+                                        <p:cTn id="26" dur="1" fill="hold">
+                                          <p:stCondLst>
+                                            <p:cond delay="0"/>
+                                          </p:stCondLst>
+                                        </p:cTn>
+                                        <p:tgtEl>
+                                          <p:spTgt spid="27"/>
+                                        </p:tgtEl>
+                                        <p:attrNameLst>
+                                          <p:attrName>style.visibility</p:attrName>
+                                        </p:attrNameLst>
+                                      </p:cBhvr>
+                                      <p:to>
+                                        <p:strVal val="visible"/>
+                                      </p:to>
+                                    </p:set>
+                                    <p:animEffect transition="in" filter="fade">
+                                      <p:cBhvr>
+                                        <p:cTn id="27" dur="500"/>
+                                        <p:tgtEl>
+                                          <p:spTgt spid="27"/>
+                                        </p:tgtEl>
+                                      </p:cBhvr>
+                                    </p:animEffect>
+                                  </p:childTnLst>
+                                </p:cTn>
+                              </p:par>
+                            </p:childTnLst>
+                          </p:cTn>
+                        </p:par>
+                      </p:childTnLst>
+                    </p:cTn>
+                  </p:par>
+                  <p:par>
+                    <p:cTn id="28" fill="hold">
+                      <p:stCondLst>
+                        <p:cond delay="indefinite"/>
+                      </p:stCondLst>
+                      <p:childTnLst>
+                        <p:par>
+                          <p:cTn id="29" fill="hold">
+                            <p:stCondLst>
+                              <p:cond delay="0"/>
+                            </p:stCondLst>
+                            <p:childTnLst>
+                              <p:par>
+                                <p:cTn id="30" presetID="10" presetClass="entr" presetSubtype="0" fill="hold" grpId="0" nodeType="clickEffect">
+                                  <p:stCondLst>
+                                    <p:cond delay="0"/>
+                                  </p:stCondLst>
+                                  <p:childTnLst>
+                                    <p:set>
+                                      <p:cBhvr>
+                                        <p:cTn id="31" dur="1" fill="hold">
+                                          <p:stCondLst>
+                                            <p:cond delay="0"/>
+                                          </p:stCondLst>
+                                        </p:cTn>
+                                        <p:tgtEl>
+                                          <p:spTgt spid="32"/>
+                                        </p:tgtEl>
+                                        <p:attrNameLst>
+                                          <p:attrName>style.visibility</p:attrName>
+                                        </p:attrNameLst>
+                                      </p:cBhvr>
+                                      <p:to>
+                                        <p:strVal val="visible"/>
+                                      </p:to>
+                                    </p:set>
+                                    <p:animEffect transition="in" filter="fade">
+                                      <p:cBhvr>
+                                        <p:cTn id="32" dur="500"/>
+                                        <p:tgtEl>
+                                          <p:spTgt spid="32"/>
+                                        </p:tgtEl>
+                                      </p:cBhvr>
+                                    </p:animEffect>
+                                  </p:childTnLst>
+                                </p:cTn>
+                              </p:par>
+                            </p:childTnLst>
+                          </p:cTn>
+                        </p:par>
+                      </p:childTnLst>
+                    </p:cTn>
+                  </p:par>
+                  <p:par>
+                    <p:cTn id="33" fill="hold">
+                      <p:stCondLst>
+                        <p:cond delay="indefinite"/>
+                      </p:stCondLst>
+                      <p:childTnLst>
+                        <p:par>
+                          <p:cTn id="34" fill="hold">
+                            <p:stCondLst>
+                              <p:cond delay="0"/>
+                            </p:stCondLst>
+                            <p:childTnLst>
+                              <p:par>
+                                <p:cTn id="35" presetID="10" presetClass="entr" presetSubtype="0" fill="hold" grpId="0" nodeType="clickEffect">
+                                  <p:stCondLst>
+                                    <p:cond delay="0"/>
+                                  </p:stCondLst>
+                                  <p:childTnLst>
+                                    <p:set>
+                                      <p:cBhvr>
+                                        <p:cTn id="36" dur="1" fill="hold">
+                                          <p:stCondLst>
+                                            <p:cond delay="0"/>
+                                          </p:stCondLst>
+                                        </p:cTn>
+                                        <p:tgtEl>
+                                          <p:spTgt spid="33"/>
+                                        </p:tgtEl>
+                                        <p:attrNameLst>
+                                          <p:attrName>style.visibility</p:attrName>
+                                        </p:attrNameLst>
+                                      </p:cBhvr>
+                                      <p:to>
+                                        <p:strVal val="visible"/>
+                                      </p:to>
+                                    </p:set>
+                                    <p:animEffect transition="in" filter="fade">
+                                      <p:cBhvr>
+                                        <p:cTn id="37" dur="500"/>
+                                        <p:tgtEl>
+                                          <p:spTgt spid="33"/>
+                                        </p:tgtEl>
+                                      </p:cBhvr>
+                                    </p:animEffect>
+                                  </p:childTnLst>
+                                </p:cTn>
+                              </p:par>
+                            </p:childTnLst>
+                          </p:cTn>
+                        </p:par>
+                      </p:childTnLst>
+                    </p:cTn>
+                  </p:par>
+                </p:childTnLst>
               </p:cTn>
               <p:prevCondLst>
                 <p:cond evt="onPrev" delay="0">
@@ -29909,341 +30184,6 @@
                 <p:cond evt="onNext" delay="0">
                   <p:tgtEl>
                     <p:sldTgt/>
-                  </p:tgtEl>
-                </p:cond>
-              </p:nextCondLst>
-            </p:seq>
-            <p:seq concurrent="1" nextAc="seek">
-              <p:cTn id="5" restart="whenNotActive" fill="hold" nodeType="interactiveSeq">
-                <p:stCondLst>
-                  <p:cond evt="onClick" delay="0">
-                    <p:tgtEl>
-                      <p:spTgt spid="8"/>
-                    </p:tgtEl>
-                  </p:cond>
-                </p:stCondLst>
-                <p:endSync evt="end" delay="0">
-                  <p:rtn val="all"/>
-                </p:endSync>
-                <p:childTnLst>
-                  <p:par>
-                    <p:cTn id="6" fill="hold">
-                      <p:stCondLst>
-                        <p:cond delay="0"/>
-                      </p:stCondLst>
-                      <p:childTnLst>
-                        <p:par>
-                          <p:cTn id="7" presetID="10" presetClass="entr" presetSubtype="0" fill="hold" grpId="0" nodeType="clickEffect">
-                            <p:stCondLst>
-                              <p:cond delay="0"/>
-                            </p:stCondLst>
-                            <p:childTnLst>
-                              <p:set>
-                                <p:cBhvr>
-                                  <p:cTn id="8" dur="1" fill="hold">
-                                    <p:stCondLst>
-                                      <p:cond delay="0"/>
-                                    </p:stCondLst>
-                                  </p:cTn>
-                                  <p:tgtEl>
-                                    <p:spTgt spid="11"/>
-                                  </p:tgtEl>
-                                  <p:attrNameLst>
-                                    <p:attrName>style.visibility</p:attrName>
-                                  </p:attrNameLst>
-                                </p:cBhvr>
-                                <p:to>
-                                  <p:strVal val="visible"/>
-                                </p:to>
-                              </p:set>
-                              <p:animEffect transition="in" filter="fade">
-                                <p:cBhvr>
-                                  <p:cTn id="9" dur="400"/>
-                                  <p:tgtEl>
-                                    <p:spTgt spid="11"/>
-                                  </p:tgtEl>
-                                </p:cBhvr>
-                              </p:animEffect>
-                            </p:childTnLst>
-                          </p:cTn>
-                        </p:par>
-                      </p:childTnLst>
-                    </p:cTn>
-                  </p:par>
-                </p:childTnLst>
-              </p:cTn>
-              <p:nextCondLst>
-                <p:cond evt="onClick" delay="0">
-                  <p:tgtEl>
-                    <p:spTgt spid="8"/>
-                  </p:tgtEl>
-                </p:cond>
-              </p:nextCondLst>
-            </p:seq>
-            <p:seq concurrent="1" nextAc="seek">
-              <p:cTn id="15" restart="whenNotActive" fill="hold" nodeType="interactiveSeq">
-                <p:stCondLst>
-                  <p:cond evt="onClick" delay="0">
-                    <p:tgtEl>
-                      <p:spTgt spid="12"/>
-                    </p:tgtEl>
-                  </p:cond>
-                </p:stCondLst>
-                <p:endSync evt="end" delay="0">
-                  <p:rtn val="all"/>
-                </p:endSync>
-                <p:childTnLst>
-                  <p:par>
-                    <p:cTn id="16" fill="hold">
-                      <p:stCondLst>
-                        <p:cond delay="0"/>
-                      </p:stCondLst>
-                      <p:childTnLst>
-                        <p:par>
-                          <p:cTn id="17" presetID="10" presetClass="entr" presetSubtype="0" fill="hold" grpId="0" nodeType="clickEffect">
-                            <p:stCondLst>
-                              <p:cond delay="0"/>
-                            </p:stCondLst>
-                            <p:childTnLst>
-                              <p:set>
-                                <p:cBhvr>
-                                  <p:cTn id="18" dur="1" fill="hold">
-                                    <p:stCondLst>
-                                      <p:cond delay="0"/>
-                                    </p:stCondLst>
-                                  </p:cTn>
-                                  <p:tgtEl>
-                                    <p:spTgt spid="15"/>
-                                  </p:tgtEl>
-                                  <p:attrNameLst>
-                                    <p:attrName>style.visibility</p:attrName>
-                                  </p:attrNameLst>
-                                </p:cBhvr>
-                                <p:to>
-                                  <p:strVal val="visible"/>
-                                </p:to>
-                              </p:set>
-                              <p:animEffect transition="in" filter="fade">
-                                <p:cBhvr>
-                                  <p:cTn id="19" dur="400"/>
-                                  <p:tgtEl>
-                                    <p:spTgt spid="15"/>
-                                  </p:tgtEl>
-                                </p:cBhvr>
-                              </p:animEffect>
-                            </p:childTnLst>
-                          </p:cTn>
-                        </p:par>
-                      </p:childTnLst>
-                    </p:cTn>
-                  </p:par>
-                </p:childTnLst>
-              </p:cTn>
-              <p:nextCondLst>
-                <p:cond evt="onClick" delay="0">
-                  <p:tgtEl>
-                    <p:spTgt spid="12"/>
-                  </p:tgtEl>
-                </p:cond>
-              </p:nextCondLst>
-            </p:seq>
-            <p:seq concurrent="1" nextAc="seek">
-              <p:cTn id="25" restart="whenNotActive" fill="hold" nodeType="interactiveSeq">
-                <p:stCondLst>
-                  <p:cond evt="onClick" delay="0">
-                    <p:tgtEl>
-                      <p:spTgt spid="16"/>
-                    </p:tgtEl>
-                  </p:cond>
-                </p:stCondLst>
-                <p:endSync evt="end" delay="0">
-                  <p:rtn val="all"/>
-                </p:endSync>
-                <p:childTnLst>
-                  <p:par>
-                    <p:cTn id="26" fill="hold">
-                      <p:stCondLst>
-                        <p:cond delay="0"/>
-                      </p:stCondLst>
-                      <p:childTnLst>
-                        <p:par>
-                          <p:cTn id="27" presetID="10" presetClass="entr" presetSubtype="0" fill="hold" grpId="0" nodeType="clickEffect">
-                            <p:stCondLst>
-                              <p:cond delay="0"/>
-                            </p:stCondLst>
-                            <p:childTnLst>
-                              <p:set>
-                                <p:cBhvr>
-                                  <p:cTn id="28" dur="1" fill="hold">
-                                    <p:stCondLst>
-                                      <p:cond delay="0"/>
-                                    </p:stCondLst>
-                                  </p:cTn>
-                                  <p:tgtEl>
-                                    <p:spTgt spid="19"/>
-                                  </p:tgtEl>
-                                  <p:attrNameLst>
-                                    <p:attrName>style.visibility</p:attrName>
-                                  </p:attrNameLst>
-                                </p:cBhvr>
-                                <p:to>
-                                  <p:strVal val="visible"/>
-                                </p:to>
-                              </p:set>
-                              <p:animEffect transition="in" filter="fade">
-                                <p:cBhvr>
-                                  <p:cTn id="29" dur="400"/>
-                                  <p:tgtEl>
-                                    <p:spTgt spid="19"/>
-                                  </p:tgtEl>
-                                </p:cBhvr>
-                              </p:animEffect>
-                            </p:childTnLst>
-                          </p:cTn>
-                        </p:par>
-                      </p:childTnLst>
-                    </p:cTn>
-                  </p:par>
-                </p:childTnLst>
-              </p:cTn>
-              <p:nextCondLst>
-                <p:cond evt="onClick" delay="0">
-                  <p:tgtEl>
-                    <p:spTgt spid="16"/>
-                  </p:tgtEl>
-                </p:cond>
-              </p:nextCondLst>
-            </p:seq>
-            <p:seq concurrent="1" nextAc="seek">
-              <p:cTn id="35" restart="whenNotActive" fill="hold" nodeType="interactiveSeq">
-                <p:stCondLst>
-                  <p:cond evt="onClick" delay="0">
-                    <p:tgtEl>
-                      <p:spTgt spid="20"/>
-                    </p:tgtEl>
-                  </p:cond>
-                </p:stCondLst>
-                <p:endSync evt="end" delay="0">
-                  <p:rtn val="all"/>
-                </p:endSync>
-                <p:childTnLst>
-                  <p:par>
-                    <p:cTn id="36" fill="hold">
-                      <p:stCondLst>
-                        <p:cond delay="0"/>
-                      </p:stCondLst>
-                      <p:childTnLst>
-                        <p:par>
-                          <p:cTn id="37" presetID="10" presetClass="entr" presetSubtype="0" fill="hold" grpId="0" nodeType="clickEffect">
-                            <p:stCondLst>
-                              <p:cond delay="0"/>
-                            </p:stCondLst>
-                            <p:childTnLst>
-                              <p:set>
-                                <p:cBhvr>
-                                  <p:cTn id="38" dur="1" fill="hold">
-                                    <p:stCondLst>
-                                      <p:cond delay="0"/>
-                                    </p:stCondLst>
-                                  </p:cTn>
-                                  <p:tgtEl>
-                                    <p:spTgt spid="23"/>
-                                  </p:tgtEl>
-                                  <p:attrNameLst>
-                                    <p:attrName>style.visibility</p:attrName>
-                                  </p:attrNameLst>
-                                </p:cBhvr>
-                                <p:to>
-                                  <p:strVal val="visible"/>
-                                </p:to>
-                              </p:set>
-                              <p:animEffect transition="in" filter="fade">
-                                <p:cBhvr>
-                                  <p:cTn id="39" dur="400"/>
-                                  <p:tgtEl>
-                                    <p:spTgt spid="23"/>
-                                  </p:tgtEl>
-                                </p:cBhvr>
-                              </p:animEffect>
-                            </p:childTnLst>
-                          </p:cTn>
-                        </p:par>
-                      </p:childTnLst>
-                    </p:cTn>
-                  </p:par>
-                </p:childTnLst>
-              </p:cTn>
-              <p:nextCondLst>
-                <p:cond evt="onClick" delay="0">
-                  <p:tgtEl>
-                    <p:spTgt spid="20"/>
-                  </p:tgtEl>
-                </p:cond>
-              </p:nextCondLst>
-            </p:seq>
-            <p:seq concurrent="1" nextAc="seek">
-              <p:cTn id="45" restart="whenNotActive" fill="hold" nodeType="interactiveSeq">
-                <p:stCondLst>
-                  <p:cond evt="onClick" delay="0">
-                    <p:tgtEl>
-                      <p:spTgt spid="24"/>
-                    </p:tgtEl>
-                  </p:cond>
-                </p:stCondLst>
-                <p:endSync evt="end" delay="0">
-                  <p:rtn val="all"/>
-                </p:endSync>
-                <p:childTnLst>
-                  <p:par>
-                    <p:cTn id="46" fill="hold">
-                      <p:stCondLst>
-                        <p:cond delay="0"/>
-                      </p:stCondLst>
-                      <p:childTnLst>
-                        <p:par>
-                          <p:cTn id="47" presetID="10" presetClass="entr" presetSubtype="0" fill="hold" grpId="0" nodeType="clickEffect">
-                            <p:stCondLst>
-                              <p:cond delay="0"/>
-                            </p:stCondLst>
-                            <p:childTnLst>
-                              <p:set>
-                                <p:cBhvr>
-                                  <p:cTn id="48" dur="1" fill="hold">
-                                    <p:stCondLst>
-                                      <p:cond delay="0"/>
-                                    </p:stCondLst>
-                                  </p:cTn>
-                                  <p:tgtEl>
-                                    <p:spTgt spid="27"/>
-                                  </p:tgtEl>
-                                  <p:attrNameLst>
-                                    <p:attrName>style.visibility</p:attrName>
-                                  </p:attrNameLst>
-                                </p:cBhvr>
-                                <p:to>
-                                  <p:strVal val="visible"/>
-                                </p:to>
-                              </p:set>
-                              <p:animEffect transition="in" filter="fade">
-                                <p:cBhvr>
-                                  <p:cTn id="49" dur="400"/>
-                                  <p:tgtEl>
-                                    <p:spTgt spid="27"/>
-                                  </p:tgtEl>
-                                </p:cBhvr>
-                              </p:animEffect>
-                            </p:childTnLst>
-                          </p:cTn>
-                        </p:par>
-                      </p:childTnLst>
-                    </p:cTn>
-                  </p:par>
-                </p:childTnLst>
-              </p:cTn>
-              <p:nextCondLst>
-                <p:cond evt="onClick" delay="0">
-                  <p:tgtEl>
-                    <p:spTgt spid="24"/>
                   </p:tgtEl>
                 </p:cond>
               </p:nextCondLst>
@@ -36900,7 +36840,7 @@
                 </a:solidFill>
                 <a:latin typeface="Inter"/>
               </a:rPr>
-              <a:t>• Docentversie .pptx = vrije navigatie + oplossingen; leerlingversie .ppsx = kioskmodus, feedback ingebouwd, geen docentnotities.</a:t>
+              <a:t>• Docentversie .pptx = vrije navigatie + oplossing in de notities; leerlingversie .ppsx = gewone diavoorstelling (geen kiosk): elke klik onthult het volgende antwoord (fade). Geen docentnotities.</a:t>
             </a:r>
           </a:p>
         </p:txBody>
@@ -49185,7 +49125,326 @@
           <p:childTnLst>
             <p:seq concurrent="1" nextAc="seek">
               <p:cTn id="2" dur="indefinite" nodeType="mainSeq">
-                <p:childTnLst/>
+                <p:childTnLst>
+                  <p:par>
+                    <p:cTn id="3" fill="hold">
+                      <p:stCondLst>
+                        <p:cond delay="indefinite"/>
+                      </p:stCondLst>
+                      <p:childTnLst>
+                        <p:par>
+                          <p:cTn id="4" fill="hold">
+                            <p:stCondLst>
+                              <p:cond delay="0"/>
+                            </p:stCondLst>
+                            <p:childTnLst>
+                              <p:par>
+                                <p:cTn id="5" presetID="10" presetClass="entr" presetSubtype="0" fill="hold" grpId="0" nodeType="clickEffect">
+                                  <p:stCondLst>
+                                    <p:cond delay="0"/>
+                                  </p:stCondLst>
+                                  <p:childTnLst>
+                                    <p:set>
+                                      <p:cBhvr>
+                                        <p:cTn id="6" dur="1" fill="hold">
+                                          <p:stCondLst>
+                                            <p:cond delay="0"/>
+                                          </p:stCondLst>
+                                        </p:cTn>
+                                        <p:tgtEl>
+                                          <p:spTgt spid="13"/>
+                                        </p:tgtEl>
+                                        <p:attrNameLst>
+                                          <p:attrName>style.visibility</p:attrName>
+                                        </p:attrNameLst>
+                                      </p:cBhvr>
+                                      <p:to>
+                                        <p:strVal val="visible"/>
+                                      </p:to>
+                                    </p:set>
+                                    <p:animEffect transition="in" filter="fade">
+                                      <p:cBhvr>
+                                        <p:cTn id="7" dur="500"/>
+                                        <p:tgtEl>
+                                          <p:spTgt spid="13"/>
+                                        </p:tgtEl>
+                                      </p:cBhvr>
+                                    </p:animEffect>
+                                  </p:childTnLst>
+                                </p:cTn>
+                              </p:par>
+                            </p:childTnLst>
+                          </p:cTn>
+                        </p:par>
+                      </p:childTnLst>
+                    </p:cTn>
+                  </p:par>
+                  <p:par>
+                    <p:cTn id="8" fill="hold">
+                      <p:stCondLst>
+                        <p:cond delay="indefinite"/>
+                      </p:stCondLst>
+                      <p:childTnLst>
+                        <p:par>
+                          <p:cTn id="9" fill="hold">
+                            <p:stCondLst>
+                              <p:cond delay="0"/>
+                            </p:stCondLst>
+                            <p:childTnLst>
+                              <p:par>
+                                <p:cTn id="10" presetID="10" presetClass="entr" presetSubtype="0" fill="hold" grpId="0" nodeType="clickEffect">
+                                  <p:stCondLst>
+                                    <p:cond delay="0"/>
+                                  </p:stCondLst>
+                                  <p:childTnLst>
+                                    <p:set>
+                                      <p:cBhvr>
+                                        <p:cTn id="11" dur="1" fill="hold">
+                                          <p:stCondLst>
+                                            <p:cond delay="0"/>
+                                          </p:stCondLst>
+                                        </p:cTn>
+                                        <p:tgtEl>
+                                          <p:spTgt spid="18"/>
+                                        </p:tgtEl>
+                                        <p:attrNameLst>
+                                          <p:attrName>style.visibility</p:attrName>
+                                        </p:attrNameLst>
+                                      </p:cBhvr>
+                                      <p:to>
+                                        <p:strVal val="visible"/>
+                                      </p:to>
+                                    </p:set>
+                                    <p:animEffect transition="in" filter="fade">
+                                      <p:cBhvr>
+                                        <p:cTn id="12" dur="500"/>
+                                        <p:tgtEl>
+                                          <p:spTgt spid="18"/>
+                                        </p:tgtEl>
+                                      </p:cBhvr>
+                                    </p:animEffect>
+                                  </p:childTnLst>
+                                </p:cTn>
+                              </p:par>
+                            </p:childTnLst>
+                          </p:cTn>
+                        </p:par>
+                      </p:childTnLst>
+                    </p:cTn>
+                  </p:par>
+                  <p:par>
+                    <p:cTn id="13" fill="hold">
+                      <p:stCondLst>
+                        <p:cond delay="indefinite"/>
+                      </p:stCondLst>
+                      <p:childTnLst>
+                        <p:par>
+                          <p:cTn id="14" fill="hold">
+                            <p:stCondLst>
+                              <p:cond delay="0"/>
+                            </p:stCondLst>
+                            <p:childTnLst>
+                              <p:par>
+                                <p:cTn id="15" presetID="10" presetClass="entr" presetSubtype="0" fill="hold" grpId="0" nodeType="clickEffect">
+                                  <p:stCondLst>
+                                    <p:cond delay="0"/>
+                                  </p:stCondLst>
+                                  <p:childTnLst>
+                                    <p:set>
+                                      <p:cBhvr>
+                                        <p:cTn id="16" dur="1" fill="hold">
+                                          <p:stCondLst>
+                                            <p:cond delay="0"/>
+                                          </p:stCondLst>
+                                        </p:cTn>
+                                        <p:tgtEl>
+                                          <p:spTgt spid="23"/>
+                                        </p:tgtEl>
+                                        <p:attrNameLst>
+                                          <p:attrName>style.visibility</p:attrName>
+                                        </p:attrNameLst>
+                                      </p:cBhvr>
+                                      <p:to>
+                                        <p:strVal val="visible"/>
+                                      </p:to>
+                                    </p:set>
+                                    <p:animEffect transition="in" filter="fade">
+                                      <p:cBhvr>
+                                        <p:cTn id="17" dur="500"/>
+                                        <p:tgtEl>
+                                          <p:spTgt spid="23"/>
+                                        </p:tgtEl>
+                                      </p:cBhvr>
+                                    </p:animEffect>
+                                  </p:childTnLst>
+                                </p:cTn>
+                              </p:par>
+                            </p:childTnLst>
+                          </p:cTn>
+                        </p:par>
+                      </p:childTnLst>
+                    </p:cTn>
+                  </p:par>
+                  <p:par>
+                    <p:cTn id="18" fill="hold">
+                      <p:stCondLst>
+                        <p:cond delay="indefinite"/>
+                      </p:stCondLst>
+                      <p:childTnLst>
+                        <p:par>
+                          <p:cTn id="19" fill="hold">
+                            <p:stCondLst>
+                              <p:cond delay="0"/>
+                            </p:stCondLst>
+                            <p:childTnLst>
+                              <p:par>
+                                <p:cTn id="20" presetID="10" presetClass="entr" presetSubtype="0" fill="hold" grpId="0" nodeType="clickEffect">
+                                  <p:stCondLst>
+                                    <p:cond delay="0"/>
+                                  </p:stCondLst>
+                                  <p:childTnLst>
+                                    <p:set>
+                                      <p:cBhvr>
+                                        <p:cTn id="21" dur="1" fill="hold">
+                                          <p:stCondLst>
+                                            <p:cond delay="0"/>
+                                          </p:stCondLst>
+                                        </p:cTn>
+                                        <p:tgtEl>
+                                          <p:spTgt spid="28"/>
+                                        </p:tgtEl>
+                                        <p:attrNameLst>
+                                          <p:attrName>style.visibility</p:attrName>
+                                        </p:attrNameLst>
+                                      </p:cBhvr>
+                                      <p:to>
+                                        <p:strVal val="visible"/>
+                                      </p:to>
+                                    </p:set>
+                                    <p:animEffect transition="in" filter="fade">
+                                      <p:cBhvr>
+                                        <p:cTn id="22" dur="500"/>
+                                        <p:tgtEl>
+                                          <p:spTgt spid="28"/>
+                                        </p:tgtEl>
+                                      </p:cBhvr>
+                                    </p:animEffect>
+                                  </p:childTnLst>
+                                </p:cTn>
+                              </p:par>
+                            </p:childTnLst>
+                          </p:cTn>
+                        </p:par>
+                      </p:childTnLst>
+                    </p:cTn>
+                  </p:par>
+                  <p:par>
+                    <p:cTn id="23" fill="hold">
+                      <p:stCondLst>
+                        <p:cond delay="indefinite"/>
+                      </p:stCondLst>
+                      <p:childTnLst>
+                        <p:par>
+                          <p:cTn id="24" fill="hold">
+                            <p:stCondLst>
+                              <p:cond delay="0"/>
+                            </p:stCondLst>
+                            <p:childTnLst>
+                              <p:par>
+                                <p:cTn id="25" presetID="10" presetClass="entr" presetSubtype="0" fill="hold" grpId="0" nodeType="clickEffect">
+                                  <p:stCondLst>
+                                    <p:cond delay="0"/>
+                                  </p:stCondLst>
+                                  <p:childTnLst>
+                                    <p:set>
+                                      <p:cBhvr>
+                                        <p:cTn id="26" dur="1" fill="hold">
+                                          <p:stCondLst>
+                                            <p:cond delay="0"/>
+                                          </p:stCondLst>
+                                        </p:cTn>
+                                        <p:tgtEl>
+                                          <p:spTgt spid="50"/>
+                                        </p:tgtEl>
+                                        <p:attrNameLst>
+                                          <p:attrName>style.visibility</p:attrName>
+                                        </p:attrNameLst>
+                                      </p:cBhvr>
+                                      <p:to>
+                                        <p:strVal val="visible"/>
+                                      </p:to>
+                                    </p:set>
+                                    <p:animEffect transition="in" filter="fade">
+                                      <p:cBhvr>
+                                        <p:cTn id="27" dur="500"/>
+                                        <p:tgtEl>
+                                          <p:spTgt spid="50"/>
+                                        </p:tgtEl>
+                                      </p:cBhvr>
+                                    </p:animEffect>
+                                  </p:childTnLst>
+                                </p:cTn>
+                              </p:par>
+                            </p:childTnLst>
+                          </p:cTn>
+                        </p:par>
+                      </p:childTnLst>
+                    </p:cTn>
+                  </p:par>
+                  <p:par>
+                    <p:cTn id="28" fill="hold">
+                      <p:stCondLst>
+                        <p:cond delay="indefinite"/>
+                      </p:stCondLst>
+                      <p:childTnLst>
+                        <p:par>
+                          <p:cTn id="29" fill="hold">
+                            <p:stCondLst>
+                              <p:cond delay="0"/>
+                            </p:stCondLst>
+                            <p:childTnLst>
+                              <p:par>
+                                <p:cTn id="30" presetID="10" presetClass="entr" presetSubtype="0" fill="hold" grpId="0" nodeType="clickEffect">
+                                  <p:stCondLst>
+                                    <p:cond delay="0"/>
+                                  </p:stCondLst>
+                                  <p:childTnLst>
+                                    <p:set>
+                                      <p:cBhvr>
+                                        <p:cTn id="31" dur="1" fill="hold">
+                                          <p:stCondLst>
+                                            <p:cond delay="0"/>
+                                          </p:stCondLst>
+                                        </p:cTn>
+                                        <p:tgtEl>
+                                          <p:spTgt spid="51"/>
+                                        </p:tgtEl>
+                                        <p:attrNameLst>
+                                          <p:attrName>style.visibility</p:attrName>
+                                        </p:attrNameLst>
+                                      </p:cBhvr>
+                                      <p:to>
+                                        <p:strVal val="visible"/>
+                                      </p:to>
+                                    </p:set>
+                                    <p:animEffect transition="in" filter="fade">
+                                      <p:cBhvr>
+                                        <p:cTn id="32" dur="500"/>
+                                        <p:tgtEl>
+                                          <p:spTgt spid="51"/>
+                                        </p:tgtEl>
+                                      </p:cBhvr>
+                                    </p:animEffect>
+                                  </p:childTnLst>
+                                </p:cTn>
+                              </p:par>
+                            </p:childTnLst>
+                          </p:cTn>
+                        </p:par>
+                      </p:childTnLst>
+                    </p:cTn>
+                  </p:par>
+                </p:childTnLst>
               </p:cTn>
               <p:prevCondLst>
                 <p:cond evt="onPrev" delay="0">
@@ -49198,274 +49457,6 @@
                 <p:cond evt="onNext" delay="0">
                   <p:tgtEl>
                     <p:sldTgt/>
-                  </p:tgtEl>
-                </p:cond>
-              </p:nextCondLst>
-            </p:seq>
-            <p:seq concurrent="1" nextAc="seek">
-              <p:cTn id="5" restart="whenNotActive" fill="hold" nodeType="interactiveSeq">
-                <p:stCondLst>
-                  <p:cond evt="onClick" delay="0">
-                    <p:tgtEl>
-                      <p:spTgt spid="11"/>
-                    </p:tgtEl>
-                  </p:cond>
-                </p:stCondLst>
-                <p:endSync evt="end" delay="0">
-                  <p:rtn val="all"/>
-                </p:endSync>
-                <p:childTnLst>
-                  <p:par>
-                    <p:cTn id="6" fill="hold">
-                      <p:stCondLst>
-                        <p:cond delay="0"/>
-                      </p:stCondLst>
-                      <p:childTnLst>
-                        <p:par>
-                          <p:cTn id="7" presetID="10" presetClass="entr" presetSubtype="0" fill="hold" grpId="0" nodeType="clickEffect">
-                            <p:stCondLst>
-                              <p:cond delay="0"/>
-                            </p:stCondLst>
-                            <p:childTnLst>
-                              <p:set>
-                                <p:cBhvr>
-                                  <p:cTn id="8" dur="1" fill="hold">
-                                    <p:stCondLst>
-                                      <p:cond delay="0"/>
-                                    </p:stCondLst>
-                                  </p:cTn>
-                                  <p:tgtEl>
-                                    <p:spTgt spid="13"/>
-                                  </p:tgtEl>
-                                  <p:attrNameLst>
-                                    <p:attrName>style.visibility</p:attrName>
-                                  </p:attrNameLst>
-                                </p:cBhvr>
-                                <p:to>
-                                  <p:strVal val="visible"/>
-                                </p:to>
-                              </p:set>
-                              <p:animEffect transition="in" filter="fade">
-                                <p:cBhvr>
-                                  <p:cTn id="9" dur="400"/>
-                                  <p:tgtEl>
-                                    <p:spTgt spid="13"/>
-                                  </p:tgtEl>
-                                </p:cBhvr>
-                              </p:animEffect>
-                            </p:childTnLst>
-                          </p:cTn>
-                        </p:par>
-                      </p:childTnLst>
-                    </p:cTn>
-                  </p:par>
-                </p:childTnLst>
-              </p:cTn>
-              <p:nextCondLst>
-                <p:cond evt="onClick" delay="0">
-                  <p:tgtEl>
-                    <p:spTgt spid="11"/>
-                  </p:tgtEl>
-                </p:cond>
-              </p:nextCondLst>
-            </p:seq>
-            <p:seq concurrent="1" nextAc="seek">
-              <p:cTn id="15" restart="whenNotActive" fill="hold" nodeType="interactiveSeq">
-                <p:stCondLst>
-                  <p:cond evt="onClick" delay="0">
-                    <p:tgtEl>
-                      <p:spTgt spid="16"/>
-                    </p:tgtEl>
-                  </p:cond>
-                </p:stCondLst>
-                <p:endSync evt="end" delay="0">
-                  <p:rtn val="all"/>
-                </p:endSync>
-                <p:childTnLst>
-                  <p:par>
-                    <p:cTn id="16" fill="hold">
-                      <p:stCondLst>
-                        <p:cond delay="0"/>
-                      </p:stCondLst>
-                      <p:childTnLst>
-                        <p:par>
-                          <p:cTn id="17" presetID="10" presetClass="entr" presetSubtype="0" fill="hold" grpId="0" nodeType="clickEffect">
-                            <p:stCondLst>
-                              <p:cond delay="0"/>
-                            </p:stCondLst>
-                            <p:childTnLst>
-                              <p:set>
-                                <p:cBhvr>
-                                  <p:cTn id="18" dur="1" fill="hold">
-                                    <p:stCondLst>
-                                      <p:cond delay="0"/>
-                                    </p:stCondLst>
-                                  </p:cTn>
-                                  <p:tgtEl>
-                                    <p:spTgt spid="18"/>
-                                  </p:tgtEl>
-                                  <p:attrNameLst>
-                                    <p:attrName>style.visibility</p:attrName>
-                                  </p:attrNameLst>
-                                </p:cBhvr>
-                                <p:to>
-                                  <p:strVal val="visible"/>
-                                </p:to>
-                              </p:set>
-                              <p:animEffect transition="in" filter="fade">
-                                <p:cBhvr>
-                                  <p:cTn id="19" dur="400"/>
-                                  <p:tgtEl>
-                                    <p:spTgt spid="18"/>
-                                  </p:tgtEl>
-                                </p:cBhvr>
-                              </p:animEffect>
-                            </p:childTnLst>
-                          </p:cTn>
-                        </p:par>
-                      </p:childTnLst>
-                    </p:cTn>
-                  </p:par>
-                </p:childTnLst>
-              </p:cTn>
-              <p:nextCondLst>
-                <p:cond evt="onClick" delay="0">
-                  <p:tgtEl>
-                    <p:spTgt spid="16"/>
-                  </p:tgtEl>
-                </p:cond>
-              </p:nextCondLst>
-            </p:seq>
-            <p:seq concurrent="1" nextAc="seek">
-              <p:cTn id="25" restart="whenNotActive" fill="hold" nodeType="interactiveSeq">
-                <p:stCondLst>
-                  <p:cond evt="onClick" delay="0">
-                    <p:tgtEl>
-                      <p:spTgt spid="21"/>
-                    </p:tgtEl>
-                  </p:cond>
-                </p:stCondLst>
-                <p:endSync evt="end" delay="0">
-                  <p:rtn val="all"/>
-                </p:endSync>
-                <p:childTnLst>
-                  <p:par>
-                    <p:cTn id="26" fill="hold">
-                      <p:stCondLst>
-                        <p:cond delay="0"/>
-                      </p:stCondLst>
-                      <p:childTnLst>
-                        <p:par>
-                          <p:cTn id="27" presetID="10" presetClass="entr" presetSubtype="0" fill="hold" grpId="0" nodeType="clickEffect">
-                            <p:stCondLst>
-                              <p:cond delay="0"/>
-                            </p:stCondLst>
-                            <p:childTnLst>
-                              <p:set>
-                                <p:cBhvr>
-                                  <p:cTn id="28" dur="1" fill="hold">
-                                    <p:stCondLst>
-                                      <p:cond delay="0"/>
-                                    </p:stCondLst>
-                                  </p:cTn>
-                                  <p:tgtEl>
-                                    <p:spTgt spid="23"/>
-                                  </p:tgtEl>
-                                  <p:attrNameLst>
-                                    <p:attrName>style.visibility</p:attrName>
-                                  </p:attrNameLst>
-                                </p:cBhvr>
-                                <p:to>
-                                  <p:strVal val="visible"/>
-                                </p:to>
-                              </p:set>
-                              <p:animEffect transition="in" filter="fade">
-                                <p:cBhvr>
-                                  <p:cTn id="29" dur="400"/>
-                                  <p:tgtEl>
-                                    <p:spTgt spid="23"/>
-                                  </p:tgtEl>
-                                </p:cBhvr>
-                              </p:animEffect>
-                            </p:childTnLst>
-                          </p:cTn>
-                        </p:par>
-                      </p:childTnLst>
-                    </p:cTn>
-                  </p:par>
-                </p:childTnLst>
-              </p:cTn>
-              <p:nextCondLst>
-                <p:cond evt="onClick" delay="0">
-                  <p:tgtEl>
-                    <p:spTgt spid="21"/>
-                  </p:tgtEl>
-                </p:cond>
-              </p:nextCondLst>
-            </p:seq>
-            <p:seq concurrent="1" nextAc="seek">
-              <p:cTn id="35" restart="whenNotActive" fill="hold" nodeType="interactiveSeq">
-                <p:stCondLst>
-                  <p:cond evt="onClick" delay="0">
-                    <p:tgtEl>
-                      <p:spTgt spid="26"/>
-                    </p:tgtEl>
-                  </p:cond>
-                </p:stCondLst>
-                <p:endSync evt="end" delay="0">
-                  <p:rtn val="all"/>
-                </p:endSync>
-                <p:childTnLst>
-                  <p:par>
-                    <p:cTn id="36" fill="hold">
-                      <p:stCondLst>
-                        <p:cond delay="0"/>
-                      </p:stCondLst>
-                      <p:childTnLst>
-                        <p:par>
-                          <p:cTn id="37" presetID="10" presetClass="entr" presetSubtype="0" fill="hold" grpId="0" nodeType="clickEffect">
-                            <p:stCondLst>
-                              <p:cond delay="0"/>
-                            </p:stCondLst>
-                            <p:childTnLst>
-                              <p:set>
-                                <p:cBhvr>
-                                  <p:cTn id="38" dur="1" fill="hold">
-                                    <p:stCondLst>
-                                      <p:cond delay="0"/>
-                                    </p:stCondLst>
-                                  </p:cTn>
-                                  <p:tgtEl>
-                                    <p:spTgt spid="28"/>
-                                  </p:tgtEl>
-                                  <p:attrNameLst>
-                                    <p:attrName>style.visibility</p:attrName>
-                                  </p:attrNameLst>
-                                </p:cBhvr>
-                                <p:to>
-                                  <p:strVal val="visible"/>
-                                </p:to>
-                              </p:set>
-                              <p:animEffect transition="in" filter="fade">
-                                <p:cBhvr>
-                                  <p:cTn id="39" dur="400"/>
-                                  <p:tgtEl>
-                                    <p:spTgt spid="28"/>
-                                  </p:tgtEl>
-                                </p:cBhvr>
-                              </p:animEffect>
-                            </p:childTnLst>
-                          </p:cTn>
-                        </p:par>
-                      </p:childTnLst>
-                    </p:cTn>
-                  </p:par>
-                </p:childTnLst>
-              </p:cTn>
-              <p:nextCondLst>
-                <p:cond evt="onClick" delay="0">
-                  <p:tgtEl>
-                    <p:spTgt spid="26"/>
                   </p:tgtEl>
                 </p:cond>
               </p:nextCondLst>
@@ -56477,7 +56468,538 @@
           <p:childTnLst>
             <p:seq concurrent="1" nextAc="seek">
               <p:cTn id="2" dur="indefinite" nodeType="mainSeq">
-                <p:childTnLst/>
+                <p:childTnLst>
+                  <p:par>
+                    <p:cTn id="3" fill="hold">
+                      <p:stCondLst>
+                        <p:cond delay="indefinite"/>
+                      </p:stCondLst>
+                      <p:childTnLst>
+                        <p:par>
+                          <p:cTn id="4" fill="hold">
+                            <p:stCondLst>
+                              <p:cond delay="0"/>
+                            </p:stCondLst>
+                            <p:childTnLst>
+                              <p:par>
+                                <p:cTn id="5" presetID="10" presetClass="entr" presetSubtype="0" fill="hold" grpId="0" nodeType="clickEffect">
+                                  <p:stCondLst>
+                                    <p:cond delay="0"/>
+                                  </p:stCondLst>
+                                  <p:childTnLst>
+                                    <p:set>
+                                      <p:cBhvr>
+                                        <p:cTn id="6" dur="1" fill="hold">
+                                          <p:stCondLst>
+                                            <p:cond delay="0"/>
+                                          </p:stCondLst>
+                                        </p:cTn>
+                                        <p:tgtEl>
+                                          <p:spTgt spid="11"/>
+                                        </p:tgtEl>
+                                        <p:attrNameLst>
+                                          <p:attrName>style.visibility</p:attrName>
+                                        </p:attrNameLst>
+                                      </p:cBhvr>
+                                      <p:to>
+                                        <p:strVal val="visible"/>
+                                      </p:to>
+                                    </p:set>
+                                    <p:animEffect transition="in" filter="fade">
+                                      <p:cBhvr>
+                                        <p:cTn id="7" dur="500"/>
+                                        <p:tgtEl>
+                                          <p:spTgt spid="11"/>
+                                        </p:tgtEl>
+                                      </p:cBhvr>
+                                    </p:animEffect>
+                                  </p:childTnLst>
+                                </p:cTn>
+                              </p:par>
+                            </p:childTnLst>
+                          </p:cTn>
+                        </p:par>
+                      </p:childTnLst>
+                    </p:cTn>
+                  </p:par>
+                  <p:par>
+                    <p:cTn id="8" fill="hold">
+                      <p:stCondLst>
+                        <p:cond delay="indefinite"/>
+                      </p:stCondLst>
+                      <p:childTnLst>
+                        <p:par>
+                          <p:cTn id="9" fill="hold">
+                            <p:stCondLst>
+                              <p:cond delay="0"/>
+                            </p:stCondLst>
+                            <p:childTnLst>
+                              <p:par>
+                                <p:cTn id="10" presetID="10" presetClass="entr" presetSubtype="0" fill="hold" grpId="0" nodeType="clickEffect">
+                                  <p:stCondLst>
+                                    <p:cond delay="0"/>
+                                  </p:stCondLst>
+                                  <p:childTnLst>
+                                    <p:set>
+                                      <p:cBhvr>
+                                        <p:cTn id="11" dur="1" fill="hold">
+                                          <p:stCondLst>
+                                            <p:cond delay="0"/>
+                                          </p:stCondLst>
+                                        </p:cTn>
+                                        <p:tgtEl>
+                                          <p:spTgt spid="15"/>
+                                        </p:tgtEl>
+                                        <p:attrNameLst>
+                                          <p:attrName>style.visibility</p:attrName>
+                                        </p:attrNameLst>
+                                      </p:cBhvr>
+                                      <p:to>
+                                        <p:strVal val="visible"/>
+                                      </p:to>
+                                    </p:set>
+                                    <p:animEffect transition="in" filter="fade">
+                                      <p:cBhvr>
+                                        <p:cTn id="12" dur="500"/>
+                                        <p:tgtEl>
+                                          <p:spTgt spid="15"/>
+                                        </p:tgtEl>
+                                      </p:cBhvr>
+                                    </p:animEffect>
+                                  </p:childTnLst>
+                                </p:cTn>
+                              </p:par>
+                            </p:childTnLst>
+                          </p:cTn>
+                        </p:par>
+                      </p:childTnLst>
+                    </p:cTn>
+                  </p:par>
+                  <p:par>
+                    <p:cTn id="13" fill="hold">
+                      <p:stCondLst>
+                        <p:cond delay="indefinite"/>
+                      </p:stCondLst>
+                      <p:childTnLst>
+                        <p:par>
+                          <p:cTn id="14" fill="hold">
+                            <p:stCondLst>
+                              <p:cond delay="0"/>
+                            </p:stCondLst>
+                            <p:childTnLst>
+                              <p:par>
+                                <p:cTn id="15" presetID="10" presetClass="entr" presetSubtype="0" fill="hold" grpId="0" nodeType="clickEffect">
+                                  <p:stCondLst>
+                                    <p:cond delay="0"/>
+                                  </p:stCondLst>
+                                  <p:childTnLst>
+                                    <p:set>
+                                      <p:cBhvr>
+                                        <p:cTn id="16" dur="1" fill="hold">
+                                          <p:stCondLst>
+                                            <p:cond delay="0"/>
+                                          </p:stCondLst>
+                                        </p:cTn>
+                                        <p:tgtEl>
+                                          <p:spTgt spid="19"/>
+                                        </p:tgtEl>
+                                        <p:attrNameLst>
+                                          <p:attrName>style.visibility</p:attrName>
+                                        </p:attrNameLst>
+                                      </p:cBhvr>
+                                      <p:to>
+                                        <p:strVal val="visible"/>
+                                      </p:to>
+                                    </p:set>
+                                    <p:animEffect transition="in" filter="fade">
+                                      <p:cBhvr>
+                                        <p:cTn id="17" dur="500"/>
+                                        <p:tgtEl>
+                                          <p:spTgt spid="19"/>
+                                        </p:tgtEl>
+                                      </p:cBhvr>
+                                    </p:animEffect>
+                                  </p:childTnLst>
+                                </p:cTn>
+                              </p:par>
+                            </p:childTnLst>
+                          </p:cTn>
+                        </p:par>
+                      </p:childTnLst>
+                    </p:cTn>
+                  </p:par>
+                  <p:par>
+                    <p:cTn id="18" fill="hold">
+                      <p:stCondLst>
+                        <p:cond delay="indefinite"/>
+                      </p:stCondLst>
+                      <p:childTnLst>
+                        <p:par>
+                          <p:cTn id="19" fill="hold">
+                            <p:stCondLst>
+                              <p:cond delay="0"/>
+                            </p:stCondLst>
+                            <p:childTnLst>
+                              <p:par>
+                                <p:cTn id="20" presetID="10" presetClass="entr" presetSubtype="0" fill="hold" grpId="0" nodeType="clickEffect">
+                                  <p:stCondLst>
+                                    <p:cond delay="0"/>
+                                  </p:stCondLst>
+                                  <p:childTnLst>
+                                    <p:set>
+                                      <p:cBhvr>
+                                        <p:cTn id="21" dur="1" fill="hold">
+                                          <p:stCondLst>
+                                            <p:cond delay="0"/>
+                                          </p:stCondLst>
+                                        </p:cTn>
+                                        <p:tgtEl>
+                                          <p:spTgt spid="23"/>
+                                        </p:tgtEl>
+                                        <p:attrNameLst>
+                                          <p:attrName>style.visibility</p:attrName>
+                                        </p:attrNameLst>
+                                      </p:cBhvr>
+                                      <p:to>
+                                        <p:strVal val="visible"/>
+                                      </p:to>
+                                    </p:set>
+                                    <p:animEffect transition="in" filter="fade">
+                                      <p:cBhvr>
+                                        <p:cTn id="22" dur="500"/>
+                                        <p:tgtEl>
+                                          <p:spTgt spid="23"/>
+                                        </p:tgtEl>
+                                      </p:cBhvr>
+                                    </p:animEffect>
+                                  </p:childTnLst>
+                                </p:cTn>
+                              </p:par>
+                            </p:childTnLst>
+                          </p:cTn>
+                        </p:par>
+                      </p:childTnLst>
+                    </p:cTn>
+                  </p:par>
+                  <p:par>
+                    <p:cTn id="23" fill="hold">
+                      <p:stCondLst>
+                        <p:cond delay="indefinite"/>
+                      </p:stCondLst>
+                      <p:childTnLst>
+                        <p:par>
+                          <p:cTn id="24" fill="hold">
+                            <p:stCondLst>
+                              <p:cond delay="0"/>
+                            </p:stCondLst>
+                            <p:childTnLst>
+                              <p:par>
+                                <p:cTn id="25" presetID="10" presetClass="entr" presetSubtype="0" fill="hold" grpId="0" nodeType="clickEffect">
+                                  <p:stCondLst>
+                                    <p:cond delay="0"/>
+                                  </p:stCondLst>
+                                  <p:childTnLst>
+                                    <p:set>
+                                      <p:cBhvr>
+                                        <p:cTn id="26" dur="1" fill="hold">
+                                          <p:stCondLst>
+                                            <p:cond delay="0"/>
+                                          </p:stCondLst>
+                                        </p:cTn>
+                                        <p:tgtEl>
+                                          <p:spTgt spid="27"/>
+                                        </p:tgtEl>
+                                        <p:attrNameLst>
+                                          <p:attrName>style.visibility</p:attrName>
+                                        </p:attrNameLst>
+                                      </p:cBhvr>
+                                      <p:to>
+                                        <p:strVal val="visible"/>
+                                      </p:to>
+                                    </p:set>
+                                    <p:animEffect transition="in" filter="fade">
+                                      <p:cBhvr>
+                                        <p:cTn id="27" dur="500"/>
+                                        <p:tgtEl>
+                                          <p:spTgt spid="27"/>
+                                        </p:tgtEl>
+                                      </p:cBhvr>
+                                    </p:animEffect>
+                                  </p:childTnLst>
+                                </p:cTn>
+                              </p:par>
+                            </p:childTnLst>
+                          </p:cTn>
+                        </p:par>
+                      </p:childTnLst>
+                    </p:cTn>
+                  </p:par>
+                  <p:par>
+                    <p:cTn id="28" fill="hold">
+                      <p:stCondLst>
+                        <p:cond delay="indefinite"/>
+                      </p:stCondLst>
+                      <p:childTnLst>
+                        <p:par>
+                          <p:cTn id="29" fill="hold">
+                            <p:stCondLst>
+                              <p:cond delay="0"/>
+                            </p:stCondLst>
+                            <p:childTnLst>
+                              <p:par>
+                                <p:cTn id="30" presetID="10" presetClass="entr" presetSubtype="0" fill="hold" grpId="0" nodeType="clickEffect">
+                                  <p:stCondLst>
+                                    <p:cond delay="0"/>
+                                  </p:stCondLst>
+                                  <p:childTnLst>
+                                    <p:set>
+                                      <p:cBhvr>
+                                        <p:cTn id="31" dur="1" fill="hold">
+                                          <p:stCondLst>
+                                            <p:cond delay="0"/>
+                                          </p:stCondLst>
+                                        </p:cTn>
+                                        <p:tgtEl>
+                                          <p:spTgt spid="31"/>
+                                        </p:tgtEl>
+                                        <p:attrNameLst>
+                                          <p:attrName>style.visibility</p:attrName>
+                                        </p:attrNameLst>
+                                      </p:cBhvr>
+                                      <p:to>
+                                        <p:strVal val="visible"/>
+                                      </p:to>
+                                    </p:set>
+                                    <p:animEffect transition="in" filter="fade">
+                                      <p:cBhvr>
+                                        <p:cTn id="32" dur="500"/>
+                                        <p:tgtEl>
+                                          <p:spTgt spid="31"/>
+                                        </p:tgtEl>
+                                      </p:cBhvr>
+                                    </p:animEffect>
+                                  </p:childTnLst>
+                                </p:cTn>
+                              </p:par>
+                            </p:childTnLst>
+                          </p:cTn>
+                        </p:par>
+                      </p:childTnLst>
+                    </p:cTn>
+                  </p:par>
+                  <p:par>
+                    <p:cTn id="33" fill="hold">
+                      <p:stCondLst>
+                        <p:cond delay="indefinite"/>
+                      </p:stCondLst>
+                      <p:childTnLst>
+                        <p:par>
+                          <p:cTn id="34" fill="hold">
+                            <p:stCondLst>
+                              <p:cond delay="0"/>
+                            </p:stCondLst>
+                            <p:childTnLst>
+                              <p:par>
+                                <p:cTn id="35" presetID="10" presetClass="entr" presetSubtype="0" fill="hold" grpId="0" nodeType="clickEffect">
+                                  <p:stCondLst>
+                                    <p:cond delay="0"/>
+                                  </p:stCondLst>
+                                  <p:childTnLst>
+                                    <p:set>
+                                      <p:cBhvr>
+                                        <p:cTn id="36" dur="1" fill="hold">
+                                          <p:stCondLst>
+                                            <p:cond delay="0"/>
+                                          </p:stCondLst>
+                                        </p:cTn>
+                                        <p:tgtEl>
+                                          <p:spTgt spid="35"/>
+                                        </p:tgtEl>
+                                        <p:attrNameLst>
+                                          <p:attrName>style.visibility</p:attrName>
+                                        </p:attrNameLst>
+                                      </p:cBhvr>
+                                      <p:to>
+                                        <p:strVal val="visible"/>
+                                      </p:to>
+                                    </p:set>
+                                    <p:animEffect transition="in" filter="fade">
+                                      <p:cBhvr>
+                                        <p:cTn id="37" dur="500"/>
+                                        <p:tgtEl>
+                                          <p:spTgt spid="35"/>
+                                        </p:tgtEl>
+                                      </p:cBhvr>
+                                    </p:animEffect>
+                                  </p:childTnLst>
+                                </p:cTn>
+                              </p:par>
+                            </p:childTnLst>
+                          </p:cTn>
+                        </p:par>
+                      </p:childTnLst>
+                    </p:cTn>
+                  </p:par>
+                  <p:par>
+                    <p:cTn id="38" fill="hold">
+                      <p:stCondLst>
+                        <p:cond delay="indefinite"/>
+                      </p:stCondLst>
+                      <p:childTnLst>
+                        <p:par>
+                          <p:cTn id="39" fill="hold">
+                            <p:stCondLst>
+                              <p:cond delay="0"/>
+                            </p:stCondLst>
+                            <p:childTnLst>
+                              <p:par>
+                                <p:cTn id="40" presetID="10" presetClass="entr" presetSubtype="0" fill="hold" grpId="0" nodeType="clickEffect">
+                                  <p:stCondLst>
+                                    <p:cond delay="0"/>
+                                  </p:stCondLst>
+                                  <p:childTnLst>
+                                    <p:set>
+                                      <p:cBhvr>
+                                        <p:cTn id="41" dur="1" fill="hold">
+                                          <p:stCondLst>
+                                            <p:cond delay="0"/>
+                                          </p:stCondLst>
+                                        </p:cTn>
+                                        <p:tgtEl>
+                                          <p:spTgt spid="39"/>
+                                        </p:tgtEl>
+                                        <p:attrNameLst>
+                                          <p:attrName>style.visibility</p:attrName>
+                                        </p:attrNameLst>
+                                      </p:cBhvr>
+                                      <p:to>
+                                        <p:strVal val="visible"/>
+                                      </p:to>
+                                    </p:set>
+                                    <p:animEffect transition="in" filter="fade">
+                                      <p:cBhvr>
+                                        <p:cTn id="42" dur="500"/>
+                                        <p:tgtEl>
+                                          <p:spTgt spid="39"/>
+                                        </p:tgtEl>
+                                      </p:cBhvr>
+                                    </p:animEffect>
+                                  </p:childTnLst>
+                                </p:cTn>
+                              </p:par>
+                            </p:childTnLst>
+                          </p:cTn>
+                        </p:par>
+                      </p:childTnLst>
+                    </p:cTn>
+                  </p:par>
+                  <p:par>
+                    <p:cTn id="43" fill="hold">
+                      <p:stCondLst>
+                        <p:cond delay="indefinite"/>
+                      </p:stCondLst>
+                      <p:childTnLst>
+                        <p:par>
+                          <p:cTn id="44" fill="hold">
+                            <p:stCondLst>
+                              <p:cond delay="0"/>
+                            </p:stCondLst>
+                            <p:childTnLst>
+                              <p:par>
+                                <p:cTn id="45" presetID="10" presetClass="entr" presetSubtype="0" fill="hold" grpId="0" nodeType="clickEffect">
+                                  <p:stCondLst>
+                                    <p:cond delay="0"/>
+                                  </p:stCondLst>
+                                  <p:childTnLst>
+                                    <p:set>
+                                      <p:cBhvr>
+                                        <p:cTn id="46" dur="1" fill="hold">
+                                          <p:stCondLst>
+                                            <p:cond delay="0"/>
+                                          </p:stCondLst>
+                                        </p:cTn>
+                                        <p:tgtEl>
+                                          <p:spTgt spid="44"/>
+                                        </p:tgtEl>
+                                        <p:attrNameLst>
+                                          <p:attrName>style.visibility</p:attrName>
+                                        </p:attrNameLst>
+                                      </p:cBhvr>
+                                      <p:to>
+                                        <p:strVal val="visible"/>
+                                      </p:to>
+                                    </p:set>
+                                    <p:animEffect transition="in" filter="fade">
+                                      <p:cBhvr>
+                                        <p:cTn id="47" dur="500"/>
+                                        <p:tgtEl>
+                                          <p:spTgt spid="44"/>
+                                        </p:tgtEl>
+                                      </p:cBhvr>
+                                    </p:animEffect>
+                                  </p:childTnLst>
+                                </p:cTn>
+                              </p:par>
+                            </p:childTnLst>
+                          </p:cTn>
+                        </p:par>
+                      </p:childTnLst>
+                    </p:cTn>
+                  </p:par>
+                  <p:par>
+                    <p:cTn id="48" fill="hold">
+                      <p:stCondLst>
+                        <p:cond delay="indefinite"/>
+                      </p:stCondLst>
+                      <p:childTnLst>
+                        <p:par>
+                          <p:cTn id="49" fill="hold">
+                            <p:stCondLst>
+                              <p:cond delay="0"/>
+                            </p:stCondLst>
+                            <p:childTnLst>
+                              <p:par>
+                                <p:cTn id="50" presetID="10" presetClass="entr" presetSubtype="0" fill="hold" grpId="0" nodeType="clickEffect">
+                                  <p:stCondLst>
+                                    <p:cond delay="0"/>
+                                  </p:stCondLst>
+                                  <p:childTnLst>
+                                    <p:set>
+                                      <p:cBhvr>
+                                        <p:cTn id="51" dur="1" fill="hold">
+                                          <p:stCondLst>
+                                            <p:cond delay="0"/>
+                                          </p:stCondLst>
+                                        </p:cTn>
+                                        <p:tgtEl>
+                                          <p:spTgt spid="45"/>
+                                        </p:tgtEl>
+                                        <p:attrNameLst>
+                                          <p:attrName>style.visibility</p:attrName>
+                                        </p:attrNameLst>
+                                      </p:cBhvr>
+                                      <p:to>
+                                        <p:strVal val="visible"/>
+                                      </p:to>
+                                    </p:set>
+                                    <p:animEffect transition="in" filter="fade">
+                                      <p:cBhvr>
+                                        <p:cTn id="52" dur="500"/>
+                                        <p:tgtEl>
+                                          <p:spTgt spid="45"/>
+                                        </p:tgtEl>
+                                      </p:cBhvr>
+                                    </p:animEffect>
+                                  </p:childTnLst>
+                                </p:cTn>
+                              </p:par>
+                            </p:childTnLst>
+                          </p:cTn>
+                        </p:par>
+                      </p:childTnLst>
+                    </p:cTn>
+                  </p:par>
+                </p:childTnLst>
               </p:cTn>
               <p:prevCondLst>
                 <p:cond evt="onPrev" delay="0">
@@ -56490,542 +57012,6 @@
                 <p:cond evt="onNext" delay="0">
                   <p:tgtEl>
                     <p:sldTgt/>
-                  </p:tgtEl>
-                </p:cond>
-              </p:nextCondLst>
-            </p:seq>
-            <p:seq concurrent="1" nextAc="seek">
-              <p:cTn id="5" restart="whenNotActive" fill="hold" nodeType="interactiveSeq">
-                <p:stCondLst>
-                  <p:cond evt="onClick" delay="0">
-                    <p:tgtEl>
-                      <p:spTgt spid="8"/>
-                    </p:tgtEl>
-                  </p:cond>
-                </p:stCondLst>
-                <p:endSync evt="end" delay="0">
-                  <p:rtn val="all"/>
-                </p:endSync>
-                <p:childTnLst>
-                  <p:par>
-                    <p:cTn id="6" fill="hold">
-                      <p:stCondLst>
-                        <p:cond delay="0"/>
-                      </p:stCondLst>
-                      <p:childTnLst>
-                        <p:par>
-                          <p:cTn id="7" presetID="10" presetClass="entr" presetSubtype="0" fill="hold" grpId="0" nodeType="clickEffect">
-                            <p:stCondLst>
-                              <p:cond delay="0"/>
-                            </p:stCondLst>
-                            <p:childTnLst>
-                              <p:set>
-                                <p:cBhvr>
-                                  <p:cTn id="8" dur="1" fill="hold">
-                                    <p:stCondLst>
-                                      <p:cond delay="0"/>
-                                    </p:stCondLst>
-                                  </p:cTn>
-                                  <p:tgtEl>
-                                    <p:spTgt spid="11"/>
-                                  </p:tgtEl>
-                                  <p:attrNameLst>
-                                    <p:attrName>style.visibility</p:attrName>
-                                  </p:attrNameLst>
-                                </p:cBhvr>
-                                <p:to>
-                                  <p:strVal val="visible"/>
-                                </p:to>
-                              </p:set>
-                              <p:animEffect transition="in" filter="fade">
-                                <p:cBhvr>
-                                  <p:cTn id="9" dur="400"/>
-                                  <p:tgtEl>
-                                    <p:spTgt spid="11"/>
-                                  </p:tgtEl>
-                                </p:cBhvr>
-                              </p:animEffect>
-                            </p:childTnLst>
-                          </p:cTn>
-                        </p:par>
-                      </p:childTnLst>
-                    </p:cTn>
-                  </p:par>
-                </p:childTnLst>
-              </p:cTn>
-              <p:nextCondLst>
-                <p:cond evt="onClick" delay="0">
-                  <p:tgtEl>
-                    <p:spTgt spid="8"/>
-                  </p:tgtEl>
-                </p:cond>
-              </p:nextCondLst>
-            </p:seq>
-            <p:seq concurrent="1" nextAc="seek">
-              <p:cTn id="15" restart="whenNotActive" fill="hold" nodeType="interactiveSeq">
-                <p:stCondLst>
-                  <p:cond evt="onClick" delay="0">
-                    <p:tgtEl>
-                      <p:spTgt spid="12"/>
-                    </p:tgtEl>
-                  </p:cond>
-                </p:stCondLst>
-                <p:endSync evt="end" delay="0">
-                  <p:rtn val="all"/>
-                </p:endSync>
-                <p:childTnLst>
-                  <p:par>
-                    <p:cTn id="16" fill="hold">
-                      <p:stCondLst>
-                        <p:cond delay="0"/>
-                      </p:stCondLst>
-                      <p:childTnLst>
-                        <p:par>
-                          <p:cTn id="17" presetID="10" presetClass="entr" presetSubtype="0" fill="hold" grpId="0" nodeType="clickEffect">
-                            <p:stCondLst>
-                              <p:cond delay="0"/>
-                            </p:stCondLst>
-                            <p:childTnLst>
-                              <p:set>
-                                <p:cBhvr>
-                                  <p:cTn id="18" dur="1" fill="hold">
-                                    <p:stCondLst>
-                                      <p:cond delay="0"/>
-                                    </p:stCondLst>
-                                  </p:cTn>
-                                  <p:tgtEl>
-                                    <p:spTgt spid="15"/>
-                                  </p:tgtEl>
-                                  <p:attrNameLst>
-                                    <p:attrName>style.visibility</p:attrName>
-                                  </p:attrNameLst>
-                                </p:cBhvr>
-                                <p:to>
-                                  <p:strVal val="visible"/>
-                                </p:to>
-                              </p:set>
-                              <p:animEffect transition="in" filter="fade">
-                                <p:cBhvr>
-                                  <p:cTn id="19" dur="400"/>
-                                  <p:tgtEl>
-                                    <p:spTgt spid="15"/>
-                                  </p:tgtEl>
-                                </p:cBhvr>
-                              </p:animEffect>
-                            </p:childTnLst>
-                          </p:cTn>
-                        </p:par>
-                      </p:childTnLst>
-                    </p:cTn>
-                  </p:par>
-                </p:childTnLst>
-              </p:cTn>
-              <p:nextCondLst>
-                <p:cond evt="onClick" delay="0">
-                  <p:tgtEl>
-                    <p:spTgt spid="12"/>
-                  </p:tgtEl>
-                </p:cond>
-              </p:nextCondLst>
-            </p:seq>
-            <p:seq concurrent="1" nextAc="seek">
-              <p:cTn id="25" restart="whenNotActive" fill="hold" nodeType="interactiveSeq">
-                <p:stCondLst>
-                  <p:cond evt="onClick" delay="0">
-                    <p:tgtEl>
-                      <p:spTgt spid="16"/>
-                    </p:tgtEl>
-                  </p:cond>
-                </p:stCondLst>
-                <p:endSync evt="end" delay="0">
-                  <p:rtn val="all"/>
-                </p:endSync>
-                <p:childTnLst>
-                  <p:par>
-                    <p:cTn id="26" fill="hold">
-                      <p:stCondLst>
-                        <p:cond delay="0"/>
-                      </p:stCondLst>
-                      <p:childTnLst>
-                        <p:par>
-                          <p:cTn id="27" presetID="10" presetClass="entr" presetSubtype="0" fill="hold" grpId="0" nodeType="clickEffect">
-                            <p:stCondLst>
-                              <p:cond delay="0"/>
-                            </p:stCondLst>
-                            <p:childTnLst>
-                              <p:set>
-                                <p:cBhvr>
-                                  <p:cTn id="28" dur="1" fill="hold">
-                                    <p:stCondLst>
-                                      <p:cond delay="0"/>
-                                    </p:stCondLst>
-                                  </p:cTn>
-                                  <p:tgtEl>
-                                    <p:spTgt spid="19"/>
-                                  </p:tgtEl>
-                                  <p:attrNameLst>
-                                    <p:attrName>style.visibility</p:attrName>
-                                  </p:attrNameLst>
-                                </p:cBhvr>
-                                <p:to>
-                                  <p:strVal val="visible"/>
-                                </p:to>
-                              </p:set>
-                              <p:animEffect transition="in" filter="fade">
-                                <p:cBhvr>
-                                  <p:cTn id="29" dur="400"/>
-                                  <p:tgtEl>
-                                    <p:spTgt spid="19"/>
-                                  </p:tgtEl>
-                                </p:cBhvr>
-                              </p:animEffect>
-                            </p:childTnLst>
-                          </p:cTn>
-                        </p:par>
-                      </p:childTnLst>
-                    </p:cTn>
-                  </p:par>
-                </p:childTnLst>
-              </p:cTn>
-              <p:nextCondLst>
-                <p:cond evt="onClick" delay="0">
-                  <p:tgtEl>
-                    <p:spTgt spid="16"/>
-                  </p:tgtEl>
-                </p:cond>
-              </p:nextCondLst>
-            </p:seq>
-            <p:seq concurrent="1" nextAc="seek">
-              <p:cTn id="35" restart="whenNotActive" fill="hold" nodeType="interactiveSeq">
-                <p:stCondLst>
-                  <p:cond evt="onClick" delay="0">
-                    <p:tgtEl>
-                      <p:spTgt spid="20"/>
-                    </p:tgtEl>
-                  </p:cond>
-                </p:stCondLst>
-                <p:endSync evt="end" delay="0">
-                  <p:rtn val="all"/>
-                </p:endSync>
-                <p:childTnLst>
-                  <p:par>
-                    <p:cTn id="36" fill="hold">
-                      <p:stCondLst>
-                        <p:cond delay="0"/>
-                      </p:stCondLst>
-                      <p:childTnLst>
-                        <p:par>
-                          <p:cTn id="37" presetID="10" presetClass="entr" presetSubtype="0" fill="hold" grpId="0" nodeType="clickEffect">
-                            <p:stCondLst>
-                              <p:cond delay="0"/>
-                            </p:stCondLst>
-                            <p:childTnLst>
-                              <p:set>
-                                <p:cBhvr>
-                                  <p:cTn id="38" dur="1" fill="hold">
-                                    <p:stCondLst>
-                                      <p:cond delay="0"/>
-                                    </p:stCondLst>
-                                  </p:cTn>
-                                  <p:tgtEl>
-                                    <p:spTgt spid="23"/>
-                                  </p:tgtEl>
-                                  <p:attrNameLst>
-                                    <p:attrName>style.visibility</p:attrName>
-                                  </p:attrNameLst>
-                                </p:cBhvr>
-                                <p:to>
-                                  <p:strVal val="visible"/>
-                                </p:to>
-                              </p:set>
-                              <p:animEffect transition="in" filter="fade">
-                                <p:cBhvr>
-                                  <p:cTn id="39" dur="400"/>
-                                  <p:tgtEl>
-                                    <p:spTgt spid="23"/>
-                                  </p:tgtEl>
-                                </p:cBhvr>
-                              </p:animEffect>
-                            </p:childTnLst>
-                          </p:cTn>
-                        </p:par>
-                      </p:childTnLst>
-                    </p:cTn>
-                  </p:par>
-                </p:childTnLst>
-              </p:cTn>
-              <p:nextCondLst>
-                <p:cond evt="onClick" delay="0">
-                  <p:tgtEl>
-                    <p:spTgt spid="20"/>
-                  </p:tgtEl>
-                </p:cond>
-              </p:nextCondLst>
-            </p:seq>
-            <p:seq concurrent="1" nextAc="seek">
-              <p:cTn id="45" restart="whenNotActive" fill="hold" nodeType="interactiveSeq">
-                <p:stCondLst>
-                  <p:cond evt="onClick" delay="0">
-                    <p:tgtEl>
-                      <p:spTgt spid="24"/>
-                    </p:tgtEl>
-                  </p:cond>
-                </p:stCondLst>
-                <p:endSync evt="end" delay="0">
-                  <p:rtn val="all"/>
-                </p:endSync>
-                <p:childTnLst>
-                  <p:par>
-                    <p:cTn id="46" fill="hold">
-                      <p:stCondLst>
-                        <p:cond delay="0"/>
-                      </p:stCondLst>
-                      <p:childTnLst>
-                        <p:par>
-                          <p:cTn id="47" presetID="10" presetClass="entr" presetSubtype="0" fill="hold" grpId="0" nodeType="clickEffect">
-                            <p:stCondLst>
-                              <p:cond delay="0"/>
-                            </p:stCondLst>
-                            <p:childTnLst>
-                              <p:set>
-                                <p:cBhvr>
-                                  <p:cTn id="48" dur="1" fill="hold">
-                                    <p:stCondLst>
-                                      <p:cond delay="0"/>
-                                    </p:stCondLst>
-                                  </p:cTn>
-                                  <p:tgtEl>
-                                    <p:spTgt spid="27"/>
-                                  </p:tgtEl>
-                                  <p:attrNameLst>
-                                    <p:attrName>style.visibility</p:attrName>
-                                  </p:attrNameLst>
-                                </p:cBhvr>
-                                <p:to>
-                                  <p:strVal val="visible"/>
-                                </p:to>
-                              </p:set>
-                              <p:animEffect transition="in" filter="fade">
-                                <p:cBhvr>
-                                  <p:cTn id="49" dur="400"/>
-                                  <p:tgtEl>
-                                    <p:spTgt spid="27"/>
-                                  </p:tgtEl>
-                                </p:cBhvr>
-                              </p:animEffect>
-                            </p:childTnLst>
-                          </p:cTn>
-                        </p:par>
-                      </p:childTnLst>
-                    </p:cTn>
-                  </p:par>
-                </p:childTnLst>
-              </p:cTn>
-              <p:nextCondLst>
-                <p:cond evt="onClick" delay="0">
-                  <p:tgtEl>
-                    <p:spTgt spid="24"/>
-                  </p:tgtEl>
-                </p:cond>
-              </p:nextCondLst>
-            </p:seq>
-            <p:seq concurrent="1" nextAc="seek">
-              <p:cTn id="55" restart="whenNotActive" fill="hold" nodeType="interactiveSeq">
-                <p:stCondLst>
-                  <p:cond evt="onClick" delay="0">
-                    <p:tgtEl>
-                      <p:spTgt spid="28"/>
-                    </p:tgtEl>
-                  </p:cond>
-                </p:stCondLst>
-                <p:endSync evt="end" delay="0">
-                  <p:rtn val="all"/>
-                </p:endSync>
-                <p:childTnLst>
-                  <p:par>
-                    <p:cTn id="56" fill="hold">
-                      <p:stCondLst>
-                        <p:cond delay="0"/>
-                      </p:stCondLst>
-                      <p:childTnLst>
-                        <p:par>
-                          <p:cTn id="57" presetID="10" presetClass="entr" presetSubtype="0" fill="hold" grpId="0" nodeType="clickEffect">
-                            <p:stCondLst>
-                              <p:cond delay="0"/>
-                            </p:stCondLst>
-                            <p:childTnLst>
-                              <p:set>
-                                <p:cBhvr>
-                                  <p:cTn id="58" dur="1" fill="hold">
-                                    <p:stCondLst>
-                                      <p:cond delay="0"/>
-                                    </p:stCondLst>
-                                  </p:cTn>
-                                  <p:tgtEl>
-                                    <p:spTgt spid="31"/>
-                                  </p:tgtEl>
-                                  <p:attrNameLst>
-                                    <p:attrName>style.visibility</p:attrName>
-                                  </p:attrNameLst>
-                                </p:cBhvr>
-                                <p:to>
-                                  <p:strVal val="visible"/>
-                                </p:to>
-                              </p:set>
-                              <p:animEffect transition="in" filter="fade">
-                                <p:cBhvr>
-                                  <p:cTn id="59" dur="400"/>
-                                  <p:tgtEl>
-                                    <p:spTgt spid="31"/>
-                                  </p:tgtEl>
-                                </p:cBhvr>
-                              </p:animEffect>
-                            </p:childTnLst>
-                          </p:cTn>
-                        </p:par>
-                      </p:childTnLst>
-                    </p:cTn>
-                  </p:par>
-                </p:childTnLst>
-              </p:cTn>
-              <p:nextCondLst>
-                <p:cond evt="onClick" delay="0">
-                  <p:tgtEl>
-                    <p:spTgt spid="28"/>
-                  </p:tgtEl>
-                </p:cond>
-              </p:nextCondLst>
-            </p:seq>
-            <p:seq concurrent="1" nextAc="seek">
-              <p:cTn id="65" restart="whenNotActive" fill="hold" nodeType="interactiveSeq">
-                <p:stCondLst>
-                  <p:cond evt="onClick" delay="0">
-                    <p:tgtEl>
-                      <p:spTgt spid="32"/>
-                    </p:tgtEl>
-                  </p:cond>
-                </p:stCondLst>
-                <p:endSync evt="end" delay="0">
-                  <p:rtn val="all"/>
-                </p:endSync>
-                <p:childTnLst>
-                  <p:par>
-                    <p:cTn id="66" fill="hold">
-                      <p:stCondLst>
-                        <p:cond delay="0"/>
-                      </p:stCondLst>
-                      <p:childTnLst>
-                        <p:par>
-                          <p:cTn id="67" presetID="10" presetClass="entr" presetSubtype="0" fill="hold" grpId="0" nodeType="clickEffect">
-                            <p:stCondLst>
-                              <p:cond delay="0"/>
-                            </p:stCondLst>
-                            <p:childTnLst>
-                              <p:set>
-                                <p:cBhvr>
-                                  <p:cTn id="68" dur="1" fill="hold">
-                                    <p:stCondLst>
-                                      <p:cond delay="0"/>
-                                    </p:stCondLst>
-                                  </p:cTn>
-                                  <p:tgtEl>
-                                    <p:spTgt spid="35"/>
-                                  </p:tgtEl>
-                                  <p:attrNameLst>
-                                    <p:attrName>style.visibility</p:attrName>
-                                  </p:attrNameLst>
-                                </p:cBhvr>
-                                <p:to>
-                                  <p:strVal val="visible"/>
-                                </p:to>
-                              </p:set>
-                              <p:animEffect transition="in" filter="fade">
-                                <p:cBhvr>
-                                  <p:cTn id="69" dur="400"/>
-                                  <p:tgtEl>
-                                    <p:spTgt spid="35"/>
-                                  </p:tgtEl>
-                                </p:cBhvr>
-                              </p:animEffect>
-                            </p:childTnLst>
-                          </p:cTn>
-                        </p:par>
-                      </p:childTnLst>
-                    </p:cTn>
-                  </p:par>
-                </p:childTnLst>
-              </p:cTn>
-              <p:nextCondLst>
-                <p:cond evt="onClick" delay="0">
-                  <p:tgtEl>
-                    <p:spTgt spid="32"/>
-                  </p:tgtEl>
-                </p:cond>
-              </p:nextCondLst>
-            </p:seq>
-            <p:seq concurrent="1" nextAc="seek">
-              <p:cTn id="75" restart="whenNotActive" fill="hold" nodeType="interactiveSeq">
-                <p:stCondLst>
-                  <p:cond evt="onClick" delay="0">
-                    <p:tgtEl>
-                      <p:spTgt spid="36"/>
-                    </p:tgtEl>
-                  </p:cond>
-                </p:stCondLst>
-                <p:endSync evt="end" delay="0">
-                  <p:rtn val="all"/>
-                </p:endSync>
-                <p:childTnLst>
-                  <p:par>
-                    <p:cTn id="76" fill="hold">
-                      <p:stCondLst>
-                        <p:cond delay="0"/>
-                      </p:stCondLst>
-                      <p:childTnLst>
-                        <p:par>
-                          <p:cTn id="77" presetID="10" presetClass="entr" presetSubtype="0" fill="hold" grpId="0" nodeType="clickEffect">
-                            <p:stCondLst>
-                              <p:cond delay="0"/>
-                            </p:stCondLst>
-                            <p:childTnLst>
-                              <p:set>
-                                <p:cBhvr>
-                                  <p:cTn id="78" dur="1" fill="hold">
-                                    <p:stCondLst>
-                                      <p:cond delay="0"/>
-                                    </p:stCondLst>
-                                  </p:cTn>
-                                  <p:tgtEl>
-                                    <p:spTgt spid="39"/>
-                                  </p:tgtEl>
-                                  <p:attrNameLst>
-                                    <p:attrName>style.visibility</p:attrName>
-                                  </p:attrNameLst>
-                                </p:cBhvr>
-                                <p:to>
-                                  <p:strVal val="visible"/>
-                                </p:to>
-                              </p:set>
-                              <p:animEffect transition="in" filter="fade">
-                                <p:cBhvr>
-                                  <p:cTn id="79" dur="400"/>
-                                  <p:tgtEl>
-                                    <p:spTgt spid="39"/>
-                                  </p:tgtEl>
-                                </p:cBhvr>
-                              </p:animEffect>
-                            </p:childTnLst>
-                          </p:cTn>
-                        </p:par>
-                      </p:childTnLst>
-                    </p:cTn>
-                  </p:par>
-                </p:childTnLst>
-              </p:cTn>
-              <p:nextCondLst>
-                <p:cond evt="onClick" delay="0">
-                  <p:tgtEl>
-                    <p:spTgt spid="36"/>
                   </p:tgtEl>
                 </p:cond>
               </p:nextCondLst>

--- a/03-build/pptx/C5_U0_docente.pptx
+++ b/03-build/pptx/C5_U0_docente.pptx
@@ -22318,17 +22318,164 @@
       </p:sp>
       <p:sp>
         <p:nvSpPr>
-          <p:cNvPr id="67" name="Rectangle 66"/>
+          <p:cNvPr id="67" name="Rounded Rectangle 66"/>
           <p:cNvSpPr/>
           <p:nvPr/>
         </p:nvSpPr>
         <p:spPr>
           <a:xfrm>
-            <a:off x="0" y="6547104"/>
-            <a:ext cx="12191695" cy="310896"/>
-          </a:xfrm>
-          <a:prstGeom prst="rect">
-            <a:avLst/>
+            <a:off x="457200" y="5559552"/>
+            <a:ext cx="2474366" cy="292608"/>
+          </a:xfrm>
+          <a:prstGeom prst="roundRect">
+            <a:avLst>
+              <a:gd name="adj" fmla="val 50000"/>
+            </a:avLst>
+          </a:prstGeom>
+          <a:solidFill>
+            <a:srgbClr val="E4F4EE"/>
+          </a:solidFill>
+          <a:ln>
+            <a:noFill/>
+          </a:ln>
+          <a:effectLst/>
+        </p:spPr>
+        <p:style>
+          <a:lnRef idx="1">
+            <a:schemeClr val="accent1"/>
+          </a:lnRef>
+          <a:fillRef idx="3">
+            <a:schemeClr val="accent1"/>
+          </a:fillRef>
+          <a:effectRef idx="2">
+            <a:schemeClr val="accent1"/>
+          </a:effectRef>
+          <a:fontRef idx="minor">
+            <a:schemeClr val="lt1"/>
+          </a:fontRef>
+        </p:style>
+        <p:txBody>
+          <a:bodyPr rtlCol="0" anchor="ctr" wrap="none" lIns="88900" rIns="88900" tIns="12700" bIns="12700"/>
+          <a:lstStyle/>
+          <a:p>
+            <a:pPr algn="ctr"/>
+            <a:r>
+              <a:rPr sz="1050" b="1">
+                <a:solidFill>
+                  <a:srgbClr val="157355"/>
+                </a:solidFill>
+                <a:latin typeface="Inter"/>
+              </a:rPr>
+              <a:t>👀 LEER · comprensión lectora</a:t>
+            </a:r>
+          </a:p>
+        </p:txBody>
+      </p:sp>
+      <p:sp>
+        <p:nvSpPr>
+          <p:cNvPr id="68" name="TextBox 67"/>
+          <p:cNvSpPr txBox="1"/>
+          <p:nvPr/>
+        </p:nvSpPr>
+        <p:spPr>
+          <a:xfrm>
+            <a:off x="457200" y="5943600"/>
+            <a:ext cx="7315200" cy="457200"/>
+          </a:xfrm>
+          <a:prstGeom prst="rect">
+            <a:avLst/>
+          </a:prstGeom>
+          <a:noFill/>
+        </p:spPr>
+        <p:txBody>
+          <a:bodyPr wrap="square" anchor="t" lIns="38100" rIns="38100" tIns="25400" bIns="25400">
+            <a:spAutoFit/>
+          </a:bodyPr>
+          <a:lstStyle/>
+          <a:p>
+            <a:pPr algn="l">
+              <a:lnSpc>
+                <a:spcPct val="106000"/>
+              </a:lnSpc>
+              <a:spcBef>
+                <a:spcPts val="0"/>
+              </a:spcBef>
+              <a:spcAft>
+                <a:spcPts val="200"/>
+              </a:spcAft>
+            </a:pPr>
+            <a:r>
+              <a:rPr sz="1100" b="0" i="0">
+                <a:solidFill>
+                  <a:srgbClr val="20242E"/>
+                </a:solidFill>
+                <a:latin typeface="Inter"/>
+              </a:rPr>
+              <a:t>V/F · Lee la lista: «En Brasil se habla español.»  </a:t>
+            </a:r>
+          </a:p>
+        </p:txBody>
+      </p:sp>
+      <p:sp>
+        <p:nvSpPr>
+          <p:cNvPr id="69" name="TextBox 68"/>
+          <p:cNvSpPr txBox="1"/>
+          <p:nvPr/>
+        </p:nvSpPr>
+        <p:spPr>
+          <a:xfrm>
+            <a:off x="5669280" y="5943600"/>
+            <a:ext cx="1920240" cy="457200"/>
+          </a:xfrm>
+          <a:prstGeom prst="rect">
+            <a:avLst/>
+          </a:prstGeom>
+          <a:noFill/>
+        </p:spPr>
+        <p:txBody>
+          <a:bodyPr wrap="square" anchor="ctr" lIns="38100" rIns="38100" tIns="25400" bIns="25400">
+            <a:spAutoFit/>
+          </a:bodyPr>
+          <a:lstStyle/>
+          <a:p>
+            <a:pPr algn="l">
+              <a:lnSpc>
+                <a:spcPct val="106000"/>
+              </a:lnSpc>
+              <a:spcBef>
+                <a:spcPts val="0"/>
+              </a:spcBef>
+              <a:spcAft>
+                <a:spcPts val="200"/>
+              </a:spcAft>
+            </a:pPr>
+            <a:r>
+              <a:rPr sz="1100" b="1" i="0">
+                <a:solidFill>
+                  <a:srgbClr val="DC2626"/>
+                </a:solidFill>
+                <a:latin typeface="Inter"/>
+              </a:rPr>
+              <a:t>→ FALSO (portugués)</a:t>
+            </a:r>
+          </a:p>
+        </p:txBody>
+      </p:sp>
+      <p:sp>
+        <p:nvSpPr>
+          <p:cNvPr id="70" name="Rounded Rectangle 69"/>
+          <p:cNvSpPr/>
+          <p:nvPr/>
+        </p:nvSpPr>
+        <p:spPr>
+          <a:xfrm>
+            <a:off x="7772400" y="5943600"/>
+            <a:ext cx="3147364" cy="292608"/>
+          </a:xfrm>
+          <a:prstGeom prst="roundRect">
+            <a:avLst>
+              <a:gd name="adj" fmla="val 50000"/>
+            </a:avLst>
           </a:prstGeom>
           <a:solidFill>
             <a:srgbClr val="F3EEE4"/>
@@ -22353,6 +22500,59 @@
           </a:fontRef>
         </p:style>
         <p:txBody>
+          <a:bodyPr rtlCol="0" anchor="ctr" wrap="none" lIns="88900" rIns="88900" tIns="12700" bIns="12700"/>
+          <a:lstStyle/>
+          <a:p>
+            <a:pPr algn="ctr"/>
+            <a:r>
+              <a:rPr sz="1000" b="1">
+                <a:solidFill>
+                  <a:srgbClr val="157355"/>
+                </a:solidFill>
+                <a:latin typeface="Inter"/>
+              </a:rPr>
+              <a:t>🔗 Online: mapa clicable + flip cards</a:t>
+            </a:r>
+          </a:p>
+        </p:txBody>
+      </p:sp>
+      <p:sp>
+        <p:nvSpPr>
+          <p:cNvPr id="71" name="Rectangle 70"/>
+          <p:cNvSpPr/>
+          <p:nvPr/>
+        </p:nvSpPr>
+        <p:spPr>
+          <a:xfrm>
+            <a:off x="0" y="6547104"/>
+            <a:ext cx="12191695" cy="310896"/>
+          </a:xfrm>
+          <a:prstGeom prst="rect">
+            <a:avLst/>
+          </a:prstGeom>
+          <a:solidFill>
+            <a:srgbClr val="F3EEE4"/>
+          </a:solidFill>
+          <a:ln>
+            <a:noFill/>
+          </a:ln>
+          <a:effectLst/>
+        </p:spPr>
+        <p:style>
+          <a:lnRef idx="1">
+            <a:schemeClr val="accent1"/>
+          </a:lnRef>
+          <a:fillRef idx="3">
+            <a:schemeClr val="accent1"/>
+          </a:fillRef>
+          <a:effectRef idx="2">
+            <a:schemeClr val="accent1"/>
+          </a:effectRef>
+          <a:fontRef idx="minor">
+            <a:schemeClr val="lt1"/>
+          </a:fontRef>
+        </p:style>
+        <p:txBody>
           <a:bodyPr rtlCol="0" anchor="ctr"/>
           <a:lstStyle/>
           <a:p>
@@ -22362,7 +22562,7 @@
       </p:sp>
       <p:sp>
         <p:nvSpPr>
-          <p:cNvPr id="68" name="TextBox 67"/>
+          <p:cNvPr id="72" name="TextBox 71"/>
           <p:cNvSpPr txBox="1"/>
           <p:nvPr/>
         </p:nvSpPr>
@@ -22416,7 +22616,7 @@
       </p:sp>
       <p:sp>
         <p:nvSpPr>
-          <p:cNvPr id="69" name="TextBox 68"/>
+          <p:cNvPr id="73" name="TextBox 72"/>
           <p:cNvSpPr txBox="1"/>
           <p:nvPr/>
         </p:nvSpPr>
@@ -22461,7 +22661,7 @@
       </p:sp>
       <p:sp>
         <p:nvSpPr>
-          <p:cNvPr id="70" name="TextBox 69"/>
+          <p:cNvPr id="74" name="TextBox 73"/>
           <p:cNvSpPr txBox="1"/>
           <p:nvPr/>
         </p:nvSpPr>
@@ -22509,6 +22709,89 @@
   <p:clrMapOvr>
     <a:masterClrMapping/>
   </p:clrMapOvr>
+  <p:timing>
+    <p:tnLst>
+      <p:par>
+        <p:cTn id="1" dur="indefinite" restart="never" nodeType="tmRoot">
+          <p:childTnLst>
+            <p:seq concurrent="1" nextAc="seek">
+              <p:cTn id="2" dur="indefinite" nodeType="mainSeq">
+                <p:childTnLst>
+                  <p:par>
+                    <p:cTn id="3" fill="hold">
+                      <p:stCondLst>
+                        <p:cond delay="indefinite"/>
+                      </p:stCondLst>
+                      <p:childTnLst>
+                        <p:par>
+                          <p:cTn id="4" fill="hold">
+                            <p:stCondLst>
+                              <p:cond delay="0"/>
+                            </p:stCondLst>
+                            <p:childTnLst>
+                              <p:par>
+                                <p:cTn id="5" presetID="10" presetClass="entr" presetSubtype="0" fill="hold" grpId="0" nodeType="clickEffect">
+                                  <p:stCondLst>
+                                    <p:cond delay="0"/>
+                                  </p:stCondLst>
+                                  <p:childTnLst>
+                                    <p:set>
+                                      <p:cBhvr>
+                                        <p:cTn id="6" dur="1" fill="hold">
+                                          <p:stCondLst>
+                                            <p:cond delay="0"/>
+                                          </p:stCondLst>
+                                        </p:cTn>
+                                        <p:tgtEl>
+                                          <p:spTgt spid="69"/>
+                                        </p:tgtEl>
+                                        <p:attrNameLst>
+                                          <p:attrName>style.visibility</p:attrName>
+                                        </p:attrNameLst>
+                                      </p:cBhvr>
+                                      <p:to>
+                                        <p:strVal val="visible"/>
+                                      </p:to>
+                                    </p:set>
+                                    <p:animEffect transition="in" filter="fade">
+                                      <p:cBhvr>
+                                        <p:cTn id="7" dur="500"/>
+                                        <p:tgtEl>
+                                          <p:spTgt spid="69"/>
+                                        </p:tgtEl>
+                                      </p:cBhvr>
+                                    </p:animEffect>
+                                  </p:childTnLst>
+                                </p:cTn>
+                              </p:par>
+                            </p:childTnLst>
+                          </p:cTn>
+                        </p:par>
+                      </p:childTnLst>
+                    </p:cTn>
+                  </p:par>
+                </p:childTnLst>
+              </p:cTn>
+              <p:prevCondLst>
+                <p:cond evt="onPrev" delay="0">
+                  <p:tgtEl>
+                    <p:sldTgt/>
+                  </p:tgtEl>
+                </p:cond>
+              </p:prevCondLst>
+              <p:nextCondLst>
+                <p:cond evt="onNext" delay="0">
+                  <p:tgtEl>
+                    <p:sldTgt/>
+                  </p:tgtEl>
+                </p:cond>
+              </p:nextCondLst>
+            </p:seq>
+          </p:childTnLst>
+        </p:cTn>
+      </p:par>
+    </p:tnLst>
+  </p:timing>
 </p:sld>
 </file>
 

--- a/03-build/pptx/C5_U0_docente.pptx
+++ b/03-build/pptx/C5_U0_docente.pptx
@@ -26,6 +26,8 @@
     <p:sldId id="274" r:id="rId26"/>
     <p:sldId id="275" r:id="rId27"/>
     <p:sldId id="276" r:id="rId28"/>
+    <p:sldId id="277" r:id="rId29"/>
+    <p:sldId id="278" r:id="rId30"/>
   </p:sldIdLst>
   <p:sldSz cx="12191695" cy="6858000" type="screen4x3"/>
   <p:notesSz cx="6858000" cy="9144000"/>
@@ -1184,7 +1186,38 @@
           <a:lstStyle/>
           <a:p>
             <a:r>
-              <a:t>TEACHER · FINAL_MISSION (idee 45 vier-vaardighedenmissie · idee 42 zelfopbouwende schrijftaak). Keten 3: model beluisteren → stappen ordenen → uitdrukkingen oefenen → eigen dialoog. Steun bouwt af per paso (MODEL→FRAME→CUE→GEEN). Succescriteria: spelt naam verstaanbaar · groet + afscheid · stelt 1 klasvraag. Feedback &amp; herneming: na paso 5 één verbeterpunt kiezen → opnieuw inspreken (RecordReflectRetry). 🔴 Spel-valstrikken NL→ES: W=uve doble, Y=i griega/ye, J=jota, H=hache (stom). Cross-ref: HTML VoiceMessageTask.</a:t>
+              <a:t>TEACHER · READING. Route: voorspellen → globaal → scannen → juist/fout MET BEWIJS → betekenis uit context → zelf schrijven. Laat de tekst staan tijdens het scannen: informatie terugvinden is lezen, uit het hoofd opzeggen is iets anders. Eis bij elke V/F de zin uit de tekst — dat is de stap die gokken onmogelijk maakt. Dezelfde tekst staat in de cursus (met schrijfruimte) en op de hub (zelfcorrigerend, met vertaalknop).</a:t>
+            </a:r>
+          </a:p>
+          <a:p/>
+          <a:p>
+            <a:r>
+              <a:t>— SOLUCIÓN (docent · presenter view) —</a:t>
+            </a:r>
+          </a:p>
+          <a:p>
+            <a:r>
+              <a:t>Escanear: 1) 14 · 2) 18 · 3) 0 · 4) 4</a:t>
+            </a:r>
+          </a:p>
+          <a:p>
+            <a:r>
+              <a:t>1) V — «¡Cero euros!»</a:t>
+            </a:r>
+          </a:p>
+          <a:p>
+            <a:r>
+              <a:t>2) F — «¿O cero español? ¡No importa!»</a:t>
+            </a:r>
+          </a:p>
+          <a:p>
+            <a:r>
+              <a:t>3) V — «Los martes y los jueves»</a:t>
+            </a:r>
+          </a:p>
+          <a:p>
+            <a:r>
+              <a:t>4) V — «Hay sitio para veinte»</a:t>
             </a:r>
           </a:p>
         </p:txBody>
@@ -1254,7 +1287,7 @@
           <a:lstStyle/>
           <a:p>
             <a:r>
-              <a:t>TEACHER · QUIZ (idee 17 Jeopardy-achtig · idee 18 oplopende reeks). Gemengde ophaal over de hele unit — geen aangeduide regel, leerling kiest zelf. Extra items: 'Pasaporte fonético' (Zaragoza·Málaga·Bogotá·Cáceres·Ecuador·Panamá hardop + familie benoemen) en 'Dictado mixto' (getal in cijfers+letters mét tilde). Sluit af met 'Check-in en la puerta' = generale repetitie van de Tarjeta de embarque.</a:t>
+              <a:t>TEACHER · LISTENING. Zes treden: situatie vooraf → globaal → vijf details → juist/fout MET BEWIJS → transcript pas ná de taken → productieve reactie. Speel het fragment minstens twee keer: één keer globaal (boeken dicht), daarna gericht. Het transcript staat op de hub en gaat daar pas open als de taken gedaan zijn — meelezen tijdens het luisteren maakt er een leesoefening van. Zolang er geen opname is, leest de computerstem het gesprek voor met een eigen stem per spreker. Noodroute: het fragment ook voorlezen kan, met twee leerlingen in de rollen.</a:t>
             </a:r>
           </a:p>
           <a:p/>
@@ -1265,12 +1298,22 @@
           </a:p>
           <a:p>
             <a:r>
-              <a:t>1 Perú (aguda -ú)   ·   2 de h zwijgt (hola = «ola»)   ·   3 cuarenta y siete</a:t>
-            </a:r>
-          </a:p>
-          <a:p>
-            <a:r>
-              <a:t>4 Encantada (Nina is een meisje — de uitgang volgt wie spreekt)   ·   5 casa = llana · México = esdrújula</a:t>
+              <a:t>Detalle: 1) B12 · 2) De Sevilla · 3) 16 · 4) 17 · 5) A las once</a:t>
+            </a:r>
+          </a:p>
+          <a:p>
+            <a:r>
+              <a:t>1) V — «Hablo neerlandés y un poco de español»</a:t>
+            </a:r>
+          </a:p>
+          <a:p>
+            <a:r>
+              <a:t>2) F — «Yo soy de Sevilla»</a:t>
+            </a:r>
+          </a:p>
+          <a:p>
+            <a:r>
+              <a:t>3) V — «Ese, a, eme»</a:t>
             </a:r>
           </a:p>
         </p:txBody>
@@ -1410,7 +1453,7 @@
           <a:lstStyle/>
           <a:p>
             <a:r>
-              <a:t>TEACHER · REPASO/FEEDBACK (idee 8 voortgangsmeter · idee 23 flashcards afbouw). SummaryQuadrant = spiekkaart. BESLIST 2026-07-26: het echte inoefen-repaso staat ONLINE (spellen + zelfcorrectie); print/PPT = spiekkaart + semáforo + 'Repasa jugando (online)'. Laat leerlingen het semáforo eerlijk inkleuren (receptief/productief apart, statusladder 0-5). Vooruitblik U1 «¿Quién eres?» (Madrid): naam &amp; e-mail spellen, edad met tener, saludos openen elke kennismaking (recycling).</a:t>
+              <a:t>TEACHER · FINAL_MISSION (idee 45 vier-vaardighedenmissie · idee 42 zelfopbouwende schrijftaak). Keten 3: model beluisteren → stappen ordenen → uitdrukkingen oefenen → eigen dialoog. Steun bouwt af per paso (MODEL→FRAME→CUE→GEEN). Succescriteria: spelt naam verstaanbaar · groet + afscheid · stelt 1 klasvraag. Feedback &amp; herneming: na paso 5 één verbeterpunt kiezen → opnieuw inspreken (RecordReflectRetry). 🔴 Spel-valstrikken NL→ES: W=uve doble, Y=i griega/ye, J=jota, H=hache (stom). Cross-ref: HTML VoiceMessageTask.</a:t>
             </a:r>
           </a:p>
         </p:txBody>
@@ -1436,6 +1479,162 @@
 </file>
 
 <file path=ppt/notesSlides/notesSlide21.xml><?xml version="1.0" encoding="utf-8"?>
+<p:notes xmlns:a="http://schemas.openxmlformats.org/drawingml/2006/main" xmlns:p="http://schemas.openxmlformats.org/presentationml/2006/main" xmlns:r="http://schemas.openxmlformats.org/officeDocument/2006/relationships">
+  <p:cSld>
+    <p:spTree>
+      <p:nvGrpSpPr>
+        <p:cNvPr id="1" name=""/>
+        <p:cNvGrpSpPr/>
+        <p:nvPr/>
+      </p:nvGrpSpPr>
+      <p:grpSpPr>
+        <a:xfrm>
+          <a:off x="0" y="0"/>
+          <a:ext cx="0" cy="0"/>
+          <a:chOff x="0" y="0"/>
+          <a:chExt cx="0" cy="0"/>
+        </a:xfrm>
+      </p:grpSpPr>
+      <p:sp>
+        <p:nvSpPr>
+          <p:cNvPr id="2" name="Slide Image Placeholder 1"/>
+          <p:cNvSpPr>
+            <a:spLocks noGrp="1"/>
+          </p:cNvSpPr>
+          <p:nvPr>
+            <p:ph type="sldImg" idx="2"/>
+          </p:nvPr>
+        </p:nvSpPr>
+        <p:spPr/>
+      </p:sp>
+      <p:sp>
+        <p:nvSpPr>
+          <p:cNvPr id="3" name="Notes Placeholder 2"/>
+          <p:cNvSpPr>
+            <a:spLocks noGrp="1"/>
+          </p:cNvSpPr>
+          <p:nvPr>
+            <p:ph type="body" idx="3" sz="quarter"/>
+          </p:nvPr>
+        </p:nvSpPr>
+        <p:spPr/>
+        <p:txBody>
+          <a:bodyPr/>
+          <a:lstStyle/>
+          <a:p>
+            <a:r>
+              <a:t>TEACHER · QUIZ (idee 17 Jeopardy-achtig · idee 18 oplopende reeks). Gemengde ophaal over de hele unit — geen aangeduide regel, leerling kiest zelf. Extra items: 'Pasaporte fonético' (Zaragoza·Málaga·Bogotá·Cáceres·Ecuador·Panamá hardop + familie benoemen) en 'Dictado mixto' (getal in cijfers+letters mét tilde). Sluit af met 'Check-in en la puerta' = generale repetitie van de Tarjeta de embarque.</a:t>
+            </a:r>
+          </a:p>
+          <a:p/>
+          <a:p>
+            <a:r>
+              <a:t>— SOLUCIÓN (docent · presenter view) —</a:t>
+            </a:r>
+          </a:p>
+          <a:p>
+            <a:r>
+              <a:t>1 Perú (aguda -ú)   ·   2 de h zwijgt (hola = «ola»)   ·   3 cuarenta y siete</a:t>
+            </a:r>
+          </a:p>
+          <a:p>
+            <a:r>
+              <a:t>4 Encantada (Nina is een meisje — de uitgang volgt wie spreekt)   ·   5 casa = llana · México = esdrújula</a:t>
+            </a:r>
+          </a:p>
+        </p:txBody>
+      </p:sp>
+      <p:sp>
+        <p:nvSpPr>
+          <p:cNvPr id="4" name="Slide Number Placeholder 3"/>
+          <p:cNvSpPr>
+            <a:spLocks noGrp="1"/>
+          </p:cNvSpPr>
+          <p:nvPr>
+            <p:ph type="sldNum" idx="5" sz="quarter"/>
+          </p:nvPr>
+        </p:nvSpPr>
+        <p:spPr/>
+      </p:sp>
+    </p:spTree>
+  </p:cSld>
+  <p:clrMapOvr>
+    <a:masterClrMapping/>
+  </p:clrMapOvr>
+</p:notes>
+</file>
+
+<file path=ppt/notesSlides/notesSlide22.xml><?xml version="1.0" encoding="utf-8"?>
+<p:notes xmlns:a="http://schemas.openxmlformats.org/drawingml/2006/main" xmlns:p="http://schemas.openxmlformats.org/presentationml/2006/main" xmlns:r="http://schemas.openxmlformats.org/officeDocument/2006/relationships">
+  <p:cSld>
+    <p:spTree>
+      <p:nvGrpSpPr>
+        <p:cNvPr id="1" name=""/>
+        <p:cNvGrpSpPr/>
+        <p:nvPr/>
+      </p:nvGrpSpPr>
+      <p:grpSpPr>
+        <a:xfrm>
+          <a:off x="0" y="0"/>
+          <a:ext cx="0" cy="0"/>
+          <a:chOff x="0" y="0"/>
+          <a:chExt cx="0" cy="0"/>
+        </a:xfrm>
+      </p:grpSpPr>
+      <p:sp>
+        <p:nvSpPr>
+          <p:cNvPr id="2" name="Slide Image Placeholder 1"/>
+          <p:cNvSpPr>
+            <a:spLocks noGrp="1"/>
+          </p:cNvSpPr>
+          <p:nvPr>
+            <p:ph type="sldImg" idx="2"/>
+          </p:nvPr>
+        </p:nvSpPr>
+        <p:spPr/>
+      </p:sp>
+      <p:sp>
+        <p:nvSpPr>
+          <p:cNvPr id="3" name="Notes Placeholder 2"/>
+          <p:cNvSpPr>
+            <a:spLocks noGrp="1"/>
+          </p:cNvSpPr>
+          <p:nvPr>
+            <p:ph type="body" idx="3" sz="quarter"/>
+          </p:nvPr>
+        </p:nvSpPr>
+        <p:spPr/>
+        <p:txBody>
+          <a:bodyPr/>
+          <a:lstStyle/>
+          <a:p>
+            <a:r>
+              <a:t>TEACHER · REPASO/FEEDBACK (idee 8 voortgangsmeter · idee 23 flashcards afbouw). SummaryQuadrant = spiekkaart. BESLIST 2026-07-26: het echte inoefen-repaso staat ONLINE (spellen + zelfcorrectie); print/PPT = spiekkaart + semáforo + 'Repasa jugando (online)'. Laat leerlingen het semáforo eerlijk inkleuren (receptief/productief apart, statusladder 0-5). Vooruitblik U1 «¿Quién eres?» (Madrid): naam &amp; e-mail spellen, edad met tener, saludos openen elke kennismaking (recycling).</a:t>
+            </a:r>
+          </a:p>
+        </p:txBody>
+      </p:sp>
+      <p:sp>
+        <p:nvSpPr>
+          <p:cNvPr id="4" name="Slide Number Placeholder 3"/>
+          <p:cNvSpPr>
+            <a:spLocks noGrp="1"/>
+          </p:cNvSpPr>
+          <p:nvPr>
+            <p:ph type="sldNum" idx="5" sz="quarter"/>
+          </p:nvPr>
+        </p:nvSpPr>
+        <p:spPr/>
+      </p:sp>
+    </p:spTree>
+  </p:cSld>
+  <p:clrMapOvr>
+    <a:masterClrMapping/>
+  </p:clrMapOvr>
+</p:notes>
+</file>
+
+<file path=ppt/notesSlides/notesSlide23.xml><?xml version="1.0" encoding="utf-8"?>
 <p:notes xmlns:a="http://schemas.openxmlformats.org/drawingml/2006/main" xmlns:p="http://schemas.openxmlformats.org/presentationml/2006/main" xmlns:r="http://schemas.openxmlformats.org/officeDocument/2006/relationships">
   <p:cSld>
     <p:spTree>
@@ -25906,6 +26105,6136 @@
             <a:avLst/>
           </a:prstGeom>
           <a:solidFill>
+            <a:srgbClr val="1E9E74"/>
+          </a:solidFill>
+          <a:ln>
+            <a:noFill/>
+          </a:ln>
+          <a:effectLst/>
+        </p:spPr>
+        <p:style>
+          <a:lnRef idx="1">
+            <a:schemeClr val="accent1"/>
+          </a:lnRef>
+          <a:fillRef idx="3">
+            <a:schemeClr val="accent1"/>
+          </a:fillRef>
+          <a:effectRef idx="2">
+            <a:schemeClr val="accent1"/>
+          </a:effectRef>
+          <a:fontRef idx="minor">
+            <a:schemeClr val="lt1"/>
+          </a:fontRef>
+        </p:style>
+        <p:txBody>
+          <a:bodyPr rtlCol="0" anchor="ctr"/>
+          <a:lstStyle/>
+          <a:p>
+            <a:pPr algn="ctr"/>
+          </a:p>
+        </p:txBody>
+      </p:sp>
+      <p:sp>
+        <p:nvSpPr>
+          <p:cNvPr id="4" name="Rectangle 3"/>
+          <p:cNvSpPr/>
+          <p:nvPr/>
+        </p:nvSpPr>
+        <p:spPr>
+          <a:xfrm>
+            <a:off x="0" y="1078992"/>
+            <a:ext cx="12191695" cy="54864"/>
+          </a:xfrm>
+          <a:prstGeom prst="rect">
+            <a:avLst/>
+          </a:prstGeom>
+          <a:solidFill>
+            <a:srgbClr val="157355"/>
+          </a:solidFill>
+          <a:ln>
+            <a:noFill/>
+          </a:ln>
+          <a:effectLst/>
+        </p:spPr>
+        <p:style>
+          <a:lnRef idx="1">
+            <a:schemeClr val="accent1"/>
+          </a:lnRef>
+          <a:fillRef idx="3">
+            <a:schemeClr val="accent1"/>
+          </a:fillRef>
+          <a:effectRef idx="2">
+            <a:schemeClr val="accent1"/>
+          </a:effectRef>
+          <a:fontRef idx="minor">
+            <a:schemeClr val="lt1"/>
+          </a:fontRef>
+        </p:style>
+        <p:txBody>
+          <a:bodyPr rtlCol="0" anchor="ctr"/>
+          <a:lstStyle/>
+          <a:p>
+            <a:pPr algn="ctr"/>
+          </a:p>
+        </p:txBody>
+      </p:sp>
+      <p:sp>
+        <p:nvSpPr>
+          <p:cNvPr id="5" name="Rounded Rectangle 4"/>
+          <p:cNvSpPr/>
+          <p:nvPr/>
+        </p:nvSpPr>
+        <p:spPr>
+          <a:xfrm>
+            <a:off x="502920" y="182880"/>
+            <a:ext cx="1128369" cy="292608"/>
+          </a:xfrm>
+          <a:prstGeom prst="roundRect">
+            <a:avLst>
+              <a:gd name="adj" fmla="val 50000"/>
+            </a:avLst>
+          </a:prstGeom>
+          <a:solidFill>
+            <a:srgbClr val="FFFFFF"/>
+          </a:solidFill>
+          <a:ln>
+            <a:noFill/>
+          </a:ln>
+          <a:effectLst/>
+        </p:spPr>
+        <p:style>
+          <a:lnRef idx="1">
+            <a:schemeClr val="accent1"/>
+          </a:lnRef>
+          <a:fillRef idx="3">
+            <a:schemeClr val="accent1"/>
+          </a:fillRef>
+          <a:effectRef idx="2">
+            <a:schemeClr val="accent1"/>
+          </a:effectRef>
+          <a:fontRef idx="minor">
+            <a:schemeClr val="lt1"/>
+          </a:fontRef>
+        </p:style>
+        <p:txBody>
+          <a:bodyPr rtlCol="0" anchor="ctr" wrap="none" lIns="88900" rIns="88900" tIns="12700" bIns="12700"/>
+          <a:lstStyle/>
+          <a:p>
+            <a:pPr algn="ctr"/>
+            <a:r>
+              <a:rPr sz="1100" b="1">
+                <a:solidFill>
+                  <a:srgbClr val="1E9E74"/>
+                </a:solidFill>
+                <a:latin typeface="Inter"/>
+              </a:rPr>
+              <a:t>§5 · LECTURA</a:t>
+            </a:r>
+          </a:p>
+        </p:txBody>
+      </p:sp>
+      <p:sp>
+        <p:nvSpPr>
+          <p:cNvPr id="6" name="TextBox 5"/>
+          <p:cNvSpPr txBox="1"/>
+          <p:nvPr/>
+        </p:nvSpPr>
+        <p:spPr>
+          <a:xfrm>
+            <a:off x="10424160" y="-137160"/>
+            <a:ext cx="1737360" cy="1371600"/>
+          </a:xfrm>
+          <a:prstGeom prst="rect">
+            <a:avLst/>
+          </a:prstGeom>
+          <a:noFill/>
+        </p:spPr>
+        <p:txBody>
+          <a:bodyPr wrap="square" anchor="t" lIns="38100" rIns="38100" tIns="25400" bIns="25400">
+            <a:spAutoFit/>
+          </a:bodyPr>
+          <a:lstStyle/>
+          <a:p>
+            <a:pPr algn="r">
+              <a:lnSpc>
+                <a:spcPct val="106000"/>
+              </a:lnSpc>
+              <a:spcBef>
+                <a:spcPts val="0"/>
+              </a:spcBef>
+              <a:spcAft>
+                <a:spcPts val="200"/>
+              </a:spcAft>
+            </a:pPr>
+            <a:r>
+              <a:rPr sz="8800" b="1" i="0">
+                <a:solidFill>
+                  <a:srgbClr val="FFFFFF"/>
+                </a:solidFill>
+                <a:latin typeface="Bricolage Grotesque"/>
+              </a:rPr>
+              <a:t>5</a:t>
+            </a:r>
+          </a:p>
+        </p:txBody>
+      </p:sp>
+      <p:sp>
+        <p:nvSpPr>
+          <p:cNvPr id="7" name="TextBox 6"/>
+          <p:cNvSpPr txBox="1"/>
+          <p:nvPr/>
+        </p:nvSpPr>
+        <p:spPr>
+          <a:xfrm>
+            <a:off x="457200" y="457200"/>
+            <a:ext cx="9692640" cy="502920"/>
+          </a:xfrm>
+          <a:prstGeom prst="rect">
+            <a:avLst/>
+          </a:prstGeom>
+          <a:noFill/>
+        </p:spPr>
+        <p:txBody>
+          <a:bodyPr wrap="square" anchor="ctr" lIns="38100" rIns="38100" tIns="25400" bIns="25400">
+            <a:spAutoFit/>
+          </a:bodyPr>
+          <a:lstStyle/>
+          <a:p>
+            <a:pPr algn="l">
+              <a:lnSpc>
+                <a:spcPct val="106000"/>
+              </a:lnSpc>
+              <a:spcBef>
+                <a:spcPts val="0"/>
+              </a:spcBef>
+              <a:spcAft>
+                <a:spcPts val="200"/>
+              </a:spcAft>
+            </a:pPr>
+            <a:r>
+              <a:rPr sz="2700" b="1" i="0">
+                <a:solidFill>
+                  <a:srgbClr val="FFFFFF"/>
+                </a:solidFill>
+                <a:latin typeface="Bricolage Grotesque"/>
+              </a:rPr>
+              <a:t>«El Club de Español»</a:t>
+            </a:r>
+          </a:p>
+        </p:txBody>
+      </p:sp>
+      <p:sp>
+        <p:nvSpPr>
+          <p:cNvPr id="8" name="TextBox 7"/>
+          <p:cNvSpPr txBox="1"/>
+          <p:nvPr/>
+        </p:nvSpPr>
+        <p:spPr>
+          <a:xfrm>
+            <a:off x="502920" y="932688"/>
+            <a:ext cx="9692640" cy="274320"/>
+          </a:xfrm>
+          <a:prstGeom prst="rect">
+            <a:avLst/>
+          </a:prstGeom>
+          <a:noFill/>
+        </p:spPr>
+        <p:txBody>
+          <a:bodyPr wrap="square" anchor="t" lIns="38100" rIns="38100" tIns="25400" bIns="25400">
+            <a:spAutoFit/>
+          </a:bodyPr>
+          <a:lstStyle/>
+          <a:p>
+            <a:pPr algn="l">
+              <a:lnSpc>
+                <a:spcPct val="106000"/>
+              </a:lnSpc>
+              <a:spcBef>
+                <a:spcPts val="0"/>
+              </a:spcBef>
+              <a:spcAft>
+                <a:spcPts val="200"/>
+              </a:spcAft>
+            </a:pPr>
+            <a:r>
+              <a:rPr sz="1250" b="0" i="1">
+                <a:solidFill>
+                  <a:srgbClr val="E4F4EE"/>
+                </a:solidFill>
+                <a:latin typeface="Inter"/>
+              </a:rPr>
+              <a:t>Een echte tekst. Je hoeft niet alles te begrijpen om de informatie eruit te halen.</a:t>
+            </a:r>
+          </a:p>
+        </p:txBody>
+      </p:sp>
+      <p:sp>
+        <p:nvSpPr>
+          <p:cNvPr id="9" name="Rounded Rectangle 8"/>
+          <p:cNvSpPr/>
+          <p:nvPr/>
+        </p:nvSpPr>
+        <p:spPr>
+          <a:xfrm>
+            <a:off x="457200" y="1325880"/>
+            <a:ext cx="5577840" cy="4160520"/>
+          </a:xfrm>
+          <a:prstGeom prst="roundRect">
+            <a:avLst>
+              <a:gd name="adj" fmla="val 5500"/>
+            </a:avLst>
+          </a:prstGeom>
+          <a:solidFill>
+            <a:srgbClr val="FFFFFF"/>
+          </a:solidFill>
+          <a:ln w="17780">
+            <a:solidFill>
+              <a:srgbClr val="1E9E74"/>
+            </a:solidFill>
+          </a:ln>
+          <a:effectLst/>
+          <a:effectLst>
+            <a:outerShdw blurRad="90000" dist="38000" dir="5400000" rotWithShape="0">
+              <a:srgbClr val="20242E">
+                <a:alpha val="22000"/>
+              </a:srgbClr>
+            </a:outerShdw>
+          </a:effectLst>
+        </p:spPr>
+        <p:style>
+          <a:lnRef idx="1">
+            <a:schemeClr val="accent1"/>
+          </a:lnRef>
+          <a:fillRef idx="3">
+            <a:schemeClr val="accent1"/>
+          </a:fillRef>
+          <a:effectRef idx="2">
+            <a:schemeClr val="accent1"/>
+          </a:effectRef>
+          <a:fontRef idx="minor">
+            <a:schemeClr val="lt1"/>
+          </a:fontRef>
+        </p:style>
+        <p:txBody>
+          <a:bodyPr rtlCol="0" anchor="ctr"/>
+          <a:lstStyle/>
+          <a:p>
+            <a:pPr algn="ctr"/>
+          </a:p>
+        </p:txBody>
+      </p:sp>
+      <p:sp>
+        <p:nvSpPr>
+          <p:cNvPr id="10" name="Rectangle 9"/>
+          <p:cNvSpPr/>
+          <p:nvPr/>
+        </p:nvSpPr>
+        <p:spPr>
+          <a:xfrm>
+            <a:off x="457200" y="1325880"/>
+            <a:ext cx="5577840" cy="384048"/>
+          </a:xfrm>
+          <a:prstGeom prst="rect">
+            <a:avLst/>
+          </a:prstGeom>
+          <a:solidFill>
+            <a:srgbClr val="1E9E74"/>
+          </a:solidFill>
+          <a:ln>
+            <a:noFill/>
+          </a:ln>
+          <a:effectLst/>
+        </p:spPr>
+        <p:style>
+          <a:lnRef idx="1">
+            <a:schemeClr val="accent1"/>
+          </a:lnRef>
+          <a:fillRef idx="3">
+            <a:schemeClr val="accent1"/>
+          </a:fillRef>
+          <a:effectRef idx="2">
+            <a:schemeClr val="accent1"/>
+          </a:effectRef>
+          <a:fontRef idx="minor">
+            <a:schemeClr val="lt1"/>
+          </a:fontRef>
+        </p:style>
+        <p:txBody>
+          <a:bodyPr rtlCol="0" anchor="ctr"/>
+          <a:lstStyle/>
+          <a:p>
+            <a:pPr algn="ctr"/>
+          </a:p>
+        </p:txBody>
+      </p:sp>
+      <p:sp>
+        <p:nvSpPr>
+          <p:cNvPr id="11" name="TextBox 10"/>
+          <p:cNvSpPr txBox="1"/>
+          <p:nvPr/>
+        </p:nvSpPr>
+        <p:spPr>
+          <a:xfrm>
+            <a:off x="594360" y="1344168"/>
+            <a:ext cx="5303520" cy="365760"/>
+          </a:xfrm>
+          <a:prstGeom prst="rect">
+            <a:avLst/>
+          </a:prstGeom>
+          <a:noFill/>
+        </p:spPr>
+        <p:txBody>
+          <a:bodyPr wrap="square" anchor="ctr" lIns="38100" rIns="38100" tIns="25400" bIns="25400">
+            <a:spAutoFit/>
+          </a:bodyPr>
+          <a:lstStyle/>
+          <a:p>
+            <a:pPr algn="l">
+              <a:lnSpc>
+                <a:spcPct val="106000"/>
+              </a:lnSpc>
+              <a:spcBef>
+                <a:spcPts val="0"/>
+              </a:spcBef>
+              <a:spcAft>
+                <a:spcPts val="200"/>
+              </a:spcAft>
+            </a:pPr>
+            <a:r>
+              <a:rPr sz="1150" b="1" i="0">
+                <a:solidFill>
+                  <a:srgbClr val="FFFFFF"/>
+                </a:solidFill>
+                <a:latin typeface="Bricolage Grotesque"/>
+              </a:rPr>
+              <a:t>anuncio (cartel del instituto)</a:t>
+            </a:r>
+          </a:p>
+        </p:txBody>
+      </p:sp>
+      <p:sp>
+        <p:nvSpPr>
+          <p:cNvPr id="12" name="TextBox 11"/>
+          <p:cNvSpPr txBox="1"/>
+          <p:nvPr/>
+        </p:nvSpPr>
+        <p:spPr>
+          <a:xfrm>
+            <a:off x="640080" y="1810512"/>
+            <a:ext cx="5212080" cy="3566160"/>
+          </a:xfrm>
+          <a:prstGeom prst="rect">
+            <a:avLst/>
+          </a:prstGeom>
+          <a:noFill/>
+        </p:spPr>
+        <p:txBody>
+          <a:bodyPr wrap="square" anchor="t" lIns="38100" rIns="38100" tIns="25400" bIns="25400">
+            <a:spAutoFit/>
+          </a:bodyPr>
+          <a:lstStyle/>
+          <a:p>
+            <a:pPr algn="l">
+              <a:lnSpc>
+                <a:spcPct val="118000"/>
+              </a:lnSpc>
+              <a:spcBef>
+                <a:spcPts val="0"/>
+              </a:spcBef>
+              <a:spcAft>
+                <a:spcPts val="200"/>
+              </a:spcAft>
+            </a:pPr>
+            <a:r>
+              <a:rPr sz="1250" b="1" i="0">
+                <a:solidFill>
+                  <a:srgbClr val="157355"/>
+                </a:solidFill>
+                <a:latin typeface="Bricolage Grotesque"/>
+              </a:rPr>
+              <a:t>¡APÚNTATE AL CLUB DE ESPAÑOL! 🇪🇸🇲🇽🇨🇴🇵🇪</a:t>
+            </a:r>
+          </a:p>
+          <a:p>
+            <a:pPr algn="l">
+              <a:lnSpc>
+                <a:spcPct val="118000"/>
+              </a:lnSpc>
+              <a:spcBef>
+                <a:spcPts val="0"/>
+              </a:spcBef>
+              <a:spcAft>
+                <a:spcPts val="200"/>
+              </a:spcAft>
+            </a:pPr>
+            <a:r>
+              <a:rPr sz="1050" b="0" i="1">
+                <a:solidFill>
+                  <a:srgbClr val="6A6E78"/>
+                </a:solidFill>
+                <a:latin typeface="Inter"/>
+              </a:rPr>
+              <a:t>Un idioma, veinte países, una ruta.</a:t>
+            </a:r>
+          </a:p>
+          <a:p>
+            <a:pPr algn="l">
+              <a:lnSpc>
+                <a:spcPct val="118000"/>
+              </a:lnSpc>
+              <a:spcBef>
+                <a:spcPts val="0"/>
+              </a:spcBef>
+              <a:spcAft>
+                <a:spcPts val="200"/>
+              </a:spcAft>
+            </a:pPr>
+            <a:r>
+              <a:rPr sz="1050" b="0" i="0">
+                <a:solidFill>
+                  <a:srgbClr val="20242E"/>
+                </a:solidFill>
+                <a:latin typeface="Inter"/>
+              </a:rPr>
+              <a:t>¿Hablas un poco de español? ¿O cero español? ¡No importa! En el club hablamos, cantamos y jugamos en español.</a:t>
+            </a:r>
+          </a:p>
+          <a:p>
+            <a:pPr algn="l">
+              <a:lnSpc>
+                <a:spcPct val="118000"/>
+              </a:lnSpc>
+              <a:spcBef>
+                <a:spcPts val="0"/>
+              </a:spcBef>
+              <a:spcAft>
+                <a:spcPts val="200"/>
+              </a:spcAft>
+            </a:pPr>
+            <a:r>
+              <a:rPr sz="1050" b="0" i="0">
+                <a:solidFill>
+                  <a:srgbClr val="20242E"/>
+                </a:solidFill>
+                <a:latin typeface="Inter"/>
+              </a:rPr>
+              <a:t>• ¿Cuándo? Los martes y los jueves, de cuatro a cinco.</a:t>
+            </a:r>
+          </a:p>
+          <a:p>
+            <a:pPr algn="l">
+              <a:lnSpc>
+                <a:spcPct val="118000"/>
+              </a:lnSpc>
+              <a:spcBef>
+                <a:spcPts val="0"/>
+              </a:spcBef>
+              <a:spcAft>
+                <a:spcPts val="200"/>
+              </a:spcAft>
+            </a:pPr>
+            <a:r>
+              <a:rPr sz="1050" b="0" i="0">
+                <a:solidFill>
+                  <a:srgbClr val="20242E"/>
+                </a:solidFill>
+                <a:latin typeface="Inter"/>
+              </a:rPr>
+              <a:t>• ¿Dónde? En el aula catorce, primera planta.</a:t>
+            </a:r>
+          </a:p>
+          <a:p>
+            <a:pPr algn="l">
+              <a:lnSpc>
+                <a:spcPct val="118000"/>
+              </a:lnSpc>
+              <a:spcBef>
+                <a:spcPts val="0"/>
+              </a:spcBef>
+              <a:spcAft>
+                <a:spcPts val="200"/>
+              </a:spcAft>
+            </a:pPr>
+            <a:r>
+              <a:rPr sz="1050" b="0" i="0">
+                <a:solidFill>
+                  <a:srgbClr val="20242E"/>
+                </a:solidFill>
+                <a:latin typeface="Inter"/>
+              </a:rPr>
+              <a:t>• ¿Cuánto cuesta? ¡Cero euros!</a:t>
+            </a:r>
+          </a:p>
+          <a:p>
+            <a:pPr algn="l">
+              <a:lnSpc>
+                <a:spcPct val="118000"/>
+              </a:lnSpc>
+              <a:spcBef>
+                <a:spcPts val="0"/>
+              </a:spcBef>
+              <a:spcAft>
+                <a:spcPts val="200"/>
+              </a:spcAft>
+            </a:pPr>
+            <a:r>
+              <a:rPr sz="1050" b="0" i="0">
+                <a:solidFill>
+                  <a:srgbClr val="20242E"/>
+                </a:solidFill>
+                <a:latin typeface="Inter"/>
+              </a:rPr>
+              <a:t>• ¿Cuántos somos? Ahora somos dieciocho. Hay sitio para veinte.</a:t>
+            </a:r>
+          </a:p>
+          <a:p>
+            <a:pPr algn="l">
+              <a:lnSpc>
+                <a:spcPct val="118000"/>
+              </a:lnSpc>
+              <a:spcBef>
+                <a:spcPts val="0"/>
+              </a:spcBef>
+              <a:spcAft>
+                <a:spcPts val="200"/>
+              </a:spcAft>
+            </a:pPr>
+            <a:r>
+              <a:rPr sz="1050" b="0" i="0">
+                <a:solidFill>
+                  <a:srgbClr val="20242E"/>
+                </a:solidFill>
+                <a:latin typeface="Inter"/>
+              </a:rPr>
+              <a:t>Este año viajamos por el mundo hispano: España, México, Colombia y Perú. Cada mes, un país y una fiesta.</a:t>
+            </a:r>
+          </a:p>
+          <a:p>
+            <a:pPr algn="l">
+              <a:lnSpc>
+                <a:spcPct val="118000"/>
+              </a:lnSpc>
+              <a:spcBef>
+                <a:spcPts val="0"/>
+              </a:spcBef>
+              <a:spcAft>
+                <a:spcPts val="200"/>
+              </a:spcAft>
+            </a:pPr>
+            <a:r>
+              <a:rPr sz="950" b="0" i="0">
+                <a:solidFill>
+                  <a:srgbClr val="6A6E78"/>
+                </a:solidFill>
+                <a:latin typeface="Inter"/>
+              </a:rPr>
+              <a:t>Escribe a: club.espanol@instituto.be — o habla con la señora Ortega.</a:t>
+            </a:r>
+          </a:p>
+        </p:txBody>
+      </p:sp>
+      <p:sp>
+        <p:nvSpPr>
+          <p:cNvPr id="13" name="Rounded Rectangle 12"/>
+          <p:cNvSpPr/>
+          <p:nvPr/>
+        </p:nvSpPr>
+        <p:spPr>
+          <a:xfrm>
+            <a:off x="6263640" y="1325880"/>
+            <a:ext cx="5468112" cy="1965960"/>
+          </a:xfrm>
+          <a:prstGeom prst="roundRect">
+            <a:avLst>
+              <a:gd name="adj" fmla="val 5500"/>
+            </a:avLst>
+          </a:prstGeom>
+          <a:solidFill>
+            <a:srgbClr val="F3EEE4"/>
+          </a:solidFill>
+          <a:ln w="15240">
+            <a:solidFill>
+              <a:srgbClr val="E4E3DE"/>
+            </a:solidFill>
+          </a:ln>
+          <a:effectLst/>
+          <a:effectLst>
+            <a:outerShdw blurRad="90000" dist="38000" dir="5400000" rotWithShape="0">
+              <a:srgbClr val="20242E">
+                <a:alpha val="22000"/>
+              </a:srgbClr>
+            </a:outerShdw>
+          </a:effectLst>
+        </p:spPr>
+        <p:style>
+          <a:lnRef idx="1">
+            <a:schemeClr val="accent1"/>
+          </a:lnRef>
+          <a:fillRef idx="3">
+            <a:schemeClr val="accent1"/>
+          </a:fillRef>
+          <a:effectRef idx="2">
+            <a:schemeClr val="accent1"/>
+          </a:effectRef>
+          <a:fontRef idx="minor">
+            <a:schemeClr val="lt1"/>
+          </a:fontRef>
+        </p:style>
+        <p:txBody>
+          <a:bodyPr rtlCol="0" anchor="ctr"/>
+          <a:lstStyle/>
+          <a:p>
+            <a:pPr algn="ctr"/>
+          </a:p>
+        </p:txBody>
+      </p:sp>
+      <p:sp>
+        <p:nvSpPr>
+          <p:cNvPr id="14" name="TextBox 13"/>
+          <p:cNvSpPr txBox="1"/>
+          <p:nvPr/>
+        </p:nvSpPr>
+        <p:spPr>
+          <a:xfrm>
+            <a:off x="6446520" y="1417320"/>
+            <a:ext cx="5120640" cy="292608"/>
+          </a:xfrm>
+          <a:prstGeom prst="rect">
+            <a:avLst/>
+          </a:prstGeom>
+          <a:noFill/>
+        </p:spPr>
+        <p:txBody>
+          <a:bodyPr wrap="square" anchor="t" lIns="38100" rIns="38100" tIns="25400" bIns="25400">
+            <a:spAutoFit/>
+          </a:bodyPr>
+          <a:lstStyle/>
+          <a:p>
+            <a:pPr algn="l">
+              <a:lnSpc>
+                <a:spcPct val="106000"/>
+              </a:lnSpc>
+              <a:spcBef>
+                <a:spcPts val="0"/>
+              </a:spcBef>
+              <a:spcAft>
+                <a:spcPts val="200"/>
+              </a:spcAft>
+            </a:pPr>
+            <a:r>
+              <a:rPr sz="1200" b="1" i="0">
+                <a:solidFill>
+                  <a:srgbClr val="157355"/>
+                </a:solidFill>
+                <a:latin typeface="Bricolage Grotesque"/>
+              </a:rPr>
+              <a:t>Escanea — busca el dato</a:t>
+            </a:r>
+          </a:p>
+        </p:txBody>
+      </p:sp>
+      <p:sp>
+        <p:nvSpPr>
+          <p:cNvPr id="15" name="TextBox 14"/>
+          <p:cNvSpPr txBox="1"/>
+          <p:nvPr/>
+        </p:nvSpPr>
+        <p:spPr>
+          <a:xfrm>
+            <a:off x="6446520" y="1755648"/>
+            <a:ext cx="5120640" cy="1463040"/>
+          </a:xfrm>
+          <a:prstGeom prst="rect">
+            <a:avLst/>
+          </a:prstGeom>
+          <a:noFill/>
+        </p:spPr>
+        <p:txBody>
+          <a:bodyPr wrap="square" anchor="t" lIns="38100" rIns="38100" tIns="25400" bIns="25400">
+            <a:spAutoFit/>
+          </a:bodyPr>
+          <a:lstStyle/>
+          <a:p>
+            <a:pPr algn="l">
+              <a:lnSpc>
+                <a:spcPct val="125000"/>
+              </a:lnSpc>
+              <a:spcBef>
+                <a:spcPts val="0"/>
+              </a:spcBef>
+              <a:spcAft>
+                <a:spcPts val="200"/>
+              </a:spcAft>
+            </a:pPr>
+            <a:r>
+              <a:rPr sz="1050" b="0" i="0">
+                <a:solidFill>
+                  <a:srgbClr val="20242E"/>
+                </a:solidFill>
+                <a:latin typeface="Inter"/>
+              </a:rPr>
+              <a:t>1. ¿En qué aula es el club?</a:t>
+            </a:r>
+          </a:p>
+          <a:p>
+            <a:pPr algn="l">
+              <a:lnSpc>
+                <a:spcPct val="125000"/>
+              </a:lnSpc>
+              <a:spcBef>
+                <a:spcPts val="0"/>
+              </a:spcBef>
+              <a:spcAft>
+                <a:spcPts val="200"/>
+              </a:spcAft>
+            </a:pPr>
+            <a:r>
+              <a:rPr sz="1050" b="0" i="0">
+                <a:solidFill>
+                  <a:srgbClr val="20242E"/>
+                </a:solidFill>
+                <a:latin typeface="Inter"/>
+              </a:rPr>
+              <a:t>2. ¿Cuántos alumnos hay ahora en el club?</a:t>
+            </a:r>
+          </a:p>
+          <a:p>
+            <a:pPr algn="l">
+              <a:lnSpc>
+                <a:spcPct val="125000"/>
+              </a:lnSpc>
+              <a:spcBef>
+                <a:spcPts val="0"/>
+              </a:spcBef>
+              <a:spcAft>
+                <a:spcPts val="200"/>
+              </a:spcAft>
+            </a:pPr>
+            <a:r>
+              <a:rPr sz="1050" b="0" i="0">
+                <a:solidFill>
+                  <a:srgbClr val="20242E"/>
+                </a:solidFill>
+                <a:latin typeface="Inter"/>
+              </a:rPr>
+              <a:t>3. ¿Cuánto cuesta? (en cifras)</a:t>
+            </a:r>
+          </a:p>
+          <a:p>
+            <a:pPr algn="l">
+              <a:lnSpc>
+                <a:spcPct val="125000"/>
+              </a:lnSpc>
+              <a:spcBef>
+                <a:spcPts val="0"/>
+              </a:spcBef>
+              <a:spcAft>
+                <a:spcPts val="200"/>
+              </a:spcAft>
+            </a:pPr>
+            <a:r>
+              <a:rPr sz="1050" b="0" i="0">
+                <a:solidFill>
+                  <a:srgbClr val="20242E"/>
+                </a:solidFill>
+                <a:latin typeface="Inter"/>
+              </a:rPr>
+              <a:t>4. ¿Cuántos países visita el club este año?</a:t>
+            </a:r>
+          </a:p>
+        </p:txBody>
+      </p:sp>
+      <p:sp>
+        <p:nvSpPr>
+          <p:cNvPr id="16" name="Rounded Rectangle 15"/>
+          <p:cNvSpPr/>
+          <p:nvPr/>
+        </p:nvSpPr>
+        <p:spPr>
+          <a:xfrm>
+            <a:off x="6263640" y="3429000"/>
+            <a:ext cx="5468112" cy="2057400"/>
+          </a:xfrm>
+          <a:prstGeom prst="roundRect">
+            <a:avLst>
+              <a:gd name="adj" fmla="val 5500"/>
+            </a:avLst>
+          </a:prstGeom>
+          <a:solidFill>
+            <a:srgbClr val="FFFFFF"/>
+          </a:solidFill>
+          <a:ln w="15240">
+            <a:solidFill>
+              <a:srgbClr val="E4E3DE"/>
+            </a:solidFill>
+          </a:ln>
+          <a:effectLst/>
+          <a:effectLst>
+            <a:outerShdw blurRad="90000" dist="38000" dir="5400000" rotWithShape="0">
+              <a:srgbClr val="20242E">
+                <a:alpha val="22000"/>
+              </a:srgbClr>
+            </a:outerShdw>
+          </a:effectLst>
+        </p:spPr>
+        <p:style>
+          <a:lnRef idx="1">
+            <a:schemeClr val="accent1"/>
+          </a:lnRef>
+          <a:fillRef idx="3">
+            <a:schemeClr val="accent1"/>
+          </a:fillRef>
+          <a:effectRef idx="2">
+            <a:schemeClr val="accent1"/>
+          </a:effectRef>
+          <a:fontRef idx="minor">
+            <a:schemeClr val="lt1"/>
+          </a:fontRef>
+        </p:style>
+        <p:txBody>
+          <a:bodyPr rtlCol="0" anchor="ctr"/>
+          <a:lstStyle/>
+          <a:p>
+            <a:pPr algn="ctr"/>
+          </a:p>
+        </p:txBody>
+      </p:sp>
+      <p:sp>
+        <p:nvSpPr>
+          <p:cNvPr id="17" name="TextBox 16"/>
+          <p:cNvSpPr txBox="1"/>
+          <p:nvPr/>
+        </p:nvSpPr>
+        <p:spPr>
+          <a:xfrm>
+            <a:off x="6446520" y="3520440"/>
+            <a:ext cx="5120640" cy="292608"/>
+          </a:xfrm>
+          <a:prstGeom prst="rect">
+            <a:avLst/>
+          </a:prstGeom>
+          <a:noFill/>
+        </p:spPr>
+        <p:txBody>
+          <a:bodyPr wrap="square" anchor="t" lIns="38100" rIns="38100" tIns="25400" bIns="25400">
+            <a:spAutoFit/>
+          </a:bodyPr>
+          <a:lstStyle/>
+          <a:p>
+            <a:pPr algn="l">
+              <a:lnSpc>
+                <a:spcPct val="106000"/>
+              </a:lnSpc>
+              <a:spcBef>
+                <a:spcPts val="0"/>
+              </a:spcBef>
+              <a:spcAft>
+                <a:spcPts val="200"/>
+              </a:spcAft>
+            </a:pPr>
+            <a:r>
+              <a:rPr sz="1200" b="1" i="0">
+                <a:solidFill>
+                  <a:srgbClr val="157355"/>
+                </a:solidFill>
+                <a:latin typeface="Bricolage Grotesque"/>
+              </a:rPr>
+              <a:t>¿Verdadero o falso? — y la prueba</a:t>
+            </a:r>
+          </a:p>
+        </p:txBody>
+      </p:sp>
+      <p:sp>
+        <p:nvSpPr>
+          <p:cNvPr id="18" name="TextBox 17"/>
+          <p:cNvSpPr txBox="1"/>
+          <p:nvPr/>
+        </p:nvSpPr>
+        <p:spPr>
+          <a:xfrm>
+            <a:off x="6446520" y="3858768"/>
+            <a:ext cx="5120640" cy="1554480"/>
+          </a:xfrm>
+          <a:prstGeom prst="rect">
+            <a:avLst/>
+          </a:prstGeom>
+          <a:noFill/>
+        </p:spPr>
+        <p:txBody>
+          <a:bodyPr wrap="square" anchor="t" lIns="38100" rIns="38100" tIns="25400" bIns="25400">
+            <a:spAutoFit/>
+          </a:bodyPr>
+          <a:lstStyle/>
+          <a:p>
+            <a:pPr algn="l">
+              <a:lnSpc>
+                <a:spcPct val="125000"/>
+              </a:lnSpc>
+              <a:spcBef>
+                <a:spcPts val="0"/>
+              </a:spcBef>
+              <a:spcAft>
+                <a:spcPts val="200"/>
+              </a:spcAft>
+            </a:pPr>
+            <a:r>
+              <a:rPr sz="1050" b="0" i="0">
+                <a:solidFill>
+                  <a:srgbClr val="20242E"/>
+                </a:solidFill>
+                <a:latin typeface="Inter"/>
+              </a:rPr>
+              <a:t>1. El club es gratis.</a:t>
+            </a:r>
+          </a:p>
+          <a:p>
+            <a:pPr algn="l">
+              <a:lnSpc>
+                <a:spcPct val="125000"/>
+              </a:lnSpc>
+              <a:spcBef>
+                <a:spcPts val="0"/>
+              </a:spcBef>
+              <a:spcAft>
+                <a:spcPts val="200"/>
+              </a:spcAft>
+            </a:pPr>
+            <a:r>
+              <a:rPr sz="1050" b="0" i="0">
+                <a:solidFill>
+                  <a:srgbClr val="20242E"/>
+                </a:solidFill>
+                <a:latin typeface="Inter"/>
+              </a:rPr>
+              <a:t>2. El club es solo para alumnos que ya hablan español.</a:t>
+            </a:r>
+          </a:p>
+          <a:p>
+            <a:pPr algn="l">
+              <a:lnSpc>
+                <a:spcPct val="125000"/>
+              </a:lnSpc>
+              <a:spcBef>
+                <a:spcPts val="0"/>
+              </a:spcBef>
+              <a:spcAft>
+                <a:spcPts val="200"/>
+              </a:spcAft>
+            </a:pPr>
+            <a:r>
+              <a:rPr sz="1050" b="0" i="0">
+                <a:solidFill>
+                  <a:srgbClr val="20242E"/>
+                </a:solidFill>
+                <a:latin typeface="Inter"/>
+              </a:rPr>
+              <a:t>3. El club se reúne dos días por semana.</a:t>
+            </a:r>
+          </a:p>
+          <a:p>
+            <a:pPr algn="l">
+              <a:lnSpc>
+                <a:spcPct val="125000"/>
+              </a:lnSpc>
+              <a:spcBef>
+                <a:spcPts val="0"/>
+              </a:spcBef>
+              <a:spcAft>
+                <a:spcPts val="200"/>
+              </a:spcAft>
+            </a:pPr>
+            <a:r>
+              <a:rPr sz="1050" b="0" i="0">
+                <a:solidFill>
+                  <a:srgbClr val="20242E"/>
+                </a:solidFill>
+                <a:latin typeface="Inter"/>
+              </a:rPr>
+              <a:t>4. Todavía hay sitio en el club.</a:t>
+            </a:r>
+          </a:p>
+        </p:txBody>
+      </p:sp>
+      <p:sp>
+        <p:nvSpPr>
+          <p:cNvPr id="19" name="Rounded Rectangle 18"/>
+          <p:cNvSpPr/>
+          <p:nvPr/>
+        </p:nvSpPr>
+        <p:spPr>
+          <a:xfrm>
+            <a:off x="457200" y="5596128"/>
+            <a:ext cx="11274552" cy="658368"/>
+          </a:xfrm>
+          <a:prstGeom prst="roundRect">
+            <a:avLst>
+              <a:gd name="adj" fmla="val 6000"/>
+            </a:avLst>
+          </a:prstGeom>
+          <a:solidFill>
+            <a:srgbClr val="E4F4EE"/>
+          </a:solidFill>
+          <a:ln w="19050">
+            <a:solidFill>
+              <a:srgbClr val="1E9E74"/>
+            </a:solidFill>
+          </a:ln>
+          <a:effectLst/>
+        </p:spPr>
+        <p:style>
+          <a:lnRef idx="1">
+            <a:schemeClr val="accent1"/>
+          </a:lnRef>
+          <a:fillRef idx="3">
+            <a:schemeClr val="accent1"/>
+          </a:fillRef>
+          <a:effectRef idx="2">
+            <a:schemeClr val="accent1"/>
+          </a:effectRef>
+          <a:fontRef idx="minor">
+            <a:schemeClr val="lt1"/>
+          </a:fontRef>
+        </p:style>
+        <p:txBody>
+          <a:bodyPr rtlCol="0" anchor="ctr" wrap="square" lIns="127000" rIns="127000" tIns="139700" bIns="76200"/>
+          <a:lstStyle/>
+          <a:p>
+            <a:pPr algn="ctr">
+              <a:lnSpc>
+                <a:spcPct val="102000"/>
+              </a:lnSpc>
+              <a:spcBef>
+                <a:spcPts val="0"/>
+              </a:spcBef>
+              <a:spcAft>
+                <a:spcPts val="300"/>
+              </a:spcAft>
+            </a:pPr>
+            <a:r>
+              <a:rPr sz="1200" b="0" i="0">
+                <a:solidFill>
+                  <a:srgbClr val="157355"/>
+                </a:solidFill>
+                <a:latin typeface="Inter"/>
+              </a:rPr>
+              <a:t>Escanear: 1) 14 · 2) 18 · 3) 0 · 4) 4</a:t>
+            </a:r>
+          </a:p>
+          <a:p>
+            <a:pPr>
+              <a:lnSpc>
+                <a:spcPct val="102000"/>
+              </a:lnSpc>
+              <a:spcBef>
+                <a:spcPts val="0"/>
+              </a:spcBef>
+              <a:spcAft>
+                <a:spcPts val="300"/>
+              </a:spcAft>
+            </a:pPr>
+            <a:r>
+              <a:rPr sz="1200" b="0" i="0">
+                <a:solidFill>
+                  <a:srgbClr val="157355"/>
+                </a:solidFill>
+                <a:latin typeface="Inter"/>
+              </a:rPr>
+              <a:t>1) V — «¡Cero euros!»</a:t>
+            </a:r>
+          </a:p>
+          <a:p>
+            <a:pPr>
+              <a:lnSpc>
+                <a:spcPct val="102000"/>
+              </a:lnSpc>
+              <a:spcBef>
+                <a:spcPts val="0"/>
+              </a:spcBef>
+              <a:spcAft>
+                <a:spcPts val="300"/>
+              </a:spcAft>
+            </a:pPr>
+            <a:r>
+              <a:rPr sz="1200" b="0" i="0">
+                <a:solidFill>
+                  <a:srgbClr val="157355"/>
+                </a:solidFill>
+                <a:latin typeface="Inter"/>
+              </a:rPr>
+              <a:t>2) F — «¿O cero español? ¡No importa!»</a:t>
+            </a:r>
+          </a:p>
+          <a:p>
+            <a:pPr>
+              <a:lnSpc>
+                <a:spcPct val="102000"/>
+              </a:lnSpc>
+              <a:spcBef>
+                <a:spcPts val="0"/>
+              </a:spcBef>
+              <a:spcAft>
+                <a:spcPts val="300"/>
+              </a:spcAft>
+            </a:pPr>
+            <a:r>
+              <a:rPr sz="1200" b="0" i="0">
+                <a:solidFill>
+                  <a:srgbClr val="157355"/>
+                </a:solidFill>
+                <a:latin typeface="Inter"/>
+              </a:rPr>
+              <a:t>3) V — «Los martes y los jueves»</a:t>
+            </a:r>
+          </a:p>
+          <a:p>
+            <a:pPr>
+              <a:lnSpc>
+                <a:spcPct val="102000"/>
+              </a:lnSpc>
+              <a:spcBef>
+                <a:spcPts val="0"/>
+              </a:spcBef>
+              <a:spcAft>
+                <a:spcPts val="300"/>
+              </a:spcAft>
+            </a:pPr>
+            <a:r>
+              <a:rPr sz="1200" b="0" i="0">
+                <a:solidFill>
+                  <a:srgbClr val="157355"/>
+                </a:solidFill>
+                <a:latin typeface="Inter"/>
+              </a:rPr>
+              <a:t>4) V — «Hay sitio para veinte»</a:t>
+            </a:r>
+          </a:p>
+        </p:txBody>
+      </p:sp>
+      <p:sp>
+        <p:nvSpPr>
+          <p:cNvPr id="20" name="Rounded Rectangle 19"/>
+          <p:cNvSpPr/>
+          <p:nvPr/>
+        </p:nvSpPr>
+        <p:spPr>
+          <a:xfrm>
+            <a:off x="594360" y="5468112"/>
+            <a:ext cx="1548993" cy="292608"/>
+          </a:xfrm>
+          <a:prstGeom prst="roundRect">
+            <a:avLst>
+              <a:gd name="adj" fmla="val 50000"/>
+            </a:avLst>
+          </a:prstGeom>
+          <a:solidFill>
+            <a:srgbClr val="1E9E74"/>
+          </a:solidFill>
+          <a:ln>
+            <a:noFill/>
+          </a:ln>
+          <a:effectLst/>
+        </p:spPr>
+        <p:style>
+          <a:lnRef idx="1">
+            <a:schemeClr val="accent1"/>
+          </a:lnRef>
+          <a:fillRef idx="3">
+            <a:schemeClr val="accent1"/>
+          </a:fillRef>
+          <a:effectRef idx="2">
+            <a:schemeClr val="accent1"/>
+          </a:effectRef>
+          <a:fontRef idx="minor">
+            <a:schemeClr val="lt1"/>
+          </a:fontRef>
+        </p:style>
+        <p:txBody>
+          <a:bodyPr rtlCol="0" anchor="ctr" wrap="none" lIns="88900" rIns="88900" tIns="12700" bIns="12700"/>
+          <a:lstStyle/>
+          <a:p>
+            <a:pPr algn="ctr"/>
+            <a:r>
+              <a:rPr sz="950" b="1">
+                <a:solidFill>
+                  <a:srgbClr val="FFFFFF"/>
+                </a:solidFill>
+                <a:latin typeface="Inter"/>
+              </a:rPr>
+              <a:t>SOLUCIÓN · docent</a:t>
+            </a:r>
+          </a:p>
+        </p:txBody>
+      </p:sp>
+      <p:sp>
+        <p:nvSpPr>
+          <p:cNvPr id="21" name="Rectangle 20"/>
+          <p:cNvSpPr/>
+          <p:nvPr/>
+        </p:nvSpPr>
+        <p:spPr>
+          <a:xfrm>
+            <a:off x="0" y="6547104"/>
+            <a:ext cx="12191695" cy="310896"/>
+          </a:xfrm>
+          <a:prstGeom prst="rect">
+            <a:avLst/>
+          </a:prstGeom>
+          <a:solidFill>
+            <a:srgbClr val="F3EEE4"/>
+          </a:solidFill>
+          <a:ln>
+            <a:noFill/>
+          </a:ln>
+          <a:effectLst/>
+        </p:spPr>
+        <p:style>
+          <a:lnRef idx="1">
+            <a:schemeClr val="accent1"/>
+          </a:lnRef>
+          <a:fillRef idx="3">
+            <a:schemeClr val="accent1"/>
+          </a:fillRef>
+          <a:effectRef idx="2">
+            <a:schemeClr val="accent1"/>
+          </a:effectRef>
+          <a:fontRef idx="minor">
+            <a:schemeClr val="lt1"/>
+          </a:fontRef>
+        </p:style>
+        <p:txBody>
+          <a:bodyPr rtlCol="0" anchor="ctr"/>
+          <a:lstStyle/>
+          <a:p>
+            <a:pPr algn="ctr"/>
+          </a:p>
+        </p:txBody>
+      </p:sp>
+      <p:sp>
+        <p:nvSpPr>
+          <p:cNvPr id="22" name="TextBox 21"/>
+          <p:cNvSpPr txBox="1"/>
+          <p:nvPr/>
+        </p:nvSpPr>
+        <p:spPr>
+          <a:xfrm>
+            <a:off x="411480" y="6565392"/>
+            <a:ext cx="5486400" cy="274320"/>
+          </a:xfrm>
+          <a:prstGeom prst="rect">
+            <a:avLst/>
+          </a:prstGeom>
+          <a:noFill/>
+        </p:spPr>
+        <p:txBody>
+          <a:bodyPr wrap="square" anchor="ctr" lIns="38100" rIns="38100" tIns="25400" bIns="25400">
+            <a:spAutoFit/>
+          </a:bodyPr>
+          <a:lstStyle/>
+          <a:p>
+            <a:pPr algn="l">
+              <a:lnSpc>
+                <a:spcPct val="106000"/>
+              </a:lnSpc>
+              <a:spcBef>
+                <a:spcPts val="0"/>
+              </a:spcBef>
+              <a:spcAft>
+                <a:spcPts val="200"/>
+              </a:spcAft>
+            </a:pPr>
+            <a:r>
+              <a:rPr sz="1100" b="1" i="0">
+                <a:solidFill>
+                  <a:srgbClr val="1E9E74"/>
+                </a:solidFill>
+                <a:latin typeface="Inter"/>
+              </a:rPr>
+              <a:t>● </a:t>
+            </a:r>
+            <a:r>
+              <a:rPr sz="950" b="0" i="0">
+                <a:solidFill>
+                  <a:srgbClr val="6A6E78"/>
+                </a:solidFill>
+                <a:latin typeface="Inter"/>
+              </a:rPr>
+              <a:t>U0 · ¡EMPEZAMOS!   ·   C5 · A1 · La Ruta</a:t>
+            </a:r>
+          </a:p>
+        </p:txBody>
+      </p:sp>
+      <p:sp>
+        <p:nvSpPr>
+          <p:cNvPr id="23" name="TextBox 22"/>
+          <p:cNvSpPr txBox="1"/>
+          <p:nvPr/>
+        </p:nvSpPr>
+        <p:spPr>
+          <a:xfrm>
+            <a:off x="8686800" y="6565392"/>
+            <a:ext cx="3063240" cy="274320"/>
+          </a:xfrm>
+          <a:prstGeom prst="rect">
+            <a:avLst/>
+          </a:prstGeom>
+          <a:noFill/>
+        </p:spPr>
+        <p:txBody>
+          <a:bodyPr wrap="square" anchor="ctr" lIns="38100" rIns="38100" tIns="25400" bIns="25400">
+            <a:spAutoFit/>
+          </a:bodyPr>
+          <a:lstStyle/>
+          <a:p>
+            <a:pPr algn="r">
+              <a:lnSpc>
+                <a:spcPct val="106000"/>
+              </a:lnSpc>
+              <a:spcBef>
+                <a:spcPts val="0"/>
+              </a:spcBef>
+              <a:spcAft>
+                <a:spcPts val="200"/>
+              </a:spcAft>
+            </a:pPr>
+            <a:r>
+              <a:rPr sz="900" b="0" i="1">
+                <a:solidFill>
+                  <a:srgbClr val="6A6E78"/>
+                </a:solidFill>
+                <a:latin typeface="Inter"/>
+              </a:rPr>
+              <a:t>Docentenversie — met oplossingen</a:t>
+            </a:r>
+          </a:p>
+        </p:txBody>
+      </p:sp>
+      <p:sp>
+        <p:nvSpPr>
+          <p:cNvPr id="24" name="TextBox 23"/>
+          <p:cNvSpPr txBox="1"/>
+          <p:nvPr/>
+        </p:nvSpPr>
+        <p:spPr>
+          <a:xfrm>
+            <a:off x="11475720" y="6565392"/>
+            <a:ext cx="457200" cy="274320"/>
+          </a:xfrm>
+          <a:prstGeom prst="rect">
+            <a:avLst/>
+          </a:prstGeom>
+          <a:noFill/>
+        </p:spPr>
+        <p:txBody>
+          <a:bodyPr wrap="square" anchor="ctr" lIns="38100" rIns="38100" tIns="25400" bIns="25400">
+            <a:spAutoFit/>
+          </a:bodyPr>
+          <a:lstStyle/>
+          <a:p>
+            <a:pPr algn="r">
+              <a:lnSpc>
+                <a:spcPct val="106000"/>
+              </a:lnSpc>
+              <a:spcBef>
+                <a:spcPts val="0"/>
+              </a:spcBef>
+              <a:spcAft>
+                <a:spcPts val="200"/>
+              </a:spcAft>
+            </a:pPr>
+            <a:r>
+              <a:rPr sz="950" b="1" i="0">
+                <a:solidFill>
+                  <a:srgbClr val="157355"/>
+                </a:solidFill>
+                <a:latin typeface="Inter"/>
+              </a:rPr>
+              <a:t>18</a:t>
+            </a:r>
+          </a:p>
+        </p:txBody>
+      </p:sp>
+    </p:spTree>
+  </p:cSld>
+  <p:clrMapOvr>
+    <a:masterClrMapping/>
+  </p:clrMapOvr>
+  <p:timing>
+    <p:tnLst>
+      <p:par>
+        <p:cTn id="1" dur="indefinite" restart="never" nodeType="tmRoot">
+          <p:childTnLst>
+            <p:seq concurrent="1" nextAc="seek">
+              <p:cTn id="2" dur="indefinite" nodeType="mainSeq">
+                <p:childTnLst>
+                  <p:par>
+                    <p:cTn id="3" fill="hold">
+                      <p:stCondLst>
+                        <p:cond delay="indefinite"/>
+                      </p:stCondLst>
+                      <p:childTnLst>
+                        <p:par>
+                          <p:cTn id="4" fill="hold">
+                            <p:stCondLst>
+                              <p:cond delay="0"/>
+                            </p:stCondLst>
+                            <p:childTnLst>
+                              <p:par>
+                                <p:cTn id="5" presetID="10" presetClass="entr" presetSubtype="0" fill="hold" grpId="0" nodeType="clickEffect">
+                                  <p:stCondLst>
+                                    <p:cond delay="0"/>
+                                  </p:stCondLst>
+                                  <p:childTnLst>
+                                    <p:set>
+                                      <p:cBhvr>
+                                        <p:cTn id="6" dur="1" fill="hold">
+                                          <p:stCondLst>
+                                            <p:cond delay="0"/>
+                                          </p:stCondLst>
+                                        </p:cTn>
+                                        <p:tgtEl>
+                                          <p:spTgt spid="19"/>
+                                        </p:tgtEl>
+                                        <p:attrNameLst>
+                                          <p:attrName>style.visibility</p:attrName>
+                                        </p:attrNameLst>
+                                      </p:cBhvr>
+                                      <p:to>
+                                        <p:strVal val="visible"/>
+                                      </p:to>
+                                    </p:set>
+                                    <p:animEffect transition="in" filter="fade">
+                                      <p:cBhvr>
+                                        <p:cTn id="7" dur="500"/>
+                                        <p:tgtEl>
+                                          <p:spTgt spid="19"/>
+                                        </p:tgtEl>
+                                      </p:cBhvr>
+                                    </p:animEffect>
+                                  </p:childTnLst>
+                                </p:cTn>
+                              </p:par>
+                            </p:childTnLst>
+                          </p:cTn>
+                        </p:par>
+                      </p:childTnLst>
+                    </p:cTn>
+                  </p:par>
+                  <p:par>
+                    <p:cTn id="8" fill="hold">
+                      <p:stCondLst>
+                        <p:cond delay="indefinite"/>
+                      </p:stCondLst>
+                      <p:childTnLst>
+                        <p:par>
+                          <p:cTn id="9" fill="hold">
+                            <p:stCondLst>
+                              <p:cond delay="0"/>
+                            </p:stCondLst>
+                            <p:childTnLst>
+                              <p:par>
+                                <p:cTn id="10" presetID="10" presetClass="entr" presetSubtype="0" fill="hold" grpId="0" nodeType="clickEffect">
+                                  <p:stCondLst>
+                                    <p:cond delay="0"/>
+                                  </p:stCondLst>
+                                  <p:childTnLst>
+                                    <p:set>
+                                      <p:cBhvr>
+                                        <p:cTn id="11" dur="1" fill="hold">
+                                          <p:stCondLst>
+                                            <p:cond delay="0"/>
+                                          </p:stCondLst>
+                                        </p:cTn>
+                                        <p:tgtEl>
+                                          <p:spTgt spid="20"/>
+                                        </p:tgtEl>
+                                        <p:attrNameLst>
+                                          <p:attrName>style.visibility</p:attrName>
+                                        </p:attrNameLst>
+                                      </p:cBhvr>
+                                      <p:to>
+                                        <p:strVal val="visible"/>
+                                      </p:to>
+                                    </p:set>
+                                    <p:animEffect transition="in" filter="fade">
+                                      <p:cBhvr>
+                                        <p:cTn id="12" dur="500"/>
+                                        <p:tgtEl>
+                                          <p:spTgt spid="20"/>
+                                        </p:tgtEl>
+                                      </p:cBhvr>
+                                    </p:animEffect>
+                                  </p:childTnLst>
+                                </p:cTn>
+                              </p:par>
+                            </p:childTnLst>
+                          </p:cTn>
+                        </p:par>
+                      </p:childTnLst>
+                    </p:cTn>
+                  </p:par>
+                </p:childTnLst>
+              </p:cTn>
+              <p:prevCondLst>
+                <p:cond evt="onPrev" delay="0">
+                  <p:tgtEl>
+                    <p:sldTgt/>
+                  </p:tgtEl>
+                </p:cond>
+              </p:prevCondLst>
+              <p:nextCondLst>
+                <p:cond evt="onNext" delay="0">
+                  <p:tgtEl>
+                    <p:sldTgt/>
+                  </p:tgtEl>
+                </p:cond>
+              </p:nextCondLst>
+            </p:seq>
+          </p:childTnLst>
+        </p:cTn>
+      </p:par>
+    </p:tnLst>
+  </p:timing>
+</p:sld>
+</file>
+
+<file path=ppt/slides/slide19.xml><?xml version="1.0" encoding="utf-8"?>
+<p:sld xmlns:a="http://schemas.openxmlformats.org/drawingml/2006/main" xmlns:p="http://schemas.openxmlformats.org/presentationml/2006/main" xmlns:r="http://schemas.openxmlformats.org/officeDocument/2006/relationships">
+  <p:cSld>
+    <p:spTree>
+      <p:nvGrpSpPr>
+        <p:cNvPr id="1" name=""/>
+        <p:cNvGrpSpPr/>
+        <p:nvPr/>
+      </p:nvGrpSpPr>
+      <p:grpSpPr/>
+      <p:sp>
+        <p:nvSpPr>
+          <p:cNvPr id="2" name="Rectangle 1"/>
+          <p:cNvSpPr/>
+          <p:nvPr/>
+        </p:nvSpPr>
+        <p:spPr>
+          <a:xfrm>
+            <a:off x="0" y="0"/>
+            <a:ext cx="12191695" cy="6858000"/>
+          </a:xfrm>
+          <a:prstGeom prst="rect">
+            <a:avLst/>
+          </a:prstGeom>
+          <a:solidFill>
+            <a:srgbClr val="FCFBF8"/>
+          </a:solidFill>
+          <a:ln>
+            <a:noFill/>
+          </a:ln>
+          <a:effectLst/>
+        </p:spPr>
+        <p:style>
+          <a:lnRef idx="1">
+            <a:schemeClr val="accent1"/>
+          </a:lnRef>
+          <a:fillRef idx="3">
+            <a:schemeClr val="accent1"/>
+          </a:fillRef>
+          <a:effectRef idx="2">
+            <a:schemeClr val="accent1"/>
+          </a:effectRef>
+          <a:fontRef idx="minor">
+            <a:schemeClr val="lt1"/>
+          </a:fontRef>
+        </p:style>
+        <p:txBody>
+          <a:bodyPr rtlCol="0" anchor="ctr"/>
+          <a:lstStyle/>
+          <a:p>
+            <a:pPr algn="ctr"/>
+          </a:p>
+        </p:txBody>
+      </p:sp>
+      <p:sp>
+        <p:nvSpPr>
+          <p:cNvPr id="3" name="Rectangle 2"/>
+          <p:cNvSpPr/>
+          <p:nvPr/>
+        </p:nvSpPr>
+        <p:spPr>
+          <a:xfrm>
+            <a:off x="0" y="0"/>
+            <a:ext cx="12191695" cy="1078992"/>
+          </a:xfrm>
+          <a:prstGeom prst="rect">
+            <a:avLst/>
+          </a:prstGeom>
+          <a:solidFill>
+            <a:srgbClr val="1E9E74"/>
+          </a:solidFill>
+          <a:ln>
+            <a:noFill/>
+          </a:ln>
+          <a:effectLst/>
+        </p:spPr>
+        <p:style>
+          <a:lnRef idx="1">
+            <a:schemeClr val="accent1"/>
+          </a:lnRef>
+          <a:fillRef idx="3">
+            <a:schemeClr val="accent1"/>
+          </a:fillRef>
+          <a:effectRef idx="2">
+            <a:schemeClr val="accent1"/>
+          </a:effectRef>
+          <a:fontRef idx="minor">
+            <a:schemeClr val="lt1"/>
+          </a:fontRef>
+        </p:style>
+        <p:txBody>
+          <a:bodyPr rtlCol="0" anchor="ctr"/>
+          <a:lstStyle/>
+          <a:p>
+            <a:pPr algn="ctr"/>
+          </a:p>
+        </p:txBody>
+      </p:sp>
+      <p:sp>
+        <p:nvSpPr>
+          <p:cNvPr id="4" name="Rectangle 3"/>
+          <p:cNvSpPr/>
+          <p:nvPr/>
+        </p:nvSpPr>
+        <p:spPr>
+          <a:xfrm>
+            <a:off x="0" y="1078992"/>
+            <a:ext cx="12191695" cy="54864"/>
+          </a:xfrm>
+          <a:prstGeom prst="rect">
+            <a:avLst/>
+          </a:prstGeom>
+          <a:solidFill>
+            <a:srgbClr val="157355"/>
+          </a:solidFill>
+          <a:ln>
+            <a:noFill/>
+          </a:ln>
+          <a:effectLst/>
+        </p:spPr>
+        <p:style>
+          <a:lnRef idx="1">
+            <a:schemeClr val="accent1"/>
+          </a:lnRef>
+          <a:fillRef idx="3">
+            <a:schemeClr val="accent1"/>
+          </a:fillRef>
+          <a:effectRef idx="2">
+            <a:schemeClr val="accent1"/>
+          </a:effectRef>
+          <a:fontRef idx="minor">
+            <a:schemeClr val="lt1"/>
+          </a:fontRef>
+        </p:style>
+        <p:txBody>
+          <a:bodyPr rtlCol="0" anchor="ctr"/>
+          <a:lstStyle/>
+          <a:p>
+            <a:pPr algn="ctr"/>
+          </a:p>
+        </p:txBody>
+      </p:sp>
+      <p:sp>
+        <p:nvSpPr>
+          <p:cNvPr id="5" name="Rounded Rectangle 4"/>
+          <p:cNvSpPr/>
+          <p:nvPr/>
+        </p:nvSpPr>
+        <p:spPr>
+          <a:xfrm>
+            <a:off x="502920" y="182880"/>
+            <a:ext cx="1128369" cy="292608"/>
+          </a:xfrm>
+          <a:prstGeom prst="roundRect">
+            <a:avLst>
+              <a:gd name="adj" fmla="val 50000"/>
+            </a:avLst>
+          </a:prstGeom>
+          <a:solidFill>
+            <a:srgbClr val="FFFFFF"/>
+          </a:solidFill>
+          <a:ln>
+            <a:noFill/>
+          </a:ln>
+          <a:effectLst/>
+        </p:spPr>
+        <p:style>
+          <a:lnRef idx="1">
+            <a:schemeClr val="accent1"/>
+          </a:lnRef>
+          <a:fillRef idx="3">
+            <a:schemeClr val="accent1"/>
+          </a:fillRef>
+          <a:effectRef idx="2">
+            <a:schemeClr val="accent1"/>
+          </a:effectRef>
+          <a:fontRef idx="minor">
+            <a:schemeClr val="lt1"/>
+          </a:fontRef>
+        </p:style>
+        <p:txBody>
+          <a:bodyPr rtlCol="0" anchor="ctr" wrap="none" lIns="88900" rIns="88900" tIns="12700" bIns="12700"/>
+          <a:lstStyle/>
+          <a:p>
+            <a:pPr algn="ctr"/>
+            <a:r>
+              <a:rPr sz="1100" b="1">
+                <a:solidFill>
+                  <a:srgbClr val="1E9E74"/>
+                </a:solidFill>
+                <a:latin typeface="Inter"/>
+              </a:rPr>
+              <a:t>§6 · ESCUCHA</a:t>
+            </a:r>
+          </a:p>
+        </p:txBody>
+      </p:sp>
+      <p:sp>
+        <p:nvSpPr>
+          <p:cNvPr id="6" name="TextBox 5"/>
+          <p:cNvSpPr txBox="1"/>
+          <p:nvPr/>
+        </p:nvSpPr>
+        <p:spPr>
+          <a:xfrm>
+            <a:off x="10424160" y="-137160"/>
+            <a:ext cx="1737360" cy="1371600"/>
+          </a:xfrm>
+          <a:prstGeom prst="rect">
+            <a:avLst/>
+          </a:prstGeom>
+          <a:noFill/>
+        </p:spPr>
+        <p:txBody>
+          <a:bodyPr wrap="square" anchor="t" lIns="38100" rIns="38100" tIns="25400" bIns="25400">
+            <a:spAutoFit/>
+          </a:bodyPr>
+          <a:lstStyle/>
+          <a:p>
+            <a:pPr algn="r">
+              <a:lnSpc>
+                <a:spcPct val="106000"/>
+              </a:lnSpc>
+              <a:spcBef>
+                <a:spcPts val="0"/>
+              </a:spcBef>
+              <a:spcAft>
+                <a:spcPts val="200"/>
+              </a:spcAft>
+            </a:pPr>
+            <a:r>
+              <a:rPr sz="8800" b="1" i="0">
+                <a:solidFill>
+                  <a:srgbClr val="FFFFFF"/>
+                </a:solidFill>
+                <a:latin typeface="Bricolage Grotesque"/>
+              </a:rPr>
+              <a:t>6</a:t>
+            </a:r>
+          </a:p>
+        </p:txBody>
+      </p:sp>
+      <p:sp>
+        <p:nvSpPr>
+          <p:cNvPr id="7" name="TextBox 6"/>
+          <p:cNvSpPr txBox="1"/>
+          <p:nvPr/>
+        </p:nvSpPr>
+        <p:spPr>
+          <a:xfrm>
+            <a:off x="457200" y="457200"/>
+            <a:ext cx="9692640" cy="502920"/>
+          </a:xfrm>
+          <a:prstGeom prst="rect">
+            <a:avLst/>
+          </a:prstGeom>
+          <a:noFill/>
+        </p:spPr>
+        <p:txBody>
+          <a:bodyPr wrap="square" anchor="ctr" lIns="38100" rIns="38100" tIns="25400" bIns="25400">
+            <a:spAutoFit/>
+          </a:bodyPr>
+          <a:lstStyle/>
+          <a:p>
+            <a:pPr algn="l">
+              <a:lnSpc>
+                <a:spcPct val="106000"/>
+              </a:lnSpc>
+              <a:spcBef>
+                <a:spcPts val="0"/>
+              </a:spcBef>
+              <a:spcAft>
+                <a:spcPts val="200"/>
+              </a:spcAft>
+            </a:pPr>
+            <a:r>
+              <a:rPr sz="2700" b="1" i="0">
+                <a:solidFill>
+                  <a:srgbClr val="FFFFFF"/>
+                </a:solidFill>
+                <a:latin typeface="Bricolage Grotesque"/>
+              </a:rPr>
+              <a:t>«En la puerta de embarque»</a:t>
+            </a:r>
+          </a:p>
+        </p:txBody>
+      </p:sp>
+      <p:sp>
+        <p:nvSpPr>
+          <p:cNvPr id="8" name="TextBox 7"/>
+          <p:cNvSpPr txBox="1"/>
+          <p:nvPr/>
+        </p:nvSpPr>
+        <p:spPr>
+          <a:xfrm>
+            <a:off x="502920" y="932688"/>
+            <a:ext cx="9692640" cy="274320"/>
+          </a:xfrm>
+          <a:prstGeom prst="rect">
+            <a:avLst/>
+          </a:prstGeom>
+          <a:noFill/>
+        </p:spPr>
+        <p:txBody>
+          <a:bodyPr wrap="square" anchor="t" lIns="38100" rIns="38100" tIns="25400" bIns="25400">
+            <a:spAutoFit/>
+          </a:bodyPr>
+          <a:lstStyle/>
+          <a:p>
+            <a:pPr algn="l">
+              <a:lnSpc>
+                <a:spcPct val="106000"/>
+              </a:lnSpc>
+              <a:spcBef>
+                <a:spcPts val="0"/>
+              </a:spcBef>
+              <a:spcAft>
+                <a:spcPts val="200"/>
+              </a:spcAft>
+            </a:pPr>
+            <a:r>
+              <a:rPr sz="1250" b="0" i="1">
+                <a:solidFill>
+                  <a:srgbClr val="E4F4EE"/>
+                </a:solidFill>
+                <a:latin typeface="Inter"/>
+              </a:rPr>
+              <a:t>Eerst de situatie, dan luisteren. Het transcript komt pas ná de taken.</a:t>
+            </a:r>
+          </a:p>
+        </p:txBody>
+      </p:sp>
+      <p:sp>
+        <p:nvSpPr>
+          <p:cNvPr id="9" name="Rounded Rectangle 8"/>
+          <p:cNvSpPr/>
+          <p:nvPr/>
+        </p:nvSpPr>
+        <p:spPr>
+          <a:xfrm>
+            <a:off x="457200" y="1325880"/>
+            <a:ext cx="11274552" cy="1051560"/>
+          </a:xfrm>
+          <a:prstGeom prst="roundRect">
+            <a:avLst>
+              <a:gd name="adj" fmla="val 5500"/>
+            </a:avLst>
+          </a:prstGeom>
+          <a:solidFill>
+            <a:srgbClr val="E4F4EE"/>
+          </a:solidFill>
+          <a:ln w="15240">
+            <a:solidFill>
+              <a:srgbClr val="1E9E74"/>
+            </a:solidFill>
+          </a:ln>
+          <a:effectLst/>
+          <a:effectLst>
+            <a:outerShdw blurRad="90000" dist="38000" dir="5400000" rotWithShape="0">
+              <a:srgbClr val="20242E">
+                <a:alpha val="22000"/>
+              </a:srgbClr>
+            </a:outerShdw>
+          </a:effectLst>
+        </p:spPr>
+        <p:style>
+          <a:lnRef idx="1">
+            <a:schemeClr val="accent1"/>
+          </a:lnRef>
+          <a:fillRef idx="3">
+            <a:schemeClr val="accent1"/>
+          </a:fillRef>
+          <a:effectRef idx="2">
+            <a:schemeClr val="accent1"/>
+          </a:effectRef>
+          <a:fontRef idx="minor">
+            <a:schemeClr val="lt1"/>
+          </a:fontRef>
+        </p:style>
+        <p:txBody>
+          <a:bodyPr rtlCol="0" anchor="ctr"/>
+          <a:lstStyle/>
+          <a:p>
+            <a:pPr algn="ctr"/>
+          </a:p>
+        </p:txBody>
+      </p:sp>
+      <p:sp>
+        <p:nvSpPr>
+          <p:cNvPr id="10" name="TextBox 9"/>
+          <p:cNvSpPr txBox="1"/>
+          <p:nvPr/>
+        </p:nvSpPr>
+        <p:spPr>
+          <a:xfrm>
+            <a:off x="640080" y="1417320"/>
+            <a:ext cx="10881360" cy="868680"/>
+          </a:xfrm>
+          <a:prstGeom prst="rect">
+            <a:avLst/>
+          </a:prstGeom>
+          <a:noFill/>
+        </p:spPr>
+        <p:txBody>
+          <a:bodyPr wrap="square" anchor="t" lIns="38100" rIns="38100" tIns="25400" bIns="25400">
+            <a:spAutoFit/>
+          </a:bodyPr>
+          <a:lstStyle/>
+          <a:p>
+            <a:pPr algn="l">
+              <a:lnSpc>
+                <a:spcPct val="120000"/>
+              </a:lnSpc>
+              <a:spcBef>
+                <a:spcPts val="0"/>
+              </a:spcBef>
+              <a:spcAft>
+                <a:spcPts val="200"/>
+              </a:spcAft>
+            </a:pPr>
+            <a:r>
+              <a:rPr sz="1100" b="1" i="0">
+                <a:solidFill>
+                  <a:srgbClr val="157355"/>
+                </a:solidFill>
+                <a:latin typeface="Inter"/>
+              </a:rPr>
+              <a:t>¿Dónde? </a:t>
+            </a:r>
+            <a:r>
+              <a:rPr sz="1100" b="0" i="0">
+                <a:solidFill>
+                  <a:srgbClr val="20242E"/>
+                </a:solidFill>
+                <a:latin typeface="Inter"/>
+              </a:rPr>
+              <a:t>El aeropuerto de Barajas, Madrid — puerta B12</a:t>
+            </a:r>
+            <a:r>
+              <a:rPr sz="1100" b="1" i="0">
+                <a:solidFill>
+                  <a:srgbClr val="157355"/>
+                </a:solidFill>
+                <a:latin typeface="Inter"/>
+              </a:rPr>
+              <a:t>     ¿Quién? </a:t>
+            </a:r>
+            <a:r>
+              <a:rPr sz="1100" b="0" i="0">
+                <a:solidFill>
+                  <a:srgbClr val="20242E"/>
+                </a:solidFill>
+                <a:latin typeface="Inter"/>
+              </a:rPr>
+              <a:t>Lucía (de Sevilla) y tú</a:t>
+            </a:r>
+          </a:p>
+          <a:p>
+            <a:pPr algn="l">
+              <a:lnSpc>
+                <a:spcPct val="120000"/>
+              </a:lnSpc>
+              <a:spcBef>
+                <a:spcPts val="0"/>
+              </a:spcBef>
+              <a:spcAft>
+                <a:spcPts val="200"/>
+              </a:spcAft>
+            </a:pPr>
+            <a:r>
+              <a:rPr sz="1100" b="1" i="0">
+                <a:solidFill>
+                  <a:srgbClr val="157355"/>
+                </a:solidFill>
+                <a:latin typeface="Inter"/>
+              </a:rPr>
+              <a:t>¿Qué pasa? </a:t>
+            </a:r>
+            <a:r>
+              <a:rPr sz="1100" b="0" i="0">
+                <a:solidFill>
+                  <a:srgbClr val="20242E"/>
+                </a:solidFill>
+                <a:latin typeface="Inter"/>
+              </a:rPr>
+              <a:t>Esperáis el mismo vuelo y os presentáis</a:t>
+            </a:r>
+          </a:p>
+          <a:p>
+            <a:pPr algn="l">
+              <a:lnSpc>
+                <a:spcPct val="120000"/>
+              </a:lnSpc>
+              <a:spcBef>
+                <a:spcPts val="0"/>
+              </a:spcBef>
+              <a:spcAft>
+                <a:spcPts val="200"/>
+              </a:spcAft>
+            </a:pPr>
+            <a:r>
+              <a:rPr sz="1050" b="1" i="0">
+                <a:solidFill>
+                  <a:srgbClr val="6A6E78"/>
+                </a:solidFill>
+                <a:latin typeface="Inter"/>
+              </a:rPr>
+              <a:t>Palabras clave: </a:t>
+            </a:r>
+            <a:r>
+              <a:rPr sz="1050" b="0" i="1">
+                <a:solidFill>
+                  <a:srgbClr val="20242E"/>
+                </a:solidFill>
+                <a:latin typeface="Inter"/>
+              </a:rPr>
+              <a:t>¿Cómo te llamas? · Soy de… · ¿Cómo se escribe?</a:t>
+            </a:r>
+          </a:p>
+        </p:txBody>
+      </p:sp>
+      <p:sp>
+        <p:nvSpPr>
+          <p:cNvPr id="11" name="Rounded Rectangle 10"/>
+          <p:cNvSpPr/>
+          <p:nvPr/>
+        </p:nvSpPr>
+        <p:spPr>
+          <a:xfrm>
+            <a:off x="457200" y="2514600"/>
+            <a:ext cx="5577840" cy="2971800"/>
+          </a:xfrm>
+          <a:prstGeom prst="roundRect">
+            <a:avLst>
+              <a:gd name="adj" fmla="val 5500"/>
+            </a:avLst>
+          </a:prstGeom>
+          <a:solidFill>
+            <a:srgbClr val="FFFFFF"/>
+          </a:solidFill>
+          <a:ln w="15240">
+            <a:solidFill>
+              <a:srgbClr val="E4E3DE"/>
+            </a:solidFill>
+          </a:ln>
+          <a:effectLst/>
+          <a:effectLst>
+            <a:outerShdw blurRad="90000" dist="38000" dir="5400000" rotWithShape="0">
+              <a:srgbClr val="20242E">
+                <a:alpha val="22000"/>
+              </a:srgbClr>
+            </a:outerShdw>
+          </a:effectLst>
+        </p:spPr>
+        <p:style>
+          <a:lnRef idx="1">
+            <a:schemeClr val="accent1"/>
+          </a:lnRef>
+          <a:fillRef idx="3">
+            <a:schemeClr val="accent1"/>
+          </a:fillRef>
+          <a:effectRef idx="2">
+            <a:schemeClr val="accent1"/>
+          </a:effectRef>
+          <a:fontRef idx="minor">
+            <a:schemeClr val="lt1"/>
+          </a:fontRef>
+        </p:style>
+        <p:txBody>
+          <a:bodyPr rtlCol="0" anchor="ctr"/>
+          <a:lstStyle/>
+          <a:p>
+            <a:pPr algn="ctr"/>
+          </a:p>
+        </p:txBody>
+      </p:sp>
+      <p:sp>
+        <p:nvSpPr>
+          <p:cNvPr id="12" name="TextBox 11"/>
+          <p:cNvSpPr txBox="1"/>
+          <p:nvPr/>
+        </p:nvSpPr>
+        <p:spPr>
+          <a:xfrm>
+            <a:off x="640080" y="2606040"/>
+            <a:ext cx="5212080" cy="292608"/>
+          </a:xfrm>
+          <a:prstGeom prst="rect">
+            <a:avLst/>
+          </a:prstGeom>
+          <a:noFill/>
+        </p:spPr>
+        <p:txBody>
+          <a:bodyPr wrap="square" anchor="t" lIns="38100" rIns="38100" tIns="25400" bIns="25400">
+            <a:spAutoFit/>
+          </a:bodyPr>
+          <a:lstStyle/>
+          <a:p>
+            <a:pPr algn="l">
+              <a:lnSpc>
+                <a:spcPct val="106000"/>
+              </a:lnSpc>
+              <a:spcBef>
+                <a:spcPts val="0"/>
+              </a:spcBef>
+              <a:spcAft>
+                <a:spcPts val="200"/>
+              </a:spcAft>
+            </a:pPr>
+            <a:r>
+              <a:rPr sz="1200" b="1" i="0">
+                <a:solidFill>
+                  <a:srgbClr val="157355"/>
+                </a:solidFill>
+                <a:latin typeface="Bricolage Grotesque"/>
+              </a:rPr>
+              <a:t>Escucha con detalle</a:t>
+            </a:r>
+          </a:p>
+        </p:txBody>
+      </p:sp>
+      <p:sp>
+        <p:nvSpPr>
+          <p:cNvPr id="13" name="TextBox 12"/>
+          <p:cNvSpPr txBox="1"/>
+          <p:nvPr/>
+        </p:nvSpPr>
+        <p:spPr>
+          <a:xfrm>
+            <a:off x="640080" y="2944368"/>
+            <a:ext cx="5212080" cy="2377440"/>
+          </a:xfrm>
+          <a:prstGeom prst="rect">
+            <a:avLst/>
+          </a:prstGeom>
+          <a:noFill/>
+        </p:spPr>
+        <p:txBody>
+          <a:bodyPr wrap="square" anchor="t" lIns="38100" rIns="38100" tIns="25400" bIns="25400">
+            <a:spAutoFit/>
+          </a:bodyPr>
+          <a:lstStyle/>
+          <a:p>
+            <a:pPr algn="l">
+              <a:lnSpc>
+                <a:spcPct val="135000"/>
+              </a:lnSpc>
+              <a:spcBef>
+                <a:spcPts val="0"/>
+              </a:spcBef>
+              <a:spcAft>
+                <a:spcPts val="200"/>
+              </a:spcAft>
+            </a:pPr>
+            <a:r>
+              <a:rPr sz="1050" b="0" i="0">
+                <a:solidFill>
+                  <a:srgbClr val="20242E"/>
+                </a:solidFill>
+                <a:latin typeface="Inter"/>
+              </a:rPr>
+              <a:t>1. ¿Cuál es la puerta de embarque?</a:t>
+            </a:r>
+          </a:p>
+          <a:p>
+            <a:pPr algn="l">
+              <a:lnSpc>
+                <a:spcPct val="135000"/>
+              </a:lnSpc>
+              <a:spcBef>
+                <a:spcPts val="0"/>
+              </a:spcBef>
+              <a:spcAft>
+                <a:spcPts val="200"/>
+              </a:spcAft>
+            </a:pPr>
+            <a:r>
+              <a:rPr sz="1050" b="0" i="0">
+                <a:solidFill>
+                  <a:srgbClr val="20242E"/>
+                </a:solidFill>
+                <a:latin typeface="Inter"/>
+              </a:rPr>
+              <a:t>2. ¿De dónde es Lucía?</a:t>
+            </a:r>
+          </a:p>
+          <a:p>
+            <a:pPr algn="l">
+              <a:lnSpc>
+                <a:spcPct val="135000"/>
+              </a:lnSpc>
+              <a:spcBef>
+                <a:spcPts val="0"/>
+              </a:spcBef>
+              <a:spcAft>
+                <a:spcPts val="200"/>
+              </a:spcAft>
+            </a:pPr>
+            <a:r>
+              <a:rPr sz="1050" b="0" i="0">
+                <a:solidFill>
+                  <a:srgbClr val="20242E"/>
+                </a:solidFill>
+                <a:latin typeface="Inter"/>
+              </a:rPr>
+              <a:t>3. ¿Cuántos años tiene Sam?</a:t>
+            </a:r>
+          </a:p>
+          <a:p>
+            <a:pPr algn="l">
+              <a:lnSpc>
+                <a:spcPct val="135000"/>
+              </a:lnSpc>
+              <a:spcBef>
+                <a:spcPts val="0"/>
+              </a:spcBef>
+              <a:spcAft>
+                <a:spcPts val="200"/>
+              </a:spcAft>
+            </a:pPr>
+            <a:r>
+              <a:rPr sz="1050" b="0" i="0">
+                <a:solidFill>
+                  <a:srgbClr val="20242E"/>
+                </a:solidFill>
+                <a:latin typeface="Inter"/>
+              </a:rPr>
+              <a:t>4. ¿Cuántos años tiene Lucía?</a:t>
+            </a:r>
+          </a:p>
+          <a:p>
+            <a:pPr algn="l">
+              <a:lnSpc>
+                <a:spcPct val="135000"/>
+              </a:lnSpc>
+              <a:spcBef>
+                <a:spcPts val="0"/>
+              </a:spcBef>
+              <a:spcAft>
+                <a:spcPts val="200"/>
+              </a:spcAft>
+            </a:pPr>
+            <a:r>
+              <a:rPr sz="1050" b="0" i="0">
+                <a:solidFill>
+                  <a:srgbClr val="20242E"/>
+                </a:solidFill>
+                <a:latin typeface="Inter"/>
+              </a:rPr>
+              <a:t>5. ¿A qué hora sale el vuelo?</a:t>
+            </a:r>
+          </a:p>
+        </p:txBody>
+      </p:sp>
+      <p:sp>
+        <p:nvSpPr>
+          <p:cNvPr id="14" name="Rounded Rectangle 13"/>
+          <p:cNvSpPr/>
+          <p:nvPr/>
+        </p:nvSpPr>
+        <p:spPr>
+          <a:xfrm>
+            <a:off x="6263640" y="2514600"/>
+            <a:ext cx="5468112" cy="2971800"/>
+          </a:xfrm>
+          <a:prstGeom prst="roundRect">
+            <a:avLst>
+              <a:gd name="adj" fmla="val 5500"/>
+            </a:avLst>
+          </a:prstGeom>
+          <a:solidFill>
+            <a:srgbClr val="F3EEE4"/>
+          </a:solidFill>
+          <a:ln w="15240">
+            <a:solidFill>
+              <a:srgbClr val="E4E3DE"/>
+            </a:solidFill>
+          </a:ln>
+          <a:effectLst/>
+          <a:effectLst>
+            <a:outerShdw blurRad="90000" dist="38000" dir="5400000" rotWithShape="0">
+              <a:srgbClr val="20242E">
+                <a:alpha val="22000"/>
+              </a:srgbClr>
+            </a:outerShdw>
+          </a:effectLst>
+        </p:spPr>
+        <p:style>
+          <a:lnRef idx="1">
+            <a:schemeClr val="accent1"/>
+          </a:lnRef>
+          <a:fillRef idx="3">
+            <a:schemeClr val="accent1"/>
+          </a:fillRef>
+          <a:effectRef idx="2">
+            <a:schemeClr val="accent1"/>
+          </a:effectRef>
+          <a:fontRef idx="minor">
+            <a:schemeClr val="lt1"/>
+          </a:fontRef>
+        </p:style>
+        <p:txBody>
+          <a:bodyPr rtlCol="0" anchor="ctr"/>
+          <a:lstStyle/>
+          <a:p>
+            <a:pPr algn="ctr"/>
+          </a:p>
+        </p:txBody>
+      </p:sp>
+      <p:sp>
+        <p:nvSpPr>
+          <p:cNvPr id="15" name="TextBox 14"/>
+          <p:cNvSpPr txBox="1"/>
+          <p:nvPr/>
+        </p:nvSpPr>
+        <p:spPr>
+          <a:xfrm>
+            <a:off x="6446520" y="2606040"/>
+            <a:ext cx="5120640" cy="292608"/>
+          </a:xfrm>
+          <a:prstGeom prst="rect">
+            <a:avLst/>
+          </a:prstGeom>
+          <a:noFill/>
+        </p:spPr>
+        <p:txBody>
+          <a:bodyPr wrap="square" anchor="t" lIns="38100" rIns="38100" tIns="25400" bIns="25400">
+            <a:spAutoFit/>
+          </a:bodyPr>
+          <a:lstStyle/>
+          <a:p>
+            <a:pPr algn="l">
+              <a:lnSpc>
+                <a:spcPct val="106000"/>
+              </a:lnSpc>
+              <a:spcBef>
+                <a:spcPts val="0"/>
+              </a:spcBef>
+              <a:spcAft>
+                <a:spcPts val="200"/>
+              </a:spcAft>
+            </a:pPr>
+            <a:r>
+              <a:rPr sz="1200" b="1" i="0">
+                <a:solidFill>
+                  <a:srgbClr val="157355"/>
+                </a:solidFill>
+                <a:latin typeface="Bricolage Grotesque"/>
+              </a:rPr>
+              <a:t>¿Verdadero o falso? — y la prueba</a:t>
+            </a:r>
+          </a:p>
+        </p:txBody>
+      </p:sp>
+      <p:sp>
+        <p:nvSpPr>
+          <p:cNvPr id="16" name="TextBox 15"/>
+          <p:cNvSpPr txBox="1"/>
+          <p:nvPr/>
+        </p:nvSpPr>
+        <p:spPr>
+          <a:xfrm>
+            <a:off x="6446520" y="2944368"/>
+            <a:ext cx="5120640" cy="1463040"/>
+          </a:xfrm>
+          <a:prstGeom prst="rect">
+            <a:avLst/>
+          </a:prstGeom>
+          <a:noFill/>
+        </p:spPr>
+        <p:txBody>
+          <a:bodyPr wrap="square" anchor="t" lIns="38100" rIns="38100" tIns="25400" bIns="25400">
+            <a:spAutoFit/>
+          </a:bodyPr>
+          <a:lstStyle/>
+          <a:p>
+            <a:pPr algn="l">
+              <a:lnSpc>
+                <a:spcPct val="135000"/>
+              </a:lnSpc>
+              <a:spcBef>
+                <a:spcPts val="0"/>
+              </a:spcBef>
+              <a:spcAft>
+                <a:spcPts val="200"/>
+              </a:spcAft>
+            </a:pPr>
+            <a:r>
+              <a:rPr sz="1050" b="0" i="0">
+                <a:solidFill>
+                  <a:srgbClr val="20242E"/>
+                </a:solidFill>
+                <a:latin typeface="Inter"/>
+              </a:rPr>
+              <a:t>1. Sam habla dos lenguas.</a:t>
+            </a:r>
+          </a:p>
+          <a:p>
+            <a:pPr algn="l">
+              <a:lnSpc>
+                <a:spcPct val="135000"/>
+              </a:lnSpc>
+              <a:spcBef>
+                <a:spcPts val="0"/>
+              </a:spcBef>
+              <a:spcAft>
+                <a:spcPts val="200"/>
+              </a:spcAft>
+            </a:pPr>
+            <a:r>
+              <a:rPr sz="1050" b="0" i="0">
+                <a:solidFill>
+                  <a:srgbClr val="20242E"/>
+                </a:solidFill>
+                <a:latin typeface="Inter"/>
+              </a:rPr>
+              <a:t>2. Lucía es de Madrid.</a:t>
+            </a:r>
+          </a:p>
+          <a:p>
+            <a:pPr algn="l">
+              <a:lnSpc>
+                <a:spcPct val="135000"/>
+              </a:lnSpc>
+              <a:spcBef>
+                <a:spcPts val="0"/>
+              </a:spcBef>
+              <a:spcAft>
+                <a:spcPts val="200"/>
+              </a:spcAft>
+            </a:pPr>
+            <a:r>
+              <a:rPr sz="1050" b="0" i="0">
+                <a:solidFill>
+                  <a:srgbClr val="20242E"/>
+                </a:solidFill>
+                <a:latin typeface="Inter"/>
+              </a:rPr>
+              <a:t>3. Sam deletrea su nombre.</a:t>
+            </a:r>
+          </a:p>
+        </p:txBody>
+      </p:sp>
+      <p:sp>
+        <p:nvSpPr>
+          <p:cNvPr id="17" name="TextBox 16"/>
+          <p:cNvSpPr txBox="1"/>
+          <p:nvPr/>
+        </p:nvSpPr>
+        <p:spPr>
+          <a:xfrm>
+            <a:off x="6446520" y="4572000"/>
+            <a:ext cx="5120640" cy="822960"/>
+          </a:xfrm>
+          <a:prstGeom prst="rect">
+            <a:avLst/>
+          </a:prstGeom>
+          <a:noFill/>
+        </p:spPr>
+        <p:txBody>
+          <a:bodyPr wrap="square" anchor="t" lIns="38100" rIns="38100" tIns="25400" bIns="25400">
+            <a:spAutoFit/>
+          </a:bodyPr>
+          <a:lstStyle/>
+          <a:p>
+            <a:pPr algn="l">
+              <a:lnSpc>
+                <a:spcPct val="120000"/>
+              </a:lnSpc>
+              <a:spcBef>
+                <a:spcPts val="0"/>
+              </a:spcBef>
+              <a:spcAft>
+                <a:spcPts val="200"/>
+              </a:spcAft>
+            </a:pPr>
+            <a:r>
+              <a:rPr sz="1050" b="1" i="0">
+                <a:solidFill>
+                  <a:srgbClr val="157355"/>
+                </a:solidFill>
+                <a:latin typeface="Inter"/>
+              </a:rPr>
+              <a:t>Tu reacción: </a:t>
+            </a:r>
+            <a:r>
+              <a:rPr sz="1000" b="0" i="0">
+                <a:solidFill>
+                  <a:srgbClr val="20242E"/>
+                </a:solidFill>
+                <a:latin typeface="Inter"/>
+              </a:rPr>
+              <a:t>Lucía te pregunta: «¿Y tú, cómo te llamas y de dónde eres?» Contesta en tres frases: nombre · origen · edad.</a:t>
+            </a:r>
+          </a:p>
+        </p:txBody>
+      </p:sp>
+      <p:sp>
+        <p:nvSpPr>
+          <p:cNvPr id="18" name="Rounded Rectangle 17"/>
+          <p:cNvSpPr/>
+          <p:nvPr/>
+        </p:nvSpPr>
+        <p:spPr>
+          <a:xfrm>
+            <a:off x="457200" y="5596128"/>
+            <a:ext cx="11274552" cy="658368"/>
+          </a:xfrm>
+          <a:prstGeom prst="roundRect">
+            <a:avLst>
+              <a:gd name="adj" fmla="val 6000"/>
+            </a:avLst>
+          </a:prstGeom>
+          <a:solidFill>
+            <a:srgbClr val="E4F4EE"/>
+          </a:solidFill>
+          <a:ln w="19050">
+            <a:solidFill>
+              <a:srgbClr val="1E9E74"/>
+            </a:solidFill>
+          </a:ln>
+          <a:effectLst/>
+        </p:spPr>
+        <p:style>
+          <a:lnRef idx="1">
+            <a:schemeClr val="accent1"/>
+          </a:lnRef>
+          <a:fillRef idx="3">
+            <a:schemeClr val="accent1"/>
+          </a:fillRef>
+          <a:effectRef idx="2">
+            <a:schemeClr val="accent1"/>
+          </a:effectRef>
+          <a:fontRef idx="minor">
+            <a:schemeClr val="lt1"/>
+          </a:fontRef>
+        </p:style>
+        <p:txBody>
+          <a:bodyPr rtlCol="0" anchor="ctr" wrap="square" lIns="127000" rIns="127000" tIns="139700" bIns="76200"/>
+          <a:lstStyle/>
+          <a:p>
+            <a:pPr algn="ctr">
+              <a:lnSpc>
+                <a:spcPct val="102000"/>
+              </a:lnSpc>
+              <a:spcBef>
+                <a:spcPts val="0"/>
+              </a:spcBef>
+              <a:spcAft>
+                <a:spcPts val="300"/>
+              </a:spcAft>
+            </a:pPr>
+            <a:r>
+              <a:rPr sz="1200" b="0" i="0">
+                <a:solidFill>
+                  <a:srgbClr val="157355"/>
+                </a:solidFill>
+                <a:latin typeface="Inter"/>
+              </a:rPr>
+              <a:t>Detalle: 1) B12 · 2) De Sevilla · 3) 16 · 4) 17 · 5) A las once</a:t>
+            </a:r>
+          </a:p>
+          <a:p>
+            <a:pPr>
+              <a:lnSpc>
+                <a:spcPct val="102000"/>
+              </a:lnSpc>
+              <a:spcBef>
+                <a:spcPts val="0"/>
+              </a:spcBef>
+              <a:spcAft>
+                <a:spcPts val="300"/>
+              </a:spcAft>
+            </a:pPr>
+            <a:r>
+              <a:rPr sz="1200" b="0" i="0">
+                <a:solidFill>
+                  <a:srgbClr val="157355"/>
+                </a:solidFill>
+                <a:latin typeface="Inter"/>
+              </a:rPr>
+              <a:t>1) V — «Hablo neerlandés y un poco de español»</a:t>
+            </a:r>
+          </a:p>
+          <a:p>
+            <a:pPr>
+              <a:lnSpc>
+                <a:spcPct val="102000"/>
+              </a:lnSpc>
+              <a:spcBef>
+                <a:spcPts val="0"/>
+              </a:spcBef>
+              <a:spcAft>
+                <a:spcPts val="300"/>
+              </a:spcAft>
+            </a:pPr>
+            <a:r>
+              <a:rPr sz="1200" b="0" i="0">
+                <a:solidFill>
+                  <a:srgbClr val="157355"/>
+                </a:solidFill>
+                <a:latin typeface="Inter"/>
+              </a:rPr>
+              <a:t>2) F — «Yo soy de Sevilla»</a:t>
+            </a:r>
+          </a:p>
+          <a:p>
+            <a:pPr>
+              <a:lnSpc>
+                <a:spcPct val="102000"/>
+              </a:lnSpc>
+              <a:spcBef>
+                <a:spcPts val="0"/>
+              </a:spcBef>
+              <a:spcAft>
+                <a:spcPts val="300"/>
+              </a:spcAft>
+            </a:pPr>
+            <a:r>
+              <a:rPr sz="1200" b="0" i="0">
+                <a:solidFill>
+                  <a:srgbClr val="157355"/>
+                </a:solidFill>
+                <a:latin typeface="Inter"/>
+              </a:rPr>
+              <a:t>3) V — «Ese, a, eme»</a:t>
+            </a:r>
+          </a:p>
+        </p:txBody>
+      </p:sp>
+      <p:sp>
+        <p:nvSpPr>
+          <p:cNvPr id="19" name="Rounded Rectangle 18"/>
+          <p:cNvSpPr/>
+          <p:nvPr/>
+        </p:nvSpPr>
+        <p:spPr>
+          <a:xfrm>
+            <a:off x="594360" y="5468112"/>
+            <a:ext cx="1548993" cy="292608"/>
+          </a:xfrm>
+          <a:prstGeom prst="roundRect">
+            <a:avLst>
+              <a:gd name="adj" fmla="val 50000"/>
+            </a:avLst>
+          </a:prstGeom>
+          <a:solidFill>
+            <a:srgbClr val="1E9E74"/>
+          </a:solidFill>
+          <a:ln>
+            <a:noFill/>
+          </a:ln>
+          <a:effectLst/>
+        </p:spPr>
+        <p:style>
+          <a:lnRef idx="1">
+            <a:schemeClr val="accent1"/>
+          </a:lnRef>
+          <a:fillRef idx="3">
+            <a:schemeClr val="accent1"/>
+          </a:fillRef>
+          <a:effectRef idx="2">
+            <a:schemeClr val="accent1"/>
+          </a:effectRef>
+          <a:fontRef idx="minor">
+            <a:schemeClr val="lt1"/>
+          </a:fontRef>
+        </p:style>
+        <p:txBody>
+          <a:bodyPr rtlCol="0" anchor="ctr" wrap="none" lIns="88900" rIns="88900" tIns="12700" bIns="12700"/>
+          <a:lstStyle/>
+          <a:p>
+            <a:pPr algn="ctr"/>
+            <a:r>
+              <a:rPr sz="950" b="1">
+                <a:solidFill>
+                  <a:srgbClr val="FFFFFF"/>
+                </a:solidFill>
+                <a:latin typeface="Inter"/>
+              </a:rPr>
+              <a:t>SOLUCIÓN · docent</a:t>
+            </a:r>
+          </a:p>
+        </p:txBody>
+      </p:sp>
+      <p:sp>
+        <p:nvSpPr>
+          <p:cNvPr id="20" name="Rectangle 19"/>
+          <p:cNvSpPr/>
+          <p:nvPr/>
+        </p:nvSpPr>
+        <p:spPr>
+          <a:xfrm>
+            <a:off x="0" y="6547104"/>
+            <a:ext cx="12191695" cy="310896"/>
+          </a:xfrm>
+          <a:prstGeom prst="rect">
+            <a:avLst/>
+          </a:prstGeom>
+          <a:solidFill>
+            <a:srgbClr val="F3EEE4"/>
+          </a:solidFill>
+          <a:ln>
+            <a:noFill/>
+          </a:ln>
+          <a:effectLst/>
+        </p:spPr>
+        <p:style>
+          <a:lnRef idx="1">
+            <a:schemeClr val="accent1"/>
+          </a:lnRef>
+          <a:fillRef idx="3">
+            <a:schemeClr val="accent1"/>
+          </a:fillRef>
+          <a:effectRef idx="2">
+            <a:schemeClr val="accent1"/>
+          </a:effectRef>
+          <a:fontRef idx="minor">
+            <a:schemeClr val="lt1"/>
+          </a:fontRef>
+        </p:style>
+        <p:txBody>
+          <a:bodyPr rtlCol="0" anchor="ctr"/>
+          <a:lstStyle/>
+          <a:p>
+            <a:pPr algn="ctr"/>
+          </a:p>
+        </p:txBody>
+      </p:sp>
+      <p:sp>
+        <p:nvSpPr>
+          <p:cNvPr id="21" name="TextBox 20"/>
+          <p:cNvSpPr txBox="1"/>
+          <p:nvPr/>
+        </p:nvSpPr>
+        <p:spPr>
+          <a:xfrm>
+            <a:off x="411480" y="6565392"/>
+            <a:ext cx="5486400" cy="274320"/>
+          </a:xfrm>
+          <a:prstGeom prst="rect">
+            <a:avLst/>
+          </a:prstGeom>
+          <a:noFill/>
+        </p:spPr>
+        <p:txBody>
+          <a:bodyPr wrap="square" anchor="ctr" lIns="38100" rIns="38100" tIns="25400" bIns="25400">
+            <a:spAutoFit/>
+          </a:bodyPr>
+          <a:lstStyle/>
+          <a:p>
+            <a:pPr algn="l">
+              <a:lnSpc>
+                <a:spcPct val="106000"/>
+              </a:lnSpc>
+              <a:spcBef>
+                <a:spcPts val="0"/>
+              </a:spcBef>
+              <a:spcAft>
+                <a:spcPts val="200"/>
+              </a:spcAft>
+            </a:pPr>
+            <a:r>
+              <a:rPr sz="1100" b="1" i="0">
+                <a:solidFill>
+                  <a:srgbClr val="1E9E74"/>
+                </a:solidFill>
+                <a:latin typeface="Inter"/>
+              </a:rPr>
+              <a:t>● </a:t>
+            </a:r>
+            <a:r>
+              <a:rPr sz="950" b="0" i="0">
+                <a:solidFill>
+                  <a:srgbClr val="6A6E78"/>
+                </a:solidFill>
+                <a:latin typeface="Inter"/>
+              </a:rPr>
+              <a:t>U0 · ¡EMPEZAMOS!   ·   C5 · A1 · La Ruta</a:t>
+            </a:r>
+          </a:p>
+        </p:txBody>
+      </p:sp>
+      <p:sp>
+        <p:nvSpPr>
+          <p:cNvPr id="22" name="TextBox 21"/>
+          <p:cNvSpPr txBox="1"/>
+          <p:nvPr/>
+        </p:nvSpPr>
+        <p:spPr>
+          <a:xfrm>
+            <a:off x="8686800" y="6565392"/>
+            <a:ext cx="3063240" cy="274320"/>
+          </a:xfrm>
+          <a:prstGeom prst="rect">
+            <a:avLst/>
+          </a:prstGeom>
+          <a:noFill/>
+        </p:spPr>
+        <p:txBody>
+          <a:bodyPr wrap="square" anchor="ctr" lIns="38100" rIns="38100" tIns="25400" bIns="25400">
+            <a:spAutoFit/>
+          </a:bodyPr>
+          <a:lstStyle/>
+          <a:p>
+            <a:pPr algn="r">
+              <a:lnSpc>
+                <a:spcPct val="106000"/>
+              </a:lnSpc>
+              <a:spcBef>
+                <a:spcPts val="0"/>
+              </a:spcBef>
+              <a:spcAft>
+                <a:spcPts val="200"/>
+              </a:spcAft>
+            </a:pPr>
+            <a:r>
+              <a:rPr sz="900" b="0" i="1">
+                <a:solidFill>
+                  <a:srgbClr val="6A6E78"/>
+                </a:solidFill>
+                <a:latin typeface="Inter"/>
+              </a:rPr>
+              <a:t>Docentenversie — met oplossingen</a:t>
+            </a:r>
+          </a:p>
+        </p:txBody>
+      </p:sp>
+      <p:sp>
+        <p:nvSpPr>
+          <p:cNvPr id="23" name="TextBox 22"/>
+          <p:cNvSpPr txBox="1"/>
+          <p:nvPr/>
+        </p:nvSpPr>
+        <p:spPr>
+          <a:xfrm>
+            <a:off x="11475720" y="6565392"/>
+            <a:ext cx="457200" cy="274320"/>
+          </a:xfrm>
+          <a:prstGeom prst="rect">
+            <a:avLst/>
+          </a:prstGeom>
+          <a:noFill/>
+        </p:spPr>
+        <p:txBody>
+          <a:bodyPr wrap="square" anchor="ctr" lIns="38100" rIns="38100" tIns="25400" bIns="25400">
+            <a:spAutoFit/>
+          </a:bodyPr>
+          <a:lstStyle/>
+          <a:p>
+            <a:pPr algn="r">
+              <a:lnSpc>
+                <a:spcPct val="106000"/>
+              </a:lnSpc>
+              <a:spcBef>
+                <a:spcPts val="0"/>
+              </a:spcBef>
+              <a:spcAft>
+                <a:spcPts val="200"/>
+              </a:spcAft>
+            </a:pPr>
+            <a:r>
+              <a:rPr sz="950" b="1" i="0">
+                <a:solidFill>
+                  <a:srgbClr val="157355"/>
+                </a:solidFill>
+                <a:latin typeface="Inter"/>
+              </a:rPr>
+              <a:t>19</a:t>
+            </a:r>
+          </a:p>
+        </p:txBody>
+      </p:sp>
+    </p:spTree>
+  </p:cSld>
+  <p:clrMapOvr>
+    <a:masterClrMapping/>
+  </p:clrMapOvr>
+  <p:timing>
+    <p:tnLst>
+      <p:par>
+        <p:cTn id="1" dur="indefinite" restart="never" nodeType="tmRoot">
+          <p:childTnLst>
+            <p:seq concurrent="1" nextAc="seek">
+              <p:cTn id="2" dur="indefinite" nodeType="mainSeq">
+                <p:childTnLst>
+                  <p:par>
+                    <p:cTn id="3" fill="hold">
+                      <p:stCondLst>
+                        <p:cond delay="indefinite"/>
+                      </p:stCondLst>
+                      <p:childTnLst>
+                        <p:par>
+                          <p:cTn id="4" fill="hold">
+                            <p:stCondLst>
+                              <p:cond delay="0"/>
+                            </p:stCondLst>
+                            <p:childTnLst>
+                              <p:par>
+                                <p:cTn id="5" presetID="10" presetClass="entr" presetSubtype="0" fill="hold" grpId="0" nodeType="clickEffect">
+                                  <p:stCondLst>
+                                    <p:cond delay="0"/>
+                                  </p:stCondLst>
+                                  <p:childTnLst>
+                                    <p:set>
+                                      <p:cBhvr>
+                                        <p:cTn id="6" dur="1" fill="hold">
+                                          <p:stCondLst>
+                                            <p:cond delay="0"/>
+                                          </p:stCondLst>
+                                        </p:cTn>
+                                        <p:tgtEl>
+                                          <p:spTgt spid="18"/>
+                                        </p:tgtEl>
+                                        <p:attrNameLst>
+                                          <p:attrName>style.visibility</p:attrName>
+                                        </p:attrNameLst>
+                                      </p:cBhvr>
+                                      <p:to>
+                                        <p:strVal val="visible"/>
+                                      </p:to>
+                                    </p:set>
+                                    <p:animEffect transition="in" filter="fade">
+                                      <p:cBhvr>
+                                        <p:cTn id="7" dur="500"/>
+                                        <p:tgtEl>
+                                          <p:spTgt spid="18"/>
+                                        </p:tgtEl>
+                                      </p:cBhvr>
+                                    </p:animEffect>
+                                  </p:childTnLst>
+                                </p:cTn>
+                              </p:par>
+                            </p:childTnLst>
+                          </p:cTn>
+                        </p:par>
+                      </p:childTnLst>
+                    </p:cTn>
+                  </p:par>
+                  <p:par>
+                    <p:cTn id="8" fill="hold">
+                      <p:stCondLst>
+                        <p:cond delay="indefinite"/>
+                      </p:stCondLst>
+                      <p:childTnLst>
+                        <p:par>
+                          <p:cTn id="9" fill="hold">
+                            <p:stCondLst>
+                              <p:cond delay="0"/>
+                            </p:stCondLst>
+                            <p:childTnLst>
+                              <p:par>
+                                <p:cTn id="10" presetID="10" presetClass="entr" presetSubtype="0" fill="hold" grpId="0" nodeType="clickEffect">
+                                  <p:stCondLst>
+                                    <p:cond delay="0"/>
+                                  </p:stCondLst>
+                                  <p:childTnLst>
+                                    <p:set>
+                                      <p:cBhvr>
+                                        <p:cTn id="11" dur="1" fill="hold">
+                                          <p:stCondLst>
+                                            <p:cond delay="0"/>
+                                          </p:stCondLst>
+                                        </p:cTn>
+                                        <p:tgtEl>
+                                          <p:spTgt spid="19"/>
+                                        </p:tgtEl>
+                                        <p:attrNameLst>
+                                          <p:attrName>style.visibility</p:attrName>
+                                        </p:attrNameLst>
+                                      </p:cBhvr>
+                                      <p:to>
+                                        <p:strVal val="visible"/>
+                                      </p:to>
+                                    </p:set>
+                                    <p:animEffect transition="in" filter="fade">
+                                      <p:cBhvr>
+                                        <p:cTn id="12" dur="500"/>
+                                        <p:tgtEl>
+                                          <p:spTgt spid="19"/>
+                                        </p:tgtEl>
+                                      </p:cBhvr>
+                                    </p:animEffect>
+                                  </p:childTnLst>
+                                </p:cTn>
+                              </p:par>
+                            </p:childTnLst>
+                          </p:cTn>
+                        </p:par>
+                      </p:childTnLst>
+                    </p:cTn>
+                  </p:par>
+                </p:childTnLst>
+              </p:cTn>
+              <p:prevCondLst>
+                <p:cond evt="onPrev" delay="0">
+                  <p:tgtEl>
+                    <p:sldTgt/>
+                  </p:tgtEl>
+                </p:cond>
+              </p:prevCondLst>
+              <p:nextCondLst>
+                <p:cond evt="onNext" delay="0">
+                  <p:tgtEl>
+                    <p:sldTgt/>
+                  </p:tgtEl>
+                </p:cond>
+              </p:nextCondLst>
+            </p:seq>
+          </p:childTnLst>
+        </p:cTn>
+      </p:par>
+    </p:tnLst>
+  </p:timing>
+</p:sld>
+</file>
+
+<file path=ppt/slides/slide2.xml><?xml version="1.0" encoding="utf-8"?>
+<p:sld xmlns:a="http://schemas.openxmlformats.org/drawingml/2006/main" xmlns:p="http://schemas.openxmlformats.org/presentationml/2006/main" xmlns:r="http://schemas.openxmlformats.org/officeDocument/2006/relationships">
+  <p:cSld>
+    <p:spTree>
+      <p:nvGrpSpPr>
+        <p:cNvPr id="1" name=""/>
+        <p:cNvGrpSpPr/>
+        <p:nvPr/>
+      </p:nvGrpSpPr>
+      <p:grpSpPr/>
+      <p:sp>
+        <p:nvSpPr>
+          <p:cNvPr id="2" name="Rectangle 1"/>
+          <p:cNvSpPr/>
+          <p:nvPr/>
+        </p:nvSpPr>
+        <p:spPr>
+          <a:xfrm>
+            <a:off x="0" y="0"/>
+            <a:ext cx="12191695" cy="6858000"/>
+          </a:xfrm>
+          <a:prstGeom prst="rect">
+            <a:avLst/>
+          </a:prstGeom>
+          <a:solidFill>
+            <a:srgbClr val="FCFBF8"/>
+          </a:solidFill>
+          <a:ln>
+            <a:noFill/>
+          </a:ln>
+          <a:effectLst/>
+        </p:spPr>
+        <p:style>
+          <a:lnRef idx="1">
+            <a:schemeClr val="accent1"/>
+          </a:lnRef>
+          <a:fillRef idx="3">
+            <a:schemeClr val="accent1"/>
+          </a:fillRef>
+          <a:effectRef idx="2">
+            <a:schemeClr val="accent1"/>
+          </a:effectRef>
+          <a:fontRef idx="minor">
+            <a:schemeClr val="lt1"/>
+          </a:fontRef>
+        </p:style>
+        <p:txBody>
+          <a:bodyPr rtlCol="0" anchor="ctr"/>
+          <a:lstStyle/>
+          <a:p>
+            <a:pPr algn="ctr"/>
+          </a:p>
+        </p:txBody>
+      </p:sp>
+      <p:sp>
+        <p:nvSpPr>
+          <p:cNvPr id="3" name="Rectangle 2"/>
+          <p:cNvSpPr/>
+          <p:nvPr/>
+        </p:nvSpPr>
+        <p:spPr>
+          <a:xfrm>
+            <a:off x="0" y="0"/>
+            <a:ext cx="12191695" cy="1078992"/>
+          </a:xfrm>
+          <a:prstGeom prst="rect">
+            <a:avLst/>
+          </a:prstGeom>
+          <a:solidFill>
+            <a:srgbClr val="1E9E74"/>
+          </a:solidFill>
+          <a:ln>
+            <a:noFill/>
+          </a:ln>
+          <a:effectLst/>
+        </p:spPr>
+        <p:style>
+          <a:lnRef idx="1">
+            <a:schemeClr val="accent1"/>
+          </a:lnRef>
+          <a:fillRef idx="3">
+            <a:schemeClr val="accent1"/>
+          </a:fillRef>
+          <a:effectRef idx="2">
+            <a:schemeClr val="accent1"/>
+          </a:effectRef>
+          <a:fontRef idx="minor">
+            <a:schemeClr val="lt1"/>
+          </a:fontRef>
+        </p:style>
+        <p:txBody>
+          <a:bodyPr rtlCol="0" anchor="ctr"/>
+          <a:lstStyle/>
+          <a:p>
+            <a:pPr algn="ctr"/>
+          </a:p>
+        </p:txBody>
+      </p:sp>
+      <p:sp>
+        <p:nvSpPr>
+          <p:cNvPr id="4" name="Rectangle 3"/>
+          <p:cNvSpPr/>
+          <p:nvPr/>
+        </p:nvSpPr>
+        <p:spPr>
+          <a:xfrm>
+            <a:off x="0" y="1078992"/>
+            <a:ext cx="12191695" cy="54864"/>
+          </a:xfrm>
+          <a:prstGeom prst="rect">
+            <a:avLst/>
+          </a:prstGeom>
+          <a:solidFill>
+            <a:srgbClr val="157355"/>
+          </a:solidFill>
+          <a:ln>
+            <a:noFill/>
+          </a:ln>
+          <a:effectLst/>
+        </p:spPr>
+        <p:style>
+          <a:lnRef idx="1">
+            <a:schemeClr val="accent1"/>
+          </a:lnRef>
+          <a:fillRef idx="3">
+            <a:schemeClr val="accent1"/>
+          </a:fillRef>
+          <a:effectRef idx="2">
+            <a:schemeClr val="accent1"/>
+          </a:effectRef>
+          <a:fontRef idx="minor">
+            <a:schemeClr val="lt1"/>
+          </a:fontRef>
+        </p:style>
+        <p:txBody>
+          <a:bodyPr rtlCol="0" anchor="ctr"/>
+          <a:lstStyle/>
+          <a:p>
+            <a:pPr algn="ctr"/>
+          </a:p>
+        </p:txBody>
+      </p:sp>
+      <p:sp>
+        <p:nvSpPr>
+          <p:cNvPr id="5" name="Rounded Rectangle 4"/>
+          <p:cNvSpPr/>
+          <p:nvPr/>
+        </p:nvSpPr>
+        <p:spPr>
+          <a:xfrm>
+            <a:off x="502920" y="182880"/>
+            <a:ext cx="1633118" cy="292608"/>
+          </a:xfrm>
+          <a:prstGeom prst="roundRect">
+            <a:avLst>
+              <a:gd name="adj" fmla="val 50000"/>
+            </a:avLst>
+          </a:prstGeom>
+          <a:solidFill>
+            <a:srgbClr val="FFFFFF"/>
+          </a:solidFill>
+          <a:ln>
+            <a:noFill/>
+          </a:ln>
+          <a:effectLst/>
+        </p:spPr>
+        <p:style>
+          <a:lnRef idx="1">
+            <a:schemeClr val="accent1"/>
+          </a:lnRef>
+          <a:fillRef idx="3">
+            <a:schemeClr val="accent1"/>
+          </a:fillRef>
+          <a:effectRef idx="2">
+            <a:schemeClr val="accent1"/>
+          </a:effectRef>
+          <a:fontRef idx="minor">
+            <a:schemeClr val="lt1"/>
+          </a:fontRef>
+        </p:style>
+        <p:txBody>
+          <a:bodyPr rtlCol="0" anchor="ctr" wrap="none" lIns="88900" rIns="88900" tIns="12700" bIns="12700"/>
+          <a:lstStyle/>
+          <a:p>
+            <a:pPr algn="ctr"/>
+            <a:r>
+              <a:rPr sz="1100" b="1">
+                <a:solidFill>
+                  <a:srgbClr val="1E9E74"/>
+                </a:solidFill>
+                <a:latin typeface="Inter"/>
+              </a:rPr>
+              <a:t>MENÚ DE LA LECCIÓN</a:t>
+            </a:r>
+          </a:p>
+        </p:txBody>
+      </p:sp>
+      <p:sp>
+        <p:nvSpPr>
+          <p:cNvPr id="6" name="TextBox 5"/>
+          <p:cNvSpPr txBox="1"/>
+          <p:nvPr/>
+        </p:nvSpPr>
+        <p:spPr>
+          <a:xfrm>
+            <a:off x="10424160" y="-137160"/>
+            <a:ext cx="1737360" cy="1371600"/>
+          </a:xfrm>
+          <a:prstGeom prst="rect">
+            <a:avLst/>
+          </a:prstGeom>
+          <a:noFill/>
+        </p:spPr>
+        <p:txBody>
+          <a:bodyPr wrap="square" anchor="t" lIns="38100" rIns="38100" tIns="25400" bIns="25400">
+            <a:spAutoFit/>
+          </a:bodyPr>
+          <a:lstStyle/>
+          <a:p>
+            <a:pPr algn="r">
+              <a:lnSpc>
+                <a:spcPct val="106000"/>
+              </a:lnSpc>
+              <a:spcBef>
+                <a:spcPts val="0"/>
+              </a:spcBef>
+              <a:spcAft>
+                <a:spcPts val="200"/>
+              </a:spcAft>
+            </a:pPr>
+            <a:r>
+              <a:rPr sz="8800" b="1" i="0">
+                <a:solidFill>
+                  <a:srgbClr val="FFFFFF"/>
+                </a:solidFill>
+                <a:latin typeface="Bricolage Grotesque"/>
+              </a:rPr>
+              <a:t>0</a:t>
+            </a:r>
+          </a:p>
+        </p:txBody>
+      </p:sp>
+      <p:sp>
+        <p:nvSpPr>
+          <p:cNvPr id="7" name="TextBox 6"/>
+          <p:cNvSpPr txBox="1"/>
+          <p:nvPr/>
+        </p:nvSpPr>
+        <p:spPr>
+          <a:xfrm>
+            <a:off x="457200" y="457200"/>
+            <a:ext cx="9692640" cy="502920"/>
+          </a:xfrm>
+          <a:prstGeom prst="rect">
+            <a:avLst/>
+          </a:prstGeom>
+          <a:noFill/>
+        </p:spPr>
+        <p:txBody>
+          <a:bodyPr wrap="square" anchor="ctr" lIns="38100" rIns="38100" tIns="25400" bIns="25400">
+            <a:spAutoFit/>
+          </a:bodyPr>
+          <a:lstStyle/>
+          <a:p>
+            <a:pPr algn="l">
+              <a:lnSpc>
+                <a:spcPct val="106000"/>
+              </a:lnSpc>
+              <a:spcBef>
+                <a:spcPts val="0"/>
+              </a:spcBef>
+              <a:spcAft>
+                <a:spcPts val="200"/>
+              </a:spcAft>
+            </a:pPr>
+            <a:r>
+              <a:rPr sz="2700" b="1" i="0">
+                <a:solidFill>
+                  <a:srgbClr val="FFFFFF"/>
+                </a:solidFill>
+                <a:latin typeface="Bricolage Grotesque"/>
+              </a:rPr>
+              <a:t>El mapa de la Unidad 0</a:t>
+            </a:r>
+          </a:p>
+        </p:txBody>
+      </p:sp>
+      <p:sp>
+        <p:nvSpPr>
+          <p:cNvPr id="8" name="TextBox 7"/>
+          <p:cNvSpPr txBox="1"/>
+          <p:nvPr/>
+        </p:nvSpPr>
+        <p:spPr>
+          <a:xfrm>
+            <a:off x="502920" y="932688"/>
+            <a:ext cx="9692640" cy="274320"/>
+          </a:xfrm>
+          <a:prstGeom prst="rect">
+            <a:avLst/>
+          </a:prstGeom>
+          <a:noFill/>
+        </p:spPr>
+        <p:txBody>
+          <a:bodyPr wrap="square" anchor="t" lIns="38100" rIns="38100" tIns="25400" bIns="25400">
+            <a:spAutoFit/>
+          </a:bodyPr>
+          <a:lstStyle/>
+          <a:p>
+            <a:pPr algn="l">
+              <a:lnSpc>
+                <a:spcPct val="106000"/>
+              </a:lnSpc>
+              <a:spcBef>
+                <a:spcPts val="0"/>
+              </a:spcBef>
+              <a:spcAft>
+                <a:spcPts val="200"/>
+              </a:spcAft>
+            </a:pPr>
+            <a:r>
+              <a:rPr sz="1250" b="0" i="1">
+                <a:solidFill>
+                  <a:srgbClr val="E4F4EE"/>
+                </a:solidFill>
+                <a:latin typeface="Inter"/>
+              </a:rPr>
+              <a:t>Kies je route — klik een tegel (of volg de volgorde). Alles oefent naar de Tarea final toe.</a:t>
+            </a:r>
+          </a:p>
+        </p:txBody>
+      </p:sp>
+      <p:sp>
+        <p:nvSpPr>
+          <p:cNvPr id="9" name="Rounded Rectangle 8">
+            <a:hlinkClick action="ppaction://hlinksldjump" r:id="rId3"/>
+          </p:cNvPr>
+          <p:cNvSpPr/>
+          <p:nvPr/>
+        </p:nvSpPr>
+        <p:spPr>
+          <a:xfrm>
+            <a:off x="457200" y="1417320"/>
+            <a:ext cx="2743200" cy="2240280"/>
+          </a:xfrm>
+          <a:prstGeom prst="roundRect">
+            <a:avLst>
+              <a:gd name="adj" fmla="val 5500"/>
+            </a:avLst>
+          </a:prstGeom>
+          <a:solidFill>
+            <a:srgbClr val="FFFFFF"/>
+          </a:solidFill>
+          <a:ln w="20320">
+            <a:solidFill>
+              <a:srgbClr val="1E9E74"/>
+            </a:solidFill>
+          </a:ln>
+          <a:effectLst/>
+          <a:effectLst>
+            <a:outerShdw blurRad="90000" dist="38000" dir="5400000" rotWithShape="0">
+              <a:srgbClr val="20242E">
+                <a:alpha val="22000"/>
+              </a:srgbClr>
+            </a:outerShdw>
+          </a:effectLst>
+        </p:spPr>
+        <p:style>
+          <a:lnRef idx="1">
+            <a:schemeClr val="accent1"/>
+          </a:lnRef>
+          <a:fillRef idx="3">
+            <a:schemeClr val="accent1"/>
+          </a:fillRef>
+          <a:effectRef idx="2">
+            <a:schemeClr val="accent1"/>
+          </a:effectRef>
+          <a:fontRef idx="minor">
+            <a:schemeClr val="lt1"/>
+          </a:fontRef>
+        </p:style>
+        <p:txBody>
+          <a:bodyPr rtlCol="0" anchor="ctr"/>
+          <a:lstStyle/>
+          <a:p>
+            <a:pPr algn="ctr"/>
+          </a:p>
+        </p:txBody>
+      </p:sp>
+      <p:sp>
+        <p:nvSpPr>
+          <p:cNvPr id="10" name="Rectangle 9">
+            <a:hlinkClick action="ppaction://hlinksldjump" r:id="rId3"/>
+          </p:cNvPr>
+          <p:cNvSpPr/>
+          <p:nvPr/>
+        </p:nvSpPr>
+        <p:spPr>
+          <a:xfrm>
+            <a:off x="457200" y="1417320"/>
+            <a:ext cx="2743200" cy="457200"/>
+          </a:xfrm>
+          <a:prstGeom prst="rect">
+            <a:avLst/>
+          </a:prstGeom>
+          <a:solidFill>
+            <a:srgbClr val="1E9E74"/>
+          </a:solidFill>
+          <a:ln>
+            <a:noFill/>
+          </a:ln>
+          <a:effectLst/>
+        </p:spPr>
+        <p:style>
+          <a:lnRef idx="1">
+            <a:schemeClr val="accent1"/>
+          </a:lnRef>
+          <a:fillRef idx="3">
+            <a:schemeClr val="accent1"/>
+          </a:fillRef>
+          <a:effectRef idx="2">
+            <a:schemeClr val="accent1"/>
+          </a:effectRef>
+          <a:fontRef idx="minor">
+            <a:schemeClr val="lt1"/>
+          </a:fontRef>
+        </p:style>
+        <p:txBody>
+          <a:bodyPr rtlCol="0" anchor="ctr"/>
+          <a:lstStyle/>
+          <a:p>
+            <a:pPr algn="ctr"/>
+          </a:p>
+        </p:txBody>
+      </p:sp>
+      <p:sp>
+        <p:nvSpPr>
+          <p:cNvPr id="11" name="Rounded Rectangle 10"/>
+          <p:cNvSpPr/>
+          <p:nvPr/>
+        </p:nvSpPr>
+        <p:spPr>
+          <a:xfrm>
+            <a:off x="566928" y="1490472"/>
+            <a:ext cx="310896" cy="310896"/>
+          </a:xfrm>
+          <a:prstGeom prst="roundRect">
+            <a:avLst>
+              <a:gd name="adj" fmla="val 50000"/>
+            </a:avLst>
+          </a:prstGeom>
+          <a:solidFill>
+            <a:srgbClr val="FFFFFF"/>
+          </a:solidFill>
+          <a:ln>
+            <a:noFill/>
+          </a:ln>
+          <a:effectLst/>
+        </p:spPr>
+        <p:style>
+          <a:lnRef idx="1">
+            <a:schemeClr val="accent1"/>
+          </a:lnRef>
+          <a:fillRef idx="3">
+            <a:schemeClr val="accent1"/>
+          </a:fillRef>
+          <a:effectRef idx="2">
+            <a:schemeClr val="accent1"/>
+          </a:effectRef>
+          <a:fontRef idx="minor">
+            <a:schemeClr val="lt1"/>
+          </a:fontRef>
+        </p:style>
+        <p:txBody>
+          <a:bodyPr rtlCol="0" anchor="ctr"/>
+          <a:lstStyle/>
+          <a:p>
+            <a:pPr algn="ctr"/>
+            <a:r>
+              <a:rPr sz="1200" b="1">
+                <a:solidFill>
+                  <a:srgbClr val="1E9E74"/>
+                </a:solidFill>
+                <a:latin typeface="Bricolage Grotesque"/>
+              </a:rPr>
+              <a:t>§1</a:t>
+            </a:r>
+          </a:p>
+        </p:txBody>
+      </p:sp>
+      <p:sp>
+        <p:nvSpPr>
+          <p:cNvPr id="12" name="TextBox 11"/>
+          <p:cNvSpPr txBox="1"/>
+          <p:nvPr/>
+        </p:nvSpPr>
+        <p:spPr>
+          <a:xfrm>
+            <a:off x="987552" y="1472184"/>
+            <a:ext cx="2103120" cy="365760"/>
+          </a:xfrm>
+          <a:prstGeom prst="rect">
+            <a:avLst/>
+          </a:prstGeom>
+          <a:noFill/>
+        </p:spPr>
+        <p:txBody>
+          <a:bodyPr wrap="square" anchor="ctr" lIns="38100" rIns="38100" tIns="25400" bIns="25400">
+            <a:spAutoFit/>
+          </a:bodyPr>
+          <a:lstStyle/>
+          <a:p>
+            <a:pPr algn="l">
+              <a:lnSpc>
+                <a:spcPct val="106000"/>
+              </a:lnSpc>
+              <a:spcBef>
+                <a:spcPts val="0"/>
+              </a:spcBef>
+              <a:spcAft>
+                <a:spcPts val="200"/>
+              </a:spcAft>
+            </a:pPr>
+            <a:r>
+              <a:rPr sz="1450" b="1" i="0">
+                <a:solidFill>
+                  <a:srgbClr val="FFFFFF"/>
+                </a:solidFill>
+                <a:latin typeface="Bricolage Grotesque"/>
+              </a:rPr>
+              <a:t>Sonar en español</a:t>
+            </a:r>
+          </a:p>
+        </p:txBody>
+      </p:sp>
+      <p:sp>
+        <p:nvSpPr>
+          <p:cNvPr id="13" name="TextBox 12"/>
+          <p:cNvSpPr txBox="1"/>
+          <p:nvPr/>
+        </p:nvSpPr>
+        <p:spPr>
+          <a:xfrm>
+            <a:off x="621792" y="2039112"/>
+            <a:ext cx="2414016" cy="1097280"/>
+          </a:xfrm>
+          <a:prstGeom prst="rect">
+            <a:avLst/>
+          </a:prstGeom>
+          <a:noFill/>
+        </p:spPr>
+        <p:txBody>
+          <a:bodyPr wrap="square" anchor="t" lIns="38100" rIns="38100" tIns="25400" bIns="25400">
+            <a:spAutoFit/>
+          </a:bodyPr>
+          <a:lstStyle/>
+          <a:p>
+            <a:pPr algn="l">
+              <a:lnSpc>
+                <a:spcPct val="112000"/>
+              </a:lnSpc>
+              <a:spcBef>
+                <a:spcPts val="0"/>
+              </a:spcBef>
+              <a:spcAft>
+                <a:spcPts val="200"/>
+              </a:spcAft>
+            </a:pPr>
+            <a:r>
+              <a:rPr sz="1150" b="0" i="0">
+                <a:solidFill>
+                  <a:srgbClr val="20242E"/>
+                </a:solidFill>
+                <a:latin typeface="Inter"/>
+              </a:rPr>
+              <a:t>alfabet · uitspraak · klanktrampas</a:t>
+            </a:r>
+          </a:p>
+        </p:txBody>
+      </p:sp>
+      <p:sp>
+        <p:nvSpPr>
+          <p:cNvPr id="14" name="Rounded Rectangle 13"/>
+          <p:cNvSpPr/>
+          <p:nvPr/>
+        </p:nvSpPr>
+        <p:spPr>
+          <a:xfrm>
+            <a:off x="621792" y="3246120"/>
+            <a:ext cx="707745" cy="292608"/>
+          </a:xfrm>
+          <a:prstGeom prst="roundRect">
+            <a:avLst>
+              <a:gd name="adj" fmla="val 50000"/>
+            </a:avLst>
+          </a:prstGeom>
+          <a:solidFill>
+            <a:srgbClr val="E4F4EE"/>
+          </a:solidFill>
+          <a:ln>
+            <a:noFill/>
+          </a:ln>
+          <a:effectLst/>
+        </p:spPr>
+        <p:style>
+          <a:lnRef idx="1">
+            <a:schemeClr val="accent1"/>
+          </a:lnRef>
+          <a:fillRef idx="3">
+            <a:schemeClr val="accent1"/>
+          </a:fillRef>
+          <a:effectRef idx="2">
+            <a:schemeClr val="accent1"/>
+          </a:effectRef>
+          <a:fontRef idx="minor">
+            <a:schemeClr val="lt1"/>
+          </a:fontRef>
+        </p:style>
+        <p:txBody>
+          <a:bodyPr rtlCol="0" anchor="ctr" wrap="none" lIns="88900" rIns="88900" tIns="12700" bIns="12700"/>
+          <a:lstStyle/>
+          <a:p>
+            <a:pPr algn="ctr"/>
+            <a:r>
+              <a:rPr sz="950" b="1">
+                <a:solidFill>
+                  <a:srgbClr val="157355"/>
+                </a:solidFill>
+                <a:latin typeface="Inter"/>
+              </a:rPr>
+              <a:t>→ dia 4</a:t>
+            </a:r>
+          </a:p>
+        </p:txBody>
+      </p:sp>
+      <p:sp>
+        <p:nvSpPr>
+          <p:cNvPr id="15" name="Rounded Rectangle 14">
+            <a:hlinkClick action="ppaction://hlinksldjump" r:id="rId4"/>
+          </p:cNvPr>
+          <p:cNvSpPr/>
+          <p:nvPr/>
+        </p:nvSpPr>
+        <p:spPr>
+          <a:xfrm>
+            <a:off x="3328416" y="1417320"/>
+            <a:ext cx="2743200" cy="2240280"/>
+          </a:xfrm>
+          <a:prstGeom prst="roundRect">
+            <a:avLst>
+              <a:gd name="adj" fmla="val 5500"/>
+            </a:avLst>
+          </a:prstGeom>
+          <a:solidFill>
+            <a:srgbClr val="FFFFFF"/>
+          </a:solidFill>
+          <a:ln w="20320">
+            <a:solidFill>
+              <a:srgbClr val="1E9E74"/>
+            </a:solidFill>
+          </a:ln>
+          <a:effectLst/>
+          <a:effectLst>
+            <a:outerShdw blurRad="90000" dist="38000" dir="5400000" rotWithShape="0">
+              <a:srgbClr val="20242E">
+                <a:alpha val="22000"/>
+              </a:srgbClr>
+            </a:outerShdw>
+          </a:effectLst>
+        </p:spPr>
+        <p:style>
+          <a:lnRef idx="1">
+            <a:schemeClr val="accent1"/>
+          </a:lnRef>
+          <a:fillRef idx="3">
+            <a:schemeClr val="accent1"/>
+          </a:fillRef>
+          <a:effectRef idx="2">
+            <a:schemeClr val="accent1"/>
+          </a:effectRef>
+          <a:fontRef idx="minor">
+            <a:schemeClr val="lt1"/>
+          </a:fontRef>
+        </p:style>
+        <p:txBody>
+          <a:bodyPr rtlCol="0" anchor="ctr"/>
+          <a:lstStyle/>
+          <a:p>
+            <a:pPr algn="ctr"/>
+          </a:p>
+        </p:txBody>
+      </p:sp>
+      <p:sp>
+        <p:nvSpPr>
+          <p:cNvPr id="16" name="Rectangle 15">
+            <a:hlinkClick action="ppaction://hlinksldjump" r:id="rId4"/>
+          </p:cNvPr>
+          <p:cNvSpPr/>
+          <p:nvPr/>
+        </p:nvSpPr>
+        <p:spPr>
+          <a:xfrm>
+            <a:off x="3328416" y="1417320"/>
+            <a:ext cx="2743200" cy="457200"/>
+          </a:xfrm>
+          <a:prstGeom prst="rect">
+            <a:avLst/>
+          </a:prstGeom>
+          <a:solidFill>
+            <a:srgbClr val="1E9E74"/>
+          </a:solidFill>
+          <a:ln>
+            <a:noFill/>
+          </a:ln>
+          <a:effectLst/>
+        </p:spPr>
+        <p:style>
+          <a:lnRef idx="1">
+            <a:schemeClr val="accent1"/>
+          </a:lnRef>
+          <a:fillRef idx="3">
+            <a:schemeClr val="accent1"/>
+          </a:fillRef>
+          <a:effectRef idx="2">
+            <a:schemeClr val="accent1"/>
+          </a:effectRef>
+          <a:fontRef idx="minor">
+            <a:schemeClr val="lt1"/>
+          </a:fontRef>
+        </p:style>
+        <p:txBody>
+          <a:bodyPr rtlCol="0" anchor="ctr"/>
+          <a:lstStyle/>
+          <a:p>
+            <a:pPr algn="ctr"/>
+          </a:p>
+        </p:txBody>
+      </p:sp>
+      <p:sp>
+        <p:nvSpPr>
+          <p:cNvPr id="17" name="Rounded Rectangle 16"/>
+          <p:cNvSpPr/>
+          <p:nvPr/>
+        </p:nvSpPr>
+        <p:spPr>
+          <a:xfrm>
+            <a:off x="3438144" y="1490472"/>
+            <a:ext cx="310896" cy="310896"/>
+          </a:xfrm>
+          <a:prstGeom prst="roundRect">
+            <a:avLst>
+              <a:gd name="adj" fmla="val 50000"/>
+            </a:avLst>
+          </a:prstGeom>
+          <a:solidFill>
+            <a:srgbClr val="FFFFFF"/>
+          </a:solidFill>
+          <a:ln>
+            <a:noFill/>
+          </a:ln>
+          <a:effectLst/>
+        </p:spPr>
+        <p:style>
+          <a:lnRef idx="1">
+            <a:schemeClr val="accent1"/>
+          </a:lnRef>
+          <a:fillRef idx="3">
+            <a:schemeClr val="accent1"/>
+          </a:fillRef>
+          <a:effectRef idx="2">
+            <a:schemeClr val="accent1"/>
+          </a:effectRef>
+          <a:fontRef idx="minor">
+            <a:schemeClr val="lt1"/>
+          </a:fontRef>
+        </p:style>
+        <p:txBody>
+          <a:bodyPr rtlCol="0" anchor="ctr"/>
+          <a:lstStyle/>
+          <a:p>
+            <a:pPr algn="ctr"/>
+            <a:r>
+              <a:rPr sz="1200" b="1">
+                <a:solidFill>
+                  <a:srgbClr val="1E9E74"/>
+                </a:solidFill>
+                <a:latin typeface="Bricolage Grotesque"/>
+              </a:rPr>
+              <a:t>§2</a:t>
+            </a:r>
+          </a:p>
+        </p:txBody>
+      </p:sp>
+      <p:sp>
+        <p:nvSpPr>
+          <p:cNvPr id="18" name="TextBox 17"/>
+          <p:cNvSpPr txBox="1"/>
+          <p:nvPr/>
+        </p:nvSpPr>
+        <p:spPr>
+          <a:xfrm>
+            <a:off x="3858768" y="1472184"/>
+            <a:ext cx="2103120" cy="365760"/>
+          </a:xfrm>
+          <a:prstGeom prst="rect">
+            <a:avLst/>
+          </a:prstGeom>
+          <a:noFill/>
+        </p:spPr>
+        <p:txBody>
+          <a:bodyPr wrap="square" anchor="ctr" lIns="38100" rIns="38100" tIns="25400" bIns="25400">
+            <a:spAutoFit/>
+          </a:bodyPr>
+          <a:lstStyle/>
+          <a:p>
+            <a:pPr algn="l">
+              <a:lnSpc>
+                <a:spcPct val="106000"/>
+              </a:lnSpc>
+              <a:spcBef>
+                <a:spcPts val="0"/>
+              </a:spcBef>
+              <a:spcAft>
+                <a:spcPts val="200"/>
+              </a:spcAft>
+            </a:pPr>
+            <a:r>
+              <a:rPr sz="1450" b="1" i="0">
+                <a:solidFill>
+                  <a:srgbClr val="FFFFFF"/>
+                </a:solidFill>
+                <a:latin typeface="Bricolage Grotesque"/>
+              </a:rPr>
+              <a:t>La regla del sombrero</a:t>
+            </a:r>
+          </a:p>
+        </p:txBody>
+      </p:sp>
+      <p:sp>
+        <p:nvSpPr>
+          <p:cNvPr id="19" name="TextBox 18"/>
+          <p:cNvSpPr txBox="1"/>
+          <p:nvPr/>
+        </p:nvSpPr>
+        <p:spPr>
+          <a:xfrm>
+            <a:off x="3493008" y="2039112"/>
+            <a:ext cx="2414016" cy="1097280"/>
+          </a:xfrm>
+          <a:prstGeom prst="rect">
+            <a:avLst/>
+          </a:prstGeom>
+          <a:noFill/>
+        </p:spPr>
+        <p:txBody>
+          <a:bodyPr wrap="square" anchor="t" lIns="38100" rIns="38100" tIns="25400" bIns="25400">
+            <a:spAutoFit/>
+          </a:bodyPr>
+          <a:lstStyle/>
+          <a:p>
+            <a:pPr algn="l">
+              <a:lnSpc>
+                <a:spcPct val="112000"/>
+              </a:lnSpc>
+              <a:spcBef>
+                <a:spcPts val="0"/>
+              </a:spcBef>
+              <a:spcAft>
+                <a:spcPts val="200"/>
+              </a:spcAft>
+            </a:pPr>
+            <a:r>
+              <a:rPr sz="1150" b="0" i="0">
+                <a:solidFill>
+                  <a:srgbClr val="20242E"/>
+                </a:solidFill>
+                <a:latin typeface="Inter"/>
+              </a:rPr>
+              <a:t>klemtoon · aguda/llana/esdrújula · tilde</a:t>
+            </a:r>
+          </a:p>
+        </p:txBody>
+      </p:sp>
+      <p:sp>
+        <p:nvSpPr>
+          <p:cNvPr id="20" name="Rounded Rectangle 19"/>
+          <p:cNvSpPr/>
+          <p:nvPr/>
+        </p:nvSpPr>
+        <p:spPr>
+          <a:xfrm>
+            <a:off x="3493008" y="3246120"/>
+            <a:ext cx="707745" cy="292608"/>
+          </a:xfrm>
+          <a:prstGeom prst="roundRect">
+            <a:avLst>
+              <a:gd name="adj" fmla="val 50000"/>
+            </a:avLst>
+          </a:prstGeom>
+          <a:solidFill>
+            <a:srgbClr val="E4F4EE"/>
+          </a:solidFill>
+          <a:ln>
+            <a:noFill/>
+          </a:ln>
+          <a:effectLst/>
+        </p:spPr>
+        <p:style>
+          <a:lnRef idx="1">
+            <a:schemeClr val="accent1"/>
+          </a:lnRef>
+          <a:fillRef idx="3">
+            <a:schemeClr val="accent1"/>
+          </a:fillRef>
+          <a:effectRef idx="2">
+            <a:schemeClr val="accent1"/>
+          </a:effectRef>
+          <a:fontRef idx="minor">
+            <a:schemeClr val="lt1"/>
+          </a:fontRef>
+        </p:style>
+        <p:txBody>
+          <a:bodyPr rtlCol="0" anchor="ctr" wrap="none" lIns="88900" rIns="88900" tIns="12700" bIns="12700"/>
+          <a:lstStyle/>
+          <a:p>
+            <a:pPr algn="ctr"/>
+            <a:r>
+              <a:rPr sz="950" b="1">
+                <a:solidFill>
+                  <a:srgbClr val="157355"/>
+                </a:solidFill>
+                <a:latin typeface="Inter"/>
+              </a:rPr>
+              <a:t>→ dia 7</a:t>
+            </a:r>
+          </a:p>
+        </p:txBody>
+      </p:sp>
+      <p:sp>
+        <p:nvSpPr>
+          <p:cNvPr id="21" name="Rounded Rectangle 20">
+            <a:hlinkClick action="ppaction://hlinksldjump" r:id="rId5"/>
+          </p:cNvPr>
+          <p:cNvSpPr/>
+          <p:nvPr/>
+        </p:nvSpPr>
+        <p:spPr>
+          <a:xfrm>
+            <a:off x="6199632" y="1417320"/>
+            <a:ext cx="2743200" cy="2240280"/>
+          </a:xfrm>
+          <a:prstGeom prst="roundRect">
+            <a:avLst>
+              <a:gd name="adj" fmla="val 5500"/>
+            </a:avLst>
+          </a:prstGeom>
+          <a:solidFill>
+            <a:srgbClr val="FFFFFF"/>
+          </a:solidFill>
+          <a:ln w="20320">
+            <a:solidFill>
+              <a:srgbClr val="1E9E74"/>
+            </a:solidFill>
+          </a:ln>
+          <a:effectLst/>
+          <a:effectLst>
+            <a:outerShdw blurRad="90000" dist="38000" dir="5400000" rotWithShape="0">
+              <a:srgbClr val="20242E">
+                <a:alpha val="22000"/>
+              </a:srgbClr>
+            </a:outerShdw>
+          </a:effectLst>
+        </p:spPr>
+        <p:style>
+          <a:lnRef idx="1">
+            <a:schemeClr val="accent1"/>
+          </a:lnRef>
+          <a:fillRef idx="3">
+            <a:schemeClr val="accent1"/>
+          </a:fillRef>
+          <a:effectRef idx="2">
+            <a:schemeClr val="accent1"/>
+          </a:effectRef>
+          <a:fontRef idx="minor">
+            <a:schemeClr val="lt1"/>
+          </a:fontRef>
+        </p:style>
+        <p:txBody>
+          <a:bodyPr rtlCol="0" anchor="ctr"/>
+          <a:lstStyle/>
+          <a:p>
+            <a:pPr algn="ctr"/>
+          </a:p>
+        </p:txBody>
+      </p:sp>
+      <p:sp>
+        <p:nvSpPr>
+          <p:cNvPr id="22" name="Rectangle 21">
+            <a:hlinkClick action="ppaction://hlinksldjump" r:id="rId5"/>
+          </p:cNvPr>
+          <p:cNvSpPr/>
+          <p:nvPr/>
+        </p:nvSpPr>
+        <p:spPr>
+          <a:xfrm>
+            <a:off x="6199632" y="1417320"/>
+            <a:ext cx="2743200" cy="457200"/>
+          </a:xfrm>
+          <a:prstGeom prst="rect">
+            <a:avLst/>
+          </a:prstGeom>
+          <a:solidFill>
+            <a:srgbClr val="1E9E74"/>
+          </a:solidFill>
+          <a:ln>
+            <a:noFill/>
+          </a:ln>
+          <a:effectLst/>
+        </p:spPr>
+        <p:style>
+          <a:lnRef idx="1">
+            <a:schemeClr val="accent1"/>
+          </a:lnRef>
+          <a:fillRef idx="3">
+            <a:schemeClr val="accent1"/>
+          </a:fillRef>
+          <a:effectRef idx="2">
+            <a:schemeClr val="accent1"/>
+          </a:effectRef>
+          <a:fontRef idx="minor">
+            <a:schemeClr val="lt1"/>
+          </a:fontRef>
+        </p:style>
+        <p:txBody>
+          <a:bodyPr rtlCol="0" anchor="ctr"/>
+          <a:lstStyle/>
+          <a:p>
+            <a:pPr algn="ctr"/>
+          </a:p>
+        </p:txBody>
+      </p:sp>
+      <p:sp>
+        <p:nvSpPr>
+          <p:cNvPr id="23" name="Rounded Rectangle 22"/>
+          <p:cNvSpPr/>
+          <p:nvPr/>
+        </p:nvSpPr>
+        <p:spPr>
+          <a:xfrm>
+            <a:off x="6309360" y="1490472"/>
+            <a:ext cx="310896" cy="310896"/>
+          </a:xfrm>
+          <a:prstGeom prst="roundRect">
+            <a:avLst>
+              <a:gd name="adj" fmla="val 50000"/>
+            </a:avLst>
+          </a:prstGeom>
+          <a:solidFill>
+            <a:srgbClr val="FFFFFF"/>
+          </a:solidFill>
+          <a:ln>
+            <a:noFill/>
+          </a:ln>
+          <a:effectLst/>
+        </p:spPr>
+        <p:style>
+          <a:lnRef idx="1">
+            <a:schemeClr val="accent1"/>
+          </a:lnRef>
+          <a:fillRef idx="3">
+            <a:schemeClr val="accent1"/>
+          </a:fillRef>
+          <a:effectRef idx="2">
+            <a:schemeClr val="accent1"/>
+          </a:effectRef>
+          <a:fontRef idx="minor">
+            <a:schemeClr val="lt1"/>
+          </a:fontRef>
+        </p:style>
+        <p:txBody>
+          <a:bodyPr rtlCol="0" anchor="ctr"/>
+          <a:lstStyle/>
+          <a:p>
+            <a:pPr algn="ctr"/>
+            <a:r>
+              <a:rPr sz="1200" b="1">
+                <a:solidFill>
+                  <a:srgbClr val="1E9E74"/>
+                </a:solidFill>
+                <a:latin typeface="Bricolage Grotesque"/>
+              </a:rPr>
+              <a:t>§3</a:t>
+            </a:r>
+          </a:p>
+        </p:txBody>
+      </p:sp>
+      <p:sp>
+        <p:nvSpPr>
+          <p:cNvPr id="24" name="TextBox 23"/>
+          <p:cNvSpPr txBox="1"/>
+          <p:nvPr/>
+        </p:nvSpPr>
+        <p:spPr>
+          <a:xfrm>
+            <a:off x="6729984" y="1472184"/>
+            <a:ext cx="2103120" cy="365760"/>
+          </a:xfrm>
+          <a:prstGeom prst="rect">
+            <a:avLst/>
+          </a:prstGeom>
+          <a:noFill/>
+        </p:spPr>
+        <p:txBody>
+          <a:bodyPr wrap="square" anchor="ctr" lIns="38100" rIns="38100" tIns="25400" bIns="25400">
+            <a:spAutoFit/>
+          </a:bodyPr>
+          <a:lstStyle/>
+          <a:p>
+            <a:pPr algn="l">
+              <a:lnSpc>
+                <a:spcPct val="106000"/>
+              </a:lnSpc>
+              <a:spcBef>
+                <a:spcPts val="0"/>
+              </a:spcBef>
+              <a:spcAft>
+                <a:spcPts val="200"/>
+              </a:spcAft>
+            </a:pPr>
+            <a:r>
+              <a:rPr sz="1450" b="1" i="0">
+                <a:solidFill>
+                  <a:srgbClr val="FFFFFF"/>
+                </a:solidFill>
+                <a:latin typeface="Bricolage Grotesque"/>
+              </a:rPr>
+              <a:t>Números 0–100</a:t>
+            </a:r>
+          </a:p>
+        </p:txBody>
+      </p:sp>
+      <p:sp>
+        <p:nvSpPr>
+          <p:cNvPr id="25" name="TextBox 24"/>
+          <p:cNvSpPr txBox="1"/>
+          <p:nvPr/>
+        </p:nvSpPr>
+        <p:spPr>
+          <a:xfrm>
+            <a:off x="6364224" y="2039112"/>
+            <a:ext cx="2414016" cy="1097280"/>
+          </a:xfrm>
+          <a:prstGeom prst="rect">
+            <a:avLst/>
+          </a:prstGeom>
+          <a:noFill/>
+        </p:spPr>
+        <p:txBody>
+          <a:bodyPr wrap="square" anchor="t" lIns="38100" rIns="38100" tIns="25400" bIns="25400">
+            <a:spAutoFit/>
+          </a:bodyPr>
+          <a:lstStyle/>
+          <a:p>
+            <a:pPr algn="l">
+              <a:lnSpc>
+                <a:spcPct val="112000"/>
+              </a:lnSpc>
+              <a:spcBef>
+                <a:spcPts val="0"/>
+              </a:spcBef>
+              <a:spcAft>
+                <a:spcPts val="200"/>
+              </a:spcAft>
+            </a:pPr>
+            <a:r>
+              <a:rPr sz="1150" b="0" i="0">
+                <a:solidFill>
+                  <a:srgbClr val="20242E"/>
+                </a:solidFill>
+                <a:latin typeface="Inter"/>
+              </a:rPr>
+              <a:t>tellen · leeftijd · telefoon</a:t>
+            </a:r>
+          </a:p>
+        </p:txBody>
+      </p:sp>
+      <p:sp>
+        <p:nvSpPr>
+          <p:cNvPr id="26" name="Rounded Rectangle 25"/>
+          <p:cNvSpPr/>
+          <p:nvPr/>
+        </p:nvSpPr>
+        <p:spPr>
+          <a:xfrm>
+            <a:off x="6364224" y="3246120"/>
+            <a:ext cx="791870" cy="292608"/>
+          </a:xfrm>
+          <a:prstGeom prst="roundRect">
+            <a:avLst>
+              <a:gd name="adj" fmla="val 50000"/>
+            </a:avLst>
+          </a:prstGeom>
+          <a:solidFill>
+            <a:srgbClr val="E4F4EE"/>
+          </a:solidFill>
+          <a:ln>
+            <a:noFill/>
+          </a:ln>
+          <a:effectLst/>
+        </p:spPr>
+        <p:style>
+          <a:lnRef idx="1">
+            <a:schemeClr val="accent1"/>
+          </a:lnRef>
+          <a:fillRef idx="3">
+            <a:schemeClr val="accent1"/>
+          </a:fillRef>
+          <a:effectRef idx="2">
+            <a:schemeClr val="accent1"/>
+          </a:effectRef>
+          <a:fontRef idx="minor">
+            <a:schemeClr val="lt1"/>
+          </a:fontRef>
+        </p:style>
+        <p:txBody>
+          <a:bodyPr rtlCol="0" anchor="ctr" wrap="none" lIns="88900" rIns="88900" tIns="12700" bIns="12700"/>
+          <a:lstStyle/>
+          <a:p>
+            <a:pPr algn="ctr"/>
+            <a:r>
+              <a:rPr sz="950" b="1">
+                <a:solidFill>
+                  <a:srgbClr val="157355"/>
+                </a:solidFill>
+                <a:latin typeface="Inter"/>
+              </a:rPr>
+              <a:t>→ dia 10</a:t>
+            </a:r>
+          </a:p>
+        </p:txBody>
+      </p:sp>
+      <p:sp>
+        <p:nvSpPr>
+          <p:cNvPr id="27" name="Rounded Rectangle 26">
+            <a:hlinkClick action="ppaction://hlinksldjump" r:id="rId6"/>
+          </p:cNvPr>
+          <p:cNvSpPr/>
+          <p:nvPr/>
+        </p:nvSpPr>
+        <p:spPr>
+          <a:xfrm>
+            <a:off x="9070848" y="1417320"/>
+            <a:ext cx="2743200" cy="2240280"/>
+          </a:xfrm>
+          <a:prstGeom prst="roundRect">
+            <a:avLst>
+              <a:gd name="adj" fmla="val 5500"/>
+            </a:avLst>
+          </a:prstGeom>
+          <a:solidFill>
+            <a:srgbClr val="FFFFFF"/>
+          </a:solidFill>
+          <a:ln w="20320">
+            <a:solidFill>
+              <a:srgbClr val="1E9E74"/>
+            </a:solidFill>
+          </a:ln>
+          <a:effectLst/>
+          <a:effectLst>
+            <a:outerShdw blurRad="90000" dist="38000" dir="5400000" rotWithShape="0">
+              <a:srgbClr val="20242E">
+                <a:alpha val="22000"/>
+              </a:srgbClr>
+            </a:outerShdw>
+          </a:effectLst>
+        </p:spPr>
+        <p:style>
+          <a:lnRef idx="1">
+            <a:schemeClr val="accent1"/>
+          </a:lnRef>
+          <a:fillRef idx="3">
+            <a:schemeClr val="accent1"/>
+          </a:fillRef>
+          <a:effectRef idx="2">
+            <a:schemeClr val="accent1"/>
+          </a:effectRef>
+          <a:fontRef idx="minor">
+            <a:schemeClr val="lt1"/>
+          </a:fontRef>
+        </p:style>
+        <p:txBody>
+          <a:bodyPr rtlCol="0" anchor="ctr"/>
+          <a:lstStyle/>
+          <a:p>
+            <a:pPr algn="ctr"/>
+          </a:p>
+        </p:txBody>
+      </p:sp>
+      <p:sp>
+        <p:nvSpPr>
+          <p:cNvPr id="28" name="Rectangle 27">
+            <a:hlinkClick action="ppaction://hlinksldjump" r:id="rId6"/>
+          </p:cNvPr>
+          <p:cNvSpPr/>
+          <p:nvPr/>
+        </p:nvSpPr>
+        <p:spPr>
+          <a:xfrm>
+            <a:off x="9070848" y="1417320"/>
+            <a:ext cx="2743200" cy="457200"/>
+          </a:xfrm>
+          <a:prstGeom prst="rect">
+            <a:avLst/>
+          </a:prstGeom>
+          <a:solidFill>
+            <a:srgbClr val="1E9E74"/>
+          </a:solidFill>
+          <a:ln>
+            <a:noFill/>
+          </a:ln>
+          <a:effectLst/>
+        </p:spPr>
+        <p:style>
+          <a:lnRef idx="1">
+            <a:schemeClr val="accent1"/>
+          </a:lnRef>
+          <a:fillRef idx="3">
+            <a:schemeClr val="accent1"/>
+          </a:fillRef>
+          <a:effectRef idx="2">
+            <a:schemeClr val="accent1"/>
+          </a:effectRef>
+          <a:fontRef idx="minor">
+            <a:schemeClr val="lt1"/>
+          </a:fontRef>
+        </p:style>
+        <p:txBody>
+          <a:bodyPr rtlCol="0" anchor="ctr"/>
+          <a:lstStyle/>
+          <a:p>
+            <a:pPr algn="ctr"/>
+          </a:p>
+        </p:txBody>
+      </p:sp>
+      <p:sp>
+        <p:nvSpPr>
+          <p:cNvPr id="29" name="Rounded Rectangle 28"/>
+          <p:cNvSpPr/>
+          <p:nvPr/>
+        </p:nvSpPr>
+        <p:spPr>
+          <a:xfrm>
+            <a:off x="9180576" y="1490472"/>
+            <a:ext cx="310896" cy="310896"/>
+          </a:xfrm>
+          <a:prstGeom prst="roundRect">
+            <a:avLst>
+              <a:gd name="adj" fmla="val 50000"/>
+            </a:avLst>
+          </a:prstGeom>
+          <a:solidFill>
+            <a:srgbClr val="FFFFFF"/>
+          </a:solidFill>
+          <a:ln>
+            <a:noFill/>
+          </a:ln>
+          <a:effectLst/>
+        </p:spPr>
+        <p:style>
+          <a:lnRef idx="1">
+            <a:schemeClr val="accent1"/>
+          </a:lnRef>
+          <a:fillRef idx="3">
+            <a:schemeClr val="accent1"/>
+          </a:fillRef>
+          <a:effectRef idx="2">
+            <a:schemeClr val="accent1"/>
+          </a:effectRef>
+          <a:fontRef idx="minor">
+            <a:schemeClr val="lt1"/>
+          </a:fontRef>
+        </p:style>
+        <p:txBody>
+          <a:bodyPr rtlCol="0" anchor="ctr"/>
+          <a:lstStyle/>
+          <a:p>
+            <a:pPr algn="ctr"/>
+            <a:r>
+              <a:rPr sz="1200" b="1">
+                <a:solidFill>
+                  <a:srgbClr val="1E9E74"/>
+                </a:solidFill>
+                <a:latin typeface="Bricolage Grotesque"/>
+              </a:rPr>
+              <a:t>§4</a:t>
+            </a:r>
+          </a:p>
+        </p:txBody>
+      </p:sp>
+      <p:sp>
+        <p:nvSpPr>
+          <p:cNvPr id="30" name="TextBox 29"/>
+          <p:cNvSpPr txBox="1"/>
+          <p:nvPr/>
+        </p:nvSpPr>
+        <p:spPr>
+          <a:xfrm>
+            <a:off x="9601200" y="1472184"/>
+            <a:ext cx="2103120" cy="365760"/>
+          </a:xfrm>
+          <a:prstGeom prst="rect">
+            <a:avLst/>
+          </a:prstGeom>
+          <a:noFill/>
+        </p:spPr>
+        <p:txBody>
+          <a:bodyPr wrap="square" anchor="ctr" lIns="38100" rIns="38100" tIns="25400" bIns="25400">
+            <a:spAutoFit/>
+          </a:bodyPr>
+          <a:lstStyle/>
+          <a:p>
+            <a:pPr algn="l">
+              <a:lnSpc>
+                <a:spcPct val="106000"/>
+              </a:lnSpc>
+              <a:spcBef>
+                <a:spcPts val="0"/>
+              </a:spcBef>
+              <a:spcAft>
+                <a:spcPts val="200"/>
+              </a:spcAft>
+            </a:pPr>
+            <a:r>
+              <a:rPr sz="1450" b="1" i="0">
+                <a:solidFill>
+                  <a:srgbClr val="FFFFFF"/>
+                </a:solidFill>
+                <a:latin typeface="Bricolage Grotesque"/>
+              </a:rPr>
+              <a:t>Saludos y clase</a:t>
+            </a:r>
+          </a:p>
+        </p:txBody>
+      </p:sp>
+      <p:sp>
+        <p:nvSpPr>
+          <p:cNvPr id="31" name="TextBox 30"/>
+          <p:cNvSpPr txBox="1"/>
+          <p:nvPr/>
+        </p:nvSpPr>
+        <p:spPr>
+          <a:xfrm>
+            <a:off x="9235440" y="2039112"/>
+            <a:ext cx="2414016" cy="1097280"/>
+          </a:xfrm>
+          <a:prstGeom prst="rect">
+            <a:avLst/>
+          </a:prstGeom>
+          <a:noFill/>
+        </p:spPr>
+        <p:txBody>
+          <a:bodyPr wrap="square" anchor="t" lIns="38100" rIns="38100" tIns="25400" bIns="25400">
+            <a:spAutoFit/>
+          </a:bodyPr>
+          <a:lstStyle/>
+          <a:p>
+            <a:pPr algn="l">
+              <a:lnSpc>
+                <a:spcPct val="112000"/>
+              </a:lnSpc>
+              <a:spcBef>
+                <a:spcPts val="0"/>
+              </a:spcBef>
+              <a:spcAft>
+                <a:spcPts val="200"/>
+              </a:spcAft>
+            </a:pPr>
+            <a:r>
+              <a:rPr sz="1150" b="0" i="0">
+                <a:solidFill>
+                  <a:srgbClr val="20242E"/>
+                </a:solidFill>
+                <a:latin typeface="Inter"/>
+              </a:rPr>
+              <a:t>groeten · voorstellen · lengua de clase</a:t>
+            </a:r>
+          </a:p>
+        </p:txBody>
+      </p:sp>
+      <p:sp>
+        <p:nvSpPr>
+          <p:cNvPr id="32" name="Rounded Rectangle 31"/>
+          <p:cNvSpPr/>
+          <p:nvPr/>
+        </p:nvSpPr>
+        <p:spPr>
+          <a:xfrm>
+            <a:off x="9235440" y="3246120"/>
+            <a:ext cx="791870" cy="292608"/>
+          </a:xfrm>
+          <a:prstGeom prst="roundRect">
+            <a:avLst>
+              <a:gd name="adj" fmla="val 50000"/>
+            </a:avLst>
+          </a:prstGeom>
+          <a:solidFill>
+            <a:srgbClr val="E4F4EE"/>
+          </a:solidFill>
+          <a:ln>
+            <a:noFill/>
+          </a:ln>
+          <a:effectLst/>
+        </p:spPr>
+        <p:style>
+          <a:lnRef idx="1">
+            <a:schemeClr val="accent1"/>
+          </a:lnRef>
+          <a:fillRef idx="3">
+            <a:schemeClr val="accent1"/>
+          </a:fillRef>
+          <a:effectRef idx="2">
+            <a:schemeClr val="accent1"/>
+          </a:effectRef>
+          <a:fontRef idx="minor">
+            <a:schemeClr val="lt1"/>
+          </a:fontRef>
+        </p:style>
+        <p:txBody>
+          <a:bodyPr rtlCol="0" anchor="ctr" wrap="none" lIns="88900" rIns="88900" tIns="12700" bIns="12700"/>
+          <a:lstStyle/>
+          <a:p>
+            <a:pPr algn="ctr"/>
+            <a:r>
+              <a:rPr sz="950" b="1">
+                <a:solidFill>
+                  <a:srgbClr val="157355"/>
+                </a:solidFill>
+                <a:latin typeface="Inter"/>
+              </a:rPr>
+              <a:t>→ dia 13</a:t>
+            </a:r>
+          </a:p>
+        </p:txBody>
+      </p:sp>
+      <p:sp>
+        <p:nvSpPr>
+          <p:cNvPr id="33" name="Rounded Rectangle 32">
+            <a:hlinkClick action="ppaction://hlinksldjump" r:id="rId7"/>
+          </p:cNvPr>
+          <p:cNvSpPr/>
+          <p:nvPr/>
+        </p:nvSpPr>
+        <p:spPr>
+          <a:xfrm>
+            <a:off x="457200" y="3840480"/>
+            <a:ext cx="2743200" cy="2240280"/>
+          </a:xfrm>
+          <a:prstGeom prst="roundRect">
+            <a:avLst>
+              <a:gd name="adj" fmla="val 5500"/>
+            </a:avLst>
+          </a:prstGeom>
+          <a:solidFill>
+            <a:srgbClr val="FFFFFF"/>
+          </a:solidFill>
+          <a:ln w="20320">
+            <a:solidFill>
+              <a:srgbClr val="157355"/>
+            </a:solidFill>
+          </a:ln>
+          <a:effectLst/>
+          <a:effectLst>
+            <a:outerShdw blurRad="90000" dist="38000" dir="5400000" rotWithShape="0">
+              <a:srgbClr val="20242E">
+                <a:alpha val="22000"/>
+              </a:srgbClr>
+            </a:outerShdw>
+          </a:effectLst>
+        </p:spPr>
+        <p:style>
+          <a:lnRef idx="1">
+            <a:schemeClr val="accent1"/>
+          </a:lnRef>
+          <a:fillRef idx="3">
+            <a:schemeClr val="accent1"/>
+          </a:fillRef>
+          <a:effectRef idx="2">
+            <a:schemeClr val="accent1"/>
+          </a:effectRef>
+          <a:fontRef idx="minor">
+            <a:schemeClr val="lt1"/>
+          </a:fontRef>
+        </p:style>
+        <p:txBody>
+          <a:bodyPr rtlCol="0" anchor="ctr"/>
+          <a:lstStyle/>
+          <a:p>
+            <a:pPr algn="ctr"/>
+          </a:p>
+        </p:txBody>
+      </p:sp>
+      <p:sp>
+        <p:nvSpPr>
+          <p:cNvPr id="34" name="Rectangle 33">
+            <a:hlinkClick action="ppaction://hlinksldjump" r:id="rId7"/>
+          </p:cNvPr>
+          <p:cNvSpPr/>
+          <p:nvPr/>
+        </p:nvSpPr>
+        <p:spPr>
+          <a:xfrm>
+            <a:off x="457200" y="3840480"/>
+            <a:ext cx="2743200" cy="457200"/>
+          </a:xfrm>
+          <a:prstGeom prst="rect">
+            <a:avLst/>
+          </a:prstGeom>
+          <a:solidFill>
+            <a:srgbClr val="157355"/>
+          </a:solidFill>
+          <a:ln>
+            <a:noFill/>
+          </a:ln>
+          <a:effectLst/>
+        </p:spPr>
+        <p:style>
+          <a:lnRef idx="1">
+            <a:schemeClr val="accent1"/>
+          </a:lnRef>
+          <a:fillRef idx="3">
+            <a:schemeClr val="accent1"/>
+          </a:fillRef>
+          <a:effectRef idx="2">
+            <a:schemeClr val="accent1"/>
+          </a:effectRef>
+          <a:fontRef idx="minor">
+            <a:schemeClr val="lt1"/>
+          </a:fontRef>
+        </p:style>
+        <p:txBody>
+          <a:bodyPr rtlCol="0" anchor="ctr"/>
+          <a:lstStyle/>
+          <a:p>
+            <a:pPr algn="ctr"/>
+          </a:p>
+        </p:txBody>
+      </p:sp>
+      <p:sp>
+        <p:nvSpPr>
+          <p:cNvPr id="35" name="Rounded Rectangle 34"/>
+          <p:cNvSpPr/>
+          <p:nvPr/>
+        </p:nvSpPr>
+        <p:spPr>
+          <a:xfrm>
+            <a:off x="566928" y="3913632"/>
+            <a:ext cx="310896" cy="310896"/>
+          </a:xfrm>
+          <a:prstGeom prst="roundRect">
+            <a:avLst>
+              <a:gd name="adj" fmla="val 50000"/>
+            </a:avLst>
+          </a:prstGeom>
+          <a:solidFill>
+            <a:srgbClr val="FFFFFF"/>
+          </a:solidFill>
+          <a:ln>
+            <a:noFill/>
+          </a:ln>
+          <a:effectLst/>
+        </p:spPr>
+        <p:style>
+          <a:lnRef idx="1">
+            <a:schemeClr val="accent1"/>
+          </a:lnRef>
+          <a:fillRef idx="3">
+            <a:schemeClr val="accent1"/>
+          </a:fillRef>
+          <a:effectRef idx="2">
+            <a:schemeClr val="accent1"/>
+          </a:effectRef>
+          <a:fontRef idx="minor">
+            <a:schemeClr val="lt1"/>
+          </a:fontRef>
+        </p:style>
+        <p:txBody>
+          <a:bodyPr rtlCol="0" anchor="ctr"/>
+          <a:lstStyle/>
+          <a:p>
+            <a:pPr algn="ctr"/>
+            <a:r>
+              <a:rPr sz="1200" b="1">
+                <a:solidFill>
+                  <a:srgbClr val="157355"/>
+                </a:solidFill>
+                <a:latin typeface="Bricolage Grotesque"/>
+              </a:rPr>
+              <a:t>★</a:t>
+            </a:r>
+          </a:p>
+        </p:txBody>
+      </p:sp>
+      <p:sp>
+        <p:nvSpPr>
+          <p:cNvPr id="36" name="TextBox 35"/>
+          <p:cNvSpPr txBox="1"/>
+          <p:nvPr/>
+        </p:nvSpPr>
+        <p:spPr>
+          <a:xfrm>
+            <a:off x="987552" y="3895344"/>
+            <a:ext cx="2103120" cy="365760"/>
+          </a:xfrm>
+          <a:prstGeom prst="rect">
+            <a:avLst/>
+          </a:prstGeom>
+          <a:noFill/>
+        </p:spPr>
+        <p:txBody>
+          <a:bodyPr wrap="square" anchor="ctr" lIns="38100" rIns="38100" tIns="25400" bIns="25400">
+            <a:spAutoFit/>
+          </a:bodyPr>
+          <a:lstStyle/>
+          <a:p>
+            <a:pPr algn="l">
+              <a:lnSpc>
+                <a:spcPct val="106000"/>
+              </a:lnSpc>
+              <a:spcBef>
+                <a:spcPts val="0"/>
+              </a:spcBef>
+              <a:spcAft>
+                <a:spcPts val="200"/>
+              </a:spcAft>
+            </a:pPr>
+            <a:r>
+              <a:rPr sz="1450" b="1" i="0">
+                <a:solidFill>
+                  <a:srgbClr val="FFFFFF"/>
+                </a:solidFill>
+                <a:latin typeface="Bricolage Grotesque"/>
+              </a:rPr>
+              <a:t>Cultura</a:t>
+            </a:r>
+          </a:p>
+        </p:txBody>
+      </p:sp>
+      <p:sp>
+        <p:nvSpPr>
+          <p:cNvPr id="37" name="TextBox 36"/>
+          <p:cNvSpPr txBox="1"/>
+          <p:nvPr/>
+        </p:nvSpPr>
+        <p:spPr>
+          <a:xfrm>
+            <a:off x="621792" y="4462272"/>
+            <a:ext cx="2414016" cy="1097280"/>
+          </a:xfrm>
+          <a:prstGeom prst="rect">
+            <a:avLst/>
+          </a:prstGeom>
+          <a:noFill/>
+        </p:spPr>
+        <p:txBody>
+          <a:bodyPr wrap="square" anchor="t" lIns="38100" rIns="38100" tIns="25400" bIns="25400">
+            <a:spAutoFit/>
+          </a:bodyPr>
+          <a:lstStyle/>
+          <a:p>
+            <a:pPr algn="l">
+              <a:lnSpc>
+                <a:spcPct val="112000"/>
+              </a:lnSpc>
+              <a:spcBef>
+                <a:spcPts val="0"/>
+              </a:spcBef>
+              <a:spcAft>
+                <a:spcPts val="200"/>
+              </a:spcAft>
+            </a:pPr>
+            <a:r>
+              <a:rPr sz="1150" b="0" i="0">
+                <a:solidFill>
+                  <a:srgbClr val="20242E"/>
+                </a:solidFill>
+                <a:latin typeface="Inter"/>
+              </a:rPr>
+              <a:t>¿Dónde se habla español? (+20 países)</a:t>
+            </a:r>
+          </a:p>
+        </p:txBody>
+      </p:sp>
+      <p:sp>
+        <p:nvSpPr>
+          <p:cNvPr id="38" name="Rounded Rectangle 37"/>
+          <p:cNvSpPr/>
+          <p:nvPr/>
+        </p:nvSpPr>
+        <p:spPr>
+          <a:xfrm>
+            <a:off x="621792" y="5669280"/>
+            <a:ext cx="791870" cy="292608"/>
+          </a:xfrm>
+          <a:prstGeom prst="roundRect">
+            <a:avLst>
+              <a:gd name="adj" fmla="val 50000"/>
+            </a:avLst>
+          </a:prstGeom>
+          <a:solidFill>
+            <a:srgbClr val="E4F4EE"/>
+          </a:solidFill>
+          <a:ln>
+            <a:noFill/>
+          </a:ln>
+          <a:effectLst/>
+        </p:spPr>
+        <p:style>
+          <a:lnRef idx="1">
+            <a:schemeClr val="accent1"/>
+          </a:lnRef>
+          <a:fillRef idx="3">
+            <a:schemeClr val="accent1"/>
+          </a:fillRef>
+          <a:effectRef idx="2">
+            <a:schemeClr val="accent1"/>
+          </a:effectRef>
+          <a:fontRef idx="minor">
+            <a:schemeClr val="lt1"/>
+          </a:fontRef>
+        </p:style>
+        <p:txBody>
+          <a:bodyPr rtlCol="0" anchor="ctr" wrap="none" lIns="88900" rIns="88900" tIns="12700" bIns="12700"/>
+          <a:lstStyle/>
+          <a:p>
+            <a:pPr algn="ctr"/>
+            <a:r>
+              <a:rPr sz="950" b="1">
+                <a:solidFill>
+                  <a:srgbClr val="157355"/>
+                </a:solidFill>
+                <a:latin typeface="Inter"/>
+              </a:rPr>
+              <a:t>→ dia 16</a:t>
+            </a:r>
+          </a:p>
+        </p:txBody>
+      </p:sp>
+      <p:sp>
+        <p:nvSpPr>
+          <p:cNvPr id="39" name="Rounded Rectangle 38">
+            <a:hlinkClick action="ppaction://hlinksldjump" r:id="rId8"/>
+          </p:cNvPr>
+          <p:cNvSpPr/>
+          <p:nvPr/>
+        </p:nvSpPr>
+        <p:spPr>
+          <a:xfrm>
+            <a:off x="3328416" y="3840480"/>
+            <a:ext cx="2743200" cy="2240280"/>
+          </a:xfrm>
+          <a:prstGeom prst="roundRect">
+            <a:avLst>
+              <a:gd name="adj" fmla="val 5500"/>
+            </a:avLst>
+          </a:prstGeom>
+          <a:solidFill>
+            <a:srgbClr val="FFFFFF"/>
+          </a:solidFill>
+          <a:ln w="20320">
+            <a:solidFill>
+              <a:srgbClr val="157355"/>
+            </a:solidFill>
+          </a:ln>
+          <a:effectLst/>
+          <a:effectLst>
+            <a:outerShdw blurRad="90000" dist="38000" dir="5400000" rotWithShape="0">
+              <a:srgbClr val="20242E">
+                <a:alpha val="22000"/>
+              </a:srgbClr>
+            </a:outerShdw>
+          </a:effectLst>
+        </p:spPr>
+        <p:style>
+          <a:lnRef idx="1">
+            <a:schemeClr val="accent1"/>
+          </a:lnRef>
+          <a:fillRef idx="3">
+            <a:schemeClr val="accent1"/>
+          </a:fillRef>
+          <a:effectRef idx="2">
+            <a:schemeClr val="accent1"/>
+          </a:effectRef>
+          <a:fontRef idx="minor">
+            <a:schemeClr val="lt1"/>
+          </a:fontRef>
+        </p:style>
+        <p:txBody>
+          <a:bodyPr rtlCol="0" anchor="ctr"/>
+          <a:lstStyle/>
+          <a:p>
+            <a:pPr algn="ctr"/>
+          </a:p>
+        </p:txBody>
+      </p:sp>
+      <p:sp>
+        <p:nvSpPr>
+          <p:cNvPr id="40" name="Rectangle 39">
+            <a:hlinkClick action="ppaction://hlinksldjump" r:id="rId8"/>
+          </p:cNvPr>
+          <p:cNvSpPr/>
+          <p:nvPr/>
+        </p:nvSpPr>
+        <p:spPr>
+          <a:xfrm>
+            <a:off x="3328416" y="3840480"/>
+            <a:ext cx="2743200" cy="457200"/>
+          </a:xfrm>
+          <a:prstGeom prst="rect">
+            <a:avLst/>
+          </a:prstGeom>
+          <a:solidFill>
+            <a:srgbClr val="157355"/>
+          </a:solidFill>
+          <a:ln>
+            <a:noFill/>
+          </a:ln>
+          <a:effectLst/>
+        </p:spPr>
+        <p:style>
+          <a:lnRef idx="1">
+            <a:schemeClr val="accent1"/>
+          </a:lnRef>
+          <a:fillRef idx="3">
+            <a:schemeClr val="accent1"/>
+          </a:fillRef>
+          <a:effectRef idx="2">
+            <a:schemeClr val="accent1"/>
+          </a:effectRef>
+          <a:fontRef idx="minor">
+            <a:schemeClr val="lt1"/>
+          </a:fontRef>
+        </p:style>
+        <p:txBody>
+          <a:bodyPr rtlCol="0" anchor="ctr"/>
+          <a:lstStyle/>
+          <a:p>
+            <a:pPr algn="ctr"/>
+          </a:p>
+        </p:txBody>
+      </p:sp>
+      <p:sp>
+        <p:nvSpPr>
+          <p:cNvPr id="41" name="Rounded Rectangle 40"/>
+          <p:cNvSpPr/>
+          <p:nvPr/>
+        </p:nvSpPr>
+        <p:spPr>
+          <a:xfrm>
+            <a:off x="3438144" y="3913632"/>
+            <a:ext cx="310896" cy="310896"/>
+          </a:xfrm>
+          <a:prstGeom prst="roundRect">
+            <a:avLst>
+              <a:gd name="adj" fmla="val 50000"/>
+            </a:avLst>
+          </a:prstGeom>
+          <a:solidFill>
+            <a:srgbClr val="FFFFFF"/>
+          </a:solidFill>
+          <a:ln>
+            <a:noFill/>
+          </a:ln>
+          <a:effectLst/>
+        </p:spPr>
+        <p:style>
+          <a:lnRef idx="1">
+            <a:schemeClr val="accent1"/>
+          </a:lnRef>
+          <a:fillRef idx="3">
+            <a:schemeClr val="accent1"/>
+          </a:fillRef>
+          <a:effectRef idx="2">
+            <a:schemeClr val="accent1"/>
+          </a:effectRef>
+          <a:fontRef idx="minor">
+            <a:schemeClr val="lt1"/>
+          </a:fontRef>
+        </p:style>
+        <p:txBody>
+          <a:bodyPr rtlCol="0" anchor="ctr"/>
+          <a:lstStyle/>
+          <a:p>
+            <a:pPr algn="ctr"/>
+            <a:r>
+              <a:rPr sz="1200" b="1">
+                <a:solidFill>
+                  <a:srgbClr val="157355"/>
+                </a:solidFill>
+                <a:latin typeface="Bricolage Grotesque"/>
+              </a:rPr>
+              <a:t>✈</a:t>
+            </a:r>
+          </a:p>
+        </p:txBody>
+      </p:sp>
+      <p:sp>
+        <p:nvSpPr>
+          <p:cNvPr id="42" name="TextBox 41"/>
+          <p:cNvSpPr txBox="1"/>
+          <p:nvPr/>
+        </p:nvSpPr>
+        <p:spPr>
+          <a:xfrm>
+            <a:off x="3858768" y="3895344"/>
+            <a:ext cx="2103120" cy="365760"/>
+          </a:xfrm>
+          <a:prstGeom prst="rect">
+            <a:avLst/>
+          </a:prstGeom>
+          <a:noFill/>
+        </p:spPr>
+        <p:txBody>
+          <a:bodyPr wrap="square" anchor="ctr" lIns="38100" rIns="38100" tIns="25400" bIns="25400">
+            <a:spAutoFit/>
+          </a:bodyPr>
+          <a:lstStyle/>
+          <a:p>
+            <a:pPr algn="l">
+              <a:lnSpc>
+                <a:spcPct val="106000"/>
+              </a:lnSpc>
+              <a:spcBef>
+                <a:spcPts val="0"/>
+              </a:spcBef>
+              <a:spcAft>
+                <a:spcPts val="200"/>
+              </a:spcAft>
+            </a:pPr>
+            <a:r>
+              <a:rPr sz="1450" b="1" i="0">
+                <a:solidFill>
+                  <a:srgbClr val="FFFFFF"/>
+                </a:solidFill>
+                <a:latin typeface="Bricolage Grotesque"/>
+              </a:rPr>
+              <a:t>Tarea final</a:t>
+            </a:r>
+          </a:p>
+        </p:txBody>
+      </p:sp>
+      <p:sp>
+        <p:nvSpPr>
+          <p:cNvPr id="43" name="TextBox 42"/>
+          <p:cNvSpPr txBox="1"/>
+          <p:nvPr/>
+        </p:nvSpPr>
+        <p:spPr>
+          <a:xfrm>
+            <a:off x="3493008" y="4462272"/>
+            <a:ext cx="2414016" cy="1097280"/>
+          </a:xfrm>
+          <a:prstGeom prst="rect">
+            <a:avLst/>
+          </a:prstGeom>
+          <a:noFill/>
+        </p:spPr>
+        <p:txBody>
+          <a:bodyPr wrap="square" anchor="t" lIns="38100" rIns="38100" tIns="25400" bIns="25400">
+            <a:spAutoFit/>
+          </a:bodyPr>
+          <a:lstStyle/>
+          <a:p>
+            <a:pPr algn="l">
+              <a:lnSpc>
+                <a:spcPct val="112000"/>
+              </a:lnSpc>
+              <a:spcBef>
+                <a:spcPts val="0"/>
+              </a:spcBef>
+              <a:spcAft>
+                <a:spcPts val="200"/>
+              </a:spcAft>
+            </a:pPr>
+            <a:r>
+              <a:rPr sz="1150" b="0" i="0">
+                <a:solidFill>
+                  <a:srgbClr val="20242E"/>
+                </a:solidFill>
+                <a:latin typeface="Inter"/>
+              </a:rPr>
+              <a:t>Tarjeta de embarque (eindmissie)</a:t>
+            </a:r>
+          </a:p>
+        </p:txBody>
+      </p:sp>
+      <p:sp>
+        <p:nvSpPr>
+          <p:cNvPr id="44" name="Rounded Rectangle 43"/>
+          <p:cNvSpPr/>
+          <p:nvPr/>
+        </p:nvSpPr>
+        <p:spPr>
+          <a:xfrm>
+            <a:off x="3493008" y="5669280"/>
+            <a:ext cx="791870" cy="292608"/>
+          </a:xfrm>
+          <a:prstGeom prst="roundRect">
+            <a:avLst>
+              <a:gd name="adj" fmla="val 50000"/>
+            </a:avLst>
+          </a:prstGeom>
+          <a:solidFill>
+            <a:srgbClr val="E4F4EE"/>
+          </a:solidFill>
+          <a:ln>
+            <a:noFill/>
+          </a:ln>
+          <a:effectLst/>
+        </p:spPr>
+        <p:style>
+          <a:lnRef idx="1">
+            <a:schemeClr val="accent1"/>
+          </a:lnRef>
+          <a:fillRef idx="3">
+            <a:schemeClr val="accent1"/>
+          </a:fillRef>
+          <a:effectRef idx="2">
+            <a:schemeClr val="accent1"/>
+          </a:effectRef>
+          <a:fontRef idx="minor">
+            <a:schemeClr val="lt1"/>
+          </a:fontRef>
+        </p:style>
+        <p:txBody>
+          <a:bodyPr rtlCol="0" anchor="ctr" wrap="none" lIns="88900" rIns="88900" tIns="12700" bIns="12700"/>
+          <a:lstStyle/>
+          <a:p>
+            <a:pPr algn="ctr"/>
+            <a:r>
+              <a:rPr sz="950" b="1">
+                <a:solidFill>
+                  <a:srgbClr val="157355"/>
+                </a:solidFill>
+                <a:latin typeface="Inter"/>
+              </a:rPr>
+              <a:t>→ dia 18</a:t>
+            </a:r>
+          </a:p>
+        </p:txBody>
+      </p:sp>
+      <p:sp>
+        <p:nvSpPr>
+          <p:cNvPr id="45" name="Rounded Rectangle 44">
+            <a:hlinkClick action="ppaction://hlinksldjump" r:id="rId9"/>
+          </p:cNvPr>
+          <p:cNvSpPr/>
+          <p:nvPr/>
+        </p:nvSpPr>
+        <p:spPr>
+          <a:xfrm>
+            <a:off x="6199632" y="3840480"/>
+            <a:ext cx="2743200" cy="2240280"/>
+          </a:xfrm>
+          <a:prstGeom prst="roundRect">
+            <a:avLst>
+              <a:gd name="adj" fmla="val 5500"/>
+            </a:avLst>
+          </a:prstGeom>
+          <a:solidFill>
+            <a:srgbClr val="FFFFFF"/>
+          </a:solidFill>
+          <a:ln w="20320">
+            <a:solidFill>
+              <a:srgbClr val="B7860B"/>
+            </a:solidFill>
+          </a:ln>
+          <a:effectLst/>
+          <a:effectLst>
+            <a:outerShdw blurRad="90000" dist="38000" dir="5400000" rotWithShape="0">
+              <a:srgbClr val="20242E">
+                <a:alpha val="22000"/>
+              </a:srgbClr>
+            </a:outerShdw>
+          </a:effectLst>
+        </p:spPr>
+        <p:style>
+          <a:lnRef idx="1">
+            <a:schemeClr val="accent1"/>
+          </a:lnRef>
+          <a:fillRef idx="3">
+            <a:schemeClr val="accent1"/>
+          </a:fillRef>
+          <a:effectRef idx="2">
+            <a:schemeClr val="accent1"/>
+          </a:effectRef>
+          <a:fontRef idx="minor">
+            <a:schemeClr val="lt1"/>
+          </a:fontRef>
+        </p:style>
+        <p:txBody>
+          <a:bodyPr rtlCol="0" anchor="ctr"/>
+          <a:lstStyle/>
+          <a:p>
+            <a:pPr algn="ctr"/>
+          </a:p>
+        </p:txBody>
+      </p:sp>
+      <p:sp>
+        <p:nvSpPr>
+          <p:cNvPr id="46" name="Rectangle 45">
+            <a:hlinkClick action="ppaction://hlinksldjump" r:id="rId9"/>
+          </p:cNvPr>
+          <p:cNvSpPr/>
+          <p:nvPr/>
+        </p:nvSpPr>
+        <p:spPr>
+          <a:xfrm>
+            <a:off x="6199632" y="3840480"/>
+            <a:ext cx="2743200" cy="457200"/>
+          </a:xfrm>
+          <a:prstGeom prst="rect">
+            <a:avLst/>
+          </a:prstGeom>
+          <a:solidFill>
+            <a:srgbClr val="B7860B"/>
+          </a:solidFill>
+          <a:ln>
+            <a:noFill/>
+          </a:ln>
+          <a:effectLst/>
+        </p:spPr>
+        <p:style>
+          <a:lnRef idx="1">
+            <a:schemeClr val="accent1"/>
+          </a:lnRef>
+          <a:fillRef idx="3">
+            <a:schemeClr val="accent1"/>
+          </a:fillRef>
+          <a:effectRef idx="2">
+            <a:schemeClr val="accent1"/>
+          </a:effectRef>
+          <a:fontRef idx="minor">
+            <a:schemeClr val="lt1"/>
+          </a:fontRef>
+        </p:style>
+        <p:txBody>
+          <a:bodyPr rtlCol="0" anchor="ctr"/>
+          <a:lstStyle/>
+          <a:p>
+            <a:pPr algn="ctr"/>
+          </a:p>
+        </p:txBody>
+      </p:sp>
+      <p:sp>
+        <p:nvSpPr>
+          <p:cNvPr id="47" name="Rounded Rectangle 46"/>
+          <p:cNvSpPr/>
+          <p:nvPr/>
+        </p:nvSpPr>
+        <p:spPr>
+          <a:xfrm>
+            <a:off x="6309360" y="3913632"/>
+            <a:ext cx="310896" cy="310896"/>
+          </a:xfrm>
+          <a:prstGeom prst="roundRect">
+            <a:avLst>
+              <a:gd name="adj" fmla="val 50000"/>
+            </a:avLst>
+          </a:prstGeom>
+          <a:solidFill>
+            <a:srgbClr val="FFFFFF"/>
+          </a:solidFill>
+          <a:ln>
+            <a:noFill/>
+          </a:ln>
+          <a:effectLst/>
+        </p:spPr>
+        <p:style>
+          <a:lnRef idx="1">
+            <a:schemeClr val="accent1"/>
+          </a:lnRef>
+          <a:fillRef idx="3">
+            <a:schemeClr val="accent1"/>
+          </a:fillRef>
+          <a:effectRef idx="2">
+            <a:schemeClr val="accent1"/>
+          </a:effectRef>
+          <a:fontRef idx="minor">
+            <a:schemeClr val="lt1"/>
+          </a:fontRef>
+        </p:style>
+        <p:txBody>
+          <a:bodyPr rtlCol="0" anchor="ctr"/>
+          <a:lstStyle/>
+          <a:p>
+            <a:pPr algn="ctr"/>
+            <a:r>
+              <a:rPr sz="1200" b="1">
+                <a:solidFill>
+                  <a:srgbClr val="B7860B"/>
+                </a:solidFill>
+                <a:latin typeface="Bricolage Grotesque"/>
+              </a:rPr>
+              <a:t>?</a:t>
+            </a:r>
+          </a:p>
+        </p:txBody>
+      </p:sp>
+      <p:sp>
+        <p:nvSpPr>
+          <p:cNvPr id="48" name="TextBox 47"/>
+          <p:cNvSpPr txBox="1"/>
+          <p:nvPr/>
+        </p:nvSpPr>
+        <p:spPr>
+          <a:xfrm>
+            <a:off x="6729984" y="3895344"/>
+            <a:ext cx="2103120" cy="365760"/>
+          </a:xfrm>
+          <a:prstGeom prst="rect">
+            <a:avLst/>
+          </a:prstGeom>
+          <a:noFill/>
+        </p:spPr>
+        <p:txBody>
+          <a:bodyPr wrap="square" anchor="ctr" lIns="38100" rIns="38100" tIns="25400" bIns="25400">
+            <a:spAutoFit/>
+          </a:bodyPr>
+          <a:lstStyle/>
+          <a:p>
+            <a:pPr algn="l">
+              <a:lnSpc>
+                <a:spcPct val="106000"/>
+              </a:lnSpc>
+              <a:spcBef>
+                <a:spcPts val="0"/>
+              </a:spcBef>
+              <a:spcAft>
+                <a:spcPts val="200"/>
+              </a:spcAft>
+            </a:pPr>
+            <a:r>
+              <a:rPr sz="1450" b="1" i="0">
+                <a:solidFill>
+                  <a:srgbClr val="FFFFFF"/>
+                </a:solidFill>
+                <a:latin typeface="Bricolage Grotesque"/>
+              </a:rPr>
+              <a:t>Quiz «La mezcla»</a:t>
+            </a:r>
+          </a:p>
+        </p:txBody>
+      </p:sp>
+      <p:sp>
+        <p:nvSpPr>
+          <p:cNvPr id="49" name="TextBox 48"/>
+          <p:cNvSpPr txBox="1"/>
+          <p:nvPr/>
+        </p:nvSpPr>
+        <p:spPr>
+          <a:xfrm>
+            <a:off x="6364224" y="4462272"/>
+            <a:ext cx="2414016" cy="1097280"/>
+          </a:xfrm>
+          <a:prstGeom prst="rect">
+            <a:avLst/>
+          </a:prstGeom>
+          <a:noFill/>
+        </p:spPr>
+        <p:txBody>
+          <a:bodyPr wrap="square" anchor="t" lIns="38100" rIns="38100" tIns="25400" bIns="25400">
+            <a:spAutoFit/>
+          </a:bodyPr>
+          <a:lstStyle/>
+          <a:p>
+            <a:pPr algn="l">
+              <a:lnSpc>
+                <a:spcPct val="112000"/>
+              </a:lnSpc>
+              <a:spcBef>
+                <a:spcPts val="0"/>
+              </a:spcBef>
+              <a:spcAft>
+                <a:spcPts val="200"/>
+              </a:spcAft>
+            </a:pPr>
+            <a:r>
+              <a:rPr sz="1150" b="0" i="0">
+                <a:solidFill>
+                  <a:srgbClr val="20242E"/>
+                </a:solidFill>
+                <a:latin typeface="Inter"/>
+              </a:rPr>
+              <a:t>gemengde ophaal — mét oplossing</a:t>
+            </a:r>
+          </a:p>
+        </p:txBody>
+      </p:sp>
+      <p:sp>
+        <p:nvSpPr>
+          <p:cNvPr id="50" name="Rounded Rectangle 49"/>
+          <p:cNvSpPr/>
+          <p:nvPr/>
+        </p:nvSpPr>
+        <p:spPr>
+          <a:xfrm>
+            <a:off x="6364224" y="5669280"/>
+            <a:ext cx="791870" cy="292608"/>
+          </a:xfrm>
+          <a:prstGeom prst="roundRect">
+            <a:avLst>
+              <a:gd name="adj" fmla="val 50000"/>
+            </a:avLst>
+          </a:prstGeom>
+          <a:solidFill>
+            <a:srgbClr val="E4F4EE"/>
+          </a:solidFill>
+          <a:ln>
+            <a:noFill/>
+          </a:ln>
+          <a:effectLst/>
+        </p:spPr>
+        <p:style>
+          <a:lnRef idx="1">
+            <a:schemeClr val="accent1"/>
+          </a:lnRef>
+          <a:fillRef idx="3">
+            <a:schemeClr val="accent1"/>
+          </a:fillRef>
+          <a:effectRef idx="2">
+            <a:schemeClr val="accent1"/>
+          </a:effectRef>
+          <a:fontRef idx="minor">
+            <a:schemeClr val="lt1"/>
+          </a:fontRef>
+        </p:style>
+        <p:txBody>
+          <a:bodyPr rtlCol="0" anchor="ctr" wrap="none" lIns="88900" rIns="88900" tIns="12700" bIns="12700"/>
+          <a:lstStyle/>
+          <a:p>
+            <a:pPr algn="ctr"/>
+            <a:r>
+              <a:rPr sz="950" b="1">
+                <a:solidFill>
+                  <a:srgbClr val="157355"/>
+                </a:solidFill>
+                <a:latin typeface="Inter"/>
+              </a:rPr>
+              <a:t>→ dia 19</a:t>
+            </a:r>
+          </a:p>
+        </p:txBody>
+      </p:sp>
+      <p:sp>
+        <p:nvSpPr>
+          <p:cNvPr id="51" name="Rounded Rectangle 50">
+            <a:hlinkClick action="ppaction://hlinksldjump" r:id="rId10"/>
+          </p:cNvPr>
+          <p:cNvSpPr/>
+          <p:nvPr/>
+        </p:nvSpPr>
+        <p:spPr>
+          <a:xfrm>
+            <a:off x="9070848" y="3840480"/>
+            <a:ext cx="2743200" cy="2240280"/>
+          </a:xfrm>
+          <a:prstGeom prst="roundRect">
+            <a:avLst>
+              <a:gd name="adj" fmla="val 5500"/>
+            </a:avLst>
+          </a:prstGeom>
+          <a:solidFill>
+            <a:srgbClr val="FFFFFF"/>
+          </a:solidFill>
+          <a:ln w="20320">
+            <a:solidFill>
+              <a:srgbClr val="157355"/>
+            </a:solidFill>
+          </a:ln>
+          <a:effectLst/>
+          <a:effectLst>
+            <a:outerShdw blurRad="90000" dist="38000" dir="5400000" rotWithShape="0">
+              <a:srgbClr val="20242E">
+                <a:alpha val="22000"/>
+              </a:srgbClr>
+            </a:outerShdw>
+          </a:effectLst>
+        </p:spPr>
+        <p:style>
+          <a:lnRef idx="1">
+            <a:schemeClr val="accent1"/>
+          </a:lnRef>
+          <a:fillRef idx="3">
+            <a:schemeClr val="accent1"/>
+          </a:fillRef>
+          <a:effectRef idx="2">
+            <a:schemeClr val="accent1"/>
+          </a:effectRef>
+          <a:fontRef idx="minor">
+            <a:schemeClr val="lt1"/>
+          </a:fontRef>
+        </p:style>
+        <p:txBody>
+          <a:bodyPr rtlCol="0" anchor="ctr"/>
+          <a:lstStyle/>
+          <a:p>
+            <a:pPr algn="ctr"/>
+          </a:p>
+        </p:txBody>
+      </p:sp>
+      <p:sp>
+        <p:nvSpPr>
+          <p:cNvPr id="52" name="Rectangle 51">
+            <a:hlinkClick action="ppaction://hlinksldjump" r:id="rId10"/>
+          </p:cNvPr>
+          <p:cNvSpPr/>
+          <p:nvPr/>
+        </p:nvSpPr>
+        <p:spPr>
+          <a:xfrm>
+            <a:off x="9070848" y="3840480"/>
+            <a:ext cx="2743200" cy="457200"/>
+          </a:xfrm>
+          <a:prstGeom prst="rect">
+            <a:avLst/>
+          </a:prstGeom>
+          <a:solidFill>
+            <a:srgbClr val="157355"/>
+          </a:solidFill>
+          <a:ln>
+            <a:noFill/>
+          </a:ln>
+          <a:effectLst/>
+        </p:spPr>
+        <p:style>
+          <a:lnRef idx="1">
+            <a:schemeClr val="accent1"/>
+          </a:lnRef>
+          <a:fillRef idx="3">
+            <a:schemeClr val="accent1"/>
+          </a:fillRef>
+          <a:effectRef idx="2">
+            <a:schemeClr val="accent1"/>
+          </a:effectRef>
+          <a:fontRef idx="minor">
+            <a:schemeClr val="lt1"/>
+          </a:fontRef>
+        </p:style>
+        <p:txBody>
+          <a:bodyPr rtlCol="0" anchor="ctr"/>
+          <a:lstStyle/>
+          <a:p>
+            <a:pPr algn="ctr"/>
+          </a:p>
+        </p:txBody>
+      </p:sp>
+      <p:sp>
+        <p:nvSpPr>
+          <p:cNvPr id="53" name="Rounded Rectangle 52"/>
+          <p:cNvSpPr/>
+          <p:nvPr/>
+        </p:nvSpPr>
+        <p:spPr>
+          <a:xfrm>
+            <a:off x="9180576" y="3913632"/>
+            <a:ext cx="310896" cy="310896"/>
+          </a:xfrm>
+          <a:prstGeom prst="roundRect">
+            <a:avLst>
+              <a:gd name="adj" fmla="val 50000"/>
+            </a:avLst>
+          </a:prstGeom>
+          <a:solidFill>
+            <a:srgbClr val="FFFFFF"/>
+          </a:solidFill>
+          <a:ln>
+            <a:noFill/>
+          </a:ln>
+          <a:effectLst/>
+        </p:spPr>
+        <p:style>
+          <a:lnRef idx="1">
+            <a:schemeClr val="accent1"/>
+          </a:lnRef>
+          <a:fillRef idx="3">
+            <a:schemeClr val="accent1"/>
+          </a:fillRef>
+          <a:effectRef idx="2">
+            <a:schemeClr val="accent1"/>
+          </a:effectRef>
+          <a:fontRef idx="minor">
+            <a:schemeClr val="lt1"/>
+          </a:fontRef>
+        </p:style>
+        <p:txBody>
+          <a:bodyPr rtlCol="0" anchor="ctr"/>
+          <a:lstStyle/>
+          <a:p>
+            <a:pPr algn="ctr"/>
+            <a:r>
+              <a:rPr sz="1200" b="1">
+                <a:solidFill>
+                  <a:srgbClr val="157355"/>
+                </a:solidFill>
+                <a:latin typeface="Bricolage Grotesque"/>
+              </a:rPr>
+              <a:t>◎</a:t>
+            </a:r>
+          </a:p>
+        </p:txBody>
+      </p:sp>
+      <p:sp>
+        <p:nvSpPr>
+          <p:cNvPr id="54" name="TextBox 53"/>
+          <p:cNvSpPr txBox="1"/>
+          <p:nvPr/>
+        </p:nvSpPr>
+        <p:spPr>
+          <a:xfrm>
+            <a:off x="9601200" y="3895344"/>
+            <a:ext cx="2103120" cy="365760"/>
+          </a:xfrm>
+          <a:prstGeom prst="rect">
+            <a:avLst/>
+          </a:prstGeom>
+          <a:noFill/>
+        </p:spPr>
+        <p:txBody>
+          <a:bodyPr wrap="square" anchor="ctr" lIns="38100" rIns="38100" tIns="25400" bIns="25400">
+            <a:spAutoFit/>
+          </a:bodyPr>
+          <a:lstStyle/>
+          <a:p>
+            <a:pPr algn="l">
+              <a:lnSpc>
+                <a:spcPct val="106000"/>
+              </a:lnSpc>
+              <a:spcBef>
+                <a:spcPts val="0"/>
+              </a:spcBef>
+              <a:spcAft>
+                <a:spcPts val="200"/>
+              </a:spcAft>
+            </a:pPr>
+            <a:r>
+              <a:rPr sz="1450" b="1" i="0">
+                <a:solidFill>
+                  <a:srgbClr val="FFFFFF"/>
+                </a:solidFill>
+                <a:latin typeface="Bricolage Grotesque"/>
+              </a:rPr>
+              <a:t>Repaso + semáforo</a:t>
+            </a:r>
+          </a:p>
+        </p:txBody>
+      </p:sp>
+      <p:sp>
+        <p:nvSpPr>
+          <p:cNvPr id="55" name="TextBox 54"/>
+          <p:cNvSpPr txBox="1"/>
+          <p:nvPr/>
+        </p:nvSpPr>
+        <p:spPr>
+          <a:xfrm>
+            <a:off x="9235440" y="4462272"/>
+            <a:ext cx="2414016" cy="1097280"/>
+          </a:xfrm>
+          <a:prstGeom prst="rect">
+            <a:avLst/>
+          </a:prstGeom>
+          <a:noFill/>
+        </p:spPr>
+        <p:txBody>
+          <a:bodyPr wrap="square" anchor="t" lIns="38100" rIns="38100" tIns="25400" bIns="25400">
+            <a:spAutoFit/>
+          </a:bodyPr>
+          <a:lstStyle/>
+          <a:p>
+            <a:pPr algn="l">
+              <a:lnSpc>
+                <a:spcPct val="112000"/>
+              </a:lnSpc>
+              <a:spcBef>
+                <a:spcPts val="0"/>
+              </a:spcBef>
+              <a:spcAft>
+                <a:spcPts val="200"/>
+              </a:spcAft>
+            </a:pPr>
+            <a:r>
+              <a:rPr sz="1150" b="0" i="0">
+                <a:solidFill>
+                  <a:srgbClr val="20242E"/>
+                </a:solidFill>
+                <a:latin typeface="Inter"/>
+              </a:rPr>
+              <a:t>lo esencial · zelfevaluatie</a:t>
+            </a:r>
+          </a:p>
+        </p:txBody>
+      </p:sp>
+      <p:sp>
+        <p:nvSpPr>
+          <p:cNvPr id="56" name="Rounded Rectangle 55"/>
+          <p:cNvSpPr/>
+          <p:nvPr/>
+        </p:nvSpPr>
+        <p:spPr>
+          <a:xfrm>
+            <a:off x="9235440" y="5669280"/>
+            <a:ext cx="791870" cy="292608"/>
+          </a:xfrm>
+          <a:prstGeom prst="roundRect">
+            <a:avLst>
+              <a:gd name="adj" fmla="val 50000"/>
+            </a:avLst>
+          </a:prstGeom>
+          <a:solidFill>
+            <a:srgbClr val="E4F4EE"/>
+          </a:solidFill>
+          <a:ln>
+            <a:noFill/>
+          </a:ln>
+          <a:effectLst/>
+        </p:spPr>
+        <p:style>
+          <a:lnRef idx="1">
+            <a:schemeClr val="accent1"/>
+          </a:lnRef>
+          <a:fillRef idx="3">
+            <a:schemeClr val="accent1"/>
+          </a:fillRef>
+          <a:effectRef idx="2">
+            <a:schemeClr val="accent1"/>
+          </a:effectRef>
+          <a:fontRef idx="minor">
+            <a:schemeClr val="lt1"/>
+          </a:fontRef>
+        </p:style>
+        <p:txBody>
+          <a:bodyPr rtlCol="0" anchor="ctr" wrap="none" lIns="88900" rIns="88900" tIns="12700" bIns="12700"/>
+          <a:lstStyle/>
+          <a:p>
+            <a:pPr algn="ctr"/>
+            <a:r>
+              <a:rPr sz="950" b="1">
+                <a:solidFill>
+                  <a:srgbClr val="157355"/>
+                </a:solidFill>
+                <a:latin typeface="Inter"/>
+              </a:rPr>
+              <a:t>→ dia 20</a:t>
+            </a:r>
+          </a:p>
+        </p:txBody>
+      </p:sp>
+      <p:sp>
+        <p:nvSpPr>
+          <p:cNvPr id="57" name="Rectangle 56"/>
+          <p:cNvSpPr/>
+          <p:nvPr/>
+        </p:nvSpPr>
+        <p:spPr>
+          <a:xfrm>
+            <a:off x="0" y="6547104"/>
+            <a:ext cx="12191695" cy="310896"/>
+          </a:xfrm>
+          <a:prstGeom prst="rect">
+            <a:avLst/>
+          </a:prstGeom>
+          <a:solidFill>
+            <a:srgbClr val="F3EEE4"/>
+          </a:solidFill>
+          <a:ln>
+            <a:noFill/>
+          </a:ln>
+          <a:effectLst/>
+        </p:spPr>
+        <p:style>
+          <a:lnRef idx="1">
+            <a:schemeClr val="accent1"/>
+          </a:lnRef>
+          <a:fillRef idx="3">
+            <a:schemeClr val="accent1"/>
+          </a:fillRef>
+          <a:effectRef idx="2">
+            <a:schemeClr val="accent1"/>
+          </a:effectRef>
+          <a:fontRef idx="minor">
+            <a:schemeClr val="lt1"/>
+          </a:fontRef>
+        </p:style>
+        <p:txBody>
+          <a:bodyPr rtlCol="0" anchor="ctr"/>
+          <a:lstStyle/>
+          <a:p>
+            <a:pPr algn="ctr"/>
+          </a:p>
+        </p:txBody>
+      </p:sp>
+      <p:sp>
+        <p:nvSpPr>
+          <p:cNvPr id="58" name="TextBox 57"/>
+          <p:cNvSpPr txBox="1"/>
+          <p:nvPr/>
+        </p:nvSpPr>
+        <p:spPr>
+          <a:xfrm>
+            <a:off x="411480" y="6565392"/>
+            <a:ext cx="5486400" cy="274320"/>
+          </a:xfrm>
+          <a:prstGeom prst="rect">
+            <a:avLst/>
+          </a:prstGeom>
+          <a:noFill/>
+        </p:spPr>
+        <p:txBody>
+          <a:bodyPr wrap="square" anchor="ctr" lIns="38100" rIns="38100" tIns="25400" bIns="25400">
+            <a:spAutoFit/>
+          </a:bodyPr>
+          <a:lstStyle/>
+          <a:p>
+            <a:pPr algn="l">
+              <a:lnSpc>
+                <a:spcPct val="106000"/>
+              </a:lnSpc>
+              <a:spcBef>
+                <a:spcPts val="0"/>
+              </a:spcBef>
+              <a:spcAft>
+                <a:spcPts val="200"/>
+              </a:spcAft>
+            </a:pPr>
+            <a:r>
+              <a:rPr sz="1100" b="1" i="0">
+                <a:solidFill>
+                  <a:srgbClr val="1E9E74"/>
+                </a:solidFill>
+                <a:latin typeface="Inter"/>
+              </a:rPr>
+              <a:t>● </a:t>
+            </a:r>
+            <a:r>
+              <a:rPr sz="950" b="0" i="0">
+                <a:solidFill>
+                  <a:srgbClr val="6A6E78"/>
+                </a:solidFill>
+                <a:latin typeface="Inter"/>
+              </a:rPr>
+              <a:t>U0 · ¡EMPEZAMOS!   ·   C5 · A1 · La Ruta</a:t>
+            </a:r>
+          </a:p>
+        </p:txBody>
+      </p:sp>
+      <p:sp>
+        <p:nvSpPr>
+          <p:cNvPr id="59" name="TextBox 58"/>
+          <p:cNvSpPr txBox="1"/>
+          <p:nvPr/>
+        </p:nvSpPr>
+        <p:spPr>
+          <a:xfrm>
+            <a:off x="8686800" y="6565392"/>
+            <a:ext cx="3063240" cy="274320"/>
+          </a:xfrm>
+          <a:prstGeom prst="rect">
+            <a:avLst/>
+          </a:prstGeom>
+          <a:noFill/>
+        </p:spPr>
+        <p:txBody>
+          <a:bodyPr wrap="square" anchor="ctr" lIns="38100" rIns="38100" tIns="25400" bIns="25400">
+            <a:spAutoFit/>
+          </a:bodyPr>
+          <a:lstStyle/>
+          <a:p>
+            <a:pPr algn="r">
+              <a:lnSpc>
+                <a:spcPct val="106000"/>
+              </a:lnSpc>
+              <a:spcBef>
+                <a:spcPts val="0"/>
+              </a:spcBef>
+              <a:spcAft>
+                <a:spcPts val="200"/>
+              </a:spcAft>
+            </a:pPr>
+            <a:r>
+              <a:rPr sz="900" b="0" i="1">
+                <a:solidFill>
+                  <a:srgbClr val="6A6E78"/>
+                </a:solidFill>
+                <a:latin typeface="Inter"/>
+              </a:rPr>
+              <a:t>Docentenversie — met oplossingen</a:t>
+            </a:r>
+          </a:p>
+        </p:txBody>
+      </p:sp>
+      <p:sp>
+        <p:nvSpPr>
+          <p:cNvPr id="60" name="TextBox 59"/>
+          <p:cNvSpPr txBox="1"/>
+          <p:nvPr/>
+        </p:nvSpPr>
+        <p:spPr>
+          <a:xfrm>
+            <a:off x="11475720" y="6565392"/>
+            <a:ext cx="457200" cy="274320"/>
+          </a:xfrm>
+          <a:prstGeom prst="rect">
+            <a:avLst/>
+          </a:prstGeom>
+          <a:noFill/>
+        </p:spPr>
+        <p:txBody>
+          <a:bodyPr wrap="square" anchor="ctr" lIns="38100" rIns="38100" tIns="25400" bIns="25400">
+            <a:spAutoFit/>
+          </a:bodyPr>
+          <a:lstStyle/>
+          <a:p>
+            <a:pPr algn="r">
+              <a:lnSpc>
+                <a:spcPct val="106000"/>
+              </a:lnSpc>
+              <a:spcBef>
+                <a:spcPts val="0"/>
+              </a:spcBef>
+              <a:spcAft>
+                <a:spcPts val="200"/>
+              </a:spcAft>
+            </a:pPr>
+            <a:r>
+              <a:rPr sz="950" b="1" i="0">
+                <a:solidFill>
+                  <a:srgbClr val="157355"/>
+                </a:solidFill>
+                <a:latin typeface="Inter"/>
+              </a:rPr>
+              <a:t>2</a:t>
+            </a:r>
+          </a:p>
+        </p:txBody>
+      </p:sp>
+    </p:spTree>
+  </p:cSld>
+  <p:clrMapOvr>
+    <a:masterClrMapping/>
+  </p:clrMapOvr>
+</p:sld>
+</file>
+
+<file path=ppt/slides/slide20.xml><?xml version="1.0" encoding="utf-8"?>
+<p:sld xmlns:a="http://schemas.openxmlformats.org/drawingml/2006/main" xmlns:p="http://schemas.openxmlformats.org/presentationml/2006/main" xmlns:r="http://schemas.openxmlformats.org/officeDocument/2006/relationships">
+  <p:cSld>
+    <p:spTree>
+      <p:nvGrpSpPr>
+        <p:cNvPr id="1" name=""/>
+        <p:cNvGrpSpPr/>
+        <p:nvPr/>
+      </p:nvGrpSpPr>
+      <p:grpSpPr/>
+      <p:sp>
+        <p:nvSpPr>
+          <p:cNvPr id="2" name="Rectangle 1"/>
+          <p:cNvSpPr/>
+          <p:nvPr/>
+        </p:nvSpPr>
+        <p:spPr>
+          <a:xfrm>
+            <a:off x="0" y="0"/>
+            <a:ext cx="12191695" cy="6858000"/>
+          </a:xfrm>
+          <a:prstGeom prst="rect">
+            <a:avLst/>
+          </a:prstGeom>
+          <a:solidFill>
+            <a:srgbClr val="FCFBF8"/>
+          </a:solidFill>
+          <a:ln>
+            <a:noFill/>
+          </a:ln>
+          <a:effectLst/>
+        </p:spPr>
+        <p:style>
+          <a:lnRef idx="1">
+            <a:schemeClr val="accent1"/>
+          </a:lnRef>
+          <a:fillRef idx="3">
+            <a:schemeClr val="accent1"/>
+          </a:fillRef>
+          <a:effectRef idx="2">
+            <a:schemeClr val="accent1"/>
+          </a:effectRef>
+          <a:fontRef idx="minor">
+            <a:schemeClr val="lt1"/>
+          </a:fontRef>
+        </p:style>
+        <p:txBody>
+          <a:bodyPr rtlCol="0" anchor="ctr"/>
+          <a:lstStyle/>
+          <a:p>
+            <a:pPr algn="ctr"/>
+          </a:p>
+        </p:txBody>
+      </p:sp>
+      <p:sp>
+        <p:nvSpPr>
+          <p:cNvPr id="3" name="Rectangle 2"/>
+          <p:cNvSpPr/>
+          <p:nvPr/>
+        </p:nvSpPr>
+        <p:spPr>
+          <a:xfrm>
+            <a:off x="0" y="0"/>
+            <a:ext cx="12191695" cy="1078992"/>
+          </a:xfrm>
+          <a:prstGeom prst="rect">
+            <a:avLst/>
+          </a:prstGeom>
+          <a:solidFill>
             <a:srgbClr val="157355"/>
           </a:solidFill>
           <a:ln>
@@ -28026,7 +34355,7 @@
                 </a:solidFill>
                 <a:latin typeface="Inter"/>
               </a:rPr>
-              <a:t>18</a:t>
+              <a:t>20</a:t>
             </a:r>
           </a:p>
         </p:txBody>
@@ -28039,7 +34368,7 @@
 </p:sld>
 </file>
 
-<file path=ppt/slides/slide19.xml><?xml version="1.0" encoding="utf-8"?>
+<file path=ppt/slides/slide21.xml><?xml version="1.0" encoding="utf-8"?>
 <p:sld xmlns:a="http://schemas.openxmlformats.org/drawingml/2006/main" xmlns:p="http://schemas.openxmlformats.org/presentationml/2006/main" xmlns:r="http://schemas.openxmlformats.org/officeDocument/2006/relationships">
   <p:cSld>
     <p:spTree>
@@ -30065,7 +36394,7 @@
                 </a:solidFill>
                 <a:latin typeface="Inter"/>
               </a:rPr>
-              <a:t>19</a:t>
+              <a:t>21</a:t>
             </a:r>
           </a:p>
         </p:txBody>
@@ -30479,2959 +36808,7 @@
 </p:sld>
 </file>
 
-<file path=ppt/slides/slide2.xml><?xml version="1.0" encoding="utf-8"?>
-<p:sld xmlns:a="http://schemas.openxmlformats.org/drawingml/2006/main" xmlns:p="http://schemas.openxmlformats.org/presentationml/2006/main" xmlns:r="http://schemas.openxmlformats.org/officeDocument/2006/relationships">
-  <p:cSld>
-    <p:spTree>
-      <p:nvGrpSpPr>
-        <p:cNvPr id="1" name=""/>
-        <p:cNvGrpSpPr/>
-        <p:nvPr/>
-      </p:nvGrpSpPr>
-      <p:grpSpPr/>
-      <p:sp>
-        <p:nvSpPr>
-          <p:cNvPr id="2" name="Rectangle 1"/>
-          <p:cNvSpPr/>
-          <p:nvPr/>
-        </p:nvSpPr>
-        <p:spPr>
-          <a:xfrm>
-            <a:off x="0" y="0"/>
-            <a:ext cx="12191695" cy="6858000"/>
-          </a:xfrm>
-          <a:prstGeom prst="rect">
-            <a:avLst/>
-          </a:prstGeom>
-          <a:solidFill>
-            <a:srgbClr val="FCFBF8"/>
-          </a:solidFill>
-          <a:ln>
-            <a:noFill/>
-          </a:ln>
-          <a:effectLst/>
-        </p:spPr>
-        <p:style>
-          <a:lnRef idx="1">
-            <a:schemeClr val="accent1"/>
-          </a:lnRef>
-          <a:fillRef idx="3">
-            <a:schemeClr val="accent1"/>
-          </a:fillRef>
-          <a:effectRef idx="2">
-            <a:schemeClr val="accent1"/>
-          </a:effectRef>
-          <a:fontRef idx="minor">
-            <a:schemeClr val="lt1"/>
-          </a:fontRef>
-        </p:style>
-        <p:txBody>
-          <a:bodyPr rtlCol="0" anchor="ctr"/>
-          <a:lstStyle/>
-          <a:p>
-            <a:pPr algn="ctr"/>
-          </a:p>
-        </p:txBody>
-      </p:sp>
-      <p:sp>
-        <p:nvSpPr>
-          <p:cNvPr id="3" name="Rectangle 2"/>
-          <p:cNvSpPr/>
-          <p:nvPr/>
-        </p:nvSpPr>
-        <p:spPr>
-          <a:xfrm>
-            <a:off x="0" y="0"/>
-            <a:ext cx="12191695" cy="1078992"/>
-          </a:xfrm>
-          <a:prstGeom prst="rect">
-            <a:avLst/>
-          </a:prstGeom>
-          <a:solidFill>
-            <a:srgbClr val="1E9E74"/>
-          </a:solidFill>
-          <a:ln>
-            <a:noFill/>
-          </a:ln>
-          <a:effectLst/>
-        </p:spPr>
-        <p:style>
-          <a:lnRef idx="1">
-            <a:schemeClr val="accent1"/>
-          </a:lnRef>
-          <a:fillRef idx="3">
-            <a:schemeClr val="accent1"/>
-          </a:fillRef>
-          <a:effectRef idx="2">
-            <a:schemeClr val="accent1"/>
-          </a:effectRef>
-          <a:fontRef idx="minor">
-            <a:schemeClr val="lt1"/>
-          </a:fontRef>
-        </p:style>
-        <p:txBody>
-          <a:bodyPr rtlCol="0" anchor="ctr"/>
-          <a:lstStyle/>
-          <a:p>
-            <a:pPr algn="ctr"/>
-          </a:p>
-        </p:txBody>
-      </p:sp>
-      <p:sp>
-        <p:nvSpPr>
-          <p:cNvPr id="4" name="Rectangle 3"/>
-          <p:cNvSpPr/>
-          <p:nvPr/>
-        </p:nvSpPr>
-        <p:spPr>
-          <a:xfrm>
-            <a:off x="0" y="1078992"/>
-            <a:ext cx="12191695" cy="54864"/>
-          </a:xfrm>
-          <a:prstGeom prst="rect">
-            <a:avLst/>
-          </a:prstGeom>
-          <a:solidFill>
-            <a:srgbClr val="157355"/>
-          </a:solidFill>
-          <a:ln>
-            <a:noFill/>
-          </a:ln>
-          <a:effectLst/>
-        </p:spPr>
-        <p:style>
-          <a:lnRef idx="1">
-            <a:schemeClr val="accent1"/>
-          </a:lnRef>
-          <a:fillRef idx="3">
-            <a:schemeClr val="accent1"/>
-          </a:fillRef>
-          <a:effectRef idx="2">
-            <a:schemeClr val="accent1"/>
-          </a:effectRef>
-          <a:fontRef idx="minor">
-            <a:schemeClr val="lt1"/>
-          </a:fontRef>
-        </p:style>
-        <p:txBody>
-          <a:bodyPr rtlCol="0" anchor="ctr"/>
-          <a:lstStyle/>
-          <a:p>
-            <a:pPr algn="ctr"/>
-          </a:p>
-        </p:txBody>
-      </p:sp>
-      <p:sp>
-        <p:nvSpPr>
-          <p:cNvPr id="5" name="Rounded Rectangle 4"/>
-          <p:cNvSpPr/>
-          <p:nvPr/>
-        </p:nvSpPr>
-        <p:spPr>
-          <a:xfrm>
-            <a:off x="502920" y="182880"/>
-            <a:ext cx="1633118" cy="292608"/>
-          </a:xfrm>
-          <a:prstGeom prst="roundRect">
-            <a:avLst>
-              <a:gd name="adj" fmla="val 50000"/>
-            </a:avLst>
-          </a:prstGeom>
-          <a:solidFill>
-            <a:srgbClr val="FFFFFF"/>
-          </a:solidFill>
-          <a:ln>
-            <a:noFill/>
-          </a:ln>
-          <a:effectLst/>
-        </p:spPr>
-        <p:style>
-          <a:lnRef idx="1">
-            <a:schemeClr val="accent1"/>
-          </a:lnRef>
-          <a:fillRef idx="3">
-            <a:schemeClr val="accent1"/>
-          </a:fillRef>
-          <a:effectRef idx="2">
-            <a:schemeClr val="accent1"/>
-          </a:effectRef>
-          <a:fontRef idx="minor">
-            <a:schemeClr val="lt1"/>
-          </a:fontRef>
-        </p:style>
-        <p:txBody>
-          <a:bodyPr rtlCol="0" anchor="ctr" wrap="none" lIns="88900" rIns="88900" tIns="12700" bIns="12700"/>
-          <a:lstStyle/>
-          <a:p>
-            <a:pPr algn="ctr"/>
-            <a:r>
-              <a:rPr sz="1100" b="1">
-                <a:solidFill>
-                  <a:srgbClr val="1E9E74"/>
-                </a:solidFill>
-                <a:latin typeface="Inter"/>
-              </a:rPr>
-              <a:t>MENÚ DE LA LECCIÓN</a:t>
-            </a:r>
-          </a:p>
-        </p:txBody>
-      </p:sp>
-      <p:sp>
-        <p:nvSpPr>
-          <p:cNvPr id="6" name="TextBox 5"/>
-          <p:cNvSpPr txBox="1"/>
-          <p:nvPr/>
-        </p:nvSpPr>
-        <p:spPr>
-          <a:xfrm>
-            <a:off x="10424160" y="-137160"/>
-            <a:ext cx="1737360" cy="1371600"/>
-          </a:xfrm>
-          <a:prstGeom prst="rect">
-            <a:avLst/>
-          </a:prstGeom>
-          <a:noFill/>
-        </p:spPr>
-        <p:txBody>
-          <a:bodyPr wrap="square" anchor="t" lIns="38100" rIns="38100" tIns="25400" bIns="25400">
-            <a:spAutoFit/>
-          </a:bodyPr>
-          <a:lstStyle/>
-          <a:p>
-            <a:pPr algn="r">
-              <a:lnSpc>
-                <a:spcPct val="106000"/>
-              </a:lnSpc>
-              <a:spcBef>
-                <a:spcPts val="0"/>
-              </a:spcBef>
-              <a:spcAft>
-                <a:spcPts val="200"/>
-              </a:spcAft>
-            </a:pPr>
-            <a:r>
-              <a:rPr sz="8800" b="1" i="0">
-                <a:solidFill>
-                  <a:srgbClr val="FFFFFF"/>
-                </a:solidFill>
-                <a:latin typeface="Bricolage Grotesque"/>
-              </a:rPr>
-              <a:t>0</a:t>
-            </a:r>
-          </a:p>
-        </p:txBody>
-      </p:sp>
-      <p:sp>
-        <p:nvSpPr>
-          <p:cNvPr id="7" name="TextBox 6"/>
-          <p:cNvSpPr txBox="1"/>
-          <p:nvPr/>
-        </p:nvSpPr>
-        <p:spPr>
-          <a:xfrm>
-            <a:off x="457200" y="457200"/>
-            <a:ext cx="9692640" cy="502920"/>
-          </a:xfrm>
-          <a:prstGeom prst="rect">
-            <a:avLst/>
-          </a:prstGeom>
-          <a:noFill/>
-        </p:spPr>
-        <p:txBody>
-          <a:bodyPr wrap="square" anchor="ctr" lIns="38100" rIns="38100" tIns="25400" bIns="25400">
-            <a:spAutoFit/>
-          </a:bodyPr>
-          <a:lstStyle/>
-          <a:p>
-            <a:pPr algn="l">
-              <a:lnSpc>
-                <a:spcPct val="106000"/>
-              </a:lnSpc>
-              <a:spcBef>
-                <a:spcPts val="0"/>
-              </a:spcBef>
-              <a:spcAft>
-                <a:spcPts val="200"/>
-              </a:spcAft>
-            </a:pPr>
-            <a:r>
-              <a:rPr sz="2700" b="1" i="0">
-                <a:solidFill>
-                  <a:srgbClr val="FFFFFF"/>
-                </a:solidFill>
-                <a:latin typeface="Bricolage Grotesque"/>
-              </a:rPr>
-              <a:t>El mapa de la Unidad 0</a:t>
-            </a:r>
-          </a:p>
-        </p:txBody>
-      </p:sp>
-      <p:sp>
-        <p:nvSpPr>
-          <p:cNvPr id="8" name="TextBox 7"/>
-          <p:cNvSpPr txBox="1"/>
-          <p:nvPr/>
-        </p:nvSpPr>
-        <p:spPr>
-          <a:xfrm>
-            <a:off x="502920" y="932688"/>
-            <a:ext cx="9692640" cy="274320"/>
-          </a:xfrm>
-          <a:prstGeom prst="rect">
-            <a:avLst/>
-          </a:prstGeom>
-          <a:noFill/>
-        </p:spPr>
-        <p:txBody>
-          <a:bodyPr wrap="square" anchor="t" lIns="38100" rIns="38100" tIns="25400" bIns="25400">
-            <a:spAutoFit/>
-          </a:bodyPr>
-          <a:lstStyle/>
-          <a:p>
-            <a:pPr algn="l">
-              <a:lnSpc>
-                <a:spcPct val="106000"/>
-              </a:lnSpc>
-              <a:spcBef>
-                <a:spcPts val="0"/>
-              </a:spcBef>
-              <a:spcAft>
-                <a:spcPts val="200"/>
-              </a:spcAft>
-            </a:pPr>
-            <a:r>
-              <a:rPr sz="1250" b="0" i="1">
-                <a:solidFill>
-                  <a:srgbClr val="E4F4EE"/>
-                </a:solidFill>
-                <a:latin typeface="Inter"/>
-              </a:rPr>
-              <a:t>Kies je route — klik een tegel (of volg de volgorde). Alles oefent naar de Tarea final toe.</a:t>
-            </a:r>
-          </a:p>
-        </p:txBody>
-      </p:sp>
-      <p:sp>
-        <p:nvSpPr>
-          <p:cNvPr id="9" name="Rounded Rectangle 8">
-            <a:hlinkClick action="ppaction://hlinksldjump" r:id="rId3"/>
-          </p:cNvPr>
-          <p:cNvSpPr/>
-          <p:nvPr/>
-        </p:nvSpPr>
-        <p:spPr>
-          <a:xfrm>
-            <a:off x="457200" y="1417320"/>
-            <a:ext cx="2743200" cy="2240280"/>
-          </a:xfrm>
-          <a:prstGeom prst="roundRect">
-            <a:avLst>
-              <a:gd name="adj" fmla="val 5500"/>
-            </a:avLst>
-          </a:prstGeom>
-          <a:solidFill>
-            <a:srgbClr val="FFFFFF"/>
-          </a:solidFill>
-          <a:ln w="20320">
-            <a:solidFill>
-              <a:srgbClr val="1E9E74"/>
-            </a:solidFill>
-          </a:ln>
-          <a:effectLst/>
-          <a:effectLst>
-            <a:outerShdw blurRad="90000" dist="38000" dir="5400000" rotWithShape="0">
-              <a:srgbClr val="20242E">
-                <a:alpha val="22000"/>
-              </a:srgbClr>
-            </a:outerShdw>
-          </a:effectLst>
-        </p:spPr>
-        <p:style>
-          <a:lnRef idx="1">
-            <a:schemeClr val="accent1"/>
-          </a:lnRef>
-          <a:fillRef idx="3">
-            <a:schemeClr val="accent1"/>
-          </a:fillRef>
-          <a:effectRef idx="2">
-            <a:schemeClr val="accent1"/>
-          </a:effectRef>
-          <a:fontRef idx="minor">
-            <a:schemeClr val="lt1"/>
-          </a:fontRef>
-        </p:style>
-        <p:txBody>
-          <a:bodyPr rtlCol="0" anchor="ctr"/>
-          <a:lstStyle/>
-          <a:p>
-            <a:pPr algn="ctr"/>
-          </a:p>
-        </p:txBody>
-      </p:sp>
-      <p:sp>
-        <p:nvSpPr>
-          <p:cNvPr id="10" name="Rectangle 9">
-            <a:hlinkClick action="ppaction://hlinksldjump" r:id="rId3"/>
-          </p:cNvPr>
-          <p:cNvSpPr/>
-          <p:nvPr/>
-        </p:nvSpPr>
-        <p:spPr>
-          <a:xfrm>
-            <a:off x="457200" y="1417320"/>
-            <a:ext cx="2743200" cy="457200"/>
-          </a:xfrm>
-          <a:prstGeom prst="rect">
-            <a:avLst/>
-          </a:prstGeom>
-          <a:solidFill>
-            <a:srgbClr val="1E9E74"/>
-          </a:solidFill>
-          <a:ln>
-            <a:noFill/>
-          </a:ln>
-          <a:effectLst/>
-        </p:spPr>
-        <p:style>
-          <a:lnRef idx="1">
-            <a:schemeClr val="accent1"/>
-          </a:lnRef>
-          <a:fillRef idx="3">
-            <a:schemeClr val="accent1"/>
-          </a:fillRef>
-          <a:effectRef idx="2">
-            <a:schemeClr val="accent1"/>
-          </a:effectRef>
-          <a:fontRef idx="minor">
-            <a:schemeClr val="lt1"/>
-          </a:fontRef>
-        </p:style>
-        <p:txBody>
-          <a:bodyPr rtlCol="0" anchor="ctr"/>
-          <a:lstStyle/>
-          <a:p>
-            <a:pPr algn="ctr"/>
-          </a:p>
-        </p:txBody>
-      </p:sp>
-      <p:sp>
-        <p:nvSpPr>
-          <p:cNvPr id="11" name="Rounded Rectangle 10"/>
-          <p:cNvSpPr/>
-          <p:nvPr/>
-        </p:nvSpPr>
-        <p:spPr>
-          <a:xfrm>
-            <a:off x="566928" y="1490472"/>
-            <a:ext cx="310896" cy="310896"/>
-          </a:xfrm>
-          <a:prstGeom prst="roundRect">
-            <a:avLst>
-              <a:gd name="adj" fmla="val 50000"/>
-            </a:avLst>
-          </a:prstGeom>
-          <a:solidFill>
-            <a:srgbClr val="FFFFFF"/>
-          </a:solidFill>
-          <a:ln>
-            <a:noFill/>
-          </a:ln>
-          <a:effectLst/>
-        </p:spPr>
-        <p:style>
-          <a:lnRef idx="1">
-            <a:schemeClr val="accent1"/>
-          </a:lnRef>
-          <a:fillRef idx="3">
-            <a:schemeClr val="accent1"/>
-          </a:fillRef>
-          <a:effectRef idx="2">
-            <a:schemeClr val="accent1"/>
-          </a:effectRef>
-          <a:fontRef idx="minor">
-            <a:schemeClr val="lt1"/>
-          </a:fontRef>
-        </p:style>
-        <p:txBody>
-          <a:bodyPr rtlCol="0" anchor="ctr"/>
-          <a:lstStyle/>
-          <a:p>
-            <a:pPr algn="ctr"/>
-            <a:r>
-              <a:rPr sz="1200" b="1">
-                <a:solidFill>
-                  <a:srgbClr val="1E9E74"/>
-                </a:solidFill>
-                <a:latin typeface="Bricolage Grotesque"/>
-              </a:rPr>
-              <a:t>§1</a:t>
-            </a:r>
-          </a:p>
-        </p:txBody>
-      </p:sp>
-      <p:sp>
-        <p:nvSpPr>
-          <p:cNvPr id="12" name="TextBox 11"/>
-          <p:cNvSpPr txBox="1"/>
-          <p:nvPr/>
-        </p:nvSpPr>
-        <p:spPr>
-          <a:xfrm>
-            <a:off x="987552" y="1472184"/>
-            <a:ext cx="2103120" cy="365760"/>
-          </a:xfrm>
-          <a:prstGeom prst="rect">
-            <a:avLst/>
-          </a:prstGeom>
-          <a:noFill/>
-        </p:spPr>
-        <p:txBody>
-          <a:bodyPr wrap="square" anchor="ctr" lIns="38100" rIns="38100" tIns="25400" bIns="25400">
-            <a:spAutoFit/>
-          </a:bodyPr>
-          <a:lstStyle/>
-          <a:p>
-            <a:pPr algn="l">
-              <a:lnSpc>
-                <a:spcPct val="106000"/>
-              </a:lnSpc>
-              <a:spcBef>
-                <a:spcPts val="0"/>
-              </a:spcBef>
-              <a:spcAft>
-                <a:spcPts val="200"/>
-              </a:spcAft>
-            </a:pPr>
-            <a:r>
-              <a:rPr sz="1450" b="1" i="0">
-                <a:solidFill>
-                  <a:srgbClr val="FFFFFF"/>
-                </a:solidFill>
-                <a:latin typeface="Bricolage Grotesque"/>
-              </a:rPr>
-              <a:t>Sonar en español</a:t>
-            </a:r>
-          </a:p>
-        </p:txBody>
-      </p:sp>
-      <p:sp>
-        <p:nvSpPr>
-          <p:cNvPr id="13" name="TextBox 12"/>
-          <p:cNvSpPr txBox="1"/>
-          <p:nvPr/>
-        </p:nvSpPr>
-        <p:spPr>
-          <a:xfrm>
-            <a:off x="621792" y="2039112"/>
-            <a:ext cx="2414016" cy="1097280"/>
-          </a:xfrm>
-          <a:prstGeom prst="rect">
-            <a:avLst/>
-          </a:prstGeom>
-          <a:noFill/>
-        </p:spPr>
-        <p:txBody>
-          <a:bodyPr wrap="square" anchor="t" lIns="38100" rIns="38100" tIns="25400" bIns="25400">
-            <a:spAutoFit/>
-          </a:bodyPr>
-          <a:lstStyle/>
-          <a:p>
-            <a:pPr algn="l">
-              <a:lnSpc>
-                <a:spcPct val="112000"/>
-              </a:lnSpc>
-              <a:spcBef>
-                <a:spcPts val="0"/>
-              </a:spcBef>
-              <a:spcAft>
-                <a:spcPts val="200"/>
-              </a:spcAft>
-            </a:pPr>
-            <a:r>
-              <a:rPr sz="1150" b="0" i="0">
-                <a:solidFill>
-                  <a:srgbClr val="20242E"/>
-                </a:solidFill>
-                <a:latin typeface="Inter"/>
-              </a:rPr>
-              <a:t>alfabet · uitspraak · klanktrampas</a:t>
-            </a:r>
-          </a:p>
-        </p:txBody>
-      </p:sp>
-      <p:sp>
-        <p:nvSpPr>
-          <p:cNvPr id="14" name="Rounded Rectangle 13"/>
-          <p:cNvSpPr/>
-          <p:nvPr/>
-        </p:nvSpPr>
-        <p:spPr>
-          <a:xfrm>
-            <a:off x="621792" y="3246120"/>
-            <a:ext cx="707745" cy="292608"/>
-          </a:xfrm>
-          <a:prstGeom prst="roundRect">
-            <a:avLst>
-              <a:gd name="adj" fmla="val 50000"/>
-            </a:avLst>
-          </a:prstGeom>
-          <a:solidFill>
-            <a:srgbClr val="E4F4EE"/>
-          </a:solidFill>
-          <a:ln>
-            <a:noFill/>
-          </a:ln>
-          <a:effectLst/>
-        </p:spPr>
-        <p:style>
-          <a:lnRef idx="1">
-            <a:schemeClr val="accent1"/>
-          </a:lnRef>
-          <a:fillRef idx="3">
-            <a:schemeClr val="accent1"/>
-          </a:fillRef>
-          <a:effectRef idx="2">
-            <a:schemeClr val="accent1"/>
-          </a:effectRef>
-          <a:fontRef idx="minor">
-            <a:schemeClr val="lt1"/>
-          </a:fontRef>
-        </p:style>
-        <p:txBody>
-          <a:bodyPr rtlCol="0" anchor="ctr" wrap="none" lIns="88900" rIns="88900" tIns="12700" bIns="12700"/>
-          <a:lstStyle/>
-          <a:p>
-            <a:pPr algn="ctr"/>
-            <a:r>
-              <a:rPr sz="950" b="1">
-                <a:solidFill>
-                  <a:srgbClr val="157355"/>
-                </a:solidFill>
-                <a:latin typeface="Inter"/>
-              </a:rPr>
-              <a:t>→ dia 4</a:t>
-            </a:r>
-          </a:p>
-        </p:txBody>
-      </p:sp>
-      <p:sp>
-        <p:nvSpPr>
-          <p:cNvPr id="15" name="Rounded Rectangle 14">
-            <a:hlinkClick action="ppaction://hlinksldjump" r:id="rId4"/>
-          </p:cNvPr>
-          <p:cNvSpPr/>
-          <p:nvPr/>
-        </p:nvSpPr>
-        <p:spPr>
-          <a:xfrm>
-            <a:off x="3328416" y="1417320"/>
-            <a:ext cx="2743200" cy="2240280"/>
-          </a:xfrm>
-          <a:prstGeom prst="roundRect">
-            <a:avLst>
-              <a:gd name="adj" fmla="val 5500"/>
-            </a:avLst>
-          </a:prstGeom>
-          <a:solidFill>
-            <a:srgbClr val="FFFFFF"/>
-          </a:solidFill>
-          <a:ln w="20320">
-            <a:solidFill>
-              <a:srgbClr val="1E9E74"/>
-            </a:solidFill>
-          </a:ln>
-          <a:effectLst/>
-          <a:effectLst>
-            <a:outerShdw blurRad="90000" dist="38000" dir="5400000" rotWithShape="0">
-              <a:srgbClr val="20242E">
-                <a:alpha val="22000"/>
-              </a:srgbClr>
-            </a:outerShdw>
-          </a:effectLst>
-        </p:spPr>
-        <p:style>
-          <a:lnRef idx="1">
-            <a:schemeClr val="accent1"/>
-          </a:lnRef>
-          <a:fillRef idx="3">
-            <a:schemeClr val="accent1"/>
-          </a:fillRef>
-          <a:effectRef idx="2">
-            <a:schemeClr val="accent1"/>
-          </a:effectRef>
-          <a:fontRef idx="minor">
-            <a:schemeClr val="lt1"/>
-          </a:fontRef>
-        </p:style>
-        <p:txBody>
-          <a:bodyPr rtlCol="0" anchor="ctr"/>
-          <a:lstStyle/>
-          <a:p>
-            <a:pPr algn="ctr"/>
-          </a:p>
-        </p:txBody>
-      </p:sp>
-      <p:sp>
-        <p:nvSpPr>
-          <p:cNvPr id="16" name="Rectangle 15">
-            <a:hlinkClick action="ppaction://hlinksldjump" r:id="rId4"/>
-          </p:cNvPr>
-          <p:cNvSpPr/>
-          <p:nvPr/>
-        </p:nvSpPr>
-        <p:spPr>
-          <a:xfrm>
-            <a:off x="3328416" y="1417320"/>
-            <a:ext cx="2743200" cy="457200"/>
-          </a:xfrm>
-          <a:prstGeom prst="rect">
-            <a:avLst/>
-          </a:prstGeom>
-          <a:solidFill>
-            <a:srgbClr val="1E9E74"/>
-          </a:solidFill>
-          <a:ln>
-            <a:noFill/>
-          </a:ln>
-          <a:effectLst/>
-        </p:spPr>
-        <p:style>
-          <a:lnRef idx="1">
-            <a:schemeClr val="accent1"/>
-          </a:lnRef>
-          <a:fillRef idx="3">
-            <a:schemeClr val="accent1"/>
-          </a:fillRef>
-          <a:effectRef idx="2">
-            <a:schemeClr val="accent1"/>
-          </a:effectRef>
-          <a:fontRef idx="minor">
-            <a:schemeClr val="lt1"/>
-          </a:fontRef>
-        </p:style>
-        <p:txBody>
-          <a:bodyPr rtlCol="0" anchor="ctr"/>
-          <a:lstStyle/>
-          <a:p>
-            <a:pPr algn="ctr"/>
-          </a:p>
-        </p:txBody>
-      </p:sp>
-      <p:sp>
-        <p:nvSpPr>
-          <p:cNvPr id="17" name="Rounded Rectangle 16"/>
-          <p:cNvSpPr/>
-          <p:nvPr/>
-        </p:nvSpPr>
-        <p:spPr>
-          <a:xfrm>
-            <a:off x="3438144" y="1490472"/>
-            <a:ext cx="310896" cy="310896"/>
-          </a:xfrm>
-          <a:prstGeom prst="roundRect">
-            <a:avLst>
-              <a:gd name="adj" fmla="val 50000"/>
-            </a:avLst>
-          </a:prstGeom>
-          <a:solidFill>
-            <a:srgbClr val="FFFFFF"/>
-          </a:solidFill>
-          <a:ln>
-            <a:noFill/>
-          </a:ln>
-          <a:effectLst/>
-        </p:spPr>
-        <p:style>
-          <a:lnRef idx="1">
-            <a:schemeClr val="accent1"/>
-          </a:lnRef>
-          <a:fillRef idx="3">
-            <a:schemeClr val="accent1"/>
-          </a:fillRef>
-          <a:effectRef idx="2">
-            <a:schemeClr val="accent1"/>
-          </a:effectRef>
-          <a:fontRef idx="minor">
-            <a:schemeClr val="lt1"/>
-          </a:fontRef>
-        </p:style>
-        <p:txBody>
-          <a:bodyPr rtlCol="0" anchor="ctr"/>
-          <a:lstStyle/>
-          <a:p>
-            <a:pPr algn="ctr"/>
-            <a:r>
-              <a:rPr sz="1200" b="1">
-                <a:solidFill>
-                  <a:srgbClr val="1E9E74"/>
-                </a:solidFill>
-                <a:latin typeface="Bricolage Grotesque"/>
-              </a:rPr>
-              <a:t>§2</a:t>
-            </a:r>
-          </a:p>
-        </p:txBody>
-      </p:sp>
-      <p:sp>
-        <p:nvSpPr>
-          <p:cNvPr id="18" name="TextBox 17"/>
-          <p:cNvSpPr txBox="1"/>
-          <p:nvPr/>
-        </p:nvSpPr>
-        <p:spPr>
-          <a:xfrm>
-            <a:off x="3858768" y="1472184"/>
-            <a:ext cx="2103120" cy="365760"/>
-          </a:xfrm>
-          <a:prstGeom prst="rect">
-            <a:avLst/>
-          </a:prstGeom>
-          <a:noFill/>
-        </p:spPr>
-        <p:txBody>
-          <a:bodyPr wrap="square" anchor="ctr" lIns="38100" rIns="38100" tIns="25400" bIns="25400">
-            <a:spAutoFit/>
-          </a:bodyPr>
-          <a:lstStyle/>
-          <a:p>
-            <a:pPr algn="l">
-              <a:lnSpc>
-                <a:spcPct val="106000"/>
-              </a:lnSpc>
-              <a:spcBef>
-                <a:spcPts val="0"/>
-              </a:spcBef>
-              <a:spcAft>
-                <a:spcPts val="200"/>
-              </a:spcAft>
-            </a:pPr>
-            <a:r>
-              <a:rPr sz="1450" b="1" i="0">
-                <a:solidFill>
-                  <a:srgbClr val="FFFFFF"/>
-                </a:solidFill>
-                <a:latin typeface="Bricolage Grotesque"/>
-              </a:rPr>
-              <a:t>La regla del sombrero</a:t>
-            </a:r>
-          </a:p>
-        </p:txBody>
-      </p:sp>
-      <p:sp>
-        <p:nvSpPr>
-          <p:cNvPr id="19" name="TextBox 18"/>
-          <p:cNvSpPr txBox="1"/>
-          <p:nvPr/>
-        </p:nvSpPr>
-        <p:spPr>
-          <a:xfrm>
-            <a:off x="3493008" y="2039112"/>
-            <a:ext cx="2414016" cy="1097280"/>
-          </a:xfrm>
-          <a:prstGeom prst="rect">
-            <a:avLst/>
-          </a:prstGeom>
-          <a:noFill/>
-        </p:spPr>
-        <p:txBody>
-          <a:bodyPr wrap="square" anchor="t" lIns="38100" rIns="38100" tIns="25400" bIns="25400">
-            <a:spAutoFit/>
-          </a:bodyPr>
-          <a:lstStyle/>
-          <a:p>
-            <a:pPr algn="l">
-              <a:lnSpc>
-                <a:spcPct val="112000"/>
-              </a:lnSpc>
-              <a:spcBef>
-                <a:spcPts val="0"/>
-              </a:spcBef>
-              <a:spcAft>
-                <a:spcPts val="200"/>
-              </a:spcAft>
-            </a:pPr>
-            <a:r>
-              <a:rPr sz="1150" b="0" i="0">
-                <a:solidFill>
-                  <a:srgbClr val="20242E"/>
-                </a:solidFill>
-                <a:latin typeface="Inter"/>
-              </a:rPr>
-              <a:t>klemtoon · aguda/llana/esdrújula · tilde</a:t>
-            </a:r>
-          </a:p>
-        </p:txBody>
-      </p:sp>
-      <p:sp>
-        <p:nvSpPr>
-          <p:cNvPr id="20" name="Rounded Rectangle 19"/>
-          <p:cNvSpPr/>
-          <p:nvPr/>
-        </p:nvSpPr>
-        <p:spPr>
-          <a:xfrm>
-            <a:off x="3493008" y="3246120"/>
-            <a:ext cx="707745" cy="292608"/>
-          </a:xfrm>
-          <a:prstGeom prst="roundRect">
-            <a:avLst>
-              <a:gd name="adj" fmla="val 50000"/>
-            </a:avLst>
-          </a:prstGeom>
-          <a:solidFill>
-            <a:srgbClr val="E4F4EE"/>
-          </a:solidFill>
-          <a:ln>
-            <a:noFill/>
-          </a:ln>
-          <a:effectLst/>
-        </p:spPr>
-        <p:style>
-          <a:lnRef idx="1">
-            <a:schemeClr val="accent1"/>
-          </a:lnRef>
-          <a:fillRef idx="3">
-            <a:schemeClr val="accent1"/>
-          </a:fillRef>
-          <a:effectRef idx="2">
-            <a:schemeClr val="accent1"/>
-          </a:effectRef>
-          <a:fontRef idx="minor">
-            <a:schemeClr val="lt1"/>
-          </a:fontRef>
-        </p:style>
-        <p:txBody>
-          <a:bodyPr rtlCol="0" anchor="ctr" wrap="none" lIns="88900" rIns="88900" tIns="12700" bIns="12700"/>
-          <a:lstStyle/>
-          <a:p>
-            <a:pPr algn="ctr"/>
-            <a:r>
-              <a:rPr sz="950" b="1">
-                <a:solidFill>
-                  <a:srgbClr val="157355"/>
-                </a:solidFill>
-                <a:latin typeface="Inter"/>
-              </a:rPr>
-              <a:t>→ dia 7</a:t>
-            </a:r>
-          </a:p>
-        </p:txBody>
-      </p:sp>
-      <p:sp>
-        <p:nvSpPr>
-          <p:cNvPr id="21" name="Rounded Rectangle 20">
-            <a:hlinkClick action="ppaction://hlinksldjump" r:id="rId5"/>
-          </p:cNvPr>
-          <p:cNvSpPr/>
-          <p:nvPr/>
-        </p:nvSpPr>
-        <p:spPr>
-          <a:xfrm>
-            <a:off x="6199632" y="1417320"/>
-            <a:ext cx="2743200" cy="2240280"/>
-          </a:xfrm>
-          <a:prstGeom prst="roundRect">
-            <a:avLst>
-              <a:gd name="adj" fmla="val 5500"/>
-            </a:avLst>
-          </a:prstGeom>
-          <a:solidFill>
-            <a:srgbClr val="FFFFFF"/>
-          </a:solidFill>
-          <a:ln w="20320">
-            <a:solidFill>
-              <a:srgbClr val="1E9E74"/>
-            </a:solidFill>
-          </a:ln>
-          <a:effectLst/>
-          <a:effectLst>
-            <a:outerShdw blurRad="90000" dist="38000" dir="5400000" rotWithShape="0">
-              <a:srgbClr val="20242E">
-                <a:alpha val="22000"/>
-              </a:srgbClr>
-            </a:outerShdw>
-          </a:effectLst>
-        </p:spPr>
-        <p:style>
-          <a:lnRef idx="1">
-            <a:schemeClr val="accent1"/>
-          </a:lnRef>
-          <a:fillRef idx="3">
-            <a:schemeClr val="accent1"/>
-          </a:fillRef>
-          <a:effectRef idx="2">
-            <a:schemeClr val="accent1"/>
-          </a:effectRef>
-          <a:fontRef idx="minor">
-            <a:schemeClr val="lt1"/>
-          </a:fontRef>
-        </p:style>
-        <p:txBody>
-          <a:bodyPr rtlCol="0" anchor="ctr"/>
-          <a:lstStyle/>
-          <a:p>
-            <a:pPr algn="ctr"/>
-          </a:p>
-        </p:txBody>
-      </p:sp>
-      <p:sp>
-        <p:nvSpPr>
-          <p:cNvPr id="22" name="Rectangle 21">
-            <a:hlinkClick action="ppaction://hlinksldjump" r:id="rId5"/>
-          </p:cNvPr>
-          <p:cNvSpPr/>
-          <p:nvPr/>
-        </p:nvSpPr>
-        <p:spPr>
-          <a:xfrm>
-            <a:off x="6199632" y="1417320"/>
-            <a:ext cx="2743200" cy="457200"/>
-          </a:xfrm>
-          <a:prstGeom prst="rect">
-            <a:avLst/>
-          </a:prstGeom>
-          <a:solidFill>
-            <a:srgbClr val="1E9E74"/>
-          </a:solidFill>
-          <a:ln>
-            <a:noFill/>
-          </a:ln>
-          <a:effectLst/>
-        </p:spPr>
-        <p:style>
-          <a:lnRef idx="1">
-            <a:schemeClr val="accent1"/>
-          </a:lnRef>
-          <a:fillRef idx="3">
-            <a:schemeClr val="accent1"/>
-          </a:fillRef>
-          <a:effectRef idx="2">
-            <a:schemeClr val="accent1"/>
-          </a:effectRef>
-          <a:fontRef idx="minor">
-            <a:schemeClr val="lt1"/>
-          </a:fontRef>
-        </p:style>
-        <p:txBody>
-          <a:bodyPr rtlCol="0" anchor="ctr"/>
-          <a:lstStyle/>
-          <a:p>
-            <a:pPr algn="ctr"/>
-          </a:p>
-        </p:txBody>
-      </p:sp>
-      <p:sp>
-        <p:nvSpPr>
-          <p:cNvPr id="23" name="Rounded Rectangle 22"/>
-          <p:cNvSpPr/>
-          <p:nvPr/>
-        </p:nvSpPr>
-        <p:spPr>
-          <a:xfrm>
-            <a:off x="6309360" y="1490472"/>
-            <a:ext cx="310896" cy="310896"/>
-          </a:xfrm>
-          <a:prstGeom prst="roundRect">
-            <a:avLst>
-              <a:gd name="adj" fmla="val 50000"/>
-            </a:avLst>
-          </a:prstGeom>
-          <a:solidFill>
-            <a:srgbClr val="FFFFFF"/>
-          </a:solidFill>
-          <a:ln>
-            <a:noFill/>
-          </a:ln>
-          <a:effectLst/>
-        </p:spPr>
-        <p:style>
-          <a:lnRef idx="1">
-            <a:schemeClr val="accent1"/>
-          </a:lnRef>
-          <a:fillRef idx="3">
-            <a:schemeClr val="accent1"/>
-          </a:fillRef>
-          <a:effectRef idx="2">
-            <a:schemeClr val="accent1"/>
-          </a:effectRef>
-          <a:fontRef idx="minor">
-            <a:schemeClr val="lt1"/>
-          </a:fontRef>
-        </p:style>
-        <p:txBody>
-          <a:bodyPr rtlCol="0" anchor="ctr"/>
-          <a:lstStyle/>
-          <a:p>
-            <a:pPr algn="ctr"/>
-            <a:r>
-              <a:rPr sz="1200" b="1">
-                <a:solidFill>
-                  <a:srgbClr val="1E9E74"/>
-                </a:solidFill>
-                <a:latin typeface="Bricolage Grotesque"/>
-              </a:rPr>
-              <a:t>§3</a:t>
-            </a:r>
-          </a:p>
-        </p:txBody>
-      </p:sp>
-      <p:sp>
-        <p:nvSpPr>
-          <p:cNvPr id="24" name="TextBox 23"/>
-          <p:cNvSpPr txBox="1"/>
-          <p:nvPr/>
-        </p:nvSpPr>
-        <p:spPr>
-          <a:xfrm>
-            <a:off x="6729984" y="1472184"/>
-            <a:ext cx="2103120" cy="365760"/>
-          </a:xfrm>
-          <a:prstGeom prst="rect">
-            <a:avLst/>
-          </a:prstGeom>
-          <a:noFill/>
-        </p:spPr>
-        <p:txBody>
-          <a:bodyPr wrap="square" anchor="ctr" lIns="38100" rIns="38100" tIns="25400" bIns="25400">
-            <a:spAutoFit/>
-          </a:bodyPr>
-          <a:lstStyle/>
-          <a:p>
-            <a:pPr algn="l">
-              <a:lnSpc>
-                <a:spcPct val="106000"/>
-              </a:lnSpc>
-              <a:spcBef>
-                <a:spcPts val="0"/>
-              </a:spcBef>
-              <a:spcAft>
-                <a:spcPts val="200"/>
-              </a:spcAft>
-            </a:pPr>
-            <a:r>
-              <a:rPr sz="1450" b="1" i="0">
-                <a:solidFill>
-                  <a:srgbClr val="FFFFFF"/>
-                </a:solidFill>
-                <a:latin typeface="Bricolage Grotesque"/>
-              </a:rPr>
-              <a:t>Números 0–100</a:t>
-            </a:r>
-          </a:p>
-        </p:txBody>
-      </p:sp>
-      <p:sp>
-        <p:nvSpPr>
-          <p:cNvPr id="25" name="TextBox 24"/>
-          <p:cNvSpPr txBox="1"/>
-          <p:nvPr/>
-        </p:nvSpPr>
-        <p:spPr>
-          <a:xfrm>
-            <a:off x="6364224" y="2039112"/>
-            <a:ext cx="2414016" cy="1097280"/>
-          </a:xfrm>
-          <a:prstGeom prst="rect">
-            <a:avLst/>
-          </a:prstGeom>
-          <a:noFill/>
-        </p:spPr>
-        <p:txBody>
-          <a:bodyPr wrap="square" anchor="t" lIns="38100" rIns="38100" tIns="25400" bIns="25400">
-            <a:spAutoFit/>
-          </a:bodyPr>
-          <a:lstStyle/>
-          <a:p>
-            <a:pPr algn="l">
-              <a:lnSpc>
-                <a:spcPct val="112000"/>
-              </a:lnSpc>
-              <a:spcBef>
-                <a:spcPts val="0"/>
-              </a:spcBef>
-              <a:spcAft>
-                <a:spcPts val="200"/>
-              </a:spcAft>
-            </a:pPr>
-            <a:r>
-              <a:rPr sz="1150" b="0" i="0">
-                <a:solidFill>
-                  <a:srgbClr val="20242E"/>
-                </a:solidFill>
-                <a:latin typeface="Inter"/>
-              </a:rPr>
-              <a:t>tellen · leeftijd · telefoon</a:t>
-            </a:r>
-          </a:p>
-        </p:txBody>
-      </p:sp>
-      <p:sp>
-        <p:nvSpPr>
-          <p:cNvPr id="26" name="Rounded Rectangle 25"/>
-          <p:cNvSpPr/>
-          <p:nvPr/>
-        </p:nvSpPr>
-        <p:spPr>
-          <a:xfrm>
-            <a:off x="6364224" y="3246120"/>
-            <a:ext cx="791870" cy="292608"/>
-          </a:xfrm>
-          <a:prstGeom prst="roundRect">
-            <a:avLst>
-              <a:gd name="adj" fmla="val 50000"/>
-            </a:avLst>
-          </a:prstGeom>
-          <a:solidFill>
-            <a:srgbClr val="E4F4EE"/>
-          </a:solidFill>
-          <a:ln>
-            <a:noFill/>
-          </a:ln>
-          <a:effectLst/>
-        </p:spPr>
-        <p:style>
-          <a:lnRef idx="1">
-            <a:schemeClr val="accent1"/>
-          </a:lnRef>
-          <a:fillRef idx="3">
-            <a:schemeClr val="accent1"/>
-          </a:fillRef>
-          <a:effectRef idx="2">
-            <a:schemeClr val="accent1"/>
-          </a:effectRef>
-          <a:fontRef idx="minor">
-            <a:schemeClr val="lt1"/>
-          </a:fontRef>
-        </p:style>
-        <p:txBody>
-          <a:bodyPr rtlCol="0" anchor="ctr" wrap="none" lIns="88900" rIns="88900" tIns="12700" bIns="12700"/>
-          <a:lstStyle/>
-          <a:p>
-            <a:pPr algn="ctr"/>
-            <a:r>
-              <a:rPr sz="950" b="1">
-                <a:solidFill>
-                  <a:srgbClr val="157355"/>
-                </a:solidFill>
-                <a:latin typeface="Inter"/>
-              </a:rPr>
-              <a:t>→ dia 10</a:t>
-            </a:r>
-          </a:p>
-        </p:txBody>
-      </p:sp>
-      <p:sp>
-        <p:nvSpPr>
-          <p:cNvPr id="27" name="Rounded Rectangle 26">
-            <a:hlinkClick action="ppaction://hlinksldjump" r:id="rId6"/>
-          </p:cNvPr>
-          <p:cNvSpPr/>
-          <p:nvPr/>
-        </p:nvSpPr>
-        <p:spPr>
-          <a:xfrm>
-            <a:off x="9070848" y="1417320"/>
-            <a:ext cx="2743200" cy="2240280"/>
-          </a:xfrm>
-          <a:prstGeom prst="roundRect">
-            <a:avLst>
-              <a:gd name="adj" fmla="val 5500"/>
-            </a:avLst>
-          </a:prstGeom>
-          <a:solidFill>
-            <a:srgbClr val="FFFFFF"/>
-          </a:solidFill>
-          <a:ln w="20320">
-            <a:solidFill>
-              <a:srgbClr val="1E9E74"/>
-            </a:solidFill>
-          </a:ln>
-          <a:effectLst/>
-          <a:effectLst>
-            <a:outerShdw blurRad="90000" dist="38000" dir="5400000" rotWithShape="0">
-              <a:srgbClr val="20242E">
-                <a:alpha val="22000"/>
-              </a:srgbClr>
-            </a:outerShdw>
-          </a:effectLst>
-        </p:spPr>
-        <p:style>
-          <a:lnRef idx="1">
-            <a:schemeClr val="accent1"/>
-          </a:lnRef>
-          <a:fillRef idx="3">
-            <a:schemeClr val="accent1"/>
-          </a:fillRef>
-          <a:effectRef idx="2">
-            <a:schemeClr val="accent1"/>
-          </a:effectRef>
-          <a:fontRef idx="minor">
-            <a:schemeClr val="lt1"/>
-          </a:fontRef>
-        </p:style>
-        <p:txBody>
-          <a:bodyPr rtlCol="0" anchor="ctr"/>
-          <a:lstStyle/>
-          <a:p>
-            <a:pPr algn="ctr"/>
-          </a:p>
-        </p:txBody>
-      </p:sp>
-      <p:sp>
-        <p:nvSpPr>
-          <p:cNvPr id="28" name="Rectangle 27">
-            <a:hlinkClick action="ppaction://hlinksldjump" r:id="rId6"/>
-          </p:cNvPr>
-          <p:cNvSpPr/>
-          <p:nvPr/>
-        </p:nvSpPr>
-        <p:spPr>
-          <a:xfrm>
-            <a:off x="9070848" y="1417320"/>
-            <a:ext cx="2743200" cy="457200"/>
-          </a:xfrm>
-          <a:prstGeom prst="rect">
-            <a:avLst/>
-          </a:prstGeom>
-          <a:solidFill>
-            <a:srgbClr val="1E9E74"/>
-          </a:solidFill>
-          <a:ln>
-            <a:noFill/>
-          </a:ln>
-          <a:effectLst/>
-        </p:spPr>
-        <p:style>
-          <a:lnRef idx="1">
-            <a:schemeClr val="accent1"/>
-          </a:lnRef>
-          <a:fillRef idx="3">
-            <a:schemeClr val="accent1"/>
-          </a:fillRef>
-          <a:effectRef idx="2">
-            <a:schemeClr val="accent1"/>
-          </a:effectRef>
-          <a:fontRef idx="minor">
-            <a:schemeClr val="lt1"/>
-          </a:fontRef>
-        </p:style>
-        <p:txBody>
-          <a:bodyPr rtlCol="0" anchor="ctr"/>
-          <a:lstStyle/>
-          <a:p>
-            <a:pPr algn="ctr"/>
-          </a:p>
-        </p:txBody>
-      </p:sp>
-      <p:sp>
-        <p:nvSpPr>
-          <p:cNvPr id="29" name="Rounded Rectangle 28"/>
-          <p:cNvSpPr/>
-          <p:nvPr/>
-        </p:nvSpPr>
-        <p:spPr>
-          <a:xfrm>
-            <a:off x="9180576" y="1490472"/>
-            <a:ext cx="310896" cy="310896"/>
-          </a:xfrm>
-          <a:prstGeom prst="roundRect">
-            <a:avLst>
-              <a:gd name="adj" fmla="val 50000"/>
-            </a:avLst>
-          </a:prstGeom>
-          <a:solidFill>
-            <a:srgbClr val="FFFFFF"/>
-          </a:solidFill>
-          <a:ln>
-            <a:noFill/>
-          </a:ln>
-          <a:effectLst/>
-        </p:spPr>
-        <p:style>
-          <a:lnRef idx="1">
-            <a:schemeClr val="accent1"/>
-          </a:lnRef>
-          <a:fillRef idx="3">
-            <a:schemeClr val="accent1"/>
-          </a:fillRef>
-          <a:effectRef idx="2">
-            <a:schemeClr val="accent1"/>
-          </a:effectRef>
-          <a:fontRef idx="minor">
-            <a:schemeClr val="lt1"/>
-          </a:fontRef>
-        </p:style>
-        <p:txBody>
-          <a:bodyPr rtlCol="0" anchor="ctr"/>
-          <a:lstStyle/>
-          <a:p>
-            <a:pPr algn="ctr"/>
-            <a:r>
-              <a:rPr sz="1200" b="1">
-                <a:solidFill>
-                  <a:srgbClr val="1E9E74"/>
-                </a:solidFill>
-                <a:latin typeface="Bricolage Grotesque"/>
-              </a:rPr>
-              <a:t>§4</a:t>
-            </a:r>
-          </a:p>
-        </p:txBody>
-      </p:sp>
-      <p:sp>
-        <p:nvSpPr>
-          <p:cNvPr id="30" name="TextBox 29"/>
-          <p:cNvSpPr txBox="1"/>
-          <p:nvPr/>
-        </p:nvSpPr>
-        <p:spPr>
-          <a:xfrm>
-            <a:off x="9601200" y="1472184"/>
-            <a:ext cx="2103120" cy="365760"/>
-          </a:xfrm>
-          <a:prstGeom prst="rect">
-            <a:avLst/>
-          </a:prstGeom>
-          <a:noFill/>
-        </p:spPr>
-        <p:txBody>
-          <a:bodyPr wrap="square" anchor="ctr" lIns="38100" rIns="38100" tIns="25400" bIns="25400">
-            <a:spAutoFit/>
-          </a:bodyPr>
-          <a:lstStyle/>
-          <a:p>
-            <a:pPr algn="l">
-              <a:lnSpc>
-                <a:spcPct val="106000"/>
-              </a:lnSpc>
-              <a:spcBef>
-                <a:spcPts val="0"/>
-              </a:spcBef>
-              <a:spcAft>
-                <a:spcPts val="200"/>
-              </a:spcAft>
-            </a:pPr>
-            <a:r>
-              <a:rPr sz="1450" b="1" i="0">
-                <a:solidFill>
-                  <a:srgbClr val="FFFFFF"/>
-                </a:solidFill>
-                <a:latin typeface="Bricolage Grotesque"/>
-              </a:rPr>
-              <a:t>Saludos y clase</a:t>
-            </a:r>
-          </a:p>
-        </p:txBody>
-      </p:sp>
-      <p:sp>
-        <p:nvSpPr>
-          <p:cNvPr id="31" name="TextBox 30"/>
-          <p:cNvSpPr txBox="1"/>
-          <p:nvPr/>
-        </p:nvSpPr>
-        <p:spPr>
-          <a:xfrm>
-            <a:off x="9235440" y="2039112"/>
-            <a:ext cx="2414016" cy="1097280"/>
-          </a:xfrm>
-          <a:prstGeom prst="rect">
-            <a:avLst/>
-          </a:prstGeom>
-          <a:noFill/>
-        </p:spPr>
-        <p:txBody>
-          <a:bodyPr wrap="square" anchor="t" lIns="38100" rIns="38100" tIns="25400" bIns="25400">
-            <a:spAutoFit/>
-          </a:bodyPr>
-          <a:lstStyle/>
-          <a:p>
-            <a:pPr algn="l">
-              <a:lnSpc>
-                <a:spcPct val="112000"/>
-              </a:lnSpc>
-              <a:spcBef>
-                <a:spcPts val="0"/>
-              </a:spcBef>
-              <a:spcAft>
-                <a:spcPts val="200"/>
-              </a:spcAft>
-            </a:pPr>
-            <a:r>
-              <a:rPr sz="1150" b="0" i="0">
-                <a:solidFill>
-                  <a:srgbClr val="20242E"/>
-                </a:solidFill>
-                <a:latin typeface="Inter"/>
-              </a:rPr>
-              <a:t>groeten · voorstellen · lengua de clase</a:t>
-            </a:r>
-          </a:p>
-        </p:txBody>
-      </p:sp>
-      <p:sp>
-        <p:nvSpPr>
-          <p:cNvPr id="32" name="Rounded Rectangle 31"/>
-          <p:cNvSpPr/>
-          <p:nvPr/>
-        </p:nvSpPr>
-        <p:spPr>
-          <a:xfrm>
-            <a:off x="9235440" y="3246120"/>
-            <a:ext cx="791870" cy="292608"/>
-          </a:xfrm>
-          <a:prstGeom prst="roundRect">
-            <a:avLst>
-              <a:gd name="adj" fmla="val 50000"/>
-            </a:avLst>
-          </a:prstGeom>
-          <a:solidFill>
-            <a:srgbClr val="E4F4EE"/>
-          </a:solidFill>
-          <a:ln>
-            <a:noFill/>
-          </a:ln>
-          <a:effectLst/>
-        </p:spPr>
-        <p:style>
-          <a:lnRef idx="1">
-            <a:schemeClr val="accent1"/>
-          </a:lnRef>
-          <a:fillRef idx="3">
-            <a:schemeClr val="accent1"/>
-          </a:fillRef>
-          <a:effectRef idx="2">
-            <a:schemeClr val="accent1"/>
-          </a:effectRef>
-          <a:fontRef idx="minor">
-            <a:schemeClr val="lt1"/>
-          </a:fontRef>
-        </p:style>
-        <p:txBody>
-          <a:bodyPr rtlCol="0" anchor="ctr" wrap="none" lIns="88900" rIns="88900" tIns="12700" bIns="12700"/>
-          <a:lstStyle/>
-          <a:p>
-            <a:pPr algn="ctr"/>
-            <a:r>
-              <a:rPr sz="950" b="1">
-                <a:solidFill>
-                  <a:srgbClr val="157355"/>
-                </a:solidFill>
-                <a:latin typeface="Inter"/>
-              </a:rPr>
-              <a:t>→ dia 13</a:t>
-            </a:r>
-          </a:p>
-        </p:txBody>
-      </p:sp>
-      <p:sp>
-        <p:nvSpPr>
-          <p:cNvPr id="33" name="Rounded Rectangle 32">
-            <a:hlinkClick action="ppaction://hlinksldjump" r:id="rId7"/>
-          </p:cNvPr>
-          <p:cNvSpPr/>
-          <p:nvPr/>
-        </p:nvSpPr>
-        <p:spPr>
-          <a:xfrm>
-            <a:off x="457200" y="3840480"/>
-            <a:ext cx="2743200" cy="2240280"/>
-          </a:xfrm>
-          <a:prstGeom prst="roundRect">
-            <a:avLst>
-              <a:gd name="adj" fmla="val 5500"/>
-            </a:avLst>
-          </a:prstGeom>
-          <a:solidFill>
-            <a:srgbClr val="FFFFFF"/>
-          </a:solidFill>
-          <a:ln w="20320">
-            <a:solidFill>
-              <a:srgbClr val="157355"/>
-            </a:solidFill>
-          </a:ln>
-          <a:effectLst/>
-          <a:effectLst>
-            <a:outerShdw blurRad="90000" dist="38000" dir="5400000" rotWithShape="0">
-              <a:srgbClr val="20242E">
-                <a:alpha val="22000"/>
-              </a:srgbClr>
-            </a:outerShdw>
-          </a:effectLst>
-        </p:spPr>
-        <p:style>
-          <a:lnRef idx="1">
-            <a:schemeClr val="accent1"/>
-          </a:lnRef>
-          <a:fillRef idx="3">
-            <a:schemeClr val="accent1"/>
-          </a:fillRef>
-          <a:effectRef idx="2">
-            <a:schemeClr val="accent1"/>
-          </a:effectRef>
-          <a:fontRef idx="minor">
-            <a:schemeClr val="lt1"/>
-          </a:fontRef>
-        </p:style>
-        <p:txBody>
-          <a:bodyPr rtlCol="0" anchor="ctr"/>
-          <a:lstStyle/>
-          <a:p>
-            <a:pPr algn="ctr"/>
-          </a:p>
-        </p:txBody>
-      </p:sp>
-      <p:sp>
-        <p:nvSpPr>
-          <p:cNvPr id="34" name="Rectangle 33">
-            <a:hlinkClick action="ppaction://hlinksldjump" r:id="rId7"/>
-          </p:cNvPr>
-          <p:cNvSpPr/>
-          <p:nvPr/>
-        </p:nvSpPr>
-        <p:spPr>
-          <a:xfrm>
-            <a:off x="457200" y="3840480"/>
-            <a:ext cx="2743200" cy="457200"/>
-          </a:xfrm>
-          <a:prstGeom prst="rect">
-            <a:avLst/>
-          </a:prstGeom>
-          <a:solidFill>
-            <a:srgbClr val="157355"/>
-          </a:solidFill>
-          <a:ln>
-            <a:noFill/>
-          </a:ln>
-          <a:effectLst/>
-        </p:spPr>
-        <p:style>
-          <a:lnRef idx="1">
-            <a:schemeClr val="accent1"/>
-          </a:lnRef>
-          <a:fillRef idx="3">
-            <a:schemeClr val="accent1"/>
-          </a:fillRef>
-          <a:effectRef idx="2">
-            <a:schemeClr val="accent1"/>
-          </a:effectRef>
-          <a:fontRef idx="minor">
-            <a:schemeClr val="lt1"/>
-          </a:fontRef>
-        </p:style>
-        <p:txBody>
-          <a:bodyPr rtlCol="0" anchor="ctr"/>
-          <a:lstStyle/>
-          <a:p>
-            <a:pPr algn="ctr"/>
-          </a:p>
-        </p:txBody>
-      </p:sp>
-      <p:sp>
-        <p:nvSpPr>
-          <p:cNvPr id="35" name="Rounded Rectangle 34"/>
-          <p:cNvSpPr/>
-          <p:nvPr/>
-        </p:nvSpPr>
-        <p:spPr>
-          <a:xfrm>
-            <a:off x="566928" y="3913632"/>
-            <a:ext cx="310896" cy="310896"/>
-          </a:xfrm>
-          <a:prstGeom prst="roundRect">
-            <a:avLst>
-              <a:gd name="adj" fmla="val 50000"/>
-            </a:avLst>
-          </a:prstGeom>
-          <a:solidFill>
-            <a:srgbClr val="FFFFFF"/>
-          </a:solidFill>
-          <a:ln>
-            <a:noFill/>
-          </a:ln>
-          <a:effectLst/>
-        </p:spPr>
-        <p:style>
-          <a:lnRef idx="1">
-            <a:schemeClr val="accent1"/>
-          </a:lnRef>
-          <a:fillRef idx="3">
-            <a:schemeClr val="accent1"/>
-          </a:fillRef>
-          <a:effectRef idx="2">
-            <a:schemeClr val="accent1"/>
-          </a:effectRef>
-          <a:fontRef idx="minor">
-            <a:schemeClr val="lt1"/>
-          </a:fontRef>
-        </p:style>
-        <p:txBody>
-          <a:bodyPr rtlCol="0" anchor="ctr"/>
-          <a:lstStyle/>
-          <a:p>
-            <a:pPr algn="ctr"/>
-            <a:r>
-              <a:rPr sz="1200" b="1">
-                <a:solidFill>
-                  <a:srgbClr val="157355"/>
-                </a:solidFill>
-                <a:latin typeface="Bricolage Grotesque"/>
-              </a:rPr>
-              <a:t>★</a:t>
-            </a:r>
-          </a:p>
-        </p:txBody>
-      </p:sp>
-      <p:sp>
-        <p:nvSpPr>
-          <p:cNvPr id="36" name="TextBox 35"/>
-          <p:cNvSpPr txBox="1"/>
-          <p:nvPr/>
-        </p:nvSpPr>
-        <p:spPr>
-          <a:xfrm>
-            <a:off x="987552" y="3895344"/>
-            <a:ext cx="2103120" cy="365760"/>
-          </a:xfrm>
-          <a:prstGeom prst="rect">
-            <a:avLst/>
-          </a:prstGeom>
-          <a:noFill/>
-        </p:spPr>
-        <p:txBody>
-          <a:bodyPr wrap="square" anchor="ctr" lIns="38100" rIns="38100" tIns="25400" bIns="25400">
-            <a:spAutoFit/>
-          </a:bodyPr>
-          <a:lstStyle/>
-          <a:p>
-            <a:pPr algn="l">
-              <a:lnSpc>
-                <a:spcPct val="106000"/>
-              </a:lnSpc>
-              <a:spcBef>
-                <a:spcPts val="0"/>
-              </a:spcBef>
-              <a:spcAft>
-                <a:spcPts val="200"/>
-              </a:spcAft>
-            </a:pPr>
-            <a:r>
-              <a:rPr sz="1450" b="1" i="0">
-                <a:solidFill>
-                  <a:srgbClr val="FFFFFF"/>
-                </a:solidFill>
-                <a:latin typeface="Bricolage Grotesque"/>
-              </a:rPr>
-              <a:t>Cultura</a:t>
-            </a:r>
-          </a:p>
-        </p:txBody>
-      </p:sp>
-      <p:sp>
-        <p:nvSpPr>
-          <p:cNvPr id="37" name="TextBox 36"/>
-          <p:cNvSpPr txBox="1"/>
-          <p:nvPr/>
-        </p:nvSpPr>
-        <p:spPr>
-          <a:xfrm>
-            <a:off x="621792" y="4462272"/>
-            <a:ext cx="2414016" cy="1097280"/>
-          </a:xfrm>
-          <a:prstGeom prst="rect">
-            <a:avLst/>
-          </a:prstGeom>
-          <a:noFill/>
-        </p:spPr>
-        <p:txBody>
-          <a:bodyPr wrap="square" anchor="t" lIns="38100" rIns="38100" tIns="25400" bIns="25400">
-            <a:spAutoFit/>
-          </a:bodyPr>
-          <a:lstStyle/>
-          <a:p>
-            <a:pPr algn="l">
-              <a:lnSpc>
-                <a:spcPct val="112000"/>
-              </a:lnSpc>
-              <a:spcBef>
-                <a:spcPts val="0"/>
-              </a:spcBef>
-              <a:spcAft>
-                <a:spcPts val="200"/>
-              </a:spcAft>
-            </a:pPr>
-            <a:r>
-              <a:rPr sz="1150" b="0" i="0">
-                <a:solidFill>
-                  <a:srgbClr val="20242E"/>
-                </a:solidFill>
-                <a:latin typeface="Inter"/>
-              </a:rPr>
-              <a:t>¿Dónde se habla español? (+20 países)</a:t>
-            </a:r>
-          </a:p>
-        </p:txBody>
-      </p:sp>
-      <p:sp>
-        <p:nvSpPr>
-          <p:cNvPr id="38" name="Rounded Rectangle 37"/>
-          <p:cNvSpPr/>
-          <p:nvPr/>
-        </p:nvSpPr>
-        <p:spPr>
-          <a:xfrm>
-            <a:off x="621792" y="5669280"/>
-            <a:ext cx="791870" cy="292608"/>
-          </a:xfrm>
-          <a:prstGeom prst="roundRect">
-            <a:avLst>
-              <a:gd name="adj" fmla="val 50000"/>
-            </a:avLst>
-          </a:prstGeom>
-          <a:solidFill>
-            <a:srgbClr val="E4F4EE"/>
-          </a:solidFill>
-          <a:ln>
-            <a:noFill/>
-          </a:ln>
-          <a:effectLst/>
-        </p:spPr>
-        <p:style>
-          <a:lnRef idx="1">
-            <a:schemeClr val="accent1"/>
-          </a:lnRef>
-          <a:fillRef idx="3">
-            <a:schemeClr val="accent1"/>
-          </a:fillRef>
-          <a:effectRef idx="2">
-            <a:schemeClr val="accent1"/>
-          </a:effectRef>
-          <a:fontRef idx="minor">
-            <a:schemeClr val="lt1"/>
-          </a:fontRef>
-        </p:style>
-        <p:txBody>
-          <a:bodyPr rtlCol="0" anchor="ctr" wrap="none" lIns="88900" rIns="88900" tIns="12700" bIns="12700"/>
-          <a:lstStyle/>
-          <a:p>
-            <a:pPr algn="ctr"/>
-            <a:r>
-              <a:rPr sz="950" b="1">
-                <a:solidFill>
-                  <a:srgbClr val="157355"/>
-                </a:solidFill>
-                <a:latin typeface="Inter"/>
-              </a:rPr>
-              <a:t>→ dia 16</a:t>
-            </a:r>
-          </a:p>
-        </p:txBody>
-      </p:sp>
-      <p:sp>
-        <p:nvSpPr>
-          <p:cNvPr id="39" name="Rounded Rectangle 38">
-            <a:hlinkClick action="ppaction://hlinksldjump" r:id="rId8"/>
-          </p:cNvPr>
-          <p:cNvSpPr/>
-          <p:nvPr/>
-        </p:nvSpPr>
-        <p:spPr>
-          <a:xfrm>
-            <a:off x="3328416" y="3840480"/>
-            <a:ext cx="2743200" cy="2240280"/>
-          </a:xfrm>
-          <a:prstGeom prst="roundRect">
-            <a:avLst>
-              <a:gd name="adj" fmla="val 5500"/>
-            </a:avLst>
-          </a:prstGeom>
-          <a:solidFill>
-            <a:srgbClr val="FFFFFF"/>
-          </a:solidFill>
-          <a:ln w="20320">
-            <a:solidFill>
-              <a:srgbClr val="157355"/>
-            </a:solidFill>
-          </a:ln>
-          <a:effectLst/>
-          <a:effectLst>
-            <a:outerShdw blurRad="90000" dist="38000" dir="5400000" rotWithShape="0">
-              <a:srgbClr val="20242E">
-                <a:alpha val="22000"/>
-              </a:srgbClr>
-            </a:outerShdw>
-          </a:effectLst>
-        </p:spPr>
-        <p:style>
-          <a:lnRef idx="1">
-            <a:schemeClr val="accent1"/>
-          </a:lnRef>
-          <a:fillRef idx="3">
-            <a:schemeClr val="accent1"/>
-          </a:fillRef>
-          <a:effectRef idx="2">
-            <a:schemeClr val="accent1"/>
-          </a:effectRef>
-          <a:fontRef idx="minor">
-            <a:schemeClr val="lt1"/>
-          </a:fontRef>
-        </p:style>
-        <p:txBody>
-          <a:bodyPr rtlCol="0" anchor="ctr"/>
-          <a:lstStyle/>
-          <a:p>
-            <a:pPr algn="ctr"/>
-          </a:p>
-        </p:txBody>
-      </p:sp>
-      <p:sp>
-        <p:nvSpPr>
-          <p:cNvPr id="40" name="Rectangle 39">
-            <a:hlinkClick action="ppaction://hlinksldjump" r:id="rId8"/>
-          </p:cNvPr>
-          <p:cNvSpPr/>
-          <p:nvPr/>
-        </p:nvSpPr>
-        <p:spPr>
-          <a:xfrm>
-            <a:off x="3328416" y="3840480"/>
-            <a:ext cx="2743200" cy="457200"/>
-          </a:xfrm>
-          <a:prstGeom prst="rect">
-            <a:avLst/>
-          </a:prstGeom>
-          <a:solidFill>
-            <a:srgbClr val="157355"/>
-          </a:solidFill>
-          <a:ln>
-            <a:noFill/>
-          </a:ln>
-          <a:effectLst/>
-        </p:spPr>
-        <p:style>
-          <a:lnRef idx="1">
-            <a:schemeClr val="accent1"/>
-          </a:lnRef>
-          <a:fillRef idx="3">
-            <a:schemeClr val="accent1"/>
-          </a:fillRef>
-          <a:effectRef idx="2">
-            <a:schemeClr val="accent1"/>
-          </a:effectRef>
-          <a:fontRef idx="minor">
-            <a:schemeClr val="lt1"/>
-          </a:fontRef>
-        </p:style>
-        <p:txBody>
-          <a:bodyPr rtlCol="0" anchor="ctr"/>
-          <a:lstStyle/>
-          <a:p>
-            <a:pPr algn="ctr"/>
-          </a:p>
-        </p:txBody>
-      </p:sp>
-      <p:sp>
-        <p:nvSpPr>
-          <p:cNvPr id="41" name="Rounded Rectangle 40"/>
-          <p:cNvSpPr/>
-          <p:nvPr/>
-        </p:nvSpPr>
-        <p:spPr>
-          <a:xfrm>
-            <a:off x="3438144" y="3913632"/>
-            <a:ext cx="310896" cy="310896"/>
-          </a:xfrm>
-          <a:prstGeom prst="roundRect">
-            <a:avLst>
-              <a:gd name="adj" fmla="val 50000"/>
-            </a:avLst>
-          </a:prstGeom>
-          <a:solidFill>
-            <a:srgbClr val="FFFFFF"/>
-          </a:solidFill>
-          <a:ln>
-            <a:noFill/>
-          </a:ln>
-          <a:effectLst/>
-        </p:spPr>
-        <p:style>
-          <a:lnRef idx="1">
-            <a:schemeClr val="accent1"/>
-          </a:lnRef>
-          <a:fillRef idx="3">
-            <a:schemeClr val="accent1"/>
-          </a:fillRef>
-          <a:effectRef idx="2">
-            <a:schemeClr val="accent1"/>
-          </a:effectRef>
-          <a:fontRef idx="minor">
-            <a:schemeClr val="lt1"/>
-          </a:fontRef>
-        </p:style>
-        <p:txBody>
-          <a:bodyPr rtlCol="0" anchor="ctr"/>
-          <a:lstStyle/>
-          <a:p>
-            <a:pPr algn="ctr"/>
-            <a:r>
-              <a:rPr sz="1200" b="1">
-                <a:solidFill>
-                  <a:srgbClr val="157355"/>
-                </a:solidFill>
-                <a:latin typeface="Bricolage Grotesque"/>
-              </a:rPr>
-              <a:t>✈</a:t>
-            </a:r>
-          </a:p>
-        </p:txBody>
-      </p:sp>
-      <p:sp>
-        <p:nvSpPr>
-          <p:cNvPr id="42" name="TextBox 41"/>
-          <p:cNvSpPr txBox="1"/>
-          <p:nvPr/>
-        </p:nvSpPr>
-        <p:spPr>
-          <a:xfrm>
-            <a:off x="3858768" y="3895344"/>
-            <a:ext cx="2103120" cy="365760"/>
-          </a:xfrm>
-          <a:prstGeom prst="rect">
-            <a:avLst/>
-          </a:prstGeom>
-          <a:noFill/>
-        </p:spPr>
-        <p:txBody>
-          <a:bodyPr wrap="square" anchor="ctr" lIns="38100" rIns="38100" tIns="25400" bIns="25400">
-            <a:spAutoFit/>
-          </a:bodyPr>
-          <a:lstStyle/>
-          <a:p>
-            <a:pPr algn="l">
-              <a:lnSpc>
-                <a:spcPct val="106000"/>
-              </a:lnSpc>
-              <a:spcBef>
-                <a:spcPts val="0"/>
-              </a:spcBef>
-              <a:spcAft>
-                <a:spcPts val="200"/>
-              </a:spcAft>
-            </a:pPr>
-            <a:r>
-              <a:rPr sz="1450" b="1" i="0">
-                <a:solidFill>
-                  <a:srgbClr val="FFFFFF"/>
-                </a:solidFill>
-                <a:latin typeface="Bricolage Grotesque"/>
-              </a:rPr>
-              <a:t>Tarea final</a:t>
-            </a:r>
-          </a:p>
-        </p:txBody>
-      </p:sp>
-      <p:sp>
-        <p:nvSpPr>
-          <p:cNvPr id="43" name="TextBox 42"/>
-          <p:cNvSpPr txBox="1"/>
-          <p:nvPr/>
-        </p:nvSpPr>
-        <p:spPr>
-          <a:xfrm>
-            <a:off x="3493008" y="4462272"/>
-            <a:ext cx="2414016" cy="1097280"/>
-          </a:xfrm>
-          <a:prstGeom prst="rect">
-            <a:avLst/>
-          </a:prstGeom>
-          <a:noFill/>
-        </p:spPr>
-        <p:txBody>
-          <a:bodyPr wrap="square" anchor="t" lIns="38100" rIns="38100" tIns="25400" bIns="25400">
-            <a:spAutoFit/>
-          </a:bodyPr>
-          <a:lstStyle/>
-          <a:p>
-            <a:pPr algn="l">
-              <a:lnSpc>
-                <a:spcPct val="112000"/>
-              </a:lnSpc>
-              <a:spcBef>
-                <a:spcPts val="0"/>
-              </a:spcBef>
-              <a:spcAft>
-                <a:spcPts val="200"/>
-              </a:spcAft>
-            </a:pPr>
-            <a:r>
-              <a:rPr sz="1150" b="0" i="0">
-                <a:solidFill>
-                  <a:srgbClr val="20242E"/>
-                </a:solidFill>
-                <a:latin typeface="Inter"/>
-              </a:rPr>
-              <a:t>Tarjeta de embarque (eindmissie)</a:t>
-            </a:r>
-          </a:p>
-        </p:txBody>
-      </p:sp>
-      <p:sp>
-        <p:nvSpPr>
-          <p:cNvPr id="44" name="Rounded Rectangle 43"/>
-          <p:cNvSpPr/>
-          <p:nvPr/>
-        </p:nvSpPr>
-        <p:spPr>
-          <a:xfrm>
-            <a:off x="3493008" y="5669280"/>
-            <a:ext cx="791870" cy="292608"/>
-          </a:xfrm>
-          <a:prstGeom prst="roundRect">
-            <a:avLst>
-              <a:gd name="adj" fmla="val 50000"/>
-            </a:avLst>
-          </a:prstGeom>
-          <a:solidFill>
-            <a:srgbClr val="E4F4EE"/>
-          </a:solidFill>
-          <a:ln>
-            <a:noFill/>
-          </a:ln>
-          <a:effectLst/>
-        </p:spPr>
-        <p:style>
-          <a:lnRef idx="1">
-            <a:schemeClr val="accent1"/>
-          </a:lnRef>
-          <a:fillRef idx="3">
-            <a:schemeClr val="accent1"/>
-          </a:fillRef>
-          <a:effectRef idx="2">
-            <a:schemeClr val="accent1"/>
-          </a:effectRef>
-          <a:fontRef idx="minor">
-            <a:schemeClr val="lt1"/>
-          </a:fontRef>
-        </p:style>
-        <p:txBody>
-          <a:bodyPr rtlCol="0" anchor="ctr" wrap="none" lIns="88900" rIns="88900" tIns="12700" bIns="12700"/>
-          <a:lstStyle/>
-          <a:p>
-            <a:pPr algn="ctr"/>
-            <a:r>
-              <a:rPr sz="950" b="1">
-                <a:solidFill>
-                  <a:srgbClr val="157355"/>
-                </a:solidFill>
-                <a:latin typeface="Inter"/>
-              </a:rPr>
-              <a:t>→ dia 18</a:t>
-            </a:r>
-          </a:p>
-        </p:txBody>
-      </p:sp>
-      <p:sp>
-        <p:nvSpPr>
-          <p:cNvPr id="45" name="Rounded Rectangle 44">
-            <a:hlinkClick action="ppaction://hlinksldjump" r:id="rId9"/>
-          </p:cNvPr>
-          <p:cNvSpPr/>
-          <p:nvPr/>
-        </p:nvSpPr>
-        <p:spPr>
-          <a:xfrm>
-            <a:off x="6199632" y="3840480"/>
-            <a:ext cx="2743200" cy="2240280"/>
-          </a:xfrm>
-          <a:prstGeom prst="roundRect">
-            <a:avLst>
-              <a:gd name="adj" fmla="val 5500"/>
-            </a:avLst>
-          </a:prstGeom>
-          <a:solidFill>
-            <a:srgbClr val="FFFFFF"/>
-          </a:solidFill>
-          <a:ln w="20320">
-            <a:solidFill>
-              <a:srgbClr val="B7860B"/>
-            </a:solidFill>
-          </a:ln>
-          <a:effectLst/>
-          <a:effectLst>
-            <a:outerShdw blurRad="90000" dist="38000" dir="5400000" rotWithShape="0">
-              <a:srgbClr val="20242E">
-                <a:alpha val="22000"/>
-              </a:srgbClr>
-            </a:outerShdw>
-          </a:effectLst>
-        </p:spPr>
-        <p:style>
-          <a:lnRef idx="1">
-            <a:schemeClr val="accent1"/>
-          </a:lnRef>
-          <a:fillRef idx="3">
-            <a:schemeClr val="accent1"/>
-          </a:fillRef>
-          <a:effectRef idx="2">
-            <a:schemeClr val="accent1"/>
-          </a:effectRef>
-          <a:fontRef idx="minor">
-            <a:schemeClr val="lt1"/>
-          </a:fontRef>
-        </p:style>
-        <p:txBody>
-          <a:bodyPr rtlCol="0" anchor="ctr"/>
-          <a:lstStyle/>
-          <a:p>
-            <a:pPr algn="ctr"/>
-          </a:p>
-        </p:txBody>
-      </p:sp>
-      <p:sp>
-        <p:nvSpPr>
-          <p:cNvPr id="46" name="Rectangle 45">
-            <a:hlinkClick action="ppaction://hlinksldjump" r:id="rId9"/>
-          </p:cNvPr>
-          <p:cNvSpPr/>
-          <p:nvPr/>
-        </p:nvSpPr>
-        <p:spPr>
-          <a:xfrm>
-            <a:off x="6199632" y="3840480"/>
-            <a:ext cx="2743200" cy="457200"/>
-          </a:xfrm>
-          <a:prstGeom prst="rect">
-            <a:avLst/>
-          </a:prstGeom>
-          <a:solidFill>
-            <a:srgbClr val="B7860B"/>
-          </a:solidFill>
-          <a:ln>
-            <a:noFill/>
-          </a:ln>
-          <a:effectLst/>
-        </p:spPr>
-        <p:style>
-          <a:lnRef idx="1">
-            <a:schemeClr val="accent1"/>
-          </a:lnRef>
-          <a:fillRef idx="3">
-            <a:schemeClr val="accent1"/>
-          </a:fillRef>
-          <a:effectRef idx="2">
-            <a:schemeClr val="accent1"/>
-          </a:effectRef>
-          <a:fontRef idx="minor">
-            <a:schemeClr val="lt1"/>
-          </a:fontRef>
-        </p:style>
-        <p:txBody>
-          <a:bodyPr rtlCol="0" anchor="ctr"/>
-          <a:lstStyle/>
-          <a:p>
-            <a:pPr algn="ctr"/>
-          </a:p>
-        </p:txBody>
-      </p:sp>
-      <p:sp>
-        <p:nvSpPr>
-          <p:cNvPr id="47" name="Rounded Rectangle 46"/>
-          <p:cNvSpPr/>
-          <p:nvPr/>
-        </p:nvSpPr>
-        <p:spPr>
-          <a:xfrm>
-            <a:off x="6309360" y="3913632"/>
-            <a:ext cx="310896" cy="310896"/>
-          </a:xfrm>
-          <a:prstGeom prst="roundRect">
-            <a:avLst>
-              <a:gd name="adj" fmla="val 50000"/>
-            </a:avLst>
-          </a:prstGeom>
-          <a:solidFill>
-            <a:srgbClr val="FFFFFF"/>
-          </a:solidFill>
-          <a:ln>
-            <a:noFill/>
-          </a:ln>
-          <a:effectLst/>
-        </p:spPr>
-        <p:style>
-          <a:lnRef idx="1">
-            <a:schemeClr val="accent1"/>
-          </a:lnRef>
-          <a:fillRef idx="3">
-            <a:schemeClr val="accent1"/>
-          </a:fillRef>
-          <a:effectRef idx="2">
-            <a:schemeClr val="accent1"/>
-          </a:effectRef>
-          <a:fontRef idx="minor">
-            <a:schemeClr val="lt1"/>
-          </a:fontRef>
-        </p:style>
-        <p:txBody>
-          <a:bodyPr rtlCol="0" anchor="ctr"/>
-          <a:lstStyle/>
-          <a:p>
-            <a:pPr algn="ctr"/>
-            <a:r>
-              <a:rPr sz="1200" b="1">
-                <a:solidFill>
-                  <a:srgbClr val="B7860B"/>
-                </a:solidFill>
-                <a:latin typeface="Bricolage Grotesque"/>
-              </a:rPr>
-              <a:t>?</a:t>
-            </a:r>
-          </a:p>
-        </p:txBody>
-      </p:sp>
-      <p:sp>
-        <p:nvSpPr>
-          <p:cNvPr id="48" name="TextBox 47"/>
-          <p:cNvSpPr txBox="1"/>
-          <p:nvPr/>
-        </p:nvSpPr>
-        <p:spPr>
-          <a:xfrm>
-            <a:off x="6729984" y="3895344"/>
-            <a:ext cx="2103120" cy="365760"/>
-          </a:xfrm>
-          <a:prstGeom prst="rect">
-            <a:avLst/>
-          </a:prstGeom>
-          <a:noFill/>
-        </p:spPr>
-        <p:txBody>
-          <a:bodyPr wrap="square" anchor="ctr" lIns="38100" rIns="38100" tIns="25400" bIns="25400">
-            <a:spAutoFit/>
-          </a:bodyPr>
-          <a:lstStyle/>
-          <a:p>
-            <a:pPr algn="l">
-              <a:lnSpc>
-                <a:spcPct val="106000"/>
-              </a:lnSpc>
-              <a:spcBef>
-                <a:spcPts val="0"/>
-              </a:spcBef>
-              <a:spcAft>
-                <a:spcPts val="200"/>
-              </a:spcAft>
-            </a:pPr>
-            <a:r>
-              <a:rPr sz="1450" b="1" i="0">
-                <a:solidFill>
-                  <a:srgbClr val="FFFFFF"/>
-                </a:solidFill>
-                <a:latin typeface="Bricolage Grotesque"/>
-              </a:rPr>
-              <a:t>Quiz «La mezcla»</a:t>
-            </a:r>
-          </a:p>
-        </p:txBody>
-      </p:sp>
-      <p:sp>
-        <p:nvSpPr>
-          <p:cNvPr id="49" name="TextBox 48"/>
-          <p:cNvSpPr txBox="1"/>
-          <p:nvPr/>
-        </p:nvSpPr>
-        <p:spPr>
-          <a:xfrm>
-            <a:off x="6364224" y="4462272"/>
-            <a:ext cx="2414016" cy="1097280"/>
-          </a:xfrm>
-          <a:prstGeom prst="rect">
-            <a:avLst/>
-          </a:prstGeom>
-          <a:noFill/>
-        </p:spPr>
-        <p:txBody>
-          <a:bodyPr wrap="square" anchor="t" lIns="38100" rIns="38100" tIns="25400" bIns="25400">
-            <a:spAutoFit/>
-          </a:bodyPr>
-          <a:lstStyle/>
-          <a:p>
-            <a:pPr algn="l">
-              <a:lnSpc>
-                <a:spcPct val="112000"/>
-              </a:lnSpc>
-              <a:spcBef>
-                <a:spcPts val="0"/>
-              </a:spcBef>
-              <a:spcAft>
-                <a:spcPts val="200"/>
-              </a:spcAft>
-            </a:pPr>
-            <a:r>
-              <a:rPr sz="1150" b="0" i="0">
-                <a:solidFill>
-                  <a:srgbClr val="20242E"/>
-                </a:solidFill>
-                <a:latin typeface="Inter"/>
-              </a:rPr>
-              <a:t>gemengde ophaal — mét oplossing</a:t>
-            </a:r>
-          </a:p>
-        </p:txBody>
-      </p:sp>
-      <p:sp>
-        <p:nvSpPr>
-          <p:cNvPr id="50" name="Rounded Rectangle 49"/>
-          <p:cNvSpPr/>
-          <p:nvPr/>
-        </p:nvSpPr>
-        <p:spPr>
-          <a:xfrm>
-            <a:off x="6364224" y="5669280"/>
-            <a:ext cx="791870" cy="292608"/>
-          </a:xfrm>
-          <a:prstGeom prst="roundRect">
-            <a:avLst>
-              <a:gd name="adj" fmla="val 50000"/>
-            </a:avLst>
-          </a:prstGeom>
-          <a:solidFill>
-            <a:srgbClr val="E4F4EE"/>
-          </a:solidFill>
-          <a:ln>
-            <a:noFill/>
-          </a:ln>
-          <a:effectLst/>
-        </p:spPr>
-        <p:style>
-          <a:lnRef idx="1">
-            <a:schemeClr val="accent1"/>
-          </a:lnRef>
-          <a:fillRef idx="3">
-            <a:schemeClr val="accent1"/>
-          </a:fillRef>
-          <a:effectRef idx="2">
-            <a:schemeClr val="accent1"/>
-          </a:effectRef>
-          <a:fontRef idx="minor">
-            <a:schemeClr val="lt1"/>
-          </a:fontRef>
-        </p:style>
-        <p:txBody>
-          <a:bodyPr rtlCol="0" anchor="ctr" wrap="none" lIns="88900" rIns="88900" tIns="12700" bIns="12700"/>
-          <a:lstStyle/>
-          <a:p>
-            <a:pPr algn="ctr"/>
-            <a:r>
-              <a:rPr sz="950" b="1">
-                <a:solidFill>
-                  <a:srgbClr val="157355"/>
-                </a:solidFill>
-                <a:latin typeface="Inter"/>
-              </a:rPr>
-              <a:t>→ dia 19</a:t>
-            </a:r>
-          </a:p>
-        </p:txBody>
-      </p:sp>
-      <p:sp>
-        <p:nvSpPr>
-          <p:cNvPr id="51" name="Rounded Rectangle 50">
-            <a:hlinkClick action="ppaction://hlinksldjump" r:id="rId10"/>
-          </p:cNvPr>
-          <p:cNvSpPr/>
-          <p:nvPr/>
-        </p:nvSpPr>
-        <p:spPr>
-          <a:xfrm>
-            <a:off x="9070848" y="3840480"/>
-            <a:ext cx="2743200" cy="2240280"/>
-          </a:xfrm>
-          <a:prstGeom prst="roundRect">
-            <a:avLst>
-              <a:gd name="adj" fmla="val 5500"/>
-            </a:avLst>
-          </a:prstGeom>
-          <a:solidFill>
-            <a:srgbClr val="FFFFFF"/>
-          </a:solidFill>
-          <a:ln w="20320">
-            <a:solidFill>
-              <a:srgbClr val="157355"/>
-            </a:solidFill>
-          </a:ln>
-          <a:effectLst/>
-          <a:effectLst>
-            <a:outerShdw blurRad="90000" dist="38000" dir="5400000" rotWithShape="0">
-              <a:srgbClr val="20242E">
-                <a:alpha val="22000"/>
-              </a:srgbClr>
-            </a:outerShdw>
-          </a:effectLst>
-        </p:spPr>
-        <p:style>
-          <a:lnRef idx="1">
-            <a:schemeClr val="accent1"/>
-          </a:lnRef>
-          <a:fillRef idx="3">
-            <a:schemeClr val="accent1"/>
-          </a:fillRef>
-          <a:effectRef idx="2">
-            <a:schemeClr val="accent1"/>
-          </a:effectRef>
-          <a:fontRef idx="minor">
-            <a:schemeClr val="lt1"/>
-          </a:fontRef>
-        </p:style>
-        <p:txBody>
-          <a:bodyPr rtlCol="0" anchor="ctr"/>
-          <a:lstStyle/>
-          <a:p>
-            <a:pPr algn="ctr"/>
-          </a:p>
-        </p:txBody>
-      </p:sp>
-      <p:sp>
-        <p:nvSpPr>
-          <p:cNvPr id="52" name="Rectangle 51">
-            <a:hlinkClick action="ppaction://hlinksldjump" r:id="rId10"/>
-          </p:cNvPr>
-          <p:cNvSpPr/>
-          <p:nvPr/>
-        </p:nvSpPr>
-        <p:spPr>
-          <a:xfrm>
-            <a:off x="9070848" y="3840480"/>
-            <a:ext cx="2743200" cy="457200"/>
-          </a:xfrm>
-          <a:prstGeom prst="rect">
-            <a:avLst/>
-          </a:prstGeom>
-          <a:solidFill>
-            <a:srgbClr val="157355"/>
-          </a:solidFill>
-          <a:ln>
-            <a:noFill/>
-          </a:ln>
-          <a:effectLst/>
-        </p:spPr>
-        <p:style>
-          <a:lnRef idx="1">
-            <a:schemeClr val="accent1"/>
-          </a:lnRef>
-          <a:fillRef idx="3">
-            <a:schemeClr val="accent1"/>
-          </a:fillRef>
-          <a:effectRef idx="2">
-            <a:schemeClr val="accent1"/>
-          </a:effectRef>
-          <a:fontRef idx="minor">
-            <a:schemeClr val="lt1"/>
-          </a:fontRef>
-        </p:style>
-        <p:txBody>
-          <a:bodyPr rtlCol="0" anchor="ctr"/>
-          <a:lstStyle/>
-          <a:p>
-            <a:pPr algn="ctr"/>
-          </a:p>
-        </p:txBody>
-      </p:sp>
-      <p:sp>
-        <p:nvSpPr>
-          <p:cNvPr id="53" name="Rounded Rectangle 52"/>
-          <p:cNvSpPr/>
-          <p:nvPr/>
-        </p:nvSpPr>
-        <p:spPr>
-          <a:xfrm>
-            <a:off x="9180576" y="3913632"/>
-            <a:ext cx="310896" cy="310896"/>
-          </a:xfrm>
-          <a:prstGeom prst="roundRect">
-            <a:avLst>
-              <a:gd name="adj" fmla="val 50000"/>
-            </a:avLst>
-          </a:prstGeom>
-          <a:solidFill>
-            <a:srgbClr val="FFFFFF"/>
-          </a:solidFill>
-          <a:ln>
-            <a:noFill/>
-          </a:ln>
-          <a:effectLst/>
-        </p:spPr>
-        <p:style>
-          <a:lnRef idx="1">
-            <a:schemeClr val="accent1"/>
-          </a:lnRef>
-          <a:fillRef idx="3">
-            <a:schemeClr val="accent1"/>
-          </a:fillRef>
-          <a:effectRef idx="2">
-            <a:schemeClr val="accent1"/>
-          </a:effectRef>
-          <a:fontRef idx="minor">
-            <a:schemeClr val="lt1"/>
-          </a:fontRef>
-        </p:style>
-        <p:txBody>
-          <a:bodyPr rtlCol="0" anchor="ctr"/>
-          <a:lstStyle/>
-          <a:p>
-            <a:pPr algn="ctr"/>
-            <a:r>
-              <a:rPr sz="1200" b="1">
-                <a:solidFill>
-                  <a:srgbClr val="157355"/>
-                </a:solidFill>
-                <a:latin typeface="Bricolage Grotesque"/>
-              </a:rPr>
-              <a:t>◎</a:t>
-            </a:r>
-          </a:p>
-        </p:txBody>
-      </p:sp>
-      <p:sp>
-        <p:nvSpPr>
-          <p:cNvPr id="54" name="TextBox 53"/>
-          <p:cNvSpPr txBox="1"/>
-          <p:nvPr/>
-        </p:nvSpPr>
-        <p:spPr>
-          <a:xfrm>
-            <a:off x="9601200" y="3895344"/>
-            <a:ext cx="2103120" cy="365760"/>
-          </a:xfrm>
-          <a:prstGeom prst="rect">
-            <a:avLst/>
-          </a:prstGeom>
-          <a:noFill/>
-        </p:spPr>
-        <p:txBody>
-          <a:bodyPr wrap="square" anchor="ctr" lIns="38100" rIns="38100" tIns="25400" bIns="25400">
-            <a:spAutoFit/>
-          </a:bodyPr>
-          <a:lstStyle/>
-          <a:p>
-            <a:pPr algn="l">
-              <a:lnSpc>
-                <a:spcPct val="106000"/>
-              </a:lnSpc>
-              <a:spcBef>
-                <a:spcPts val="0"/>
-              </a:spcBef>
-              <a:spcAft>
-                <a:spcPts val="200"/>
-              </a:spcAft>
-            </a:pPr>
-            <a:r>
-              <a:rPr sz="1450" b="1" i="0">
-                <a:solidFill>
-                  <a:srgbClr val="FFFFFF"/>
-                </a:solidFill>
-                <a:latin typeface="Bricolage Grotesque"/>
-              </a:rPr>
-              <a:t>Repaso + semáforo</a:t>
-            </a:r>
-          </a:p>
-        </p:txBody>
-      </p:sp>
-      <p:sp>
-        <p:nvSpPr>
-          <p:cNvPr id="55" name="TextBox 54"/>
-          <p:cNvSpPr txBox="1"/>
-          <p:nvPr/>
-        </p:nvSpPr>
-        <p:spPr>
-          <a:xfrm>
-            <a:off x="9235440" y="4462272"/>
-            <a:ext cx="2414016" cy="1097280"/>
-          </a:xfrm>
-          <a:prstGeom prst="rect">
-            <a:avLst/>
-          </a:prstGeom>
-          <a:noFill/>
-        </p:spPr>
-        <p:txBody>
-          <a:bodyPr wrap="square" anchor="t" lIns="38100" rIns="38100" tIns="25400" bIns="25400">
-            <a:spAutoFit/>
-          </a:bodyPr>
-          <a:lstStyle/>
-          <a:p>
-            <a:pPr algn="l">
-              <a:lnSpc>
-                <a:spcPct val="112000"/>
-              </a:lnSpc>
-              <a:spcBef>
-                <a:spcPts val="0"/>
-              </a:spcBef>
-              <a:spcAft>
-                <a:spcPts val="200"/>
-              </a:spcAft>
-            </a:pPr>
-            <a:r>
-              <a:rPr sz="1150" b="0" i="0">
-                <a:solidFill>
-                  <a:srgbClr val="20242E"/>
-                </a:solidFill>
-                <a:latin typeface="Inter"/>
-              </a:rPr>
-              <a:t>lo esencial · zelfevaluatie</a:t>
-            </a:r>
-          </a:p>
-        </p:txBody>
-      </p:sp>
-      <p:sp>
-        <p:nvSpPr>
-          <p:cNvPr id="56" name="Rounded Rectangle 55"/>
-          <p:cNvSpPr/>
-          <p:nvPr/>
-        </p:nvSpPr>
-        <p:spPr>
-          <a:xfrm>
-            <a:off x="9235440" y="5669280"/>
-            <a:ext cx="791870" cy="292608"/>
-          </a:xfrm>
-          <a:prstGeom prst="roundRect">
-            <a:avLst>
-              <a:gd name="adj" fmla="val 50000"/>
-            </a:avLst>
-          </a:prstGeom>
-          <a:solidFill>
-            <a:srgbClr val="E4F4EE"/>
-          </a:solidFill>
-          <a:ln>
-            <a:noFill/>
-          </a:ln>
-          <a:effectLst/>
-        </p:spPr>
-        <p:style>
-          <a:lnRef idx="1">
-            <a:schemeClr val="accent1"/>
-          </a:lnRef>
-          <a:fillRef idx="3">
-            <a:schemeClr val="accent1"/>
-          </a:fillRef>
-          <a:effectRef idx="2">
-            <a:schemeClr val="accent1"/>
-          </a:effectRef>
-          <a:fontRef idx="minor">
-            <a:schemeClr val="lt1"/>
-          </a:fontRef>
-        </p:style>
-        <p:txBody>
-          <a:bodyPr rtlCol="0" anchor="ctr" wrap="none" lIns="88900" rIns="88900" tIns="12700" bIns="12700"/>
-          <a:lstStyle/>
-          <a:p>
-            <a:pPr algn="ctr"/>
-            <a:r>
-              <a:rPr sz="950" b="1">
-                <a:solidFill>
-                  <a:srgbClr val="157355"/>
-                </a:solidFill>
-                <a:latin typeface="Inter"/>
-              </a:rPr>
-              <a:t>→ dia 20</a:t>
-            </a:r>
-          </a:p>
-        </p:txBody>
-      </p:sp>
-      <p:sp>
-        <p:nvSpPr>
-          <p:cNvPr id="57" name="Rectangle 56"/>
-          <p:cNvSpPr/>
-          <p:nvPr/>
-        </p:nvSpPr>
-        <p:spPr>
-          <a:xfrm>
-            <a:off x="0" y="6547104"/>
-            <a:ext cx="12191695" cy="310896"/>
-          </a:xfrm>
-          <a:prstGeom prst="rect">
-            <a:avLst/>
-          </a:prstGeom>
-          <a:solidFill>
-            <a:srgbClr val="F3EEE4"/>
-          </a:solidFill>
-          <a:ln>
-            <a:noFill/>
-          </a:ln>
-          <a:effectLst/>
-        </p:spPr>
-        <p:style>
-          <a:lnRef idx="1">
-            <a:schemeClr val="accent1"/>
-          </a:lnRef>
-          <a:fillRef idx="3">
-            <a:schemeClr val="accent1"/>
-          </a:fillRef>
-          <a:effectRef idx="2">
-            <a:schemeClr val="accent1"/>
-          </a:effectRef>
-          <a:fontRef idx="minor">
-            <a:schemeClr val="lt1"/>
-          </a:fontRef>
-        </p:style>
-        <p:txBody>
-          <a:bodyPr rtlCol="0" anchor="ctr"/>
-          <a:lstStyle/>
-          <a:p>
-            <a:pPr algn="ctr"/>
-          </a:p>
-        </p:txBody>
-      </p:sp>
-      <p:sp>
-        <p:nvSpPr>
-          <p:cNvPr id="58" name="TextBox 57"/>
-          <p:cNvSpPr txBox="1"/>
-          <p:nvPr/>
-        </p:nvSpPr>
-        <p:spPr>
-          <a:xfrm>
-            <a:off x="411480" y="6565392"/>
-            <a:ext cx="5486400" cy="274320"/>
-          </a:xfrm>
-          <a:prstGeom prst="rect">
-            <a:avLst/>
-          </a:prstGeom>
-          <a:noFill/>
-        </p:spPr>
-        <p:txBody>
-          <a:bodyPr wrap="square" anchor="ctr" lIns="38100" rIns="38100" tIns="25400" bIns="25400">
-            <a:spAutoFit/>
-          </a:bodyPr>
-          <a:lstStyle/>
-          <a:p>
-            <a:pPr algn="l">
-              <a:lnSpc>
-                <a:spcPct val="106000"/>
-              </a:lnSpc>
-              <a:spcBef>
-                <a:spcPts val="0"/>
-              </a:spcBef>
-              <a:spcAft>
-                <a:spcPts val="200"/>
-              </a:spcAft>
-            </a:pPr>
-            <a:r>
-              <a:rPr sz="1100" b="1" i="0">
-                <a:solidFill>
-                  <a:srgbClr val="1E9E74"/>
-                </a:solidFill>
-                <a:latin typeface="Inter"/>
-              </a:rPr>
-              <a:t>● </a:t>
-            </a:r>
-            <a:r>
-              <a:rPr sz="950" b="0" i="0">
-                <a:solidFill>
-                  <a:srgbClr val="6A6E78"/>
-                </a:solidFill>
-                <a:latin typeface="Inter"/>
-              </a:rPr>
-              <a:t>U0 · ¡EMPEZAMOS!   ·   C5 · A1 · La Ruta</a:t>
-            </a:r>
-          </a:p>
-        </p:txBody>
-      </p:sp>
-      <p:sp>
-        <p:nvSpPr>
-          <p:cNvPr id="59" name="TextBox 58"/>
-          <p:cNvSpPr txBox="1"/>
-          <p:nvPr/>
-        </p:nvSpPr>
-        <p:spPr>
-          <a:xfrm>
-            <a:off x="8686800" y="6565392"/>
-            <a:ext cx="3063240" cy="274320"/>
-          </a:xfrm>
-          <a:prstGeom prst="rect">
-            <a:avLst/>
-          </a:prstGeom>
-          <a:noFill/>
-        </p:spPr>
-        <p:txBody>
-          <a:bodyPr wrap="square" anchor="ctr" lIns="38100" rIns="38100" tIns="25400" bIns="25400">
-            <a:spAutoFit/>
-          </a:bodyPr>
-          <a:lstStyle/>
-          <a:p>
-            <a:pPr algn="r">
-              <a:lnSpc>
-                <a:spcPct val="106000"/>
-              </a:lnSpc>
-              <a:spcBef>
-                <a:spcPts val="0"/>
-              </a:spcBef>
-              <a:spcAft>
-                <a:spcPts val="200"/>
-              </a:spcAft>
-            </a:pPr>
-            <a:r>
-              <a:rPr sz="900" b="0" i="1">
-                <a:solidFill>
-                  <a:srgbClr val="6A6E78"/>
-                </a:solidFill>
-                <a:latin typeface="Inter"/>
-              </a:rPr>
-              <a:t>Docentenversie — met oplossingen</a:t>
-            </a:r>
-          </a:p>
-        </p:txBody>
-      </p:sp>
-      <p:sp>
-        <p:nvSpPr>
-          <p:cNvPr id="60" name="TextBox 59"/>
-          <p:cNvSpPr txBox="1"/>
-          <p:nvPr/>
-        </p:nvSpPr>
-        <p:spPr>
-          <a:xfrm>
-            <a:off x="11475720" y="6565392"/>
-            <a:ext cx="457200" cy="274320"/>
-          </a:xfrm>
-          <a:prstGeom prst="rect">
-            <a:avLst/>
-          </a:prstGeom>
-          <a:noFill/>
-        </p:spPr>
-        <p:txBody>
-          <a:bodyPr wrap="square" anchor="ctr" lIns="38100" rIns="38100" tIns="25400" bIns="25400">
-            <a:spAutoFit/>
-          </a:bodyPr>
-          <a:lstStyle/>
-          <a:p>
-            <a:pPr algn="r">
-              <a:lnSpc>
-                <a:spcPct val="106000"/>
-              </a:lnSpc>
-              <a:spcBef>
-                <a:spcPts val="0"/>
-              </a:spcBef>
-              <a:spcAft>
-                <a:spcPts val="200"/>
-              </a:spcAft>
-            </a:pPr>
-            <a:r>
-              <a:rPr sz="950" b="1" i="0">
-                <a:solidFill>
-                  <a:srgbClr val="157355"/>
-                </a:solidFill>
-                <a:latin typeface="Inter"/>
-              </a:rPr>
-              <a:t>2</a:t>
-            </a:r>
-          </a:p>
-        </p:txBody>
-      </p:sp>
-    </p:spTree>
-  </p:cSld>
-  <p:clrMapOvr>
-    <a:masterClrMapping/>
-  </p:clrMapOvr>
-</p:sld>
-</file>
-
-<file path=ppt/slides/slide20.xml><?xml version="1.0" encoding="utf-8"?>
+<file path=ppt/slides/slide22.xml><?xml version="1.0" encoding="utf-8"?>
 <p:sld xmlns:a="http://schemas.openxmlformats.org/drawingml/2006/main" xmlns:p="http://schemas.openxmlformats.org/presentationml/2006/main" xmlns:r="http://schemas.openxmlformats.org/officeDocument/2006/relationships">
   <p:cSld>
     <p:spTree>
@@ -35279,7 +38656,7 @@
                 </a:solidFill>
                 <a:latin typeface="Inter"/>
               </a:rPr>
-              <a:t>20</a:t>
+              <a:t>22</a:t>
             </a:r>
           </a:p>
         </p:txBody>
@@ -35292,7 +38669,7 @@
 </p:sld>
 </file>
 
-<file path=ppt/slides/slide21.xml><?xml version="1.0" encoding="utf-8"?>
+<file path=ppt/slides/slide23.xml><?xml version="1.0" encoding="utf-8"?>
 <p:sld xmlns:a="http://schemas.openxmlformats.org/drawingml/2006/main" xmlns:p="http://schemas.openxmlformats.org/presentationml/2006/main" xmlns:r="http://schemas.openxmlformats.org/officeDocument/2006/relationships">
   <p:cSld>
     <p:spTree>
@@ -37527,7 +40904,7 @@
                 </a:solidFill>
                 <a:latin typeface="Inter"/>
               </a:rPr>
-              <a:t>21</a:t>
+              <a:t>23</a:t>
             </a:r>
           </a:p>
         </p:txBody>

--- a/03-build/pptx/C5_U0_docente.pptx
+++ b/03-build/pptx/C5_U0_docente.pptx
@@ -6744,7 +6744,6 @@
               <a:srgbClr val="1E9E74"/>
             </a:solidFill>
           </a:ln>
-          <a:effectLst/>
           <a:effectLst>
             <a:outerShdw blurRad="90000" dist="38000" dir="5400000" rotWithShape="0">
               <a:srgbClr val="20242E">
@@ -6942,7 +6941,6 @@
               <a:srgbClr val="1E9E74"/>
             </a:solidFill>
           </a:ln>
-          <a:effectLst/>
           <a:effectLst>
             <a:outerShdw blurRad="90000" dist="38000" dir="5400000" rotWithShape="0">
               <a:srgbClr val="20242E">
@@ -7140,7 +7138,6 @@
               <a:srgbClr val="1E9E74"/>
             </a:solidFill>
           </a:ln>
-          <a:effectLst/>
           <a:effectLst>
             <a:outerShdw blurRad="90000" dist="38000" dir="5400000" rotWithShape="0">
               <a:srgbClr val="20242E">
@@ -7338,7 +7335,6 @@
               <a:srgbClr val="B7860B"/>
             </a:solidFill>
           </a:ln>
-          <a:effectLst/>
           <a:effectLst>
             <a:outerShdw blurRad="90000" dist="38000" dir="5400000" rotWithShape="0">
               <a:srgbClr val="20242E">
@@ -8082,7 +8078,6 @@
               <a:srgbClr val="DC2626"/>
             </a:solidFill>
           </a:ln>
-          <a:effectLst/>
           <a:effectLst>
             <a:outerShdw blurRad="90000" dist="38000" dir="5400000" rotWithShape="0">
               <a:srgbClr val="20242E">
@@ -11091,7 +11086,6 @@
               <a:srgbClr val="E4E3DE"/>
             </a:solidFill>
           </a:ln>
-          <a:effectLst/>
           <a:effectLst>
             <a:outerShdw blurRad="90000" dist="38000" dir="5400000" rotWithShape="0">
               <a:srgbClr val="20242E">
@@ -11282,7 +11276,6 @@
               <a:srgbClr val="157355"/>
             </a:solidFill>
           </a:ln>
-          <a:effectLst/>
           <a:effectLst>
             <a:outerShdw blurRad="90000" dist="38000" dir="5400000" rotWithShape="0">
               <a:srgbClr val="20242E">
@@ -11346,7 +11339,6 @@
               <a:srgbClr val="E4E3DE"/>
             </a:solidFill>
           </a:ln>
-          <a:effectLst/>
           <a:effectLst>
             <a:outerShdw blurRad="90000" dist="38000" dir="5400000" rotWithShape="0">
               <a:srgbClr val="20242E">
@@ -11537,7 +11529,6 @@
               <a:srgbClr val="157355"/>
             </a:solidFill>
           </a:ln>
-          <a:effectLst/>
           <a:effectLst>
             <a:outerShdw blurRad="90000" dist="38000" dir="5400000" rotWithShape="0">
               <a:srgbClr val="20242E">
@@ -11601,7 +11592,6 @@
               <a:srgbClr val="E4E3DE"/>
             </a:solidFill>
           </a:ln>
-          <a:effectLst/>
           <a:effectLst>
             <a:outerShdw blurRad="90000" dist="38000" dir="5400000" rotWithShape="0">
               <a:srgbClr val="20242E">
@@ -11792,7 +11782,6 @@
               <a:srgbClr val="157355"/>
             </a:solidFill>
           </a:ln>
-          <a:effectLst/>
           <a:effectLst>
             <a:outerShdw blurRad="90000" dist="38000" dir="5400000" rotWithShape="0">
               <a:srgbClr val="20242E">
@@ -11856,7 +11845,6 @@
               <a:srgbClr val="E4E3DE"/>
             </a:solidFill>
           </a:ln>
-          <a:effectLst/>
           <a:effectLst>
             <a:outerShdw blurRad="90000" dist="38000" dir="5400000" rotWithShape="0">
               <a:srgbClr val="20242E">
@@ -12047,7 +12035,6 @@
               <a:srgbClr val="157355"/>
             </a:solidFill>
           </a:ln>
-          <a:effectLst/>
           <a:effectLst>
             <a:outerShdw blurRad="90000" dist="38000" dir="5400000" rotWithShape="0">
               <a:srgbClr val="20242E">
@@ -12111,7 +12098,6 @@
               <a:srgbClr val="E4E3DE"/>
             </a:solidFill>
           </a:ln>
-          <a:effectLst/>
           <a:effectLst>
             <a:outerShdw blurRad="90000" dist="38000" dir="5400000" rotWithShape="0">
               <a:srgbClr val="20242E">
@@ -12302,7 +12288,6 @@
               <a:srgbClr val="157355"/>
             </a:solidFill>
           </a:ln>
-          <a:effectLst/>
           <a:effectLst>
             <a:outerShdw blurRad="90000" dist="38000" dir="5400000" rotWithShape="0">
               <a:srgbClr val="20242E">
@@ -12366,7 +12351,6 @@
               <a:srgbClr val="E4E3DE"/>
             </a:solidFill>
           </a:ln>
-          <a:effectLst/>
           <a:effectLst>
             <a:outerShdw blurRad="90000" dist="38000" dir="5400000" rotWithShape="0">
               <a:srgbClr val="20242E">
@@ -12557,7 +12541,6 @@
               <a:srgbClr val="157355"/>
             </a:solidFill>
           </a:ln>
-          <a:effectLst/>
           <a:effectLst>
             <a:outerShdw blurRad="90000" dist="38000" dir="5400000" rotWithShape="0">
               <a:srgbClr val="20242E">
@@ -14086,7 +14069,6 @@
               <a:srgbClr val="EA7317"/>
             </a:solidFill>
           </a:ln>
-          <a:effectLst/>
           <a:effectLst>
             <a:outerShdw blurRad="90000" dist="38000" dir="5400000" rotWithShape="0">
               <a:srgbClr val="20242E">
@@ -14632,7 +14614,6 @@
               <a:srgbClr val="2563EB"/>
             </a:solidFill>
           </a:ln>
-          <a:effectLst/>
           <a:effectLst>
             <a:outerShdw blurRad="90000" dist="38000" dir="5400000" rotWithShape="0">
               <a:srgbClr val="20242E">
@@ -15178,7 +15159,6 @@
               <a:srgbClr val="EAB308"/>
             </a:solidFill>
           </a:ln>
-          <a:effectLst/>
           <a:effectLst>
             <a:outerShdw blurRad="90000" dist="38000" dir="5400000" rotWithShape="0">
               <a:srgbClr val="20242E">
@@ -17452,7 +17432,6 @@
               <a:srgbClr val="E4E3DE"/>
             </a:solidFill>
           </a:ln>
-          <a:effectLst/>
           <a:effectLst>
             <a:outerShdw blurRad="90000" dist="38000" dir="5400000" rotWithShape="0">
               <a:srgbClr val="20242E">
@@ -17732,7 +17711,6 @@
               <a:srgbClr val="E4E3DE"/>
             </a:solidFill>
           </a:ln>
-          <a:effectLst/>
           <a:effectLst>
             <a:outerShdw blurRad="90000" dist="38000" dir="5400000" rotWithShape="0">
               <a:srgbClr val="20242E">
@@ -18012,7 +17990,6 @@
               <a:srgbClr val="E4E3DE"/>
             </a:solidFill>
           </a:ln>
-          <a:effectLst/>
           <a:effectLst>
             <a:outerShdw blurRad="90000" dist="38000" dir="5400000" rotWithShape="0">
               <a:srgbClr val="20242E">
@@ -18292,7 +18269,6 @@
               <a:srgbClr val="E4E3DE"/>
             </a:solidFill>
           </a:ln>
-          <a:effectLst/>
           <a:effectLst>
             <a:outerShdw blurRad="90000" dist="38000" dir="5400000" rotWithShape="0">
               <a:srgbClr val="20242E">
@@ -19752,7 +19728,6 @@
               <a:srgbClr val="1E9E74"/>
             </a:solidFill>
           </a:ln>
-          <a:effectLst/>
           <a:effectLst>
             <a:outerShdw blurRad="90000" dist="38000" dir="5400000" rotWithShape="0">
               <a:srgbClr val="20242E">
@@ -21850,7 +21825,6 @@
               <a:srgbClr val="1E9E74"/>
             </a:solidFill>
           </a:ln>
-          <a:effectLst/>
           <a:effectLst>
             <a:outerShdw blurRad="90000" dist="38000" dir="5400000" rotWithShape="0">
               <a:srgbClr val="20242E">
@@ -21995,7 +21969,6 @@
               <a:srgbClr val="1E9E74"/>
             </a:solidFill>
           </a:ln>
-          <a:effectLst/>
           <a:effectLst>
             <a:outerShdw blurRad="90000" dist="38000" dir="5400000" rotWithShape="0">
               <a:srgbClr val="20242E">
@@ -22140,7 +22113,6 @@
               <a:srgbClr val="1E9E74"/>
             </a:solidFill>
           </a:ln>
-          <a:effectLst/>
           <a:effectLst>
             <a:outerShdw blurRad="90000" dist="38000" dir="5400000" rotWithShape="0">
               <a:srgbClr val="20242E">
@@ -22285,7 +22257,6 @@
               <a:srgbClr val="1E9E74"/>
             </a:solidFill>
           </a:ln>
-          <a:effectLst/>
           <a:effectLst>
             <a:outerShdw blurRad="90000" dist="38000" dir="5400000" rotWithShape="0">
               <a:srgbClr val="20242E">
@@ -22430,7 +22401,6 @@
               <a:srgbClr val="B7860B"/>
             </a:solidFill>
           </a:ln>
-          <a:effectLst/>
           <a:effectLst>
             <a:outerShdw blurRad="90000" dist="38000" dir="5400000" rotWithShape="0">
               <a:srgbClr val="20242E">
@@ -25483,7 +25453,6 @@
               <a:srgbClr val="B7860B"/>
             </a:solidFill>
           </a:ln>
-          <a:effectLst/>
           <a:effectLst>
             <a:outerShdw blurRad="90000" dist="38000" dir="5400000" rotWithShape="0">
               <a:srgbClr val="20242E">
@@ -26392,7 +26361,6 @@
               <a:srgbClr val="1E9E74"/>
             </a:solidFill>
           </a:ln>
-          <a:effectLst/>
           <a:effectLst>
             <a:outerShdw blurRad="90000" dist="38000" dir="5400000" rotWithShape="0">
               <a:srgbClr val="20242E">
@@ -26757,7 +26725,6 @@
               <a:srgbClr val="E4E3DE"/>
             </a:solidFill>
           </a:ln>
-          <a:effectLst/>
           <a:effectLst>
             <a:outerShdw blurRad="90000" dist="38000" dir="5400000" rotWithShape="0">
               <a:srgbClr val="20242E">
@@ -26968,7 +26935,6 @@
               <a:srgbClr val="E4E3DE"/>
             </a:solidFill>
           </a:ln>
-          <a:effectLst/>
           <a:effectLst>
             <a:outerShdw blurRad="90000" dist="38000" dir="5400000" rotWithShape="0">
               <a:srgbClr val="20242E">
@@ -28053,7 +28019,6 @@
               <a:srgbClr val="1E9E74"/>
             </a:solidFill>
           </a:ln>
-          <a:effectLst/>
           <a:effectLst>
             <a:outerShdw blurRad="90000" dist="38000" dir="5400000" rotWithShape="0">
               <a:srgbClr val="20242E">
@@ -28242,7 +28207,6 @@
               <a:srgbClr val="E4E3DE"/>
             </a:solidFill>
           </a:ln>
-          <a:effectLst/>
           <a:effectLst>
             <a:outerShdw blurRad="90000" dist="38000" dir="5400000" rotWithShape="0">
               <a:srgbClr val="20242E">
@@ -28475,7 +28439,6 @@
               <a:srgbClr val="E4E3DE"/>
             </a:solidFill>
           </a:ln>
-          <a:effectLst/>
           <a:effectLst>
             <a:outerShdw blurRad="90000" dist="38000" dir="5400000" rotWithShape="0">
               <a:srgbClr val="20242E">
@@ -29572,7 +29535,6 @@
               <a:srgbClr val="1E9E74"/>
             </a:solidFill>
           </a:ln>
-          <a:effectLst/>
           <a:effectLst>
             <a:outerShdw blurRad="90000" dist="38000" dir="5400000" rotWithShape="0">
               <a:srgbClr val="20242E">
@@ -29875,7 +29837,6 @@
               <a:srgbClr val="1E9E74"/>
             </a:solidFill>
           </a:ln>
-          <a:effectLst/>
           <a:effectLst>
             <a:outerShdw blurRad="90000" dist="38000" dir="5400000" rotWithShape="0">
               <a:srgbClr val="20242E">
@@ -30178,7 +30139,6 @@
               <a:srgbClr val="1E9E74"/>
             </a:solidFill>
           </a:ln>
-          <a:effectLst/>
           <a:effectLst>
             <a:outerShdw blurRad="90000" dist="38000" dir="5400000" rotWithShape="0">
               <a:srgbClr val="20242E">
@@ -30481,7 +30441,6 @@
               <a:srgbClr val="1E9E74"/>
             </a:solidFill>
           </a:ln>
-          <a:effectLst/>
           <a:effectLst>
             <a:outerShdw blurRad="90000" dist="38000" dir="5400000" rotWithShape="0">
               <a:srgbClr val="20242E">
@@ -30784,7 +30743,6 @@
               <a:srgbClr val="157355"/>
             </a:solidFill>
           </a:ln>
-          <a:effectLst/>
           <a:effectLst>
             <a:outerShdw blurRad="90000" dist="38000" dir="5400000" rotWithShape="0">
               <a:srgbClr val="20242E">
@@ -31087,7 +31045,6 @@
               <a:srgbClr val="157355"/>
             </a:solidFill>
           </a:ln>
-          <a:effectLst/>
           <a:effectLst>
             <a:outerShdw blurRad="90000" dist="38000" dir="5400000" rotWithShape="0">
               <a:srgbClr val="20242E">
@@ -31390,7 +31347,6 @@
               <a:srgbClr val="B7860B"/>
             </a:solidFill>
           </a:ln>
-          <a:effectLst/>
           <a:effectLst>
             <a:outerShdw blurRad="90000" dist="38000" dir="5400000" rotWithShape="0">
               <a:srgbClr val="20242E">
@@ -31693,7 +31649,6 @@
               <a:srgbClr val="157355"/>
             </a:solidFill>
           </a:ln>
-          <a:effectLst/>
           <a:effectLst>
             <a:outerShdw blurRad="90000" dist="38000" dir="5400000" rotWithShape="0">
               <a:srgbClr val="20242E">
@@ -32477,7 +32432,6 @@
               <a:srgbClr val="157355"/>
             </a:solidFill>
           </a:ln>
-          <a:effectLst/>
           <a:effectLst>
             <a:outerShdw blurRad="90000" dist="38000" dir="5400000" rotWithShape="0">
               <a:srgbClr val="20242E">
@@ -33027,7 +32981,6 @@
               <a:srgbClr val="157355"/>
             </a:solidFill>
           </a:ln>
-          <a:effectLst/>
           <a:effectLst>
             <a:outerShdw blurRad="90000" dist="38000" dir="5400000" rotWithShape="0">
               <a:srgbClr val="20242E">
@@ -34679,7 +34632,6 @@
               <a:srgbClr val="E4E3DE"/>
             </a:solidFill>
           </a:ln>
-          <a:effectLst/>
           <a:effectLst>
             <a:outerShdw blurRad="90000" dist="38000" dir="5400000" rotWithShape="0">
               <a:srgbClr val="20242E">
@@ -34834,7 +34786,6 @@
               <a:srgbClr val="157355"/>
             </a:solidFill>
           </a:ln>
-          <a:effectLst/>
           <a:effectLst>
             <a:outerShdw blurRad="90000" dist="38000" dir="5400000" rotWithShape="0">
               <a:srgbClr val="20242E">
@@ -34898,7 +34849,6 @@
               <a:srgbClr val="E4E3DE"/>
             </a:solidFill>
           </a:ln>
-          <a:effectLst/>
           <a:effectLst>
             <a:outerShdw blurRad="90000" dist="38000" dir="5400000" rotWithShape="0">
               <a:srgbClr val="20242E">
@@ -35053,7 +35003,6 @@
               <a:srgbClr val="157355"/>
             </a:solidFill>
           </a:ln>
-          <a:effectLst/>
           <a:effectLst>
             <a:outerShdw blurRad="90000" dist="38000" dir="5400000" rotWithShape="0">
               <a:srgbClr val="20242E">
@@ -35117,7 +35066,6 @@
               <a:srgbClr val="E4E3DE"/>
             </a:solidFill>
           </a:ln>
-          <a:effectLst/>
           <a:effectLst>
             <a:outerShdw blurRad="90000" dist="38000" dir="5400000" rotWithShape="0">
               <a:srgbClr val="20242E">
@@ -35272,7 +35220,6 @@
               <a:srgbClr val="157355"/>
             </a:solidFill>
           </a:ln>
-          <a:effectLst/>
           <a:effectLst>
             <a:outerShdw blurRad="90000" dist="38000" dir="5400000" rotWithShape="0">
               <a:srgbClr val="20242E">
@@ -35336,7 +35283,6 @@
               <a:srgbClr val="E4E3DE"/>
             </a:solidFill>
           </a:ln>
-          <a:effectLst/>
           <a:effectLst>
             <a:outerShdw blurRad="90000" dist="38000" dir="5400000" rotWithShape="0">
               <a:srgbClr val="20242E">
@@ -35491,7 +35437,6 @@
               <a:srgbClr val="157355"/>
             </a:solidFill>
           </a:ln>
-          <a:effectLst/>
           <a:effectLst>
             <a:outerShdw blurRad="90000" dist="38000" dir="5400000" rotWithShape="0">
               <a:srgbClr val="20242E">
@@ -35555,7 +35500,6 @@
               <a:srgbClr val="E4E3DE"/>
             </a:solidFill>
           </a:ln>
-          <a:effectLst/>
           <a:effectLst>
             <a:outerShdw blurRad="90000" dist="38000" dir="5400000" rotWithShape="0">
               <a:srgbClr val="20242E">
@@ -35710,7 +35654,6 @@
               <a:srgbClr val="157355"/>
             </a:solidFill>
           </a:ln>
-          <a:effectLst/>
           <a:effectLst>
             <a:outerShdw blurRad="90000" dist="38000" dir="5400000" rotWithShape="0">
               <a:srgbClr val="20242E">
@@ -37119,7 +37062,6 @@
               <a:srgbClr val="1E9E74"/>
             </a:solidFill>
           </a:ln>
-          <a:effectLst/>
           <a:effectLst>
             <a:outerShdw blurRad="90000" dist="38000" dir="5400000" rotWithShape="0">
               <a:srgbClr val="20242E">
@@ -37425,7 +37367,6 @@
               <a:srgbClr val="1E9E74"/>
             </a:solidFill>
           </a:ln>
-          <a:effectLst/>
           <a:effectLst>
             <a:outerShdw blurRad="90000" dist="38000" dir="5400000" rotWithShape="0">
               <a:srgbClr val="20242E">
@@ -37731,7 +37672,6 @@
               <a:srgbClr val="1E9E74"/>
             </a:solidFill>
           </a:ln>
-          <a:effectLst/>
           <a:effectLst>
             <a:outerShdw blurRad="90000" dist="38000" dir="5400000" rotWithShape="0">
               <a:srgbClr val="20242E">
@@ -38037,7 +37977,6 @@
               <a:srgbClr val="1E9E74"/>
             </a:solidFill>
           </a:ln>
-          <a:effectLst/>
           <a:effectLst>
             <a:outerShdw blurRad="90000" dist="38000" dir="5400000" rotWithShape="0">
               <a:srgbClr val="20242E">
@@ -38343,7 +38282,6 @@
               <a:srgbClr val="B7860B"/>
             </a:solidFill>
           </a:ln>
-          <a:effectLst/>
           <a:effectLst>
             <a:outerShdw blurRad="90000" dist="38000" dir="5400000" rotWithShape="0">
               <a:srgbClr val="20242E">
@@ -38980,7 +38918,6 @@
               <a:srgbClr val="E4E3DE"/>
             </a:solidFill>
           </a:ln>
-          <a:effectLst/>
           <a:effectLst>
             <a:outerShdw blurRad="90000" dist="38000" dir="5400000" rotWithShape="0">
               <a:srgbClr val="20242E">
@@ -40340,7 +40277,6 @@
               <a:srgbClr val="DC2626"/>
             </a:solidFill>
           </a:ln>
-          <a:effectLst/>
           <a:effectLst>
             <a:outerShdw blurRad="90000" dist="38000" dir="5400000" rotWithShape="0">
               <a:srgbClr val="20242E">
@@ -40529,7 +40465,6 @@
               <a:srgbClr val="1E9E74"/>
             </a:solidFill>
           </a:ln>
-          <a:effectLst/>
           <a:effectLst>
             <a:outerShdw blurRad="90000" dist="38000" dir="5400000" rotWithShape="0">
               <a:srgbClr val="20242E">
@@ -41228,7 +41163,6 @@
               <a:srgbClr val="E07A5F"/>
             </a:solidFill>
           </a:ln>
-          <a:effectLst/>
           <a:effectLst>
             <a:outerShdw blurRad="90000" dist="38000" dir="5400000" rotWithShape="0">
               <a:srgbClr val="20242E">
@@ -41541,7 +41475,6 @@
               <a:srgbClr val="5B8DEF"/>
             </a:solidFill>
           </a:ln>
-          <a:effectLst/>
           <a:effectLst>
             <a:outerShdw blurRad="90000" dist="38000" dir="5400000" rotWithShape="0">
               <a:srgbClr val="20242E">
@@ -41854,7 +41787,6 @@
               <a:srgbClr val="2FA8A0"/>
             </a:solidFill>
           </a:ln>
-          <a:effectLst/>
           <a:effectLst>
             <a:outerShdw blurRad="90000" dist="38000" dir="5400000" rotWithShape="0">
               <a:srgbClr val="20242E">
@@ -42167,7 +42099,6 @@
               <a:srgbClr val="D69A2E"/>
             </a:solidFill>
           </a:ln>
-          <a:effectLst/>
           <a:effectLst>
             <a:outerShdw blurRad="90000" dist="38000" dir="5400000" rotWithShape="0">
               <a:srgbClr val="20242E">
@@ -42480,7 +42411,6 @@
               <a:srgbClr val="8A7BE0"/>
             </a:solidFill>
           </a:ln>
-          <a:effectLst/>
           <a:effectLst>
             <a:outerShdw blurRad="90000" dist="38000" dir="5400000" rotWithShape="0">
               <a:srgbClr val="20242E">
@@ -48073,7 +48003,6 @@
               <a:srgbClr val="1E9E74"/>
             </a:solidFill>
           </a:ln>
-          <a:effectLst/>
           <a:effectLst>
             <a:outerShdw blurRad="90000" dist="38000" dir="5400000" rotWithShape="0">
               <a:srgbClr val="20242E">
@@ -48370,7 +48299,6 @@
               <a:srgbClr val="1E9E74"/>
             </a:solidFill>
           </a:ln>
-          <a:effectLst/>
           <a:effectLst>
             <a:outerShdw blurRad="90000" dist="38000" dir="5400000" rotWithShape="0">
               <a:srgbClr val="20242E">
@@ -48667,7 +48595,6 @@
               <a:srgbClr val="1E9E74"/>
             </a:solidFill>
           </a:ln>
-          <a:effectLst/>
           <a:effectLst>
             <a:outerShdw blurRad="90000" dist="38000" dir="5400000" rotWithShape="0">
               <a:srgbClr val="20242E">
@@ -48964,7 +48891,6 @@
               <a:srgbClr val="1E9E74"/>
             </a:solidFill>
           </a:ln>
-          <a:effectLst/>
           <a:effectLst>
             <a:outerShdw blurRad="90000" dist="38000" dir="5400000" rotWithShape="0">
               <a:srgbClr val="20242E">
@@ -49261,7 +49187,6 @@
               <a:srgbClr val="1E9E74"/>
             </a:solidFill>
           </a:ln>
-          <a:effectLst/>
           <a:effectLst>
             <a:outerShdw blurRad="90000" dist="38000" dir="5400000" rotWithShape="0">
               <a:srgbClr val="20242E">
@@ -49558,7 +49483,6 @@
               <a:srgbClr val="1E9E74"/>
             </a:solidFill>
           </a:ln>
-          <a:effectLst/>
           <a:effectLst>
             <a:outerShdw blurRad="90000" dist="38000" dir="5400000" rotWithShape="0">
               <a:srgbClr val="20242E">
@@ -50566,7 +50490,6 @@
               <a:srgbClr val="157355"/>
             </a:solidFill>
           </a:ln>
-          <a:effectLst/>
           <a:effectLst>
             <a:outerShdw blurRad="90000" dist="38000" dir="5400000" rotWithShape="0">
               <a:srgbClr val="20242E">
@@ -50813,7 +50736,6 @@
               <a:srgbClr val="157355"/>
             </a:solidFill>
           </a:ln>
-          <a:effectLst/>
           <a:effectLst>
             <a:outerShdw blurRad="90000" dist="38000" dir="5400000" rotWithShape="0">
               <a:srgbClr val="20242E">
@@ -51060,7 +50982,6 @@
               <a:srgbClr val="157355"/>
             </a:solidFill>
           </a:ln>
-          <a:effectLst/>
           <a:effectLst>
             <a:outerShdw blurRad="90000" dist="38000" dir="5400000" rotWithShape="0">
               <a:srgbClr val="20242E">
@@ -51307,7 +51228,6 @@
               <a:srgbClr val="157355"/>
             </a:solidFill>
           </a:ln>
-          <a:effectLst/>
           <a:effectLst>
             <a:outerShdw blurRad="90000" dist="38000" dir="5400000" rotWithShape="0">
               <a:srgbClr val="20242E">
@@ -55980,7 +55900,6 @@
               <a:srgbClr val="E07A5F"/>
             </a:solidFill>
           </a:ln>
-          <a:effectLst/>
           <a:effectLst>
             <a:outerShdw blurRad="90000" dist="38000" dir="5400000" rotWithShape="0">
               <a:srgbClr val="20242E">
@@ -56223,7 +56142,6 @@
               <a:srgbClr val="1E9E74"/>
             </a:solidFill>
           </a:ln>
-          <a:effectLst/>
           <a:effectLst>
             <a:outerShdw blurRad="90000" dist="38000" dir="5400000" rotWithShape="0">
               <a:srgbClr val="20242E">
@@ -56466,7 +56384,6 @@
               <a:srgbClr val="8A7BE0"/>
             </a:solidFill>
           </a:ln>
-          <a:effectLst/>
           <a:effectLst>
             <a:outerShdw blurRad="90000" dist="38000" dir="5400000" rotWithShape="0">
               <a:srgbClr val="20242E">
@@ -56990,7 +56907,6 @@
               <a:srgbClr val="B7860B"/>
             </a:solidFill>
           </a:ln>
-          <a:effectLst/>
           <a:effectLst>
             <a:outerShdw blurRad="90000" dist="38000" dir="5400000" rotWithShape="0">
               <a:srgbClr val="20242E">
@@ -57761,7 +57677,6 @@
               <a:srgbClr val="E4E3DE"/>
             </a:solidFill>
           </a:ln>
-          <a:effectLst/>
           <a:effectLst>
             <a:outerShdw blurRad="90000" dist="38000" dir="5400000" rotWithShape="0">
               <a:srgbClr val="20242E">
@@ -57906,7 +57821,6 @@
               <a:srgbClr val="157355"/>
             </a:solidFill>
           </a:ln>
-          <a:effectLst/>
           <a:effectLst>
             <a:outerShdw blurRad="90000" dist="38000" dir="5400000" rotWithShape="0">
               <a:srgbClr val="20242E">
@@ -57970,7 +57884,6 @@
               <a:srgbClr val="E4E3DE"/>
             </a:solidFill>
           </a:ln>
-          <a:effectLst/>
           <a:effectLst>
             <a:outerShdw blurRad="90000" dist="38000" dir="5400000" rotWithShape="0">
               <a:srgbClr val="20242E">
@@ -58115,7 +58028,6 @@
               <a:srgbClr val="157355"/>
             </a:solidFill>
           </a:ln>
-          <a:effectLst/>
           <a:effectLst>
             <a:outerShdw blurRad="90000" dist="38000" dir="5400000" rotWithShape="0">
               <a:srgbClr val="20242E">
@@ -58179,7 +58091,6 @@
               <a:srgbClr val="E4E3DE"/>
             </a:solidFill>
           </a:ln>
-          <a:effectLst/>
           <a:effectLst>
             <a:outerShdw blurRad="90000" dist="38000" dir="5400000" rotWithShape="0">
               <a:srgbClr val="20242E">
@@ -58324,7 +58235,6 @@
               <a:srgbClr val="157355"/>
             </a:solidFill>
           </a:ln>
-          <a:effectLst/>
           <a:effectLst>
             <a:outerShdw blurRad="90000" dist="38000" dir="5400000" rotWithShape="0">
               <a:srgbClr val="20242E">
@@ -58388,7 +58298,6 @@
               <a:srgbClr val="E4E3DE"/>
             </a:solidFill>
           </a:ln>
-          <a:effectLst/>
           <a:effectLst>
             <a:outerShdw blurRad="90000" dist="38000" dir="5400000" rotWithShape="0">
               <a:srgbClr val="20242E">
@@ -58533,7 +58442,6 @@
               <a:srgbClr val="157355"/>
             </a:solidFill>
           </a:ln>
-          <a:effectLst/>
           <a:effectLst>
             <a:outerShdw blurRad="90000" dist="38000" dir="5400000" rotWithShape="0">
               <a:srgbClr val="20242E">
@@ -58597,7 +58505,6 @@
               <a:srgbClr val="E4E3DE"/>
             </a:solidFill>
           </a:ln>
-          <a:effectLst/>
           <a:effectLst>
             <a:outerShdw blurRad="90000" dist="38000" dir="5400000" rotWithShape="0">
               <a:srgbClr val="20242E">
@@ -58742,7 +58649,6 @@
               <a:srgbClr val="157355"/>
             </a:solidFill>
           </a:ln>
-          <a:effectLst/>
           <a:effectLst>
             <a:outerShdw blurRad="90000" dist="38000" dir="5400000" rotWithShape="0">
               <a:srgbClr val="20242E">
@@ -58806,7 +58712,6 @@
               <a:srgbClr val="E4E3DE"/>
             </a:solidFill>
           </a:ln>
-          <a:effectLst/>
           <a:effectLst>
             <a:outerShdw blurRad="90000" dist="38000" dir="5400000" rotWithShape="0">
               <a:srgbClr val="20242E">
@@ -58951,7 +58856,6 @@
               <a:srgbClr val="157355"/>
             </a:solidFill>
           </a:ln>
-          <a:effectLst/>
           <a:effectLst>
             <a:outerShdw blurRad="90000" dist="38000" dir="5400000" rotWithShape="0">
               <a:srgbClr val="20242E">
@@ -59015,7 +58919,6 @@
               <a:srgbClr val="E4E3DE"/>
             </a:solidFill>
           </a:ln>
-          <a:effectLst/>
           <a:effectLst>
             <a:outerShdw blurRad="90000" dist="38000" dir="5400000" rotWithShape="0">
               <a:srgbClr val="20242E">
@@ -59160,7 +59063,6 @@
               <a:srgbClr val="157355"/>
             </a:solidFill>
           </a:ln>
-          <a:effectLst/>
           <a:effectLst>
             <a:outerShdw blurRad="90000" dist="38000" dir="5400000" rotWithShape="0">
               <a:srgbClr val="20242E">
@@ -59224,7 +59126,6 @@
               <a:srgbClr val="E4E3DE"/>
             </a:solidFill>
           </a:ln>
-          <a:effectLst/>
           <a:effectLst>
             <a:outerShdw blurRad="90000" dist="38000" dir="5400000" rotWithShape="0">
               <a:srgbClr val="20242E">
@@ -59369,7 +59270,6 @@
               <a:srgbClr val="157355"/>
             </a:solidFill>
           </a:ln>
-          <a:effectLst/>
           <a:effectLst>
             <a:outerShdw blurRad="90000" dist="38000" dir="5400000" rotWithShape="0">
               <a:srgbClr val="20242E">

--- a/03-build/pptx/C5_U0_docente.pptx
+++ b/03-build/pptx/C5_U0_docente.pptx
@@ -11,6 +11,9 @@
     <p:sldId id="259" r:id="rId11"/>
     <p:sldId id="260" r:id="rId12"/>
     <p:sldId id="261" r:id="rId13"/>
+    <p:sldId id="279" r:id="rId31"/>
+    <p:sldId id="280" r:id="rId32"/>
+    <p:sldId id="281" r:id="rId33"/>
     <p:sldId id="262" r:id="rId14"/>
     <p:sldId id="263" r:id="rId15"/>
     <p:sldId id="264" r:id="rId16"/>
@@ -1695,6 +1698,255 @@
           </p:nvPr>
         </p:nvSpPr>
         <p:spPr/>
+      </p:sp>
+    </p:spTree>
+  </p:cSld>
+  <p:clrMapOvr>
+    <a:masterClrMapping/>
+  </p:clrMapOvr>
+</p:notes>
+</file>
+
+<file path=ppt/notesSlides/notesSlide24.xml><?xml version="1.0" encoding="utf-8"?>
+<p:notes xmlns:a="http://schemas.openxmlformats.org/drawingml/2006/main" xmlns:p="http://schemas.openxmlformats.org/presentationml/2006/main" xmlns:r="http://schemas.openxmlformats.org/officeDocument/2006/relationships">
+  <p:cSld>
+    <p:spTree>
+      <p:nvGrpSpPr>
+        <p:cNvPr id="1" name=""/>
+        <p:cNvGrpSpPr/>
+        <p:nvPr/>
+      </p:nvGrpSpPr>
+      <p:grpSpPr>
+        <a:xfrm>
+          <a:off x="0" y="0"/>
+          <a:ext cx="0" cy="0"/>
+          <a:chOff x="0" y="0"/>
+          <a:chExt cx="0" cy="0"/>
+        </a:xfrm>
+      </p:grpSpPr>
+      <p:sp>
+        <p:nvSpPr>
+          <p:cNvPr id="2" name="Slide Image Placeholder 1"/>
+          <p:cNvSpPr>
+            <a:spLocks noGrp="1"/>
+          </p:cNvSpPr>
+          <p:nvPr>
+            <p:ph type="sldImg" idx="2"/>
+          </p:nvPr>
+        </p:nvSpPr>
+        <p:spPr/>
+      </p:sp>
+      <p:sp>
+        <p:nvSpPr>
+          <p:cNvPr id="3" name="Notes Placeholder 2"/>
+          <p:cNvSpPr>
+            <a:spLocks noGrp="1"/>
+          </p:cNvSpPr>
+          <p:nvPr>
+            <p:ph type="body" idx="3" sz="quarter"/>
+          </p:nvPr>
+        </p:nvSpPr>
+        <p:spPr/>
+        <p:txBody>
+          <a:bodyPr/>
+          <a:lstStyle/>
+          <a:p>
+            <a:r>
+              <a:t>RETO 2 · La subasta de sonidos — 🔓 puzzel &amp; escape</a:t>
+            </a:r>
+          </a:p>
+          <a:p>
+            <a:r>
+              <a:t>OPDRACHT: Bied op een lot. Win je het, dan spreek je beide woorden uit en zeg je of ze hetzelfde of verschillend klinken. Juist? Je wint de waarde van het lot. Fout? Je verliest je bod.</a:t>
+            </a:r>
+          </a:p>
+          <a:p>
+            <a:r>
+              <a:t>DE REGEL: Je mag pas bieden ná het horen van het lot, en je mag niet overleggen terwijl je biedt. De duurste loten zijn de valstrikken.</a:t>
+            </a:r>
+          </a:p>
+          <a:p>
+            <a:r>
+              <a:t>VERLOOP: El/la profe lee el lote en voz alta, una sola vez. | Los equipos pujan por turnos. El más alto se lo lleva. | El equipo pronuncia y decide: ¿igual o diferente? | Se revela la respuesta y la regla que hay detrás.</a:t>
+            </a:r>
+          </a:p>
+          <a:p>
+            <a:r>
+              <a:t>SLEUTEL: Lot 1 diferente · 2 diferente · 3 IGUAL · 4 diferente · 5 IGUAL · 6 diferente · 7 diferente · 8 diferente in Spanje, gelijk in Amerika  ||  De twee duurste loten (3 en 5) zijn precies de twee die Nederlandstaligen het vaakst fout hebben: zij hóren een h en een v die er niet zijn.  ||  Lot 8 heeft geen enkel juist antwoord zonder de vraag «waar?» — accepteer beide, mits het team zijn keuze motiveert.</a:t>
+            </a:r>
+          </a:p>
+          <a:p>
+            <a:r>
+              <a:t>NOTA: Zet het puntentotaal zichtbaar op het bord. De spanning zit in lot 3 en 5: teams die daar hoog bieden zonder de regel te kennen, verliezen alles.</a:t>
+            </a:r>
+          </a:p>
+        </p:txBody>
+      </p:sp>
+    </p:spTree>
+  </p:cSld>
+  <p:clrMapOvr>
+    <a:masterClrMapping/>
+  </p:clrMapOvr>
+</p:notes>
+</file>
+
+<file path=ppt/notesSlides/notesSlide25.xml><?xml version="1.0" encoding="utf-8"?>
+<p:notes xmlns:a="http://schemas.openxmlformats.org/drawingml/2006/main" xmlns:p="http://schemas.openxmlformats.org/presentationml/2006/main" xmlns:r="http://schemas.openxmlformats.org/officeDocument/2006/relationships">
+  <p:cSld>
+    <p:spTree>
+      <p:nvGrpSpPr>
+        <p:cNvPr id="1" name=""/>
+        <p:cNvGrpSpPr/>
+        <p:nvPr/>
+      </p:nvGrpSpPr>
+      <p:grpSpPr>
+        <a:xfrm>
+          <a:off x="0" y="0"/>
+          <a:ext cx="0" cy="0"/>
+          <a:chOff x="0" y="0"/>
+          <a:chExt cx="0" cy="0"/>
+        </a:xfrm>
+      </p:grpSpPr>
+      <p:sp>
+        <p:nvSpPr>
+          <p:cNvPr id="2" name="Slide Image Placeholder 1"/>
+          <p:cNvSpPr>
+            <a:spLocks noGrp="1"/>
+          </p:cNvSpPr>
+          <p:nvPr>
+            <p:ph type="sldImg" idx="2"/>
+          </p:nvPr>
+        </p:nvSpPr>
+        <p:spPr/>
+      </p:sp>
+      <p:sp>
+        <p:nvSpPr>
+          <p:cNvPr id="3" name="Notes Placeholder 2"/>
+          <p:cNvSpPr>
+            <a:spLocks noGrp="1"/>
+          </p:cNvSpPr>
+          <p:nvPr>
+            <p:ph type="body" idx="3" sz="quarter"/>
+          </p:nvPr>
+        </p:nvSpPr>
+        <p:spPr/>
+        <p:txBody>
+          <a:bodyPr/>
+          <a:lstStyle/>
+          <a:p>
+            <a:r>
+              <a:t>RETO 5 · La tilde en el semáforo — 🔓 puzzel &amp; escape</a:t>
+            </a:r>
+          </a:p>
+          <a:p>
+            <a:r>
+              <a:t>OPDRACHT: Je hoort een woord. Links = aguda, midden = llana, rechts = esdrújula. Je hebt drie seconden.</a:t>
+            </a:r>
+          </a:p>
+          <a:p>
+            <a:r>
+              <a:t>DE REGEL: Je beslist op wat je hóórt, niet op wat je ziet — het woord staat pas op het scherm ná de beslissing. Wie te laat is, gaat zitten.</a:t>
+            </a:r>
+          </a:p>
+          <a:p>
+            <a:r>
+              <a:t>VERLOOP: Calentamiento: tres palabras con el escrito a la vista. | El juego: solo la voz. Tres segundos por palabra. | Ronda final: los que quedan de pie deciden a la vez. | Después: ¿qué palabras engañaron a más gente? ¿Por qué?</a:t>
+            </a:r>
+          </a:p>
+          <a:p>
+            <a:r>
+              <a:t>SLEUTEL: aguda (links): café · Perú · jamón · papel · reloj  ||  llana (midden): casa · mesa · lápiz · ventana  ||  esdrújula (rechts): México · teléfono · número · sábado · música · plátano  ||  De twee lastigste: «papel» en «reloj» dragen géén tilde maar zijn wél aguda (ze eindigen niet op klinker, -n of -s). «lápiz» draagt er wél een en is llana.</a:t>
+            </a:r>
+          </a:p>
+          <a:p>
+            <a:r>
+              <a:t>NOTA: Het lichaam onthoudt wat het hoofd vergeet. Speel minstens twee rondes: in de tweede ronde zie je de klemtoon al door de klas heen bewegen.</a:t>
+            </a:r>
+          </a:p>
+        </p:txBody>
+      </p:sp>
+    </p:spTree>
+  </p:cSld>
+  <p:clrMapOvr>
+    <a:masterClrMapping/>
+  </p:clrMapOvr>
+</p:notes>
+</file>
+
+<file path=ppt/notesSlides/notesSlide26.xml><?xml version="1.0" encoding="utf-8"?>
+<p:notes xmlns:a="http://schemas.openxmlformats.org/drawingml/2006/main" xmlns:p="http://schemas.openxmlformats.org/presentationml/2006/main" xmlns:r="http://schemas.openxmlformats.org/officeDocument/2006/relationships">
+  <p:cSld>
+    <p:spTree>
+      <p:nvGrpSpPr>
+        <p:cNvPr id="1" name=""/>
+        <p:cNvGrpSpPr/>
+        <p:nvPr/>
+      </p:nvGrpSpPr>
+      <p:grpSpPr>
+        <a:xfrm>
+          <a:off x="0" y="0"/>
+          <a:ext cx="0" cy="0"/>
+          <a:chOff x="0" y="0"/>
+          <a:chExt cx="0" cy="0"/>
+        </a:xfrm>
+      </p:grpSpPr>
+      <p:sp>
+        <p:nvSpPr>
+          <p:cNvPr id="2" name="Slide Image Placeholder 1"/>
+          <p:cNvSpPr>
+            <a:spLocks noGrp="1"/>
+          </p:cNvSpPr>
+          <p:nvPr>
+            <p:ph type="sldImg" idx="2"/>
+          </p:nvPr>
+        </p:nvSpPr>
+        <p:spPr/>
+      </p:sp>
+      <p:sp>
+        <p:nvSpPr>
+          <p:cNvPr id="3" name="Notes Placeholder 2"/>
+          <p:cNvSpPr>
+            <a:spLocks noGrp="1"/>
+          </p:cNvSpPr>
+          <p:nvPr>
+            <p:ph type="body" idx="3" sz="quarter"/>
+          </p:nvPr>
+        </p:nvSpPr>
+        <p:spPr/>
+        <p:txBody>
+          <a:bodyPr/>
+          <a:lstStyle/>
+          <a:p>
+            <a:r>
+              <a:t>RETO 6 · Radio Nombres — 📻 mediaformat</a:t>
+            </a:r>
+          </a:p>
+          <a:p>
+            <a:r>
+              <a:t>OPDRACHT: Spel de naam binnen tien seconden. Eén punt per correcte letternaam, één punt aftrek per hapering.</a:t>
+            </a:r>
+          </a:p>
+          <a:p>
+            <a:r>
+              <a:t>DE REGEL: Je zegt de lettersnamen (efe, hache, uve doble), nooit de klanken. Wie «ffff» zegt in plaats van «efe», verliest de beurt.</a:t>
+            </a:r>
+          </a:p>
+          <a:p>
+            <a:r>
+              <a:t>VERLOOP: Ronda 1 — los compañeros: deletrea el nombre de alguien de la clase. | Ronda 2 — las ciudades: el/la profe dice la ciudad, tú la deletreas. | Ronda 3 — las trampas: nombres flamencos con w, y, ij, j. | Final — el nombre más largo de la clase, sin errores.</a:t>
+            </a:r>
+          </a:p>
+          <a:p>
+            <a:r>
+              <a:t>SLEUTEL: Zaragoza = zeta-a-erre-a-ge-o-zeta-a  ·  Jaén = jota-a-e con tilde-ene  ||  Huelva = hache-u-e-ele-uve-a (de hache zwijgt, maar je spélt ze wél)  ||  Wouter = uve doble-o-u-te-e-erre  ·  Yara = i griega-a-erre-a  ||  Veelgemaakte fout: «be» en «uve» verwisselen. Laat leerlingen «be de burro» en «uve de vaca» zeggen zoals in Latijns-Amerika.</a:t>
+            </a:r>
+          </a:p>
+          <a:p>
+            <a:r>
+              <a:t>NOTA: Werkt het best met een echte timer op het scherm. De aftrek voor haperen klinkt streng, maar maakt juist dat leerlingen eerst denken en dan spreken.</a:t>
+            </a:r>
+          </a:p>
+        </p:txBody>
       </p:sp>
     </p:spTree>
   </p:cSld>
@@ -40849,6 +41101,9553 @@
   <p:clrMapOvr>
     <a:masterClrMapping/>
   </p:clrMapOvr>
+</p:sld>
+</file>
+
+<file path=ppt/slides/slide24.xml><?xml version="1.0" encoding="utf-8"?>
+<p:sld xmlns:a="http://schemas.openxmlformats.org/drawingml/2006/main" xmlns:p="http://schemas.openxmlformats.org/presentationml/2006/main" xmlns:r="http://schemas.openxmlformats.org/officeDocument/2006/relationships">
+  <p:cSld>
+    <p:spTree>
+      <p:nvGrpSpPr>
+        <p:cNvPr id="1" name=""/>
+        <p:cNvGrpSpPr/>
+        <p:nvPr/>
+      </p:nvGrpSpPr>
+      <p:grpSpPr/>
+      <p:sp>
+        <p:nvSpPr>
+          <p:cNvPr id="2" name="Fondo"/>
+          <p:cNvSpPr/>
+          <p:nvPr/>
+        </p:nvSpPr>
+        <p:spPr>
+          <a:xfrm>
+            <a:off x="0" y="0"/>
+            <a:ext cx="12191695" cy="6858000"/>
+          </a:xfrm>
+          <a:prstGeom prst="rect">
+            <a:avLst/>
+          </a:prstGeom>
+          <a:solidFill>
+            <a:srgbClr val="FCFBF8"/>
+          </a:solidFill>
+          <a:ln>
+            <a:noFill/>
+          </a:ln>
+          <a:effectLst/>
+        </p:spPr>
+        <p:style>
+          <a:lnRef idx="1">
+            <a:schemeClr val="accent1"/>
+          </a:lnRef>
+          <a:fillRef idx="3">
+            <a:schemeClr val="accent1"/>
+          </a:fillRef>
+          <a:effectRef idx="2">
+            <a:schemeClr val="accent1"/>
+          </a:effectRef>
+          <a:fontRef idx="minor">
+            <a:schemeClr val="lt1"/>
+          </a:fontRef>
+        </p:style>
+        <p:txBody>
+          <a:bodyPr rtlCol="0" anchor="ctr"/>
+          <a:lstStyle/>
+          <a:p/>
+        </p:txBody>
+      </p:sp>
+      <p:sp>
+        <p:nvSpPr>
+          <p:cNvPr id="3" name="Cabecera"/>
+          <p:cNvSpPr/>
+          <p:nvPr/>
+        </p:nvSpPr>
+        <p:spPr>
+          <a:xfrm>
+            <a:off x="0" y="0"/>
+            <a:ext cx="12191695" cy="1078992"/>
+          </a:xfrm>
+          <a:prstGeom prst="rect">
+            <a:avLst/>
+          </a:prstGeom>
+          <a:solidFill>
+            <a:srgbClr val="1E9E74"/>
+          </a:solidFill>
+          <a:ln>
+            <a:noFill/>
+          </a:ln>
+          <a:effectLst/>
+        </p:spPr>
+        <p:style>
+          <a:lnRef idx="1">
+            <a:schemeClr val="accent1"/>
+          </a:lnRef>
+          <a:fillRef idx="3">
+            <a:schemeClr val="accent1"/>
+          </a:fillRef>
+          <a:effectRef idx="2">
+            <a:schemeClr val="accent1"/>
+          </a:effectRef>
+          <a:fontRef idx="minor">
+            <a:schemeClr val="lt1"/>
+          </a:fontRef>
+        </p:style>
+        <p:txBody>
+          <a:bodyPr rtlCol="0" anchor="ctr"/>
+          <a:lstStyle/>
+          <a:p/>
+        </p:txBody>
+      </p:sp>
+      <p:sp>
+        <p:nvSpPr>
+          <p:cNvPr id="4" name="Chip"/>
+          <p:cNvSpPr/>
+          <p:nvPr/>
+        </p:nvSpPr>
+        <p:spPr>
+          <a:xfrm>
+            <a:off x="457200" y="182880"/>
+            <a:ext cx="3017520" cy="292608"/>
+          </a:xfrm>
+          <a:prstGeom prst="roundRect">
+            <a:avLst>
+              <a:gd name="adj" fmla="val 50000"/>
+            </a:avLst>
+          </a:prstGeom>
+          <a:solidFill>
+            <a:srgbClr val="FFFFFF"/>
+          </a:solidFill>
+          <a:ln>
+            <a:noFill/>
+          </a:ln>
+          <a:effectLst/>
+        </p:spPr>
+        <p:style>
+          <a:lnRef idx="1">
+            <a:schemeClr val="accent1"/>
+          </a:lnRef>
+          <a:fillRef idx="3">
+            <a:schemeClr val="accent1"/>
+          </a:fillRef>
+          <a:effectRef idx="2">
+            <a:schemeClr val="accent1"/>
+          </a:effectRef>
+          <a:fontRef idx="minor">
+            <a:schemeClr val="lt1"/>
+          </a:fontRef>
+        </p:style>
+        <p:txBody>
+          <a:bodyPr rtlCol="0" anchor="ctr"/>
+          <a:lstStyle/>
+          <a:p/>
+        </p:txBody>
+      </p:sp>
+      <p:sp>
+        <p:nvSpPr>
+          <p:cNvPr id="5" name="ChipTxt"/>
+          <p:cNvSpPr txBox="1"/>
+          <p:nvPr/>
+        </p:nvSpPr>
+        <p:spPr>
+          <a:xfrm>
+            <a:off x="457200" y="173736"/>
+            <a:ext cx="3017520" cy="310896"/>
+          </a:xfrm>
+          <a:prstGeom prst="rect">
+            <a:avLst/>
+          </a:prstGeom>
+          <a:noFill/>
+        </p:spPr>
+        <p:txBody>
+          <a:bodyPr wrap="square" anchor="ctr" lIns="45720" rIns="45720" tIns="27432" bIns="27432">
+            <a:normAutofit/>
+          </a:bodyPr>
+          <a:lstStyle/>
+          <a:p>
+            <a:pPr algn="ctr"/>
+            <a:r>
+              <a:rPr sz="950" b="1">
+                <a:solidFill>
+                  <a:srgbClr val="157355"/>
+                </a:solidFill>
+                <a:latin typeface="Inter"/>
+              </a:rPr>
+              <a:t>RETO 2 · PUZZEL &amp; ESCAPE</a:t>
+            </a:r>
+          </a:p>
+        </p:txBody>
+      </p:sp>
+      <p:sp>
+        <p:nvSpPr>
+          <p:cNvPr id="6" name="Titulo"/>
+          <p:cNvSpPr txBox="1"/>
+          <p:nvPr/>
+        </p:nvSpPr>
+        <p:spPr>
+          <a:xfrm>
+            <a:off x="457200" y="502920"/>
+            <a:ext cx="8412480" cy="475488"/>
+          </a:xfrm>
+          <a:prstGeom prst="rect">
+            <a:avLst/>
+          </a:prstGeom>
+          <a:noFill/>
+        </p:spPr>
+        <p:txBody>
+          <a:bodyPr wrap="square" anchor="t" lIns="45720" rIns="45720" tIns="27432" bIns="27432">
+            <a:normAutofit/>
+          </a:bodyPr>
+          <a:lstStyle/>
+          <a:p>
+            <a:pPr algn="l"/>
+            <a:r>
+              <a:rPr sz="2700" b="1">
+                <a:solidFill>
+                  <a:srgbClr val="FFFFFF"/>
+                </a:solidFill>
+                <a:latin typeface="Bricolage Grotesque"/>
+              </a:rPr>
+              <a:t>La subasta de sonidos</a:t>
+            </a:r>
+          </a:p>
+        </p:txBody>
+      </p:sp>
+      <p:sp>
+        <p:nvSpPr>
+          <p:cNvPr id="7" name="Badges"/>
+          <p:cNvSpPr txBox="1"/>
+          <p:nvPr/>
+        </p:nvSpPr>
+        <p:spPr>
+          <a:xfrm>
+            <a:off x="9052560" y="256032"/>
+            <a:ext cx="2651760" cy="640080"/>
+          </a:xfrm>
+          <a:prstGeom prst="rect">
+            <a:avLst/>
+          </a:prstGeom>
+          <a:noFill/>
+        </p:spPr>
+        <p:txBody>
+          <a:bodyPr wrap="square" anchor="t" lIns="45720" rIns="45720" tIns="27432" bIns="27432">
+            <a:normAutofit/>
+          </a:bodyPr>
+          <a:lstStyle/>
+          <a:p>
+            <a:pPr algn="r"/>
+            <a:r>
+              <a:rPr sz="1000">
+                <a:solidFill>
+                  <a:srgbClr val="E4F4EE"/>
+                </a:solidFill>
+                <a:latin typeface="Inter"/>
+              </a:rPr>
+              <a:t>👨‍👩‍👧 En equipos</a:t>
+            </a:r>
+          </a:p>
+          <a:p>
+            <a:pPr algn="r"/>
+            <a:r>
+              <a:rPr sz="1000">
+                <a:solidFill>
+                  <a:srgbClr val="E4F4EE"/>
+                </a:solidFill>
+                <a:latin typeface="Inter"/>
+              </a:rPr>
+              <a:t>± 15 min · ★★★</a:t>
+            </a:r>
+          </a:p>
+        </p:txBody>
+      </p:sp>
+      <p:sp>
+        <p:nvSpPr>
+          <p:cNvPr id="8" name="Gancho"/>
+          <p:cNvSpPr txBox="1"/>
+          <p:nvPr/>
+        </p:nvSpPr>
+        <p:spPr>
+          <a:xfrm>
+            <a:off x="457200" y="1225296"/>
+            <a:ext cx="11274552" cy="566928"/>
+          </a:xfrm>
+          <a:prstGeom prst="rect">
+            <a:avLst/>
+          </a:prstGeom>
+          <a:noFill/>
+        </p:spPr>
+        <p:txBody>
+          <a:bodyPr wrap="square" anchor="t" lIns="45720" rIns="45720" tIns="27432" bIns="27432">
+            <a:normAutofit/>
+          </a:bodyPr>
+          <a:lstStyle/>
+          <a:p>
+            <a:pPr algn="l"/>
+            <a:r>
+              <a:rPr sz="1600" b="1">
+                <a:solidFill>
+                  <a:srgbClr val="157355"/>
+                </a:solidFill>
+                <a:latin typeface="Bricolage Grotesque"/>
+              </a:rPr>
+              <a:t>Cada equipo tiene cien puntos. Se subastan ocho lotes de sonidos.</a:t>
+            </a:r>
+          </a:p>
+          <a:p>
+            <a:pPr algn="l"/>
+            <a:r>
+              <a:rPr sz="1100" i="1">
+                <a:solidFill>
+                  <a:srgbClr val="6A6E78"/>
+                </a:solidFill>
+                <a:latin typeface="Inter"/>
+              </a:rPr>
+              <a:t>Elk team heeft honderd punten. Er worden acht klankloten geveild.</a:t>
+            </a:r>
+          </a:p>
+        </p:txBody>
+      </p:sp>
+      <p:sp>
+        <p:nvSpPr>
+          <p:cNvPr id="9" name="ReglaCaja"/>
+          <p:cNvSpPr/>
+          <p:nvPr/>
+        </p:nvSpPr>
+        <p:spPr>
+          <a:xfrm>
+            <a:off x="457200" y="1847088"/>
+            <a:ext cx="11274552" cy="658368"/>
+          </a:xfrm>
+          <a:prstGeom prst="roundRect">
+            <a:avLst>
+              <a:gd name="adj" fmla="val 5000"/>
+            </a:avLst>
+          </a:prstGeom>
+          <a:solidFill>
+            <a:srgbClr val="FBF3D6"/>
+          </a:solidFill>
+          <a:ln>
+            <a:noFill/>
+          </a:ln>
+          <a:effectLst/>
+        </p:spPr>
+        <p:style>
+          <a:lnRef idx="1">
+            <a:schemeClr val="accent1"/>
+          </a:lnRef>
+          <a:fillRef idx="3">
+            <a:schemeClr val="accent1"/>
+          </a:fillRef>
+          <a:effectRef idx="2">
+            <a:schemeClr val="accent1"/>
+          </a:effectRef>
+          <a:fontRef idx="minor">
+            <a:schemeClr val="lt1"/>
+          </a:fontRef>
+        </p:style>
+        <p:txBody>
+          <a:bodyPr rtlCol="0" anchor="ctr"/>
+          <a:lstStyle/>
+          <a:p/>
+        </p:txBody>
+      </p:sp>
+      <p:sp>
+        <p:nvSpPr>
+          <p:cNvPr id="10" name="ReglaTxt"/>
+          <p:cNvSpPr txBox="1"/>
+          <p:nvPr/>
+        </p:nvSpPr>
+        <p:spPr>
+          <a:xfrm>
+            <a:off x="603504" y="1883664"/>
+            <a:ext cx="10972800" cy="585216"/>
+          </a:xfrm>
+          <a:prstGeom prst="rect">
+            <a:avLst/>
+          </a:prstGeom>
+          <a:noFill/>
+        </p:spPr>
+        <p:txBody>
+          <a:bodyPr wrap="square" anchor="t" lIns="45720" rIns="45720" tIns="27432" bIns="27432">
+            <a:normAutofit/>
+          </a:bodyPr>
+          <a:lstStyle/>
+          <a:p>
+            <a:pPr algn="l"/>
+            <a:r>
+              <a:rPr sz="850" b="1">
+                <a:solidFill>
+                  <a:srgbClr val="B7860B"/>
+                </a:solidFill>
+                <a:latin typeface="Inter"/>
+              </a:rPr>
+              <a:t>LA REGLA DEL RETO</a:t>
+            </a:r>
+          </a:p>
+          <a:p>
+            <a:pPr algn="l"/>
+            <a:r>
+              <a:rPr sz="1100">
+                <a:solidFill>
+                  <a:srgbClr val="20242E"/>
+                </a:solidFill>
+                <a:latin typeface="Inter"/>
+              </a:rPr>
+              <a:t>Je mag pas bieden ná het horen van het lot, en je mag niet overleggen terwijl je biedt. De duurste loten zijn de valstrikken.</a:t>
+            </a:r>
+          </a:p>
+        </p:txBody>
+      </p:sp>
+      <p:sp>
+        <p:nvSpPr>
+          <p:cNvPr id="11" name="Tarjeta 0"/>
+          <p:cNvSpPr/>
+          <p:nvPr/>
+        </p:nvSpPr>
+        <p:spPr>
+          <a:xfrm>
+            <a:off x="457200" y="2670048"/>
+            <a:ext cx="3660648" cy="1170432"/>
+          </a:xfrm>
+          <a:prstGeom prst="roundRect">
+            <a:avLst>
+              <a:gd name="adj" fmla="val 6000"/>
+            </a:avLst>
+          </a:prstGeom>
+          <a:solidFill>
+            <a:srgbClr val="FFFFFF"/>
+          </a:solidFill>
+          <a:ln w="12700">
+            <a:solidFill>
+              <a:srgbClr val="E4E3DE"/>
+            </a:solidFill>
+          </a:ln>
+          <a:effectLst/>
+        </p:spPr>
+        <p:style>
+          <a:lnRef idx="1">
+            <a:schemeClr val="accent1"/>
+          </a:lnRef>
+          <a:fillRef idx="3">
+            <a:schemeClr val="accent1"/>
+          </a:fillRef>
+          <a:effectRef idx="2">
+            <a:schemeClr val="accent1"/>
+          </a:effectRef>
+          <a:fontRef idx="minor">
+            <a:schemeClr val="lt1"/>
+          </a:fontRef>
+        </p:style>
+        <p:txBody>
+          <a:bodyPr rtlCol="0" anchor="ctr"/>
+          <a:lstStyle/>
+          <a:p/>
+        </p:txBody>
+      </p:sp>
+      <p:sp>
+        <p:nvSpPr>
+          <p:cNvPr id="12" name="TarjetaTxt 0"/>
+          <p:cNvSpPr txBox="1"/>
+          <p:nvPr/>
+        </p:nvSpPr>
+        <p:spPr>
+          <a:xfrm>
+            <a:off x="548640" y="2724912"/>
+            <a:ext cx="3477768" cy="859536"/>
+          </a:xfrm>
+          <a:prstGeom prst="rect">
+            <a:avLst/>
+          </a:prstGeom>
+          <a:noFill/>
+        </p:spPr>
+        <p:txBody>
+          <a:bodyPr wrap="square" anchor="t" lIns="45720" rIns="45720" tIns="27432" bIns="27432">
+            <a:normAutofit/>
+          </a:bodyPr>
+          <a:lstStyle/>
+          <a:p>
+            <a:pPr algn="l"/>
+            <a:r>
+              <a:rPr sz="1100" b="1">
+                <a:solidFill>
+                  <a:srgbClr val="157355"/>
+                </a:solidFill>
+                <a:latin typeface="Bricolage Grotesque"/>
+              </a:rPr>
+              <a:t>LOTE 1 · 10 pts</a:t>
+            </a:r>
+          </a:p>
+          <a:p>
+            <a:pPr algn="l"/>
+            <a:r>
+              <a:rPr sz="1000">
+                <a:solidFill>
+                  <a:srgbClr val="20242E"/>
+                </a:solidFill>
+                <a:latin typeface="Inter"/>
+              </a:rPr>
+              <a:t>gato   ·   gente</a:t>
+            </a:r>
+          </a:p>
+        </p:txBody>
+      </p:sp>
+      <p:sp>
+        <p:nvSpPr>
+          <p:cNvPr id="13" name="Onthul 0"/>
+          <p:cNvSpPr/>
+          <p:nvPr/>
+        </p:nvSpPr>
+        <p:spPr>
+          <a:xfrm>
+            <a:off x="548640" y="3547872"/>
+            <a:ext cx="3477768" cy="237744"/>
+          </a:xfrm>
+          <a:prstGeom prst="roundRect">
+            <a:avLst>
+              <a:gd name="adj" fmla="val 20000"/>
+            </a:avLst>
+          </a:prstGeom>
+          <a:solidFill>
+            <a:srgbClr val="E4F4EE"/>
+          </a:solidFill>
+          <a:ln>
+            <a:noFill/>
+          </a:ln>
+          <a:effectLst/>
+        </p:spPr>
+        <p:style>
+          <a:lnRef idx="1">
+            <a:schemeClr val="accent1"/>
+          </a:lnRef>
+          <a:fillRef idx="3">
+            <a:schemeClr val="accent1"/>
+          </a:fillRef>
+          <a:effectRef idx="2">
+            <a:schemeClr val="accent1"/>
+          </a:effectRef>
+          <a:fontRef idx="minor">
+            <a:schemeClr val="lt1"/>
+          </a:fontRef>
+        </p:style>
+        <p:txBody>
+          <a:bodyPr rtlCol="0" anchor="ctr"/>
+          <a:lstStyle/>
+          <a:p/>
+        </p:txBody>
+      </p:sp>
+      <p:sp>
+        <p:nvSpPr>
+          <p:cNvPr id="14" name="OnthulTxt 0"/>
+          <p:cNvSpPr txBox="1"/>
+          <p:nvPr/>
+        </p:nvSpPr>
+        <p:spPr>
+          <a:xfrm>
+            <a:off x="566928" y="3547872"/>
+            <a:ext cx="3441192" cy="237744"/>
+          </a:xfrm>
+          <a:prstGeom prst="rect">
+            <a:avLst/>
+          </a:prstGeom>
+          <a:noFill/>
+        </p:spPr>
+        <p:txBody>
+          <a:bodyPr wrap="square" anchor="ctr" lIns="45720" rIns="45720" tIns="27432" bIns="27432">
+            <a:normAutofit/>
+          </a:bodyPr>
+          <a:lstStyle/>
+          <a:p>
+            <a:pPr algn="l"/>
+            <a:r>
+              <a:rPr sz="850" b="1">
+                <a:solidFill>
+                  <a:srgbClr val="157355"/>
+                </a:solidFill>
+                <a:latin typeface="Inter"/>
+              </a:rPr>
+              <a:t>DIFERENTE — g + a/o/u = harde g</a:t>
+            </a:r>
+          </a:p>
+        </p:txBody>
+      </p:sp>
+      <p:sp>
+        <p:nvSpPr>
+          <p:cNvPr id="15" name="Tarjeta 1"/>
+          <p:cNvSpPr/>
+          <p:nvPr/>
+        </p:nvSpPr>
+        <p:spPr>
+          <a:xfrm>
+            <a:off x="4264152" y="2670048"/>
+            <a:ext cx="3660648" cy="1170432"/>
+          </a:xfrm>
+          <a:prstGeom prst="roundRect">
+            <a:avLst>
+              <a:gd name="adj" fmla="val 6000"/>
+            </a:avLst>
+          </a:prstGeom>
+          <a:solidFill>
+            <a:srgbClr val="FFFFFF"/>
+          </a:solidFill>
+          <a:ln w="12700">
+            <a:solidFill>
+              <a:srgbClr val="E4E3DE"/>
+            </a:solidFill>
+          </a:ln>
+          <a:effectLst/>
+        </p:spPr>
+        <p:style>
+          <a:lnRef idx="1">
+            <a:schemeClr val="accent1"/>
+          </a:lnRef>
+          <a:fillRef idx="3">
+            <a:schemeClr val="accent1"/>
+          </a:fillRef>
+          <a:effectRef idx="2">
+            <a:schemeClr val="accent1"/>
+          </a:effectRef>
+          <a:fontRef idx="minor">
+            <a:schemeClr val="lt1"/>
+          </a:fontRef>
+        </p:style>
+        <p:txBody>
+          <a:bodyPr rtlCol="0" anchor="ctr"/>
+          <a:lstStyle/>
+          <a:p/>
+        </p:txBody>
+      </p:sp>
+      <p:sp>
+        <p:nvSpPr>
+          <p:cNvPr id="16" name="TarjetaTxt 1"/>
+          <p:cNvSpPr txBox="1"/>
+          <p:nvPr/>
+        </p:nvSpPr>
+        <p:spPr>
+          <a:xfrm>
+            <a:off x="4355592" y="2724912"/>
+            <a:ext cx="3477768" cy="859536"/>
+          </a:xfrm>
+          <a:prstGeom prst="rect">
+            <a:avLst/>
+          </a:prstGeom>
+          <a:noFill/>
+        </p:spPr>
+        <p:txBody>
+          <a:bodyPr wrap="square" anchor="t" lIns="45720" rIns="45720" tIns="27432" bIns="27432">
+            <a:normAutofit/>
+          </a:bodyPr>
+          <a:lstStyle/>
+          <a:p>
+            <a:pPr algn="l"/>
+            <a:r>
+              <a:rPr sz="1100" b="1">
+                <a:solidFill>
+                  <a:srgbClr val="157355"/>
+                </a:solidFill>
+                <a:latin typeface="Bricolage Grotesque"/>
+              </a:rPr>
+              <a:t>LOTE 2 · 10 pts</a:t>
+            </a:r>
+          </a:p>
+          <a:p>
+            <a:pPr algn="l"/>
+            <a:r>
+              <a:rPr sz="1000">
+                <a:solidFill>
+                  <a:srgbClr val="20242E"/>
+                </a:solidFill>
+                <a:latin typeface="Inter"/>
+              </a:rPr>
+              <a:t>queso   ·   cero</a:t>
+            </a:r>
+          </a:p>
+        </p:txBody>
+      </p:sp>
+      <p:sp>
+        <p:nvSpPr>
+          <p:cNvPr id="17" name="Onthul 1"/>
+          <p:cNvSpPr/>
+          <p:nvPr/>
+        </p:nvSpPr>
+        <p:spPr>
+          <a:xfrm>
+            <a:off x="4355592" y="3547872"/>
+            <a:ext cx="3477768" cy="237744"/>
+          </a:xfrm>
+          <a:prstGeom prst="roundRect">
+            <a:avLst>
+              <a:gd name="adj" fmla="val 20000"/>
+            </a:avLst>
+          </a:prstGeom>
+          <a:solidFill>
+            <a:srgbClr val="E4F4EE"/>
+          </a:solidFill>
+          <a:ln>
+            <a:noFill/>
+          </a:ln>
+          <a:effectLst/>
+        </p:spPr>
+        <p:style>
+          <a:lnRef idx="1">
+            <a:schemeClr val="accent1"/>
+          </a:lnRef>
+          <a:fillRef idx="3">
+            <a:schemeClr val="accent1"/>
+          </a:fillRef>
+          <a:effectRef idx="2">
+            <a:schemeClr val="accent1"/>
+          </a:effectRef>
+          <a:fontRef idx="minor">
+            <a:schemeClr val="lt1"/>
+          </a:fontRef>
+        </p:style>
+        <p:txBody>
+          <a:bodyPr rtlCol="0" anchor="ctr"/>
+          <a:lstStyle/>
+          <a:p/>
+        </p:txBody>
+      </p:sp>
+      <p:sp>
+        <p:nvSpPr>
+          <p:cNvPr id="18" name="OnthulTxt 1"/>
+          <p:cNvSpPr txBox="1"/>
+          <p:nvPr/>
+        </p:nvSpPr>
+        <p:spPr>
+          <a:xfrm>
+            <a:off x="4373880" y="3547872"/>
+            <a:ext cx="3441192" cy="237744"/>
+          </a:xfrm>
+          <a:prstGeom prst="rect">
+            <a:avLst/>
+          </a:prstGeom>
+          <a:noFill/>
+        </p:spPr>
+        <p:txBody>
+          <a:bodyPr wrap="square" anchor="ctr" lIns="45720" rIns="45720" tIns="27432" bIns="27432">
+            <a:normAutofit/>
+          </a:bodyPr>
+          <a:lstStyle/>
+          <a:p>
+            <a:pPr algn="l"/>
+            <a:r>
+              <a:rPr sz="850" b="1">
+                <a:solidFill>
+                  <a:srgbClr val="157355"/>
+                </a:solidFill>
+                <a:latin typeface="Inter"/>
+              </a:rPr>
+              <a:t>DIFERENTE — qu = k</a:t>
+            </a:r>
+          </a:p>
+        </p:txBody>
+      </p:sp>
+      <p:sp>
+        <p:nvSpPr>
+          <p:cNvPr id="19" name="Tarjeta 2"/>
+          <p:cNvSpPr/>
+          <p:nvPr/>
+        </p:nvSpPr>
+        <p:spPr>
+          <a:xfrm>
+            <a:off x="8071104" y="2670048"/>
+            <a:ext cx="3660648" cy="1170432"/>
+          </a:xfrm>
+          <a:prstGeom prst="roundRect">
+            <a:avLst>
+              <a:gd name="adj" fmla="val 6000"/>
+            </a:avLst>
+          </a:prstGeom>
+          <a:solidFill>
+            <a:srgbClr val="FFFFFF"/>
+          </a:solidFill>
+          <a:ln w="12700">
+            <a:solidFill>
+              <a:srgbClr val="E4E3DE"/>
+            </a:solidFill>
+          </a:ln>
+          <a:effectLst/>
+        </p:spPr>
+        <p:style>
+          <a:lnRef idx="1">
+            <a:schemeClr val="accent1"/>
+          </a:lnRef>
+          <a:fillRef idx="3">
+            <a:schemeClr val="accent1"/>
+          </a:fillRef>
+          <a:effectRef idx="2">
+            <a:schemeClr val="accent1"/>
+          </a:effectRef>
+          <a:fontRef idx="minor">
+            <a:schemeClr val="lt1"/>
+          </a:fontRef>
+        </p:style>
+        <p:txBody>
+          <a:bodyPr rtlCol="0" anchor="ctr"/>
+          <a:lstStyle/>
+          <a:p/>
+        </p:txBody>
+      </p:sp>
+      <p:sp>
+        <p:nvSpPr>
+          <p:cNvPr id="20" name="TarjetaTxt 2"/>
+          <p:cNvSpPr txBox="1"/>
+          <p:nvPr/>
+        </p:nvSpPr>
+        <p:spPr>
+          <a:xfrm>
+            <a:off x="8162544" y="2724912"/>
+            <a:ext cx="3477768" cy="859536"/>
+          </a:xfrm>
+          <a:prstGeom prst="rect">
+            <a:avLst/>
+          </a:prstGeom>
+          <a:noFill/>
+        </p:spPr>
+        <p:txBody>
+          <a:bodyPr wrap="square" anchor="t" lIns="45720" rIns="45720" tIns="27432" bIns="27432">
+            <a:normAutofit/>
+          </a:bodyPr>
+          <a:lstStyle/>
+          <a:p>
+            <a:pPr algn="l"/>
+            <a:r>
+              <a:rPr sz="1100" b="1">
+                <a:solidFill>
+                  <a:srgbClr val="157355"/>
+                </a:solidFill>
+                <a:latin typeface="Bricolage Grotesque"/>
+              </a:rPr>
+              <a:t>LOTE 3 · 25 pts</a:t>
+            </a:r>
+          </a:p>
+          <a:p>
+            <a:pPr algn="l"/>
+            <a:r>
+              <a:rPr sz="1000">
+                <a:solidFill>
+                  <a:srgbClr val="20242E"/>
+                </a:solidFill>
+                <a:latin typeface="Inter"/>
+              </a:rPr>
+              <a:t>hola   ·   ola</a:t>
+            </a:r>
+          </a:p>
+        </p:txBody>
+      </p:sp>
+      <p:sp>
+        <p:nvSpPr>
+          <p:cNvPr id="21" name="Onthul 2"/>
+          <p:cNvSpPr/>
+          <p:nvPr/>
+        </p:nvSpPr>
+        <p:spPr>
+          <a:xfrm>
+            <a:off x="8162544" y="3547872"/>
+            <a:ext cx="3477768" cy="237744"/>
+          </a:xfrm>
+          <a:prstGeom prst="roundRect">
+            <a:avLst>
+              <a:gd name="adj" fmla="val 20000"/>
+            </a:avLst>
+          </a:prstGeom>
+          <a:solidFill>
+            <a:srgbClr val="E4F4EE"/>
+          </a:solidFill>
+          <a:ln>
+            <a:noFill/>
+          </a:ln>
+          <a:effectLst/>
+        </p:spPr>
+        <p:style>
+          <a:lnRef idx="1">
+            <a:schemeClr val="accent1"/>
+          </a:lnRef>
+          <a:fillRef idx="3">
+            <a:schemeClr val="accent1"/>
+          </a:fillRef>
+          <a:effectRef idx="2">
+            <a:schemeClr val="accent1"/>
+          </a:effectRef>
+          <a:fontRef idx="minor">
+            <a:schemeClr val="lt1"/>
+          </a:fontRef>
+        </p:style>
+        <p:txBody>
+          <a:bodyPr rtlCol="0" anchor="ctr"/>
+          <a:lstStyle/>
+          <a:p/>
+        </p:txBody>
+      </p:sp>
+      <p:sp>
+        <p:nvSpPr>
+          <p:cNvPr id="22" name="OnthulTxt 2"/>
+          <p:cNvSpPr txBox="1"/>
+          <p:nvPr/>
+        </p:nvSpPr>
+        <p:spPr>
+          <a:xfrm>
+            <a:off x="8180832" y="3547872"/>
+            <a:ext cx="3441192" cy="237744"/>
+          </a:xfrm>
+          <a:prstGeom prst="rect">
+            <a:avLst/>
+          </a:prstGeom>
+          <a:noFill/>
+        </p:spPr>
+        <p:txBody>
+          <a:bodyPr wrap="square" anchor="ctr" lIns="45720" rIns="45720" tIns="27432" bIns="27432">
+            <a:normAutofit/>
+          </a:bodyPr>
+          <a:lstStyle/>
+          <a:p>
+            <a:pPr algn="l"/>
+            <a:r>
+              <a:rPr sz="850" b="1">
+                <a:solidFill>
+                  <a:srgbClr val="157355"/>
+                </a:solidFill>
+                <a:latin typeface="Inter"/>
+              </a:rPr>
+              <a:t>IGUAL — de hache zwijgt altijd — de twee woor…</a:t>
+            </a:r>
+          </a:p>
+        </p:txBody>
+      </p:sp>
+      <p:sp>
+        <p:nvSpPr>
+          <p:cNvPr id="23" name="Tarjeta 3"/>
+          <p:cNvSpPr/>
+          <p:nvPr/>
+        </p:nvSpPr>
+        <p:spPr>
+          <a:xfrm>
+            <a:off x="457200" y="3968496"/>
+            <a:ext cx="3660648" cy="1170432"/>
+          </a:xfrm>
+          <a:prstGeom prst="roundRect">
+            <a:avLst>
+              <a:gd name="adj" fmla="val 6000"/>
+            </a:avLst>
+          </a:prstGeom>
+          <a:solidFill>
+            <a:srgbClr val="FFFFFF"/>
+          </a:solidFill>
+          <a:ln w="12700">
+            <a:solidFill>
+              <a:srgbClr val="E4E3DE"/>
+            </a:solidFill>
+          </a:ln>
+          <a:effectLst/>
+        </p:spPr>
+        <p:style>
+          <a:lnRef idx="1">
+            <a:schemeClr val="accent1"/>
+          </a:lnRef>
+          <a:fillRef idx="3">
+            <a:schemeClr val="accent1"/>
+          </a:fillRef>
+          <a:effectRef idx="2">
+            <a:schemeClr val="accent1"/>
+          </a:effectRef>
+          <a:fontRef idx="minor">
+            <a:schemeClr val="lt1"/>
+          </a:fontRef>
+        </p:style>
+        <p:txBody>
+          <a:bodyPr rtlCol="0" anchor="ctr"/>
+          <a:lstStyle/>
+          <a:p/>
+        </p:txBody>
+      </p:sp>
+      <p:sp>
+        <p:nvSpPr>
+          <p:cNvPr id="24" name="TarjetaTxt 3"/>
+          <p:cNvSpPr txBox="1"/>
+          <p:nvPr/>
+        </p:nvSpPr>
+        <p:spPr>
+          <a:xfrm>
+            <a:off x="548640" y="4023360"/>
+            <a:ext cx="3477768" cy="859536"/>
+          </a:xfrm>
+          <a:prstGeom prst="rect">
+            <a:avLst/>
+          </a:prstGeom>
+          <a:noFill/>
+        </p:spPr>
+        <p:txBody>
+          <a:bodyPr wrap="square" anchor="t" lIns="45720" rIns="45720" tIns="27432" bIns="27432">
+            <a:normAutofit/>
+          </a:bodyPr>
+          <a:lstStyle/>
+          <a:p>
+            <a:pPr algn="l"/>
+            <a:r>
+              <a:rPr sz="1100" b="1">
+                <a:solidFill>
+                  <a:srgbClr val="157355"/>
+                </a:solidFill>
+                <a:latin typeface="Bricolage Grotesque"/>
+              </a:rPr>
+              <a:t>LOTE 4 · 15 pts</a:t>
+            </a:r>
+          </a:p>
+          <a:p>
+            <a:pPr algn="l"/>
+            <a:r>
+              <a:rPr sz="1000">
+                <a:solidFill>
+                  <a:srgbClr val="20242E"/>
+                </a:solidFill>
+                <a:latin typeface="Inter"/>
+              </a:rPr>
+              <a:t>perro   ·   pero</a:t>
+            </a:r>
+          </a:p>
+        </p:txBody>
+      </p:sp>
+      <p:sp>
+        <p:nvSpPr>
+          <p:cNvPr id="25" name="Onthul 3"/>
+          <p:cNvSpPr/>
+          <p:nvPr/>
+        </p:nvSpPr>
+        <p:spPr>
+          <a:xfrm>
+            <a:off x="548640" y="4846320"/>
+            <a:ext cx="3477768" cy="237744"/>
+          </a:xfrm>
+          <a:prstGeom prst="roundRect">
+            <a:avLst>
+              <a:gd name="adj" fmla="val 20000"/>
+            </a:avLst>
+          </a:prstGeom>
+          <a:solidFill>
+            <a:srgbClr val="E4F4EE"/>
+          </a:solidFill>
+          <a:ln>
+            <a:noFill/>
+          </a:ln>
+          <a:effectLst/>
+        </p:spPr>
+        <p:style>
+          <a:lnRef idx="1">
+            <a:schemeClr val="accent1"/>
+          </a:lnRef>
+          <a:fillRef idx="3">
+            <a:schemeClr val="accent1"/>
+          </a:fillRef>
+          <a:effectRef idx="2">
+            <a:schemeClr val="accent1"/>
+          </a:effectRef>
+          <a:fontRef idx="minor">
+            <a:schemeClr val="lt1"/>
+          </a:fontRef>
+        </p:style>
+        <p:txBody>
+          <a:bodyPr rtlCol="0" anchor="ctr"/>
+          <a:lstStyle/>
+          <a:p/>
+        </p:txBody>
+      </p:sp>
+      <p:sp>
+        <p:nvSpPr>
+          <p:cNvPr id="26" name="OnthulTxt 3"/>
+          <p:cNvSpPr txBox="1"/>
+          <p:nvPr/>
+        </p:nvSpPr>
+        <p:spPr>
+          <a:xfrm>
+            <a:off x="566928" y="4846320"/>
+            <a:ext cx="3441192" cy="237744"/>
+          </a:xfrm>
+          <a:prstGeom prst="rect">
+            <a:avLst/>
+          </a:prstGeom>
+          <a:noFill/>
+        </p:spPr>
+        <p:txBody>
+          <a:bodyPr wrap="square" anchor="ctr" lIns="45720" rIns="45720" tIns="27432" bIns="27432">
+            <a:normAutofit/>
+          </a:bodyPr>
+          <a:lstStyle/>
+          <a:p>
+            <a:pPr algn="l"/>
+            <a:r>
+              <a:rPr sz="850" b="1">
+                <a:solidFill>
+                  <a:srgbClr val="157355"/>
+                </a:solidFill>
+                <a:latin typeface="Inter"/>
+              </a:rPr>
+              <a:t>DIFERENTE — rr = rollende r</a:t>
+            </a:r>
+          </a:p>
+        </p:txBody>
+      </p:sp>
+      <p:sp>
+        <p:nvSpPr>
+          <p:cNvPr id="27" name="Tarjeta 4"/>
+          <p:cNvSpPr/>
+          <p:nvPr/>
+        </p:nvSpPr>
+        <p:spPr>
+          <a:xfrm>
+            <a:off x="4264152" y="3968496"/>
+            <a:ext cx="3660648" cy="1170432"/>
+          </a:xfrm>
+          <a:prstGeom prst="roundRect">
+            <a:avLst>
+              <a:gd name="adj" fmla="val 6000"/>
+            </a:avLst>
+          </a:prstGeom>
+          <a:solidFill>
+            <a:srgbClr val="FFFFFF"/>
+          </a:solidFill>
+          <a:ln w="12700">
+            <a:solidFill>
+              <a:srgbClr val="E4E3DE"/>
+            </a:solidFill>
+          </a:ln>
+          <a:effectLst/>
+        </p:spPr>
+        <p:style>
+          <a:lnRef idx="1">
+            <a:schemeClr val="accent1"/>
+          </a:lnRef>
+          <a:fillRef idx="3">
+            <a:schemeClr val="accent1"/>
+          </a:fillRef>
+          <a:effectRef idx="2">
+            <a:schemeClr val="accent1"/>
+          </a:effectRef>
+          <a:fontRef idx="minor">
+            <a:schemeClr val="lt1"/>
+          </a:fontRef>
+        </p:style>
+        <p:txBody>
+          <a:bodyPr rtlCol="0" anchor="ctr"/>
+          <a:lstStyle/>
+          <a:p/>
+        </p:txBody>
+      </p:sp>
+      <p:sp>
+        <p:nvSpPr>
+          <p:cNvPr id="28" name="TarjetaTxt 4"/>
+          <p:cNvSpPr txBox="1"/>
+          <p:nvPr/>
+        </p:nvSpPr>
+        <p:spPr>
+          <a:xfrm>
+            <a:off x="4355592" y="4023360"/>
+            <a:ext cx="3477768" cy="859536"/>
+          </a:xfrm>
+          <a:prstGeom prst="rect">
+            <a:avLst/>
+          </a:prstGeom>
+          <a:noFill/>
+        </p:spPr>
+        <p:txBody>
+          <a:bodyPr wrap="square" anchor="t" lIns="45720" rIns="45720" tIns="27432" bIns="27432">
+            <a:normAutofit/>
+          </a:bodyPr>
+          <a:lstStyle/>
+          <a:p>
+            <a:pPr algn="l"/>
+            <a:r>
+              <a:rPr sz="1100" b="1">
+                <a:solidFill>
+                  <a:srgbClr val="157355"/>
+                </a:solidFill>
+                <a:latin typeface="Bricolage Grotesque"/>
+              </a:rPr>
+              <a:t>LOTE 5 · 25 pts</a:t>
+            </a:r>
+          </a:p>
+          <a:p>
+            <a:pPr algn="l"/>
+            <a:r>
+              <a:rPr sz="1000">
+                <a:solidFill>
+                  <a:srgbClr val="20242E"/>
+                </a:solidFill>
+                <a:latin typeface="Inter"/>
+              </a:rPr>
+              <a:t>vino   ·   bino</a:t>
+            </a:r>
+          </a:p>
+        </p:txBody>
+      </p:sp>
+      <p:sp>
+        <p:nvSpPr>
+          <p:cNvPr id="29" name="Onthul 4"/>
+          <p:cNvSpPr/>
+          <p:nvPr/>
+        </p:nvSpPr>
+        <p:spPr>
+          <a:xfrm>
+            <a:off x="4355592" y="4846320"/>
+            <a:ext cx="3477768" cy="237744"/>
+          </a:xfrm>
+          <a:prstGeom prst="roundRect">
+            <a:avLst>
+              <a:gd name="adj" fmla="val 20000"/>
+            </a:avLst>
+          </a:prstGeom>
+          <a:solidFill>
+            <a:srgbClr val="E4F4EE"/>
+          </a:solidFill>
+          <a:ln>
+            <a:noFill/>
+          </a:ln>
+          <a:effectLst/>
+        </p:spPr>
+        <p:style>
+          <a:lnRef idx="1">
+            <a:schemeClr val="accent1"/>
+          </a:lnRef>
+          <a:fillRef idx="3">
+            <a:schemeClr val="accent1"/>
+          </a:fillRef>
+          <a:effectRef idx="2">
+            <a:schemeClr val="accent1"/>
+          </a:effectRef>
+          <a:fontRef idx="minor">
+            <a:schemeClr val="lt1"/>
+          </a:fontRef>
+        </p:style>
+        <p:txBody>
+          <a:bodyPr rtlCol="0" anchor="ctr"/>
+          <a:lstStyle/>
+          <a:p/>
+        </p:txBody>
+      </p:sp>
+      <p:sp>
+        <p:nvSpPr>
+          <p:cNvPr id="30" name="OnthulTxt 4"/>
+          <p:cNvSpPr txBox="1"/>
+          <p:nvPr/>
+        </p:nvSpPr>
+        <p:spPr>
+          <a:xfrm>
+            <a:off x="4373880" y="4846320"/>
+            <a:ext cx="3441192" cy="237744"/>
+          </a:xfrm>
+          <a:prstGeom prst="rect">
+            <a:avLst/>
+          </a:prstGeom>
+          <a:noFill/>
+        </p:spPr>
+        <p:txBody>
+          <a:bodyPr wrap="square" anchor="ctr" lIns="45720" rIns="45720" tIns="27432" bIns="27432">
+            <a:normAutofit/>
+          </a:bodyPr>
+          <a:lstStyle/>
+          <a:p>
+            <a:pPr algn="l"/>
+            <a:r>
+              <a:rPr sz="850" b="1">
+                <a:solidFill>
+                  <a:srgbClr val="157355"/>
+                </a:solidFill>
+                <a:latin typeface="Inter"/>
+              </a:rPr>
+              <a:t>IGUAL — v en b klinken in het Spaans hetzelfde</a:t>
+            </a:r>
+          </a:p>
+        </p:txBody>
+      </p:sp>
+      <p:sp>
+        <p:nvSpPr>
+          <p:cNvPr id="31" name="Tarjeta 5"/>
+          <p:cNvSpPr/>
+          <p:nvPr/>
+        </p:nvSpPr>
+        <p:spPr>
+          <a:xfrm>
+            <a:off x="8071104" y="3968496"/>
+            <a:ext cx="3660648" cy="1170432"/>
+          </a:xfrm>
+          <a:prstGeom prst="roundRect">
+            <a:avLst>
+              <a:gd name="adj" fmla="val 6000"/>
+            </a:avLst>
+          </a:prstGeom>
+          <a:solidFill>
+            <a:srgbClr val="FFFFFF"/>
+          </a:solidFill>
+          <a:ln w="12700">
+            <a:solidFill>
+              <a:srgbClr val="E4E3DE"/>
+            </a:solidFill>
+          </a:ln>
+          <a:effectLst/>
+        </p:spPr>
+        <p:style>
+          <a:lnRef idx="1">
+            <a:schemeClr val="accent1"/>
+          </a:lnRef>
+          <a:fillRef idx="3">
+            <a:schemeClr val="accent1"/>
+          </a:fillRef>
+          <a:effectRef idx="2">
+            <a:schemeClr val="accent1"/>
+          </a:effectRef>
+          <a:fontRef idx="minor">
+            <a:schemeClr val="lt1"/>
+          </a:fontRef>
+        </p:style>
+        <p:txBody>
+          <a:bodyPr rtlCol="0" anchor="ctr"/>
+          <a:lstStyle/>
+          <a:p/>
+        </p:txBody>
+      </p:sp>
+      <p:sp>
+        <p:nvSpPr>
+          <p:cNvPr id="32" name="TarjetaTxt 5"/>
+          <p:cNvSpPr txBox="1"/>
+          <p:nvPr/>
+        </p:nvSpPr>
+        <p:spPr>
+          <a:xfrm>
+            <a:off x="8162544" y="4023360"/>
+            <a:ext cx="3477768" cy="859536"/>
+          </a:xfrm>
+          <a:prstGeom prst="rect">
+            <a:avLst/>
+          </a:prstGeom>
+          <a:noFill/>
+        </p:spPr>
+        <p:txBody>
+          <a:bodyPr wrap="square" anchor="t" lIns="45720" rIns="45720" tIns="27432" bIns="27432">
+            <a:normAutofit/>
+          </a:bodyPr>
+          <a:lstStyle/>
+          <a:p>
+            <a:pPr algn="l"/>
+            <a:r>
+              <a:rPr sz="1100" b="1">
+                <a:solidFill>
+                  <a:srgbClr val="157355"/>
+                </a:solidFill>
+                <a:latin typeface="Bricolage Grotesque"/>
+              </a:rPr>
+              <a:t>LOTE 6 · 15 pts</a:t>
+            </a:r>
+          </a:p>
+          <a:p>
+            <a:pPr algn="l"/>
+            <a:r>
+              <a:rPr sz="1000">
+                <a:solidFill>
+                  <a:srgbClr val="20242E"/>
+                </a:solidFill>
+                <a:latin typeface="Inter"/>
+              </a:rPr>
+              <a:t>guitarra   ·   gitano</a:t>
+            </a:r>
+          </a:p>
+        </p:txBody>
+      </p:sp>
+      <p:sp>
+        <p:nvSpPr>
+          <p:cNvPr id="33" name="Onthul 5"/>
+          <p:cNvSpPr/>
+          <p:nvPr/>
+        </p:nvSpPr>
+        <p:spPr>
+          <a:xfrm>
+            <a:off x="8162544" y="4846320"/>
+            <a:ext cx="3477768" cy="237744"/>
+          </a:xfrm>
+          <a:prstGeom prst="roundRect">
+            <a:avLst>
+              <a:gd name="adj" fmla="val 20000"/>
+            </a:avLst>
+          </a:prstGeom>
+          <a:solidFill>
+            <a:srgbClr val="E4F4EE"/>
+          </a:solidFill>
+          <a:ln>
+            <a:noFill/>
+          </a:ln>
+          <a:effectLst/>
+        </p:spPr>
+        <p:style>
+          <a:lnRef idx="1">
+            <a:schemeClr val="accent1"/>
+          </a:lnRef>
+          <a:fillRef idx="3">
+            <a:schemeClr val="accent1"/>
+          </a:fillRef>
+          <a:effectRef idx="2">
+            <a:schemeClr val="accent1"/>
+          </a:effectRef>
+          <a:fontRef idx="minor">
+            <a:schemeClr val="lt1"/>
+          </a:fontRef>
+        </p:style>
+        <p:txBody>
+          <a:bodyPr rtlCol="0" anchor="ctr"/>
+          <a:lstStyle/>
+          <a:p/>
+        </p:txBody>
+      </p:sp>
+      <p:sp>
+        <p:nvSpPr>
+          <p:cNvPr id="34" name="OnthulTxt 5"/>
+          <p:cNvSpPr txBox="1"/>
+          <p:nvPr/>
+        </p:nvSpPr>
+        <p:spPr>
+          <a:xfrm>
+            <a:off x="8180832" y="4846320"/>
+            <a:ext cx="3441192" cy="237744"/>
+          </a:xfrm>
+          <a:prstGeom prst="rect">
+            <a:avLst/>
+          </a:prstGeom>
+          <a:noFill/>
+        </p:spPr>
+        <p:txBody>
+          <a:bodyPr wrap="square" anchor="ctr" lIns="45720" rIns="45720" tIns="27432" bIns="27432">
+            <a:normAutofit/>
+          </a:bodyPr>
+          <a:lstStyle/>
+          <a:p>
+            <a:pPr algn="l"/>
+            <a:r>
+              <a:rPr sz="850" b="1">
+                <a:solidFill>
+                  <a:srgbClr val="157355"/>
+                </a:solidFill>
+                <a:latin typeface="Inter"/>
+              </a:rPr>
+              <a:t>DIFERENTE — gui = harde g (u zwijgt)</a:t>
+            </a:r>
+          </a:p>
+        </p:txBody>
+      </p:sp>
+      <p:sp>
+        <p:nvSpPr>
+          <p:cNvPr id="35" name="Tarjeta 6"/>
+          <p:cNvSpPr/>
+          <p:nvPr/>
+        </p:nvSpPr>
+        <p:spPr>
+          <a:xfrm>
+            <a:off x="457200" y="5266944"/>
+            <a:ext cx="3660648" cy="1170432"/>
+          </a:xfrm>
+          <a:prstGeom prst="roundRect">
+            <a:avLst>
+              <a:gd name="adj" fmla="val 6000"/>
+            </a:avLst>
+          </a:prstGeom>
+          <a:solidFill>
+            <a:srgbClr val="FFFFFF"/>
+          </a:solidFill>
+          <a:ln w="12700">
+            <a:solidFill>
+              <a:srgbClr val="E4E3DE"/>
+            </a:solidFill>
+          </a:ln>
+          <a:effectLst/>
+        </p:spPr>
+        <p:style>
+          <a:lnRef idx="1">
+            <a:schemeClr val="accent1"/>
+          </a:lnRef>
+          <a:fillRef idx="3">
+            <a:schemeClr val="accent1"/>
+          </a:fillRef>
+          <a:effectRef idx="2">
+            <a:schemeClr val="accent1"/>
+          </a:effectRef>
+          <a:fontRef idx="minor">
+            <a:schemeClr val="lt1"/>
+          </a:fontRef>
+        </p:style>
+        <p:txBody>
+          <a:bodyPr rtlCol="0" anchor="ctr"/>
+          <a:lstStyle/>
+          <a:p/>
+        </p:txBody>
+      </p:sp>
+      <p:sp>
+        <p:nvSpPr>
+          <p:cNvPr id="36" name="TarjetaTxt 6"/>
+          <p:cNvSpPr txBox="1"/>
+          <p:nvPr/>
+        </p:nvSpPr>
+        <p:spPr>
+          <a:xfrm>
+            <a:off x="548640" y="5321808"/>
+            <a:ext cx="3477768" cy="859536"/>
+          </a:xfrm>
+          <a:prstGeom prst="rect">
+            <a:avLst/>
+          </a:prstGeom>
+          <a:noFill/>
+        </p:spPr>
+        <p:txBody>
+          <a:bodyPr wrap="square" anchor="t" lIns="45720" rIns="45720" tIns="27432" bIns="27432">
+            <a:normAutofit/>
+          </a:bodyPr>
+          <a:lstStyle/>
+          <a:p>
+            <a:pPr algn="l"/>
+            <a:r>
+              <a:rPr sz="1100" b="1">
+                <a:solidFill>
+                  <a:srgbClr val="157355"/>
+                </a:solidFill>
+                <a:latin typeface="Bricolage Grotesque"/>
+              </a:rPr>
+              <a:t>LOTE 7 · 20 pts</a:t>
+            </a:r>
+          </a:p>
+          <a:p>
+            <a:pPr algn="l"/>
+            <a:r>
+              <a:rPr sz="1000">
+                <a:solidFill>
+                  <a:srgbClr val="20242E"/>
+                </a:solidFill>
+                <a:latin typeface="Inter"/>
+              </a:rPr>
+              <a:t>año   ·   ano</a:t>
+            </a:r>
+          </a:p>
+        </p:txBody>
+      </p:sp>
+      <p:sp>
+        <p:nvSpPr>
+          <p:cNvPr id="37" name="Onthul 6"/>
+          <p:cNvSpPr/>
+          <p:nvPr/>
+        </p:nvSpPr>
+        <p:spPr>
+          <a:xfrm>
+            <a:off x="548640" y="6144768"/>
+            <a:ext cx="3477768" cy="237744"/>
+          </a:xfrm>
+          <a:prstGeom prst="roundRect">
+            <a:avLst>
+              <a:gd name="adj" fmla="val 20000"/>
+            </a:avLst>
+          </a:prstGeom>
+          <a:solidFill>
+            <a:srgbClr val="E4F4EE"/>
+          </a:solidFill>
+          <a:ln>
+            <a:noFill/>
+          </a:ln>
+          <a:effectLst/>
+        </p:spPr>
+        <p:style>
+          <a:lnRef idx="1">
+            <a:schemeClr val="accent1"/>
+          </a:lnRef>
+          <a:fillRef idx="3">
+            <a:schemeClr val="accent1"/>
+          </a:fillRef>
+          <a:effectRef idx="2">
+            <a:schemeClr val="accent1"/>
+          </a:effectRef>
+          <a:fontRef idx="minor">
+            <a:schemeClr val="lt1"/>
+          </a:fontRef>
+        </p:style>
+        <p:txBody>
+          <a:bodyPr rtlCol="0" anchor="ctr"/>
+          <a:lstStyle/>
+          <a:p/>
+        </p:txBody>
+      </p:sp>
+      <p:sp>
+        <p:nvSpPr>
+          <p:cNvPr id="38" name="OnthulTxt 6"/>
+          <p:cNvSpPr txBox="1"/>
+          <p:nvPr/>
+        </p:nvSpPr>
+        <p:spPr>
+          <a:xfrm>
+            <a:off x="566928" y="6144768"/>
+            <a:ext cx="3441192" cy="237744"/>
+          </a:xfrm>
+          <a:prstGeom prst="rect">
+            <a:avLst/>
+          </a:prstGeom>
+          <a:noFill/>
+        </p:spPr>
+        <p:txBody>
+          <a:bodyPr wrap="square" anchor="ctr" lIns="45720" rIns="45720" tIns="27432" bIns="27432">
+            <a:normAutofit/>
+          </a:bodyPr>
+          <a:lstStyle/>
+          <a:p>
+            <a:pPr algn="l"/>
+            <a:r>
+              <a:rPr sz="850" b="1">
+                <a:solidFill>
+                  <a:srgbClr val="157355"/>
+                </a:solidFill>
+                <a:latin typeface="Inter"/>
+              </a:rPr>
+              <a:t>DIFERENTE — ñ is een eigen letter met een eig…</a:t>
+            </a:r>
+          </a:p>
+        </p:txBody>
+      </p:sp>
+      <p:sp>
+        <p:nvSpPr>
+          <p:cNvPr id="39" name="Tarjeta 7"/>
+          <p:cNvSpPr/>
+          <p:nvPr/>
+        </p:nvSpPr>
+        <p:spPr>
+          <a:xfrm>
+            <a:off x="4264152" y="5266944"/>
+            <a:ext cx="3660648" cy="1170432"/>
+          </a:xfrm>
+          <a:prstGeom prst="roundRect">
+            <a:avLst>
+              <a:gd name="adj" fmla="val 6000"/>
+            </a:avLst>
+          </a:prstGeom>
+          <a:solidFill>
+            <a:srgbClr val="FFFFFF"/>
+          </a:solidFill>
+          <a:ln w="12700">
+            <a:solidFill>
+              <a:srgbClr val="E4E3DE"/>
+            </a:solidFill>
+          </a:ln>
+          <a:effectLst/>
+        </p:spPr>
+        <p:style>
+          <a:lnRef idx="1">
+            <a:schemeClr val="accent1"/>
+          </a:lnRef>
+          <a:fillRef idx="3">
+            <a:schemeClr val="accent1"/>
+          </a:fillRef>
+          <a:effectRef idx="2">
+            <a:schemeClr val="accent1"/>
+          </a:effectRef>
+          <a:fontRef idx="minor">
+            <a:schemeClr val="lt1"/>
+          </a:fontRef>
+        </p:style>
+        <p:txBody>
+          <a:bodyPr rtlCol="0" anchor="ctr"/>
+          <a:lstStyle/>
+          <a:p/>
+        </p:txBody>
+      </p:sp>
+      <p:sp>
+        <p:nvSpPr>
+          <p:cNvPr id="40" name="TarjetaTxt 7"/>
+          <p:cNvSpPr txBox="1"/>
+          <p:nvPr/>
+        </p:nvSpPr>
+        <p:spPr>
+          <a:xfrm>
+            <a:off x="4355592" y="5321808"/>
+            <a:ext cx="3477768" cy="859536"/>
+          </a:xfrm>
+          <a:prstGeom prst="rect">
+            <a:avLst/>
+          </a:prstGeom>
+          <a:noFill/>
+        </p:spPr>
+        <p:txBody>
+          <a:bodyPr wrap="square" anchor="t" lIns="45720" rIns="45720" tIns="27432" bIns="27432">
+            <a:normAutofit/>
+          </a:bodyPr>
+          <a:lstStyle/>
+          <a:p>
+            <a:pPr algn="l"/>
+            <a:r>
+              <a:rPr sz="1100" b="1">
+                <a:solidFill>
+                  <a:srgbClr val="157355"/>
+                </a:solidFill>
+                <a:latin typeface="Bricolage Grotesque"/>
+              </a:rPr>
+              <a:t>LOTE 8 · 20 pts</a:t>
+            </a:r>
+          </a:p>
+          <a:p>
+            <a:pPr algn="l"/>
+            <a:r>
+              <a:rPr sz="1000">
+                <a:solidFill>
+                  <a:srgbClr val="20242E"/>
+                </a:solidFill>
+                <a:latin typeface="Inter"/>
+              </a:rPr>
+              <a:t>casa   ·   caza</a:t>
+            </a:r>
+          </a:p>
+        </p:txBody>
+      </p:sp>
+      <p:sp>
+        <p:nvSpPr>
+          <p:cNvPr id="41" name="Onthul 7"/>
+          <p:cNvSpPr/>
+          <p:nvPr/>
+        </p:nvSpPr>
+        <p:spPr>
+          <a:xfrm>
+            <a:off x="4355592" y="6144768"/>
+            <a:ext cx="3477768" cy="237744"/>
+          </a:xfrm>
+          <a:prstGeom prst="roundRect">
+            <a:avLst>
+              <a:gd name="adj" fmla="val 20000"/>
+            </a:avLst>
+          </a:prstGeom>
+          <a:solidFill>
+            <a:srgbClr val="E4F4EE"/>
+          </a:solidFill>
+          <a:ln>
+            <a:noFill/>
+          </a:ln>
+          <a:effectLst/>
+        </p:spPr>
+        <p:style>
+          <a:lnRef idx="1">
+            <a:schemeClr val="accent1"/>
+          </a:lnRef>
+          <a:fillRef idx="3">
+            <a:schemeClr val="accent1"/>
+          </a:fillRef>
+          <a:effectRef idx="2">
+            <a:schemeClr val="accent1"/>
+          </a:effectRef>
+          <a:fontRef idx="minor">
+            <a:schemeClr val="lt1"/>
+          </a:fontRef>
+        </p:style>
+        <p:txBody>
+          <a:bodyPr rtlCol="0" anchor="ctr"/>
+          <a:lstStyle/>
+          <a:p/>
+        </p:txBody>
+      </p:sp>
+      <p:sp>
+        <p:nvSpPr>
+          <p:cNvPr id="42" name="OnthulTxt 7"/>
+          <p:cNvSpPr txBox="1"/>
+          <p:nvPr/>
+        </p:nvSpPr>
+        <p:spPr>
+          <a:xfrm>
+            <a:off x="4373880" y="6144768"/>
+            <a:ext cx="3441192" cy="237744"/>
+          </a:xfrm>
+          <a:prstGeom prst="rect">
+            <a:avLst/>
+          </a:prstGeom>
+          <a:noFill/>
+        </p:spPr>
+        <p:txBody>
+          <a:bodyPr wrap="square" anchor="ctr" lIns="45720" rIns="45720" tIns="27432" bIns="27432">
+            <a:normAutofit/>
+          </a:bodyPr>
+          <a:lstStyle/>
+          <a:p>
+            <a:pPr algn="l"/>
+            <a:r>
+              <a:rPr sz="850" b="1">
+                <a:solidFill>
+                  <a:srgbClr val="157355"/>
+                </a:solidFill>
+                <a:latin typeface="Inter"/>
+              </a:rPr>
+              <a:t>DIFERENTE — s = s</a:t>
+            </a:r>
+          </a:p>
+        </p:txBody>
+      </p:sp>
+    </p:spTree>
+  </p:cSld>
+  <p:clrMapOvr>
+    <a:masterClrMapping/>
+  </p:clrMapOvr>
+  <p:timing>
+    <p:tnLst>
+      <p:par>
+        <p:cTn id="1" dur="indefinite" restart="never" nodeType="tmRoot">
+          <p:childTnLst>
+            <p:seq concurrent="1" nextAc="seek">
+              <p:cTn id="2" dur="indefinite" nodeType="mainSeq">
+                <p:childTnLst>
+                  <p:par>
+                    <p:cTn id="5" fill="hold">
+                      <p:stCondLst>
+                        <p:cond delay="indefinite"/>
+                      </p:stCondLst>
+                      <p:childTnLst>
+                        <p:par>
+                          <p:cTn id="6" fill="hold">
+                            <p:stCondLst>
+                              <p:cond delay="0"/>
+                            </p:stCondLst>
+                            <p:childTnLst>
+                              <p:par>
+                                <p:cTn id="7" presetID="10" presetClass="entr" presetSubtype="0" fill="hold" grpId="0" nodeType="clickEffect">
+                                  <p:stCondLst>
+                                    <p:cond delay="0"/>
+                                  </p:stCondLst>
+                                  <p:childTnLst>
+                                    <p:set>
+                                      <p:cBhvr>
+                                        <p:cTn id="8" dur="1" fill="hold">
+                                          <p:stCondLst>
+                                            <p:cond delay="0"/>
+                                          </p:stCondLst>
+                                        </p:cTn>
+                                        <p:tgtEl>
+                                          <p:spTgt spid="13"/>
+                                        </p:tgtEl>
+                                        <p:attrNameLst>
+                                          <p:attrName>style.visibility</p:attrName>
+                                        </p:attrNameLst>
+                                      </p:cBhvr>
+                                      <p:to>
+                                        <p:strVal val="visible"/>
+                                      </p:to>
+                                    </p:set>
+                                    <p:animEffect transition="in" filter="fade">
+                                      <p:cBhvr>
+                                        <p:cTn id="9" dur="500"/>
+                                        <p:tgtEl>
+                                          <p:spTgt spid="13"/>
+                                        </p:tgtEl>
+                                      </p:cBhvr>
+                                    </p:animEffect>
+                                  </p:childTnLst>
+                                </p:cTn>
+                              </p:par>
+                            </p:childTnLst>
+                          </p:cTn>
+                        </p:par>
+                      </p:childTnLst>
+                    </p:cTn>
+                  </p:par>
+                  <p:par>
+                    <p:cTn id="10" fill="hold">
+                      <p:stCondLst>
+                        <p:cond delay="indefinite"/>
+                      </p:stCondLst>
+                      <p:childTnLst>
+                        <p:par>
+                          <p:cTn id="11" fill="hold">
+                            <p:stCondLst>
+                              <p:cond delay="0"/>
+                            </p:stCondLst>
+                            <p:childTnLst>
+                              <p:par>
+                                <p:cTn id="12" presetID="10" presetClass="entr" presetSubtype="0" fill="hold" grpId="0" nodeType="clickEffect">
+                                  <p:stCondLst>
+                                    <p:cond delay="0"/>
+                                  </p:stCondLst>
+                                  <p:childTnLst>
+                                    <p:set>
+                                      <p:cBhvr>
+                                        <p:cTn id="13" dur="1" fill="hold">
+                                          <p:stCondLst>
+                                            <p:cond delay="0"/>
+                                          </p:stCondLst>
+                                        </p:cTn>
+                                        <p:tgtEl>
+                                          <p:spTgt spid="14"/>
+                                        </p:tgtEl>
+                                        <p:attrNameLst>
+                                          <p:attrName>style.visibility</p:attrName>
+                                        </p:attrNameLst>
+                                      </p:cBhvr>
+                                      <p:to>
+                                        <p:strVal val="visible"/>
+                                      </p:to>
+                                    </p:set>
+                                    <p:animEffect transition="in" filter="fade">
+                                      <p:cBhvr>
+                                        <p:cTn id="14" dur="500"/>
+                                        <p:tgtEl>
+                                          <p:spTgt spid="14"/>
+                                        </p:tgtEl>
+                                      </p:cBhvr>
+                                    </p:animEffect>
+                                  </p:childTnLst>
+                                </p:cTn>
+                              </p:par>
+                            </p:childTnLst>
+                          </p:cTn>
+                        </p:par>
+                      </p:childTnLst>
+                    </p:cTn>
+                  </p:par>
+                  <p:par>
+                    <p:cTn id="15" fill="hold">
+                      <p:stCondLst>
+                        <p:cond delay="indefinite"/>
+                      </p:stCondLst>
+                      <p:childTnLst>
+                        <p:par>
+                          <p:cTn id="16" fill="hold">
+                            <p:stCondLst>
+                              <p:cond delay="0"/>
+                            </p:stCondLst>
+                            <p:childTnLst>
+                              <p:par>
+                                <p:cTn id="17" presetID="10" presetClass="entr" presetSubtype="0" fill="hold" grpId="0" nodeType="clickEffect">
+                                  <p:stCondLst>
+                                    <p:cond delay="0"/>
+                                  </p:stCondLst>
+                                  <p:childTnLst>
+                                    <p:set>
+                                      <p:cBhvr>
+                                        <p:cTn id="18" dur="1" fill="hold">
+                                          <p:stCondLst>
+                                            <p:cond delay="0"/>
+                                          </p:stCondLst>
+                                        </p:cTn>
+                                        <p:tgtEl>
+                                          <p:spTgt spid="17"/>
+                                        </p:tgtEl>
+                                        <p:attrNameLst>
+                                          <p:attrName>style.visibility</p:attrName>
+                                        </p:attrNameLst>
+                                      </p:cBhvr>
+                                      <p:to>
+                                        <p:strVal val="visible"/>
+                                      </p:to>
+                                    </p:set>
+                                    <p:animEffect transition="in" filter="fade">
+                                      <p:cBhvr>
+                                        <p:cTn id="19" dur="500"/>
+                                        <p:tgtEl>
+                                          <p:spTgt spid="17"/>
+                                        </p:tgtEl>
+                                      </p:cBhvr>
+                                    </p:animEffect>
+                                  </p:childTnLst>
+                                </p:cTn>
+                              </p:par>
+                            </p:childTnLst>
+                          </p:cTn>
+                        </p:par>
+                      </p:childTnLst>
+                    </p:cTn>
+                  </p:par>
+                  <p:par>
+                    <p:cTn id="20" fill="hold">
+                      <p:stCondLst>
+                        <p:cond delay="indefinite"/>
+                      </p:stCondLst>
+                      <p:childTnLst>
+                        <p:par>
+                          <p:cTn id="21" fill="hold">
+                            <p:stCondLst>
+                              <p:cond delay="0"/>
+                            </p:stCondLst>
+                            <p:childTnLst>
+                              <p:par>
+                                <p:cTn id="22" presetID="10" presetClass="entr" presetSubtype="0" fill="hold" grpId="0" nodeType="clickEffect">
+                                  <p:stCondLst>
+                                    <p:cond delay="0"/>
+                                  </p:stCondLst>
+                                  <p:childTnLst>
+                                    <p:set>
+                                      <p:cBhvr>
+                                        <p:cTn id="23" dur="1" fill="hold">
+                                          <p:stCondLst>
+                                            <p:cond delay="0"/>
+                                          </p:stCondLst>
+                                        </p:cTn>
+                                        <p:tgtEl>
+                                          <p:spTgt spid="18"/>
+                                        </p:tgtEl>
+                                        <p:attrNameLst>
+                                          <p:attrName>style.visibility</p:attrName>
+                                        </p:attrNameLst>
+                                      </p:cBhvr>
+                                      <p:to>
+                                        <p:strVal val="visible"/>
+                                      </p:to>
+                                    </p:set>
+                                    <p:animEffect transition="in" filter="fade">
+                                      <p:cBhvr>
+                                        <p:cTn id="24" dur="500"/>
+                                        <p:tgtEl>
+                                          <p:spTgt spid="18"/>
+                                        </p:tgtEl>
+                                      </p:cBhvr>
+                                    </p:animEffect>
+                                  </p:childTnLst>
+                                </p:cTn>
+                              </p:par>
+                            </p:childTnLst>
+                          </p:cTn>
+                        </p:par>
+                      </p:childTnLst>
+                    </p:cTn>
+                  </p:par>
+                  <p:par>
+                    <p:cTn id="25" fill="hold">
+                      <p:stCondLst>
+                        <p:cond delay="indefinite"/>
+                      </p:stCondLst>
+                      <p:childTnLst>
+                        <p:par>
+                          <p:cTn id="26" fill="hold">
+                            <p:stCondLst>
+                              <p:cond delay="0"/>
+                            </p:stCondLst>
+                            <p:childTnLst>
+                              <p:par>
+                                <p:cTn id="27" presetID="10" presetClass="entr" presetSubtype="0" fill="hold" grpId="0" nodeType="clickEffect">
+                                  <p:stCondLst>
+                                    <p:cond delay="0"/>
+                                  </p:stCondLst>
+                                  <p:childTnLst>
+                                    <p:set>
+                                      <p:cBhvr>
+                                        <p:cTn id="28" dur="1" fill="hold">
+                                          <p:stCondLst>
+                                            <p:cond delay="0"/>
+                                          </p:stCondLst>
+                                        </p:cTn>
+                                        <p:tgtEl>
+                                          <p:spTgt spid="21"/>
+                                        </p:tgtEl>
+                                        <p:attrNameLst>
+                                          <p:attrName>style.visibility</p:attrName>
+                                        </p:attrNameLst>
+                                      </p:cBhvr>
+                                      <p:to>
+                                        <p:strVal val="visible"/>
+                                      </p:to>
+                                    </p:set>
+                                    <p:animEffect transition="in" filter="fade">
+                                      <p:cBhvr>
+                                        <p:cTn id="29" dur="500"/>
+                                        <p:tgtEl>
+                                          <p:spTgt spid="21"/>
+                                        </p:tgtEl>
+                                      </p:cBhvr>
+                                    </p:animEffect>
+                                  </p:childTnLst>
+                                </p:cTn>
+                              </p:par>
+                            </p:childTnLst>
+                          </p:cTn>
+                        </p:par>
+                      </p:childTnLst>
+                    </p:cTn>
+                  </p:par>
+                  <p:par>
+                    <p:cTn id="30" fill="hold">
+                      <p:stCondLst>
+                        <p:cond delay="indefinite"/>
+                      </p:stCondLst>
+                      <p:childTnLst>
+                        <p:par>
+                          <p:cTn id="31" fill="hold">
+                            <p:stCondLst>
+                              <p:cond delay="0"/>
+                            </p:stCondLst>
+                            <p:childTnLst>
+                              <p:par>
+                                <p:cTn id="32" presetID="10" presetClass="entr" presetSubtype="0" fill="hold" grpId="0" nodeType="clickEffect">
+                                  <p:stCondLst>
+                                    <p:cond delay="0"/>
+                                  </p:stCondLst>
+                                  <p:childTnLst>
+                                    <p:set>
+                                      <p:cBhvr>
+                                        <p:cTn id="33" dur="1" fill="hold">
+                                          <p:stCondLst>
+                                            <p:cond delay="0"/>
+                                          </p:stCondLst>
+                                        </p:cTn>
+                                        <p:tgtEl>
+                                          <p:spTgt spid="22"/>
+                                        </p:tgtEl>
+                                        <p:attrNameLst>
+                                          <p:attrName>style.visibility</p:attrName>
+                                        </p:attrNameLst>
+                                      </p:cBhvr>
+                                      <p:to>
+                                        <p:strVal val="visible"/>
+                                      </p:to>
+                                    </p:set>
+                                    <p:animEffect transition="in" filter="fade">
+                                      <p:cBhvr>
+                                        <p:cTn id="34" dur="500"/>
+                                        <p:tgtEl>
+                                          <p:spTgt spid="22"/>
+                                        </p:tgtEl>
+                                      </p:cBhvr>
+                                    </p:animEffect>
+                                  </p:childTnLst>
+                                </p:cTn>
+                              </p:par>
+                            </p:childTnLst>
+                          </p:cTn>
+                        </p:par>
+                      </p:childTnLst>
+                    </p:cTn>
+                  </p:par>
+                  <p:par>
+                    <p:cTn id="35" fill="hold">
+                      <p:stCondLst>
+                        <p:cond delay="indefinite"/>
+                      </p:stCondLst>
+                      <p:childTnLst>
+                        <p:par>
+                          <p:cTn id="36" fill="hold">
+                            <p:stCondLst>
+                              <p:cond delay="0"/>
+                            </p:stCondLst>
+                            <p:childTnLst>
+                              <p:par>
+                                <p:cTn id="37" presetID="10" presetClass="entr" presetSubtype="0" fill="hold" grpId="0" nodeType="clickEffect">
+                                  <p:stCondLst>
+                                    <p:cond delay="0"/>
+                                  </p:stCondLst>
+                                  <p:childTnLst>
+                                    <p:set>
+                                      <p:cBhvr>
+                                        <p:cTn id="38" dur="1" fill="hold">
+                                          <p:stCondLst>
+                                            <p:cond delay="0"/>
+                                          </p:stCondLst>
+                                        </p:cTn>
+                                        <p:tgtEl>
+                                          <p:spTgt spid="25"/>
+                                        </p:tgtEl>
+                                        <p:attrNameLst>
+                                          <p:attrName>style.visibility</p:attrName>
+                                        </p:attrNameLst>
+                                      </p:cBhvr>
+                                      <p:to>
+                                        <p:strVal val="visible"/>
+                                      </p:to>
+                                    </p:set>
+                                    <p:animEffect transition="in" filter="fade">
+                                      <p:cBhvr>
+                                        <p:cTn id="39" dur="500"/>
+                                        <p:tgtEl>
+                                          <p:spTgt spid="25"/>
+                                        </p:tgtEl>
+                                      </p:cBhvr>
+                                    </p:animEffect>
+                                  </p:childTnLst>
+                                </p:cTn>
+                              </p:par>
+                            </p:childTnLst>
+                          </p:cTn>
+                        </p:par>
+                      </p:childTnLst>
+                    </p:cTn>
+                  </p:par>
+                  <p:par>
+                    <p:cTn id="40" fill="hold">
+                      <p:stCondLst>
+                        <p:cond delay="indefinite"/>
+                      </p:stCondLst>
+                      <p:childTnLst>
+                        <p:par>
+                          <p:cTn id="41" fill="hold">
+                            <p:stCondLst>
+                              <p:cond delay="0"/>
+                            </p:stCondLst>
+                            <p:childTnLst>
+                              <p:par>
+                                <p:cTn id="42" presetID="10" presetClass="entr" presetSubtype="0" fill="hold" grpId="0" nodeType="clickEffect">
+                                  <p:stCondLst>
+                                    <p:cond delay="0"/>
+                                  </p:stCondLst>
+                                  <p:childTnLst>
+                                    <p:set>
+                                      <p:cBhvr>
+                                        <p:cTn id="43" dur="1" fill="hold">
+                                          <p:stCondLst>
+                                            <p:cond delay="0"/>
+                                          </p:stCondLst>
+                                        </p:cTn>
+                                        <p:tgtEl>
+                                          <p:spTgt spid="26"/>
+                                        </p:tgtEl>
+                                        <p:attrNameLst>
+                                          <p:attrName>style.visibility</p:attrName>
+                                        </p:attrNameLst>
+                                      </p:cBhvr>
+                                      <p:to>
+                                        <p:strVal val="visible"/>
+                                      </p:to>
+                                    </p:set>
+                                    <p:animEffect transition="in" filter="fade">
+                                      <p:cBhvr>
+                                        <p:cTn id="44" dur="500"/>
+                                        <p:tgtEl>
+                                          <p:spTgt spid="26"/>
+                                        </p:tgtEl>
+                                      </p:cBhvr>
+                                    </p:animEffect>
+                                  </p:childTnLst>
+                                </p:cTn>
+                              </p:par>
+                            </p:childTnLst>
+                          </p:cTn>
+                        </p:par>
+                      </p:childTnLst>
+                    </p:cTn>
+                  </p:par>
+                  <p:par>
+                    <p:cTn id="45" fill="hold">
+                      <p:stCondLst>
+                        <p:cond delay="indefinite"/>
+                      </p:stCondLst>
+                      <p:childTnLst>
+                        <p:par>
+                          <p:cTn id="46" fill="hold">
+                            <p:stCondLst>
+                              <p:cond delay="0"/>
+                            </p:stCondLst>
+                            <p:childTnLst>
+                              <p:par>
+                                <p:cTn id="47" presetID="10" presetClass="entr" presetSubtype="0" fill="hold" grpId="0" nodeType="clickEffect">
+                                  <p:stCondLst>
+                                    <p:cond delay="0"/>
+                                  </p:stCondLst>
+                                  <p:childTnLst>
+                                    <p:set>
+                                      <p:cBhvr>
+                                        <p:cTn id="48" dur="1" fill="hold">
+                                          <p:stCondLst>
+                                            <p:cond delay="0"/>
+                                          </p:stCondLst>
+                                        </p:cTn>
+                                        <p:tgtEl>
+                                          <p:spTgt spid="29"/>
+                                        </p:tgtEl>
+                                        <p:attrNameLst>
+                                          <p:attrName>style.visibility</p:attrName>
+                                        </p:attrNameLst>
+                                      </p:cBhvr>
+                                      <p:to>
+                                        <p:strVal val="visible"/>
+                                      </p:to>
+                                    </p:set>
+                                    <p:animEffect transition="in" filter="fade">
+                                      <p:cBhvr>
+                                        <p:cTn id="49" dur="500"/>
+                                        <p:tgtEl>
+                                          <p:spTgt spid="29"/>
+                                        </p:tgtEl>
+                                      </p:cBhvr>
+                                    </p:animEffect>
+                                  </p:childTnLst>
+                                </p:cTn>
+                              </p:par>
+                            </p:childTnLst>
+                          </p:cTn>
+                        </p:par>
+                      </p:childTnLst>
+                    </p:cTn>
+                  </p:par>
+                  <p:par>
+                    <p:cTn id="50" fill="hold">
+                      <p:stCondLst>
+                        <p:cond delay="indefinite"/>
+                      </p:stCondLst>
+                      <p:childTnLst>
+                        <p:par>
+                          <p:cTn id="51" fill="hold">
+                            <p:stCondLst>
+                              <p:cond delay="0"/>
+                            </p:stCondLst>
+                            <p:childTnLst>
+                              <p:par>
+                                <p:cTn id="52" presetID="10" presetClass="entr" presetSubtype="0" fill="hold" grpId="0" nodeType="clickEffect">
+                                  <p:stCondLst>
+                                    <p:cond delay="0"/>
+                                  </p:stCondLst>
+                                  <p:childTnLst>
+                                    <p:set>
+                                      <p:cBhvr>
+                                        <p:cTn id="53" dur="1" fill="hold">
+                                          <p:stCondLst>
+                                            <p:cond delay="0"/>
+                                          </p:stCondLst>
+                                        </p:cTn>
+                                        <p:tgtEl>
+                                          <p:spTgt spid="30"/>
+                                        </p:tgtEl>
+                                        <p:attrNameLst>
+                                          <p:attrName>style.visibility</p:attrName>
+                                        </p:attrNameLst>
+                                      </p:cBhvr>
+                                      <p:to>
+                                        <p:strVal val="visible"/>
+                                      </p:to>
+                                    </p:set>
+                                    <p:animEffect transition="in" filter="fade">
+                                      <p:cBhvr>
+                                        <p:cTn id="54" dur="500"/>
+                                        <p:tgtEl>
+                                          <p:spTgt spid="30"/>
+                                        </p:tgtEl>
+                                      </p:cBhvr>
+                                    </p:animEffect>
+                                  </p:childTnLst>
+                                </p:cTn>
+                              </p:par>
+                            </p:childTnLst>
+                          </p:cTn>
+                        </p:par>
+                      </p:childTnLst>
+                    </p:cTn>
+                  </p:par>
+                  <p:par>
+                    <p:cTn id="55" fill="hold">
+                      <p:stCondLst>
+                        <p:cond delay="indefinite"/>
+                      </p:stCondLst>
+                      <p:childTnLst>
+                        <p:par>
+                          <p:cTn id="56" fill="hold">
+                            <p:stCondLst>
+                              <p:cond delay="0"/>
+                            </p:stCondLst>
+                            <p:childTnLst>
+                              <p:par>
+                                <p:cTn id="57" presetID="10" presetClass="entr" presetSubtype="0" fill="hold" grpId="0" nodeType="clickEffect">
+                                  <p:stCondLst>
+                                    <p:cond delay="0"/>
+                                  </p:stCondLst>
+                                  <p:childTnLst>
+                                    <p:set>
+                                      <p:cBhvr>
+                                        <p:cTn id="58" dur="1" fill="hold">
+                                          <p:stCondLst>
+                                            <p:cond delay="0"/>
+                                          </p:stCondLst>
+                                        </p:cTn>
+                                        <p:tgtEl>
+                                          <p:spTgt spid="33"/>
+                                        </p:tgtEl>
+                                        <p:attrNameLst>
+                                          <p:attrName>style.visibility</p:attrName>
+                                        </p:attrNameLst>
+                                      </p:cBhvr>
+                                      <p:to>
+                                        <p:strVal val="visible"/>
+                                      </p:to>
+                                    </p:set>
+                                    <p:animEffect transition="in" filter="fade">
+                                      <p:cBhvr>
+                                        <p:cTn id="59" dur="500"/>
+                                        <p:tgtEl>
+                                          <p:spTgt spid="33"/>
+                                        </p:tgtEl>
+                                      </p:cBhvr>
+                                    </p:animEffect>
+                                  </p:childTnLst>
+                                </p:cTn>
+                              </p:par>
+                            </p:childTnLst>
+                          </p:cTn>
+                        </p:par>
+                      </p:childTnLst>
+                    </p:cTn>
+                  </p:par>
+                  <p:par>
+                    <p:cTn id="60" fill="hold">
+                      <p:stCondLst>
+                        <p:cond delay="indefinite"/>
+                      </p:stCondLst>
+                      <p:childTnLst>
+                        <p:par>
+                          <p:cTn id="61" fill="hold">
+                            <p:stCondLst>
+                              <p:cond delay="0"/>
+                            </p:stCondLst>
+                            <p:childTnLst>
+                              <p:par>
+                                <p:cTn id="62" presetID="10" presetClass="entr" presetSubtype="0" fill="hold" grpId="0" nodeType="clickEffect">
+                                  <p:stCondLst>
+                                    <p:cond delay="0"/>
+                                  </p:stCondLst>
+                                  <p:childTnLst>
+                                    <p:set>
+                                      <p:cBhvr>
+                                        <p:cTn id="63" dur="1" fill="hold">
+                                          <p:stCondLst>
+                                            <p:cond delay="0"/>
+                                          </p:stCondLst>
+                                        </p:cTn>
+                                        <p:tgtEl>
+                                          <p:spTgt spid="34"/>
+                                        </p:tgtEl>
+                                        <p:attrNameLst>
+                                          <p:attrName>style.visibility</p:attrName>
+                                        </p:attrNameLst>
+                                      </p:cBhvr>
+                                      <p:to>
+                                        <p:strVal val="visible"/>
+                                      </p:to>
+                                    </p:set>
+                                    <p:animEffect transition="in" filter="fade">
+                                      <p:cBhvr>
+                                        <p:cTn id="64" dur="500"/>
+                                        <p:tgtEl>
+                                          <p:spTgt spid="34"/>
+                                        </p:tgtEl>
+                                      </p:cBhvr>
+                                    </p:animEffect>
+                                  </p:childTnLst>
+                                </p:cTn>
+                              </p:par>
+                            </p:childTnLst>
+                          </p:cTn>
+                        </p:par>
+                      </p:childTnLst>
+                    </p:cTn>
+                  </p:par>
+                  <p:par>
+                    <p:cTn id="65" fill="hold">
+                      <p:stCondLst>
+                        <p:cond delay="indefinite"/>
+                      </p:stCondLst>
+                      <p:childTnLst>
+                        <p:par>
+                          <p:cTn id="66" fill="hold">
+                            <p:stCondLst>
+                              <p:cond delay="0"/>
+                            </p:stCondLst>
+                            <p:childTnLst>
+                              <p:par>
+                                <p:cTn id="67" presetID="10" presetClass="entr" presetSubtype="0" fill="hold" grpId="0" nodeType="clickEffect">
+                                  <p:stCondLst>
+                                    <p:cond delay="0"/>
+                                  </p:stCondLst>
+                                  <p:childTnLst>
+                                    <p:set>
+                                      <p:cBhvr>
+                                        <p:cTn id="68" dur="1" fill="hold">
+                                          <p:stCondLst>
+                                            <p:cond delay="0"/>
+                                          </p:stCondLst>
+                                        </p:cTn>
+                                        <p:tgtEl>
+                                          <p:spTgt spid="37"/>
+                                        </p:tgtEl>
+                                        <p:attrNameLst>
+                                          <p:attrName>style.visibility</p:attrName>
+                                        </p:attrNameLst>
+                                      </p:cBhvr>
+                                      <p:to>
+                                        <p:strVal val="visible"/>
+                                      </p:to>
+                                    </p:set>
+                                    <p:animEffect transition="in" filter="fade">
+                                      <p:cBhvr>
+                                        <p:cTn id="69" dur="500"/>
+                                        <p:tgtEl>
+                                          <p:spTgt spid="37"/>
+                                        </p:tgtEl>
+                                      </p:cBhvr>
+                                    </p:animEffect>
+                                  </p:childTnLst>
+                                </p:cTn>
+                              </p:par>
+                            </p:childTnLst>
+                          </p:cTn>
+                        </p:par>
+                      </p:childTnLst>
+                    </p:cTn>
+                  </p:par>
+                  <p:par>
+                    <p:cTn id="70" fill="hold">
+                      <p:stCondLst>
+                        <p:cond delay="indefinite"/>
+                      </p:stCondLst>
+                      <p:childTnLst>
+                        <p:par>
+                          <p:cTn id="71" fill="hold">
+                            <p:stCondLst>
+                              <p:cond delay="0"/>
+                            </p:stCondLst>
+                            <p:childTnLst>
+                              <p:par>
+                                <p:cTn id="72" presetID="10" presetClass="entr" presetSubtype="0" fill="hold" grpId="0" nodeType="clickEffect">
+                                  <p:stCondLst>
+                                    <p:cond delay="0"/>
+                                  </p:stCondLst>
+                                  <p:childTnLst>
+                                    <p:set>
+                                      <p:cBhvr>
+                                        <p:cTn id="73" dur="1" fill="hold">
+                                          <p:stCondLst>
+                                            <p:cond delay="0"/>
+                                          </p:stCondLst>
+                                        </p:cTn>
+                                        <p:tgtEl>
+                                          <p:spTgt spid="38"/>
+                                        </p:tgtEl>
+                                        <p:attrNameLst>
+                                          <p:attrName>style.visibility</p:attrName>
+                                        </p:attrNameLst>
+                                      </p:cBhvr>
+                                      <p:to>
+                                        <p:strVal val="visible"/>
+                                      </p:to>
+                                    </p:set>
+                                    <p:animEffect transition="in" filter="fade">
+                                      <p:cBhvr>
+                                        <p:cTn id="74" dur="500"/>
+                                        <p:tgtEl>
+                                          <p:spTgt spid="38"/>
+                                        </p:tgtEl>
+                                      </p:cBhvr>
+                                    </p:animEffect>
+                                  </p:childTnLst>
+                                </p:cTn>
+                              </p:par>
+                            </p:childTnLst>
+                          </p:cTn>
+                        </p:par>
+                      </p:childTnLst>
+                    </p:cTn>
+                  </p:par>
+                  <p:par>
+                    <p:cTn id="75" fill="hold">
+                      <p:stCondLst>
+                        <p:cond delay="indefinite"/>
+                      </p:stCondLst>
+                      <p:childTnLst>
+                        <p:par>
+                          <p:cTn id="76" fill="hold">
+                            <p:stCondLst>
+                              <p:cond delay="0"/>
+                            </p:stCondLst>
+                            <p:childTnLst>
+                              <p:par>
+                                <p:cTn id="77" presetID="10" presetClass="entr" presetSubtype="0" fill="hold" grpId="0" nodeType="clickEffect">
+                                  <p:stCondLst>
+                                    <p:cond delay="0"/>
+                                  </p:stCondLst>
+                                  <p:childTnLst>
+                                    <p:set>
+                                      <p:cBhvr>
+                                        <p:cTn id="78" dur="1" fill="hold">
+                                          <p:stCondLst>
+                                            <p:cond delay="0"/>
+                                          </p:stCondLst>
+                                        </p:cTn>
+                                        <p:tgtEl>
+                                          <p:spTgt spid="41"/>
+                                        </p:tgtEl>
+                                        <p:attrNameLst>
+                                          <p:attrName>style.visibility</p:attrName>
+                                        </p:attrNameLst>
+                                      </p:cBhvr>
+                                      <p:to>
+                                        <p:strVal val="visible"/>
+                                      </p:to>
+                                    </p:set>
+                                    <p:animEffect transition="in" filter="fade">
+                                      <p:cBhvr>
+                                        <p:cTn id="79" dur="500"/>
+                                        <p:tgtEl>
+                                          <p:spTgt spid="41"/>
+                                        </p:tgtEl>
+                                      </p:cBhvr>
+                                    </p:animEffect>
+                                  </p:childTnLst>
+                                </p:cTn>
+                              </p:par>
+                            </p:childTnLst>
+                          </p:cTn>
+                        </p:par>
+                      </p:childTnLst>
+                    </p:cTn>
+                  </p:par>
+                  <p:par>
+                    <p:cTn id="80" fill="hold">
+                      <p:stCondLst>
+                        <p:cond delay="indefinite"/>
+                      </p:stCondLst>
+                      <p:childTnLst>
+                        <p:par>
+                          <p:cTn id="81" fill="hold">
+                            <p:stCondLst>
+                              <p:cond delay="0"/>
+                            </p:stCondLst>
+                            <p:childTnLst>
+                              <p:par>
+                                <p:cTn id="82" presetID="10" presetClass="entr" presetSubtype="0" fill="hold" grpId="0" nodeType="clickEffect">
+                                  <p:stCondLst>
+                                    <p:cond delay="0"/>
+                                  </p:stCondLst>
+                                  <p:childTnLst>
+                                    <p:set>
+                                      <p:cBhvr>
+                                        <p:cTn id="83" dur="1" fill="hold">
+                                          <p:stCondLst>
+                                            <p:cond delay="0"/>
+                                          </p:stCondLst>
+                                        </p:cTn>
+                                        <p:tgtEl>
+                                          <p:spTgt spid="42"/>
+                                        </p:tgtEl>
+                                        <p:attrNameLst>
+                                          <p:attrName>style.visibility</p:attrName>
+                                        </p:attrNameLst>
+                                      </p:cBhvr>
+                                      <p:to>
+                                        <p:strVal val="visible"/>
+                                      </p:to>
+                                    </p:set>
+                                    <p:animEffect transition="in" filter="fade">
+                                      <p:cBhvr>
+                                        <p:cTn id="84" dur="500"/>
+                                        <p:tgtEl>
+                                          <p:spTgt spid="42"/>
+                                        </p:tgtEl>
+                                      </p:cBhvr>
+                                    </p:animEffect>
+                                  </p:childTnLst>
+                                </p:cTn>
+                              </p:par>
+                            </p:childTnLst>
+                          </p:cTn>
+                        </p:par>
+                      </p:childTnLst>
+                    </p:cTn>
+                  </p:par>
+                </p:childTnLst>
+              </p:cTn>
+              <p:prevCondLst>
+                <p:cond evt="onPrev" delay="0">
+                  <p:tgtEl>
+                    <p:sldTgt/>
+                  </p:tgtEl>
+                </p:cond>
+              </p:prevCondLst>
+              <p:nextCondLst>
+                <p:cond evt="onNext" delay="0">
+                  <p:tgtEl>
+                    <p:sldTgt/>
+                  </p:tgtEl>
+                </p:cond>
+              </p:nextCondLst>
+            </p:seq>
+          </p:childTnLst>
+        </p:cTn>
+      </p:par>
+    </p:tnLst>
+  </p:timing>
+</p:sld>
+</file>
+
+<file path=ppt/slides/slide25.xml><?xml version="1.0" encoding="utf-8"?>
+<p:sld xmlns:a="http://schemas.openxmlformats.org/drawingml/2006/main" xmlns:p="http://schemas.openxmlformats.org/presentationml/2006/main" xmlns:r="http://schemas.openxmlformats.org/officeDocument/2006/relationships">
+  <p:cSld>
+    <p:spTree>
+      <p:nvGrpSpPr>
+        <p:cNvPr id="1" name=""/>
+        <p:cNvGrpSpPr/>
+        <p:nvPr/>
+      </p:nvGrpSpPr>
+      <p:grpSpPr/>
+      <p:sp>
+        <p:nvSpPr>
+          <p:cNvPr id="2" name="Fondo"/>
+          <p:cNvSpPr/>
+          <p:nvPr/>
+        </p:nvSpPr>
+        <p:spPr>
+          <a:xfrm>
+            <a:off x="0" y="0"/>
+            <a:ext cx="12191695" cy="6858000"/>
+          </a:xfrm>
+          <a:prstGeom prst="rect">
+            <a:avLst/>
+          </a:prstGeom>
+          <a:solidFill>
+            <a:srgbClr val="FCFBF8"/>
+          </a:solidFill>
+          <a:ln>
+            <a:noFill/>
+          </a:ln>
+          <a:effectLst/>
+        </p:spPr>
+        <p:style>
+          <a:lnRef idx="1">
+            <a:schemeClr val="accent1"/>
+          </a:lnRef>
+          <a:fillRef idx="3">
+            <a:schemeClr val="accent1"/>
+          </a:fillRef>
+          <a:effectRef idx="2">
+            <a:schemeClr val="accent1"/>
+          </a:effectRef>
+          <a:fontRef idx="minor">
+            <a:schemeClr val="lt1"/>
+          </a:fontRef>
+        </p:style>
+        <p:txBody>
+          <a:bodyPr rtlCol="0" anchor="ctr"/>
+          <a:lstStyle/>
+          <a:p/>
+        </p:txBody>
+      </p:sp>
+      <p:sp>
+        <p:nvSpPr>
+          <p:cNvPr id="3" name="Cabecera"/>
+          <p:cNvSpPr/>
+          <p:nvPr/>
+        </p:nvSpPr>
+        <p:spPr>
+          <a:xfrm>
+            <a:off x="0" y="0"/>
+            <a:ext cx="12191695" cy="1078992"/>
+          </a:xfrm>
+          <a:prstGeom prst="rect">
+            <a:avLst/>
+          </a:prstGeom>
+          <a:solidFill>
+            <a:srgbClr val="1E9E74"/>
+          </a:solidFill>
+          <a:ln>
+            <a:noFill/>
+          </a:ln>
+          <a:effectLst/>
+        </p:spPr>
+        <p:style>
+          <a:lnRef idx="1">
+            <a:schemeClr val="accent1"/>
+          </a:lnRef>
+          <a:fillRef idx="3">
+            <a:schemeClr val="accent1"/>
+          </a:fillRef>
+          <a:effectRef idx="2">
+            <a:schemeClr val="accent1"/>
+          </a:effectRef>
+          <a:fontRef idx="minor">
+            <a:schemeClr val="lt1"/>
+          </a:fontRef>
+        </p:style>
+        <p:txBody>
+          <a:bodyPr rtlCol="0" anchor="ctr"/>
+          <a:lstStyle/>
+          <a:p/>
+        </p:txBody>
+      </p:sp>
+      <p:sp>
+        <p:nvSpPr>
+          <p:cNvPr id="4" name="Chip"/>
+          <p:cNvSpPr/>
+          <p:nvPr/>
+        </p:nvSpPr>
+        <p:spPr>
+          <a:xfrm>
+            <a:off x="457200" y="182880"/>
+            <a:ext cx="3017520" cy="292608"/>
+          </a:xfrm>
+          <a:prstGeom prst="roundRect">
+            <a:avLst>
+              <a:gd name="adj" fmla="val 50000"/>
+            </a:avLst>
+          </a:prstGeom>
+          <a:solidFill>
+            <a:srgbClr val="FFFFFF"/>
+          </a:solidFill>
+          <a:ln>
+            <a:noFill/>
+          </a:ln>
+          <a:effectLst/>
+        </p:spPr>
+        <p:style>
+          <a:lnRef idx="1">
+            <a:schemeClr val="accent1"/>
+          </a:lnRef>
+          <a:fillRef idx="3">
+            <a:schemeClr val="accent1"/>
+          </a:fillRef>
+          <a:effectRef idx="2">
+            <a:schemeClr val="accent1"/>
+          </a:effectRef>
+          <a:fontRef idx="minor">
+            <a:schemeClr val="lt1"/>
+          </a:fontRef>
+        </p:style>
+        <p:txBody>
+          <a:bodyPr rtlCol="0" anchor="ctr"/>
+          <a:lstStyle/>
+          <a:p/>
+        </p:txBody>
+      </p:sp>
+      <p:sp>
+        <p:nvSpPr>
+          <p:cNvPr id="5" name="ChipTxt"/>
+          <p:cNvSpPr txBox="1"/>
+          <p:nvPr/>
+        </p:nvSpPr>
+        <p:spPr>
+          <a:xfrm>
+            <a:off x="457200" y="173736"/>
+            <a:ext cx="3017520" cy="310896"/>
+          </a:xfrm>
+          <a:prstGeom prst="rect">
+            <a:avLst/>
+          </a:prstGeom>
+          <a:noFill/>
+        </p:spPr>
+        <p:txBody>
+          <a:bodyPr wrap="square" anchor="ctr" lIns="45720" rIns="45720" tIns="27432" bIns="27432">
+            <a:normAutofit/>
+          </a:bodyPr>
+          <a:lstStyle/>
+          <a:p>
+            <a:pPr algn="ctr"/>
+            <a:r>
+              <a:rPr sz="950" b="1">
+                <a:solidFill>
+                  <a:srgbClr val="157355"/>
+                </a:solidFill>
+                <a:latin typeface="Inter"/>
+              </a:rPr>
+              <a:t>RETO 5 · PUZZEL &amp; ESCAPE</a:t>
+            </a:r>
+          </a:p>
+        </p:txBody>
+      </p:sp>
+      <p:sp>
+        <p:nvSpPr>
+          <p:cNvPr id="6" name="Titulo"/>
+          <p:cNvSpPr txBox="1"/>
+          <p:nvPr/>
+        </p:nvSpPr>
+        <p:spPr>
+          <a:xfrm>
+            <a:off x="457200" y="502920"/>
+            <a:ext cx="8412480" cy="475488"/>
+          </a:xfrm>
+          <a:prstGeom prst="rect">
+            <a:avLst/>
+          </a:prstGeom>
+          <a:noFill/>
+        </p:spPr>
+        <p:txBody>
+          <a:bodyPr wrap="square" anchor="t" lIns="45720" rIns="45720" tIns="27432" bIns="27432">
+            <a:normAutofit/>
+          </a:bodyPr>
+          <a:lstStyle/>
+          <a:p>
+            <a:pPr algn="l"/>
+            <a:r>
+              <a:rPr sz="2700" b="1">
+                <a:solidFill>
+                  <a:srgbClr val="FFFFFF"/>
+                </a:solidFill>
+                <a:latin typeface="Bricolage Grotesque"/>
+              </a:rPr>
+              <a:t>La tilde en el semáforo</a:t>
+            </a:r>
+          </a:p>
+        </p:txBody>
+      </p:sp>
+      <p:sp>
+        <p:nvSpPr>
+          <p:cNvPr id="7" name="Badges"/>
+          <p:cNvSpPr txBox="1"/>
+          <p:nvPr/>
+        </p:nvSpPr>
+        <p:spPr>
+          <a:xfrm>
+            <a:off x="9052560" y="256032"/>
+            <a:ext cx="2651760" cy="640080"/>
+          </a:xfrm>
+          <a:prstGeom prst="rect">
+            <a:avLst/>
+          </a:prstGeom>
+          <a:noFill/>
+        </p:spPr>
+        <p:txBody>
+          <a:bodyPr wrap="square" anchor="t" lIns="45720" rIns="45720" tIns="27432" bIns="27432">
+            <a:normAutofit/>
+          </a:bodyPr>
+          <a:lstStyle/>
+          <a:p>
+            <a:pPr algn="r"/>
+            <a:r>
+              <a:rPr sz="1000">
+                <a:solidFill>
+                  <a:srgbClr val="E4F4EE"/>
+                </a:solidFill>
+                <a:latin typeface="Inter"/>
+              </a:rPr>
+              <a:t>🏫 Toda la clase · de pie</a:t>
+            </a:r>
+          </a:p>
+          <a:p>
+            <a:pPr algn="r"/>
+            <a:r>
+              <a:rPr sz="1000">
+                <a:solidFill>
+                  <a:srgbClr val="E4F4EE"/>
+                </a:solidFill>
+                <a:latin typeface="Inter"/>
+              </a:rPr>
+              <a:t>± 10 min · ★★☆</a:t>
+            </a:r>
+          </a:p>
+        </p:txBody>
+      </p:sp>
+      <p:sp>
+        <p:nvSpPr>
+          <p:cNvPr id="8" name="Gancho"/>
+          <p:cNvSpPr txBox="1"/>
+          <p:nvPr/>
+        </p:nvSpPr>
+        <p:spPr>
+          <a:xfrm>
+            <a:off x="457200" y="1225296"/>
+            <a:ext cx="11274552" cy="566928"/>
+          </a:xfrm>
+          <a:prstGeom prst="rect">
+            <a:avLst/>
+          </a:prstGeom>
+          <a:noFill/>
+        </p:spPr>
+        <p:txBody>
+          <a:bodyPr wrap="square" anchor="t" lIns="45720" rIns="45720" tIns="27432" bIns="27432">
+            <a:normAutofit/>
+          </a:bodyPr>
+          <a:lstStyle/>
+          <a:p>
+            <a:pPr algn="l"/>
+            <a:r>
+              <a:rPr sz="1600" b="1">
+                <a:solidFill>
+                  <a:srgbClr val="157355"/>
+                </a:solidFill>
+                <a:latin typeface="Bricolage Grotesque"/>
+              </a:rPr>
+              <a:t>De pie. La clase es un semáforo: izquierda, centro, derecha.</a:t>
+            </a:r>
+          </a:p>
+          <a:p>
+            <a:pPr algn="l"/>
+            <a:r>
+              <a:rPr sz="1100" i="1">
+                <a:solidFill>
+                  <a:srgbClr val="6A6E78"/>
+                </a:solidFill>
+                <a:latin typeface="Inter"/>
+              </a:rPr>
+              <a:t>Rechtstaan. De klas is een verkeerslicht: links, midden, rechts.</a:t>
+            </a:r>
+          </a:p>
+        </p:txBody>
+      </p:sp>
+      <p:sp>
+        <p:nvSpPr>
+          <p:cNvPr id="9" name="ReglaCaja"/>
+          <p:cNvSpPr/>
+          <p:nvPr/>
+        </p:nvSpPr>
+        <p:spPr>
+          <a:xfrm>
+            <a:off x="457200" y="1847088"/>
+            <a:ext cx="11274552" cy="658368"/>
+          </a:xfrm>
+          <a:prstGeom prst="roundRect">
+            <a:avLst>
+              <a:gd name="adj" fmla="val 5000"/>
+            </a:avLst>
+          </a:prstGeom>
+          <a:solidFill>
+            <a:srgbClr val="FBF3D6"/>
+          </a:solidFill>
+          <a:ln>
+            <a:noFill/>
+          </a:ln>
+          <a:effectLst/>
+        </p:spPr>
+        <p:style>
+          <a:lnRef idx="1">
+            <a:schemeClr val="accent1"/>
+          </a:lnRef>
+          <a:fillRef idx="3">
+            <a:schemeClr val="accent1"/>
+          </a:fillRef>
+          <a:effectRef idx="2">
+            <a:schemeClr val="accent1"/>
+          </a:effectRef>
+          <a:fontRef idx="minor">
+            <a:schemeClr val="lt1"/>
+          </a:fontRef>
+        </p:style>
+        <p:txBody>
+          <a:bodyPr rtlCol="0" anchor="ctr"/>
+          <a:lstStyle/>
+          <a:p/>
+        </p:txBody>
+      </p:sp>
+      <p:sp>
+        <p:nvSpPr>
+          <p:cNvPr id="10" name="ReglaTxt"/>
+          <p:cNvSpPr txBox="1"/>
+          <p:nvPr/>
+        </p:nvSpPr>
+        <p:spPr>
+          <a:xfrm>
+            <a:off x="603504" y="1883664"/>
+            <a:ext cx="10972800" cy="585216"/>
+          </a:xfrm>
+          <a:prstGeom prst="rect">
+            <a:avLst/>
+          </a:prstGeom>
+          <a:noFill/>
+        </p:spPr>
+        <p:txBody>
+          <a:bodyPr wrap="square" anchor="t" lIns="45720" rIns="45720" tIns="27432" bIns="27432">
+            <a:normAutofit/>
+          </a:bodyPr>
+          <a:lstStyle/>
+          <a:p>
+            <a:pPr algn="l"/>
+            <a:r>
+              <a:rPr sz="850" b="1">
+                <a:solidFill>
+                  <a:srgbClr val="B7860B"/>
+                </a:solidFill>
+                <a:latin typeface="Inter"/>
+              </a:rPr>
+              <a:t>LA REGLA DEL RETO</a:t>
+            </a:r>
+          </a:p>
+          <a:p>
+            <a:pPr algn="l"/>
+            <a:r>
+              <a:rPr sz="1100">
+                <a:solidFill>
+                  <a:srgbClr val="20242E"/>
+                </a:solidFill>
+                <a:latin typeface="Inter"/>
+              </a:rPr>
+              <a:t>Je beslist op wat je hóórt, niet op wat je ziet — het woord staat pas op het scherm ná de beslissing. Wie te laat is, gaat zitten.</a:t>
+            </a:r>
+          </a:p>
+        </p:txBody>
+      </p:sp>
+      <p:sp>
+        <p:nvSpPr>
+          <p:cNvPr id="11" name="Tarjeta 0"/>
+          <p:cNvSpPr/>
+          <p:nvPr/>
+        </p:nvSpPr>
+        <p:spPr>
+          <a:xfrm>
+            <a:off x="457200" y="2670048"/>
+            <a:ext cx="2708910" cy="898398"/>
+          </a:xfrm>
+          <a:prstGeom prst="roundRect">
+            <a:avLst>
+              <a:gd name="adj" fmla="val 6000"/>
+            </a:avLst>
+          </a:prstGeom>
+          <a:solidFill>
+            <a:srgbClr val="FFFFFF"/>
+          </a:solidFill>
+          <a:ln w="12700">
+            <a:solidFill>
+              <a:srgbClr val="E4E3DE"/>
+            </a:solidFill>
+          </a:ln>
+          <a:effectLst/>
+        </p:spPr>
+        <p:style>
+          <a:lnRef idx="1">
+            <a:schemeClr val="accent1"/>
+          </a:lnRef>
+          <a:fillRef idx="3">
+            <a:schemeClr val="accent1"/>
+          </a:fillRef>
+          <a:effectRef idx="2">
+            <a:schemeClr val="accent1"/>
+          </a:effectRef>
+          <a:fontRef idx="minor">
+            <a:schemeClr val="lt1"/>
+          </a:fontRef>
+        </p:style>
+        <p:txBody>
+          <a:bodyPr rtlCol="0" anchor="ctr"/>
+          <a:lstStyle/>
+          <a:p/>
+        </p:txBody>
+      </p:sp>
+      <p:sp>
+        <p:nvSpPr>
+          <p:cNvPr id="12" name="TarjetaTxt 0"/>
+          <p:cNvSpPr txBox="1"/>
+          <p:nvPr/>
+        </p:nvSpPr>
+        <p:spPr>
+          <a:xfrm>
+            <a:off x="548640" y="2724912"/>
+            <a:ext cx="2526030" cy="587502"/>
+          </a:xfrm>
+          <a:prstGeom prst="rect">
+            <a:avLst/>
+          </a:prstGeom>
+          <a:noFill/>
+        </p:spPr>
+        <p:txBody>
+          <a:bodyPr wrap="square" anchor="t" lIns="45720" rIns="45720" tIns="27432" bIns="27432">
+            <a:normAutofit/>
+          </a:bodyPr>
+          <a:lstStyle/>
+          <a:p>
+            <a:pPr algn="l"/>
+            <a:r>
+              <a:rPr sz="1100" b="1">
+                <a:solidFill>
+                  <a:srgbClr val="157355"/>
+                </a:solidFill>
+                <a:latin typeface="Bricolage Grotesque"/>
+              </a:rPr>
+              <a:t>café</a:t>
+            </a:r>
+          </a:p>
+        </p:txBody>
+      </p:sp>
+      <p:sp>
+        <p:nvSpPr>
+          <p:cNvPr id="13" name="Onthul 0"/>
+          <p:cNvSpPr/>
+          <p:nvPr/>
+        </p:nvSpPr>
+        <p:spPr>
+          <a:xfrm>
+            <a:off x="548640" y="3275838"/>
+            <a:ext cx="2526030" cy="237744"/>
+          </a:xfrm>
+          <a:prstGeom prst="roundRect">
+            <a:avLst>
+              <a:gd name="adj" fmla="val 20000"/>
+            </a:avLst>
+          </a:prstGeom>
+          <a:solidFill>
+            <a:srgbClr val="E4F4EE"/>
+          </a:solidFill>
+          <a:ln>
+            <a:noFill/>
+          </a:ln>
+          <a:effectLst/>
+        </p:spPr>
+        <p:style>
+          <a:lnRef idx="1">
+            <a:schemeClr val="accent1"/>
+          </a:lnRef>
+          <a:fillRef idx="3">
+            <a:schemeClr val="accent1"/>
+          </a:fillRef>
+          <a:effectRef idx="2">
+            <a:schemeClr val="accent1"/>
+          </a:effectRef>
+          <a:fontRef idx="minor">
+            <a:schemeClr val="lt1"/>
+          </a:fontRef>
+        </p:style>
+        <p:txBody>
+          <a:bodyPr rtlCol="0" anchor="ctr"/>
+          <a:lstStyle/>
+          <a:p/>
+        </p:txBody>
+      </p:sp>
+      <p:sp>
+        <p:nvSpPr>
+          <p:cNvPr id="14" name="OnthulTxt 0"/>
+          <p:cNvSpPr txBox="1"/>
+          <p:nvPr/>
+        </p:nvSpPr>
+        <p:spPr>
+          <a:xfrm>
+            <a:off x="566928" y="3275838"/>
+            <a:ext cx="2489454" cy="237744"/>
+          </a:xfrm>
+          <a:prstGeom prst="rect">
+            <a:avLst/>
+          </a:prstGeom>
+          <a:noFill/>
+        </p:spPr>
+        <p:txBody>
+          <a:bodyPr wrap="square" anchor="ctr" lIns="45720" rIns="45720" tIns="27432" bIns="27432">
+            <a:normAutofit/>
+          </a:bodyPr>
+          <a:lstStyle/>
+          <a:p>
+            <a:pPr algn="l"/>
+            <a:r>
+              <a:rPr sz="850" b="1">
+                <a:solidFill>
+                  <a:srgbClr val="157355"/>
+                </a:solidFill>
+                <a:latin typeface="Inter"/>
+              </a:rPr>
+              <a:t>aguda — «fé»</a:t>
+            </a:r>
+          </a:p>
+        </p:txBody>
+      </p:sp>
+      <p:sp>
+        <p:nvSpPr>
+          <p:cNvPr id="15" name="Tarjeta 1"/>
+          <p:cNvSpPr/>
+          <p:nvPr/>
+        </p:nvSpPr>
+        <p:spPr>
+          <a:xfrm>
+            <a:off x="3312414" y="2670048"/>
+            <a:ext cx="2708910" cy="898398"/>
+          </a:xfrm>
+          <a:prstGeom prst="roundRect">
+            <a:avLst>
+              <a:gd name="adj" fmla="val 6000"/>
+            </a:avLst>
+          </a:prstGeom>
+          <a:solidFill>
+            <a:srgbClr val="FFFFFF"/>
+          </a:solidFill>
+          <a:ln w="12700">
+            <a:solidFill>
+              <a:srgbClr val="E4E3DE"/>
+            </a:solidFill>
+          </a:ln>
+          <a:effectLst/>
+        </p:spPr>
+        <p:style>
+          <a:lnRef idx="1">
+            <a:schemeClr val="accent1"/>
+          </a:lnRef>
+          <a:fillRef idx="3">
+            <a:schemeClr val="accent1"/>
+          </a:fillRef>
+          <a:effectRef idx="2">
+            <a:schemeClr val="accent1"/>
+          </a:effectRef>
+          <a:fontRef idx="minor">
+            <a:schemeClr val="lt1"/>
+          </a:fontRef>
+        </p:style>
+        <p:txBody>
+          <a:bodyPr rtlCol="0" anchor="ctr"/>
+          <a:lstStyle/>
+          <a:p/>
+        </p:txBody>
+      </p:sp>
+      <p:sp>
+        <p:nvSpPr>
+          <p:cNvPr id="16" name="TarjetaTxt 1"/>
+          <p:cNvSpPr txBox="1"/>
+          <p:nvPr/>
+        </p:nvSpPr>
+        <p:spPr>
+          <a:xfrm>
+            <a:off x="3403854" y="2724912"/>
+            <a:ext cx="2526030" cy="587502"/>
+          </a:xfrm>
+          <a:prstGeom prst="rect">
+            <a:avLst/>
+          </a:prstGeom>
+          <a:noFill/>
+        </p:spPr>
+        <p:txBody>
+          <a:bodyPr wrap="square" anchor="t" lIns="45720" rIns="45720" tIns="27432" bIns="27432">
+            <a:normAutofit/>
+          </a:bodyPr>
+          <a:lstStyle/>
+          <a:p>
+            <a:pPr algn="l"/>
+            <a:r>
+              <a:rPr sz="1100" b="1">
+                <a:solidFill>
+                  <a:srgbClr val="157355"/>
+                </a:solidFill>
+                <a:latin typeface="Bricolage Grotesque"/>
+              </a:rPr>
+              <a:t>casa</a:t>
+            </a:r>
+          </a:p>
+        </p:txBody>
+      </p:sp>
+      <p:sp>
+        <p:nvSpPr>
+          <p:cNvPr id="17" name="Onthul 1"/>
+          <p:cNvSpPr/>
+          <p:nvPr/>
+        </p:nvSpPr>
+        <p:spPr>
+          <a:xfrm>
+            <a:off x="3403854" y="3275838"/>
+            <a:ext cx="2526030" cy="237744"/>
+          </a:xfrm>
+          <a:prstGeom prst="roundRect">
+            <a:avLst>
+              <a:gd name="adj" fmla="val 20000"/>
+            </a:avLst>
+          </a:prstGeom>
+          <a:solidFill>
+            <a:srgbClr val="E4F4EE"/>
+          </a:solidFill>
+          <a:ln>
+            <a:noFill/>
+          </a:ln>
+          <a:effectLst/>
+        </p:spPr>
+        <p:style>
+          <a:lnRef idx="1">
+            <a:schemeClr val="accent1"/>
+          </a:lnRef>
+          <a:fillRef idx="3">
+            <a:schemeClr val="accent1"/>
+          </a:fillRef>
+          <a:effectRef idx="2">
+            <a:schemeClr val="accent1"/>
+          </a:effectRef>
+          <a:fontRef idx="minor">
+            <a:schemeClr val="lt1"/>
+          </a:fontRef>
+        </p:style>
+        <p:txBody>
+          <a:bodyPr rtlCol="0" anchor="ctr"/>
+          <a:lstStyle/>
+          <a:p/>
+        </p:txBody>
+      </p:sp>
+      <p:sp>
+        <p:nvSpPr>
+          <p:cNvPr id="18" name="OnthulTxt 1"/>
+          <p:cNvSpPr txBox="1"/>
+          <p:nvPr/>
+        </p:nvSpPr>
+        <p:spPr>
+          <a:xfrm>
+            <a:off x="3422142" y="3275838"/>
+            <a:ext cx="2489454" cy="237744"/>
+          </a:xfrm>
+          <a:prstGeom prst="rect">
+            <a:avLst/>
+          </a:prstGeom>
+          <a:noFill/>
+        </p:spPr>
+        <p:txBody>
+          <a:bodyPr wrap="square" anchor="ctr" lIns="45720" rIns="45720" tIns="27432" bIns="27432">
+            <a:normAutofit/>
+          </a:bodyPr>
+          <a:lstStyle/>
+          <a:p>
+            <a:pPr algn="l"/>
+            <a:r>
+              <a:rPr sz="850" b="1">
+                <a:solidFill>
+                  <a:srgbClr val="157355"/>
+                </a:solidFill>
+                <a:latin typeface="Inter"/>
+              </a:rPr>
+              <a:t>llana — «ca»</a:t>
+            </a:r>
+          </a:p>
+        </p:txBody>
+      </p:sp>
+      <p:sp>
+        <p:nvSpPr>
+          <p:cNvPr id="19" name="Tarjeta 2"/>
+          <p:cNvSpPr/>
+          <p:nvPr/>
+        </p:nvSpPr>
+        <p:spPr>
+          <a:xfrm>
+            <a:off x="6167628" y="2670048"/>
+            <a:ext cx="2708910" cy="898398"/>
+          </a:xfrm>
+          <a:prstGeom prst="roundRect">
+            <a:avLst>
+              <a:gd name="adj" fmla="val 6000"/>
+            </a:avLst>
+          </a:prstGeom>
+          <a:solidFill>
+            <a:srgbClr val="FFFFFF"/>
+          </a:solidFill>
+          <a:ln w="12700">
+            <a:solidFill>
+              <a:srgbClr val="E4E3DE"/>
+            </a:solidFill>
+          </a:ln>
+          <a:effectLst/>
+        </p:spPr>
+        <p:style>
+          <a:lnRef idx="1">
+            <a:schemeClr val="accent1"/>
+          </a:lnRef>
+          <a:fillRef idx="3">
+            <a:schemeClr val="accent1"/>
+          </a:fillRef>
+          <a:effectRef idx="2">
+            <a:schemeClr val="accent1"/>
+          </a:effectRef>
+          <a:fontRef idx="minor">
+            <a:schemeClr val="lt1"/>
+          </a:fontRef>
+        </p:style>
+        <p:txBody>
+          <a:bodyPr rtlCol="0" anchor="ctr"/>
+          <a:lstStyle/>
+          <a:p/>
+        </p:txBody>
+      </p:sp>
+      <p:sp>
+        <p:nvSpPr>
+          <p:cNvPr id="20" name="TarjetaTxt 2"/>
+          <p:cNvSpPr txBox="1"/>
+          <p:nvPr/>
+        </p:nvSpPr>
+        <p:spPr>
+          <a:xfrm>
+            <a:off x="6259068" y="2724912"/>
+            <a:ext cx="2526030" cy="587502"/>
+          </a:xfrm>
+          <a:prstGeom prst="rect">
+            <a:avLst/>
+          </a:prstGeom>
+          <a:noFill/>
+        </p:spPr>
+        <p:txBody>
+          <a:bodyPr wrap="square" anchor="t" lIns="45720" rIns="45720" tIns="27432" bIns="27432">
+            <a:normAutofit/>
+          </a:bodyPr>
+          <a:lstStyle/>
+          <a:p>
+            <a:pPr algn="l"/>
+            <a:r>
+              <a:rPr sz="1100" b="1">
+                <a:solidFill>
+                  <a:srgbClr val="157355"/>
+                </a:solidFill>
+                <a:latin typeface="Bricolage Grotesque"/>
+              </a:rPr>
+              <a:t>México</a:t>
+            </a:r>
+          </a:p>
+        </p:txBody>
+      </p:sp>
+      <p:sp>
+        <p:nvSpPr>
+          <p:cNvPr id="21" name="Onthul 2"/>
+          <p:cNvSpPr/>
+          <p:nvPr/>
+        </p:nvSpPr>
+        <p:spPr>
+          <a:xfrm>
+            <a:off x="6259068" y="3275838"/>
+            <a:ext cx="2526030" cy="237744"/>
+          </a:xfrm>
+          <a:prstGeom prst="roundRect">
+            <a:avLst>
+              <a:gd name="adj" fmla="val 20000"/>
+            </a:avLst>
+          </a:prstGeom>
+          <a:solidFill>
+            <a:srgbClr val="E4F4EE"/>
+          </a:solidFill>
+          <a:ln>
+            <a:noFill/>
+          </a:ln>
+          <a:effectLst/>
+        </p:spPr>
+        <p:style>
+          <a:lnRef idx="1">
+            <a:schemeClr val="accent1"/>
+          </a:lnRef>
+          <a:fillRef idx="3">
+            <a:schemeClr val="accent1"/>
+          </a:fillRef>
+          <a:effectRef idx="2">
+            <a:schemeClr val="accent1"/>
+          </a:effectRef>
+          <a:fontRef idx="minor">
+            <a:schemeClr val="lt1"/>
+          </a:fontRef>
+        </p:style>
+        <p:txBody>
+          <a:bodyPr rtlCol="0" anchor="ctr"/>
+          <a:lstStyle/>
+          <a:p/>
+        </p:txBody>
+      </p:sp>
+      <p:sp>
+        <p:nvSpPr>
+          <p:cNvPr id="22" name="OnthulTxt 2"/>
+          <p:cNvSpPr txBox="1"/>
+          <p:nvPr/>
+        </p:nvSpPr>
+        <p:spPr>
+          <a:xfrm>
+            <a:off x="6277356" y="3275838"/>
+            <a:ext cx="2489454" cy="237744"/>
+          </a:xfrm>
+          <a:prstGeom prst="rect">
+            <a:avLst/>
+          </a:prstGeom>
+          <a:noFill/>
+        </p:spPr>
+        <p:txBody>
+          <a:bodyPr wrap="square" anchor="ctr" lIns="45720" rIns="45720" tIns="27432" bIns="27432">
+            <a:normAutofit/>
+          </a:bodyPr>
+          <a:lstStyle/>
+          <a:p>
+            <a:pPr algn="l"/>
+            <a:r>
+              <a:rPr sz="850" b="1">
+                <a:solidFill>
+                  <a:srgbClr val="157355"/>
+                </a:solidFill>
+                <a:latin typeface="Inter"/>
+              </a:rPr>
+              <a:t>esdrújula — «Mé»</a:t>
+            </a:r>
+          </a:p>
+        </p:txBody>
+      </p:sp>
+      <p:sp>
+        <p:nvSpPr>
+          <p:cNvPr id="23" name="Tarjeta 3"/>
+          <p:cNvSpPr/>
+          <p:nvPr/>
+        </p:nvSpPr>
+        <p:spPr>
+          <a:xfrm>
+            <a:off x="9022842" y="2670048"/>
+            <a:ext cx="2708910" cy="898398"/>
+          </a:xfrm>
+          <a:prstGeom prst="roundRect">
+            <a:avLst>
+              <a:gd name="adj" fmla="val 6000"/>
+            </a:avLst>
+          </a:prstGeom>
+          <a:solidFill>
+            <a:srgbClr val="FFFFFF"/>
+          </a:solidFill>
+          <a:ln w="12700">
+            <a:solidFill>
+              <a:srgbClr val="E4E3DE"/>
+            </a:solidFill>
+          </a:ln>
+          <a:effectLst/>
+        </p:spPr>
+        <p:style>
+          <a:lnRef idx="1">
+            <a:schemeClr val="accent1"/>
+          </a:lnRef>
+          <a:fillRef idx="3">
+            <a:schemeClr val="accent1"/>
+          </a:fillRef>
+          <a:effectRef idx="2">
+            <a:schemeClr val="accent1"/>
+          </a:effectRef>
+          <a:fontRef idx="minor">
+            <a:schemeClr val="lt1"/>
+          </a:fontRef>
+        </p:style>
+        <p:txBody>
+          <a:bodyPr rtlCol="0" anchor="ctr"/>
+          <a:lstStyle/>
+          <a:p/>
+        </p:txBody>
+      </p:sp>
+      <p:sp>
+        <p:nvSpPr>
+          <p:cNvPr id="24" name="TarjetaTxt 3"/>
+          <p:cNvSpPr txBox="1"/>
+          <p:nvPr/>
+        </p:nvSpPr>
+        <p:spPr>
+          <a:xfrm>
+            <a:off x="9114282" y="2724912"/>
+            <a:ext cx="2526030" cy="587502"/>
+          </a:xfrm>
+          <a:prstGeom prst="rect">
+            <a:avLst/>
+          </a:prstGeom>
+          <a:noFill/>
+        </p:spPr>
+        <p:txBody>
+          <a:bodyPr wrap="square" anchor="t" lIns="45720" rIns="45720" tIns="27432" bIns="27432">
+            <a:normAutofit/>
+          </a:bodyPr>
+          <a:lstStyle/>
+          <a:p>
+            <a:pPr algn="l"/>
+            <a:r>
+              <a:rPr sz="1100" b="1">
+                <a:solidFill>
+                  <a:srgbClr val="157355"/>
+                </a:solidFill>
+                <a:latin typeface="Bricolage Grotesque"/>
+              </a:rPr>
+              <a:t>teléfono</a:t>
+            </a:r>
+          </a:p>
+        </p:txBody>
+      </p:sp>
+      <p:sp>
+        <p:nvSpPr>
+          <p:cNvPr id="25" name="Onthul 3"/>
+          <p:cNvSpPr/>
+          <p:nvPr/>
+        </p:nvSpPr>
+        <p:spPr>
+          <a:xfrm>
+            <a:off x="9114282" y="3275838"/>
+            <a:ext cx="2526030" cy="237744"/>
+          </a:xfrm>
+          <a:prstGeom prst="roundRect">
+            <a:avLst>
+              <a:gd name="adj" fmla="val 20000"/>
+            </a:avLst>
+          </a:prstGeom>
+          <a:solidFill>
+            <a:srgbClr val="E4F4EE"/>
+          </a:solidFill>
+          <a:ln>
+            <a:noFill/>
+          </a:ln>
+          <a:effectLst/>
+        </p:spPr>
+        <p:style>
+          <a:lnRef idx="1">
+            <a:schemeClr val="accent1"/>
+          </a:lnRef>
+          <a:fillRef idx="3">
+            <a:schemeClr val="accent1"/>
+          </a:fillRef>
+          <a:effectRef idx="2">
+            <a:schemeClr val="accent1"/>
+          </a:effectRef>
+          <a:fontRef idx="minor">
+            <a:schemeClr val="lt1"/>
+          </a:fontRef>
+        </p:style>
+        <p:txBody>
+          <a:bodyPr rtlCol="0" anchor="ctr"/>
+          <a:lstStyle/>
+          <a:p/>
+        </p:txBody>
+      </p:sp>
+      <p:sp>
+        <p:nvSpPr>
+          <p:cNvPr id="26" name="OnthulTxt 3"/>
+          <p:cNvSpPr txBox="1"/>
+          <p:nvPr/>
+        </p:nvSpPr>
+        <p:spPr>
+          <a:xfrm>
+            <a:off x="9132570" y="3275838"/>
+            <a:ext cx="2489454" cy="237744"/>
+          </a:xfrm>
+          <a:prstGeom prst="rect">
+            <a:avLst/>
+          </a:prstGeom>
+          <a:noFill/>
+        </p:spPr>
+        <p:txBody>
+          <a:bodyPr wrap="square" anchor="ctr" lIns="45720" rIns="45720" tIns="27432" bIns="27432">
+            <a:normAutofit/>
+          </a:bodyPr>
+          <a:lstStyle/>
+          <a:p>
+            <a:pPr algn="l"/>
+            <a:r>
+              <a:rPr sz="850" b="1">
+                <a:solidFill>
+                  <a:srgbClr val="157355"/>
+                </a:solidFill>
+                <a:latin typeface="Inter"/>
+              </a:rPr>
+              <a:t>esdrújula — «lé»</a:t>
+            </a:r>
+          </a:p>
+        </p:txBody>
+      </p:sp>
+      <p:sp>
+        <p:nvSpPr>
+          <p:cNvPr id="27" name="Tarjeta 4"/>
+          <p:cNvSpPr/>
+          <p:nvPr/>
+        </p:nvSpPr>
+        <p:spPr>
+          <a:xfrm>
+            <a:off x="457200" y="3696462"/>
+            <a:ext cx="2708910" cy="898398"/>
+          </a:xfrm>
+          <a:prstGeom prst="roundRect">
+            <a:avLst>
+              <a:gd name="adj" fmla="val 6000"/>
+            </a:avLst>
+          </a:prstGeom>
+          <a:solidFill>
+            <a:srgbClr val="FFFFFF"/>
+          </a:solidFill>
+          <a:ln w="12700">
+            <a:solidFill>
+              <a:srgbClr val="E4E3DE"/>
+            </a:solidFill>
+          </a:ln>
+          <a:effectLst/>
+        </p:spPr>
+        <p:style>
+          <a:lnRef idx="1">
+            <a:schemeClr val="accent1"/>
+          </a:lnRef>
+          <a:fillRef idx="3">
+            <a:schemeClr val="accent1"/>
+          </a:fillRef>
+          <a:effectRef idx="2">
+            <a:schemeClr val="accent1"/>
+          </a:effectRef>
+          <a:fontRef idx="minor">
+            <a:schemeClr val="lt1"/>
+          </a:fontRef>
+        </p:style>
+        <p:txBody>
+          <a:bodyPr rtlCol="0" anchor="ctr"/>
+          <a:lstStyle/>
+          <a:p/>
+        </p:txBody>
+      </p:sp>
+      <p:sp>
+        <p:nvSpPr>
+          <p:cNvPr id="28" name="TarjetaTxt 4"/>
+          <p:cNvSpPr txBox="1"/>
+          <p:nvPr/>
+        </p:nvSpPr>
+        <p:spPr>
+          <a:xfrm>
+            <a:off x="548640" y="3751326"/>
+            <a:ext cx="2526030" cy="587502"/>
+          </a:xfrm>
+          <a:prstGeom prst="rect">
+            <a:avLst/>
+          </a:prstGeom>
+          <a:noFill/>
+        </p:spPr>
+        <p:txBody>
+          <a:bodyPr wrap="square" anchor="t" lIns="45720" rIns="45720" tIns="27432" bIns="27432">
+            <a:normAutofit/>
+          </a:bodyPr>
+          <a:lstStyle/>
+          <a:p>
+            <a:pPr algn="l"/>
+            <a:r>
+              <a:rPr sz="1100" b="1">
+                <a:solidFill>
+                  <a:srgbClr val="157355"/>
+                </a:solidFill>
+                <a:latin typeface="Bricolage Grotesque"/>
+              </a:rPr>
+              <a:t>Perú</a:t>
+            </a:r>
+          </a:p>
+        </p:txBody>
+      </p:sp>
+      <p:sp>
+        <p:nvSpPr>
+          <p:cNvPr id="29" name="Onthul 4"/>
+          <p:cNvSpPr/>
+          <p:nvPr/>
+        </p:nvSpPr>
+        <p:spPr>
+          <a:xfrm>
+            <a:off x="548640" y="4302252"/>
+            <a:ext cx="2526030" cy="237744"/>
+          </a:xfrm>
+          <a:prstGeom prst="roundRect">
+            <a:avLst>
+              <a:gd name="adj" fmla="val 20000"/>
+            </a:avLst>
+          </a:prstGeom>
+          <a:solidFill>
+            <a:srgbClr val="E4F4EE"/>
+          </a:solidFill>
+          <a:ln>
+            <a:noFill/>
+          </a:ln>
+          <a:effectLst/>
+        </p:spPr>
+        <p:style>
+          <a:lnRef idx="1">
+            <a:schemeClr val="accent1"/>
+          </a:lnRef>
+          <a:fillRef idx="3">
+            <a:schemeClr val="accent1"/>
+          </a:fillRef>
+          <a:effectRef idx="2">
+            <a:schemeClr val="accent1"/>
+          </a:effectRef>
+          <a:fontRef idx="minor">
+            <a:schemeClr val="lt1"/>
+          </a:fontRef>
+        </p:style>
+        <p:txBody>
+          <a:bodyPr rtlCol="0" anchor="ctr"/>
+          <a:lstStyle/>
+          <a:p/>
+        </p:txBody>
+      </p:sp>
+      <p:sp>
+        <p:nvSpPr>
+          <p:cNvPr id="30" name="OnthulTxt 4"/>
+          <p:cNvSpPr txBox="1"/>
+          <p:nvPr/>
+        </p:nvSpPr>
+        <p:spPr>
+          <a:xfrm>
+            <a:off x="566928" y="4302252"/>
+            <a:ext cx="2489454" cy="237744"/>
+          </a:xfrm>
+          <a:prstGeom prst="rect">
+            <a:avLst/>
+          </a:prstGeom>
+          <a:noFill/>
+        </p:spPr>
+        <p:txBody>
+          <a:bodyPr wrap="square" anchor="ctr" lIns="45720" rIns="45720" tIns="27432" bIns="27432">
+            <a:normAutofit/>
+          </a:bodyPr>
+          <a:lstStyle/>
+          <a:p>
+            <a:pPr algn="l"/>
+            <a:r>
+              <a:rPr sz="850" b="1">
+                <a:solidFill>
+                  <a:srgbClr val="157355"/>
+                </a:solidFill>
+                <a:latin typeface="Inter"/>
+              </a:rPr>
+              <a:t>aguda — «rú»</a:t>
+            </a:r>
+          </a:p>
+        </p:txBody>
+      </p:sp>
+      <p:sp>
+        <p:nvSpPr>
+          <p:cNvPr id="31" name="Tarjeta 5"/>
+          <p:cNvSpPr/>
+          <p:nvPr/>
+        </p:nvSpPr>
+        <p:spPr>
+          <a:xfrm>
+            <a:off x="3312414" y="3696462"/>
+            <a:ext cx="2708910" cy="898398"/>
+          </a:xfrm>
+          <a:prstGeom prst="roundRect">
+            <a:avLst>
+              <a:gd name="adj" fmla="val 6000"/>
+            </a:avLst>
+          </a:prstGeom>
+          <a:solidFill>
+            <a:srgbClr val="FFFFFF"/>
+          </a:solidFill>
+          <a:ln w="12700">
+            <a:solidFill>
+              <a:srgbClr val="E4E3DE"/>
+            </a:solidFill>
+          </a:ln>
+          <a:effectLst/>
+        </p:spPr>
+        <p:style>
+          <a:lnRef idx="1">
+            <a:schemeClr val="accent1"/>
+          </a:lnRef>
+          <a:fillRef idx="3">
+            <a:schemeClr val="accent1"/>
+          </a:fillRef>
+          <a:effectRef idx="2">
+            <a:schemeClr val="accent1"/>
+          </a:effectRef>
+          <a:fontRef idx="minor">
+            <a:schemeClr val="lt1"/>
+          </a:fontRef>
+        </p:style>
+        <p:txBody>
+          <a:bodyPr rtlCol="0" anchor="ctr"/>
+          <a:lstStyle/>
+          <a:p/>
+        </p:txBody>
+      </p:sp>
+      <p:sp>
+        <p:nvSpPr>
+          <p:cNvPr id="32" name="TarjetaTxt 5"/>
+          <p:cNvSpPr txBox="1"/>
+          <p:nvPr/>
+        </p:nvSpPr>
+        <p:spPr>
+          <a:xfrm>
+            <a:off x="3403854" y="3751326"/>
+            <a:ext cx="2526030" cy="587502"/>
+          </a:xfrm>
+          <a:prstGeom prst="rect">
+            <a:avLst/>
+          </a:prstGeom>
+          <a:noFill/>
+        </p:spPr>
+        <p:txBody>
+          <a:bodyPr wrap="square" anchor="t" lIns="45720" rIns="45720" tIns="27432" bIns="27432">
+            <a:normAutofit/>
+          </a:bodyPr>
+          <a:lstStyle/>
+          <a:p>
+            <a:pPr algn="l"/>
+            <a:r>
+              <a:rPr sz="1100" b="1">
+                <a:solidFill>
+                  <a:srgbClr val="157355"/>
+                </a:solidFill>
+                <a:latin typeface="Bricolage Grotesque"/>
+              </a:rPr>
+              <a:t>número</a:t>
+            </a:r>
+          </a:p>
+        </p:txBody>
+      </p:sp>
+      <p:sp>
+        <p:nvSpPr>
+          <p:cNvPr id="33" name="Onthul 5"/>
+          <p:cNvSpPr/>
+          <p:nvPr/>
+        </p:nvSpPr>
+        <p:spPr>
+          <a:xfrm>
+            <a:off x="3403854" y="4302252"/>
+            <a:ext cx="2526030" cy="237744"/>
+          </a:xfrm>
+          <a:prstGeom prst="roundRect">
+            <a:avLst>
+              <a:gd name="adj" fmla="val 20000"/>
+            </a:avLst>
+          </a:prstGeom>
+          <a:solidFill>
+            <a:srgbClr val="E4F4EE"/>
+          </a:solidFill>
+          <a:ln>
+            <a:noFill/>
+          </a:ln>
+          <a:effectLst/>
+        </p:spPr>
+        <p:style>
+          <a:lnRef idx="1">
+            <a:schemeClr val="accent1"/>
+          </a:lnRef>
+          <a:fillRef idx="3">
+            <a:schemeClr val="accent1"/>
+          </a:fillRef>
+          <a:effectRef idx="2">
+            <a:schemeClr val="accent1"/>
+          </a:effectRef>
+          <a:fontRef idx="minor">
+            <a:schemeClr val="lt1"/>
+          </a:fontRef>
+        </p:style>
+        <p:txBody>
+          <a:bodyPr rtlCol="0" anchor="ctr"/>
+          <a:lstStyle/>
+          <a:p/>
+        </p:txBody>
+      </p:sp>
+      <p:sp>
+        <p:nvSpPr>
+          <p:cNvPr id="34" name="OnthulTxt 5"/>
+          <p:cNvSpPr txBox="1"/>
+          <p:nvPr/>
+        </p:nvSpPr>
+        <p:spPr>
+          <a:xfrm>
+            <a:off x="3422142" y="4302252"/>
+            <a:ext cx="2489454" cy="237744"/>
+          </a:xfrm>
+          <a:prstGeom prst="rect">
+            <a:avLst/>
+          </a:prstGeom>
+          <a:noFill/>
+        </p:spPr>
+        <p:txBody>
+          <a:bodyPr wrap="square" anchor="ctr" lIns="45720" rIns="45720" tIns="27432" bIns="27432">
+            <a:normAutofit/>
+          </a:bodyPr>
+          <a:lstStyle/>
+          <a:p>
+            <a:pPr algn="l"/>
+            <a:r>
+              <a:rPr sz="850" b="1">
+                <a:solidFill>
+                  <a:srgbClr val="157355"/>
+                </a:solidFill>
+                <a:latin typeface="Inter"/>
+              </a:rPr>
+              <a:t>esdrújula — «nú»</a:t>
+            </a:r>
+          </a:p>
+        </p:txBody>
+      </p:sp>
+      <p:sp>
+        <p:nvSpPr>
+          <p:cNvPr id="35" name="Tarjeta 6"/>
+          <p:cNvSpPr/>
+          <p:nvPr/>
+        </p:nvSpPr>
+        <p:spPr>
+          <a:xfrm>
+            <a:off x="6167628" y="3696462"/>
+            <a:ext cx="2708910" cy="898398"/>
+          </a:xfrm>
+          <a:prstGeom prst="roundRect">
+            <a:avLst>
+              <a:gd name="adj" fmla="val 6000"/>
+            </a:avLst>
+          </a:prstGeom>
+          <a:solidFill>
+            <a:srgbClr val="FFFFFF"/>
+          </a:solidFill>
+          <a:ln w="12700">
+            <a:solidFill>
+              <a:srgbClr val="E4E3DE"/>
+            </a:solidFill>
+          </a:ln>
+          <a:effectLst/>
+        </p:spPr>
+        <p:style>
+          <a:lnRef idx="1">
+            <a:schemeClr val="accent1"/>
+          </a:lnRef>
+          <a:fillRef idx="3">
+            <a:schemeClr val="accent1"/>
+          </a:fillRef>
+          <a:effectRef idx="2">
+            <a:schemeClr val="accent1"/>
+          </a:effectRef>
+          <a:fontRef idx="minor">
+            <a:schemeClr val="lt1"/>
+          </a:fontRef>
+        </p:style>
+        <p:txBody>
+          <a:bodyPr rtlCol="0" anchor="ctr"/>
+          <a:lstStyle/>
+          <a:p/>
+        </p:txBody>
+      </p:sp>
+      <p:sp>
+        <p:nvSpPr>
+          <p:cNvPr id="36" name="TarjetaTxt 6"/>
+          <p:cNvSpPr txBox="1"/>
+          <p:nvPr/>
+        </p:nvSpPr>
+        <p:spPr>
+          <a:xfrm>
+            <a:off x="6259068" y="3751326"/>
+            <a:ext cx="2526030" cy="587502"/>
+          </a:xfrm>
+          <a:prstGeom prst="rect">
+            <a:avLst/>
+          </a:prstGeom>
+          <a:noFill/>
+        </p:spPr>
+        <p:txBody>
+          <a:bodyPr wrap="square" anchor="t" lIns="45720" rIns="45720" tIns="27432" bIns="27432">
+            <a:normAutofit/>
+          </a:bodyPr>
+          <a:lstStyle/>
+          <a:p>
+            <a:pPr algn="l"/>
+            <a:r>
+              <a:rPr sz="1100" b="1">
+                <a:solidFill>
+                  <a:srgbClr val="157355"/>
+                </a:solidFill>
+                <a:latin typeface="Bricolage Grotesque"/>
+              </a:rPr>
+              <a:t>mesa</a:t>
+            </a:r>
+          </a:p>
+        </p:txBody>
+      </p:sp>
+      <p:sp>
+        <p:nvSpPr>
+          <p:cNvPr id="37" name="Onthul 6"/>
+          <p:cNvSpPr/>
+          <p:nvPr/>
+        </p:nvSpPr>
+        <p:spPr>
+          <a:xfrm>
+            <a:off x="6259068" y="4302252"/>
+            <a:ext cx="2526030" cy="237744"/>
+          </a:xfrm>
+          <a:prstGeom prst="roundRect">
+            <a:avLst>
+              <a:gd name="adj" fmla="val 20000"/>
+            </a:avLst>
+          </a:prstGeom>
+          <a:solidFill>
+            <a:srgbClr val="E4F4EE"/>
+          </a:solidFill>
+          <a:ln>
+            <a:noFill/>
+          </a:ln>
+          <a:effectLst/>
+        </p:spPr>
+        <p:style>
+          <a:lnRef idx="1">
+            <a:schemeClr val="accent1"/>
+          </a:lnRef>
+          <a:fillRef idx="3">
+            <a:schemeClr val="accent1"/>
+          </a:fillRef>
+          <a:effectRef idx="2">
+            <a:schemeClr val="accent1"/>
+          </a:effectRef>
+          <a:fontRef idx="minor">
+            <a:schemeClr val="lt1"/>
+          </a:fontRef>
+        </p:style>
+        <p:txBody>
+          <a:bodyPr rtlCol="0" anchor="ctr"/>
+          <a:lstStyle/>
+          <a:p/>
+        </p:txBody>
+      </p:sp>
+      <p:sp>
+        <p:nvSpPr>
+          <p:cNvPr id="38" name="OnthulTxt 6"/>
+          <p:cNvSpPr txBox="1"/>
+          <p:nvPr/>
+        </p:nvSpPr>
+        <p:spPr>
+          <a:xfrm>
+            <a:off x="6277356" y="4302252"/>
+            <a:ext cx="2489454" cy="237744"/>
+          </a:xfrm>
+          <a:prstGeom prst="rect">
+            <a:avLst/>
+          </a:prstGeom>
+          <a:noFill/>
+        </p:spPr>
+        <p:txBody>
+          <a:bodyPr wrap="square" anchor="ctr" lIns="45720" rIns="45720" tIns="27432" bIns="27432">
+            <a:normAutofit/>
+          </a:bodyPr>
+          <a:lstStyle/>
+          <a:p>
+            <a:pPr algn="l"/>
+            <a:r>
+              <a:rPr sz="850" b="1">
+                <a:solidFill>
+                  <a:srgbClr val="157355"/>
+                </a:solidFill>
+                <a:latin typeface="Inter"/>
+              </a:rPr>
+              <a:t>llana — «me»</a:t>
+            </a:r>
+          </a:p>
+        </p:txBody>
+      </p:sp>
+      <p:sp>
+        <p:nvSpPr>
+          <p:cNvPr id="39" name="Tarjeta 7"/>
+          <p:cNvSpPr/>
+          <p:nvPr/>
+        </p:nvSpPr>
+        <p:spPr>
+          <a:xfrm>
+            <a:off x="9022842" y="3696462"/>
+            <a:ext cx="2708910" cy="898398"/>
+          </a:xfrm>
+          <a:prstGeom prst="roundRect">
+            <a:avLst>
+              <a:gd name="adj" fmla="val 6000"/>
+            </a:avLst>
+          </a:prstGeom>
+          <a:solidFill>
+            <a:srgbClr val="FFFFFF"/>
+          </a:solidFill>
+          <a:ln w="12700">
+            <a:solidFill>
+              <a:srgbClr val="E4E3DE"/>
+            </a:solidFill>
+          </a:ln>
+          <a:effectLst/>
+        </p:spPr>
+        <p:style>
+          <a:lnRef idx="1">
+            <a:schemeClr val="accent1"/>
+          </a:lnRef>
+          <a:fillRef idx="3">
+            <a:schemeClr val="accent1"/>
+          </a:fillRef>
+          <a:effectRef idx="2">
+            <a:schemeClr val="accent1"/>
+          </a:effectRef>
+          <a:fontRef idx="minor">
+            <a:schemeClr val="lt1"/>
+          </a:fontRef>
+        </p:style>
+        <p:txBody>
+          <a:bodyPr rtlCol="0" anchor="ctr"/>
+          <a:lstStyle/>
+          <a:p/>
+        </p:txBody>
+      </p:sp>
+      <p:sp>
+        <p:nvSpPr>
+          <p:cNvPr id="40" name="TarjetaTxt 7"/>
+          <p:cNvSpPr txBox="1"/>
+          <p:nvPr/>
+        </p:nvSpPr>
+        <p:spPr>
+          <a:xfrm>
+            <a:off x="9114282" y="3751326"/>
+            <a:ext cx="2526030" cy="587502"/>
+          </a:xfrm>
+          <a:prstGeom prst="rect">
+            <a:avLst/>
+          </a:prstGeom>
+          <a:noFill/>
+        </p:spPr>
+        <p:txBody>
+          <a:bodyPr wrap="square" anchor="t" lIns="45720" rIns="45720" tIns="27432" bIns="27432">
+            <a:normAutofit/>
+          </a:bodyPr>
+          <a:lstStyle/>
+          <a:p>
+            <a:pPr algn="l"/>
+            <a:r>
+              <a:rPr sz="1100" b="1">
+                <a:solidFill>
+                  <a:srgbClr val="157355"/>
+                </a:solidFill>
+                <a:latin typeface="Bricolage Grotesque"/>
+              </a:rPr>
+              <a:t>jamón</a:t>
+            </a:r>
+          </a:p>
+        </p:txBody>
+      </p:sp>
+      <p:sp>
+        <p:nvSpPr>
+          <p:cNvPr id="41" name="Onthul 7"/>
+          <p:cNvSpPr/>
+          <p:nvPr/>
+        </p:nvSpPr>
+        <p:spPr>
+          <a:xfrm>
+            <a:off x="9114282" y="4302252"/>
+            <a:ext cx="2526030" cy="237744"/>
+          </a:xfrm>
+          <a:prstGeom prst="roundRect">
+            <a:avLst>
+              <a:gd name="adj" fmla="val 20000"/>
+            </a:avLst>
+          </a:prstGeom>
+          <a:solidFill>
+            <a:srgbClr val="E4F4EE"/>
+          </a:solidFill>
+          <a:ln>
+            <a:noFill/>
+          </a:ln>
+          <a:effectLst/>
+        </p:spPr>
+        <p:style>
+          <a:lnRef idx="1">
+            <a:schemeClr val="accent1"/>
+          </a:lnRef>
+          <a:fillRef idx="3">
+            <a:schemeClr val="accent1"/>
+          </a:fillRef>
+          <a:effectRef idx="2">
+            <a:schemeClr val="accent1"/>
+          </a:effectRef>
+          <a:fontRef idx="minor">
+            <a:schemeClr val="lt1"/>
+          </a:fontRef>
+        </p:style>
+        <p:txBody>
+          <a:bodyPr rtlCol="0" anchor="ctr"/>
+          <a:lstStyle/>
+          <a:p/>
+        </p:txBody>
+      </p:sp>
+      <p:sp>
+        <p:nvSpPr>
+          <p:cNvPr id="42" name="OnthulTxt 7"/>
+          <p:cNvSpPr txBox="1"/>
+          <p:nvPr/>
+        </p:nvSpPr>
+        <p:spPr>
+          <a:xfrm>
+            <a:off x="9132570" y="4302252"/>
+            <a:ext cx="2489454" cy="237744"/>
+          </a:xfrm>
+          <a:prstGeom prst="rect">
+            <a:avLst/>
+          </a:prstGeom>
+          <a:noFill/>
+        </p:spPr>
+        <p:txBody>
+          <a:bodyPr wrap="square" anchor="ctr" lIns="45720" rIns="45720" tIns="27432" bIns="27432">
+            <a:normAutofit/>
+          </a:bodyPr>
+          <a:lstStyle/>
+          <a:p>
+            <a:pPr algn="l"/>
+            <a:r>
+              <a:rPr sz="850" b="1">
+                <a:solidFill>
+                  <a:srgbClr val="157355"/>
+                </a:solidFill>
+                <a:latin typeface="Inter"/>
+              </a:rPr>
+              <a:t>aguda — «món»</a:t>
+            </a:r>
+          </a:p>
+        </p:txBody>
+      </p:sp>
+      <p:sp>
+        <p:nvSpPr>
+          <p:cNvPr id="43" name="Tarjeta 8"/>
+          <p:cNvSpPr/>
+          <p:nvPr/>
+        </p:nvSpPr>
+        <p:spPr>
+          <a:xfrm>
+            <a:off x="457200" y="4722876"/>
+            <a:ext cx="2708910" cy="898398"/>
+          </a:xfrm>
+          <a:prstGeom prst="roundRect">
+            <a:avLst>
+              <a:gd name="adj" fmla="val 6000"/>
+            </a:avLst>
+          </a:prstGeom>
+          <a:solidFill>
+            <a:srgbClr val="FFFFFF"/>
+          </a:solidFill>
+          <a:ln w="12700">
+            <a:solidFill>
+              <a:srgbClr val="E4E3DE"/>
+            </a:solidFill>
+          </a:ln>
+          <a:effectLst/>
+        </p:spPr>
+        <p:style>
+          <a:lnRef idx="1">
+            <a:schemeClr val="accent1"/>
+          </a:lnRef>
+          <a:fillRef idx="3">
+            <a:schemeClr val="accent1"/>
+          </a:fillRef>
+          <a:effectRef idx="2">
+            <a:schemeClr val="accent1"/>
+          </a:effectRef>
+          <a:fontRef idx="minor">
+            <a:schemeClr val="lt1"/>
+          </a:fontRef>
+        </p:style>
+        <p:txBody>
+          <a:bodyPr rtlCol="0" anchor="ctr"/>
+          <a:lstStyle/>
+          <a:p/>
+        </p:txBody>
+      </p:sp>
+      <p:sp>
+        <p:nvSpPr>
+          <p:cNvPr id="44" name="TarjetaTxt 8"/>
+          <p:cNvSpPr txBox="1"/>
+          <p:nvPr/>
+        </p:nvSpPr>
+        <p:spPr>
+          <a:xfrm>
+            <a:off x="548640" y="4777740"/>
+            <a:ext cx="2526030" cy="587502"/>
+          </a:xfrm>
+          <a:prstGeom prst="rect">
+            <a:avLst/>
+          </a:prstGeom>
+          <a:noFill/>
+        </p:spPr>
+        <p:txBody>
+          <a:bodyPr wrap="square" anchor="t" lIns="45720" rIns="45720" tIns="27432" bIns="27432">
+            <a:normAutofit/>
+          </a:bodyPr>
+          <a:lstStyle/>
+          <a:p>
+            <a:pPr algn="l"/>
+            <a:r>
+              <a:rPr sz="1100" b="1">
+                <a:solidFill>
+                  <a:srgbClr val="157355"/>
+                </a:solidFill>
+                <a:latin typeface="Bricolage Grotesque"/>
+              </a:rPr>
+              <a:t>sábado</a:t>
+            </a:r>
+          </a:p>
+        </p:txBody>
+      </p:sp>
+      <p:sp>
+        <p:nvSpPr>
+          <p:cNvPr id="45" name="Onthul 8"/>
+          <p:cNvSpPr/>
+          <p:nvPr/>
+        </p:nvSpPr>
+        <p:spPr>
+          <a:xfrm>
+            <a:off x="548640" y="5328666"/>
+            <a:ext cx="2526030" cy="237744"/>
+          </a:xfrm>
+          <a:prstGeom prst="roundRect">
+            <a:avLst>
+              <a:gd name="adj" fmla="val 20000"/>
+            </a:avLst>
+          </a:prstGeom>
+          <a:solidFill>
+            <a:srgbClr val="E4F4EE"/>
+          </a:solidFill>
+          <a:ln>
+            <a:noFill/>
+          </a:ln>
+          <a:effectLst/>
+        </p:spPr>
+        <p:style>
+          <a:lnRef idx="1">
+            <a:schemeClr val="accent1"/>
+          </a:lnRef>
+          <a:fillRef idx="3">
+            <a:schemeClr val="accent1"/>
+          </a:fillRef>
+          <a:effectRef idx="2">
+            <a:schemeClr val="accent1"/>
+          </a:effectRef>
+          <a:fontRef idx="minor">
+            <a:schemeClr val="lt1"/>
+          </a:fontRef>
+        </p:style>
+        <p:txBody>
+          <a:bodyPr rtlCol="0" anchor="ctr"/>
+          <a:lstStyle/>
+          <a:p/>
+        </p:txBody>
+      </p:sp>
+      <p:sp>
+        <p:nvSpPr>
+          <p:cNvPr id="46" name="OnthulTxt 8"/>
+          <p:cNvSpPr txBox="1"/>
+          <p:nvPr/>
+        </p:nvSpPr>
+        <p:spPr>
+          <a:xfrm>
+            <a:off x="566928" y="5328666"/>
+            <a:ext cx="2489454" cy="237744"/>
+          </a:xfrm>
+          <a:prstGeom prst="rect">
+            <a:avLst/>
+          </a:prstGeom>
+          <a:noFill/>
+        </p:spPr>
+        <p:txBody>
+          <a:bodyPr wrap="square" anchor="ctr" lIns="45720" rIns="45720" tIns="27432" bIns="27432">
+            <a:normAutofit/>
+          </a:bodyPr>
+          <a:lstStyle/>
+          <a:p>
+            <a:pPr algn="l"/>
+            <a:r>
+              <a:rPr sz="850" b="1">
+                <a:solidFill>
+                  <a:srgbClr val="157355"/>
+                </a:solidFill>
+                <a:latin typeface="Inter"/>
+              </a:rPr>
+              <a:t>esdrújula — «sá»</a:t>
+            </a:r>
+          </a:p>
+        </p:txBody>
+      </p:sp>
+      <p:sp>
+        <p:nvSpPr>
+          <p:cNvPr id="47" name="Tarjeta 9"/>
+          <p:cNvSpPr/>
+          <p:nvPr/>
+        </p:nvSpPr>
+        <p:spPr>
+          <a:xfrm>
+            <a:off x="3312414" y="4722876"/>
+            <a:ext cx="2708910" cy="898398"/>
+          </a:xfrm>
+          <a:prstGeom prst="roundRect">
+            <a:avLst>
+              <a:gd name="adj" fmla="val 6000"/>
+            </a:avLst>
+          </a:prstGeom>
+          <a:solidFill>
+            <a:srgbClr val="FFFFFF"/>
+          </a:solidFill>
+          <a:ln w="12700">
+            <a:solidFill>
+              <a:srgbClr val="E4E3DE"/>
+            </a:solidFill>
+          </a:ln>
+          <a:effectLst/>
+        </p:spPr>
+        <p:style>
+          <a:lnRef idx="1">
+            <a:schemeClr val="accent1"/>
+          </a:lnRef>
+          <a:fillRef idx="3">
+            <a:schemeClr val="accent1"/>
+          </a:fillRef>
+          <a:effectRef idx="2">
+            <a:schemeClr val="accent1"/>
+          </a:effectRef>
+          <a:fontRef idx="minor">
+            <a:schemeClr val="lt1"/>
+          </a:fontRef>
+        </p:style>
+        <p:txBody>
+          <a:bodyPr rtlCol="0" anchor="ctr"/>
+          <a:lstStyle/>
+          <a:p/>
+        </p:txBody>
+      </p:sp>
+      <p:sp>
+        <p:nvSpPr>
+          <p:cNvPr id="48" name="TarjetaTxt 9"/>
+          <p:cNvSpPr txBox="1"/>
+          <p:nvPr/>
+        </p:nvSpPr>
+        <p:spPr>
+          <a:xfrm>
+            <a:off x="3403854" y="4777740"/>
+            <a:ext cx="2526030" cy="587502"/>
+          </a:xfrm>
+          <a:prstGeom prst="rect">
+            <a:avLst/>
+          </a:prstGeom>
+          <a:noFill/>
+        </p:spPr>
+        <p:txBody>
+          <a:bodyPr wrap="square" anchor="t" lIns="45720" rIns="45720" tIns="27432" bIns="27432">
+            <a:normAutofit/>
+          </a:bodyPr>
+          <a:lstStyle/>
+          <a:p>
+            <a:pPr algn="l"/>
+            <a:r>
+              <a:rPr sz="1100" b="1">
+                <a:solidFill>
+                  <a:srgbClr val="157355"/>
+                </a:solidFill>
+                <a:latin typeface="Bricolage Grotesque"/>
+              </a:rPr>
+              <a:t>papel</a:t>
+            </a:r>
+          </a:p>
+        </p:txBody>
+      </p:sp>
+      <p:sp>
+        <p:nvSpPr>
+          <p:cNvPr id="49" name="Onthul 9"/>
+          <p:cNvSpPr/>
+          <p:nvPr/>
+        </p:nvSpPr>
+        <p:spPr>
+          <a:xfrm>
+            <a:off x="3403854" y="5328666"/>
+            <a:ext cx="2526030" cy="237744"/>
+          </a:xfrm>
+          <a:prstGeom prst="roundRect">
+            <a:avLst>
+              <a:gd name="adj" fmla="val 20000"/>
+            </a:avLst>
+          </a:prstGeom>
+          <a:solidFill>
+            <a:srgbClr val="E4F4EE"/>
+          </a:solidFill>
+          <a:ln>
+            <a:noFill/>
+          </a:ln>
+          <a:effectLst/>
+        </p:spPr>
+        <p:style>
+          <a:lnRef idx="1">
+            <a:schemeClr val="accent1"/>
+          </a:lnRef>
+          <a:fillRef idx="3">
+            <a:schemeClr val="accent1"/>
+          </a:fillRef>
+          <a:effectRef idx="2">
+            <a:schemeClr val="accent1"/>
+          </a:effectRef>
+          <a:fontRef idx="minor">
+            <a:schemeClr val="lt1"/>
+          </a:fontRef>
+        </p:style>
+        <p:txBody>
+          <a:bodyPr rtlCol="0" anchor="ctr"/>
+          <a:lstStyle/>
+          <a:p/>
+        </p:txBody>
+      </p:sp>
+      <p:sp>
+        <p:nvSpPr>
+          <p:cNvPr id="50" name="OnthulTxt 9"/>
+          <p:cNvSpPr txBox="1"/>
+          <p:nvPr/>
+        </p:nvSpPr>
+        <p:spPr>
+          <a:xfrm>
+            <a:off x="3422142" y="5328666"/>
+            <a:ext cx="2489454" cy="237744"/>
+          </a:xfrm>
+          <a:prstGeom prst="rect">
+            <a:avLst/>
+          </a:prstGeom>
+          <a:noFill/>
+        </p:spPr>
+        <p:txBody>
+          <a:bodyPr wrap="square" anchor="ctr" lIns="45720" rIns="45720" tIns="27432" bIns="27432">
+            <a:normAutofit/>
+          </a:bodyPr>
+          <a:lstStyle/>
+          <a:p>
+            <a:pPr algn="l"/>
+            <a:r>
+              <a:rPr sz="850" b="1">
+                <a:solidFill>
+                  <a:srgbClr val="157355"/>
+                </a:solidFill>
+                <a:latin typeface="Inter"/>
+              </a:rPr>
+              <a:t>aguda — «pel»</a:t>
+            </a:r>
+          </a:p>
+        </p:txBody>
+      </p:sp>
+      <p:sp>
+        <p:nvSpPr>
+          <p:cNvPr id="51" name="Tarjeta 10"/>
+          <p:cNvSpPr/>
+          <p:nvPr/>
+        </p:nvSpPr>
+        <p:spPr>
+          <a:xfrm>
+            <a:off x="6167628" y="4722876"/>
+            <a:ext cx="2708910" cy="898398"/>
+          </a:xfrm>
+          <a:prstGeom prst="roundRect">
+            <a:avLst>
+              <a:gd name="adj" fmla="val 6000"/>
+            </a:avLst>
+          </a:prstGeom>
+          <a:solidFill>
+            <a:srgbClr val="FFFFFF"/>
+          </a:solidFill>
+          <a:ln w="12700">
+            <a:solidFill>
+              <a:srgbClr val="E4E3DE"/>
+            </a:solidFill>
+          </a:ln>
+          <a:effectLst/>
+        </p:spPr>
+        <p:style>
+          <a:lnRef idx="1">
+            <a:schemeClr val="accent1"/>
+          </a:lnRef>
+          <a:fillRef idx="3">
+            <a:schemeClr val="accent1"/>
+          </a:fillRef>
+          <a:effectRef idx="2">
+            <a:schemeClr val="accent1"/>
+          </a:effectRef>
+          <a:fontRef idx="minor">
+            <a:schemeClr val="lt1"/>
+          </a:fontRef>
+        </p:style>
+        <p:txBody>
+          <a:bodyPr rtlCol="0" anchor="ctr"/>
+          <a:lstStyle/>
+          <a:p/>
+        </p:txBody>
+      </p:sp>
+      <p:sp>
+        <p:nvSpPr>
+          <p:cNvPr id="52" name="TarjetaTxt 10"/>
+          <p:cNvSpPr txBox="1"/>
+          <p:nvPr/>
+        </p:nvSpPr>
+        <p:spPr>
+          <a:xfrm>
+            <a:off x="6259068" y="4777740"/>
+            <a:ext cx="2526030" cy="587502"/>
+          </a:xfrm>
+          <a:prstGeom prst="rect">
+            <a:avLst/>
+          </a:prstGeom>
+          <a:noFill/>
+        </p:spPr>
+        <p:txBody>
+          <a:bodyPr wrap="square" anchor="t" lIns="45720" rIns="45720" tIns="27432" bIns="27432">
+            <a:normAutofit/>
+          </a:bodyPr>
+          <a:lstStyle/>
+          <a:p>
+            <a:pPr algn="l"/>
+            <a:r>
+              <a:rPr sz="1100" b="1">
+                <a:solidFill>
+                  <a:srgbClr val="157355"/>
+                </a:solidFill>
+                <a:latin typeface="Bricolage Grotesque"/>
+              </a:rPr>
+              <a:t>lápiz</a:t>
+            </a:r>
+          </a:p>
+        </p:txBody>
+      </p:sp>
+      <p:sp>
+        <p:nvSpPr>
+          <p:cNvPr id="53" name="Onthul 10"/>
+          <p:cNvSpPr/>
+          <p:nvPr/>
+        </p:nvSpPr>
+        <p:spPr>
+          <a:xfrm>
+            <a:off x="6259068" y="5328666"/>
+            <a:ext cx="2526030" cy="237744"/>
+          </a:xfrm>
+          <a:prstGeom prst="roundRect">
+            <a:avLst>
+              <a:gd name="adj" fmla="val 20000"/>
+            </a:avLst>
+          </a:prstGeom>
+          <a:solidFill>
+            <a:srgbClr val="E4F4EE"/>
+          </a:solidFill>
+          <a:ln>
+            <a:noFill/>
+          </a:ln>
+          <a:effectLst/>
+        </p:spPr>
+        <p:style>
+          <a:lnRef idx="1">
+            <a:schemeClr val="accent1"/>
+          </a:lnRef>
+          <a:fillRef idx="3">
+            <a:schemeClr val="accent1"/>
+          </a:fillRef>
+          <a:effectRef idx="2">
+            <a:schemeClr val="accent1"/>
+          </a:effectRef>
+          <a:fontRef idx="minor">
+            <a:schemeClr val="lt1"/>
+          </a:fontRef>
+        </p:style>
+        <p:txBody>
+          <a:bodyPr rtlCol="0" anchor="ctr"/>
+          <a:lstStyle/>
+          <a:p/>
+        </p:txBody>
+      </p:sp>
+      <p:sp>
+        <p:nvSpPr>
+          <p:cNvPr id="54" name="OnthulTxt 10"/>
+          <p:cNvSpPr txBox="1"/>
+          <p:nvPr/>
+        </p:nvSpPr>
+        <p:spPr>
+          <a:xfrm>
+            <a:off x="6277356" y="5328666"/>
+            <a:ext cx="2489454" cy="237744"/>
+          </a:xfrm>
+          <a:prstGeom prst="rect">
+            <a:avLst/>
+          </a:prstGeom>
+          <a:noFill/>
+        </p:spPr>
+        <p:txBody>
+          <a:bodyPr wrap="square" anchor="ctr" lIns="45720" rIns="45720" tIns="27432" bIns="27432">
+            <a:normAutofit/>
+          </a:bodyPr>
+          <a:lstStyle/>
+          <a:p>
+            <a:pPr algn="l"/>
+            <a:r>
+              <a:rPr sz="850" b="1">
+                <a:solidFill>
+                  <a:srgbClr val="157355"/>
+                </a:solidFill>
+                <a:latin typeface="Inter"/>
+              </a:rPr>
+              <a:t>llana — «lá»</a:t>
+            </a:r>
+          </a:p>
+        </p:txBody>
+      </p:sp>
+      <p:sp>
+        <p:nvSpPr>
+          <p:cNvPr id="55" name="Tarjeta 11"/>
+          <p:cNvSpPr/>
+          <p:nvPr/>
+        </p:nvSpPr>
+        <p:spPr>
+          <a:xfrm>
+            <a:off x="9022842" y="4722876"/>
+            <a:ext cx="2708910" cy="898398"/>
+          </a:xfrm>
+          <a:prstGeom prst="roundRect">
+            <a:avLst>
+              <a:gd name="adj" fmla="val 6000"/>
+            </a:avLst>
+          </a:prstGeom>
+          <a:solidFill>
+            <a:srgbClr val="FFFFFF"/>
+          </a:solidFill>
+          <a:ln w="12700">
+            <a:solidFill>
+              <a:srgbClr val="E4E3DE"/>
+            </a:solidFill>
+          </a:ln>
+          <a:effectLst/>
+        </p:spPr>
+        <p:style>
+          <a:lnRef idx="1">
+            <a:schemeClr val="accent1"/>
+          </a:lnRef>
+          <a:fillRef idx="3">
+            <a:schemeClr val="accent1"/>
+          </a:fillRef>
+          <a:effectRef idx="2">
+            <a:schemeClr val="accent1"/>
+          </a:effectRef>
+          <a:fontRef idx="minor">
+            <a:schemeClr val="lt1"/>
+          </a:fontRef>
+        </p:style>
+        <p:txBody>
+          <a:bodyPr rtlCol="0" anchor="ctr"/>
+          <a:lstStyle/>
+          <a:p/>
+        </p:txBody>
+      </p:sp>
+      <p:sp>
+        <p:nvSpPr>
+          <p:cNvPr id="56" name="TarjetaTxt 11"/>
+          <p:cNvSpPr txBox="1"/>
+          <p:nvPr/>
+        </p:nvSpPr>
+        <p:spPr>
+          <a:xfrm>
+            <a:off x="9114282" y="4777740"/>
+            <a:ext cx="2526030" cy="587502"/>
+          </a:xfrm>
+          <a:prstGeom prst="rect">
+            <a:avLst/>
+          </a:prstGeom>
+          <a:noFill/>
+        </p:spPr>
+        <p:txBody>
+          <a:bodyPr wrap="square" anchor="t" lIns="45720" rIns="45720" tIns="27432" bIns="27432">
+            <a:normAutofit/>
+          </a:bodyPr>
+          <a:lstStyle/>
+          <a:p>
+            <a:pPr algn="l"/>
+            <a:r>
+              <a:rPr sz="1100" b="1">
+                <a:solidFill>
+                  <a:srgbClr val="157355"/>
+                </a:solidFill>
+                <a:latin typeface="Bricolage Grotesque"/>
+              </a:rPr>
+              <a:t>música</a:t>
+            </a:r>
+          </a:p>
+        </p:txBody>
+      </p:sp>
+      <p:sp>
+        <p:nvSpPr>
+          <p:cNvPr id="57" name="Onthul 11"/>
+          <p:cNvSpPr/>
+          <p:nvPr/>
+        </p:nvSpPr>
+        <p:spPr>
+          <a:xfrm>
+            <a:off x="9114282" y="5328666"/>
+            <a:ext cx="2526030" cy="237744"/>
+          </a:xfrm>
+          <a:prstGeom prst="roundRect">
+            <a:avLst>
+              <a:gd name="adj" fmla="val 20000"/>
+            </a:avLst>
+          </a:prstGeom>
+          <a:solidFill>
+            <a:srgbClr val="E4F4EE"/>
+          </a:solidFill>
+          <a:ln>
+            <a:noFill/>
+          </a:ln>
+          <a:effectLst/>
+        </p:spPr>
+        <p:style>
+          <a:lnRef idx="1">
+            <a:schemeClr val="accent1"/>
+          </a:lnRef>
+          <a:fillRef idx="3">
+            <a:schemeClr val="accent1"/>
+          </a:fillRef>
+          <a:effectRef idx="2">
+            <a:schemeClr val="accent1"/>
+          </a:effectRef>
+          <a:fontRef idx="minor">
+            <a:schemeClr val="lt1"/>
+          </a:fontRef>
+        </p:style>
+        <p:txBody>
+          <a:bodyPr rtlCol="0" anchor="ctr"/>
+          <a:lstStyle/>
+          <a:p/>
+        </p:txBody>
+      </p:sp>
+      <p:sp>
+        <p:nvSpPr>
+          <p:cNvPr id="58" name="OnthulTxt 11"/>
+          <p:cNvSpPr txBox="1"/>
+          <p:nvPr/>
+        </p:nvSpPr>
+        <p:spPr>
+          <a:xfrm>
+            <a:off x="9132570" y="5328666"/>
+            <a:ext cx="2489454" cy="237744"/>
+          </a:xfrm>
+          <a:prstGeom prst="rect">
+            <a:avLst/>
+          </a:prstGeom>
+          <a:noFill/>
+        </p:spPr>
+        <p:txBody>
+          <a:bodyPr wrap="square" anchor="ctr" lIns="45720" rIns="45720" tIns="27432" bIns="27432">
+            <a:normAutofit/>
+          </a:bodyPr>
+          <a:lstStyle/>
+          <a:p>
+            <a:pPr algn="l"/>
+            <a:r>
+              <a:rPr sz="850" b="1">
+                <a:solidFill>
+                  <a:srgbClr val="157355"/>
+                </a:solidFill>
+                <a:latin typeface="Inter"/>
+              </a:rPr>
+              <a:t>esdrújula — «mú»</a:t>
+            </a:r>
+          </a:p>
+        </p:txBody>
+      </p:sp>
+      <p:sp>
+        <p:nvSpPr>
+          <p:cNvPr id="59" name="Tarjeta 12"/>
+          <p:cNvSpPr/>
+          <p:nvPr/>
+        </p:nvSpPr>
+        <p:spPr>
+          <a:xfrm>
+            <a:off x="457200" y="5749290"/>
+            <a:ext cx="2708910" cy="898398"/>
+          </a:xfrm>
+          <a:prstGeom prst="roundRect">
+            <a:avLst>
+              <a:gd name="adj" fmla="val 6000"/>
+            </a:avLst>
+          </a:prstGeom>
+          <a:solidFill>
+            <a:srgbClr val="FFFFFF"/>
+          </a:solidFill>
+          <a:ln w="12700">
+            <a:solidFill>
+              <a:srgbClr val="E4E3DE"/>
+            </a:solidFill>
+          </a:ln>
+          <a:effectLst/>
+        </p:spPr>
+        <p:style>
+          <a:lnRef idx="1">
+            <a:schemeClr val="accent1"/>
+          </a:lnRef>
+          <a:fillRef idx="3">
+            <a:schemeClr val="accent1"/>
+          </a:fillRef>
+          <a:effectRef idx="2">
+            <a:schemeClr val="accent1"/>
+          </a:effectRef>
+          <a:fontRef idx="minor">
+            <a:schemeClr val="lt1"/>
+          </a:fontRef>
+        </p:style>
+        <p:txBody>
+          <a:bodyPr rtlCol="0" anchor="ctr"/>
+          <a:lstStyle/>
+          <a:p/>
+        </p:txBody>
+      </p:sp>
+      <p:sp>
+        <p:nvSpPr>
+          <p:cNvPr id="60" name="TarjetaTxt 12"/>
+          <p:cNvSpPr txBox="1"/>
+          <p:nvPr/>
+        </p:nvSpPr>
+        <p:spPr>
+          <a:xfrm>
+            <a:off x="548640" y="5804154"/>
+            <a:ext cx="2526030" cy="587502"/>
+          </a:xfrm>
+          <a:prstGeom prst="rect">
+            <a:avLst/>
+          </a:prstGeom>
+          <a:noFill/>
+        </p:spPr>
+        <p:txBody>
+          <a:bodyPr wrap="square" anchor="t" lIns="45720" rIns="45720" tIns="27432" bIns="27432">
+            <a:normAutofit/>
+          </a:bodyPr>
+          <a:lstStyle/>
+          <a:p>
+            <a:pPr algn="l"/>
+            <a:r>
+              <a:rPr sz="1100" b="1">
+                <a:solidFill>
+                  <a:srgbClr val="157355"/>
+                </a:solidFill>
+                <a:latin typeface="Bricolage Grotesque"/>
+              </a:rPr>
+              <a:t>reloj</a:t>
+            </a:r>
+          </a:p>
+        </p:txBody>
+      </p:sp>
+      <p:sp>
+        <p:nvSpPr>
+          <p:cNvPr id="61" name="Onthul 12"/>
+          <p:cNvSpPr/>
+          <p:nvPr/>
+        </p:nvSpPr>
+        <p:spPr>
+          <a:xfrm>
+            <a:off x="548640" y="6355080"/>
+            <a:ext cx="2526030" cy="237744"/>
+          </a:xfrm>
+          <a:prstGeom prst="roundRect">
+            <a:avLst>
+              <a:gd name="adj" fmla="val 20000"/>
+            </a:avLst>
+          </a:prstGeom>
+          <a:solidFill>
+            <a:srgbClr val="E4F4EE"/>
+          </a:solidFill>
+          <a:ln>
+            <a:noFill/>
+          </a:ln>
+          <a:effectLst/>
+        </p:spPr>
+        <p:style>
+          <a:lnRef idx="1">
+            <a:schemeClr val="accent1"/>
+          </a:lnRef>
+          <a:fillRef idx="3">
+            <a:schemeClr val="accent1"/>
+          </a:fillRef>
+          <a:effectRef idx="2">
+            <a:schemeClr val="accent1"/>
+          </a:effectRef>
+          <a:fontRef idx="minor">
+            <a:schemeClr val="lt1"/>
+          </a:fontRef>
+        </p:style>
+        <p:txBody>
+          <a:bodyPr rtlCol="0" anchor="ctr"/>
+          <a:lstStyle/>
+          <a:p/>
+        </p:txBody>
+      </p:sp>
+      <p:sp>
+        <p:nvSpPr>
+          <p:cNvPr id="62" name="OnthulTxt 12"/>
+          <p:cNvSpPr txBox="1"/>
+          <p:nvPr/>
+        </p:nvSpPr>
+        <p:spPr>
+          <a:xfrm>
+            <a:off x="566928" y="6355080"/>
+            <a:ext cx="2489454" cy="237744"/>
+          </a:xfrm>
+          <a:prstGeom prst="rect">
+            <a:avLst/>
+          </a:prstGeom>
+          <a:noFill/>
+        </p:spPr>
+        <p:txBody>
+          <a:bodyPr wrap="square" anchor="ctr" lIns="45720" rIns="45720" tIns="27432" bIns="27432">
+            <a:normAutofit/>
+          </a:bodyPr>
+          <a:lstStyle/>
+          <a:p>
+            <a:pPr algn="l"/>
+            <a:r>
+              <a:rPr sz="850" b="1">
+                <a:solidFill>
+                  <a:srgbClr val="157355"/>
+                </a:solidFill>
+                <a:latin typeface="Inter"/>
+              </a:rPr>
+              <a:t>aguda — «loj»</a:t>
+            </a:r>
+          </a:p>
+        </p:txBody>
+      </p:sp>
+      <p:sp>
+        <p:nvSpPr>
+          <p:cNvPr id="63" name="Tarjeta 13"/>
+          <p:cNvSpPr/>
+          <p:nvPr/>
+        </p:nvSpPr>
+        <p:spPr>
+          <a:xfrm>
+            <a:off x="3312414" y="5749290"/>
+            <a:ext cx="2708910" cy="898398"/>
+          </a:xfrm>
+          <a:prstGeom prst="roundRect">
+            <a:avLst>
+              <a:gd name="adj" fmla="val 6000"/>
+            </a:avLst>
+          </a:prstGeom>
+          <a:solidFill>
+            <a:srgbClr val="FFFFFF"/>
+          </a:solidFill>
+          <a:ln w="12700">
+            <a:solidFill>
+              <a:srgbClr val="E4E3DE"/>
+            </a:solidFill>
+          </a:ln>
+          <a:effectLst/>
+        </p:spPr>
+        <p:style>
+          <a:lnRef idx="1">
+            <a:schemeClr val="accent1"/>
+          </a:lnRef>
+          <a:fillRef idx="3">
+            <a:schemeClr val="accent1"/>
+          </a:fillRef>
+          <a:effectRef idx="2">
+            <a:schemeClr val="accent1"/>
+          </a:effectRef>
+          <a:fontRef idx="minor">
+            <a:schemeClr val="lt1"/>
+          </a:fontRef>
+        </p:style>
+        <p:txBody>
+          <a:bodyPr rtlCol="0" anchor="ctr"/>
+          <a:lstStyle/>
+          <a:p/>
+        </p:txBody>
+      </p:sp>
+      <p:sp>
+        <p:nvSpPr>
+          <p:cNvPr id="64" name="TarjetaTxt 13"/>
+          <p:cNvSpPr txBox="1"/>
+          <p:nvPr/>
+        </p:nvSpPr>
+        <p:spPr>
+          <a:xfrm>
+            <a:off x="3403854" y="5804154"/>
+            <a:ext cx="2526030" cy="587502"/>
+          </a:xfrm>
+          <a:prstGeom prst="rect">
+            <a:avLst/>
+          </a:prstGeom>
+          <a:noFill/>
+        </p:spPr>
+        <p:txBody>
+          <a:bodyPr wrap="square" anchor="t" lIns="45720" rIns="45720" tIns="27432" bIns="27432">
+            <a:normAutofit/>
+          </a:bodyPr>
+          <a:lstStyle/>
+          <a:p>
+            <a:pPr algn="l"/>
+            <a:r>
+              <a:rPr sz="1100" b="1">
+                <a:solidFill>
+                  <a:srgbClr val="157355"/>
+                </a:solidFill>
+                <a:latin typeface="Bricolage Grotesque"/>
+              </a:rPr>
+              <a:t>ventana</a:t>
+            </a:r>
+          </a:p>
+        </p:txBody>
+      </p:sp>
+      <p:sp>
+        <p:nvSpPr>
+          <p:cNvPr id="65" name="Onthul 13"/>
+          <p:cNvSpPr/>
+          <p:nvPr/>
+        </p:nvSpPr>
+        <p:spPr>
+          <a:xfrm>
+            <a:off x="3403854" y="6355080"/>
+            <a:ext cx="2526030" cy="237744"/>
+          </a:xfrm>
+          <a:prstGeom prst="roundRect">
+            <a:avLst>
+              <a:gd name="adj" fmla="val 20000"/>
+            </a:avLst>
+          </a:prstGeom>
+          <a:solidFill>
+            <a:srgbClr val="E4F4EE"/>
+          </a:solidFill>
+          <a:ln>
+            <a:noFill/>
+          </a:ln>
+          <a:effectLst/>
+        </p:spPr>
+        <p:style>
+          <a:lnRef idx="1">
+            <a:schemeClr val="accent1"/>
+          </a:lnRef>
+          <a:fillRef idx="3">
+            <a:schemeClr val="accent1"/>
+          </a:fillRef>
+          <a:effectRef idx="2">
+            <a:schemeClr val="accent1"/>
+          </a:effectRef>
+          <a:fontRef idx="minor">
+            <a:schemeClr val="lt1"/>
+          </a:fontRef>
+        </p:style>
+        <p:txBody>
+          <a:bodyPr rtlCol="0" anchor="ctr"/>
+          <a:lstStyle/>
+          <a:p/>
+        </p:txBody>
+      </p:sp>
+      <p:sp>
+        <p:nvSpPr>
+          <p:cNvPr id="66" name="OnthulTxt 13"/>
+          <p:cNvSpPr txBox="1"/>
+          <p:nvPr/>
+        </p:nvSpPr>
+        <p:spPr>
+          <a:xfrm>
+            <a:off x="3422142" y="6355080"/>
+            <a:ext cx="2489454" cy="237744"/>
+          </a:xfrm>
+          <a:prstGeom prst="rect">
+            <a:avLst/>
+          </a:prstGeom>
+          <a:noFill/>
+        </p:spPr>
+        <p:txBody>
+          <a:bodyPr wrap="square" anchor="ctr" lIns="45720" rIns="45720" tIns="27432" bIns="27432">
+            <a:normAutofit/>
+          </a:bodyPr>
+          <a:lstStyle/>
+          <a:p>
+            <a:pPr algn="l"/>
+            <a:r>
+              <a:rPr sz="850" b="1">
+                <a:solidFill>
+                  <a:srgbClr val="157355"/>
+                </a:solidFill>
+                <a:latin typeface="Inter"/>
+              </a:rPr>
+              <a:t>llana — «ta»</a:t>
+            </a:r>
+          </a:p>
+        </p:txBody>
+      </p:sp>
+      <p:sp>
+        <p:nvSpPr>
+          <p:cNvPr id="67" name="Tarjeta 14"/>
+          <p:cNvSpPr/>
+          <p:nvPr/>
+        </p:nvSpPr>
+        <p:spPr>
+          <a:xfrm>
+            <a:off x="6167628" y="5749290"/>
+            <a:ext cx="2708910" cy="898398"/>
+          </a:xfrm>
+          <a:prstGeom prst="roundRect">
+            <a:avLst>
+              <a:gd name="adj" fmla="val 6000"/>
+            </a:avLst>
+          </a:prstGeom>
+          <a:solidFill>
+            <a:srgbClr val="FFFFFF"/>
+          </a:solidFill>
+          <a:ln w="12700">
+            <a:solidFill>
+              <a:srgbClr val="E4E3DE"/>
+            </a:solidFill>
+          </a:ln>
+          <a:effectLst/>
+        </p:spPr>
+        <p:style>
+          <a:lnRef idx="1">
+            <a:schemeClr val="accent1"/>
+          </a:lnRef>
+          <a:fillRef idx="3">
+            <a:schemeClr val="accent1"/>
+          </a:fillRef>
+          <a:effectRef idx="2">
+            <a:schemeClr val="accent1"/>
+          </a:effectRef>
+          <a:fontRef idx="minor">
+            <a:schemeClr val="lt1"/>
+          </a:fontRef>
+        </p:style>
+        <p:txBody>
+          <a:bodyPr rtlCol="0" anchor="ctr"/>
+          <a:lstStyle/>
+          <a:p/>
+        </p:txBody>
+      </p:sp>
+      <p:sp>
+        <p:nvSpPr>
+          <p:cNvPr id="68" name="TarjetaTxt 14"/>
+          <p:cNvSpPr txBox="1"/>
+          <p:nvPr/>
+        </p:nvSpPr>
+        <p:spPr>
+          <a:xfrm>
+            <a:off x="6259068" y="5804154"/>
+            <a:ext cx="2526030" cy="587502"/>
+          </a:xfrm>
+          <a:prstGeom prst="rect">
+            <a:avLst/>
+          </a:prstGeom>
+          <a:noFill/>
+        </p:spPr>
+        <p:txBody>
+          <a:bodyPr wrap="square" anchor="t" lIns="45720" rIns="45720" tIns="27432" bIns="27432">
+            <a:normAutofit/>
+          </a:bodyPr>
+          <a:lstStyle/>
+          <a:p>
+            <a:pPr algn="l"/>
+            <a:r>
+              <a:rPr sz="1100" b="1">
+                <a:solidFill>
+                  <a:srgbClr val="157355"/>
+                </a:solidFill>
+                <a:latin typeface="Bricolage Grotesque"/>
+              </a:rPr>
+              <a:t>plátano</a:t>
+            </a:r>
+          </a:p>
+        </p:txBody>
+      </p:sp>
+      <p:sp>
+        <p:nvSpPr>
+          <p:cNvPr id="69" name="Onthul 14"/>
+          <p:cNvSpPr/>
+          <p:nvPr/>
+        </p:nvSpPr>
+        <p:spPr>
+          <a:xfrm>
+            <a:off x="6259068" y="6355080"/>
+            <a:ext cx="2526030" cy="237744"/>
+          </a:xfrm>
+          <a:prstGeom prst="roundRect">
+            <a:avLst>
+              <a:gd name="adj" fmla="val 20000"/>
+            </a:avLst>
+          </a:prstGeom>
+          <a:solidFill>
+            <a:srgbClr val="E4F4EE"/>
+          </a:solidFill>
+          <a:ln>
+            <a:noFill/>
+          </a:ln>
+          <a:effectLst/>
+        </p:spPr>
+        <p:style>
+          <a:lnRef idx="1">
+            <a:schemeClr val="accent1"/>
+          </a:lnRef>
+          <a:fillRef idx="3">
+            <a:schemeClr val="accent1"/>
+          </a:fillRef>
+          <a:effectRef idx="2">
+            <a:schemeClr val="accent1"/>
+          </a:effectRef>
+          <a:fontRef idx="minor">
+            <a:schemeClr val="lt1"/>
+          </a:fontRef>
+        </p:style>
+        <p:txBody>
+          <a:bodyPr rtlCol="0" anchor="ctr"/>
+          <a:lstStyle/>
+          <a:p/>
+        </p:txBody>
+      </p:sp>
+      <p:sp>
+        <p:nvSpPr>
+          <p:cNvPr id="70" name="OnthulTxt 14"/>
+          <p:cNvSpPr txBox="1"/>
+          <p:nvPr/>
+        </p:nvSpPr>
+        <p:spPr>
+          <a:xfrm>
+            <a:off x="6277356" y="6355080"/>
+            <a:ext cx="2489454" cy="237744"/>
+          </a:xfrm>
+          <a:prstGeom prst="rect">
+            <a:avLst/>
+          </a:prstGeom>
+          <a:noFill/>
+        </p:spPr>
+        <p:txBody>
+          <a:bodyPr wrap="square" anchor="ctr" lIns="45720" rIns="45720" tIns="27432" bIns="27432">
+            <a:normAutofit/>
+          </a:bodyPr>
+          <a:lstStyle/>
+          <a:p>
+            <a:pPr algn="l"/>
+            <a:r>
+              <a:rPr sz="850" b="1">
+                <a:solidFill>
+                  <a:srgbClr val="157355"/>
+                </a:solidFill>
+                <a:latin typeface="Inter"/>
+              </a:rPr>
+              <a:t>esdrújula — «plá»</a:t>
+            </a:r>
+          </a:p>
+        </p:txBody>
+      </p:sp>
+    </p:spTree>
+  </p:cSld>
+  <p:clrMapOvr>
+    <a:masterClrMapping/>
+  </p:clrMapOvr>
+  <p:timing>
+    <p:tnLst>
+      <p:par>
+        <p:cTn id="1" dur="indefinite" restart="never" nodeType="tmRoot">
+          <p:childTnLst>
+            <p:seq concurrent="1" nextAc="seek">
+              <p:cTn id="2" dur="indefinite" nodeType="mainSeq">
+                <p:childTnLst>
+                  <p:par>
+                    <p:cTn id="5" fill="hold">
+                      <p:stCondLst>
+                        <p:cond delay="indefinite"/>
+                      </p:stCondLst>
+                      <p:childTnLst>
+                        <p:par>
+                          <p:cTn id="6" fill="hold">
+                            <p:stCondLst>
+                              <p:cond delay="0"/>
+                            </p:stCondLst>
+                            <p:childTnLst>
+                              <p:par>
+                                <p:cTn id="7" presetID="10" presetClass="entr" presetSubtype="0" fill="hold" grpId="0" nodeType="clickEffect">
+                                  <p:stCondLst>
+                                    <p:cond delay="0"/>
+                                  </p:stCondLst>
+                                  <p:childTnLst>
+                                    <p:set>
+                                      <p:cBhvr>
+                                        <p:cTn id="8" dur="1" fill="hold">
+                                          <p:stCondLst>
+                                            <p:cond delay="0"/>
+                                          </p:stCondLst>
+                                        </p:cTn>
+                                        <p:tgtEl>
+                                          <p:spTgt spid="13"/>
+                                        </p:tgtEl>
+                                        <p:attrNameLst>
+                                          <p:attrName>style.visibility</p:attrName>
+                                        </p:attrNameLst>
+                                      </p:cBhvr>
+                                      <p:to>
+                                        <p:strVal val="visible"/>
+                                      </p:to>
+                                    </p:set>
+                                    <p:animEffect transition="in" filter="fade">
+                                      <p:cBhvr>
+                                        <p:cTn id="9" dur="500"/>
+                                        <p:tgtEl>
+                                          <p:spTgt spid="13"/>
+                                        </p:tgtEl>
+                                      </p:cBhvr>
+                                    </p:animEffect>
+                                  </p:childTnLst>
+                                </p:cTn>
+                              </p:par>
+                            </p:childTnLst>
+                          </p:cTn>
+                        </p:par>
+                      </p:childTnLst>
+                    </p:cTn>
+                  </p:par>
+                  <p:par>
+                    <p:cTn id="10" fill="hold">
+                      <p:stCondLst>
+                        <p:cond delay="indefinite"/>
+                      </p:stCondLst>
+                      <p:childTnLst>
+                        <p:par>
+                          <p:cTn id="11" fill="hold">
+                            <p:stCondLst>
+                              <p:cond delay="0"/>
+                            </p:stCondLst>
+                            <p:childTnLst>
+                              <p:par>
+                                <p:cTn id="12" presetID="10" presetClass="entr" presetSubtype="0" fill="hold" grpId="0" nodeType="clickEffect">
+                                  <p:stCondLst>
+                                    <p:cond delay="0"/>
+                                  </p:stCondLst>
+                                  <p:childTnLst>
+                                    <p:set>
+                                      <p:cBhvr>
+                                        <p:cTn id="13" dur="1" fill="hold">
+                                          <p:stCondLst>
+                                            <p:cond delay="0"/>
+                                          </p:stCondLst>
+                                        </p:cTn>
+                                        <p:tgtEl>
+                                          <p:spTgt spid="14"/>
+                                        </p:tgtEl>
+                                        <p:attrNameLst>
+                                          <p:attrName>style.visibility</p:attrName>
+                                        </p:attrNameLst>
+                                      </p:cBhvr>
+                                      <p:to>
+                                        <p:strVal val="visible"/>
+                                      </p:to>
+                                    </p:set>
+                                    <p:animEffect transition="in" filter="fade">
+                                      <p:cBhvr>
+                                        <p:cTn id="14" dur="500"/>
+                                        <p:tgtEl>
+                                          <p:spTgt spid="14"/>
+                                        </p:tgtEl>
+                                      </p:cBhvr>
+                                    </p:animEffect>
+                                  </p:childTnLst>
+                                </p:cTn>
+                              </p:par>
+                            </p:childTnLst>
+                          </p:cTn>
+                        </p:par>
+                      </p:childTnLst>
+                    </p:cTn>
+                  </p:par>
+                  <p:par>
+                    <p:cTn id="15" fill="hold">
+                      <p:stCondLst>
+                        <p:cond delay="indefinite"/>
+                      </p:stCondLst>
+                      <p:childTnLst>
+                        <p:par>
+                          <p:cTn id="16" fill="hold">
+                            <p:stCondLst>
+                              <p:cond delay="0"/>
+                            </p:stCondLst>
+                            <p:childTnLst>
+                              <p:par>
+                                <p:cTn id="17" presetID="10" presetClass="entr" presetSubtype="0" fill="hold" grpId="0" nodeType="clickEffect">
+                                  <p:stCondLst>
+                                    <p:cond delay="0"/>
+                                  </p:stCondLst>
+                                  <p:childTnLst>
+                                    <p:set>
+                                      <p:cBhvr>
+                                        <p:cTn id="18" dur="1" fill="hold">
+                                          <p:stCondLst>
+                                            <p:cond delay="0"/>
+                                          </p:stCondLst>
+                                        </p:cTn>
+                                        <p:tgtEl>
+                                          <p:spTgt spid="17"/>
+                                        </p:tgtEl>
+                                        <p:attrNameLst>
+                                          <p:attrName>style.visibility</p:attrName>
+                                        </p:attrNameLst>
+                                      </p:cBhvr>
+                                      <p:to>
+                                        <p:strVal val="visible"/>
+                                      </p:to>
+                                    </p:set>
+                                    <p:animEffect transition="in" filter="fade">
+                                      <p:cBhvr>
+                                        <p:cTn id="19" dur="500"/>
+                                        <p:tgtEl>
+                                          <p:spTgt spid="17"/>
+                                        </p:tgtEl>
+                                      </p:cBhvr>
+                                    </p:animEffect>
+                                  </p:childTnLst>
+                                </p:cTn>
+                              </p:par>
+                            </p:childTnLst>
+                          </p:cTn>
+                        </p:par>
+                      </p:childTnLst>
+                    </p:cTn>
+                  </p:par>
+                  <p:par>
+                    <p:cTn id="20" fill="hold">
+                      <p:stCondLst>
+                        <p:cond delay="indefinite"/>
+                      </p:stCondLst>
+                      <p:childTnLst>
+                        <p:par>
+                          <p:cTn id="21" fill="hold">
+                            <p:stCondLst>
+                              <p:cond delay="0"/>
+                            </p:stCondLst>
+                            <p:childTnLst>
+                              <p:par>
+                                <p:cTn id="22" presetID="10" presetClass="entr" presetSubtype="0" fill="hold" grpId="0" nodeType="clickEffect">
+                                  <p:stCondLst>
+                                    <p:cond delay="0"/>
+                                  </p:stCondLst>
+                                  <p:childTnLst>
+                                    <p:set>
+                                      <p:cBhvr>
+                                        <p:cTn id="23" dur="1" fill="hold">
+                                          <p:stCondLst>
+                                            <p:cond delay="0"/>
+                                          </p:stCondLst>
+                                        </p:cTn>
+                                        <p:tgtEl>
+                                          <p:spTgt spid="18"/>
+                                        </p:tgtEl>
+                                        <p:attrNameLst>
+                                          <p:attrName>style.visibility</p:attrName>
+                                        </p:attrNameLst>
+                                      </p:cBhvr>
+                                      <p:to>
+                                        <p:strVal val="visible"/>
+                                      </p:to>
+                                    </p:set>
+                                    <p:animEffect transition="in" filter="fade">
+                                      <p:cBhvr>
+                                        <p:cTn id="24" dur="500"/>
+                                        <p:tgtEl>
+                                          <p:spTgt spid="18"/>
+                                        </p:tgtEl>
+                                      </p:cBhvr>
+                                    </p:animEffect>
+                                  </p:childTnLst>
+                                </p:cTn>
+                              </p:par>
+                            </p:childTnLst>
+                          </p:cTn>
+                        </p:par>
+                      </p:childTnLst>
+                    </p:cTn>
+                  </p:par>
+                  <p:par>
+                    <p:cTn id="25" fill="hold">
+                      <p:stCondLst>
+                        <p:cond delay="indefinite"/>
+                      </p:stCondLst>
+                      <p:childTnLst>
+                        <p:par>
+                          <p:cTn id="26" fill="hold">
+                            <p:stCondLst>
+                              <p:cond delay="0"/>
+                            </p:stCondLst>
+                            <p:childTnLst>
+                              <p:par>
+                                <p:cTn id="27" presetID="10" presetClass="entr" presetSubtype="0" fill="hold" grpId="0" nodeType="clickEffect">
+                                  <p:stCondLst>
+                                    <p:cond delay="0"/>
+                                  </p:stCondLst>
+                                  <p:childTnLst>
+                                    <p:set>
+                                      <p:cBhvr>
+                                        <p:cTn id="28" dur="1" fill="hold">
+                                          <p:stCondLst>
+                                            <p:cond delay="0"/>
+                                          </p:stCondLst>
+                                        </p:cTn>
+                                        <p:tgtEl>
+                                          <p:spTgt spid="21"/>
+                                        </p:tgtEl>
+                                        <p:attrNameLst>
+                                          <p:attrName>style.visibility</p:attrName>
+                                        </p:attrNameLst>
+                                      </p:cBhvr>
+                                      <p:to>
+                                        <p:strVal val="visible"/>
+                                      </p:to>
+                                    </p:set>
+                                    <p:animEffect transition="in" filter="fade">
+                                      <p:cBhvr>
+                                        <p:cTn id="29" dur="500"/>
+                                        <p:tgtEl>
+                                          <p:spTgt spid="21"/>
+                                        </p:tgtEl>
+                                      </p:cBhvr>
+                                    </p:animEffect>
+                                  </p:childTnLst>
+                                </p:cTn>
+                              </p:par>
+                            </p:childTnLst>
+                          </p:cTn>
+                        </p:par>
+                      </p:childTnLst>
+                    </p:cTn>
+                  </p:par>
+                  <p:par>
+                    <p:cTn id="30" fill="hold">
+                      <p:stCondLst>
+                        <p:cond delay="indefinite"/>
+                      </p:stCondLst>
+                      <p:childTnLst>
+                        <p:par>
+                          <p:cTn id="31" fill="hold">
+                            <p:stCondLst>
+                              <p:cond delay="0"/>
+                            </p:stCondLst>
+                            <p:childTnLst>
+                              <p:par>
+                                <p:cTn id="32" presetID="10" presetClass="entr" presetSubtype="0" fill="hold" grpId="0" nodeType="clickEffect">
+                                  <p:stCondLst>
+                                    <p:cond delay="0"/>
+                                  </p:stCondLst>
+                                  <p:childTnLst>
+                                    <p:set>
+                                      <p:cBhvr>
+                                        <p:cTn id="33" dur="1" fill="hold">
+                                          <p:stCondLst>
+                                            <p:cond delay="0"/>
+                                          </p:stCondLst>
+                                        </p:cTn>
+                                        <p:tgtEl>
+                                          <p:spTgt spid="22"/>
+                                        </p:tgtEl>
+                                        <p:attrNameLst>
+                                          <p:attrName>style.visibility</p:attrName>
+                                        </p:attrNameLst>
+                                      </p:cBhvr>
+                                      <p:to>
+                                        <p:strVal val="visible"/>
+                                      </p:to>
+                                    </p:set>
+                                    <p:animEffect transition="in" filter="fade">
+                                      <p:cBhvr>
+                                        <p:cTn id="34" dur="500"/>
+                                        <p:tgtEl>
+                                          <p:spTgt spid="22"/>
+                                        </p:tgtEl>
+                                      </p:cBhvr>
+                                    </p:animEffect>
+                                  </p:childTnLst>
+                                </p:cTn>
+                              </p:par>
+                            </p:childTnLst>
+                          </p:cTn>
+                        </p:par>
+                      </p:childTnLst>
+                    </p:cTn>
+                  </p:par>
+                  <p:par>
+                    <p:cTn id="35" fill="hold">
+                      <p:stCondLst>
+                        <p:cond delay="indefinite"/>
+                      </p:stCondLst>
+                      <p:childTnLst>
+                        <p:par>
+                          <p:cTn id="36" fill="hold">
+                            <p:stCondLst>
+                              <p:cond delay="0"/>
+                            </p:stCondLst>
+                            <p:childTnLst>
+                              <p:par>
+                                <p:cTn id="37" presetID="10" presetClass="entr" presetSubtype="0" fill="hold" grpId="0" nodeType="clickEffect">
+                                  <p:stCondLst>
+                                    <p:cond delay="0"/>
+                                  </p:stCondLst>
+                                  <p:childTnLst>
+                                    <p:set>
+                                      <p:cBhvr>
+                                        <p:cTn id="38" dur="1" fill="hold">
+                                          <p:stCondLst>
+                                            <p:cond delay="0"/>
+                                          </p:stCondLst>
+                                        </p:cTn>
+                                        <p:tgtEl>
+                                          <p:spTgt spid="25"/>
+                                        </p:tgtEl>
+                                        <p:attrNameLst>
+                                          <p:attrName>style.visibility</p:attrName>
+                                        </p:attrNameLst>
+                                      </p:cBhvr>
+                                      <p:to>
+                                        <p:strVal val="visible"/>
+                                      </p:to>
+                                    </p:set>
+                                    <p:animEffect transition="in" filter="fade">
+                                      <p:cBhvr>
+                                        <p:cTn id="39" dur="500"/>
+                                        <p:tgtEl>
+                                          <p:spTgt spid="25"/>
+                                        </p:tgtEl>
+                                      </p:cBhvr>
+                                    </p:animEffect>
+                                  </p:childTnLst>
+                                </p:cTn>
+                              </p:par>
+                            </p:childTnLst>
+                          </p:cTn>
+                        </p:par>
+                      </p:childTnLst>
+                    </p:cTn>
+                  </p:par>
+                  <p:par>
+                    <p:cTn id="40" fill="hold">
+                      <p:stCondLst>
+                        <p:cond delay="indefinite"/>
+                      </p:stCondLst>
+                      <p:childTnLst>
+                        <p:par>
+                          <p:cTn id="41" fill="hold">
+                            <p:stCondLst>
+                              <p:cond delay="0"/>
+                            </p:stCondLst>
+                            <p:childTnLst>
+                              <p:par>
+                                <p:cTn id="42" presetID="10" presetClass="entr" presetSubtype="0" fill="hold" grpId="0" nodeType="clickEffect">
+                                  <p:stCondLst>
+                                    <p:cond delay="0"/>
+                                  </p:stCondLst>
+                                  <p:childTnLst>
+                                    <p:set>
+                                      <p:cBhvr>
+                                        <p:cTn id="43" dur="1" fill="hold">
+                                          <p:stCondLst>
+                                            <p:cond delay="0"/>
+                                          </p:stCondLst>
+                                        </p:cTn>
+                                        <p:tgtEl>
+                                          <p:spTgt spid="26"/>
+                                        </p:tgtEl>
+                                        <p:attrNameLst>
+                                          <p:attrName>style.visibility</p:attrName>
+                                        </p:attrNameLst>
+                                      </p:cBhvr>
+                                      <p:to>
+                                        <p:strVal val="visible"/>
+                                      </p:to>
+                                    </p:set>
+                                    <p:animEffect transition="in" filter="fade">
+                                      <p:cBhvr>
+                                        <p:cTn id="44" dur="500"/>
+                                        <p:tgtEl>
+                                          <p:spTgt spid="26"/>
+                                        </p:tgtEl>
+                                      </p:cBhvr>
+                                    </p:animEffect>
+                                  </p:childTnLst>
+                                </p:cTn>
+                              </p:par>
+                            </p:childTnLst>
+                          </p:cTn>
+                        </p:par>
+                      </p:childTnLst>
+                    </p:cTn>
+                  </p:par>
+                  <p:par>
+                    <p:cTn id="45" fill="hold">
+                      <p:stCondLst>
+                        <p:cond delay="indefinite"/>
+                      </p:stCondLst>
+                      <p:childTnLst>
+                        <p:par>
+                          <p:cTn id="46" fill="hold">
+                            <p:stCondLst>
+                              <p:cond delay="0"/>
+                            </p:stCondLst>
+                            <p:childTnLst>
+                              <p:par>
+                                <p:cTn id="47" presetID="10" presetClass="entr" presetSubtype="0" fill="hold" grpId="0" nodeType="clickEffect">
+                                  <p:stCondLst>
+                                    <p:cond delay="0"/>
+                                  </p:stCondLst>
+                                  <p:childTnLst>
+                                    <p:set>
+                                      <p:cBhvr>
+                                        <p:cTn id="48" dur="1" fill="hold">
+                                          <p:stCondLst>
+                                            <p:cond delay="0"/>
+                                          </p:stCondLst>
+                                        </p:cTn>
+                                        <p:tgtEl>
+                                          <p:spTgt spid="29"/>
+                                        </p:tgtEl>
+                                        <p:attrNameLst>
+                                          <p:attrName>style.visibility</p:attrName>
+                                        </p:attrNameLst>
+                                      </p:cBhvr>
+                                      <p:to>
+                                        <p:strVal val="visible"/>
+                                      </p:to>
+                                    </p:set>
+                                    <p:animEffect transition="in" filter="fade">
+                                      <p:cBhvr>
+                                        <p:cTn id="49" dur="500"/>
+                                        <p:tgtEl>
+                                          <p:spTgt spid="29"/>
+                                        </p:tgtEl>
+                                      </p:cBhvr>
+                                    </p:animEffect>
+                                  </p:childTnLst>
+                                </p:cTn>
+                              </p:par>
+                            </p:childTnLst>
+                          </p:cTn>
+                        </p:par>
+                      </p:childTnLst>
+                    </p:cTn>
+                  </p:par>
+                  <p:par>
+                    <p:cTn id="50" fill="hold">
+                      <p:stCondLst>
+                        <p:cond delay="indefinite"/>
+                      </p:stCondLst>
+                      <p:childTnLst>
+                        <p:par>
+                          <p:cTn id="51" fill="hold">
+                            <p:stCondLst>
+                              <p:cond delay="0"/>
+                            </p:stCondLst>
+                            <p:childTnLst>
+                              <p:par>
+                                <p:cTn id="52" presetID="10" presetClass="entr" presetSubtype="0" fill="hold" grpId="0" nodeType="clickEffect">
+                                  <p:stCondLst>
+                                    <p:cond delay="0"/>
+                                  </p:stCondLst>
+                                  <p:childTnLst>
+                                    <p:set>
+                                      <p:cBhvr>
+                                        <p:cTn id="53" dur="1" fill="hold">
+                                          <p:stCondLst>
+                                            <p:cond delay="0"/>
+                                          </p:stCondLst>
+                                        </p:cTn>
+                                        <p:tgtEl>
+                                          <p:spTgt spid="30"/>
+                                        </p:tgtEl>
+                                        <p:attrNameLst>
+                                          <p:attrName>style.visibility</p:attrName>
+                                        </p:attrNameLst>
+                                      </p:cBhvr>
+                                      <p:to>
+                                        <p:strVal val="visible"/>
+                                      </p:to>
+                                    </p:set>
+                                    <p:animEffect transition="in" filter="fade">
+                                      <p:cBhvr>
+                                        <p:cTn id="54" dur="500"/>
+                                        <p:tgtEl>
+                                          <p:spTgt spid="30"/>
+                                        </p:tgtEl>
+                                      </p:cBhvr>
+                                    </p:animEffect>
+                                  </p:childTnLst>
+                                </p:cTn>
+                              </p:par>
+                            </p:childTnLst>
+                          </p:cTn>
+                        </p:par>
+                      </p:childTnLst>
+                    </p:cTn>
+                  </p:par>
+                  <p:par>
+                    <p:cTn id="55" fill="hold">
+                      <p:stCondLst>
+                        <p:cond delay="indefinite"/>
+                      </p:stCondLst>
+                      <p:childTnLst>
+                        <p:par>
+                          <p:cTn id="56" fill="hold">
+                            <p:stCondLst>
+                              <p:cond delay="0"/>
+                            </p:stCondLst>
+                            <p:childTnLst>
+                              <p:par>
+                                <p:cTn id="57" presetID="10" presetClass="entr" presetSubtype="0" fill="hold" grpId="0" nodeType="clickEffect">
+                                  <p:stCondLst>
+                                    <p:cond delay="0"/>
+                                  </p:stCondLst>
+                                  <p:childTnLst>
+                                    <p:set>
+                                      <p:cBhvr>
+                                        <p:cTn id="58" dur="1" fill="hold">
+                                          <p:stCondLst>
+                                            <p:cond delay="0"/>
+                                          </p:stCondLst>
+                                        </p:cTn>
+                                        <p:tgtEl>
+                                          <p:spTgt spid="33"/>
+                                        </p:tgtEl>
+                                        <p:attrNameLst>
+                                          <p:attrName>style.visibility</p:attrName>
+                                        </p:attrNameLst>
+                                      </p:cBhvr>
+                                      <p:to>
+                                        <p:strVal val="visible"/>
+                                      </p:to>
+                                    </p:set>
+                                    <p:animEffect transition="in" filter="fade">
+                                      <p:cBhvr>
+                                        <p:cTn id="59" dur="500"/>
+                                        <p:tgtEl>
+                                          <p:spTgt spid="33"/>
+                                        </p:tgtEl>
+                                      </p:cBhvr>
+                                    </p:animEffect>
+                                  </p:childTnLst>
+                                </p:cTn>
+                              </p:par>
+                            </p:childTnLst>
+                          </p:cTn>
+                        </p:par>
+                      </p:childTnLst>
+                    </p:cTn>
+                  </p:par>
+                  <p:par>
+                    <p:cTn id="60" fill="hold">
+                      <p:stCondLst>
+                        <p:cond delay="indefinite"/>
+                      </p:stCondLst>
+                      <p:childTnLst>
+                        <p:par>
+                          <p:cTn id="61" fill="hold">
+                            <p:stCondLst>
+                              <p:cond delay="0"/>
+                            </p:stCondLst>
+                            <p:childTnLst>
+                              <p:par>
+                                <p:cTn id="62" presetID="10" presetClass="entr" presetSubtype="0" fill="hold" grpId="0" nodeType="clickEffect">
+                                  <p:stCondLst>
+                                    <p:cond delay="0"/>
+                                  </p:stCondLst>
+                                  <p:childTnLst>
+                                    <p:set>
+                                      <p:cBhvr>
+                                        <p:cTn id="63" dur="1" fill="hold">
+                                          <p:stCondLst>
+                                            <p:cond delay="0"/>
+                                          </p:stCondLst>
+                                        </p:cTn>
+                                        <p:tgtEl>
+                                          <p:spTgt spid="34"/>
+                                        </p:tgtEl>
+                                        <p:attrNameLst>
+                                          <p:attrName>style.visibility</p:attrName>
+                                        </p:attrNameLst>
+                                      </p:cBhvr>
+                                      <p:to>
+                                        <p:strVal val="visible"/>
+                                      </p:to>
+                                    </p:set>
+                                    <p:animEffect transition="in" filter="fade">
+                                      <p:cBhvr>
+                                        <p:cTn id="64" dur="500"/>
+                                        <p:tgtEl>
+                                          <p:spTgt spid="34"/>
+                                        </p:tgtEl>
+                                      </p:cBhvr>
+                                    </p:animEffect>
+                                  </p:childTnLst>
+                                </p:cTn>
+                              </p:par>
+                            </p:childTnLst>
+                          </p:cTn>
+                        </p:par>
+                      </p:childTnLst>
+                    </p:cTn>
+                  </p:par>
+                  <p:par>
+                    <p:cTn id="65" fill="hold">
+                      <p:stCondLst>
+                        <p:cond delay="indefinite"/>
+                      </p:stCondLst>
+                      <p:childTnLst>
+                        <p:par>
+                          <p:cTn id="66" fill="hold">
+                            <p:stCondLst>
+                              <p:cond delay="0"/>
+                            </p:stCondLst>
+                            <p:childTnLst>
+                              <p:par>
+                                <p:cTn id="67" presetID="10" presetClass="entr" presetSubtype="0" fill="hold" grpId="0" nodeType="clickEffect">
+                                  <p:stCondLst>
+                                    <p:cond delay="0"/>
+                                  </p:stCondLst>
+                                  <p:childTnLst>
+                                    <p:set>
+                                      <p:cBhvr>
+                                        <p:cTn id="68" dur="1" fill="hold">
+                                          <p:stCondLst>
+                                            <p:cond delay="0"/>
+                                          </p:stCondLst>
+                                        </p:cTn>
+                                        <p:tgtEl>
+                                          <p:spTgt spid="37"/>
+                                        </p:tgtEl>
+                                        <p:attrNameLst>
+                                          <p:attrName>style.visibility</p:attrName>
+                                        </p:attrNameLst>
+                                      </p:cBhvr>
+                                      <p:to>
+                                        <p:strVal val="visible"/>
+                                      </p:to>
+                                    </p:set>
+                                    <p:animEffect transition="in" filter="fade">
+                                      <p:cBhvr>
+                                        <p:cTn id="69" dur="500"/>
+                                        <p:tgtEl>
+                                          <p:spTgt spid="37"/>
+                                        </p:tgtEl>
+                                      </p:cBhvr>
+                                    </p:animEffect>
+                                  </p:childTnLst>
+                                </p:cTn>
+                              </p:par>
+                            </p:childTnLst>
+                          </p:cTn>
+                        </p:par>
+                      </p:childTnLst>
+                    </p:cTn>
+                  </p:par>
+                  <p:par>
+                    <p:cTn id="70" fill="hold">
+                      <p:stCondLst>
+                        <p:cond delay="indefinite"/>
+                      </p:stCondLst>
+                      <p:childTnLst>
+                        <p:par>
+                          <p:cTn id="71" fill="hold">
+                            <p:stCondLst>
+                              <p:cond delay="0"/>
+                            </p:stCondLst>
+                            <p:childTnLst>
+                              <p:par>
+                                <p:cTn id="72" presetID="10" presetClass="entr" presetSubtype="0" fill="hold" grpId="0" nodeType="clickEffect">
+                                  <p:stCondLst>
+                                    <p:cond delay="0"/>
+                                  </p:stCondLst>
+                                  <p:childTnLst>
+                                    <p:set>
+                                      <p:cBhvr>
+                                        <p:cTn id="73" dur="1" fill="hold">
+                                          <p:stCondLst>
+                                            <p:cond delay="0"/>
+                                          </p:stCondLst>
+                                        </p:cTn>
+                                        <p:tgtEl>
+                                          <p:spTgt spid="38"/>
+                                        </p:tgtEl>
+                                        <p:attrNameLst>
+                                          <p:attrName>style.visibility</p:attrName>
+                                        </p:attrNameLst>
+                                      </p:cBhvr>
+                                      <p:to>
+                                        <p:strVal val="visible"/>
+                                      </p:to>
+                                    </p:set>
+                                    <p:animEffect transition="in" filter="fade">
+                                      <p:cBhvr>
+                                        <p:cTn id="74" dur="500"/>
+                                        <p:tgtEl>
+                                          <p:spTgt spid="38"/>
+                                        </p:tgtEl>
+                                      </p:cBhvr>
+                                    </p:animEffect>
+                                  </p:childTnLst>
+                                </p:cTn>
+                              </p:par>
+                            </p:childTnLst>
+                          </p:cTn>
+                        </p:par>
+                      </p:childTnLst>
+                    </p:cTn>
+                  </p:par>
+                  <p:par>
+                    <p:cTn id="75" fill="hold">
+                      <p:stCondLst>
+                        <p:cond delay="indefinite"/>
+                      </p:stCondLst>
+                      <p:childTnLst>
+                        <p:par>
+                          <p:cTn id="76" fill="hold">
+                            <p:stCondLst>
+                              <p:cond delay="0"/>
+                            </p:stCondLst>
+                            <p:childTnLst>
+                              <p:par>
+                                <p:cTn id="77" presetID="10" presetClass="entr" presetSubtype="0" fill="hold" grpId="0" nodeType="clickEffect">
+                                  <p:stCondLst>
+                                    <p:cond delay="0"/>
+                                  </p:stCondLst>
+                                  <p:childTnLst>
+                                    <p:set>
+                                      <p:cBhvr>
+                                        <p:cTn id="78" dur="1" fill="hold">
+                                          <p:stCondLst>
+                                            <p:cond delay="0"/>
+                                          </p:stCondLst>
+                                        </p:cTn>
+                                        <p:tgtEl>
+                                          <p:spTgt spid="41"/>
+                                        </p:tgtEl>
+                                        <p:attrNameLst>
+                                          <p:attrName>style.visibility</p:attrName>
+                                        </p:attrNameLst>
+                                      </p:cBhvr>
+                                      <p:to>
+                                        <p:strVal val="visible"/>
+                                      </p:to>
+                                    </p:set>
+                                    <p:animEffect transition="in" filter="fade">
+                                      <p:cBhvr>
+                                        <p:cTn id="79" dur="500"/>
+                                        <p:tgtEl>
+                                          <p:spTgt spid="41"/>
+                                        </p:tgtEl>
+                                      </p:cBhvr>
+                                    </p:animEffect>
+                                  </p:childTnLst>
+                                </p:cTn>
+                              </p:par>
+                            </p:childTnLst>
+                          </p:cTn>
+                        </p:par>
+                      </p:childTnLst>
+                    </p:cTn>
+                  </p:par>
+                  <p:par>
+                    <p:cTn id="80" fill="hold">
+                      <p:stCondLst>
+                        <p:cond delay="indefinite"/>
+                      </p:stCondLst>
+                      <p:childTnLst>
+                        <p:par>
+                          <p:cTn id="81" fill="hold">
+                            <p:stCondLst>
+                              <p:cond delay="0"/>
+                            </p:stCondLst>
+                            <p:childTnLst>
+                              <p:par>
+                                <p:cTn id="82" presetID="10" presetClass="entr" presetSubtype="0" fill="hold" grpId="0" nodeType="clickEffect">
+                                  <p:stCondLst>
+                                    <p:cond delay="0"/>
+                                  </p:stCondLst>
+                                  <p:childTnLst>
+                                    <p:set>
+                                      <p:cBhvr>
+                                        <p:cTn id="83" dur="1" fill="hold">
+                                          <p:stCondLst>
+                                            <p:cond delay="0"/>
+                                          </p:stCondLst>
+                                        </p:cTn>
+                                        <p:tgtEl>
+                                          <p:spTgt spid="42"/>
+                                        </p:tgtEl>
+                                        <p:attrNameLst>
+                                          <p:attrName>style.visibility</p:attrName>
+                                        </p:attrNameLst>
+                                      </p:cBhvr>
+                                      <p:to>
+                                        <p:strVal val="visible"/>
+                                      </p:to>
+                                    </p:set>
+                                    <p:animEffect transition="in" filter="fade">
+                                      <p:cBhvr>
+                                        <p:cTn id="84" dur="500"/>
+                                        <p:tgtEl>
+                                          <p:spTgt spid="42"/>
+                                        </p:tgtEl>
+                                      </p:cBhvr>
+                                    </p:animEffect>
+                                  </p:childTnLst>
+                                </p:cTn>
+                              </p:par>
+                            </p:childTnLst>
+                          </p:cTn>
+                        </p:par>
+                      </p:childTnLst>
+                    </p:cTn>
+                  </p:par>
+                  <p:par>
+                    <p:cTn id="85" fill="hold">
+                      <p:stCondLst>
+                        <p:cond delay="indefinite"/>
+                      </p:stCondLst>
+                      <p:childTnLst>
+                        <p:par>
+                          <p:cTn id="86" fill="hold">
+                            <p:stCondLst>
+                              <p:cond delay="0"/>
+                            </p:stCondLst>
+                            <p:childTnLst>
+                              <p:par>
+                                <p:cTn id="87" presetID="10" presetClass="entr" presetSubtype="0" fill="hold" grpId="0" nodeType="clickEffect">
+                                  <p:stCondLst>
+                                    <p:cond delay="0"/>
+                                  </p:stCondLst>
+                                  <p:childTnLst>
+                                    <p:set>
+                                      <p:cBhvr>
+                                        <p:cTn id="88" dur="1" fill="hold">
+                                          <p:stCondLst>
+                                            <p:cond delay="0"/>
+                                          </p:stCondLst>
+                                        </p:cTn>
+                                        <p:tgtEl>
+                                          <p:spTgt spid="45"/>
+                                        </p:tgtEl>
+                                        <p:attrNameLst>
+                                          <p:attrName>style.visibility</p:attrName>
+                                        </p:attrNameLst>
+                                      </p:cBhvr>
+                                      <p:to>
+                                        <p:strVal val="visible"/>
+                                      </p:to>
+                                    </p:set>
+                                    <p:animEffect transition="in" filter="fade">
+                                      <p:cBhvr>
+                                        <p:cTn id="89" dur="500"/>
+                                        <p:tgtEl>
+                                          <p:spTgt spid="45"/>
+                                        </p:tgtEl>
+                                      </p:cBhvr>
+                                    </p:animEffect>
+                                  </p:childTnLst>
+                                </p:cTn>
+                              </p:par>
+                            </p:childTnLst>
+                          </p:cTn>
+                        </p:par>
+                      </p:childTnLst>
+                    </p:cTn>
+                  </p:par>
+                  <p:par>
+                    <p:cTn id="90" fill="hold">
+                      <p:stCondLst>
+                        <p:cond delay="indefinite"/>
+                      </p:stCondLst>
+                      <p:childTnLst>
+                        <p:par>
+                          <p:cTn id="91" fill="hold">
+                            <p:stCondLst>
+                              <p:cond delay="0"/>
+                            </p:stCondLst>
+                            <p:childTnLst>
+                              <p:par>
+                                <p:cTn id="92" presetID="10" presetClass="entr" presetSubtype="0" fill="hold" grpId="0" nodeType="clickEffect">
+                                  <p:stCondLst>
+                                    <p:cond delay="0"/>
+                                  </p:stCondLst>
+                                  <p:childTnLst>
+                                    <p:set>
+                                      <p:cBhvr>
+                                        <p:cTn id="93" dur="1" fill="hold">
+                                          <p:stCondLst>
+                                            <p:cond delay="0"/>
+                                          </p:stCondLst>
+                                        </p:cTn>
+                                        <p:tgtEl>
+                                          <p:spTgt spid="46"/>
+                                        </p:tgtEl>
+                                        <p:attrNameLst>
+                                          <p:attrName>style.visibility</p:attrName>
+                                        </p:attrNameLst>
+                                      </p:cBhvr>
+                                      <p:to>
+                                        <p:strVal val="visible"/>
+                                      </p:to>
+                                    </p:set>
+                                    <p:animEffect transition="in" filter="fade">
+                                      <p:cBhvr>
+                                        <p:cTn id="94" dur="500"/>
+                                        <p:tgtEl>
+                                          <p:spTgt spid="46"/>
+                                        </p:tgtEl>
+                                      </p:cBhvr>
+                                    </p:animEffect>
+                                  </p:childTnLst>
+                                </p:cTn>
+                              </p:par>
+                            </p:childTnLst>
+                          </p:cTn>
+                        </p:par>
+                      </p:childTnLst>
+                    </p:cTn>
+                  </p:par>
+                  <p:par>
+                    <p:cTn id="95" fill="hold">
+                      <p:stCondLst>
+                        <p:cond delay="indefinite"/>
+                      </p:stCondLst>
+                      <p:childTnLst>
+                        <p:par>
+                          <p:cTn id="96" fill="hold">
+                            <p:stCondLst>
+                              <p:cond delay="0"/>
+                            </p:stCondLst>
+                            <p:childTnLst>
+                              <p:par>
+                                <p:cTn id="97" presetID="10" presetClass="entr" presetSubtype="0" fill="hold" grpId="0" nodeType="clickEffect">
+                                  <p:stCondLst>
+                                    <p:cond delay="0"/>
+                                  </p:stCondLst>
+                                  <p:childTnLst>
+                                    <p:set>
+                                      <p:cBhvr>
+                                        <p:cTn id="98" dur="1" fill="hold">
+                                          <p:stCondLst>
+                                            <p:cond delay="0"/>
+                                          </p:stCondLst>
+                                        </p:cTn>
+                                        <p:tgtEl>
+                                          <p:spTgt spid="49"/>
+                                        </p:tgtEl>
+                                        <p:attrNameLst>
+                                          <p:attrName>style.visibility</p:attrName>
+                                        </p:attrNameLst>
+                                      </p:cBhvr>
+                                      <p:to>
+                                        <p:strVal val="visible"/>
+                                      </p:to>
+                                    </p:set>
+                                    <p:animEffect transition="in" filter="fade">
+                                      <p:cBhvr>
+                                        <p:cTn id="99" dur="500"/>
+                                        <p:tgtEl>
+                                          <p:spTgt spid="49"/>
+                                        </p:tgtEl>
+                                      </p:cBhvr>
+                                    </p:animEffect>
+                                  </p:childTnLst>
+                                </p:cTn>
+                              </p:par>
+                            </p:childTnLst>
+                          </p:cTn>
+                        </p:par>
+                      </p:childTnLst>
+                    </p:cTn>
+                  </p:par>
+                  <p:par>
+                    <p:cTn id="100" fill="hold">
+                      <p:stCondLst>
+                        <p:cond delay="indefinite"/>
+                      </p:stCondLst>
+                      <p:childTnLst>
+                        <p:par>
+                          <p:cTn id="101" fill="hold">
+                            <p:stCondLst>
+                              <p:cond delay="0"/>
+                            </p:stCondLst>
+                            <p:childTnLst>
+                              <p:par>
+                                <p:cTn id="102" presetID="10" presetClass="entr" presetSubtype="0" fill="hold" grpId="0" nodeType="clickEffect">
+                                  <p:stCondLst>
+                                    <p:cond delay="0"/>
+                                  </p:stCondLst>
+                                  <p:childTnLst>
+                                    <p:set>
+                                      <p:cBhvr>
+                                        <p:cTn id="103" dur="1" fill="hold">
+                                          <p:stCondLst>
+                                            <p:cond delay="0"/>
+                                          </p:stCondLst>
+                                        </p:cTn>
+                                        <p:tgtEl>
+                                          <p:spTgt spid="50"/>
+                                        </p:tgtEl>
+                                        <p:attrNameLst>
+                                          <p:attrName>style.visibility</p:attrName>
+                                        </p:attrNameLst>
+                                      </p:cBhvr>
+                                      <p:to>
+                                        <p:strVal val="visible"/>
+                                      </p:to>
+                                    </p:set>
+                                    <p:animEffect transition="in" filter="fade">
+                                      <p:cBhvr>
+                                        <p:cTn id="104" dur="500"/>
+                                        <p:tgtEl>
+                                          <p:spTgt spid="50"/>
+                                        </p:tgtEl>
+                                      </p:cBhvr>
+                                    </p:animEffect>
+                                  </p:childTnLst>
+                                </p:cTn>
+                              </p:par>
+                            </p:childTnLst>
+                          </p:cTn>
+                        </p:par>
+                      </p:childTnLst>
+                    </p:cTn>
+                  </p:par>
+                  <p:par>
+                    <p:cTn id="105" fill="hold">
+                      <p:stCondLst>
+                        <p:cond delay="indefinite"/>
+                      </p:stCondLst>
+                      <p:childTnLst>
+                        <p:par>
+                          <p:cTn id="106" fill="hold">
+                            <p:stCondLst>
+                              <p:cond delay="0"/>
+                            </p:stCondLst>
+                            <p:childTnLst>
+                              <p:par>
+                                <p:cTn id="107" presetID="10" presetClass="entr" presetSubtype="0" fill="hold" grpId="0" nodeType="clickEffect">
+                                  <p:stCondLst>
+                                    <p:cond delay="0"/>
+                                  </p:stCondLst>
+                                  <p:childTnLst>
+                                    <p:set>
+                                      <p:cBhvr>
+                                        <p:cTn id="108" dur="1" fill="hold">
+                                          <p:stCondLst>
+                                            <p:cond delay="0"/>
+                                          </p:stCondLst>
+                                        </p:cTn>
+                                        <p:tgtEl>
+                                          <p:spTgt spid="53"/>
+                                        </p:tgtEl>
+                                        <p:attrNameLst>
+                                          <p:attrName>style.visibility</p:attrName>
+                                        </p:attrNameLst>
+                                      </p:cBhvr>
+                                      <p:to>
+                                        <p:strVal val="visible"/>
+                                      </p:to>
+                                    </p:set>
+                                    <p:animEffect transition="in" filter="fade">
+                                      <p:cBhvr>
+                                        <p:cTn id="109" dur="500"/>
+                                        <p:tgtEl>
+                                          <p:spTgt spid="53"/>
+                                        </p:tgtEl>
+                                      </p:cBhvr>
+                                    </p:animEffect>
+                                  </p:childTnLst>
+                                </p:cTn>
+                              </p:par>
+                            </p:childTnLst>
+                          </p:cTn>
+                        </p:par>
+                      </p:childTnLst>
+                    </p:cTn>
+                  </p:par>
+                  <p:par>
+                    <p:cTn id="110" fill="hold">
+                      <p:stCondLst>
+                        <p:cond delay="indefinite"/>
+                      </p:stCondLst>
+                      <p:childTnLst>
+                        <p:par>
+                          <p:cTn id="111" fill="hold">
+                            <p:stCondLst>
+                              <p:cond delay="0"/>
+                            </p:stCondLst>
+                            <p:childTnLst>
+                              <p:par>
+                                <p:cTn id="112" presetID="10" presetClass="entr" presetSubtype="0" fill="hold" grpId="0" nodeType="clickEffect">
+                                  <p:stCondLst>
+                                    <p:cond delay="0"/>
+                                  </p:stCondLst>
+                                  <p:childTnLst>
+                                    <p:set>
+                                      <p:cBhvr>
+                                        <p:cTn id="113" dur="1" fill="hold">
+                                          <p:stCondLst>
+                                            <p:cond delay="0"/>
+                                          </p:stCondLst>
+                                        </p:cTn>
+                                        <p:tgtEl>
+                                          <p:spTgt spid="54"/>
+                                        </p:tgtEl>
+                                        <p:attrNameLst>
+                                          <p:attrName>style.visibility</p:attrName>
+                                        </p:attrNameLst>
+                                      </p:cBhvr>
+                                      <p:to>
+                                        <p:strVal val="visible"/>
+                                      </p:to>
+                                    </p:set>
+                                    <p:animEffect transition="in" filter="fade">
+                                      <p:cBhvr>
+                                        <p:cTn id="114" dur="500"/>
+                                        <p:tgtEl>
+                                          <p:spTgt spid="54"/>
+                                        </p:tgtEl>
+                                      </p:cBhvr>
+                                    </p:animEffect>
+                                  </p:childTnLst>
+                                </p:cTn>
+                              </p:par>
+                            </p:childTnLst>
+                          </p:cTn>
+                        </p:par>
+                      </p:childTnLst>
+                    </p:cTn>
+                  </p:par>
+                  <p:par>
+                    <p:cTn id="115" fill="hold">
+                      <p:stCondLst>
+                        <p:cond delay="indefinite"/>
+                      </p:stCondLst>
+                      <p:childTnLst>
+                        <p:par>
+                          <p:cTn id="116" fill="hold">
+                            <p:stCondLst>
+                              <p:cond delay="0"/>
+                            </p:stCondLst>
+                            <p:childTnLst>
+                              <p:par>
+                                <p:cTn id="117" presetID="10" presetClass="entr" presetSubtype="0" fill="hold" grpId="0" nodeType="clickEffect">
+                                  <p:stCondLst>
+                                    <p:cond delay="0"/>
+                                  </p:stCondLst>
+                                  <p:childTnLst>
+                                    <p:set>
+                                      <p:cBhvr>
+                                        <p:cTn id="118" dur="1" fill="hold">
+                                          <p:stCondLst>
+                                            <p:cond delay="0"/>
+                                          </p:stCondLst>
+                                        </p:cTn>
+                                        <p:tgtEl>
+                                          <p:spTgt spid="57"/>
+                                        </p:tgtEl>
+                                        <p:attrNameLst>
+                                          <p:attrName>style.visibility</p:attrName>
+                                        </p:attrNameLst>
+                                      </p:cBhvr>
+                                      <p:to>
+                                        <p:strVal val="visible"/>
+                                      </p:to>
+                                    </p:set>
+                                    <p:animEffect transition="in" filter="fade">
+                                      <p:cBhvr>
+                                        <p:cTn id="119" dur="500"/>
+                                        <p:tgtEl>
+                                          <p:spTgt spid="57"/>
+                                        </p:tgtEl>
+                                      </p:cBhvr>
+                                    </p:animEffect>
+                                  </p:childTnLst>
+                                </p:cTn>
+                              </p:par>
+                            </p:childTnLst>
+                          </p:cTn>
+                        </p:par>
+                      </p:childTnLst>
+                    </p:cTn>
+                  </p:par>
+                  <p:par>
+                    <p:cTn id="120" fill="hold">
+                      <p:stCondLst>
+                        <p:cond delay="indefinite"/>
+                      </p:stCondLst>
+                      <p:childTnLst>
+                        <p:par>
+                          <p:cTn id="121" fill="hold">
+                            <p:stCondLst>
+                              <p:cond delay="0"/>
+                            </p:stCondLst>
+                            <p:childTnLst>
+                              <p:par>
+                                <p:cTn id="122" presetID="10" presetClass="entr" presetSubtype="0" fill="hold" grpId="0" nodeType="clickEffect">
+                                  <p:stCondLst>
+                                    <p:cond delay="0"/>
+                                  </p:stCondLst>
+                                  <p:childTnLst>
+                                    <p:set>
+                                      <p:cBhvr>
+                                        <p:cTn id="123" dur="1" fill="hold">
+                                          <p:stCondLst>
+                                            <p:cond delay="0"/>
+                                          </p:stCondLst>
+                                        </p:cTn>
+                                        <p:tgtEl>
+                                          <p:spTgt spid="58"/>
+                                        </p:tgtEl>
+                                        <p:attrNameLst>
+                                          <p:attrName>style.visibility</p:attrName>
+                                        </p:attrNameLst>
+                                      </p:cBhvr>
+                                      <p:to>
+                                        <p:strVal val="visible"/>
+                                      </p:to>
+                                    </p:set>
+                                    <p:animEffect transition="in" filter="fade">
+                                      <p:cBhvr>
+                                        <p:cTn id="124" dur="500"/>
+                                        <p:tgtEl>
+                                          <p:spTgt spid="58"/>
+                                        </p:tgtEl>
+                                      </p:cBhvr>
+                                    </p:animEffect>
+                                  </p:childTnLst>
+                                </p:cTn>
+                              </p:par>
+                            </p:childTnLst>
+                          </p:cTn>
+                        </p:par>
+                      </p:childTnLst>
+                    </p:cTn>
+                  </p:par>
+                  <p:par>
+                    <p:cTn id="125" fill="hold">
+                      <p:stCondLst>
+                        <p:cond delay="indefinite"/>
+                      </p:stCondLst>
+                      <p:childTnLst>
+                        <p:par>
+                          <p:cTn id="126" fill="hold">
+                            <p:stCondLst>
+                              <p:cond delay="0"/>
+                            </p:stCondLst>
+                            <p:childTnLst>
+                              <p:par>
+                                <p:cTn id="127" presetID="10" presetClass="entr" presetSubtype="0" fill="hold" grpId="0" nodeType="clickEffect">
+                                  <p:stCondLst>
+                                    <p:cond delay="0"/>
+                                  </p:stCondLst>
+                                  <p:childTnLst>
+                                    <p:set>
+                                      <p:cBhvr>
+                                        <p:cTn id="128" dur="1" fill="hold">
+                                          <p:stCondLst>
+                                            <p:cond delay="0"/>
+                                          </p:stCondLst>
+                                        </p:cTn>
+                                        <p:tgtEl>
+                                          <p:spTgt spid="61"/>
+                                        </p:tgtEl>
+                                        <p:attrNameLst>
+                                          <p:attrName>style.visibility</p:attrName>
+                                        </p:attrNameLst>
+                                      </p:cBhvr>
+                                      <p:to>
+                                        <p:strVal val="visible"/>
+                                      </p:to>
+                                    </p:set>
+                                    <p:animEffect transition="in" filter="fade">
+                                      <p:cBhvr>
+                                        <p:cTn id="129" dur="500"/>
+                                        <p:tgtEl>
+                                          <p:spTgt spid="61"/>
+                                        </p:tgtEl>
+                                      </p:cBhvr>
+                                    </p:animEffect>
+                                  </p:childTnLst>
+                                </p:cTn>
+                              </p:par>
+                            </p:childTnLst>
+                          </p:cTn>
+                        </p:par>
+                      </p:childTnLst>
+                    </p:cTn>
+                  </p:par>
+                  <p:par>
+                    <p:cTn id="130" fill="hold">
+                      <p:stCondLst>
+                        <p:cond delay="indefinite"/>
+                      </p:stCondLst>
+                      <p:childTnLst>
+                        <p:par>
+                          <p:cTn id="131" fill="hold">
+                            <p:stCondLst>
+                              <p:cond delay="0"/>
+                            </p:stCondLst>
+                            <p:childTnLst>
+                              <p:par>
+                                <p:cTn id="132" presetID="10" presetClass="entr" presetSubtype="0" fill="hold" grpId="0" nodeType="clickEffect">
+                                  <p:stCondLst>
+                                    <p:cond delay="0"/>
+                                  </p:stCondLst>
+                                  <p:childTnLst>
+                                    <p:set>
+                                      <p:cBhvr>
+                                        <p:cTn id="133" dur="1" fill="hold">
+                                          <p:stCondLst>
+                                            <p:cond delay="0"/>
+                                          </p:stCondLst>
+                                        </p:cTn>
+                                        <p:tgtEl>
+                                          <p:spTgt spid="62"/>
+                                        </p:tgtEl>
+                                        <p:attrNameLst>
+                                          <p:attrName>style.visibility</p:attrName>
+                                        </p:attrNameLst>
+                                      </p:cBhvr>
+                                      <p:to>
+                                        <p:strVal val="visible"/>
+                                      </p:to>
+                                    </p:set>
+                                    <p:animEffect transition="in" filter="fade">
+                                      <p:cBhvr>
+                                        <p:cTn id="134" dur="500"/>
+                                        <p:tgtEl>
+                                          <p:spTgt spid="62"/>
+                                        </p:tgtEl>
+                                      </p:cBhvr>
+                                    </p:animEffect>
+                                  </p:childTnLst>
+                                </p:cTn>
+                              </p:par>
+                            </p:childTnLst>
+                          </p:cTn>
+                        </p:par>
+                      </p:childTnLst>
+                    </p:cTn>
+                  </p:par>
+                  <p:par>
+                    <p:cTn id="135" fill="hold">
+                      <p:stCondLst>
+                        <p:cond delay="indefinite"/>
+                      </p:stCondLst>
+                      <p:childTnLst>
+                        <p:par>
+                          <p:cTn id="136" fill="hold">
+                            <p:stCondLst>
+                              <p:cond delay="0"/>
+                            </p:stCondLst>
+                            <p:childTnLst>
+                              <p:par>
+                                <p:cTn id="137" presetID="10" presetClass="entr" presetSubtype="0" fill="hold" grpId="0" nodeType="clickEffect">
+                                  <p:stCondLst>
+                                    <p:cond delay="0"/>
+                                  </p:stCondLst>
+                                  <p:childTnLst>
+                                    <p:set>
+                                      <p:cBhvr>
+                                        <p:cTn id="138" dur="1" fill="hold">
+                                          <p:stCondLst>
+                                            <p:cond delay="0"/>
+                                          </p:stCondLst>
+                                        </p:cTn>
+                                        <p:tgtEl>
+                                          <p:spTgt spid="65"/>
+                                        </p:tgtEl>
+                                        <p:attrNameLst>
+                                          <p:attrName>style.visibility</p:attrName>
+                                        </p:attrNameLst>
+                                      </p:cBhvr>
+                                      <p:to>
+                                        <p:strVal val="visible"/>
+                                      </p:to>
+                                    </p:set>
+                                    <p:animEffect transition="in" filter="fade">
+                                      <p:cBhvr>
+                                        <p:cTn id="139" dur="500"/>
+                                        <p:tgtEl>
+                                          <p:spTgt spid="65"/>
+                                        </p:tgtEl>
+                                      </p:cBhvr>
+                                    </p:animEffect>
+                                  </p:childTnLst>
+                                </p:cTn>
+                              </p:par>
+                            </p:childTnLst>
+                          </p:cTn>
+                        </p:par>
+                      </p:childTnLst>
+                    </p:cTn>
+                  </p:par>
+                  <p:par>
+                    <p:cTn id="140" fill="hold">
+                      <p:stCondLst>
+                        <p:cond delay="indefinite"/>
+                      </p:stCondLst>
+                      <p:childTnLst>
+                        <p:par>
+                          <p:cTn id="141" fill="hold">
+                            <p:stCondLst>
+                              <p:cond delay="0"/>
+                            </p:stCondLst>
+                            <p:childTnLst>
+                              <p:par>
+                                <p:cTn id="142" presetID="10" presetClass="entr" presetSubtype="0" fill="hold" grpId="0" nodeType="clickEffect">
+                                  <p:stCondLst>
+                                    <p:cond delay="0"/>
+                                  </p:stCondLst>
+                                  <p:childTnLst>
+                                    <p:set>
+                                      <p:cBhvr>
+                                        <p:cTn id="143" dur="1" fill="hold">
+                                          <p:stCondLst>
+                                            <p:cond delay="0"/>
+                                          </p:stCondLst>
+                                        </p:cTn>
+                                        <p:tgtEl>
+                                          <p:spTgt spid="66"/>
+                                        </p:tgtEl>
+                                        <p:attrNameLst>
+                                          <p:attrName>style.visibility</p:attrName>
+                                        </p:attrNameLst>
+                                      </p:cBhvr>
+                                      <p:to>
+                                        <p:strVal val="visible"/>
+                                      </p:to>
+                                    </p:set>
+                                    <p:animEffect transition="in" filter="fade">
+                                      <p:cBhvr>
+                                        <p:cTn id="144" dur="500"/>
+                                        <p:tgtEl>
+                                          <p:spTgt spid="66"/>
+                                        </p:tgtEl>
+                                      </p:cBhvr>
+                                    </p:animEffect>
+                                  </p:childTnLst>
+                                </p:cTn>
+                              </p:par>
+                            </p:childTnLst>
+                          </p:cTn>
+                        </p:par>
+                      </p:childTnLst>
+                    </p:cTn>
+                  </p:par>
+                  <p:par>
+                    <p:cTn id="145" fill="hold">
+                      <p:stCondLst>
+                        <p:cond delay="indefinite"/>
+                      </p:stCondLst>
+                      <p:childTnLst>
+                        <p:par>
+                          <p:cTn id="146" fill="hold">
+                            <p:stCondLst>
+                              <p:cond delay="0"/>
+                            </p:stCondLst>
+                            <p:childTnLst>
+                              <p:par>
+                                <p:cTn id="147" presetID="10" presetClass="entr" presetSubtype="0" fill="hold" grpId="0" nodeType="clickEffect">
+                                  <p:stCondLst>
+                                    <p:cond delay="0"/>
+                                  </p:stCondLst>
+                                  <p:childTnLst>
+                                    <p:set>
+                                      <p:cBhvr>
+                                        <p:cTn id="148" dur="1" fill="hold">
+                                          <p:stCondLst>
+                                            <p:cond delay="0"/>
+                                          </p:stCondLst>
+                                        </p:cTn>
+                                        <p:tgtEl>
+                                          <p:spTgt spid="69"/>
+                                        </p:tgtEl>
+                                        <p:attrNameLst>
+                                          <p:attrName>style.visibility</p:attrName>
+                                        </p:attrNameLst>
+                                      </p:cBhvr>
+                                      <p:to>
+                                        <p:strVal val="visible"/>
+                                      </p:to>
+                                    </p:set>
+                                    <p:animEffect transition="in" filter="fade">
+                                      <p:cBhvr>
+                                        <p:cTn id="149" dur="500"/>
+                                        <p:tgtEl>
+                                          <p:spTgt spid="69"/>
+                                        </p:tgtEl>
+                                      </p:cBhvr>
+                                    </p:animEffect>
+                                  </p:childTnLst>
+                                </p:cTn>
+                              </p:par>
+                            </p:childTnLst>
+                          </p:cTn>
+                        </p:par>
+                      </p:childTnLst>
+                    </p:cTn>
+                  </p:par>
+                  <p:par>
+                    <p:cTn id="150" fill="hold">
+                      <p:stCondLst>
+                        <p:cond delay="indefinite"/>
+                      </p:stCondLst>
+                      <p:childTnLst>
+                        <p:par>
+                          <p:cTn id="151" fill="hold">
+                            <p:stCondLst>
+                              <p:cond delay="0"/>
+                            </p:stCondLst>
+                            <p:childTnLst>
+                              <p:par>
+                                <p:cTn id="152" presetID="10" presetClass="entr" presetSubtype="0" fill="hold" grpId="0" nodeType="clickEffect">
+                                  <p:stCondLst>
+                                    <p:cond delay="0"/>
+                                  </p:stCondLst>
+                                  <p:childTnLst>
+                                    <p:set>
+                                      <p:cBhvr>
+                                        <p:cTn id="153" dur="1" fill="hold">
+                                          <p:stCondLst>
+                                            <p:cond delay="0"/>
+                                          </p:stCondLst>
+                                        </p:cTn>
+                                        <p:tgtEl>
+                                          <p:spTgt spid="70"/>
+                                        </p:tgtEl>
+                                        <p:attrNameLst>
+                                          <p:attrName>style.visibility</p:attrName>
+                                        </p:attrNameLst>
+                                      </p:cBhvr>
+                                      <p:to>
+                                        <p:strVal val="visible"/>
+                                      </p:to>
+                                    </p:set>
+                                    <p:animEffect transition="in" filter="fade">
+                                      <p:cBhvr>
+                                        <p:cTn id="154" dur="500"/>
+                                        <p:tgtEl>
+                                          <p:spTgt spid="70"/>
+                                        </p:tgtEl>
+                                      </p:cBhvr>
+                                    </p:animEffect>
+                                  </p:childTnLst>
+                                </p:cTn>
+                              </p:par>
+                            </p:childTnLst>
+                          </p:cTn>
+                        </p:par>
+                      </p:childTnLst>
+                    </p:cTn>
+                  </p:par>
+                </p:childTnLst>
+              </p:cTn>
+              <p:prevCondLst>
+                <p:cond evt="onPrev" delay="0">
+                  <p:tgtEl>
+                    <p:sldTgt/>
+                  </p:tgtEl>
+                </p:cond>
+              </p:prevCondLst>
+              <p:nextCondLst>
+                <p:cond evt="onNext" delay="0">
+                  <p:tgtEl>
+                    <p:sldTgt/>
+                  </p:tgtEl>
+                </p:cond>
+              </p:nextCondLst>
+            </p:seq>
+          </p:childTnLst>
+        </p:cTn>
+      </p:par>
+    </p:tnLst>
+  </p:timing>
+</p:sld>
+</file>
+
+<file path=ppt/slides/slide26.xml><?xml version="1.0" encoding="utf-8"?>
+<p:sld xmlns:a="http://schemas.openxmlformats.org/drawingml/2006/main" xmlns:p="http://schemas.openxmlformats.org/presentationml/2006/main" xmlns:r="http://schemas.openxmlformats.org/officeDocument/2006/relationships">
+  <p:cSld>
+    <p:spTree>
+      <p:nvGrpSpPr>
+        <p:cNvPr id="1" name=""/>
+        <p:cNvGrpSpPr/>
+        <p:nvPr/>
+      </p:nvGrpSpPr>
+      <p:grpSpPr/>
+      <p:sp>
+        <p:nvSpPr>
+          <p:cNvPr id="2" name="Fondo"/>
+          <p:cNvSpPr/>
+          <p:nvPr/>
+        </p:nvSpPr>
+        <p:spPr>
+          <a:xfrm>
+            <a:off x="0" y="0"/>
+            <a:ext cx="12191695" cy="6858000"/>
+          </a:xfrm>
+          <a:prstGeom prst="rect">
+            <a:avLst/>
+          </a:prstGeom>
+          <a:solidFill>
+            <a:srgbClr val="FCFBF8"/>
+          </a:solidFill>
+          <a:ln>
+            <a:noFill/>
+          </a:ln>
+          <a:effectLst/>
+        </p:spPr>
+        <p:style>
+          <a:lnRef idx="1">
+            <a:schemeClr val="accent1"/>
+          </a:lnRef>
+          <a:fillRef idx="3">
+            <a:schemeClr val="accent1"/>
+          </a:fillRef>
+          <a:effectRef idx="2">
+            <a:schemeClr val="accent1"/>
+          </a:effectRef>
+          <a:fontRef idx="minor">
+            <a:schemeClr val="lt1"/>
+          </a:fontRef>
+        </p:style>
+        <p:txBody>
+          <a:bodyPr rtlCol="0" anchor="ctr"/>
+          <a:lstStyle/>
+          <a:p/>
+        </p:txBody>
+      </p:sp>
+      <p:sp>
+        <p:nvSpPr>
+          <p:cNvPr id="3" name="Cabecera"/>
+          <p:cNvSpPr/>
+          <p:nvPr/>
+        </p:nvSpPr>
+        <p:spPr>
+          <a:xfrm>
+            <a:off x="0" y="0"/>
+            <a:ext cx="12191695" cy="1078992"/>
+          </a:xfrm>
+          <a:prstGeom prst="rect">
+            <a:avLst/>
+          </a:prstGeom>
+          <a:solidFill>
+            <a:srgbClr val="1E9E74"/>
+          </a:solidFill>
+          <a:ln>
+            <a:noFill/>
+          </a:ln>
+          <a:effectLst/>
+        </p:spPr>
+        <p:style>
+          <a:lnRef idx="1">
+            <a:schemeClr val="accent1"/>
+          </a:lnRef>
+          <a:fillRef idx="3">
+            <a:schemeClr val="accent1"/>
+          </a:fillRef>
+          <a:effectRef idx="2">
+            <a:schemeClr val="accent1"/>
+          </a:effectRef>
+          <a:fontRef idx="minor">
+            <a:schemeClr val="lt1"/>
+          </a:fontRef>
+        </p:style>
+        <p:txBody>
+          <a:bodyPr rtlCol="0" anchor="ctr"/>
+          <a:lstStyle/>
+          <a:p/>
+        </p:txBody>
+      </p:sp>
+      <p:sp>
+        <p:nvSpPr>
+          <p:cNvPr id="4" name="Chip"/>
+          <p:cNvSpPr/>
+          <p:nvPr/>
+        </p:nvSpPr>
+        <p:spPr>
+          <a:xfrm>
+            <a:off x="457200" y="182880"/>
+            <a:ext cx="3017520" cy="292608"/>
+          </a:xfrm>
+          <a:prstGeom prst="roundRect">
+            <a:avLst>
+              <a:gd name="adj" fmla="val 50000"/>
+            </a:avLst>
+          </a:prstGeom>
+          <a:solidFill>
+            <a:srgbClr val="FFFFFF"/>
+          </a:solidFill>
+          <a:ln>
+            <a:noFill/>
+          </a:ln>
+          <a:effectLst/>
+        </p:spPr>
+        <p:style>
+          <a:lnRef idx="1">
+            <a:schemeClr val="accent1"/>
+          </a:lnRef>
+          <a:fillRef idx="3">
+            <a:schemeClr val="accent1"/>
+          </a:fillRef>
+          <a:effectRef idx="2">
+            <a:schemeClr val="accent1"/>
+          </a:effectRef>
+          <a:fontRef idx="minor">
+            <a:schemeClr val="lt1"/>
+          </a:fontRef>
+        </p:style>
+        <p:txBody>
+          <a:bodyPr rtlCol="0" anchor="ctr"/>
+          <a:lstStyle/>
+          <a:p/>
+        </p:txBody>
+      </p:sp>
+      <p:sp>
+        <p:nvSpPr>
+          <p:cNvPr id="5" name="ChipTxt"/>
+          <p:cNvSpPr txBox="1"/>
+          <p:nvPr/>
+        </p:nvSpPr>
+        <p:spPr>
+          <a:xfrm>
+            <a:off x="457200" y="173736"/>
+            <a:ext cx="3017520" cy="310896"/>
+          </a:xfrm>
+          <a:prstGeom prst="rect">
+            <a:avLst/>
+          </a:prstGeom>
+          <a:noFill/>
+        </p:spPr>
+        <p:txBody>
+          <a:bodyPr wrap="square" anchor="ctr" lIns="45720" rIns="45720" tIns="27432" bIns="27432">
+            <a:normAutofit/>
+          </a:bodyPr>
+          <a:lstStyle/>
+          <a:p>
+            <a:pPr algn="ctr"/>
+            <a:r>
+              <a:rPr sz="950" b="1">
+                <a:solidFill>
+                  <a:srgbClr val="157355"/>
+                </a:solidFill>
+                <a:latin typeface="Inter"/>
+              </a:rPr>
+              <a:t>RETO 6 · MEDIAFORMAT</a:t>
+            </a:r>
+          </a:p>
+        </p:txBody>
+      </p:sp>
+      <p:sp>
+        <p:nvSpPr>
+          <p:cNvPr id="6" name="Titulo"/>
+          <p:cNvSpPr txBox="1"/>
+          <p:nvPr/>
+        </p:nvSpPr>
+        <p:spPr>
+          <a:xfrm>
+            <a:off x="457200" y="502920"/>
+            <a:ext cx="8412480" cy="475488"/>
+          </a:xfrm>
+          <a:prstGeom prst="rect">
+            <a:avLst/>
+          </a:prstGeom>
+          <a:noFill/>
+        </p:spPr>
+        <p:txBody>
+          <a:bodyPr wrap="square" anchor="t" lIns="45720" rIns="45720" tIns="27432" bIns="27432">
+            <a:normAutofit/>
+          </a:bodyPr>
+          <a:lstStyle/>
+          <a:p>
+            <a:pPr algn="l"/>
+            <a:r>
+              <a:rPr sz="2700" b="1">
+                <a:solidFill>
+                  <a:srgbClr val="FFFFFF"/>
+                </a:solidFill>
+                <a:latin typeface="Bricolage Grotesque"/>
+              </a:rPr>
+              <a:t>Radio Nombres</a:t>
+            </a:r>
+          </a:p>
+        </p:txBody>
+      </p:sp>
+      <p:sp>
+        <p:nvSpPr>
+          <p:cNvPr id="7" name="Badges"/>
+          <p:cNvSpPr txBox="1"/>
+          <p:nvPr/>
+        </p:nvSpPr>
+        <p:spPr>
+          <a:xfrm>
+            <a:off x="9052560" y="256032"/>
+            <a:ext cx="2651760" cy="640080"/>
+          </a:xfrm>
+          <a:prstGeom prst="rect">
+            <a:avLst/>
+          </a:prstGeom>
+          <a:noFill/>
+        </p:spPr>
+        <p:txBody>
+          <a:bodyPr wrap="square" anchor="t" lIns="45720" rIns="45720" tIns="27432" bIns="27432">
+            <a:normAutofit/>
+          </a:bodyPr>
+          <a:lstStyle/>
+          <a:p>
+            <a:pPr algn="r"/>
+            <a:r>
+              <a:rPr sz="1000">
+                <a:solidFill>
+                  <a:srgbClr val="E4F4EE"/>
+                </a:solidFill>
+                <a:latin typeface="Inter"/>
+              </a:rPr>
+              <a:t>🏫 Toda la clase</a:t>
+            </a:r>
+          </a:p>
+          <a:p>
+            <a:pPr algn="r"/>
+            <a:r>
+              <a:rPr sz="1000">
+                <a:solidFill>
+                  <a:srgbClr val="E4F4EE"/>
+                </a:solidFill>
+                <a:latin typeface="Inter"/>
+              </a:rPr>
+              <a:t>± 12 min · ★★☆</a:t>
+            </a:r>
+          </a:p>
+        </p:txBody>
+      </p:sp>
+      <p:sp>
+        <p:nvSpPr>
+          <p:cNvPr id="8" name="Gancho"/>
+          <p:cNvSpPr txBox="1"/>
+          <p:nvPr/>
+        </p:nvSpPr>
+        <p:spPr>
+          <a:xfrm>
+            <a:off x="457200" y="1225296"/>
+            <a:ext cx="11274552" cy="566928"/>
+          </a:xfrm>
+          <a:prstGeom prst="rect">
+            <a:avLst/>
+          </a:prstGeom>
+          <a:noFill/>
+        </p:spPr>
+        <p:txBody>
+          <a:bodyPr wrap="square" anchor="t" lIns="45720" rIns="45720" tIns="27432" bIns="27432">
+            <a:normAutofit/>
+          </a:bodyPr>
+          <a:lstStyle/>
+          <a:p>
+            <a:pPr algn="l"/>
+            <a:r>
+              <a:rPr sz="1600" b="1">
+                <a:solidFill>
+                  <a:srgbClr val="157355"/>
+                </a:solidFill>
+                <a:latin typeface="Bricolage Grotesque"/>
+              </a:rPr>
+              <a:t>Bienvenidos a Radio Nombres, el concurso donde solo cuentan las letras.</a:t>
+            </a:r>
+          </a:p>
+          <a:p>
+            <a:pPr algn="l"/>
+            <a:r>
+              <a:rPr sz="1100" i="1">
+                <a:solidFill>
+                  <a:srgbClr val="6A6E78"/>
+                </a:solidFill>
+                <a:latin typeface="Inter"/>
+              </a:rPr>
+              <a:t>Welkom bij Radio Namen — de spelshow waarin alleen de letters tellen.</a:t>
+            </a:r>
+          </a:p>
+        </p:txBody>
+      </p:sp>
+      <p:sp>
+        <p:nvSpPr>
+          <p:cNvPr id="9" name="ReglaCaja"/>
+          <p:cNvSpPr/>
+          <p:nvPr/>
+        </p:nvSpPr>
+        <p:spPr>
+          <a:xfrm>
+            <a:off x="457200" y="1847088"/>
+            <a:ext cx="11274552" cy="658368"/>
+          </a:xfrm>
+          <a:prstGeom prst="roundRect">
+            <a:avLst>
+              <a:gd name="adj" fmla="val 5000"/>
+            </a:avLst>
+          </a:prstGeom>
+          <a:solidFill>
+            <a:srgbClr val="FBF3D6"/>
+          </a:solidFill>
+          <a:ln>
+            <a:noFill/>
+          </a:ln>
+          <a:effectLst/>
+        </p:spPr>
+        <p:style>
+          <a:lnRef idx="1">
+            <a:schemeClr val="accent1"/>
+          </a:lnRef>
+          <a:fillRef idx="3">
+            <a:schemeClr val="accent1"/>
+          </a:fillRef>
+          <a:effectRef idx="2">
+            <a:schemeClr val="accent1"/>
+          </a:effectRef>
+          <a:fontRef idx="minor">
+            <a:schemeClr val="lt1"/>
+          </a:fontRef>
+        </p:style>
+        <p:txBody>
+          <a:bodyPr rtlCol="0" anchor="ctr"/>
+          <a:lstStyle/>
+          <a:p/>
+        </p:txBody>
+      </p:sp>
+      <p:sp>
+        <p:nvSpPr>
+          <p:cNvPr id="10" name="ReglaTxt"/>
+          <p:cNvSpPr txBox="1"/>
+          <p:nvPr/>
+        </p:nvSpPr>
+        <p:spPr>
+          <a:xfrm>
+            <a:off x="603504" y="1883664"/>
+            <a:ext cx="10972800" cy="585216"/>
+          </a:xfrm>
+          <a:prstGeom prst="rect">
+            <a:avLst/>
+          </a:prstGeom>
+          <a:noFill/>
+        </p:spPr>
+        <p:txBody>
+          <a:bodyPr wrap="square" anchor="t" lIns="45720" rIns="45720" tIns="27432" bIns="27432">
+            <a:normAutofit/>
+          </a:bodyPr>
+          <a:lstStyle/>
+          <a:p>
+            <a:pPr algn="l"/>
+            <a:r>
+              <a:rPr sz="850" b="1">
+                <a:solidFill>
+                  <a:srgbClr val="B7860B"/>
+                </a:solidFill>
+                <a:latin typeface="Inter"/>
+              </a:rPr>
+              <a:t>LA REGLA DEL RETO</a:t>
+            </a:r>
+          </a:p>
+          <a:p>
+            <a:pPr algn="l"/>
+            <a:r>
+              <a:rPr sz="1100">
+                <a:solidFill>
+                  <a:srgbClr val="20242E"/>
+                </a:solidFill>
+                <a:latin typeface="Inter"/>
+              </a:rPr>
+              <a:t>Je zegt de lettersnamen (efe, hache, uve doble), nooit de klanken. Wie «ffff» zegt in plaats van «efe», verliest de beurt.</a:t>
+            </a:r>
+          </a:p>
+        </p:txBody>
+      </p:sp>
+      <p:sp>
+        <p:nvSpPr>
+          <p:cNvPr id="11" name="Tarjeta 0"/>
+          <p:cNvSpPr/>
+          <p:nvPr/>
+        </p:nvSpPr>
+        <p:spPr>
+          <a:xfrm>
+            <a:off x="457200" y="2670048"/>
+            <a:ext cx="2708910" cy="1170432"/>
+          </a:xfrm>
+          <a:prstGeom prst="roundRect">
+            <a:avLst>
+              <a:gd name="adj" fmla="val 6000"/>
+            </a:avLst>
+          </a:prstGeom>
+          <a:solidFill>
+            <a:srgbClr val="FFFFFF"/>
+          </a:solidFill>
+          <a:ln w="12700">
+            <a:solidFill>
+              <a:srgbClr val="E4E3DE"/>
+            </a:solidFill>
+          </a:ln>
+          <a:effectLst/>
+        </p:spPr>
+        <p:style>
+          <a:lnRef idx="1">
+            <a:schemeClr val="accent1"/>
+          </a:lnRef>
+          <a:fillRef idx="3">
+            <a:schemeClr val="accent1"/>
+          </a:fillRef>
+          <a:effectRef idx="2">
+            <a:schemeClr val="accent1"/>
+          </a:effectRef>
+          <a:fontRef idx="minor">
+            <a:schemeClr val="lt1"/>
+          </a:fontRef>
+        </p:style>
+        <p:txBody>
+          <a:bodyPr rtlCol="0" anchor="ctr"/>
+          <a:lstStyle/>
+          <a:p/>
+        </p:txBody>
+      </p:sp>
+      <p:sp>
+        <p:nvSpPr>
+          <p:cNvPr id="12" name="TarjetaTxt 0"/>
+          <p:cNvSpPr txBox="1"/>
+          <p:nvPr/>
+        </p:nvSpPr>
+        <p:spPr>
+          <a:xfrm>
+            <a:off x="548640" y="2724912"/>
+            <a:ext cx="2526030" cy="1060704"/>
+          </a:xfrm>
+          <a:prstGeom prst="rect">
+            <a:avLst/>
+          </a:prstGeom>
+          <a:noFill/>
+        </p:spPr>
+        <p:txBody>
+          <a:bodyPr wrap="square" anchor="t" lIns="45720" rIns="45720" tIns="27432" bIns="27432">
+            <a:normAutofit/>
+          </a:bodyPr>
+          <a:lstStyle/>
+          <a:p>
+            <a:pPr algn="l"/>
+            <a:r>
+              <a:rPr sz="1100" b="1">
+                <a:solidFill>
+                  <a:srgbClr val="157355"/>
+                </a:solidFill>
+                <a:latin typeface="Bricolage Grotesque"/>
+              </a:rPr>
+              <a:t>Ronda 1</a:t>
+            </a:r>
+          </a:p>
+          <a:p>
+            <a:pPr algn="l"/>
+            <a:r>
+              <a:rPr sz="1000">
+                <a:solidFill>
+                  <a:srgbClr val="20242E"/>
+                </a:solidFill>
+                <a:latin typeface="Inter"/>
+              </a:rPr>
+              <a:t>Ronda 1 — los compañeros: deletrea el nombre de alguien de la clase.</a:t>
+            </a:r>
+          </a:p>
+        </p:txBody>
+      </p:sp>
+      <p:sp>
+        <p:nvSpPr>
+          <p:cNvPr id="13" name="Tarjeta 1"/>
+          <p:cNvSpPr/>
+          <p:nvPr/>
+        </p:nvSpPr>
+        <p:spPr>
+          <a:xfrm>
+            <a:off x="3312414" y="2670048"/>
+            <a:ext cx="2708910" cy="1170432"/>
+          </a:xfrm>
+          <a:prstGeom prst="roundRect">
+            <a:avLst>
+              <a:gd name="adj" fmla="val 6000"/>
+            </a:avLst>
+          </a:prstGeom>
+          <a:solidFill>
+            <a:srgbClr val="FFFFFF"/>
+          </a:solidFill>
+          <a:ln w="12700">
+            <a:solidFill>
+              <a:srgbClr val="E4E3DE"/>
+            </a:solidFill>
+          </a:ln>
+          <a:effectLst/>
+        </p:spPr>
+        <p:style>
+          <a:lnRef idx="1">
+            <a:schemeClr val="accent1"/>
+          </a:lnRef>
+          <a:fillRef idx="3">
+            <a:schemeClr val="accent1"/>
+          </a:fillRef>
+          <a:effectRef idx="2">
+            <a:schemeClr val="accent1"/>
+          </a:effectRef>
+          <a:fontRef idx="minor">
+            <a:schemeClr val="lt1"/>
+          </a:fontRef>
+        </p:style>
+        <p:txBody>
+          <a:bodyPr rtlCol="0" anchor="ctr"/>
+          <a:lstStyle/>
+          <a:p/>
+        </p:txBody>
+      </p:sp>
+      <p:sp>
+        <p:nvSpPr>
+          <p:cNvPr id="14" name="TarjetaTxt 1"/>
+          <p:cNvSpPr txBox="1"/>
+          <p:nvPr/>
+        </p:nvSpPr>
+        <p:spPr>
+          <a:xfrm>
+            <a:off x="3403854" y="2724912"/>
+            <a:ext cx="2526030" cy="1060704"/>
+          </a:xfrm>
+          <a:prstGeom prst="rect">
+            <a:avLst/>
+          </a:prstGeom>
+          <a:noFill/>
+        </p:spPr>
+        <p:txBody>
+          <a:bodyPr wrap="square" anchor="t" lIns="45720" rIns="45720" tIns="27432" bIns="27432">
+            <a:normAutofit/>
+          </a:bodyPr>
+          <a:lstStyle/>
+          <a:p>
+            <a:pPr algn="l"/>
+            <a:r>
+              <a:rPr sz="1100" b="1">
+                <a:solidFill>
+                  <a:srgbClr val="157355"/>
+                </a:solidFill>
+                <a:latin typeface="Bricolage Grotesque"/>
+              </a:rPr>
+              <a:t>Ronda 2</a:t>
+            </a:r>
+          </a:p>
+          <a:p>
+            <a:pPr algn="l"/>
+            <a:r>
+              <a:rPr sz="1000">
+                <a:solidFill>
+                  <a:srgbClr val="20242E"/>
+                </a:solidFill>
+                <a:latin typeface="Inter"/>
+              </a:rPr>
+              <a:t>Ronda 2 — las ciudades: el/la profe dice la ciudad, tú la deletreas.</a:t>
+            </a:r>
+          </a:p>
+        </p:txBody>
+      </p:sp>
+      <p:sp>
+        <p:nvSpPr>
+          <p:cNvPr id="15" name="Tarjeta 2"/>
+          <p:cNvSpPr/>
+          <p:nvPr/>
+        </p:nvSpPr>
+        <p:spPr>
+          <a:xfrm>
+            <a:off x="6167628" y="2670048"/>
+            <a:ext cx="2708910" cy="1170432"/>
+          </a:xfrm>
+          <a:prstGeom prst="roundRect">
+            <a:avLst>
+              <a:gd name="adj" fmla="val 6000"/>
+            </a:avLst>
+          </a:prstGeom>
+          <a:solidFill>
+            <a:srgbClr val="FFFFFF"/>
+          </a:solidFill>
+          <a:ln w="12700">
+            <a:solidFill>
+              <a:srgbClr val="E4E3DE"/>
+            </a:solidFill>
+          </a:ln>
+          <a:effectLst/>
+        </p:spPr>
+        <p:style>
+          <a:lnRef idx="1">
+            <a:schemeClr val="accent1"/>
+          </a:lnRef>
+          <a:fillRef idx="3">
+            <a:schemeClr val="accent1"/>
+          </a:fillRef>
+          <a:effectRef idx="2">
+            <a:schemeClr val="accent1"/>
+          </a:effectRef>
+          <a:fontRef idx="minor">
+            <a:schemeClr val="lt1"/>
+          </a:fontRef>
+        </p:style>
+        <p:txBody>
+          <a:bodyPr rtlCol="0" anchor="ctr"/>
+          <a:lstStyle/>
+          <a:p/>
+        </p:txBody>
+      </p:sp>
+      <p:sp>
+        <p:nvSpPr>
+          <p:cNvPr id="16" name="TarjetaTxt 2"/>
+          <p:cNvSpPr txBox="1"/>
+          <p:nvPr/>
+        </p:nvSpPr>
+        <p:spPr>
+          <a:xfrm>
+            <a:off x="6259068" y="2724912"/>
+            <a:ext cx="2526030" cy="1060704"/>
+          </a:xfrm>
+          <a:prstGeom prst="rect">
+            <a:avLst/>
+          </a:prstGeom>
+          <a:noFill/>
+        </p:spPr>
+        <p:txBody>
+          <a:bodyPr wrap="square" anchor="t" lIns="45720" rIns="45720" tIns="27432" bIns="27432">
+            <a:normAutofit/>
+          </a:bodyPr>
+          <a:lstStyle/>
+          <a:p>
+            <a:pPr algn="l"/>
+            <a:r>
+              <a:rPr sz="1100" b="1">
+                <a:solidFill>
+                  <a:srgbClr val="157355"/>
+                </a:solidFill>
+                <a:latin typeface="Bricolage Grotesque"/>
+              </a:rPr>
+              <a:t>Ronda 3</a:t>
+            </a:r>
+          </a:p>
+          <a:p>
+            <a:pPr algn="l"/>
+            <a:r>
+              <a:rPr sz="1000">
+                <a:solidFill>
+                  <a:srgbClr val="20242E"/>
+                </a:solidFill>
+                <a:latin typeface="Inter"/>
+              </a:rPr>
+              <a:t>Ronda 3 — las trampas: nombres flamencos con w, y, ij, j.</a:t>
+            </a:r>
+          </a:p>
+        </p:txBody>
+      </p:sp>
+      <p:sp>
+        <p:nvSpPr>
+          <p:cNvPr id="17" name="Tarjeta 3"/>
+          <p:cNvSpPr/>
+          <p:nvPr/>
+        </p:nvSpPr>
+        <p:spPr>
+          <a:xfrm>
+            <a:off x="9022842" y="2670048"/>
+            <a:ext cx="2708910" cy="1170432"/>
+          </a:xfrm>
+          <a:prstGeom prst="roundRect">
+            <a:avLst>
+              <a:gd name="adj" fmla="val 6000"/>
+            </a:avLst>
+          </a:prstGeom>
+          <a:solidFill>
+            <a:srgbClr val="FFFFFF"/>
+          </a:solidFill>
+          <a:ln w="12700">
+            <a:solidFill>
+              <a:srgbClr val="E4E3DE"/>
+            </a:solidFill>
+          </a:ln>
+          <a:effectLst/>
+        </p:spPr>
+        <p:style>
+          <a:lnRef idx="1">
+            <a:schemeClr val="accent1"/>
+          </a:lnRef>
+          <a:fillRef idx="3">
+            <a:schemeClr val="accent1"/>
+          </a:fillRef>
+          <a:effectRef idx="2">
+            <a:schemeClr val="accent1"/>
+          </a:effectRef>
+          <a:fontRef idx="minor">
+            <a:schemeClr val="lt1"/>
+          </a:fontRef>
+        </p:style>
+        <p:txBody>
+          <a:bodyPr rtlCol="0" anchor="ctr"/>
+          <a:lstStyle/>
+          <a:p/>
+        </p:txBody>
+      </p:sp>
+      <p:sp>
+        <p:nvSpPr>
+          <p:cNvPr id="18" name="TarjetaTxt 3"/>
+          <p:cNvSpPr txBox="1"/>
+          <p:nvPr/>
+        </p:nvSpPr>
+        <p:spPr>
+          <a:xfrm>
+            <a:off x="9114282" y="2724912"/>
+            <a:ext cx="2526030" cy="1060704"/>
+          </a:xfrm>
+          <a:prstGeom prst="rect">
+            <a:avLst/>
+          </a:prstGeom>
+          <a:noFill/>
+        </p:spPr>
+        <p:txBody>
+          <a:bodyPr wrap="square" anchor="t" lIns="45720" rIns="45720" tIns="27432" bIns="27432">
+            <a:normAutofit/>
+          </a:bodyPr>
+          <a:lstStyle/>
+          <a:p>
+            <a:pPr algn="l"/>
+            <a:r>
+              <a:rPr sz="1100" b="1">
+                <a:solidFill>
+                  <a:srgbClr val="157355"/>
+                </a:solidFill>
+                <a:latin typeface="Bricolage Grotesque"/>
+              </a:rPr>
+              <a:t>Ronda 4</a:t>
+            </a:r>
+          </a:p>
+          <a:p>
+            <a:pPr algn="l"/>
+            <a:r>
+              <a:rPr sz="1000">
+                <a:solidFill>
+                  <a:srgbClr val="20242E"/>
+                </a:solidFill>
+                <a:latin typeface="Inter"/>
+              </a:rPr>
+              <a:t>Final — el nombre más largo de la clase, sin errores.</a:t>
+            </a:r>
+          </a:p>
+        </p:txBody>
+      </p:sp>
+      <p:sp>
+        <p:nvSpPr>
+          <p:cNvPr id="19" name="Tarjeta 4"/>
+          <p:cNvSpPr/>
+          <p:nvPr/>
+        </p:nvSpPr>
+        <p:spPr>
+          <a:xfrm>
+            <a:off x="457200" y="3968496"/>
+            <a:ext cx="2708910" cy="1170432"/>
+          </a:xfrm>
+          <a:prstGeom prst="roundRect">
+            <a:avLst>
+              <a:gd name="adj" fmla="val 6000"/>
+            </a:avLst>
+          </a:prstGeom>
+          <a:solidFill>
+            <a:srgbClr val="FFFFFF"/>
+          </a:solidFill>
+          <a:ln w="12700">
+            <a:solidFill>
+              <a:srgbClr val="E4E3DE"/>
+            </a:solidFill>
+          </a:ln>
+          <a:effectLst/>
+        </p:spPr>
+        <p:style>
+          <a:lnRef idx="1">
+            <a:schemeClr val="accent1"/>
+          </a:lnRef>
+          <a:fillRef idx="3">
+            <a:schemeClr val="accent1"/>
+          </a:fillRef>
+          <a:effectRef idx="2">
+            <a:schemeClr val="accent1"/>
+          </a:effectRef>
+          <a:fontRef idx="minor">
+            <a:schemeClr val="lt1"/>
+          </a:fontRef>
+        </p:style>
+        <p:txBody>
+          <a:bodyPr rtlCol="0" anchor="ctr"/>
+          <a:lstStyle/>
+          <a:p/>
+        </p:txBody>
+      </p:sp>
+      <p:sp>
+        <p:nvSpPr>
+          <p:cNvPr id="20" name="TarjetaTxt 4"/>
+          <p:cNvSpPr txBox="1"/>
+          <p:nvPr/>
+        </p:nvSpPr>
+        <p:spPr>
+          <a:xfrm>
+            <a:off x="548640" y="4023360"/>
+            <a:ext cx="2526030" cy="859536"/>
+          </a:xfrm>
+          <a:prstGeom prst="rect">
+            <a:avLst/>
+          </a:prstGeom>
+          <a:noFill/>
+        </p:spPr>
+        <p:txBody>
+          <a:bodyPr wrap="square" anchor="t" lIns="45720" rIns="45720" tIns="27432" bIns="27432">
+            <a:normAutofit/>
+          </a:bodyPr>
+          <a:lstStyle/>
+          <a:p>
+            <a:pPr algn="l"/>
+            <a:r>
+              <a:rPr sz="1100" b="1">
+                <a:solidFill>
+                  <a:srgbClr val="157355"/>
+                </a:solidFill>
+                <a:latin typeface="Bricolage Grotesque"/>
+              </a:rPr>
+              <a:t>W</a:t>
+            </a:r>
+          </a:p>
+          <a:p>
+            <a:pPr algn="l"/>
+            <a:r>
+              <a:rPr sz="1000">
+                <a:solidFill>
+                  <a:srgbClr val="20242E"/>
+                </a:solidFill>
+                <a:latin typeface="Inter"/>
+              </a:rPr>
+              <a:t>uve doble</a:t>
+            </a:r>
+          </a:p>
+        </p:txBody>
+      </p:sp>
+      <p:sp>
+        <p:nvSpPr>
+          <p:cNvPr id="21" name="Onthul 4"/>
+          <p:cNvSpPr/>
+          <p:nvPr/>
+        </p:nvSpPr>
+        <p:spPr>
+          <a:xfrm>
+            <a:off x="548640" y="4846320"/>
+            <a:ext cx="2526030" cy="237744"/>
+          </a:xfrm>
+          <a:prstGeom prst="roundRect">
+            <a:avLst>
+              <a:gd name="adj" fmla="val 20000"/>
+            </a:avLst>
+          </a:prstGeom>
+          <a:solidFill>
+            <a:srgbClr val="E4F4EE"/>
+          </a:solidFill>
+          <a:ln>
+            <a:noFill/>
+          </a:ln>
+          <a:effectLst/>
+        </p:spPr>
+        <p:style>
+          <a:lnRef idx="1">
+            <a:schemeClr val="accent1"/>
+          </a:lnRef>
+          <a:fillRef idx="3">
+            <a:schemeClr val="accent1"/>
+          </a:fillRef>
+          <a:effectRef idx="2">
+            <a:schemeClr val="accent1"/>
+          </a:effectRef>
+          <a:fontRef idx="minor">
+            <a:schemeClr val="lt1"/>
+          </a:fontRef>
+        </p:style>
+        <p:txBody>
+          <a:bodyPr rtlCol="0" anchor="ctr"/>
+          <a:lstStyle/>
+          <a:p/>
+        </p:txBody>
+      </p:sp>
+      <p:sp>
+        <p:nvSpPr>
+          <p:cNvPr id="22" name="OnthulTxt 4"/>
+          <p:cNvSpPr txBox="1"/>
+          <p:nvPr/>
+        </p:nvSpPr>
+        <p:spPr>
+          <a:xfrm>
+            <a:off x="566928" y="4846320"/>
+            <a:ext cx="2489454" cy="237744"/>
+          </a:xfrm>
+          <a:prstGeom prst="rect">
+            <a:avLst/>
+          </a:prstGeom>
+          <a:noFill/>
+        </p:spPr>
+        <p:txBody>
+          <a:bodyPr wrap="square" anchor="ctr" lIns="45720" rIns="45720" tIns="27432" bIns="27432">
+            <a:normAutofit/>
+          </a:bodyPr>
+          <a:lstStyle/>
+          <a:p>
+            <a:pPr algn="l"/>
+            <a:r>
+              <a:rPr sz="850" b="1">
+                <a:solidFill>
+                  <a:srgbClr val="157355"/>
+                </a:solidFill>
+                <a:latin typeface="Inter"/>
+              </a:rPr>
+              <a:t>in Wouter</a:t>
+            </a:r>
+          </a:p>
+        </p:txBody>
+      </p:sp>
+      <p:sp>
+        <p:nvSpPr>
+          <p:cNvPr id="23" name="Tarjeta 5"/>
+          <p:cNvSpPr/>
+          <p:nvPr/>
+        </p:nvSpPr>
+        <p:spPr>
+          <a:xfrm>
+            <a:off x="3312414" y="3968496"/>
+            <a:ext cx="2708910" cy="1170432"/>
+          </a:xfrm>
+          <a:prstGeom prst="roundRect">
+            <a:avLst>
+              <a:gd name="adj" fmla="val 6000"/>
+            </a:avLst>
+          </a:prstGeom>
+          <a:solidFill>
+            <a:srgbClr val="FFFFFF"/>
+          </a:solidFill>
+          <a:ln w="12700">
+            <a:solidFill>
+              <a:srgbClr val="E4E3DE"/>
+            </a:solidFill>
+          </a:ln>
+          <a:effectLst/>
+        </p:spPr>
+        <p:style>
+          <a:lnRef idx="1">
+            <a:schemeClr val="accent1"/>
+          </a:lnRef>
+          <a:fillRef idx="3">
+            <a:schemeClr val="accent1"/>
+          </a:fillRef>
+          <a:effectRef idx="2">
+            <a:schemeClr val="accent1"/>
+          </a:effectRef>
+          <a:fontRef idx="minor">
+            <a:schemeClr val="lt1"/>
+          </a:fontRef>
+        </p:style>
+        <p:txBody>
+          <a:bodyPr rtlCol="0" anchor="ctr"/>
+          <a:lstStyle/>
+          <a:p/>
+        </p:txBody>
+      </p:sp>
+      <p:sp>
+        <p:nvSpPr>
+          <p:cNvPr id="24" name="TarjetaTxt 5"/>
+          <p:cNvSpPr txBox="1"/>
+          <p:nvPr/>
+        </p:nvSpPr>
+        <p:spPr>
+          <a:xfrm>
+            <a:off x="3403854" y="4023360"/>
+            <a:ext cx="2526030" cy="859536"/>
+          </a:xfrm>
+          <a:prstGeom prst="rect">
+            <a:avLst/>
+          </a:prstGeom>
+          <a:noFill/>
+        </p:spPr>
+        <p:txBody>
+          <a:bodyPr wrap="square" anchor="t" lIns="45720" rIns="45720" tIns="27432" bIns="27432">
+            <a:normAutofit/>
+          </a:bodyPr>
+          <a:lstStyle/>
+          <a:p>
+            <a:pPr algn="l"/>
+            <a:r>
+              <a:rPr sz="1100" b="1">
+                <a:solidFill>
+                  <a:srgbClr val="157355"/>
+                </a:solidFill>
+                <a:latin typeface="Bricolage Grotesque"/>
+              </a:rPr>
+              <a:t>Y</a:t>
+            </a:r>
+          </a:p>
+          <a:p>
+            <a:pPr algn="l"/>
+            <a:r>
+              <a:rPr sz="1000">
+                <a:solidFill>
+                  <a:srgbClr val="20242E"/>
+                </a:solidFill>
+                <a:latin typeface="Inter"/>
+              </a:rPr>
+              <a:t>i griega / ye</a:t>
+            </a:r>
+          </a:p>
+        </p:txBody>
+      </p:sp>
+      <p:sp>
+        <p:nvSpPr>
+          <p:cNvPr id="25" name="Onthul 5"/>
+          <p:cNvSpPr/>
+          <p:nvPr/>
+        </p:nvSpPr>
+        <p:spPr>
+          <a:xfrm>
+            <a:off x="3403854" y="4846320"/>
+            <a:ext cx="2526030" cy="237744"/>
+          </a:xfrm>
+          <a:prstGeom prst="roundRect">
+            <a:avLst>
+              <a:gd name="adj" fmla="val 20000"/>
+            </a:avLst>
+          </a:prstGeom>
+          <a:solidFill>
+            <a:srgbClr val="E4F4EE"/>
+          </a:solidFill>
+          <a:ln>
+            <a:noFill/>
+          </a:ln>
+          <a:effectLst/>
+        </p:spPr>
+        <p:style>
+          <a:lnRef idx="1">
+            <a:schemeClr val="accent1"/>
+          </a:lnRef>
+          <a:fillRef idx="3">
+            <a:schemeClr val="accent1"/>
+          </a:fillRef>
+          <a:effectRef idx="2">
+            <a:schemeClr val="accent1"/>
+          </a:effectRef>
+          <a:fontRef idx="minor">
+            <a:schemeClr val="lt1"/>
+          </a:fontRef>
+        </p:style>
+        <p:txBody>
+          <a:bodyPr rtlCol="0" anchor="ctr"/>
+          <a:lstStyle/>
+          <a:p/>
+        </p:txBody>
+      </p:sp>
+      <p:sp>
+        <p:nvSpPr>
+          <p:cNvPr id="26" name="OnthulTxt 5"/>
+          <p:cNvSpPr txBox="1"/>
+          <p:nvPr/>
+        </p:nvSpPr>
+        <p:spPr>
+          <a:xfrm>
+            <a:off x="3422142" y="4846320"/>
+            <a:ext cx="2489454" cy="237744"/>
+          </a:xfrm>
+          <a:prstGeom prst="rect">
+            <a:avLst/>
+          </a:prstGeom>
+          <a:noFill/>
+        </p:spPr>
+        <p:txBody>
+          <a:bodyPr wrap="square" anchor="ctr" lIns="45720" rIns="45720" tIns="27432" bIns="27432">
+            <a:normAutofit/>
+          </a:bodyPr>
+          <a:lstStyle/>
+          <a:p>
+            <a:pPr algn="l"/>
+            <a:r>
+              <a:rPr sz="850" b="1">
+                <a:solidFill>
+                  <a:srgbClr val="157355"/>
+                </a:solidFill>
+                <a:latin typeface="Inter"/>
+              </a:rPr>
+              <a:t>in Yara</a:t>
+            </a:r>
+          </a:p>
+        </p:txBody>
+      </p:sp>
+      <p:sp>
+        <p:nvSpPr>
+          <p:cNvPr id="27" name="Tarjeta 6"/>
+          <p:cNvSpPr/>
+          <p:nvPr/>
+        </p:nvSpPr>
+        <p:spPr>
+          <a:xfrm>
+            <a:off x="6167628" y="3968496"/>
+            <a:ext cx="2708910" cy="1170432"/>
+          </a:xfrm>
+          <a:prstGeom prst="roundRect">
+            <a:avLst>
+              <a:gd name="adj" fmla="val 6000"/>
+            </a:avLst>
+          </a:prstGeom>
+          <a:solidFill>
+            <a:srgbClr val="FFFFFF"/>
+          </a:solidFill>
+          <a:ln w="12700">
+            <a:solidFill>
+              <a:srgbClr val="E4E3DE"/>
+            </a:solidFill>
+          </a:ln>
+          <a:effectLst/>
+        </p:spPr>
+        <p:style>
+          <a:lnRef idx="1">
+            <a:schemeClr val="accent1"/>
+          </a:lnRef>
+          <a:fillRef idx="3">
+            <a:schemeClr val="accent1"/>
+          </a:fillRef>
+          <a:effectRef idx="2">
+            <a:schemeClr val="accent1"/>
+          </a:effectRef>
+          <a:fontRef idx="minor">
+            <a:schemeClr val="lt1"/>
+          </a:fontRef>
+        </p:style>
+        <p:txBody>
+          <a:bodyPr rtlCol="0" anchor="ctr"/>
+          <a:lstStyle/>
+          <a:p/>
+        </p:txBody>
+      </p:sp>
+      <p:sp>
+        <p:nvSpPr>
+          <p:cNvPr id="28" name="TarjetaTxt 6"/>
+          <p:cNvSpPr txBox="1"/>
+          <p:nvPr/>
+        </p:nvSpPr>
+        <p:spPr>
+          <a:xfrm>
+            <a:off x="6259068" y="4023360"/>
+            <a:ext cx="2526030" cy="859536"/>
+          </a:xfrm>
+          <a:prstGeom prst="rect">
+            <a:avLst/>
+          </a:prstGeom>
+          <a:noFill/>
+        </p:spPr>
+        <p:txBody>
+          <a:bodyPr wrap="square" anchor="t" lIns="45720" rIns="45720" tIns="27432" bIns="27432">
+            <a:normAutofit/>
+          </a:bodyPr>
+          <a:lstStyle/>
+          <a:p>
+            <a:pPr algn="l"/>
+            <a:r>
+              <a:rPr sz="1100" b="1">
+                <a:solidFill>
+                  <a:srgbClr val="157355"/>
+                </a:solidFill>
+                <a:latin typeface="Bricolage Grotesque"/>
+              </a:rPr>
+              <a:t>J</a:t>
+            </a:r>
+          </a:p>
+          <a:p>
+            <a:pPr algn="l"/>
+            <a:r>
+              <a:rPr sz="1000">
+                <a:solidFill>
+                  <a:srgbClr val="20242E"/>
+                </a:solidFill>
+                <a:latin typeface="Inter"/>
+              </a:rPr>
+              <a:t>jota</a:t>
+            </a:r>
+          </a:p>
+        </p:txBody>
+      </p:sp>
+      <p:sp>
+        <p:nvSpPr>
+          <p:cNvPr id="29" name="Onthul 6"/>
+          <p:cNvSpPr/>
+          <p:nvPr/>
+        </p:nvSpPr>
+        <p:spPr>
+          <a:xfrm>
+            <a:off x="6259068" y="4846320"/>
+            <a:ext cx="2526030" cy="237744"/>
+          </a:xfrm>
+          <a:prstGeom prst="roundRect">
+            <a:avLst>
+              <a:gd name="adj" fmla="val 20000"/>
+            </a:avLst>
+          </a:prstGeom>
+          <a:solidFill>
+            <a:srgbClr val="E4F4EE"/>
+          </a:solidFill>
+          <a:ln>
+            <a:noFill/>
+          </a:ln>
+          <a:effectLst/>
+        </p:spPr>
+        <p:style>
+          <a:lnRef idx="1">
+            <a:schemeClr val="accent1"/>
+          </a:lnRef>
+          <a:fillRef idx="3">
+            <a:schemeClr val="accent1"/>
+          </a:fillRef>
+          <a:effectRef idx="2">
+            <a:schemeClr val="accent1"/>
+          </a:effectRef>
+          <a:fontRef idx="minor">
+            <a:schemeClr val="lt1"/>
+          </a:fontRef>
+        </p:style>
+        <p:txBody>
+          <a:bodyPr rtlCol="0" anchor="ctr"/>
+          <a:lstStyle/>
+          <a:p/>
+        </p:txBody>
+      </p:sp>
+      <p:sp>
+        <p:nvSpPr>
+          <p:cNvPr id="30" name="OnthulTxt 6"/>
+          <p:cNvSpPr txBox="1"/>
+          <p:nvPr/>
+        </p:nvSpPr>
+        <p:spPr>
+          <a:xfrm>
+            <a:off x="6277356" y="4846320"/>
+            <a:ext cx="2489454" cy="237744"/>
+          </a:xfrm>
+          <a:prstGeom prst="rect">
+            <a:avLst/>
+          </a:prstGeom>
+          <a:noFill/>
+        </p:spPr>
+        <p:txBody>
+          <a:bodyPr wrap="square" anchor="ctr" lIns="45720" rIns="45720" tIns="27432" bIns="27432">
+            <a:normAutofit/>
+          </a:bodyPr>
+          <a:lstStyle/>
+          <a:p>
+            <a:pPr algn="l"/>
+            <a:r>
+              <a:rPr sz="850" b="1">
+                <a:solidFill>
+                  <a:srgbClr val="157355"/>
+                </a:solidFill>
+                <a:latin typeface="Inter"/>
+              </a:rPr>
+              <a:t>in Jeroen</a:t>
+            </a:r>
+          </a:p>
+        </p:txBody>
+      </p:sp>
+      <p:sp>
+        <p:nvSpPr>
+          <p:cNvPr id="31" name="Tarjeta 7"/>
+          <p:cNvSpPr/>
+          <p:nvPr/>
+        </p:nvSpPr>
+        <p:spPr>
+          <a:xfrm>
+            <a:off x="9022842" y="3968496"/>
+            <a:ext cx="2708910" cy="1170432"/>
+          </a:xfrm>
+          <a:prstGeom prst="roundRect">
+            <a:avLst>
+              <a:gd name="adj" fmla="val 6000"/>
+            </a:avLst>
+          </a:prstGeom>
+          <a:solidFill>
+            <a:srgbClr val="FFFFFF"/>
+          </a:solidFill>
+          <a:ln w="12700">
+            <a:solidFill>
+              <a:srgbClr val="E4E3DE"/>
+            </a:solidFill>
+          </a:ln>
+          <a:effectLst/>
+        </p:spPr>
+        <p:style>
+          <a:lnRef idx="1">
+            <a:schemeClr val="accent1"/>
+          </a:lnRef>
+          <a:fillRef idx="3">
+            <a:schemeClr val="accent1"/>
+          </a:fillRef>
+          <a:effectRef idx="2">
+            <a:schemeClr val="accent1"/>
+          </a:effectRef>
+          <a:fontRef idx="minor">
+            <a:schemeClr val="lt1"/>
+          </a:fontRef>
+        </p:style>
+        <p:txBody>
+          <a:bodyPr rtlCol="0" anchor="ctr"/>
+          <a:lstStyle/>
+          <a:p/>
+        </p:txBody>
+      </p:sp>
+      <p:sp>
+        <p:nvSpPr>
+          <p:cNvPr id="32" name="TarjetaTxt 7"/>
+          <p:cNvSpPr txBox="1"/>
+          <p:nvPr/>
+        </p:nvSpPr>
+        <p:spPr>
+          <a:xfrm>
+            <a:off x="9114282" y="4023360"/>
+            <a:ext cx="2526030" cy="859536"/>
+          </a:xfrm>
+          <a:prstGeom prst="rect">
+            <a:avLst/>
+          </a:prstGeom>
+          <a:noFill/>
+        </p:spPr>
+        <p:txBody>
+          <a:bodyPr wrap="square" anchor="t" lIns="45720" rIns="45720" tIns="27432" bIns="27432">
+            <a:normAutofit/>
+          </a:bodyPr>
+          <a:lstStyle/>
+          <a:p>
+            <a:pPr algn="l"/>
+            <a:r>
+              <a:rPr sz="1100" b="1">
+                <a:solidFill>
+                  <a:srgbClr val="157355"/>
+                </a:solidFill>
+                <a:latin typeface="Bricolage Grotesque"/>
+              </a:rPr>
+              <a:t>H</a:t>
+            </a:r>
+          </a:p>
+          <a:p>
+            <a:pPr algn="l"/>
+            <a:r>
+              <a:rPr sz="1000">
+                <a:solidFill>
+                  <a:srgbClr val="20242E"/>
+                </a:solidFill>
+                <a:latin typeface="Inter"/>
+              </a:rPr>
+              <a:t>hache — zwijgt!</a:t>
+            </a:r>
+          </a:p>
+        </p:txBody>
+      </p:sp>
+      <p:sp>
+        <p:nvSpPr>
+          <p:cNvPr id="33" name="Onthul 7"/>
+          <p:cNvSpPr/>
+          <p:nvPr/>
+        </p:nvSpPr>
+        <p:spPr>
+          <a:xfrm>
+            <a:off x="9114282" y="4846320"/>
+            <a:ext cx="2526030" cy="237744"/>
+          </a:xfrm>
+          <a:prstGeom prst="roundRect">
+            <a:avLst>
+              <a:gd name="adj" fmla="val 20000"/>
+            </a:avLst>
+          </a:prstGeom>
+          <a:solidFill>
+            <a:srgbClr val="E4F4EE"/>
+          </a:solidFill>
+          <a:ln>
+            <a:noFill/>
+          </a:ln>
+          <a:effectLst/>
+        </p:spPr>
+        <p:style>
+          <a:lnRef idx="1">
+            <a:schemeClr val="accent1"/>
+          </a:lnRef>
+          <a:fillRef idx="3">
+            <a:schemeClr val="accent1"/>
+          </a:fillRef>
+          <a:effectRef idx="2">
+            <a:schemeClr val="accent1"/>
+          </a:effectRef>
+          <a:fontRef idx="minor">
+            <a:schemeClr val="lt1"/>
+          </a:fontRef>
+        </p:style>
+        <p:txBody>
+          <a:bodyPr rtlCol="0" anchor="ctr"/>
+          <a:lstStyle/>
+          <a:p/>
+        </p:txBody>
+      </p:sp>
+      <p:sp>
+        <p:nvSpPr>
+          <p:cNvPr id="34" name="OnthulTxt 7"/>
+          <p:cNvSpPr txBox="1"/>
+          <p:nvPr/>
+        </p:nvSpPr>
+        <p:spPr>
+          <a:xfrm>
+            <a:off x="9132570" y="4846320"/>
+            <a:ext cx="2489454" cy="237744"/>
+          </a:xfrm>
+          <a:prstGeom prst="rect">
+            <a:avLst/>
+          </a:prstGeom>
+          <a:noFill/>
+        </p:spPr>
+        <p:txBody>
+          <a:bodyPr wrap="square" anchor="ctr" lIns="45720" rIns="45720" tIns="27432" bIns="27432">
+            <a:normAutofit/>
+          </a:bodyPr>
+          <a:lstStyle/>
+          <a:p>
+            <a:pPr algn="l"/>
+            <a:r>
+              <a:rPr sz="850" b="1">
+                <a:solidFill>
+                  <a:srgbClr val="157355"/>
+                </a:solidFill>
+                <a:latin typeface="Inter"/>
+              </a:rPr>
+              <a:t>in Huelva</a:t>
+            </a:r>
+          </a:p>
+        </p:txBody>
+      </p:sp>
+      <p:sp>
+        <p:nvSpPr>
+          <p:cNvPr id="35" name="Tarjeta 8"/>
+          <p:cNvSpPr/>
+          <p:nvPr/>
+        </p:nvSpPr>
+        <p:spPr>
+          <a:xfrm>
+            <a:off x="457200" y="5266944"/>
+            <a:ext cx="2708910" cy="1170432"/>
+          </a:xfrm>
+          <a:prstGeom prst="roundRect">
+            <a:avLst>
+              <a:gd name="adj" fmla="val 6000"/>
+            </a:avLst>
+          </a:prstGeom>
+          <a:solidFill>
+            <a:srgbClr val="FFFFFF"/>
+          </a:solidFill>
+          <a:ln w="12700">
+            <a:solidFill>
+              <a:srgbClr val="E4E3DE"/>
+            </a:solidFill>
+          </a:ln>
+          <a:effectLst/>
+        </p:spPr>
+        <p:style>
+          <a:lnRef idx="1">
+            <a:schemeClr val="accent1"/>
+          </a:lnRef>
+          <a:fillRef idx="3">
+            <a:schemeClr val="accent1"/>
+          </a:fillRef>
+          <a:effectRef idx="2">
+            <a:schemeClr val="accent1"/>
+          </a:effectRef>
+          <a:fontRef idx="minor">
+            <a:schemeClr val="lt1"/>
+          </a:fontRef>
+        </p:style>
+        <p:txBody>
+          <a:bodyPr rtlCol="0" anchor="ctr"/>
+          <a:lstStyle/>
+          <a:p/>
+        </p:txBody>
+      </p:sp>
+      <p:sp>
+        <p:nvSpPr>
+          <p:cNvPr id="36" name="TarjetaTxt 8"/>
+          <p:cNvSpPr txBox="1"/>
+          <p:nvPr/>
+        </p:nvSpPr>
+        <p:spPr>
+          <a:xfrm>
+            <a:off x="548640" y="5321808"/>
+            <a:ext cx="2526030" cy="859536"/>
+          </a:xfrm>
+          <a:prstGeom prst="rect">
+            <a:avLst/>
+          </a:prstGeom>
+          <a:noFill/>
+        </p:spPr>
+        <p:txBody>
+          <a:bodyPr wrap="square" anchor="t" lIns="45720" rIns="45720" tIns="27432" bIns="27432">
+            <a:normAutofit/>
+          </a:bodyPr>
+          <a:lstStyle/>
+          <a:p>
+            <a:pPr algn="l"/>
+            <a:r>
+              <a:rPr sz="1100" b="1">
+                <a:solidFill>
+                  <a:srgbClr val="157355"/>
+                </a:solidFill>
+                <a:latin typeface="Bricolage Grotesque"/>
+              </a:rPr>
+              <a:t>Z</a:t>
+            </a:r>
+          </a:p>
+          <a:p>
+            <a:pPr algn="l"/>
+            <a:r>
+              <a:rPr sz="1000">
+                <a:solidFill>
+                  <a:srgbClr val="20242E"/>
+                </a:solidFill>
+                <a:latin typeface="Inter"/>
+              </a:rPr>
+              <a:t>zeta</a:t>
+            </a:r>
+          </a:p>
+        </p:txBody>
+      </p:sp>
+      <p:sp>
+        <p:nvSpPr>
+          <p:cNvPr id="37" name="Onthul 8"/>
+          <p:cNvSpPr/>
+          <p:nvPr/>
+        </p:nvSpPr>
+        <p:spPr>
+          <a:xfrm>
+            <a:off x="548640" y="6144768"/>
+            <a:ext cx="2526030" cy="237744"/>
+          </a:xfrm>
+          <a:prstGeom prst="roundRect">
+            <a:avLst>
+              <a:gd name="adj" fmla="val 20000"/>
+            </a:avLst>
+          </a:prstGeom>
+          <a:solidFill>
+            <a:srgbClr val="E4F4EE"/>
+          </a:solidFill>
+          <a:ln>
+            <a:noFill/>
+          </a:ln>
+          <a:effectLst/>
+        </p:spPr>
+        <p:style>
+          <a:lnRef idx="1">
+            <a:schemeClr val="accent1"/>
+          </a:lnRef>
+          <a:fillRef idx="3">
+            <a:schemeClr val="accent1"/>
+          </a:fillRef>
+          <a:effectRef idx="2">
+            <a:schemeClr val="accent1"/>
+          </a:effectRef>
+          <a:fontRef idx="minor">
+            <a:schemeClr val="lt1"/>
+          </a:fontRef>
+        </p:style>
+        <p:txBody>
+          <a:bodyPr rtlCol="0" anchor="ctr"/>
+          <a:lstStyle/>
+          <a:p/>
+        </p:txBody>
+      </p:sp>
+      <p:sp>
+        <p:nvSpPr>
+          <p:cNvPr id="38" name="OnthulTxt 8"/>
+          <p:cNvSpPr txBox="1"/>
+          <p:nvPr/>
+        </p:nvSpPr>
+        <p:spPr>
+          <a:xfrm>
+            <a:off x="566928" y="6144768"/>
+            <a:ext cx="2489454" cy="237744"/>
+          </a:xfrm>
+          <a:prstGeom prst="rect">
+            <a:avLst/>
+          </a:prstGeom>
+          <a:noFill/>
+        </p:spPr>
+        <p:txBody>
+          <a:bodyPr wrap="square" anchor="ctr" lIns="45720" rIns="45720" tIns="27432" bIns="27432">
+            <a:normAutofit/>
+          </a:bodyPr>
+          <a:lstStyle/>
+          <a:p>
+            <a:pPr algn="l"/>
+            <a:r>
+              <a:rPr sz="850" b="1">
+                <a:solidFill>
+                  <a:srgbClr val="157355"/>
+                </a:solidFill>
+                <a:latin typeface="Inter"/>
+              </a:rPr>
+              <a:t>in Zaragoza</a:t>
+            </a:r>
+          </a:p>
+        </p:txBody>
+      </p:sp>
+      <p:sp>
+        <p:nvSpPr>
+          <p:cNvPr id="39" name="Tarjeta 9"/>
+          <p:cNvSpPr/>
+          <p:nvPr/>
+        </p:nvSpPr>
+        <p:spPr>
+          <a:xfrm>
+            <a:off x="3312414" y="5266944"/>
+            <a:ext cx="2708910" cy="1170432"/>
+          </a:xfrm>
+          <a:prstGeom prst="roundRect">
+            <a:avLst>
+              <a:gd name="adj" fmla="val 6000"/>
+            </a:avLst>
+          </a:prstGeom>
+          <a:solidFill>
+            <a:srgbClr val="FFFFFF"/>
+          </a:solidFill>
+          <a:ln w="12700">
+            <a:solidFill>
+              <a:srgbClr val="E4E3DE"/>
+            </a:solidFill>
+          </a:ln>
+          <a:effectLst/>
+        </p:spPr>
+        <p:style>
+          <a:lnRef idx="1">
+            <a:schemeClr val="accent1"/>
+          </a:lnRef>
+          <a:fillRef idx="3">
+            <a:schemeClr val="accent1"/>
+          </a:fillRef>
+          <a:effectRef idx="2">
+            <a:schemeClr val="accent1"/>
+          </a:effectRef>
+          <a:fontRef idx="minor">
+            <a:schemeClr val="lt1"/>
+          </a:fontRef>
+        </p:style>
+        <p:txBody>
+          <a:bodyPr rtlCol="0" anchor="ctr"/>
+          <a:lstStyle/>
+          <a:p/>
+        </p:txBody>
+      </p:sp>
+      <p:sp>
+        <p:nvSpPr>
+          <p:cNvPr id="40" name="TarjetaTxt 9"/>
+          <p:cNvSpPr txBox="1"/>
+          <p:nvPr/>
+        </p:nvSpPr>
+        <p:spPr>
+          <a:xfrm>
+            <a:off x="3403854" y="5321808"/>
+            <a:ext cx="2526030" cy="859536"/>
+          </a:xfrm>
+          <a:prstGeom prst="rect">
+            <a:avLst/>
+          </a:prstGeom>
+          <a:noFill/>
+        </p:spPr>
+        <p:txBody>
+          <a:bodyPr wrap="square" anchor="t" lIns="45720" rIns="45720" tIns="27432" bIns="27432">
+            <a:normAutofit/>
+          </a:bodyPr>
+          <a:lstStyle/>
+          <a:p>
+            <a:pPr algn="l"/>
+            <a:r>
+              <a:rPr sz="1100" b="1">
+                <a:solidFill>
+                  <a:srgbClr val="157355"/>
+                </a:solidFill>
+                <a:latin typeface="Bricolage Grotesque"/>
+              </a:rPr>
+              <a:t>X</a:t>
+            </a:r>
+          </a:p>
+          <a:p>
+            <a:pPr algn="l"/>
+            <a:r>
+              <a:rPr sz="1000">
+                <a:solidFill>
+                  <a:srgbClr val="20242E"/>
+                </a:solidFill>
+                <a:latin typeface="Inter"/>
+              </a:rPr>
+              <a:t>equis</a:t>
+            </a:r>
+          </a:p>
+        </p:txBody>
+      </p:sp>
+      <p:sp>
+        <p:nvSpPr>
+          <p:cNvPr id="41" name="Onthul 9"/>
+          <p:cNvSpPr/>
+          <p:nvPr/>
+        </p:nvSpPr>
+        <p:spPr>
+          <a:xfrm>
+            <a:off x="3403854" y="6144768"/>
+            <a:ext cx="2526030" cy="237744"/>
+          </a:xfrm>
+          <a:prstGeom prst="roundRect">
+            <a:avLst>
+              <a:gd name="adj" fmla="val 20000"/>
+            </a:avLst>
+          </a:prstGeom>
+          <a:solidFill>
+            <a:srgbClr val="E4F4EE"/>
+          </a:solidFill>
+          <a:ln>
+            <a:noFill/>
+          </a:ln>
+          <a:effectLst/>
+        </p:spPr>
+        <p:style>
+          <a:lnRef idx="1">
+            <a:schemeClr val="accent1"/>
+          </a:lnRef>
+          <a:fillRef idx="3">
+            <a:schemeClr val="accent1"/>
+          </a:fillRef>
+          <a:effectRef idx="2">
+            <a:schemeClr val="accent1"/>
+          </a:effectRef>
+          <a:fontRef idx="minor">
+            <a:schemeClr val="lt1"/>
+          </a:fontRef>
+        </p:style>
+        <p:txBody>
+          <a:bodyPr rtlCol="0" anchor="ctr"/>
+          <a:lstStyle/>
+          <a:p/>
+        </p:txBody>
+      </p:sp>
+      <p:sp>
+        <p:nvSpPr>
+          <p:cNvPr id="42" name="OnthulTxt 9"/>
+          <p:cNvSpPr txBox="1"/>
+          <p:nvPr/>
+        </p:nvSpPr>
+        <p:spPr>
+          <a:xfrm>
+            <a:off x="3422142" y="6144768"/>
+            <a:ext cx="2489454" cy="237744"/>
+          </a:xfrm>
+          <a:prstGeom prst="rect">
+            <a:avLst/>
+          </a:prstGeom>
+          <a:noFill/>
+        </p:spPr>
+        <p:txBody>
+          <a:bodyPr wrap="square" anchor="ctr" lIns="45720" rIns="45720" tIns="27432" bIns="27432">
+            <a:normAutofit/>
+          </a:bodyPr>
+          <a:lstStyle/>
+          <a:p>
+            <a:pPr algn="l"/>
+            <a:r>
+              <a:rPr sz="850" b="1">
+                <a:solidFill>
+                  <a:srgbClr val="157355"/>
+                </a:solidFill>
+                <a:latin typeface="Inter"/>
+              </a:rPr>
+              <a:t>in Xavier</a:t>
+            </a:r>
+          </a:p>
+        </p:txBody>
+      </p:sp>
+    </p:spTree>
+  </p:cSld>
+  <p:clrMapOvr>
+    <a:masterClrMapping/>
+  </p:clrMapOvr>
+  <p:timing>
+    <p:tnLst>
+      <p:par>
+        <p:cTn id="1" dur="indefinite" restart="never" nodeType="tmRoot">
+          <p:childTnLst>
+            <p:seq concurrent="1" nextAc="seek">
+              <p:cTn id="2" dur="indefinite" nodeType="mainSeq">
+                <p:childTnLst>
+                  <p:par>
+                    <p:cTn id="5" fill="hold">
+                      <p:stCondLst>
+                        <p:cond delay="indefinite"/>
+                      </p:stCondLst>
+                      <p:childTnLst>
+                        <p:par>
+                          <p:cTn id="6" fill="hold">
+                            <p:stCondLst>
+                              <p:cond delay="0"/>
+                            </p:stCondLst>
+                            <p:childTnLst>
+                              <p:par>
+                                <p:cTn id="7" presetID="10" presetClass="entr" presetSubtype="0" fill="hold" grpId="0" nodeType="clickEffect">
+                                  <p:stCondLst>
+                                    <p:cond delay="0"/>
+                                  </p:stCondLst>
+                                  <p:childTnLst>
+                                    <p:set>
+                                      <p:cBhvr>
+                                        <p:cTn id="8" dur="1" fill="hold">
+                                          <p:stCondLst>
+                                            <p:cond delay="0"/>
+                                          </p:stCondLst>
+                                        </p:cTn>
+                                        <p:tgtEl>
+                                          <p:spTgt spid="21"/>
+                                        </p:tgtEl>
+                                        <p:attrNameLst>
+                                          <p:attrName>style.visibility</p:attrName>
+                                        </p:attrNameLst>
+                                      </p:cBhvr>
+                                      <p:to>
+                                        <p:strVal val="visible"/>
+                                      </p:to>
+                                    </p:set>
+                                    <p:animEffect transition="in" filter="fade">
+                                      <p:cBhvr>
+                                        <p:cTn id="9" dur="500"/>
+                                        <p:tgtEl>
+                                          <p:spTgt spid="21"/>
+                                        </p:tgtEl>
+                                      </p:cBhvr>
+                                    </p:animEffect>
+                                  </p:childTnLst>
+                                </p:cTn>
+                              </p:par>
+                            </p:childTnLst>
+                          </p:cTn>
+                        </p:par>
+                      </p:childTnLst>
+                    </p:cTn>
+                  </p:par>
+                  <p:par>
+                    <p:cTn id="10" fill="hold">
+                      <p:stCondLst>
+                        <p:cond delay="indefinite"/>
+                      </p:stCondLst>
+                      <p:childTnLst>
+                        <p:par>
+                          <p:cTn id="11" fill="hold">
+                            <p:stCondLst>
+                              <p:cond delay="0"/>
+                            </p:stCondLst>
+                            <p:childTnLst>
+                              <p:par>
+                                <p:cTn id="12" presetID="10" presetClass="entr" presetSubtype="0" fill="hold" grpId="0" nodeType="clickEffect">
+                                  <p:stCondLst>
+                                    <p:cond delay="0"/>
+                                  </p:stCondLst>
+                                  <p:childTnLst>
+                                    <p:set>
+                                      <p:cBhvr>
+                                        <p:cTn id="13" dur="1" fill="hold">
+                                          <p:stCondLst>
+                                            <p:cond delay="0"/>
+                                          </p:stCondLst>
+                                        </p:cTn>
+                                        <p:tgtEl>
+                                          <p:spTgt spid="22"/>
+                                        </p:tgtEl>
+                                        <p:attrNameLst>
+                                          <p:attrName>style.visibility</p:attrName>
+                                        </p:attrNameLst>
+                                      </p:cBhvr>
+                                      <p:to>
+                                        <p:strVal val="visible"/>
+                                      </p:to>
+                                    </p:set>
+                                    <p:animEffect transition="in" filter="fade">
+                                      <p:cBhvr>
+                                        <p:cTn id="14" dur="500"/>
+                                        <p:tgtEl>
+                                          <p:spTgt spid="22"/>
+                                        </p:tgtEl>
+                                      </p:cBhvr>
+                                    </p:animEffect>
+                                  </p:childTnLst>
+                                </p:cTn>
+                              </p:par>
+                            </p:childTnLst>
+                          </p:cTn>
+                        </p:par>
+                      </p:childTnLst>
+                    </p:cTn>
+                  </p:par>
+                  <p:par>
+                    <p:cTn id="15" fill="hold">
+                      <p:stCondLst>
+                        <p:cond delay="indefinite"/>
+                      </p:stCondLst>
+                      <p:childTnLst>
+                        <p:par>
+                          <p:cTn id="16" fill="hold">
+                            <p:stCondLst>
+                              <p:cond delay="0"/>
+                            </p:stCondLst>
+                            <p:childTnLst>
+                              <p:par>
+                                <p:cTn id="17" presetID="10" presetClass="entr" presetSubtype="0" fill="hold" grpId="0" nodeType="clickEffect">
+                                  <p:stCondLst>
+                                    <p:cond delay="0"/>
+                                  </p:stCondLst>
+                                  <p:childTnLst>
+                                    <p:set>
+                                      <p:cBhvr>
+                                        <p:cTn id="18" dur="1" fill="hold">
+                                          <p:stCondLst>
+                                            <p:cond delay="0"/>
+                                          </p:stCondLst>
+                                        </p:cTn>
+                                        <p:tgtEl>
+                                          <p:spTgt spid="25"/>
+                                        </p:tgtEl>
+                                        <p:attrNameLst>
+                                          <p:attrName>style.visibility</p:attrName>
+                                        </p:attrNameLst>
+                                      </p:cBhvr>
+                                      <p:to>
+                                        <p:strVal val="visible"/>
+                                      </p:to>
+                                    </p:set>
+                                    <p:animEffect transition="in" filter="fade">
+                                      <p:cBhvr>
+                                        <p:cTn id="19" dur="500"/>
+                                        <p:tgtEl>
+                                          <p:spTgt spid="25"/>
+                                        </p:tgtEl>
+                                      </p:cBhvr>
+                                    </p:animEffect>
+                                  </p:childTnLst>
+                                </p:cTn>
+                              </p:par>
+                            </p:childTnLst>
+                          </p:cTn>
+                        </p:par>
+                      </p:childTnLst>
+                    </p:cTn>
+                  </p:par>
+                  <p:par>
+                    <p:cTn id="20" fill="hold">
+                      <p:stCondLst>
+                        <p:cond delay="indefinite"/>
+                      </p:stCondLst>
+                      <p:childTnLst>
+                        <p:par>
+                          <p:cTn id="21" fill="hold">
+                            <p:stCondLst>
+                              <p:cond delay="0"/>
+                            </p:stCondLst>
+                            <p:childTnLst>
+                              <p:par>
+                                <p:cTn id="22" presetID="10" presetClass="entr" presetSubtype="0" fill="hold" grpId="0" nodeType="clickEffect">
+                                  <p:stCondLst>
+                                    <p:cond delay="0"/>
+                                  </p:stCondLst>
+                                  <p:childTnLst>
+                                    <p:set>
+                                      <p:cBhvr>
+                                        <p:cTn id="23" dur="1" fill="hold">
+                                          <p:stCondLst>
+                                            <p:cond delay="0"/>
+                                          </p:stCondLst>
+                                        </p:cTn>
+                                        <p:tgtEl>
+                                          <p:spTgt spid="26"/>
+                                        </p:tgtEl>
+                                        <p:attrNameLst>
+                                          <p:attrName>style.visibility</p:attrName>
+                                        </p:attrNameLst>
+                                      </p:cBhvr>
+                                      <p:to>
+                                        <p:strVal val="visible"/>
+                                      </p:to>
+                                    </p:set>
+                                    <p:animEffect transition="in" filter="fade">
+                                      <p:cBhvr>
+                                        <p:cTn id="24" dur="500"/>
+                                        <p:tgtEl>
+                                          <p:spTgt spid="26"/>
+                                        </p:tgtEl>
+                                      </p:cBhvr>
+                                    </p:animEffect>
+                                  </p:childTnLst>
+                                </p:cTn>
+                              </p:par>
+                            </p:childTnLst>
+                          </p:cTn>
+                        </p:par>
+                      </p:childTnLst>
+                    </p:cTn>
+                  </p:par>
+                  <p:par>
+                    <p:cTn id="25" fill="hold">
+                      <p:stCondLst>
+                        <p:cond delay="indefinite"/>
+                      </p:stCondLst>
+                      <p:childTnLst>
+                        <p:par>
+                          <p:cTn id="26" fill="hold">
+                            <p:stCondLst>
+                              <p:cond delay="0"/>
+                            </p:stCondLst>
+                            <p:childTnLst>
+                              <p:par>
+                                <p:cTn id="27" presetID="10" presetClass="entr" presetSubtype="0" fill="hold" grpId="0" nodeType="clickEffect">
+                                  <p:stCondLst>
+                                    <p:cond delay="0"/>
+                                  </p:stCondLst>
+                                  <p:childTnLst>
+                                    <p:set>
+                                      <p:cBhvr>
+                                        <p:cTn id="28" dur="1" fill="hold">
+                                          <p:stCondLst>
+                                            <p:cond delay="0"/>
+                                          </p:stCondLst>
+                                        </p:cTn>
+                                        <p:tgtEl>
+                                          <p:spTgt spid="29"/>
+                                        </p:tgtEl>
+                                        <p:attrNameLst>
+                                          <p:attrName>style.visibility</p:attrName>
+                                        </p:attrNameLst>
+                                      </p:cBhvr>
+                                      <p:to>
+                                        <p:strVal val="visible"/>
+                                      </p:to>
+                                    </p:set>
+                                    <p:animEffect transition="in" filter="fade">
+                                      <p:cBhvr>
+                                        <p:cTn id="29" dur="500"/>
+                                        <p:tgtEl>
+                                          <p:spTgt spid="29"/>
+                                        </p:tgtEl>
+                                      </p:cBhvr>
+                                    </p:animEffect>
+                                  </p:childTnLst>
+                                </p:cTn>
+                              </p:par>
+                            </p:childTnLst>
+                          </p:cTn>
+                        </p:par>
+                      </p:childTnLst>
+                    </p:cTn>
+                  </p:par>
+                  <p:par>
+                    <p:cTn id="30" fill="hold">
+                      <p:stCondLst>
+                        <p:cond delay="indefinite"/>
+                      </p:stCondLst>
+                      <p:childTnLst>
+                        <p:par>
+                          <p:cTn id="31" fill="hold">
+                            <p:stCondLst>
+                              <p:cond delay="0"/>
+                            </p:stCondLst>
+                            <p:childTnLst>
+                              <p:par>
+                                <p:cTn id="32" presetID="10" presetClass="entr" presetSubtype="0" fill="hold" grpId="0" nodeType="clickEffect">
+                                  <p:stCondLst>
+                                    <p:cond delay="0"/>
+                                  </p:stCondLst>
+                                  <p:childTnLst>
+                                    <p:set>
+                                      <p:cBhvr>
+                                        <p:cTn id="33" dur="1" fill="hold">
+                                          <p:stCondLst>
+                                            <p:cond delay="0"/>
+                                          </p:stCondLst>
+                                        </p:cTn>
+                                        <p:tgtEl>
+                                          <p:spTgt spid="30"/>
+                                        </p:tgtEl>
+                                        <p:attrNameLst>
+                                          <p:attrName>style.visibility</p:attrName>
+                                        </p:attrNameLst>
+                                      </p:cBhvr>
+                                      <p:to>
+                                        <p:strVal val="visible"/>
+                                      </p:to>
+                                    </p:set>
+                                    <p:animEffect transition="in" filter="fade">
+                                      <p:cBhvr>
+                                        <p:cTn id="34" dur="500"/>
+                                        <p:tgtEl>
+                                          <p:spTgt spid="30"/>
+                                        </p:tgtEl>
+                                      </p:cBhvr>
+                                    </p:animEffect>
+                                  </p:childTnLst>
+                                </p:cTn>
+                              </p:par>
+                            </p:childTnLst>
+                          </p:cTn>
+                        </p:par>
+                      </p:childTnLst>
+                    </p:cTn>
+                  </p:par>
+                  <p:par>
+                    <p:cTn id="35" fill="hold">
+                      <p:stCondLst>
+                        <p:cond delay="indefinite"/>
+                      </p:stCondLst>
+                      <p:childTnLst>
+                        <p:par>
+                          <p:cTn id="36" fill="hold">
+                            <p:stCondLst>
+                              <p:cond delay="0"/>
+                            </p:stCondLst>
+                            <p:childTnLst>
+                              <p:par>
+                                <p:cTn id="37" presetID="10" presetClass="entr" presetSubtype="0" fill="hold" grpId="0" nodeType="clickEffect">
+                                  <p:stCondLst>
+                                    <p:cond delay="0"/>
+                                  </p:stCondLst>
+                                  <p:childTnLst>
+                                    <p:set>
+                                      <p:cBhvr>
+                                        <p:cTn id="38" dur="1" fill="hold">
+                                          <p:stCondLst>
+                                            <p:cond delay="0"/>
+                                          </p:stCondLst>
+                                        </p:cTn>
+                                        <p:tgtEl>
+                                          <p:spTgt spid="33"/>
+                                        </p:tgtEl>
+                                        <p:attrNameLst>
+                                          <p:attrName>style.visibility</p:attrName>
+                                        </p:attrNameLst>
+                                      </p:cBhvr>
+                                      <p:to>
+                                        <p:strVal val="visible"/>
+                                      </p:to>
+                                    </p:set>
+                                    <p:animEffect transition="in" filter="fade">
+                                      <p:cBhvr>
+                                        <p:cTn id="39" dur="500"/>
+                                        <p:tgtEl>
+                                          <p:spTgt spid="33"/>
+                                        </p:tgtEl>
+                                      </p:cBhvr>
+                                    </p:animEffect>
+                                  </p:childTnLst>
+                                </p:cTn>
+                              </p:par>
+                            </p:childTnLst>
+                          </p:cTn>
+                        </p:par>
+                      </p:childTnLst>
+                    </p:cTn>
+                  </p:par>
+                  <p:par>
+                    <p:cTn id="40" fill="hold">
+                      <p:stCondLst>
+                        <p:cond delay="indefinite"/>
+                      </p:stCondLst>
+                      <p:childTnLst>
+                        <p:par>
+                          <p:cTn id="41" fill="hold">
+                            <p:stCondLst>
+                              <p:cond delay="0"/>
+                            </p:stCondLst>
+                            <p:childTnLst>
+                              <p:par>
+                                <p:cTn id="42" presetID="10" presetClass="entr" presetSubtype="0" fill="hold" grpId="0" nodeType="clickEffect">
+                                  <p:stCondLst>
+                                    <p:cond delay="0"/>
+                                  </p:stCondLst>
+                                  <p:childTnLst>
+                                    <p:set>
+                                      <p:cBhvr>
+                                        <p:cTn id="43" dur="1" fill="hold">
+                                          <p:stCondLst>
+                                            <p:cond delay="0"/>
+                                          </p:stCondLst>
+                                        </p:cTn>
+                                        <p:tgtEl>
+                                          <p:spTgt spid="34"/>
+                                        </p:tgtEl>
+                                        <p:attrNameLst>
+                                          <p:attrName>style.visibility</p:attrName>
+                                        </p:attrNameLst>
+                                      </p:cBhvr>
+                                      <p:to>
+                                        <p:strVal val="visible"/>
+                                      </p:to>
+                                    </p:set>
+                                    <p:animEffect transition="in" filter="fade">
+                                      <p:cBhvr>
+                                        <p:cTn id="44" dur="500"/>
+                                        <p:tgtEl>
+                                          <p:spTgt spid="34"/>
+                                        </p:tgtEl>
+                                      </p:cBhvr>
+                                    </p:animEffect>
+                                  </p:childTnLst>
+                                </p:cTn>
+                              </p:par>
+                            </p:childTnLst>
+                          </p:cTn>
+                        </p:par>
+                      </p:childTnLst>
+                    </p:cTn>
+                  </p:par>
+                  <p:par>
+                    <p:cTn id="45" fill="hold">
+                      <p:stCondLst>
+                        <p:cond delay="indefinite"/>
+                      </p:stCondLst>
+                      <p:childTnLst>
+                        <p:par>
+                          <p:cTn id="46" fill="hold">
+                            <p:stCondLst>
+                              <p:cond delay="0"/>
+                            </p:stCondLst>
+                            <p:childTnLst>
+                              <p:par>
+                                <p:cTn id="47" presetID="10" presetClass="entr" presetSubtype="0" fill="hold" grpId="0" nodeType="clickEffect">
+                                  <p:stCondLst>
+                                    <p:cond delay="0"/>
+                                  </p:stCondLst>
+                                  <p:childTnLst>
+                                    <p:set>
+                                      <p:cBhvr>
+                                        <p:cTn id="48" dur="1" fill="hold">
+                                          <p:stCondLst>
+                                            <p:cond delay="0"/>
+                                          </p:stCondLst>
+                                        </p:cTn>
+                                        <p:tgtEl>
+                                          <p:spTgt spid="37"/>
+                                        </p:tgtEl>
+                                        <p:attrNameLst>
+                                          <p:attrName>style.visibility</p:attrName>
+                                        </p:attrNameLst>
+                                      </p:cBhvr>
+                                      <p:to>
+                                        <p:strVal val="visible"/>
+                                      </p:to>
+                                    </p:set>
+                                    <p:animEffect transition="in" filter="fade">
+                                      <p:cBhvr>
+                                        <p:cTn id="49" dur="500"/>
+                                        <p:tgtEl>
+                                          <p:spTgt spid="37"/>
+                                        </p:tgtEl>
+                                      </p:cBhvr>
+                                    </p:animEffect>
+                                  </p:childTnLst>
+                                </p:cTn>
+                              </p:par>
+                            </p:childTnLst>
+                          </p:cTn>
+                        </p:par>
+                      </p:childTnLst>
+                    </p:cTn>
+                  </p:par>
+                  <p:par>
+                    <p:cTn id="50" fill="hold">
+                      <p:stCondLst>
+                        <p:cond delay="indefinite"/>
+                      </p:stCondLst>
+                      <p:childTnLst>
+                        <p:par>
+                          <p:cTn id="51" fill="hold">
+                            <p:stCondLst>
+                              <p:cond delay="0"/>
+                            </p:stCondLst>
+                            <p:childTnLst>
+                              <p:par>
+                                <p:cTn id="52" presetID="10" presetClass="entr" presetSubtype="0" fill="hold" grpId="0" nodeType="clickEffect">
+                                  <p:stCondLst>
+                                    <p:cond delay="0"/>
+                                  </p:stCondLst>
+                                  <p:childTnLst>
+                                    <p:set>
+                                      <p:cBhvr>
+                                        <p:cTn id="53" dur="1" fill="hold">
+                                          <p:stCondLst>
+                                            <p:cond delay="0"/>
+                                          </p:stCondLst>
+                                        </p:cTn>
+                                        <p:tgtEl>
+                                          <p:spTgt spid="38"/>
+                                        </p:tgtEl>
+                                        <p:attrNameLst>
+                                          <p:attrName>style.visibility</p:attrName>
+                                        </p:attrNameLst>
+                                      </p:cBhvr>
+                                      <p:to>
+                                        <p:strVal val="visible"/>
+                                      </p:to>
+                                    </p:set>
+                                    <p:animEffect transition="in" filter="fade">
+                                      <p:cBhvr>
+                                        <p:cTn id="54" dur="500"/>
+                                        <p:tgtEl>
+                                          <p:spTgt spid="38"/>
+                                        </p:tgtEl>
+                                      </p:cBhvr>
+                                    </p:animEffect>
+                                  </p:childTnLst>
+                                </p:cTn>
+                              </p:par>
+                            </p:childTnLst>
+                          </p:cTn>
+                        </p:par>
+                      </p:childTnLst>
+                    </p:cTn>
+                  </p:par>
+                  <p:par>
+                    <p:cTn id="55" fill="hold">
+                      <p:stCondLst>
+                        <p:cond delay="indefinite"/>
+                      </p:stCondLst>
+                      <p:childTnLst>
+                        <p:par>
+                          <p:cTn id="56" fill="hold">
+                            <p:stCondLst>
+                              <p:cond delay="0"/>
+                            </p:stCondLst>
+                            <p:childTnLst>
+                              <p:par>
+                                <p:cTn id="57" presetID="10" presetClass="entr" presetSubtype="0" fill="hold" grpId="0" nodeType="clickEffect">
+                                  <p:stCondLst>
+                                    <p:cond delay="0"/>
+                                  </p:stCondLst>
+                                  <p:childTnLst>
+                                    <p:set>
+                                      <p:cBhvr>
+                                        <p:cTn id="58" dur="1" fill="hold">
+                                          <p:stCondLst>
+                                            <p:cond delay="0"/>
+                                          </p:stCondLst>
+                                        </p:cTn>
+                                        <p:tgtEl>
+                                          <p:spTgt spid="41"/>
+                                        </p:tgtEl>
+                                        <p:attrNameLst>
+                                          <p:attrName>style.visibility</p:attrName>
+                                        </p:attrNameLst>
+                                      </p:cBhvr>
+                                      <p:to>
+                                        <p:strVal val="visible"/>
+                                      </p:to>
+                                    </p:set>
+                                    <p:animEffect transition="in" filter="fade">
+                                      <p:cBhvr>
+                                        <p:cTn id="59" dur="500"/>
+                                        <p:tgtEl>
+                                          <p:spTgt spid="41"/>
+                                        </p:tgtEl>
+                                      </p:cBhvr>
+                                    </p:animEffect>
+                                  </p:childTnLst>
+                                </p:cTn>
+                              </p:par>
+                            </p:childTnLst>
+                          </p:cTn>
+                        </p:par>
+                      </p:childTnLst>
+                    </p:cTn>
+                  </p:par>
+                  <p:par>
+                    <p:cTn id="60" fill="hold">
+                      <p:stCondLst>
+                        <p:cond delay="indefinite"/>
+                      </p:stCondLst>
+                      <p:childTnLst>
+                        <p:par>
+                          <p:cTn id="61" fill="hold">
+                            <p:stCondLst>
+                              <p:cond delay="0"/>
+                            </p:stCondLst>
+                            <p:childTnLst>
+                              <p:par>
+                                <p:cTn id="62" presetID="10" presetClass="entr" presetSubtype="0" fill="hold" grpId="0" nodeType="clickEffect">
+                                  <p:stCondLst>
+                                    <p:cond delay="0"/>
+                                  </p:stCondLst>
+                                  <p:childTnLst>
+                                    <p:set>
+                                      <p:cBhvr>
+                                        <p:cTn id="63" dur="1" fill="hold">
+                                          <p:stCondLst>
+                                            <p:cond delay="0"/>
+                                          </p:stCondLst>
+                                        </p:cTn>
+                                        <p:tgtEl>
+                                          <p:spTgt spid="42"/>
+                                        </p:tgtEl>
+                                        <p:attrNameLst>
+                                          <p:attrName>style.visibility</p:attrName>
+                                        </p:attrNameLst>
+                                      </p:cBhvr>
+                                      <p:to>
+                                        <p:strVal val="visible"/>
+                                      </p:to>
+                                    </p:set>
+                                    <p:animEffect transition="in" filter="fade">
+                                      <p:cBhvr>
+                                        <p:cTn id="64" dur="500"/>
+                                        <p:tgtEl>
+                                          <p:spTgt spid="42"/>
+                                        </p:tgtEl>
+                                      </p:cBhvr>
+                                    </p:animEffect>
+                                  </p:childTnLst>
+                                </p:cTn>
+                              </p:par>
+                            </p:childTnLst>
+                          </p:cTn>
+                        </p:par>
+                      </p:childTnLst>
+                    </p:cTn>
+                  </p:par>
+                </p:childTnLst>
+              </p:cTn>
+              <p:prevCondLst>
+                <p:cond evt="onPrev" delay="0">
+                  <p:tgtEl>
+                    <p:sldTgt/>
+                  </p:tgtEl>
+                </p:cond>
+              </p:prevCondLst>
+              <p:nextCondLst>
+                <p:cond evt="onNext" delay="0">
+                  <p:tgtEl>
+                    <p:sldTgt/>
+                  </p:tgtEl>
+                </p:cond>
+              </p:nextCondLst>
+            </p:seq>
+          </p:childTnLst>
+        </p:cTn>
+      </p:par>
+    </p:tnLst>
+  </p:timing>
 </p:sld>
 </file>
 
